--- a/Introduccion a la Ingenieria/Clases/Clase 6 - Analisis de problemas tecnologicos del entorno/Presentacion.pptx
+++ b/Introduccion a la Ingenieria/Clases/Clase 6 - Analisis de problemas tecnologicos del entorno/Presentacion.pptx
@@ -18,6 +18,16 @@
     <p:sldId id="266" r:id="rId17"/>
     <p:sldId id="267" r:id="rId18"/>
     <p:sldId id="268" r:id="rId19"/>
+    <p:sldId id="269" r:id="rId20"/>
+    <p:sldId id="270" r:id="rId21"/>
+    <p:sldId id="271" r:id="rId22"/>
+    <p:sldId id="272" r:id="rId23"/>
+    <p:sldId id="273" r:id="rId24"/>
+    <p:sldId id="274" r:id="rId25"/>
+    <p:sldId id="275" r:id="rId26"/>
+    <p:sldId id="276" r:id="rId27"/>
+    <p:sldId id="277" r:id="rId28"/>
+    <p:sldId id="278" r:id="rId29"/>
   </p:sldIdLst>
   <p:sldSz cx="12191695" cy="6858000" type="screen4x3"/>
   <p:notesSz cx="6858000" cy="9144000"/>
@@ -3512,7 +3522,7 @@
         <p:spPr>
           <a:xfrm>
             <a:off x="0" y="0"/>
-            <a:ext cx="12191695" cy="1170432"/>
+            <a:ext cx="12191695" cy="960120"/>
           </a:xfrm>
           <a:prstGeom prst="rect">
             <a:avLst/>
@@ -3554,7 +3564,7 @@
         </p:nvSpPr>
         <p:spPr>
           <a:xfrm>
-            <a:off x="0" y="1170432"/>
+            <a:off x="0" y="960120"/>
             <a:ext cx="12191695" cy="41148"/>
           </a:xfrm>
           <a:prstGeom prst="rect">
@@ -3598,7 +3608,7 @@
         <p:spPr>
           <a:xfrm>
             <a:off x="457200" y="164592"/>
-            <a:ext cx="11277295" cy="384048"/>
+            <a:ext cx="11277295" cy="502920"/>
           </a:xfrm>
           <a:prstGeom prst="rect">
             <a:avLst/>
@@ -3618,7 +3628,7 @@
                 </a:solidFill>
                 <a:latin typeface="Calibri"/>
               </a:rPr>
-              <a:t>Taller de hoy: Ficha del problema del proyecto</a:t>
+              <a:t>La pregunta de entrada: la solución disfrazada de problema</a:t>
             </a:r>
           </a:p>
         </p:txBody>
@@ -3631,8 +3641,8 @@
         </p:nvSpPr>
         <p:spPr>
           <a:xfrm>
-            <a:off x="457200" y="566928"/>
-            <a:ext cx="11277295" cy="411480"/>
+            <a:off x="457200" y="1170432"/>
+            <a:ext cx="11277295" cy="5230368"/>
           </a:xfrm>
           <a:prstGeom prst="rect">
             <a:avLst/>
@@ -3645,999 +3655,124 @@
           </a:bodyPr>
           <a:lstStyle/>
           <a:p>
-            <a:r>
-              <a:rPr sz="1400" b="0" i="0">
-                <a:solidFill>
-                  <a:srgbClr val="B8D8EE"/>
-                </a:solidFill>
-                <a:latin typeface="Calibri"/>
-              </a:rPr>
-              <a:t>17 min en equipos · cada equipo, su propio problema · ficha del problema + árbol de causas</a:t>
-            </a:r>
-          </a:p>
-        </p:txBody>
-      </p:sp>
-      <p:sp>
-        <p:nvSpPr>
-          <p:cNvPr id="6" name="Rounded Rectangle 5"/>
-          <p:cNvSpPr/>
-          <p:nvPr/>
-        </p:nvSpPr>
-        <p:spPr>
-          <a:xfrm>
-            <a:off x="457200" y="1472184"/>
-            <a:ext cx="11277295" cy="566928"/>
-          </a:xfrm>
-          <a:prstGeom prst="roundRect">
-            <a:avLst>
-              <a:gd name="adj" fmla="val 12000"/>
-            </a:avLst>
-          </a:prstGeom>
-          <a:solidFill>
-            <a:srgbClr val="F2F2F2"/>
-          </a:solidFill>
-          <a:ln>
-            <a:noFill/>
-          </a:ln>
-        </p:spPr>
-        <p:style>
-          <a:lnRef idx="1">
-            <a:schemeClr val="accent1"/>
-          </a:lnRef>
-          <a:fillRef idx="3">
-            <a:schemeClr val="accent1"/>
-          </a:fillRef>
-          <a:effectRef idx="2">
-            <a:schemeClr val="accent1"/>
-          </a:effectRef>
-          <a:fontRef idx="minor">
-            <a:schemeClr val="lt1"/>
-          </a:fontRef>
-        </p:style>
-        <p:txBody>
-          <a:bodyPr rtlCol="0" anchor="ctr"/>
-          <a:lstStyle/>
-          <a:p>
-            <a:pPr algn="ctr"/>
-          </a:p>
-        </p:txBody>
-      </p:sp>
-      <p:sp>
-        <p:nvSpPr>
-          <p:cNvPr id="7" name="Rectangle 6"/>
-          <p:cNvSpPr/>
-          <p:nvPr/>
-        </p:nvSpPr>
-        <p:spPr>
-          <a:xfrm>
-            <a:off x="640080" y="1618487"/>
-            <a:ext cx="274320" cy="274320"/>
-          </a:xfrm>
-          <a:prstGeom prst="rect">
-            <a:avLst/>
-          </a:prstGeom>
-          <a:solidFill>
-            <a:srgbClr val="FFFFFF"/>
-          </a:solidFill>
-          <a:ln>
-            <a:solidFill>
-              <a:srgbClr val="333333"/>
-            </a:solidFill>
-          </a:ln>
-        </p:spPr>
-        <p:style>
-          <a:lnRef idx="1">
-            <a:schemeClr val="accent1"/>
-          </a:lnRef>
-          <a:fillRef idx="3">
-            <a:schemeClr val="accent1"/>
-          </a:fillRef>
-          <a:effectRef idx="2">
-            <a:schemeClr val="accent1"/>
-          </a:effectRef>
-          <a:fontRef idx="minor">
-            <a:schemeClr val="lt1"/>
-          </a:fontRef>
-        </p:style>
-        <p:txBody>
-          <a:bodyPr rtlCol="0" anchor="ctr"/>
-          <a:lstStyle/>
-          <a:p>
-            <a:pPr algn="ctr"/>
-          </a:p>
-        </p:txBody>
-      </p:sp>
-      <p:sp>
-        <p:nvSpPr>
-          <p:cNvPr id="8" name="Rectangle 7"/>
-          <p:cNvSpPr/>
-          <p:nvPr/>
-        </p:nvSpPr>
-        <p:spPr>
-          <a:xfrm>
-            <a:off x="640080" y="1618487"/>
-            <a:ext cx="73152" cy="274320"/>
-          </a:xfrm>
-          <a:prstGeom prst="rect">
-            <a:avLst/>
-          </a:prstGeom>
-          <a:solidFill>
-            <a:srgbClr val="269CCB"/>
-          </a:solidFill>
-          <a:ln>
-            <a:noFill/>
-          </a:ln>
-        </p:spPr>
-        <p:style>
-          <a:lnRef idx="1">
-            <a:schemeClr val="accent1"/>
-          </a:lnRef>
-          <a:fillRef idx="3">
-            <a:schemeClr val="accent1"/>
-          </a:fillRef>
-          <a:effectRef idx="2">
-            <a:schemeClr val="accent1"/>
-          </a:effectRef>
-          <a:fontRef idx="minor">
-            <a:schemeClr val="lt1"/>
-          </a:fontRef>
-        </p:style>
-        <p:txBody>
-          <a:bodyPr rtlCol="0" anchor="ctr"/>
-          <a:lstStyle/>
-          <a:p>
-            <a:pPr algn="ctr"/>
-          </a:p>
-        </p:txBody>
-      </p:sp>
-      <p:sp>
-        <p:nvSpPr>
-          <p:cNvPr id="9" name="TextBox 8"/>
-          <p:cNvSpPr txBox="1"/>
-          <p:nvPr/>
-        </p:nvSpPr>
-        <p:spPr>
-          <a:xfrm>
-            <a:off x="1097280" y="1563624"/>
-            <a:ext cx="10362895" cy="402336"/>
-          </a:xfrm>
-          <a:prstGeom prst="rect">
-            <a:avLst/>
-          </a:prstGeom>
-          <a:noFill/>
-        </p:spPr>
-        <p:txBody>
-          <a:bodyPr wrap="square" anchor="ctr"/>
-          <a:lstStyle/>
-          <a:p>
-            <a:r>
-              <a:rPr sz="1500" b="1" i="0">
-                <a:solidFill>
-                  <a:srgbClr val="333333"/>
-                </a:solidFill>
-                <a:latin typeface="Calibri"/>
-              </a:rPr>
-              <a:t>EL PROBLEMA EN UNA FRASE</a:t>
-            </a:r>
-            <a:r>
-              <a:rPr sz="1500" b="0" i="0">
-                <a:solidFill>
-                  <a:srgbClr val="333333"/>
-                </a:solidFill>
-                <a:latin typeface="Calibri"/>
-              </a:rPr>
-              <a:t> — Una sola frase con la fórmula: </a:t>
-            </a:r>
-            <a:r>
-              <a:rPr sz="1500" b="1" i="0">
-                <a:solidFill>
-                  <a:srgbClr val="333333"/>
-                </a:solidFill>
-                <a:latin typeface="Calibri"/>
-              </a:rPr>
-              <a:t>a quién le pasa qué, con qué consecuencia</a:t>
-            </a:r>
-            <a:r>
-              <a:rPr sz="1500" b="0" i="0">
-                <a:solidFill>
-                  <a:srgbClr val="333333"/>
-                </a:solidFill>
-                <a:latin typeface="Calibri"/>
-              </a:rPr>
-              <a:t>. Sin mencionar ninguna tecnología ni ninguna solución.</a:t>
-            </a:r>
-          </a:p>
-        </p:txBody>
-      </p:sp>
-      <p:sp>
-        <p:nvSpPr>
-          <p:cNvPr id="10" name="Rounded Rectangle 9"/>
-          <p:cNvSpPr/>
-          <p:nvPr/>
-        </p:nvSpPr>
-        <p:spPr>
-          <a:xfrm>
-            <a:off x="457200" y="2148839"/>
-            <a:ext cx="11277295" cy="566928"/>
-          </a:xfrm>
-          <a:prstGeom prst="roundRect">
-            <a:avLst>
-              <a:gd name="adj" fmla="val 12000"/>
-            </a:avLst>
-          </a:prstGeom>
-          <a:solidFill>
-            <a:srgbClr val="F2F2F2"/>
-          </a:solidFill>
-          <a:ln>
-            <a:noFill/>
-          </a:ln>
-        </p:spPr>
-        <p:style>
-          <a:lnRef idx="1">
-            <a:schemeClr val="accent1"/>
-          </a:lnRef>
-          <a:fillRef idx="3">
-            <a:schemeClr val="accent1"/>
-          </a:fillRef>
-          <a:effectRef idx="2">
-            <a:schemeClr val="accent1"/>
-          </a:effectRef>
-          <a:fontRef idx="minor">
-            <a:schemeClr val="lt1"/>
-          </a:fontRef>
-        </p:style>
-        <p:txBody>
-          <a:bodyPr rtlCol="0" anchor="ctr"/>
-          <a:lstStyle/>
-          <a:p>
-            <a:pPr algn="ctr"/>
-          </a:p>
-        </p:txBody>
-      </p:sp>
-      <p:sp>
-        <p:nvSpPr>
-          <p:cNvPr id="11" name="Rectangle 10"/>
-          <p:cNvSpPr/>
-          <p:nvPr/>
-        </p:nvSpPr>
-        <p:spPr>
-          <a:xfrm>
-            <a:off x="640080" y="2295144"/>
-            <a:ext cx="274320" cy="274320"/>
-          </a:xfrm>
-          <a:prstGeom prst="rect">
-            <a:avLst/>
-          </a:prstGeom>
-          <a:solidFill>
-            <a:srgbClr val="FFFFFF"/>
-          </a:solidFill>
-          <a:ln>
-            <a:solidFill>
-              <a:srgbClr val="333333"/>
-            </a:solidFill>
-          </a:ln>
-        </p:spPr>
-        <p:style>
-          <a:lnRef idx="1">
-            <a:schemeClr val="accent1"/>
-          </a:lnRef>
-          <a:fillRef idx="3">
-            <a:schemeClr val="accent1"/>
-          </a:fillRef>
-          <a:effectRef idx="2">
-            <a:schemeClr val="accent1"/>
-          </a:effectRef>
-          <a:fontRef idx="minor">
-            <a:schemeClr val="lt1"/>
-          </a:fontRef>
-        </p:style>
-        <p:txBody>
-          <a:bodyPr rtlCol="0" anchor="ctr"/>
-          <a:lstStyle/>
-          <a:p>
-            <a:pPr algn="ctr"/>
-          </a:p>
-        </p:txBody>
-      </p:sp>
-      <p:sp>
-        <p:nvSpPr>
-          <p:cNvPr id="12" name="Rectangle 11"/>
-          <p:cNvSpPr/>
-          <p:nvPr/>
-        </p:nvSpPr>
-        <p:spPr>
-          <a:xfrm>
-            <a:off x="640080" y="2295144"/>
-            <a:ext cx="73152" cy="274320"/>
-          </a:xfrm>
-          <a:prstGeom prst="rect">
-            <a:avLst/>
-          </a:prstGeom>
-          <a:solidFill>
-            <a:srgbClr val="269CCB"/>
-          </a:solidFill>
-          <a:ln>
-            <a:noFill/>
-          </a:ln>
-        </p:spPr>
-        <p:style>
-          <a:lnRef idx="1">
-            <a:schemeClr val="accent1"/>
-          </a:lnRef>
-          <a:fillRef idx="3">
-            <a:schemeClr val="accent1"/>
-          </a:fillRef>
-          <a:effectRef idx="2">
-            <a:schemeClr val="accent1"/>
-          </a:effectRef>
-          <a:fontRef idx="minor">
-            <a:schemeClr val="lt1"/>
-          </a:fontRef>
-        </p:style>
-        <p:txBody>
-          <a:bodyPr rtlCol="0" anchor="ctr"/>
-          <a:lstStyle/>
-          <a:p>
-            <a:pPr algn="ctr"/>
-          </a:p>
-        </p:txBody>
-      </p:sp>
-      <p:sp>
-        <p:nvSpPr>
-          <p:cNvPr id="13" name="TextBox 12"/>
-          <p:cNvSpPr txBox="1"/>
-          <p:nvPr/>
-        </p:nvSpPr>
-        <p:spPr>
-          <a:xfrm>
-            <a:off x="1097280" y="2240279"/>
-            <a:ext cx="10362895" cy="402336"/>
-          </a:xfrm>
-          <a:prstGeom prst="rect">
-            <a:avLst/>
-          </a:prstGeom>
-          <a:noFill/>
-        </p:spPr>
-        <p:txBody>
-          <a:bodyPr wrap="square" anchor="ctr"/>
-          <a:lstStyle/>
-          <a:p>
-            <a:r>
-              <a:rPr sz="1500" b="1" i="0">
-                <a:solidFill>
-                  <a:srgbClr val="333333"/>
-                </a:solidFill>
-                <a:latin typeface="Calibri"/>
-              </a:rPr>
-              <a:t>LA LÍNEA BASE</a:t>
-            </a:r>
-            <a:r>
-              <a:rPr sz="1500" b="0" i="0">
-                <a:solidFill>
-                  <a:srgbClr val="333333"/>
-                </a:solidFill>
-                <a:latin typeface="Calibri"/>
-              </a:rPr>
-              <a:t> — Una cifra que describa el problema </a:t>
-            </a:r>
-            <a:r>
-              <a:rPr sz="1500" b="1" i="0">
-                <a:solidFill>
-                  <a:srgbClr val="333333"/>
-                </a:solidFill>
-                <a:latin typeface="Calibri"/>
-              </a:rPr>
-              <a:t>hoy</a:t>
-            </a:r>
-            <a:r>
-              <a:rPr sz="1500" b="0" i="0">
-                <a:solidFill>
-                  <a:srgbClr val="333333"/>
-                </a:solidFill>
-                <a:latin typeface="Calibri"/>
-              </a:rPr>
-              <a:t>, antes de que ustedes toquen nada, más </a:t>
-            </a:r>
-            <a:r>
-              <a:rPr sz="1500" b="1" i="0">
-                <a:solidFill>
-                  <a:srgbClr val="333333"/>
-                </a:solidFill>
-                <a:latin typeface="Calibri"/>
-              </a:rPr>
-              <a:t>cómo la obtuvieron</a:t>
-            </a:r>
-            <a:r>
-              <a:rPr sz="1500" b="0" i="0">
-                <a:solidFill>
-                  <a:srgbClr val="333333"/>
-                </a:solidFill>
-                <a:latin typeface="Calibri"/>
-              </a:rPr>
-              <a:t> y cuándo. Si es estimación, escriban «estimado».</a:t>
-            </a:r>
-          </a:p>
-        </p:txBody>
-      </p:sp>
-      <p:sp>
-        <p:nvSpPr>
-          <p:cNvPr id="14" name="Rounded Rectangle 13"/>
-          <p:cNvSpPr/>
-          <p:nvPr/>
-        </p:nvSpPr>
-        <p:spPr>
-          <a:xfrm>
-            <a:off x="457200" y="2825496"/>
-            <a:ext cx="11277295" cy="566928"/>
-          </a:xfrm>
-          <a:prstGeom prst="roundRect">
-            <a:avLst>
-              <a:gd name="adj" fmla="val 12000"/>
-            </a:avLst>
-          </a:prstGeom>
-          <a:solidFill>
-            <a:srgbClr val="F2F2F2"/>
-          </a:solidFill>
-          <a:ln>
-            <a:noFill/>
-          </a:ln>
-        </p:spPr>
-        <p:style>
-          <a:lnRef idx="1">
-            <a:schemeClr val="accent1"/>
-          </a:lnRef>
-          <a:fillRef idx="3">
-            <a:schemeClr val="accent1"/>
-          </a:fillRef>
-          <a:effectRef idx="2">
-            <a:schemeClr val="accent1"/>
-          </a:effectRef>
-          <a:fontRef idx="minor">
-            <a:schemeClr val="lt1"/>
-          </a:fontRef>
-        </p:style>
-        <p:txBody>
-          <a:bodyPr rtlCol="0" anchor="ctr"/>
-          <a:lstStyle/>
-          <a:p>
-            <a:pPr algn="ctr"/>
-          </a:p>
-        </p:txBody>
-      </p:sp>
-      <p:sp>
-        <p:nvSpPr>
-          <p:cNvPr id="15" name="Rectangle 14"/>
-          <p:cNvSpPr/>
-          <p:nvPr/>
-        </p:nvSpPr>
-        <p:spPr>
-          <a:xfrm>
-            <a:off x="640080" y="2971800"/>
-            <a:ext cx="274320" cy="274320"/>
-          </a:xfrm>
-          <a:prstGeom prst="rect">
-            <a:avLst/>
-          </a:prstGeom>
-          <a:solidFill>
-            <a:srgbClr val="FFFFFF"/>
-          </a:solidFill>
-          <a:ln>
-            <a:solidFill>
-              <a:srgbClr val="333333"/>
-            </a:solidFill>
-          </a:ln>
-        </p:spPr>
-        <p:style>
-          <a:lnRef idx="1">
-            <a:schemeClr val="accent1"/>
-          </a:lnRef>
-          <a:fillRef idx="3">
-            <a:schemeClr val="accent1"/>
-          </a:fillRef>
-          <a:effectRef idx="2">
-            <a:schemeClr val="accent1"/>
-          </a:effectRef>
-          <a:fontRef idx="minor">
-            <a:schemeClr val="lt1"/>
-          </a:fontRef>
-        </p:style>
-        <p:txBody>
-          <a:bodyPr rtlCol="0" anchor="ctr"/>
-          <a:lstStyle/>
-          <a:p>
-            <a:pPr algn="ctr"/>
-          </a:p>
-        </p:txBody>
-      </p:sp>
-      <p:sp>
-        <p:nvSpPr>
-          <p:cNvPr id="16" name="Rectangle 15"/>
-          <p:cNvSpPr/>
-          <p:nvPr/>
-        </p:nvSpPr>
-        <p:spPr>
-          <a:xfrm>
-            <a:off x="640080" y="2971800"/>
-            <a:ext cx="73152" cy="274320"/>
-          </a:xfrm>
-          <a:prstGeom prst="rect">
-            <a:avLst/>
-          </a:prstGeom>
-          <a:solidFill>
-            <a:srgbClr val="269CCB"/>
-          </a:solidFill>
-          <a:ln>
-            <a:noFill/>
-          </a:ln>
-        </p:spPr>
-        <p:style>
-          <a:lnRef idx="1">
-            <a:schemeClr val="accent1"/>
-          </a:lnRef>
-          <a:fillRef idx="3">
-            <a:schemeClr val="accent1"/>
-          </a:fillRef>
-          <a:effectRef idx="2">
-            <a:schemeClr val="accent1"/>
-          </a:effectRef>
-          <a:fontRef idx="minor">
-            <a:schemeClr val="lt1"/>
-          </a:fontRef>
-        </p:style>
-        <p:txBody>
-          <a:bodyPr rtlCol="0" anchor="ctr"/>
-          <a:lstStyle/>
-          <a:p>
-            <a:pPr algn="ctr"/>
-          </a:p>
-        </p:txBody>
-      </p:sp>
-      <p:sp>
-        <p:nvSpPr>
-          <p:cNvPr id="17" name="TextBox 16"/>
-          <p:cNvSpPr txBox="1"/>
-          <p:nvPr/>
-        </p:nvSpPr>
-        <p:spPr>
-          <a:xfrm>
-            <a:off x="1097280" y="2916936"/>
-            <a:ext cx="10362895" cy="402336"/>
-          </a:xfrm>
-          <a:prstGeom prst="rect">
-            <a:avLst/>
-          </a:prstGeom>
-          <a:noFill/>
-        </p:spPr>
-        <p:txBody>
-          <a:bodyPr wrap="square" anchor="ctr"/>
-          <a:lstStyle/>
-          <a:p>
-            <a:r>
-              <a:rPr sz="1500" b="1" i="0">
-                <a:solidFill>
-                  <a:srgbClr val="333333"/>
-                </a:solidFill>
-                <a:latin typeface="Calibri"/>
-              </a:rPr>
-              <a:t>EL ÁRBOL DE CAUSAS</a:t>
-            </a:r>
-            <a:r>
-              <a:rPr sz="1500" b="0" i="0">
-                <a:solidFill>
-                  <a:srgbClr val="333333"/>
-                </a:solidFill>
-                <a:latin typeface="Calibri"/>
-              </a:rPr>
-              <a:t> — En Excalidraw: el problema en el tronco, los efectos arriba, dos o tres causas directas abajo y el segundo nivel de cada una. Marquen con un símbolo las causas que </a:t>
-            </a:r>
-            <a:r>
-              <a:rPr sz="1500" b="1" i="0">
-                <a:solidFill>
-                  <a:srgbClr val="333333"/>
-                </a:solidFill>
-                <a:latin typeface="Calibri"/>
-              </a:rPr>
-              <a:t>no</a:t>
-            </a:r>
-            <a:r>
-              <a:rPr sz="1500" b="0" i="0">
-                <a:solidFill>
-                  <a:srgbClr val="333333"/>
-                </a:solidFill>
-                <a:latin typeface="Calibri"/>
-              </a:rPr>
-              <a:t> pueden cambiar (restricciones).</a:t>
-            </a:r>
-          </a:p>
-        </p:txBody>
-      </p:sp>
-      <p:sp>
-        <p:nvSpPr>
-          <p:cNvPr id="18" name="Rounded Rectangle 17"/>
-          <p:cNvSpPr/>
-          <p:nvPr/>
-        </p:nvSpPr>
-        <p:spPr>
-          <a:xfrm>
-            <a:off x="457200" y="3502152"/>
-            <a:ext cx="11277295" cy="566928"/>
-          </a:xfrm>
-          <a:prstGeom prst="roundRect">
-            <a:avLst>
-              <a:gd name="adj" fmla="val 12000"/>
-            </a:avLst>
-          </a:prstGeom>
-          <a:solidFill>
-            <a:srgbClr val="F2F2F2"/>
-          </a:solidFill>
-          <a:ln>
-            <a:noFill/>
-          </a:ln>
-        </p:spPr>
-        <p:style>
-          <a:lnRef idx="1">
-            <a:schemeClr val="accent1"/>
-          </a:lnRef>
-          <a:fillRef idx="3">
-            <a:schemeClr val="accent1"/>
-          </a:fillRef>
-          <a:effectRef idx="2">
-            <a:schemeClr val="accent1"/>
-          </a:effectRef>
-          <a:fontRef idx="minor">
-            <a:schemeClr val="lt1"/>
-          </a:fontRef>
-        </p:style>
-        <p:txBody>
-          <a:bodyPr rtlCol="0" anchor="ctr"/>
-          <a:lstStyle/>
-          <a:p>
-            <a:pPr algn="ctr"/>
-          </a:p>
-        </p:txBody>
-      </p:sp>
-      <p:sp>
-        <p:nvSpPr>
-          <p:cNvPr id="19" name="Rectangle 18"/>
-          <p:cNvSpPr/>
-          <p:nvPr/>
-        </p:nvSpPr>
-        <p:spPr>
-          <a:xfrm>
-            <a:off x="640080" y="3648456"/>
-            <a:ext cx="274320" cy="274320"/>
-          </a:xfrm>
-          <a:prstGeom prst="rect">
-            <a:avLst/>
-          </a:prstGeom>
-          <a:solidFill>
-            <a:srgbClr val="FFFFFF"/>
-          </a:solidFill>
-          <a:ln>
-            <a:solidFill>
-              <a:srgbClr val="333333"/>
-            </a:solidFill>
-          </a:ln>
-        </p:spPr>
-        <p:style>
-          <a:lnRef idx="1">
-            <a:schemeClr val="accent1"/>
-          </a:lnRef>
-          <a:fillRef idx="3">
-            <a:schemeClr val="accent1"/>
-          </a:fillRef>
-          <a:effectRef idx="2">
-            <a:schemeClr val="accent1"/>
-          </a:effectRef>
-          <a:fontRef idx="minor">
-            <a:schemeClr val="lt1"/>
-          </a:fontRef>
-        </p:style>
-        <p:txBody>
-          <a:bodyPr rtlCol="0" anchor="ctr"/>
-          <a:lstStyle/>
-          <a:p>
-            <a:pPr algn="ctr"/>
-          </a:p>
-        </p:txBody>
-      </p:sp>
-      <p:sp>
-        <p:nvSpPr>
-          <p:cNvPr id="20" name="Rectangle 19"/>
-          <p:cNvSpPr/>
-          <p:nvPr/>
-        </p:nvSpPr>
-        <p:spPr>
-          <a:xfrm>
-            <a:off x="640080" y="3648456"/>
-            <a:ext cx="73152" cy="274320"/>
-          </a:xfrm>
-          <a:prstGeom prst="rect">
-            <a:avLst/>
-          </a:prstGeom>
-          <a:solidFill>
-            <a:srgbClr val="269CCB"/>
-          </a:solidFill>
-          <a:ln>
-            <a:noFill/>
-          </a:ln>
-        </p:spPr>
-        <p:style>
-          <a:lnRef idx="1">
-            <a:schemeClr val="accent1"/>
-          </a:lnRef>
-          <a:fillRef idx="3">
-            <a:schemeClr val="accent1"/>
-          </a:fillRef>
-          <a:effectRef idx="2">
-            <a:schemeClr val="accent1"/>
-          </a:effectRef>
-          <a:fontRef idx="minor">
-            <a:schemeClr val="lt1"/>
-          </a:fontRef>
-        </p:style>
-        <p:txBody>
-          <a:bodyPr rtlCol="0" anchor="ctr"/>
-          <a:lstStyle/>
-          <a:p>
-            <a:pPr algn="ctr"/>
-          </a:p>
-        </p:txBody>
-      </p:sp>
-      <p:sp>
-        <p:nvSpPr>
-          <p:cNvPr id="21" name="TextBox 20"/>
-          <p:cNvSpPr txBox="1"/>
-          <p:nvPr/>
-        </p:nvSpPr>
-        <p:spPr>
-          <a:xfrm>
-            <a:off x="1097280" y="3593592"/>
-            <a:ext cx="10362895" cy="402336"/>
-          </a:xfrm>
-          <a:prstGeom prst="rect">
-            <a:avLst/>
-          </a:prstGeom>
-          <a:noFill/>
-        </p:spPr>
-        <p:txBody>
-          <a:bodyPr wrap="square" anchor="ctr"/>
-          <a:lstStyle/>
-          <a:p>
-            <a:r>
-              <a:rPr sz="1500" b="1" i="0">
-                <a:solidFill>
-                  <a:srgbClr val="333333"/>
-                </a:solidFill>
-                <a:latin typeface="Calibri"/>
-              </a:rPr>
-              <a:t>ACTORES Y FRONTERA</a:t>
-            </a:r>
-            <a:r>
-              <a:rPr sz="1500" b="0" i="0">
-                <a:solidFill>
-                  <a:srgbClr val="333333"/>
-                </a:solidFill>
-                <a:latin typeface="Calibri"/>
-              </a:rPr>
-              <a:t> — Quién vive el problema (el dueño del problema), quién más se afecta sin ser usuario, y qué queda </a:t>
-            </a:r>
-            <a:r>
-              <a:rPr sz="1500" b="1" i="0">
-                <a:solidFill>
-                  <a:srgbClr val="333333"/>
-                </a:solidFill>
-                <a:latin typeface="Calibri"/>
-              </a:rPr>
-              <a:t>fuera</a:t>
-            </a:r>
-            <a:r>
-              <a:rPr sz="1500" b="0" i="0">
-                <a:solidFill>
-                  <a:srgbClr val="333333"/>
-                </a:solidFill>
-                <a:latin typeface="Calibri"/>
-              </a:rPr>
-              <a:t> de lo que ustedes van a abordar. Digan además </a:t>
-            </a:r>
-            <a:r>
-              <a:rPr sz="1500" b="1" i="0">
-                <a:solidFill>
-                  <a:srgbClr val="333333"/>
-                </a:solidFill>
-                <a:latin typeface="Calibri"/>
-              </a:rPr>
-              <a:t>a quién le pueden preguntar algo esta semana</a:t>
-            </a:r>
-            <a:r>
-              <a:rPr sz="1500" b="0" i="0">
-                <a:solidFill>
-                  <a:srgbClr val="333333"/>
-                </a:solidFill>
-                <a:latin typeface="Calibri"/>
-              </a:rPr>
-              <a:t>.</a:t>
-            </a:r>
-          </a:p>
-        </p:txBody>
-      </p:sp>
-      <p:sp>
-        <p:nvSpPr>
-          <p:cNvPr id="22" name="Rounded Rectangle 21"/>
-          <p:cNvSpPr/>
-          <p:nvPr/>
-        </p:nvSpPr>
-        <p:spPr>
-          <a:xfrm>
-            <a:off x="457200" y="4178808"/>
-            <a:ext cx="11277295" cy="566928"/>
-          </a:xfrm>
-          <a:prstGeom prst="roundRect">
-            <a:avLst>
-              <a:gd name="adj" fmla="val 12000"/>
-            </a:avLst>
-          </a:prstGeom>
-          <a:solidFill>
-            <a:srgbClr val="F2F2F2"/>
-          </a:solidFill>
-          <a:ln>
-            <a:noFill/>
-          </a:ln>
-        </p:spPr>
-        <p:style>
-          <a:lnRef idx="1">
-            <a:schemeClr val="accent1"/>
-          </a:lnRef>
-          <a:fillRef idx="3">
-            <a:schemeClr val="accent1"/>
-          </a:fillRef>
-          <a:effectRef idx="2">
-            <a:schemeClr val="accent1"/>
-          </a:effectRef>
-          <a:fontRef idx="minor">
-            <a:schemeClr val="lt1"/>
-          </a:fontRef>
-        </p:style>
-        <p:txBody>
-          <a:bodyPr rtlCol="0" anchor="ctr"/>
-          <a:lstStyle/>
-          <a:p>
-            <a:pPr algn="ctr"/>
-          </a:p>
-        </p:txBody>
-      </p:sp>
-      <p:sp>
-        <p:nvSpPr>
-          <p:cNvPr id="23" name="Rectangle 22"/>
-          <p:cNvSpPr/>
-          <p:nvPr/>
-        </p:nvSpPr>
-        <p:spPr>
-          <a:xfrm>
-            <a:off x="640080" y="4325112"/>
-            <a:ext cx="274320" cy="274320"/>
-          </a:xfrm>
-          <a:prstGeom prst="rect">
-            <a:avLst/>
-          </a:prstGeom>
-          <a:solidFill>
-            <a:srgbClr val="FFFFFF"/>
-          </a:solidFill>
-          <a:ln>
-            <a:solidFill>
-              <a:srgbClr val="333333"/>
-            </a:solidFill>
-          </a:ln>
-        </p:spPr>
-        <p:style>
-          <a:lnRef idx="1">
-            <a:schemeClr val="accent1"/>
-          </a:lnRef>
-          <a:fillRef idx="3">
-            <a:schemeClr val="accent1"/>
-          </a:fillRef>
-          <a:effectRef idx="2">
-            <a:schemeClr val="accent1"/>
-          </a:effectRef>
-          <a:fontRef idx="minor">
-            <a:schemeClr val="lt1"/>
-          </a:fontRef>
-        </p:style>
-        <p:txBody>
-          <a:bodyPr rtlCol="0" anchor="ctr"/>
-          <a:lstStyle/>
-          <a:p>
-            <a:pPr algn="ctr"/>
-          </a:p>
-        </p:txBody>
-      </p:sp>
-      <p:sp>
-        <p:nvSpPr>
-          <p:cNvPr id="24" name="Rectangle 23"/>
-          <p:cNvSpPr/>
-          <p:nvPr/>
-        </p:nvSpPr>
-        <p:spPr>
-          <a:xfrm>
-            <a:off x="640080" y="4325112"/>
-            <a:ext cx="73152" cy="274320"/>
-          </a:xfrm>
-          <a:prstGeom prst="rect">
-            <a:avLst/>
-          </a:prstGeom>
-          <a:solidFill>
-            <a:srgbClr val="269CCB"/>
-          </a:solidFill>
-          <a:ln>
-            <a:noFill/>
-          </a:ln>
-        </p:spPr>
-        <p:style>
-          <a:lnRef idx="1">
-            <a:schemeClr val="accent1"/>
-          </a:lnRef>
-          <a:fillRef idx="3">
-            <a:schemeClr val="accent1"/>
-          </a:fillRef>
-          <a:effectRef idx="2">
-            <a:schemeClr val="accent1"/>
-          </a:effectRef>
-          <a:fontRef idx="minor">
-            <a:schemeClr val="lt1"/>
-          </a:fontRef>
-        </p:style>
-        <p:txBody>
-          <a:bodyPr rtlCol="0" anchor="ctr"/>
-          <a:lstStyle/>
-          <a:p>
-            <a:pPr algn="ctr"/>
-          </a:p>
-        </p:txBody>
-      </p:sp>
-      <p:sp>
-        <p:nvSpPr>
-          <p:cNvPr id="25" name="TextBox 24"/>
-          <p:cNvSpPr txBox="1"/>
-          <p:nvPr/>
-        </p:nvSpPr>
-        <p:spPr>
-          <a:xfrm>
-            <a:off x="1097280" y="4270248"/>
-            <a:ext cx="10362895" cy="402336"/>
-          </a:xfrm>
-          <a:prstGeom prst="rect">
-            <a:avLst/>
-          </a:prstGeom>
-          <a:noFill/>
-        </p:spPr>
-        <p:txBody>
-          <a:bodyPr wrap="square" anchor="ctr"/>
-          <a:lstStyle/>
-          <a:p>
-            <a:r>
-              <a:rPr sz="1500" b="1" i="0">
-                <a:solidFill>
-                  <a:srgbClr val="333333"/>
-                </a:solidFill>
-                <a:latin typeface="Calibri"/>
-              </a:rPr>
-              <a:t>EL CRITERIO DE ÉXITO</a:t>
-            </a:r>
-            <a:r>
-              <a:rPr sz="1500" b="0" i="0">
-                <a:solidFill>
-                  <a:srgbClr val="333333"/>
-                </a:solidFill>
-                <a:latin typeface="Calibri"/>
-              </a:rPr>
-              <a:t> — Una frase de la forma: «el proyecto sirvió si &lt;la cifra de la línea base&gt; pasa de X a Y, medido así». Y la causa del árbol que van a atacar.</a:t>
-            </a:r>
-          </a:p>
-        </p:txBody>
-      </p:sp>
-      <p:sp>
-        <p:nvSpPr>
-          <p:cNvPr id="26" name="TextBox 25"/>
+            <a:pPr>
+              <a:spcAft>
+                <a:spcPts val="800"/>
+              </a:spcAft>
+            </a:pPr>
+            <a:r>
+              <a:rPr sz="2000" b="0" i="0">
+                <a:solidFill>
+                  <a:srgbClr val="333333"/>
+                </a:solidFill>
+                <a:latin typeface="Calibri"/>
+              </a:rPr>
+              <a:t>–   «En el barrio falta una app» es la frase que un profesor de primer semestre va a oír docenas de veces, y es el error más costoso del curso porque no se ve: parece un problema, tiene sujeto, tiene carencia, y sin embargo ya trae la solución adentro.</a:t>
+            </a:r>
+          </a:p>
+          <a:p>
+            <a:pPr>
+              <a:spcAft>
+                <a:spcPts val="800"/>
+              </a:spcAft>
+            </a:pPr>
+            <a:r>
+              <a:rPr sz="2000" b="0" i="0">
+                <a:solidFill>
+                  <a:srgbClr val="333333"/>
+                </a:solidFill>
+                <a:latin typeface="Calibri"/>
+              </a:rPr>
+              <a:t>–   Si el problema es «falta una app», entonces cualquier app resuelve el problema, y el proyecto se convierte en un ejercicio de construir algo sin saber para qué.</a:t>
+            </a:r>
+          </a:p>
+          <a:p>
+            <a:pPr>
+              <a:spcAft>
+                <a:spcPts val="800"/>
+              </a:spcAft>
+            </a:pPr>
+            <a:r>
+              <a:rPr sz="2000" b="0" i="0">
+                <a:solidFill>
+                  <a:srgbClr val="333333"/>
+                </a:solidFill>
+                <a:latin typeface="Calibri"/>
+              </a:rPr>
+              <a:t>–   La prueba que conviene enseñar es de una sola pregunta y sirve para toda la vida: </a:t>
+            </a:r>
+            <a:r>
+              <a:rPr sz="2000" b="1" i="0">
+                <a:solidFill>
+                  <a:srgbClr val="333333"/>
+                </a:solidFill>
+                <a:latin typeface="Calibri"/>
+              </a:rPr>
+              <a:t>¿esto se podría resolver sin ninguna app?</a:t>
+            </a:r>
+            <a:r>
+              <a:rPr sz="2000" b="0" i="0">
+                <a:solidFill>
+                  <a:srgbClr val="333333"/>
+                </a:solidFill>
+                <a:latin typeface="Calibri"/>
+              </a:rPr>
+              <a:t> Si la respuesta es sí —y casi siempre lo es—, entonces el problema es otro y hay que buscarlo.</a:t>
+            </a:r>
+          </a:p>
+          <a:p>
+            <a:pPr>
+              <a:spcAft>
+                <a:spcPts val="800"/>
+              </a:spcAft>
+            </a:pPr>
+            <a:r>
+              <a:rPr sz="2000" b="0" i="0">
+                <a:solidFill>
+                  <a:srgbClr val="333333"/>
+                </a:solidFill>
+                <a:latin typeface="Calibri"/>
+              </a:rPr>
+              <a:t>–   Si el problema verdadero es que la gente no sabe si el libro que necesita está disponible, eso se puede resolver con una app, con una lista pegada en la puerta o con un número de WhatsApp.</a:t>
+            </a:r>
+          </a:p>
+          <a:p>
+            <a:pPr>
+              <a:spcAft>
+                <a:spcPts val="800"/>
+              </a:spcAft>
+            </a:pPr>
+            <a:r>
+              <a:rPr sz="2000" b="0" i="0">
+                <a:solidFill>
+                  <a:srgbClr val="333333"/>
+                </a:solidFill>
+                <a:latin typeface="Calibri"/>
+              </a:rPr>
+              <a:t>–   Que existan varias soluciones posibles es la señal de que el problema está bien escrito.</a:t>
+            </a:r>
+          </a:p>
+          <a:p>
+            <a:pPr>
+              <a:spcAft>
+                <a:spcPts val="800"/>
+              </a:spcAft>
+            </a:pPr>
+            <a:r>
+              <a:rPr sz="2000" b="0" i="0">
+                <a:solidFill>
+                  <a:srgbClr val="333333"/>
+                </a:solidFill>
+                <a:latin typeface="Calibri"/>
+              </a:rPr>
+              <a:t>–   Recoja las respuestas del muro en los diez minutos de apertura y no las corrija: en el minuto 12, con la primera diapositiva, van a ver ellos mismos que casi todo lo que escribieron era un síntoma o una solución.</a:t>
+            </a:r>
+          </a:p>
+        </p:txBody>
+      </p:sp>
+      <p:sp>
+        <p:nvSpPr>
+          <p:cNvPr id="6" name="TextBox 5"/>
           <p:cNvSpPr txBox="1"/>
           <p:nvPr/>
         </p:nvSpPr>
@@ -4705,7 +3840,7 @@
         <p:spPr>
           <a:xfrm>
             <a:off x="0" y="0"/>
-            <a:ext cx="12191695" cy="1170432"/>
+            <a:ext cx="12191695" cy="960120"/>
           </a:xfrm>
           <a:prstGeom prst="rect">
             <a:avLst/>
@@ -4747,7 +3882,7 @@
         </p:nvSpPr>
         <p:spPr>
           <a:xfrm>
-            <a:off x="0" y="1170432"/>
+            <a:off x="0" y="960120"/>
             <a:ext cx="12191695" cy="41148"/>
           </a:xfrm>
           <a:prstGeom prst="rect">
@@ -4791,7 +3926,7 @@
         <p:spPr>
           <a:xfrm>
             <a:off x="457200" y="164592"/>
-            <a:ext cx="11277295" cy="384048"/>
+            <a:ext cx="11277295" cy="502920"/>
           </a:xfrm>
           <a:prstGeom prst="rect">
             <a:avLst/>
@@ -4811,7 +3946,7 @@
                 </a:solidFill>
                 <a:latin typeface="Calibri"/>
               </a:rPr>
-              <a:t>Cómo se expone en 3 minutos</a:t>
+              <a:t>Las tres cosas que se confunden y cómo se escribe un problema (1/2)</a:t>
             </a:r>
           </a:p>
         </p:txBody>
@@ -4824,8 +3959,8 @@
         </p:nvSpPr>
         <p:spPr>
           <a:xfrm>
-            <a:off x="457200" y="566928"/>
-            <a:ext cx="11277295" cy="411480"/>
+            <a:off x="457200" y="1170432"/>
+            <a:ext cx="11277295" cy="5230368"/>
           </a:xfrm>
           <a:prstGeom prst="rect">
             <a:avLst/>
@@ -4838,876 +3973,176 @@
           </a:bodyPr>
           <a:lstStyle/>
           <a:p>
-            <a:r>
-              <a:rPr sz="1400" b="0" i="0">
-                <a:solidFill>
-                  <a:srgbClr val="B8D8EE"/>
-                </a:solidFill>
-                <a:latin typeface="Calibri"/>
-              </a:rPr>
-              <a:t>Habla el vocero con la pantalla ya compartida · cronómetro en pantalla · se corta al llegar a cero</a:t>
-            </a:r>
-          </a:p>
-        </p:txBody>
-      </p:sp>
-      <p:sp>
-        <p:nvSpPr>
-          <p:cNvPr id="6" name="Rounded Rectangle 5"/>
-          <p:cNvSpPr/>
-          <p:nvPr/>
-        </p:nvSpPr>
-        <p:spPr>
-          <a:xfrm>
-            <a:off x="457200" y="1444752"/>
-            <a:ext cx="11277295" cy="908913"/>
-          </a:xfrm>
-          <a:prstGeom prst="roundRect">
-            <a:avLst>
-              <a:gd name="adj" fmla="val 12000"/>
-            </a:avLst>
-          </a:prstGeom>
-          <a:solidFill>
-            <a:srgbClr val="F2F2F2"/>
-          </a:solidFill>
-          <a:ln>
-            <a:noFill/>
-          </a:ln>
-        </p:spPr>
-        <p:style>
-          <a:lnRef idx="1">
-            <a:schemeClr val="accent1"/>
-          </a:lnRef>
-          <a:fillRef idx="3">
-            <a:schemeClr val="accent1"/>
-          </a:fillRef>
-          <a:effectRef idx="2">
-            <a:schemeClr val="accent1"/>
-          </a:effectRef>
-          <a:fontRef idx="minor">
-            <a:schemeClr val="lt1"/>
-          </a:fontRef>
-        </p:style>
-        <p:txBody>
-          <a:bodyPr rtlCol="0" anchor="ctr"/>
-          <a:lstStyle/>
-          <a:p>
-            <a:pPr algn="ctr"/>
-          </a:p>
-        </p:txBody>
-      </p:sp>
-      <p:sp>
-        <p:nvSpPr>
-          <p:cNvPr id="7" name="Rounded Rectangle 6"/>
-          <p:cNvSpPr/>
-          <p:nvPr/>
-        </p:nvSpPr>
-        <p:spPr>
-          <a:xfrm>
-            <a:off x="594360" y="1679752"/>
-            <a:ext cx="438912" cy="438912"/>
-          </a:xfrm>
-          <a:prstGeom prst="roundRect">
-            <a:avLst>
-              <a:gd name="adj" fmla="val 12000"/>
-            </a:avLst>
-          </a:prstGeom>
-          <a:solidFill>
-            <a:srgbClr val="095292"/>
-          </a:solidFill>
-          <a:ln>
-            <a:noFill/>
-          </a:ln>
-        </p:spPr>
-        <p:style>
-          <a:lnRef idx="1">
-            <a:schemeClr val="accent1"/>
-          </a:lnRef>
-          <a:fillRef idx="3">
-            <a:schemeClr val="accent1"/>
-          </a:fillRef>
-          <a:effectRef idx="2">
-            <a:schemeClr val="accent1"/>
-          </a:effectRef>
-          <a:fontRef idx="minor">
-            <a:schemeClr val="lt1"/>
-          </a:fontRef>
-        </p:style>
-        <p:txBody>
-          <a:bodyPr rtlCol="0" anchor="ctr"/>
-          <a:lstStyle/>
-          <a:p>
-            <a:pPr algn="ctr"/>
-          </a:p>
-        </p:txBody>
-      </p:sp>
-      <p:sp>
-        <p:nvSpPr>
-          <p:cNvPr id="8" name="TextBox 7"/>
-          <p:cNvSpPr txBox="1"/>
-          <p:nvPr/>
-        </p:nvSpPr>
-        <p:spPr>
-          <a:xfrm>
-            <a:off x="594360" y="1679752"/>
-            <a:ext cx="438912" cy="438912"/>
-          </a:xfrm>
-          <a:prstGeom prst="rect">
-            <a:avLst/>
-          </a:prstGeom>
-          <a:noFill/>
-        </p:spPr>
-        <p:txBody>
-          <a:bodyPr wrap="square" anchor="ctr"/>
-          <a:lstStyle/>
-          <a:p>
-            <a:pPr algn="ctr"/>
-            <a:r>
-              <a:rPr sz="1600" b="1" i="0">
-                <a:solidFill>
-                  <a:srgbClr val="FFFFFF"/>
-                </a:solidFill>
-                <a:latin typeface="Calibri"/>
-              </a:rPr>
-              <a:t>1</a:t>
-            </a:r>
-          </a:p>
-        </p:txBody>
-      </p:sp>
-      <p:sp>
-        <p:nvSpPr>
-          <p:cNvPr id="9" name="TextBox 8"/>
-          <p:cNvSpPr txBox="1"/>
-          <p:nvPr/>
-        </p:nvSpPr>
-        <p:spPr>
-          <a:xfrm>
-            <a:off x="1188720" y="1536192"/>
-            <a:ext cx="10271455" cy="744321"/>
-          </a:xfrm>
-          <a:prstGeom prst="rect">
-            <a:avLst/>
-          </a:prstGeom>
-          <a:noFill/>
-        </p:spPr>
-        <p:txBody>
-          <a:bodyPr wrap="square" anchor="ctr"/>
-          <a:lstStyle/>
-          <a:p>
-            <a:r>
-              <a:rPr sz="1500" b="1" i="0">
-                <a:solidFill>
-                  <a:srgbClr val="095292"/>
-                </a:solidFill>
-                <a:latin typeface="Calibri"/>
-              </a:rPr>
-              <a:t>40 s · El problema en una frase</a:t>
-            </a:r>
-          </a:p>
-          <a:p>
             <a:pPr>
-              <a:spcBef>
-                <a:spcPts val="200"/>
-              </a:spcBef>
+              <a:spcAft>
+                <a:spcPts val="800"/>
+              </a:spcAft>
             </a:pPr>
             <a:r>
-              <a:rPr sz="1300" b="0" i="0">
-                <a:solidFill>
-                  <a:srgbClr val="333333"/>
-                </a:solidFill>
-                <a:latin typeface="Calibri"/>
-              </a:rPr>
-              <a:t>Léanla tal cual está escrita. Sin tecnología dentro.</a:t>
-            </a:r>
-          </a:p>
-        </p:txBody>
-      </p:sp>
-      <p:sp>
-        <p:nvSpPr>
-          <p:cNvPr id="10" name="Rounded Rectangle 9"/>
-          <p:cNvSpPr/>
-          <p:nvPr/>
-        </p:nvSpPr>
-        <p:spPr>
-          <a:xfrm>
-            <a:off x="457200" y="2445105"/>
-            <a:ext cx="11277295" cy="908913"/>
-          </a:xfrm>
-          <a:prstGeom prst="roundRect">
-            <a:avLst>
-              <a:gd name="adj" fmla="val 12000"/>
-            </a:avLst>
-          </a:prstGeom>
-          <a:solidFill>
-            <a:srgbClr val="E8F4FA"/>
-          </a:solidFill>
-          <a:ln>
-            <a:noFill/>
-          </a:ln>
-        </p:spPr>
-        <p:style>
-          <a:lnRef idx="1">
-            <a:schemeClr val="accent1"/>
-          </a:lnRef>
-          <a:fillRef idx="3">
-            <a:schemeClr val="accent1"/>
-          </a:fillRef>
-          <a:effectRef idx="2">
-            <a:schemeClr val="accent1"/>
-          </a:effectRef>
-          <a:fontRef idx="minor">
-            <a:schemeClr val="lt1"/>
-          </a:fontRef>
-        </p:style>
-        <p:txBody>
-          <a:bodyPr rtlCol="0" anchor="ctr"/>
-          <a:lstStyle/>
-          <a:p>
-            <a:pPr algn="ctr"/>
-          </a:p>
-        </p:txBody>
-      </p:sp>
-      <p:sp>
-        <p:nvSpPr>
-          <p:cNvPr id="11" name="Rounded Rectangle 10"/>
-          <p:cNvSpPr/>
-          <p:nvPr/>
-        </p:nvSpPr>
-        <p:spPr>
-          <a:xfrm>
-            <a:off x="594360" y="2680106"/>
-            <a:ext cx="438912" cy="438912"/>
-          </a:xfrm>
-          <a:prstGeom prst="roundRect">
-            <a:avLst>
-              <a:gd name="adj" fmla="val 12000"/>
-            </a:avLst>
-          </a:prstGeom>
-          <a:solidFill>
-            <a:srgbClr val="095292"/>
-          </a:solidFill>
-          <a:ln>
-            <a:noFill/>
-          </a:ln>
-        </p:spPr>
-        <p:style>
-          <a:lnRef idx="1">
-            <a:schemeClr val="accent1"/>
-          </a:lnRef>
-          <a:fillRef idx="3">
-            <a:schemeClr val="accent1"/>
-          </a:fillRef>
-          <a:effectRef idx="2">
-            <a:schemeClr val="accent1"/>
-          </a:effectRef>
-          <a:fontRef idx="minor">
-            <a:schemeClr val="lt1"/>
-          </a:fontRef>
-        </p:style>
-        <p:txBody>
-          <a:bodyPr rtlCol="0" anchor="ctr"/>
-          <a:lstStyle/>
-          <a:p>
-            <a:pPr algn="ctr"/>
-          </a:p>
-        </p:txBody>
-      </p:sp>
-      <p:sp>
-        <p:nvSpPr>
-          <p:cNvPr id="12" name="TextBox 11"/>
-          <p:cNvSpPr txBox="1"/>
-          <p:nvPr/>
-        </p:nvSpPr>
-        <p:spPr>
-          <a:xfrm>
-            <a:off x="594360" y="2680106"/>
-            <a:ext cx="438912" cy="438912"/>
-          </a:xfrm>
-          <a:prstGeom prst="rect">
-            <a:avLst/>
-          </a:prstGeom>
-          <a:noFill/>
-        </p:spPr>
-        <p:txBody>
-          <a:bodyPr wrap="square" anchor="ctr"/>
-          <a:lstStyle/>
-          <a:p>
-            <a:pPr algn="ctr"/>
-            <a:r>
-              <a:rPr sz="1600" b="1" i="0">
-                <a:solidFill>
-                  <a:srgbClr val="FFFFFF"/>
-                </a:solidFill>
-                <a:latin typeface="Calibri"/>
-              </a:rPr>
-              <a:t>2</a:t>
-            </a:r>
-          </a:p>
-        </p:txBody>
-      </p:sp>
-      <p:sp>
-        <p:nvSpPr>
-          <p:cNvPr id="13" name="TextBox 12"/>
-          <p:cNvSpPr txBox="1"/>
-          <p:nvPr/>
-        </p:nvSpPr>
-        <p:spPr>
-          <a:xfrm>
-            <a:off x="1188720" y="2536545"/>
-            <a:ext cx="10271455" cy="744321"/>
-          </a:xfrm>
-          <a:prstGeom prst="rect">
-            <a:avLst/>
-          </a:prstGeom>
-          <a:noFill/>
-        </p:spPr>
-        <p:txBody>
-          <a:bodyPr wrap="square" anchor="ctr"/>
-          <a:lstStyle/>
-          <a:p>
-            <a:r>
-              <a:rPr sz="1500" b="1" i="0">
-                <a:solidFill>
-                  <a:srgbClr val="095292"/>
-                </a:solidFill>
-                <a:latin typeface="Calibri"/>
-              </a:rPr>
-              <a:t>30 s · La cifra</a:t>
+              <a:rPr sz="2000" b="0" i="0">
+                <a:solidFill>
+                  <a:srgbClr val="333333"/>
+                </a:solidFill>
+                <a:latin typeface="Calibri"/>
+              </a:rPr>
+              <a:t>–   </a:t>
+            </a:r>
+            <a:r>
+              <a:rPr sz="2000" b="1" i="0">
+                <a:solidFill>
+                  <a:srgbClr val="333333"/>
+                </a:solidFill>
+                <a:latin typeface="Calibri"/>
+              </a:rPr>
+              <a:t>El síntoma</a:t>
+            </a:r>
+            <a:r>
+              <a:rPr sz="2000" b="0" i="0">
+                <a:solidFill>
+                  <a:srgbClr val="333333"/>
+                </a:solidFill>
+                <a:latin typeface="Calibri"/>
+              </a:rPr>
+              <a:t> es la señal visible: la queja, la demora, la pérdida.</a:t>
             </a:r>
           </a:p>
           <a:p>
             <a:pPr>
-              <a:spcBef>
-                <a:spcPts val="200"/>
-              </a:spcBef>
+              <a:spcAft>
+                <a:spcPts val="800"/>
+              </a:spcAft>
             </a:pPr>
             <a:r>
-              <a:rPr sz="1300" b="0" i="0">
-                <a:solidFill>
-                  <a:srgbClr val="333333"/>
-                </a:solidFill>
-                <a:latin typeface="Calibri"/>
-              </a:rPr>
-              <a:t>La línea base y cómo la obtuvieron. Es el minuto obligatorio.</a:t>
-            </a:r>
-          </a:p>
-        </p:txBody>
-      </p:sp>
-      <p:sp>
-        <p:nvSpPr>
-          <p:cNvPr id="14" name="Rounded Rectangle 13"/>
-          <p:cNvSpPr/>
-          <p:nvPr/>
-        </p:nvSpPr>
-        <p:spPr>
-          <a:xfrm>
-            <a:off x="457200" y="3445459"/>
-            <a:ext cx="11277295" cy="908913"/>
-          </a:xfrm>
-          <a:prstGeom prst="roundRect">
-            <a:avLst>
-              <a:gd name="adj" fmla="val 12000"/>
-            </a:avLst>
-          </a:prstGeom>
-          <a:solidFill>
-            <a:srgbClr val="F2F2F2"/>
-          </a:solidFill>
-          <a:ln>
-            <a:noFill/>
-          </a:ln>
-        </p:spPr>
-        <p:style>
-          <a:lnRef idx="1">
-            <a:schemeClr val="accent1"/>
-          </a:lnRef>
-          <a:fillRef idx="3">
-            <a:schemeClr val="accent1"/>
-          </a:fillRef>
-          <a:effectRef idx="2">
-            <a:schemeClr val="accent1"/>
-          </a:effectRef>
-          <a:fontRef idx="minor">
-            <a:schemeClr val="lt1"/>
-          </a:fontRef>
-        </p:style>
-        <p:txBody>
-          <a:bodyPr rtlCol="0" anchor="ctr"/>
-          <a:lstStyle/>
-          <a:p>
-            <a:pPr algn="ctr"/>
-          </a:p>
-        </p:txBody>
-      </p:sp>
-      <p:sp>
-        <p:nvSpPr>
-          <p:cNvPr id="15" name="Rounded Rectangle 14"/>
-          <p:cNvSpPr/>
-          <p:nvPr/>
-        </p:nvSpPr>
-        <p:spPr>
-          <a:xfrm>
-            <a:off x="594360" y="3680460"/>
-            <a:ext cx="438912" cy="438912"/>
-          </a:xfrm>
-          <a:prstGeom prst="roundRect">
-            <a:avLst>
-              <a:gd name="adj" fmla="val 12000"/>
-            </a:avLst>
-          </a:prstGeom>
-          <a:solidFill>
-            <a:srgbClr val="095292"/>
-          </a:solidFill>
-          <a:ln>
-            <a:noFill/>
-          </a:ln>
-        </p:spPr>
-        <p:style>
-          <a:lnRef idx="1">
-            <a:schemeClr val="accent1"/>
-          </a:lnRef>
-          <a:fillRef idx="3">
-            <a:schemeClr val="accent1"/>
-          </a:fillRef>
-          <a:effectRef idx="2">
-            <a:schemeClr val="accent1"/>
-          </a:effectRef>
-          <a:fontRef idx="minor">
-            <a:schemeClr val="lt1"/>
-          </a:fontRef>
-        </p:style>
-        <p:txBody>
-          <a:bodyPr rtlCol="0" anchor="ctr"/>
-          <a:lstStyle/>
-          <a:p>
-            <a:pPr algn="ctr"/>
-          </a:p>
-        </p:txBody>
-      </p:sp>
-      <p:sp>
-        <p:nvSpPr>
-          <p:cNvPr id="16" name="TextBox 15"/>
-          <p:cNvSpPr txBox="1"/>
-          <p:nvPr/>
-        </p:nvSpPr>
-        <p:spPr>
-          <a:xfrm>
-            <a:off x="594360" y="3680460"/>
-            <a:ext cx="438912" cy="438912"/>
-          </a:xfrm>
-          <a:prstGeom prst="rect">
-            <a:avLst/>
-          </a:prstGeom>
-          <a:noFill/>
-        </p:spPr>
-        <p:txBody>
-          <a:bodyPr wrap="square" anchor="ctr"/>
-          <a:lstStyle/>
-          <a:p>
-            <a:pPr algn="ctr"/>
-            <a:r>
-              <a:rPr sz="1600" b="1" i="0">
-                <a:solidFill>
-                  <a:srgbClr val="FFFFFF"/>
-                </a:solidFill>
-                <a:latin typeface="Calibri"/>
-              </a:rPr>
-              <a:t>3</a:t>
-            </a:r>
-          </a:p>
-        </p:txBody>
-      </p:sp>
-      <p:sp>
-        <p:nvSpPr>
-          <p:cNvPr id="17" name="TextBox 16"/>
-          <p:cNvSpPr txBox="1"/>
-          <p:nvPr/>
-        </p:nvSpPr>
-        <p:spPr>
-          <a:xfrm>
-            <a:off x="1188720" y="3536899"/>
-            <a:ext cx="10271455" cy="744321"/>
-          </a:xfrm>
-          <a:prstGeom prst="rect">
-            <a:avLst/>
-          </a:prstGeom>
-          <a:noFill/>
-        </p:spPr>
-        <p:txBody>
-          <a:bodyPr wrap="square" anchor="ctr"/>
-          <a:lstStyle/>
-          <a:p>
-            <a:r>
-              <a:rPr sz="1500" b="1" i="0">
-                <a:solidFill>
-                  <a:srgbClr val="095292"/>
-                </a:solidFill>
-                <a:latin typeface="Calibri"/>
-              </a:rPr>
-              <a:t>50 s · El árbol</a:t>
+              <a:rPr sz="2000" b="0" i="0">
+                <a:solidFill>
+                  <a:srgbClr val="333333"/>
+                </a:solidFill>
+                <a:latin typeface="Calibri"/>
+              </a:rPr>
+              <a:t>–   «La gente se queja del servicio» es un síntoma perfecto y un problema inservible, porque no dice de qué se queja ni qué no puede hacer.</a:t>
             </a:r>
           </a:p>
           <a:p>
             <a:pPr>
-              <a:spcBef>
-                <a:spcPts val="200"/>
-              </a:spcBef>
+              <a:spcAft>
+                <a:spcPts val="800"/>
+              </a:spcAft>
             </a:pPr>
             <a:r>
-              <a:rPr sz="1300" b="0" i="0">
-                <a:solidFill>
-                  <a:srgbClr val="333333"/>
-                </a:solidFill>
-                <a:latin typeface="Calibri"/>
-              </a:rPr>
-              <a:t>Muestren el dibujo y señalen la causa que van a atacar.</a:t>
-            </a:r>
-          </a:p>
-        </p:txBody>
-      </p:sp>
-      <p:sp>
-        <p:nvSpPr>
-          <p:cNvPr id="18" name="Rounded Rectangle 17"/>
-          <p:cNvSpPr/>
-          <p:nvPr/>
-        </p:nvSpPr>
-        <p:spPr>
-          <a:xfrm>
-            <a:off x="457200" y="4445812"/>
-            <a:ext cx="11277295" cy="908913"/>
-          </a:xfrm>
-          <a:prstGeom prst="roundRect">
-            <a:avLst>
-              <a:gd name="adj" fmla="val 12000"/>
-            </a:avLst>
-          </a:prstGeom>
-          <a:solidFill>
-            <a:srgbClr val="E8F4FA"/>
-          </a:solidFill>
-          <a:ln>
-            <a:noFill/>
-          </a:ln>
-        </p:spPr>
-        <p:style>
-          <a:lnRef idx="1">
-            <a:schemeClr val="accent1"/>
-          </a:lnRef>
-          <a:fillRef idx="3">
-            <a:schemeClr val="accent1"/>
-          </a:fillRef>
-          <a:effectRef idx="2">
-            <a:schemeClr val="accent1"/>
-          </a:effectRef>
-          <a:fontRef idx="minor">
-            <a:schemeClr val="lt1"/>
-          </a:fontRef>
-        </p:style>
-        <p:txBody>
-          <a:bodyPr rtlCol="0" anchor="ctr"/>
-          <a:lstStyle/>
-          <a:p>
-            <a:pPr algn="ctr"/>
-          </a:p>
-        </p:txBody>
-      </p:sp>
-      <p:sp>
-        <p:nvSpPr>
-          <p:cNvPr id="19" name="Rounded Rectangle 18"/>
-          <p:cNvSpPr/>
-          <p:nvPr/>
-        </p:nvSpPr>
-        <p:spPr>
-          <a:xfrm>
-            <a:off x="594360" y="4680813"/>
-            <a:ext cx="438912" cy="438912"/>
-          </a:xfrm>
-          <a:prstGeom prst="roundRect">
-            <a:avLst>
-              <a:gd name="adj" fmla="val 12000"/>
-            </a:avLst>
-          </a:prstGeom>
-          <a:solidFill>
-            <a:srgbClr val="095292"/>
-          </a:solidFill>
-          <a:ln>
-            <a:noFill/>
-          </a:ln>
-        </p:spPr>
-        <p:style>
-          <a:lnRef idx="1">
-            <a:schemeClr val="accent1"/>
-          </a:lnRef>
-          <a:fillRef idx="3">
-            <a:schemeClr val="accent1"/>
-          </a:fillRef>
-          <a:effectRef idx="2">
-            <a:schemeClr val="accent1"/>
-          </a:effectRef>
-          <a:fontRef idx="minor">
-            <a:schemeClr val="lt1"/>
-          </a:fontRef>
-        </p:style>
-        <p:txBody>
-          <a:bodyPr rtlCol="0" anchor="ctr"/>
-          <a:lstStyle/>
-          <a:p>
-            <a:pPr algn="ctr"/>
-          </a:p>
-        </p:txBody>
-      </p:sp>
-      <p:sp>
-        <p:nvSpPr>
-          <p:cNvPr id="20" name="TextBox 19"/>
-          <p:cNvSpPr txBox="1"/>
-          <p:nvPr/>
-        </p:nvSpPr>
-        <p:spPr>
-          <a:xfrm>
-            <a:off x="594360" y="4680813"/>
-            <a:ext cx="438912" cy="438912"/>
-          </a:xfrm>
-          <a:prstGeom prst="rect">
-            <a:avLst/>
-          </a:prstGeom>
-          <a:noFill/>
-        </p:spPr>
-        <p:txBody>
-          <a:bodyPr wrap="square" anchor="ctr"/>
-          <a:lstStyle/>
-          <a:p>
-            <a:pPr algn="ctr"/>
-            <a:r>
-              <a:rPr sz="1600" b="1" i="0">
-                <a:solidFill>
-                  <a:srgbClr val="FFFFFF"/>
-                </a:solidFill>
-                <a:latin typeface="Calibri"/>
-              </a:rPr>
-              <a:t>4</a:t>
-            </a:r>
-          </a:p>
-        </p:txBody>
-      </p:sp>
-      <p:sp>
-        <p:nvSpPr>
-          <p:cNvPr id="21" name="TextBox 20"/>
-          <p:cNvSpPr txBox="1"/>
-          <p:nvPr/>
-        </p:nvSpPr>
-        <p:spPr>
-          <a:xfrm>
-            <a:off x="1188720" y="4537252"/>
-            <a:ext cx="10271455" cy="744321"/>
-          </a:xfrm>
-          <a:prstGeom prst="rect">
-            <a:avLst/>
-          </a:prstGeom>
-          <a:noFill/>
-        </p:spPr>
-        <p:txBody>
-          <a:bodyPr wrap="square" anchor="ctr"/>
-          <a:lstStyle/>
-          <a:p>
-            <a:r>
-              <a:rPr sz="1500" b="1" i="0">
-                <a:solidFill>
-                  <a:srgbClr val="095292"/>
-                </a:solidFill>
-                <a:latin typeface="Calibri"/>
-              </a:rPr>
-              <a:t>40 s · Actores y frontera</a:t>
+              <a:rPr sz="2000" b="0" i="0">
+                <a:solidFill>
+                  <a:srgbClr val="333333"/>
+                </a:solidFill>
+                <a:latin typeface="Calibri"/>
+              </a:rPr>
+              <a:t>–   Los síntomas son útiles —son la pista que lleva al problema— pero atacar un síntoma produce soluciones cosméticas: si el síntoma es que la fila es larga</a:t>
             </a:r>
           </a:p>
           <a:p>
             <a:pPr>
-              <a:spcBef>
-                <a:spcPts val="200"/>
-              </a:spcBef>
+              <a:spcAft>
+                <a:spcPts val="800"/>
+              </a:spcAft>
             </a:pPr>
             <a:r>
-              <a:rPr sz="1300" b="0" i="0">
-                <a:solidFill>
-                  <a:srgbClr val="333333"/>
-                </a:solidFill>
-                <a:latin typeface="Calibri"/>
-              </a:rPr>
-              <a:t>Quién vive el problema, y a quién le van a preguntar esta semana.</a:t>
-            </a:r>
-          </a:p>
-        </p:txBody>
-      </p:sp>
-      <p:sp>
-        <p:nvSpPr>
-          <p:cNvPr id="22" name="Rounded Rectangle 21"/>
-          <p:cNvSpPr/>
-          <p:nvPr/>
-        </p:nvSpPr>
-        <p:spPr>
-          <a:xfrm>
-            <a:off x="457200" y="5446166"/>
-            <a:ext cx="11277295" cy="908913"/>
-          </a:xfrm>
-          <a:prstGeom prst="roundRect">
-            <a:avLst>
-              <a:gd name="adj" fmla="val 12000"/>
-            </a:avLst>
-          </a:prstGeom>
-          <a:solidFill>
-            <a:srgbClr val="F2F2F2"/>
-          </a:solidFill>
-          <a:ln>
-            <a:noFill/>
-          </a:ln>
-        </p:spPr>
-        <p:style>
-          <a:lnRef idx="1">
-            <a:schemeClr val="accent1"/>
-          </a:lnRef>
-          <a:fillRef idx="3">
-            <a:schemeClr val="accent1"/>
-          </a:fillRef>
-          <a:effectRef idx="2">
-            <a:schemeClr val="accent1"/>
-          </a:effectRef>
-          <a:fontRef idx="minor">
-            <a:schemeClr val="lt1"/>
-          </a:fontRef>
-        </p:style>
-        <p:txBody>
-          <a:bodyPr rtlCol="0" anchor="ctr"/>
-          <a:lstStyle/>
-          <a:p>
-            <a:pPr algn="ctr"/>
-          </a:p>
-        </p:txBody>
-      </p:sp>
-      <p:sp>
-        <p:nvSpPr>
-          <p:cNvPr id="23" name="Rounded Rectangle 22"/>
-          <p:cNvSpPr/>
-          <p:nvPr/>
-        </p:nvSpPr>
-        <p:spPr>
-          <a:xfrm>
-            <a:off x="594360" y="5681167"/>
-            <a:ext cx="438912" cy="438912"/>
-          </a:xfrm>
-          <a:prstGeom prst="roundRect">
-            <a:avLst>
-              <a:gd name="adj" fmla="val 12000"/>
-            </a:avLst>
-          </a:prstGeom>
-          <a:solidFill>
-            <a:srgbClr val="095292"/>
-          </a:solidFill>
-          <a:ln>
-            <a:noFill/>
-          </a:ln>
-        </p:spPr>
-        <p:style>
-          <a:lnRef idx="1">
-            <a:schemeClr val="accent1"/>
-          </a:lnRef>
-          <a:fillRef idx="3">
-            <a:schemeClr val="accent1"/>
-          </a:fillRef>
-          <a:effectRef idx="2">
-            <a:schemeClr val="accent1"/>
-          </a:effectRef>
-          <a:fontRef idx="minor">
-            <a:schemeClr val="lt1"/>
-          </a:fontRef>
-        </p:style>
-        <p:txBody>
-          <a:bodyPr rtlCol="0" anchor="ctr"/>
-          <a:lstStyle/>
-          <a:p>
-            <a:pPr algn="ctr"/>
-          </a:p>
-        </p:txBody>
-      </p:sp>
-      <p:sp>
-        <p:nvSpPr>
-          <p:cNvPr id="24" name="TextBox 23"/>
-          <p:cNvSpPr txBox="1"/>
-          <p:nvPr/>
-        </p:nvSpPr>
-        <p:spPr>
-          <a:xfrm>
-            <a:off x="594360" y="5681167"/>
-            <a:ext cx="438912" cy="438912"/>
-          </a:xfrm>
-          <a:prstGeom prst="rect">
-            <a:avLst/>
-          </a:prstGeom>
-          <a:noFill/>
-        </p:spPr>
-        <p:txBody>
-          <a:bodyPr wrap="square" anchor="ctr"/>
-          <a:lstStyle/>
-          <a:p>
-            <a:pPr algn="ctr"/>
-            <a:r>
-              <a:rPr sz="1600" b="1" i="0">
-                <a:solidFill>
-                  <a:srgbClr val="FFFFFF"/>
-                </a:solidFill>
-                <a:latin typeface="Calibri"/>
-              </a:rPr>
-              <a:t>5</a:t>
-            </a:r>
-          </a:p>
-        </p:txBody>
-      </p:sp>
-      <p:sp>
-        <p:nvSpPr>
-          <p:cNvPr id="25" name="TextBox 24"/>
-          <p:cNvSpPr txBox="1"/>
-          <p:nvPr/>
-        </p:nvSpPr>
-        <p:spPr>
-          <a:xfrm>
-            <a:off x="1188720" y="5537606"/>
-            <a:ext cx="10271455" cy="744321"/>
-          </a:xfrm>
-          <a:prstGeom prst="rect">
-            <a:avLst/>
-          </a:prstGeom>
-          <a:noFill/>
-        </p:spPr>
-        <p:txBody>
-          <a:bodyPr wrap="square" anchor="ctr"/>
-          <a:lstStyle/>
-          <a:p>
-            <a:r>
-              <a:rPr sz="1500" b="1" i="0">
-                <a:solidFill>
-                  <a:srgbClr val="095292"/>
-                </a:solidFill>
-                <a:latin typeface="Calibri"/>
-              </a:rPr>
-              <a:t>20 s · El criterio de éxito</a:t>
+              <a:rPr sz="2000" b="0" i="0">
+                <a:solidFill>
+                  <a:srgbClr val="333333"/>
+                </a:solidFill>
+                <a:latin typeface="Calibri"/>
+              </a:rPr>
+              <a:t>–   Poner sillas mejora la fila y no toca el problema. </a:t>
+            </a:r>
+            <a:r>
+              <a:rPr sz="2000" b="1" i="0">
+                <a:solidFill>
+                  <a:srgbClr val="333333"/>
+                </a:solidFill>
+                <a:latin typeface="Calibri"/>
+              </a:rPr>
+              <a:t>La solución disfrazada</a:t>
+            </a:r>
+            <a:r>
+              <a:rPr sz="2000" b="0" i="0">
+                <a:solidFill>
+                  <a:srgbClr val="333333"/>
+                </a:solidFill>
+                <a:latin typeface="Calibri"/>
+              </a:rPr>
+              <a:t> es la más peligrosa porque se ve profesional.</a:t>
             </a:r>
           </a:p>
           <a:p>
             <a:pPr>
-              <a:spcBef>
-                <a:spcPts val="200"/>
-              </a:spcBef>
+              <a:spcAft>
+                <a:spcPts val="800"/>
+              </a:spcAft>
             </a:pPr>
             <a:r>
-              <a:rPr sz="1300" b="0" i="0">
-                <a:solidFill>
-                  <a:srgbClr val="333333"/>
-                </a:solidFill>
-                <a:latin typeface="Calibri"/>
-              </a:rPr>
-              <a:t>De X a Y, medido así.</a:t>
-            </a:r>
-          </a:p>
-        </p:txBody>
-      </p:sp>
-      <p:sp>
-        <p:nvSpPr>
-          <p:cNvPr id="26" name="TextBox 25"/>
+              <a:rPr sz="2000" b="0" i="0">
+                <a:solidFill>
+                  <a:srgbClr val="333333"/>
+                </a:solidFill>
+                <a:latin typeface="Calibri"/>
+              </a:rPr>
+              <a:t>–   «Falta un sistema», «hay que digitalizar el proceso», «queremos hacerlo con IA».</a:t>
+            </a:r>
+          </a:p>
+          <a:p>
+            <a:pPr>
+              <a:spcAft>
+                <a:spcPts val="800"/>
+              </a:spcAft>
+            </a:pPr>
+            <a:r>
+              <a:rPr sz="2000" b="0" i="0">
+                <a:solidFill>
+                  <a:srgbClr val="333333"/>
+                </a:solidFill>
+                <a:latin typeface="Calibri"/>
+              </a:rPr>
+              <a:t>–   Las tres eligen la herramienta antes de saber qué se va a resolver, y cierran el análisis: una vez que el equipo decidió que va a hacer una app con IA</a:t>
+            </a:r>
+          </a:p>
+          <a:p>
+            <a:pPr>
+              <a:spcAft>
+                <a:spcPts val="800"/>
+              </a:spcAft>
+            </a:pPr>
+            <a:r>
+              <a:rPr sz="2000" b="0" i="0">
+                <a:solidFill>
+                  <a:srgbClr val="333333"/>
+                </a:solidFill>
+                <a:latin typeface="Calibri"/>
+              </a:rPr>
+              <a:t>–   Va a interpretar cualquier hallazgo como confirmación. </a:t>
+            </a:r>
+            <a:r>
+              <a:rPr sz="2000" b="1" i="0">
+                <a:solidFill>
+                  <a:srgbClr val="333333"/>
+                </a:solidFill>
+                <a:latin typeface="Calibri"/>
+              </a:rPr>
+              <a:t>El juicio</a:t>
+            </a:r>
+            <a:r>
+              <a:rPr sz="2000" b="0" i="0">
+                <a:solidFill>
+                  <a:srgbClr val="333333"/>
+                </a:solidFill>
+                <a:latin typeface="Calibri"/>
+              </a:rPr>
+              <a:t> es la tercera y la más común en primer semestre: «no hay tecnología en el negocio», «el proceso es muy anticuado».</a:t>
+            </a:r>
+          </a:p>
+        </p:txBody>
+      </p:sp>
+      <p:sp>
+        <p:nvSpPr>
+          <p:cNvPr id="6" name="TextBox 5"/>
           <p:cNvSpPr txBox="1"/>
           <p:nvPr/>
         </p:nvSpPr>
@@ -5881,7 +4316,7 @@
                 </a:solidFill>
                 <a:latin typeface="Calibri"/>
               </a:rPr>
-              <a:t>Para la Clase 7</a:t>
+              <a:t>Las tres cosas que se confunden y cómo se escribe un problema (2/2)</a:t>
             </a:r>
           </a:p>
         </p:txBody>
@@ -5920,25 +4355,7 @@
                 </a:solidFill>
                 <a:latin typeface="Calibri"/>
               </a:rPr>
-              <a:t>–   </a:t>
-            </a:r>
-            <a:r>
-              <a:rPr sz="2000" b="1" i="0">
-                <a:solidFill>
-                  <a:srgbClr val="333333"/>
-                </a:solidFill>
-                <a:latin typeface="Calibri"/>
-              </a:rPr>
-              <a:t>Trabajo dirigido:</a:t>
-            </a:r>
-            <a:r>
-              <a:rPr sz="2000" b="0" i="0">
-                <a:solidFill>
-                  <a:srgbClr val="333333"/>
-                </a:solidFill>
-                <a:latin typeface="Calibri"/>
-              </a:rPr>
-              <a:t> Identificación de problemáticas locales — cerrar la ficha con la cifra medida de verdad, no estimada, si esta semana alcanzan a contar o preguntar.</a:t>
+              <a:t>–   Son opiniones sobre un estado de cosas y no dicen a quién le cuesta qué.</a:t>
             </a:r>
           </a:p>
           <a:p>
@@ -5954,43 +4371,7 @@
                 </a:solidFill>
                 <a:latin typeface="Calibri"/>
               </a:rPr>
-              <a:t>–   </a:t>
-            </a:r>
-            <a:r>
-              <a:rPr sz="2000" b="1" i="0">
-                <a:solidFill>
-                  <a:srgbClr val="333333"/>
-                </a:solidFill>
-                <a:latin typeface="Calibri"/>
-              </a:rPr>
-              <a:t>Trabajo independiente:</a:t>
-            </a:r>
-            <a:r>
-              <a:rPr sz="2000" b="0" i="0">
-                <a:solidFill>
-                  <a:srgbClr val="333333"/>
-                </a:solidFill>
-                <a:latin typeface="Calibri"/>
-              </a:rPr>
-              <a:t> Propuesta inicial de solución: media página con </a:t>
-            </a:r>
-            <a:r>
-              <a:rPr sz="2000" b="1" i="0">
-                <a:solidFill>
-                  <a:srgbClr val="333333"/>
-                </a:solidFill>
-                <a:latin typeface="Calibri"/>
-              </a:rPr>
-              <a:t>dos</a:t>
-            </a:r>
-            <a:r>
-              <a:rPr sz="2000" b="0" i="0">
-                <a:solidFill>
-                  <a:srgbClr val="333333"/>
-                </a:solidFill>
-                <a:latin typeface="Calibri"/>
-              </a:rPr>
-              <a:t> alternativas para atacar la causa elegida, sin decidir todavía cuál. Sin nombrar herramientas.</a:t>
+              <a:t>–   Un negocio sin tecnología puede estar funcionando perfectamente; la falta de tecnología no es un problema por sí misma</a:t>
             </a:r>
           </a:p>
           <a:p>
@@ -6006,7 +4387,7 @@
                 </a:solidFill>
                 <a:latin typeface="Calibri"/>
               </a:rPr>
-              <a:t>–   </a:t>
+              <a:t>–   Y esta es una idea que hay que decir en voz alta en un curso de ingeniería de sistemas, porque va contra el reflejo del gremio. </a:t>
             </a:r>
             <a:r>
               <a:rPr sz="2000" b="1" i="0">
@@ -6015,7 +4396,7 @@
                 </a:solidFill>
                 <a:latin typeface="Calibri"/>
               </a:rPr>
-              <a:t>Clase 7 · Ciclo de vida de los proyectos de ingeniería</a:t>
+              <a:t>La fórmula del enunciado</a:t>
             </a:r>
             <a:r>
               <a:rPr sz="2000" b="0" i="0">
@@ -6024,25 +4405,7 @@
                 </a:solidFill>
                 <a:latin typeface="Calibri"/>
               </a:rPr>
-              <a:t> — el </a:t>
-            </a:r>
-            <a:r>
-              <a:rPr sz="2000" b="1" i="0">
-                <a:solidFill>
-                  <a:srgbClr val="333333"/>
-                </a:solidFill>
-                <a:latin typeface="Calibri"/>
-              </a:rPr>
-              <a:t>ciclo de vida de los proyectos de ingeniería</a:t>
-            </a:r>
-            <a:r>
-              <a:rPr sz="2000" b="0" i="0">
-                <a:solidFill>
-                  <a:srgbClr val="333333"/>
-                </a:solidFill>
-                <a:latin typeface="Calibri"/>
-              </a:rPr>
-              <a:t>, aplicado a la ficha de hoy: qué se hace antes de construir y por qué el orden importa.</a:t>
+              <a:t>, y conviene dictarla para que la copien: *a QUIÉN le pasa QUÉ, con qué CONSECUENCIA*, más una cifra.</a:t>
             </a:r>
           </a:p>
           <a:p>
@@ -6058,25 +4421,7 @@
                 </a:solidFill>
                 <a:latin typeface="Calibri"/>
               </a:rPr>
-              <a:t>–   </a:t>
-            </a:r>
-            <a:r>
-              <a:rPr sz="2000" b="1" i="0">
-                <a:solidFill>
-                  <a:srgbClr val="333333"/>
-                </a:solidFill>
-                <a:latin typeface="Calibri"/>
-              </a:rPr>
-              <a:t>Aviso:</a:t>
-            </a:r>
-            <a:r>
-              <a:rPr sz="2000" b="0" i="0">
-                <a:solidFill>
-                  <a:srgbClr val="333333"/>
-                </a:solidFill>
-                <a:latin typeface="Calibri"/>
-              </a:rPr>
-              <a:t> Arranca el corte 2. La ficha del problema queda como referencia fija: llévenla al documento del equipo con el título «Ficha del problema — versión final del corte 1», porque se va a citar en todas las sesiones que siguen.</a:t>
+              <a:t>–   Ejemplo bien escrito: «los usuarios de la biblioteca del barrio no saben si un libro está disponible antes de ir, así que hacen viajes en vano; de cada diez visitas, unas cuatro terminan sin préstamo».</a:t>
             </a:r>
           </a:p>
           <a:p>
@@ -6092,17 +4437,15 @@
                 </a:solidFill>
                 <a:latin typeface="Calibri"/>
               </a:rPr>
-              <a:t>–   </a:t>
-            </a:r>
-            <a:r>
-              <a:rPr sz="2000" b="1" i="0">
-                <a:solidFill>
-                  <a:srgbClr val="333333"/>
-                </a:solidFill>
-                <a:latin typeface="Calibri"/>
-              </a:rPr>
-              <a:t>Antes de salir:</a:t>
-            </a:r>
+              <a:t>–   Tiene sujeto (los usuarios), tiene el qué (no saben la disponibilidad), tiene la consecuencia (viajes en vano) y tiene una cifra.</a:t>
+            </a:r>
+          </a:p>
+          <a:p>
+            <a:pPr>
+              <a:spcAft>
+                <a:spcPts val="800"/>
+              </a:spcAft>
+            </a:pPr>
             <a:r>
               <a:rPr sz="2000" b="0" i="0">
                 <a:solidFill>
@@ -6110,7 +4453,7 @@
                 </a:solidFill>
                 <a:latin typeface="Calibri"/>
               </a:rPr>
-              <a:t> el enlace del documento del equipo en el chat, con permiso de lectura para el docente, y el nombre del vocero de hoy.</a:t>
+              <a:t>–   Y no menciona ninguna tecnología, que es lo que deja el espacio para diseñar.</a:t>
             </a:r>
           </a:p>
         </p:txBody>
@@ -6185,13 +4528,13 @@
         <p:spPr>
           <a:xfrm>
             <a:off x="0" y="0"/>
-            <a:ext cx="12191695" cy="164592"/>
+            <a:ext cx="12191695" cy="960120"/>
           </a:xfrm>
           <a:prstGeom prst="rect">
             <a:avLst/>
           </a:prstGeom>
           <a:solidFill>
-            <a:srgbClr val="269CCB"/>
+            <a:srgbClr val="095292"/>
           </a:solidFill>
           <a:ln>
             <a:noFill/>
@@ -6219,30 +4562,49 @@
           </a:p>
         </p:txBody>
       </p:sp>
-      <p:pic>
-        <p:nvPicPr>
-          <p:cNvPr id="3" name="Picture 2" descr="logo_uniajc_color.png"/>
-          <p:cNvPicPr>
-            <a:picLocks noChangeAspect="1"/>
-          </p:cNvPicPr>
-          <p:nvPr/>
-        </p:nvPicPr>
-        <p:blipFill>
-          <a:blip r:embed="rId2"/>
-          <a:stretch>
-            <a:fillRect/>
-          </a:stretch>
-        </p:blipFill>
-        <p:spPr>
-          <a:xfrm>
-            <a:off x="10271455" y="5998464"/>
-            <a:ext cx="1463040" cy="643233"/>
-          </a:xfrm>
-          <a:prstGeom prst="rect">
-            <a:avLst/>
-          </a:prstGeom>
-        </p:spPr>
-      </p:pic>
+      <p:sp>
+        <p:nvSpPr>
+          <p:cNvPr id="3" name="Rectangle 2"/>
+          <p:cNvSpPr/>
+          <p:nvPr/>
+        </p:nvSpPr>
+        <p:spPr>
+          <a:xfrm>
+            <a:off x="0" y="960120"/>
+            <a:ext cx="12191695" cy="41148"/>
+          </a:xfrm>
+          <a:prstGeom prst="rect">
+            <a:avLst/>
+          </a:prstGeom>
+          <a:solidFill>
+            <a:srgbClr val="FFD000"/>
+          </a:solidFill>
+          <a:ln>
+            <a:noFill/>
+          </a:ln>
+        </p:spPr>
+        <p:style>
+          <a:lnRef idx="1">
+            <a:schemeClr val="accent1"/>
+          </a:lnRef>
+          <a:fillRef idx="3">
+            <a:schemeClr val="accent1"/>
+          </a:fillRef>
+          <a:effectRef idx="2">
+            <a:schemeClr val="accent1"/>
+          </a:effectRef>
+          <a:fontRef idx="minor">
+            <a:schemeClr val="lt1"/>
+          </a:fontRef>
+        </p:style>
+        <p:txBody>
+          <a:bodyPr rtlCol="0" anchor="ctr"/>
+          <a:lstStyle/>
+          <a:p>
+            <a:pPr algn="ctr"/>
+          </a:p>
+        </p:txBody>
+      </p:sp>
       <p:sp>
         <p:nvSpPr>
           <p:cNvPr id="4" name="TextBox 3"/>
@@ -6251,41 +4613,8 @@
         </p:nvSpPr>
         <p:spPr>
           <a:xfrm>
-            <a:off x="457200" y="1737360"/>
-            <a:ext cx="11277295" cy="1097280"/>
-          </a:xfrm>
-          <a:prstGeom prst="rect">
-            <a:avLst/>
-          </a:prstGeom>
-          <a:noFill/>
-        </p:spPr>
-        <p:txBody>
-          <a:bodyPr wrap="square" anchor="ctr"/>
-          <a:lstStyle/>
-          <a:p>
-            <a:pPr algn="ctr"/>
-            <a:r>
-              <a:rPr sz="3400" b="1" i="0">
-                <a:solidFill>
-                  <a:srgbClr val="095292"/>
-                </a:solidFill>
-                <a:latin typeface="Calibri"/>
-              </a:rPr>
-              <a:t>Cerró el corte 1 · nos vemos en la sesión 7</a:t>
-            </a:r>
-          </a:p>
-        </p:txBody>
-      </p:sp>
-      <p:sp>
-        <p:nvSpPr>
-          <p:cNvPr id="5" name="TextBox 4"/>
-          <p:cNvSpPr txBox="1"/>
-          <p:nvPr/>
-        </p:nvSpPr>
-        <p:spPr>
-          <a:xfrm>
-            <a:off x="457200" y="3017520"/>
-            <a:ext cx="11277295" cy="1645920"/>
+            <a:off x="457200" y="164592"/>
+            <a:ext cx="11277295" cy="502920"/>
           </a:xfrm>
           <a:prstGeom prst="rect">
             <a:avLst/>
@@ -6298,49 +4627,28 @@
           </a:bodyPr>
           <a:lstStyle/>
           <a:p>
-            <a:pPr algn="ctr">
-              <a:spcAft>
-                <a:spcPts val="600"/>
-              </a:spcAft>
-            </a:pPr>
-            <a:r>
-              <a:rPr sz="1600" b="0" i="0">
-                <a:solidFill>
-                  <a:srgbClr val="333333"/>
-                </a:solidFill>
-                <a:latin typeface="Calibri"/>
-              </a:rPr>
-              <a:t>Análisis de problemas tecnológicos del entorno · Clase 6</a:t>
-            </a:r>
-          </a:p>
-          <a:p>
-            <a:pPr algn="ctr">
-              <a:spcAft>
-                <a:spcPts val="600"/>
-              </a:spcAft>
-            </a:pPr>
-            <a:r>
-              <a:rPr sz="1600" b="0" i="0">
-                <a:solidFill>
-                  <a:srgbClr val="333333"/>
-                </a:solidFill>
-                <a:latin typeface="Calibri"/>
-              </a:rPr>
-              <a:t>FI300101 · UNIAJC · Ingeniería de Sistemas</a:t>
-            </a:r>
-          </a:p>
-        </p:txBody>
-      </p:sp>
-      <p:sp>
-        <p:nvSpPr>
-          <p:cNvPr id="6" name="TextBox 5"/>
+            <a:r>
+              <a:rPr sz="2600" b="1" i="0">
+                <a:solidFill>
+                  <a:srgbClr val="FFFFFF"/>
+                </a:solidFill>
+                <a:latin typeface="Calibri"/>
+              </a:rPr>
+              <a:t>El árbol del problema: la herramienta que evita las soluciones cosméticas (1/2)</a:t>
+            </a:r>
+          </a:p>
+        </p:txBody>
+      </p:sp>
+      <p:sp>
+        <p:nvSpPr>
+          <p:cNvPr id="5" name="TextBox 4"/>
           <p:cNvSpPr txBox="1"/>
           <p:nvPr/>
         </p:nvSpPr>
         <p:spPr>
           <a:xfrm>
-            <a:off x="457200" y="4754880"/>
-            <a:ext cx="11277295" cy="640080"/>
+            <a:off x="457200" y="1170432"/>
+            <a:ext cx="11277295" cy="5230368"/>
           </a:xfrm>
           <a:prstGeom prst="rect">
             <a:avLst/>
@@ -6353,15 +4661,2274 @@
           </a:bodyPr>
           <a:lstStyle/>
           <a:p>
+            <a:pPr>
+              <a:spcAft>
+                <a:spcPts val="800"/>
+              </a:spcAft>
+            </a:pPr>
+            <a:r>
+              <a:rPr sz="2000" b="0" i="0">
+                <a:solidFill>
+                  <a:srgbClr val="333333"/>
+                </a:solidFill>
+                <a:latin typeface="Calibri"/>
+              </a:rPr>
+              <a:t>–   El árbol de problemas es una técnica vieja y muy usada en formulación de proyectos, y para primer semestre tiene una virtud enorme: es un dibujo, así que se puede hacer en quince minutos y se puede discutir señalando con el dedo.</a:t>
+            </a:r>
+          </a:p>
+          <a:p>
+            <a:pPr>
+              <a:spcAft>
+                <a:spcPts val="800"/>
+              </a:spcAft>
+            </a:pPr>
+            <a:r>
+              <a:rPr sz="2000" b="0" i="0">
+                <a:solidFill>
+                  <a:srgbClr val="333333"/>
+                </a:solidFill>
+                <a:latin typeface="Calibri"/>
+              </a:rPr>
+              <a:t>–   Se dibuja con el </a:t>
+            </a:r>
+            <a:r>
+              <a:rPr sz="2000" b="1" i="0">
+                <a:solidFill>
+                  <a:srgbClr val="333333"/>
+                </a:solidFill>
+                <a:latin typeface="Calibri"/>
+              </a:rPr>
+              <a:t>problema en el tronco</a:t>
+            </a:r>
+            <a:r>
+              <a:rPr sz="2000" b="0" i="0">
+                <a:solidFill>
+                  <a:srgbClr val="333333"/>
+                </a:solidFill>
+                <a:latin typeface="Calibri"/>
+              </a:rPr>
+              <a:t>, una sola frase.</a:t>
+            </a:r>
+          </a:p>
+          <a:p>
+            <a:pPr>
+              <a:spcAft>
+                <a:spcPts val="800"/>
+              </a:spcAft>
+            </a:pPr>
+            <a:r>
+              <a:rPr sz="2000" b="0" i="0">
+                <a:solidFill>
+                  <a:srgbClr val="333333"/>
+                </a:solidFill>
+                <a:latin typeface="Calibri"/>
+              </a:rPr>
+              <a:t>–   Hacia arriba, las </a:t>
+            </a:r>
+            <a:r>
+              <a:rPr sz="2000" b="1" i="0">
+                <a:solidFill>
+                  <a:srgbClr val="333333"/>
+                </a:solidFill>
+                <a:latin typeface="Calibri"/>
+              </a:rPr>
+              <a:t>ramas son los efectos</a:t>
+            </a:r>
+            <a:r>
+              <a:rPr sz="2000" b="0" i="0">
+                <a:solidFill>
+                  <a:srgbClr val="333333"/>
+                </a:solidFill>
+                <a:latin typeface="Calibri"/>
+              </a:rPr>
+              <a:t>: lo que se ve, lo que la gente reporta, lo que duele.</a:t>
+            </a:r>
+          </a:p>
+          <a:p>
+            <a:pPr>
+              <a:spcAft>
+                <a:spcPts val="800"/>
+              </a:spcAft>
+            </a:pPr>
+            <a:r>
+              <a:rPr sz="2000" b="0" i="0">
+                <a:solidFill>
+                  <a:srgbClr val="333333"/>
+                </a:solidFill>
+                <a:latin typeface="Calibri"/>
+              </a:rPr>
+              <a:t>–   Hacia abajo, las </a:t>
+            </a:r>
+            <a:r>
+              <a:rPr sz="2000" b="1" i="0">
+                <a:solidFill>
+                  <a:srgbClr val="333333"/>
+                </a:solidFill>
+                <a:latin typeface="Calibri"/>
+              </a:rPr>
+              <a:t>raíces son las causas</a:t>
+            </a:r>
+            <a:r>
+              <a:rPr sz="2000" b="0" i="0">
+                <a:solidFill>
+                  <a:srgbClr val="333333"/>
+                </a:solidFill>
+                <a:latin typeface="Calibri"/>
+              </a:rPr>
+              <a:t>, y hay dos niveles: las causas directas (por qué ocurre el problema) y las causas de fondo (por qué ocurre cada causa).</a:t>
+            </a:r>
+          </a:p>
+          <a:p>
+            <a:pPr>
+              <a:spcAft>
+                <a:spcPts val="800"/>
+              </a:spcAft>
+            </a:pPr>
+            <a:r>
+              <a:rPr sz="2000" b="0" i="0">
+                <a:solidFill>
+                  <a:srgbClr val="333333"/>
+                </a:solidFill>
+                <a:latin typeface="Calibri"/>
+              </a:rPr>
+              <a:t>–   Se dibuja de arriba hacia abajo y </a:t>
+            </a:r>
+            <a:r>
+              <a:rPr sz="2000" b="1" i="0">
+                <a:solidFill>
+                  <a:srgbClr val="333333"/>
+                </a:solidFill>
+                <a:latin typeface="Calibri"/>
+              </a:rPr>
+              <a:t>se lee de abajo hacia arriba</a:t>
+            </a:r>
+            <a:r>
+              <a:rPr sz="2000" b="0" i="0">
+                <a:solidFill>
+                  <a:srgbClr val="333333"/>
+                </a:solidFill>
+                <a:latin typeface="Calibri"/>
+              </a:rPr>
+              <a:t>, porque así se ve la cadena completa: esta causa de fondo produce esta causa, que produce el problema, que produce estos efectos.</a:t>
+            </a:r>
+          </a:p>
+          <a:p>
+            <a:pPr>
+              <a:spcAft>
+                <a:spcPts val="800"/>
+              </a:spcAft>
+            </a:pPr>
+            <a:r>
+              <a:rPr sz="2000" b="0" i="0">
+                <a:solidFill>
+                  <a:srgbClr val="333333"/>
+                </a:solidFill>
+                <a:latin typeface="Calibri"/>
+              </a:rPr>
+              <a:t>–   La regla que hay que repetir hasta el cansancio: </a:t>
+            </a:r>
+            <a:r>
+              <a:rPr sz="2000" b="1" i="0">
+                <a:solidFill>
+                  <a:srgbClr val="333333"/>
+                </a:solidFill>
+                <a:latin typeface="Calibri"/>
+              </a:rPr>
+              <a:t>el proyecto ataca una causa, no una rama</a:t>
+            </a:r>
+            <a:r>
+              <a:rPr sz="2000" b="0" i="0">
+                <a:solidFill>
+                  <a:srgbClr val="333333"/>
+                </a:solidFill>
+                <a:latin typeface="Calibri"/>
+              </a:rPr>
+              <a:t>.</a:t>
+            </a:r>
+          </a:p>
+          <a:p>
+            <a:pPr>
+              <a:spcAft>
+                <a:spcPts val="800"/>
+              </a:spcAft>
+            </a:pPr>
+            <a:r>
+              <a:rPr sz="2000" b="0" i="0">
+                <a:solidFill>
+                  <a:srgbClr val="333333"/>
+                </a:solidFill>
+                <a:latin typeface="Calibri"/>
+              </a:rPr>
+              <a:t>–   Si el equipo diseña para los efectos, produce algo que alivia la molestia y deja el problema intacto.</a:t>
+            </a:r>
+          </a:p>
+        </p:txBody>
+      </p:sp>
+      <p:sp>
+        <p:nvSpPr>
+          <p:cNvPr id="6" name="TextBox 5"/>
+          <p:cNvSpPr txBox="1"/>
+          <p:nvPr/>
+        </p:nvSpPr>
+        <p:spPr>
+          <a:xfrm>
+            <a:off x="11185855" y="6473952"/>
+            <a:ext cx="640080" cy="274320"/>
+          </a:xfrm>
+          <a:prstGeom prst="rect">
+            <a:avLst/>
+          </a:prstGeom>
+          <a:noFill/>
+        </p:spPr>
+        <p:txBody>
+          <a:bodyPr wrap="square">
+            <a:spAutoFit/>
+          </a:bodyPr>
+          <a:lstStyle/>
+          <a:p>
+            <a:pPr algn="r"/>
+            <a:r>
+              <a:rPr sz="1100" b="0" i="0">
+                <a:solidFill>
+                  <a:srgbClr val="666666"/>
+                </a:solidFill>
+                <a:latin typeface="Calibri"/>
+              </a:rPr>
+              <a:t>13</a:t>
+            </a:r>
+          </a:p>
+        </p:txBody>
+      </p:sp>
+    </p:spTree>
+  </p:cSld>
+  <p:clrMapOvr>
+    <a:masterClrMapping/>
+  </p:clrMapOvr>
+</p:sld>
+</file>
+
+<file path=ppt/slides/slide14.xml><?xml version="1.0" encoding="utf-8"?>
+<p:sld xmlns:a="http://schemas.openxmlformats.org/drawingml/2006/main" xmlns:p="http://schemas.openxmlformats.org/presentationml/2006/main" xmlns:r="http://schemas.openxmlformats.org/officeDocument/2006/relationships">
+  <p:cSld>
+    <p:bg>
+      <p:bgPr>
+        <a:solidFill>
+          <a:srgbClr val="FFFFFF"/>
+        </a:solidFill>
+        <a:effectLst/>
+      </p:bgPr>
+    </p:bg>
+    <p:spTree>
+      <p:nvGrpSpPr>
+        <p:cNvPr id="1" name=""/>
+        <p:cNvGrpSpPr/>
+        <p:nvPr/>
+      </p:nvGrpSpPr>
+      <p:grpSpPr/>
+      <p:sp>
+        <p:nvSpPr>
+          <p:cNvPr id="2" name="Rectangle 1"/>
+          <p:cNvSpPr/>
+          <p:nvPr/>
+        </p:nvSpPr>
+        <p:spPr>
+          <a:xfrm>
+            <a:off x="0" y="0"/>
+            <a:ext cx="12191695" cy="960120"/>
+          </a:xfrm>
+          <a:prstGeom prst="rect">
+            <a:avLst/>
+          </a:prstGeom>
+          <a:solidFill>
+            <a:srgbClr val="095292"/>
+          </a:solidFill>
+          <a:ln>
+            <a:noFill/>
+          </a:ln>
+        </p:spPr>
+        <p:style>
+          <a:lnRef idx="1">
+            <a:schemeClr val="accent1"/>
+          </a:lnRef>
+          <a:fillRef idx="3">
+            <a:schemeClr val="accent1"/>
+          </a:fillRef>
+          <a:effectRef idx="2">
+            <a:schemeClr val="accent1"/>
+          </a:effectRef>
+          <a:fontRef idx="minor">
+            <a:schemeClr val="lt1"/>
+          </a:fontRef>
+        </p:style>
+        <p:txBody>
+          <a:bodyPr rtlCol="0" anchor="ctr"/>
+          <a:lstStyle/>
+          <a:p>
             <a:pPr algn="ctr"/>
+          </a:p>
+        </p:txBody>
+      </p:sp>
+      <p:sp>
+        <p:nvSpPr>
+          <p:cNvPr id="3" name="Rectangle 2"/>
+          <p:cNvSpPr/>
+          <p:nvPr/>
+        </p:nvSpPr>
+        <p:spPr>
+          <a:xfrm>
+            <a:off x="0" y="960120"/>
+            <a:ext cx="12191695" cy="41148"/>
+          </a:xfrm>
+          <a:prstGeom prst="rect">
+            <a:avLst/>
+          </a:prstGeom>
+          <a:solidFill>
+            <a:srgbClr val="FFD000"/>
+          </a:solidFill>
+          <a:ln>
+            <a:noFill/>
+          </a:ln>
+        </p:spPr>
+        <p:style>
+          <a:lnRef idx="1">
+            <a:schemeClr val="accent1"/>
+          </a:lnRef>
+          <a:fillRef idx="3">
+            <a:schemeClr val="accent1"/>
+          </a:fillRef>
+          <a:effectRef idx="2">
+            <a:schemeClr val="accent1"/>
+          </a:effectRef>
+          <a:fontRef idx="minor">
+            <a:schemeClr val="lt1"/>
+          </a:fontRef>
+        </p:style>
+        <p:txBody>
+          <a:bodyPr rtlCol="0" anchor="ctr"/>
+          <a:lstStyle/>
+          <a:p>
+            <a:pPr algn="ctr"/>
+          </a:p>
+        </p:txBody>
+      </p:sp>
+      <p:sp>
+        <p:nvSpPr>
+          <p:cNvPr id="4" name="TextBox 3"/>
+          <p:cNvSpPr txBox="1"/>
+          <p:nvPr/>
+        </p:nvSpPr>
+        <p:spPr>
+          <a:xfrm>
+            <a:off x="457200" y="164592"/>
+            <a:ext cx="11277295" cy="502920"/>
+          </a:xfrm>
+          <a:prstGeom prst="rect">
+            <a:avLst/>
+          </a:prstGeom>
+          <a:noFill/>
+        </p:spPr>
+        <p:txBody>
+          <a:bodyPr wrap="square">
+            <a:spAutoFit/>
+          </a:bodyPr>
+          <a:lstStyle/>
+          <a:p>
+            <a:r>
+              <a:rPr sz="2600" b="1" i="0">
+                <a:solidFill>
+                  <a:srgbClr val="FFFFFF"/>
+                </a:solidFill>
+                <a:latin typeface="Calibri"/>
+              </a:rPr>
+              <a:t>El árbol del problema: la herramienta que evita las soluciones cosméticas (2/2)</a:t>
+            </a:r>
+          </a:p>
+        </p:txBody>
+      </p:sp>
+      <p:sp>
+        <p:nvSpPr>
+          <p:cNvPr id="5" name="TextBox 4"/>
+          <p:cNvSpPr txBox="1"/>
+          <p:nvPr/>
+        </p:nvSpPr>
+        <p:spPr>
+          <a:xfrm>
+            <a:off x="457200" y="1170432"/>
+            <a:ext cx="11277295" cy="5230368"/>
+          </a:xfrm>
+          <a:prstGeom prst="rect">
+            <a:avLst/>
+          </a:prstGeom>
+          <a:noFill/>
+        </p:spPr>
+        <p:txBody>
+          <a:bodyPr wrap="square">
+            <a:spAutoFit/>
+          </a:bodyPr>
+          <a:lstStyle/>
+          <a:p>
+            <a:pPr>
+              <a:spcAft>
+                <a:spcPts val="800"/>
+              </a:spcAft>
+            </a:pPr>
+            <a:r>
+              <a:rPr sz="2000" b="0" i="0">
+                <a:solidFill>
+                  <a:srgbClr val="333333"/>
+                </a:solidFill>
+                <a:latin typeface="Calibri"/>
+              </a:rPr>
+              <a:t>–   Y la segunda regla, práctica: dos o tres causas directas, no diez.</a:t>
+            </a:r>
+          </a:p>
+          <a:p>
+            <a:pPr>
+              <a:spcAft>
+                <a:spcPts val="800"/>
+              </a:spcAft>
+            </a:pPr>
+            <a:r>
+              <a:rPr sz="2000" b="0" i="0">
+                <a:solidFill>
+                  <a:srgbClr val="333333"/>
+                </a:solidFill>
+                <a:latin typeface="Calibri"/>
+              </a:rPr>
+              <a:t>–   Un árbol con diez raíces no es un análisis, es una lista de todo lo que se les ocurrió, y con eso no se puede decidir.</a:t>
+            </a:r>
+          </a:p>
+          <a:p>
+            <a:pPr>
+              <a:spcAft>
+                <a:spcPts val="800"/>
+              </a:spcAft>
+            </a:pPr>
+            <a:r>
+              <a:rPr sz="2000" b="0" i="0">
+                <a:solidFill>
+                  <a:srgbClr val="333333"/>
+                </a:solidFill>
+                <a:latin typeface="Calibri"/>
+              </a:rPr>
+              <a:t>–   El momento de aprendizaje real ocurre en el segundo nivel de raíces, y conviene provocarlo en las salas: cuando el equipo baja de «no hay un registro actualizado» a «el registro se actualiza a mano al final del día y nadie tiene tiempo»</a:t>
+            </a:r>
+          </a:p>
+          <a:p>
+            <a:pPr>
+              <a:spcAft>
+                <a:spcPts val="800"/>
+              </a:spcAft>
+            </a:pPr>
+            <a:r>
+              <a:rPr sz="2000" b="0" i="0">
+                <a:solidFill>
+                  <a:srgbClr val="333333"/>
+                </a:solidFill>
+                <a:latin typeface="Calibri"/>
+              </a:rPr>
+              <a:t>–   Ahí aparece por primera vez algo que un estudiante de primer semestre puede efectivamente cambiar en un semestre.</a:t>
+            </a:r>
+          </a:p>
+          <a:p>
+            <a:pPr>
+              <a:spcAft>
+                <a:spcPts val="800"/>
+              </a:spcAft>
+            </a:pPr>
+            <a:r>
+              <a:rPr sz="2000" b="0" i="0">
+                <a:solidFill>
+                  <a:srgbClr val="333333"/>
+                </a:solidFill>
+                <a:latin typeface="Calibri"/>
+              </a:rPr>
+              <a:t>–   Antes de ese nivel, todo se ve demasiado grande.</a:t>
+            </a:r>
+          </a:p>
+          <a:p>
+            <a:pPr>
+              <a:spcAft>
+                <a:spcPts val="800"/>
+              </a:spcAft>
+            </a:pPr>
+            <a:r>
+              <a:rPr sz="2000" b="0" i="0">
+                <a:solidFill>
+                  <a:srgbClr val="333333"/>
+                </a:solidFill>
+                <a:latin typeface="Calibri"/>
+              </a:rPr>
+              <a:t>–   Un detalle metodológico que ahorra discusiones: si una causa no se puede afectar con nada que el equipo pueda hacer —el presupuesto del municipio, la cultura ciudadana, la ley—, se dibuja igual, pero se marca.</a:t>
+            </a:r>
+          </a:p>
+          <a:p>
+            <a:pPr>
+              <a:spcAft>
+                <a:spcPts val="800"/>
+              </a:spcAft>
+            </a:pPr>
+            <a:r>
+              <a:rPr sz="2000" b="0" i="0">
+                <a:solidFill>
+                  <a:srgbClr val="333333"/>
+                </a:solidFill>
+                <a:latin typeface="Calibri"/>
+              </a:rPr>
+              <a:t>–   Se llama restricción y no es una derrota: es información.</a:t>
+            </a:r>
+          </a:p>
+          <a:p>
+            <a:pPr>
+              <a:spcAft>
+                <a:spcPts val="800"/>
+              </a:spcAft>
+            </a:pPr>
+            <a:r>
+              <a:rPr sz="2000" b="0" i="0">
+                <a:solidFill>
+                  <a:srgbClr val="333333"/>
+                </a:solidFill>
+                <a:latin typeface="Calibri"/>
+              </a:rPr>
+              <a:t>–   Un proyecto que sabe qué no puede cambiar es más serio que uno que promete cambiarlo todo.</a:t>
+            </a:r>
+          </a:p>
+        </p:txBody>
+      </p:sp>
+      <p:sp>
+        <p:nvSpPr>
+          <p:cNvPr id="6" name="TextBox 5"/>
+          <p:cNvSpPr txBox="1"/>
+          <p:nvPr/>
+        </p:nvSpPr>
+        <p:spPr>
+          <a:xfrm>
+            <a:off x="11185855" y="6473952"/>
+            <a:ext cx="640080" cy="274320"/>
+          </a:xfrm>
+          <a:prstGeom prst="rect">
+            <a:avLst/>
+          </a:prstGeom>
+          <a:noFill/>
+        </p:spPr>
+        <p:txBody>
+          <a:bodyPr wrap="square">
+            <a:spAutoFit/>
+          </a:bodyPr>
+          <a:lstStyle/>
+          <a:p>
+            <a:pPr algn="r"/>
+            <a:r>
+              <a:rPr sz="1100" b="0" i="0">
+                <a:solidFill>
+                  <a:srgbClr val="666666"/>
+                </a:solidFill>
+                <a:latin typeface="Calibri"/>
+              </a:rPr>
+              <a:t>14</a:t>
+            </a:r>
+          </a:p>
+        </p:txBody>
+      </p:sp>
+    </p:spTree>
+  </p:cSld>
+  <p:clrMapOvr>
+    <a:masterClrMapping/>
+  </p:clrMapOvr>
+</p:sld>
+</file>
+
+<file path=ppt/slides/slide15.xml><?xml version="1.0" encoding="utf-8"?>
+<p:sld xmlns:a="http://schemas.openxmlformats.org/drawingml/2006/main" xmlns:p="http://schemas.openxmlformats.org/presentationml/2006/main" xmlns:r="http://schemas.openxmlformats.org/officeDocument/2006/relationships">
+  <p:cSld>
+    <p:bg>
+      <p:bgPr>
+        <a:solidFill>
+          <a:srgbClr val="FFFFFF"/>
+        </a:solidFill>
+        <a:effectLst/>
+      </p:bgPr>
+    </p:bg>
+    <p:spTree>
+      <p:nvGrpSpPr>
+        <p:cNvPr id="1" name=""/>
+        <p:cNvGrpSpPr/>
+        <p:nvPr/>
+      </p:nvGrpSpPr>
+      <p:grpSpPr/>
+      <p:sp>
+        <p:nvSpPr>
+          <p:cNvPr id="2" name="Rectangle 1"/>
+          <p:cNvSpPr/>
+          <p:nvPr/>
+        </p:nvSpPr>
+        <p:spPr>
+          <a:xfrm>
+            <a:off x="0" y="0"/>
+            <a:ext cx="12191695" cy="960120"/>
+          </a:xfrm>
+          <a:prstGeom prst="rect">
+            <a:avLst/>
+          </a:prstGeom>
+          <a:solidFill>
+            <a:srgbClr val="095292"/>
+          </a:solidFill>
+          <a:ln>
+            <a:noFill/>
+          </a:ln>
+        </p:spPr>
+        <p:style>
+          <a:lnRef idx="1">
+            <a:schemeClr val="accent1"/>
+          </a:lnRef>
+          <a:fillRef idx="3">
+            <a:schemeClr val="accent1"/>
+          </a:fillRef>
+          <a:effectRef idx="2">
+            <a:schemeClr val="accent1"/>
+          </a:effectRef>
+          <a:fontRef idx="minor">
+            <a:schemeClr val="lt1"/>
+          </a:fontRef>
+        </p:style>
+        <p:txBody>
+          <a:bodyPr rtlCol="0" anchor="ctr"/>
+          <a:lstStyle/>
+          <a:p>
+            <a:pPr algn="ctr"/>
+          </a:p>
+        </p:txBody>
+      </p:sp>
+      <p:sp>
+        <p:nvSpPr>
+          <p:cNvPr id="3" name="Rectangle 2"/>
+          <p:cNvSpPr/>
+          <p:nvPr/>
+        </p:nvSpPr>
+        <p:spPr>
+          <a:xfrm>
+            <a:off x="0" y="960120"/>
+            <a:ext cx="12191695" cy="41148"/>
+          </a:xfrm>
+          <a:prstGeom prst="rect">
+            <a:avLst/>
+          </a:prstGeom>
+          <a:solidFill>
+            <a:srgbClr val="FFD000"/>
+          </a:solidFill>
+          <a:ln>
+            <a:noFill/>
+          </a:ln>
+        </p:spPr>
+        <p:style>
+          <a:lnRef idx="1">
+            <a:schemeClr val="accent1"/>
+          </a:lnRef>
+          <a:fillRef idx="3">
+            <a:schemeClr val="accent1"/>
+          </a:fillRef>
+          <a:effectRef idx="2">
+            <a:schemeClr val="accent1"/>
+          </a:effectRef>
+          <a:fontRef idx="minor">
+            <a:schemeClr val="lt1"/>
+          </a:fontRef>
+        </p:style>
+        <p:txBody>
+          <a:bodyPr rtlCol="0" anchor="ctr"/>
+          <a:lstStyle/>
+          <a:p>
+            <a:pPr algn="ctr"/>
+          </a:p>
+        </p:txBody>
+      </p:sp>
+      <p:sp>
+        <p:nvSpPr>
+          <p:cNvPr id="4" name="TextBox 3"/>
+          <p:cNvSpPr txBox="1"/>
+          <p:nvPr/>
+        </p:nvSpPr>
+        <p:spPr>
+          <a:xfrm>
+            <a:off x="457200" y="164592"/>
+            <a:ext cx="11277295" cy="502920"/>
+          </a:xfrm>
+          <a:prstGeom prst="rect">
+            <a:avLst/>
+          </a:prstGeom>
+          <a:noFill/>
+        </p:spPr>
+        <p:txBody>
+          <a:bodyPr wrap="square">
+            <a:spAutoFit/>
+          </a:bodyPr>
+          <a:lstStyle/>
+          <a:p>
+            <a:r>
+              <a:rPr sz="2600" b="1" i="0">
+                <a:solidFill>
+                  <a:srgbClr val="FFFFFF"/>
+                </a:solidFill>
+                <a:latin typeface="Calibri"/>
+              </a:rPr>
+              <a:t>La línea base y los cuatro criterios de viabilidad (1/3)</a:t>
+            </a:r>
+          </a:p>
+        </p:txBody>
+      </p:sp>
+      <p:sp>
+        <p:nvSpPr>
+          <p:cNvPr id="5" name="TextBox 4"/>
+          <p:cNvSpPr txBox="1"/>
+          <p:nvPr/>
+        </p:nvSpPr>
+        <p:spPr>
+          <a:xfrm>
+            <a:off x="457200" y="1170432"/>
+            <a:ext cx="11277295" cy="5230368"/>
+          </a:xfrm>
+          <a:prstGeom prst="rect">
+            <a:avLst/>
+          </a:prstGeom>
+          <a:noFill/>
+        </p:spPr>
+        <p:txBody>
+          <a:bodyPr wrap="square">
+            <a:spAutoFit/>
+          </a:bodyPr>
+          <a:lstStyle/>
+          <a:p>
+            <a:pPr>
+              <a:spcAft>
+                <a:spcPts val="800"/>
+              </a:spcAft>
+            </a:pPr>
+            <a:r>
+              <a:rPr sz="2000" b="0" i="0">
+                <a:solidFill>
+                  <a:srgbClr val="333333"/>
+                </a:solidFill>
+                <a:latin typeface="Calibri"/>
+              </a:rPr>
+              <a:t>–   </a:t>
+            </a:r>
             <a:r>
               <a:rPr sz="2000" b="1" i="0">
                 <a:solidFill>
-                  <a:srgbClr val="269CCB"/>
-                </a:solidFill>
-                <a:latin typeface="Calibri"/>
-              </a:rPr>
-              <a:t>El problema quedó escrito. Todo lo que sigue se hace sobre esa ficha</a:t>
+                  <a:srgbClr val="333333"/>
+                </a:solidFill>
+                <a:latin typeface="Calibri"/>
+              </a:rPr>
+              <a:t>La línea base</a:t>
+            </a:r>
+            <a:r>
+              <a:rPr sz="2000" b="0" i="0">
+                <a:solidFill>
+                  <a:srgbClr val="333333"/>
+                </a:solidFill>
+                <a:latin typeface="Calibri"/>
+              </a:rPr>
+              <a:t> es la exigencia que más resistencia genera y la que más valor tiene.</a:t>
+            </a:r>
+          </a:p>
+          <a:p>
+            <a:pPr>
+              <a:spcAft>
+                <a:spcPts val="800"/>
+              </a:spcAft>
+            </a:pPr>
+            <a:r>
+              <a:rPr sz="2000" b="0" i="0">
+                <a:solidFill>
+                  <a:srgbClr val="333333"/>
+                </a:solidFill>
+                <a:latin typeface="Calibri"/>
+              </a:rPr>
+              <a:t>–   Es una cifra sobre el problema </a:t>
+            </a:r>
+            <a:r>
+              <a:rPr sz="2000" b="1" i="0">
+                <a:solidFill>
+                  <a:srgbClr val="333333"/>
+                </a:solidFill>
+                <a:latin typeface="Calibri"/>
+              </a:rPr>
+              <a:t>como está hoy</a:t>
+            </a:r>
+            <a:r>
+              <a:rPr sz="2000" b="0" i="0">
+                <a:solidFill>
+                  <a:srgbClr val="333333"/>
+                </a:solidFill>
+                <a:latin typeface="Calibri"/>
+              </a:rPr>
+              <a:t>, antes de que el equipo toque nada, y su función es simple: sin ella no hay forma de saber si el proyecto sirvió.</a:t>
+            </a:r>
+          </a:p>
+          <a:p>
+            <a:pPr>
+              <a:spcAft>
+                <a:spcPts val="800"/>
+              </a:spcAft>
+            </a:pPr>
+            <a:r>
+              <a:rPr sz="2000" b="0" i="0">
+                <a:solidFill>
+                  <a:srgbClr val="333333"/>
+                </a:solidFill>
+                <a:latin typeface="Calibri"/>
+              </a:rPr>
+              <a:t>–   En la Clase 16 el informe final va a pedir comparar, y un equipo sin línea base solo puede escribir «mejoramos el proceso», que es una afirmación vacía.</a:t>
+            </a:r>
+          </a:p>
+          <a:p>
+            <a:pPr>
+              <a:spcAft>
+                <a:spcPts val="800"/>
+              </a:spcAft>
+            </a:pPr>
+            <a:r>
+              <a:rPr sz="2000" b="0" i="0">
+                <a:solidFill>
+                  <a:srgbClr val="333333"/>
+                </a:solidFill>
+                <a:latin typeface="Calibri"/>
+              </a:rPr>
+              <a:t>–   Hay que quitarles de encima la idea de que medir requiere presupuesto o estadística.</a:t>
+            </a:r>
+          </a:p>
+          <a:p>
+            <a:pPr>
+              <a:spcAft>
+                <a:spcPts val="800"/>
+              </a:spcAft>
+            </a:pPr>
+            <a:r>
+              <a:rPr sz="2000" b="0" i="0">
+                <a:solidFill>
+                  <a:srgbClr val="333333"/>
+                </a:solidFill>
+                <a:latin typeface="Calibri"/>
+              </a:rPr>
+              <a:t>–   La línea base de un proyecto de este curso se consigue de tres maneras: </a:t>
+            </a:r>
+            <a:r>
+              <a:rPr sz="2000" b="1" i="0">
+                <a:solidFill>
+                  <a:srgbClr val="333333"/>
+                </a:solidFill>
+                <a:latin typeface="Calibri"/>
+              </a:rPr>
+              <a:t>preguntando</a:t>
+            </a:r>
+            <a:r>
+              <a:rPr sz="2000" b="0" i="0">
+                <a:solidFill>
+                  <a:srgbClr val="333333"/>
+                </a:solidFill>
+                <a:latin typeface="Calibri"/>
+              </a:rPr>
+              <a:t> a la persona que hace el trabajo, </a:t>
+            </a:r>
+            <a:r>
+              <a:rPr sz="2000" b="1" i="0">
+                <a:solidFill>
+                  <a:srgbClr val="333333"/>
+                </a:solidFill>
+                <a:latin typeface="Calibri"/>
+              </a:rPr>
+              <a:t>contando</a:t>
+            </a:r>
+            <a:r>
+              <a:rPr sz="2000" b="0" i="0">
+                <a:solidFill>
+                  <a:srgbClr val="333333"/>
+                </a:solidFill>
+                <a:latin typeface="Calibri"/>
+              </a:rPr>
+              <a:t> durante una semana, o </a:t>
+            </a:r>
+            <a:r>
+              <a:rPr sz="2000" b="1" i="0">
+                <a:solidFill>
+                  <a:srgbClr val="333333"/>
+                </a:solidFill>
+                <a:latin typeface="Calibri"/>
+              </a:rPr>
+              <a:t>midiendo con un cronómetro</a:t>
+            </a:r>
+            <a:r>
+              <a:rPr sz="2000" b="0" i="0">
+                <a:solidFill>
+                  <a:srgbClr val="333333"/>
+                </a:solidFill>
+                <a:latin typeface="Calibri"/>
+              </a:rPr>
+              <a:t> un caso.</a:t>
+            </a:r>
+          </a:p>
+          <a:p>
+            <a:pPr>
+              <a:spcAft>
+                <a:spcPts val="800"/>
+              </a:spcAft>
+            </a:pPr>
+            <a:r>
+              <a:rPr sz="2000" b="0" i="0">
+                <a:solidFill>
+                  <a:srgbClr val="333333"/>
+                </a:solidFill>
+                <a:latin typeface="Calibri"/>
+              </a:rPr>
+              <a:t>–   «La secretaria dedica unas dos horas diarias a confirmar citas por teléfono, según lo que ella misma estima» es una línea base perfectamente aceptable, siempre que se diga que es una estimación y de quién viene.</a:t>
+            </a:r>
+          </a:p>
+        </p:txBody>
+      </p:sp>
+      <p:sp>
+        <p:nvSpPr>
+          <p:cNvPr id="6" name="TextBox 5"/>
+          <p:cNvSpPr txBox="1"/>
+          <p:nvPr/>
+        </p:nvSpPr>
+        <p:spPr>
+          <a:xfrm>
+            <a:off x="11185855" y="6473952"/>
+            <a:ext cx="640080" cy="274320"/>
+          </a:xfrm>
+          <a:prstGeom prst="rect">
+            <a:avLst/>
+          </a:prstGeom>
+          <a:noFill/>
+        </p:spPr>
+        <p:txBody>
+          <a:bodyPr wrap="square">
+            <a:spAutoFit/>
+          </a:bodyPr>
+          <a:lstStyle/>
+          <a:p>
+            <a:pPr algn="r"/>
+            <a:r>
+              <a:rPr sz="1100" b="0" i="0">
+                <a:solidFill>
+                  <a:srgbClr val="666666"/>
+                </a:solidFill>
+                <a:latin typeface="Calibri"/>
+              </a:rPr>
+              <a:t>15</a:t>
+            </a:r>
+          </a:p>
+        </p:txBody>
+      </p:sp>
+    </p:spTree>
+  </p:cSld>
+  <p:clrMapOvr>
+    <a:masterClrMapping/>
+  </p:clrMapOvr>
+</p:sld>
+</file>
+
+<file path=ppt/slides/slide16.xml><?xml version="1.0" encoding="utf-8"?>
+<p:sld xmlns:a="http://schemas.openxmlformats.org/drawingml/2006/main" xmlns:p="http://schemas.openxmlformats.org/presentationml/2006/main" xmlns:r="http://schemas.openxmlformats.org/officeDocument/2006/relationships">
+  <p:cSld>
+    <p:bg>
+      <p:bgPr>
+        <a:solidFill>
+          <a:srgbClr val="FFFFFF"/>
+        </a:solidFill>
+        <a:effectLst/>
+      </p:bgPr>
+    </p:bg>
+    <p:spTree>
+      <p:nvGrpSpPr>
+        <p:cNvPr id="1" name=""/>
+        <p:cNvGrpSpPr/>
+        <p:nvPr/>
+      </p:nvGrpSpPr>
+      <p:grpSpPr/>
+      <p:sp>
+        <p:nvSpPr>
+          <p:cNvPr id="2" name="Rectangle 1"/>
+          <p:cNvSpPr/>
+          <p:nvPr/>
+        </p:nvSpPr>
+        <p:spPr>
+          <a:xfrm>
+            <a:off x="0" y="0"/>
+            <a:ext cx="12191695" cy="960120"/>
+          </a:xfrm>
+          <a:prstGeom prst="rect">
+            <a:avLst/>
+          </a:prstGeom>
+          <a:solidFill>
+            <a:srgbClr val="095292"/>
+          </a:solidFill>
+          <a:ln>
+            <a:noFill/>
+          </a:ln>
+        </p:spPr>
+        <p:style>
+          <a:lnRef idx="1">
+            <a:schemeClr val="accent1"/>
+          </a:lnRef>
+          <a:fillRef idx="3">
+            <a:schemeClr val="accent1"/>
+          </a:fillRef>
+          <a:effectRef idx="2">
+            <a:schemeClr val="accent1"/>
+          </a:effectRef>
+          <a:fontRef idx="minor">
+            <a:schemeClr val="lt1"/>
+          </a:fontRef>
+        </p:style>
+        <p:txBody>
+          <a:bodyPr rtlCol="0" anchor="ctr"/>
+          <a:lstStyle/>
+          <a:p>
+            <a:pPr algn="ctr"/>
+          </a:p>
+        </p:txBody>
+      </p:sp>
+      <p:sp>
+        <p:nvSpPr>
+          <p:cNvPr id="3" name="Rectangle 2"/>
+          <p:cNvSpPr/>
+          <p:nvPr/>
+        </p:nvSpPr>
+        <p:spPr>
+          <a:xfrm>
+            <a:off x="0" y="960120"/>
+            <a:ext cx="12191695" cy="41148"/>
+          </a:xfrm>
+          <a:prstGeom prst="rect">
+            <a:avLst/>
+          </a:prstGeom>
+          <a:solidFill>
+            <a:srgbClr val="FFD000"/>
+          </a:solidFill>
+          <a:ln>
+            <a:noFill/>
+          </a:ln>
+        </p:spPr>
+        <p:style>
+          <a:lnRef idx="1">
+            <a:schemeClr val="accent1"/>
+          </a:lnRef>
+          <a:fillRef idx="3">
+            <a:schemeClr val="accent1"/>
+          </a:fillRef>
+          <a:effectRef idx="2">
+            <a:schemeClr val="accent1"/>
+          </a:effectRef>
+          <a:fontRef idx="minor">
+            <a:schemeClr val="lt1"/>
+          </a:fontRef>
+        </p:style>
+        <p:txBody>
+          <a:bodyPr rtlCol="0" anchor="ctr"/>
+          <a:lstStyle/>
+          <a:p>
+            <a:pPr algn="ctr"/>
+          </a:p>
+        </p:txBody>
+      </p:sp>
+      <p:sp>
+        <p:nvSpPr>
+          <p:cNvPr id="4" name="TextBox 3"/>
+          <p:cNvSpPr txBox="1"/>
+          <p:nvPr/>
+        </p:nvSpPr>
+        <p:spPr>
+          <a:xfrm>
+            <a:off x="457200" y="164592"/>
+            <a:ext cx="11277295" cy="502920"/>
+          </a:xfrm>
+          <a:prstGeom prst="rect">
+            <a:avLst/>
+          </a:prstGeom>
+          <a:noFill/>
+        </p:spPr>
+        <p:txBody>
+          <a:bodyPr wrap="square">
+            <a:spAutoFit/>
+          </a:bodyPr>
+          <a:lstStyle/>
+          <a:p>
+            <a:r>
+              <a:rPr sz="2600" b="1" i="0">
+                <a:solidFill>
+                  <a:srgbClr val="FFFFFF"/>
+                </a:solidFill>
+                <a:latin typeface="Calibri"/>
+              </a:rPr>
+              <a:t>La línea base y los cuatro criterios de viabilidad (2/3)</a:t>
+            </a:r>
+          </a:p>
+        </p:txBody>
+      </p:sp>
+      <p:sp>
+        <p:nvSpPr>
+          <p:cNvPr id="5" name="TextBox 4"/>
+          <p:cNvSpPr txBox="1"/>
+          <p:nvPr/>
+        </p:nvSpPr>
+        <p:spPr>
+          <a:xfrm>
+            <a:off x="457200" y="1170432"/>
+            <a:ext cx="11277295" cy="5230368"/>
+          </a:xfrm>
+          <a:prstGeom prst="rect">
+            <a:avLst/>
+          </a:prstGeom>
+          <a:noFill/>
+        </p:spPr>
+        <p:txBody>
+          <a:bodyPr wrap="square">
+            <a:spAutoFit/>
+          </a:bodyPr>
+          <a:lstStyle/>
+          <a:p>
+            <a:pPr>
+              <a:spcAft>
+                <a:spcPts val="800"/>
+              </a:spcAft>
+            </a:pPr>
+            <a:r>
+              <a:rPr sz="2000" b="0" i="0">
+                <a:solidFill>
+                  <a:srgbClr val="333333"/>
+                </a:solidFill>
+                <a:latin typeface="Calibri"/>
+              </a:rPr>
+              <a:t>–   La regla de honestidad es la de la sesión 5, aplicada de nuevo: </a:t>
+            </a:r>
+            <a:r>
+              <a:rPr sz="2000" b="1" i="0">
+                <a:solidFill>
+                  <a:srgbClr val="333333"/>
+                </a:solidFill>
+                <a:latin typeface="Calibri"/>
+              </a:rPr>
+              <a:t>cifra con método y fecha, o no va</a:t>
+            </a:r>
+            <a:r>
+              <a:rPr sz="2000" b="0" i="0">
+                <a:solidFill>
+                  <a:srgbClr val="333333"/>
+                </a:solidFill>
+                <a:latin typeface="Calibri"/>
+              </a:rPr>
+              <a:t>.</a:t>
+            </a:r>
+          </a:p>
+          <a:p>
+            <a:pPr>
+              <a:spcAft>
+                <a:spcPts val="800"/>
+              </a:spcAft>
+            </a:pPr>
+            <a:r>
+              <a:rPr sz="2000" b="0" i="0">
+                <a:solidFill>
+                  <a:srgbClr val="333333"/>
+                </a:solidFill>
+                <a:latin typeface="Calibri"/>
+              </a:rPr>
+              <a:t>–   Y hay un diagnóstico gratis escondido en esta exigencia: </a:t>
+            </a:r>
+            <a:r>
+              <a:rPr sz="2000" b="1" i="0">
+                <a:solidFill>
+                  <a:srgbClr val="333333"/>
+                </a:solidFill>
+                <a:latin typeface="Calibri"/>
+              </a:rPr>
+              <a:t>si el problema no admite ninguna cifra, está mal delimitado</a:t>
+            </a:r>
+            <a:r>
+              <a:rPr sz="2000" b="0" i="0">
+                <a:solidFill>
+                  <a:srgbClr val="333333"/>
+                </a:solidFill>
+                <a:latin typeface="Calibri"/>
+              </a:rPr>
+              <a:t>, y casi siempre es porque es demasiado grande.</a:t>
+            </a:r>
+          </a:p>
+          <a:p>
+            <a:pPr>
+              <a:spcAft>
+                <a:spcPts val="800"/>
+              </a:spcAft>
+            </a:pPr>
+            <a:r>
+              <a:rPr sz="2000" b="0" i="0">
+                <a:solidFill>
+                  <a:srgbClr val="333333"/>
+                </a:solidFill>
+                <a:latin typeface="Calibri"/>
+              </a:rPr>
+              <a:t>–   «La deserción estudiantil» no se puede medir con lo que tiene un equipo de primer semestre</a:t>
+            </a:r>
+          </a:p>
+          <a:p>
+            <a:pPr>
+              <a:spcAft>
+                <a:spcPts val="800"/>
+              </a:spcAft>
+            </a:pPr>
+            <a:r>
+              <a:rPr sz="2000" b="0" i="0">
+                <a:solidFill>
+                  <a:srgbClr val="333333"/>
+                </a:solidFill>
+                <a:latin typeface="Calibri"/>
+              </a:rPr>
+              <a:t>–   «cuántos de los 30 compañeros de mi grupo no saben en qué semestre pierden el beneficio de la beca» sí.</a:t>
+            </a:r>
+          </a:p>
+          <a:p>
+            <a:pPr>
+              <a:spcAft>
+                <a:spcPts val="800"/>
+              </a:spcAft>
+            </a:pPr>
+            <a:r>
+              <a:rPr sz="2000" b="0" i="0">
+                <a:solidFill>
+                  <a:srgbClr val="333333"/>
+                </a:solidFill>
+                <a:latin typeface="Calibri"/>
+              </a:rPr>
+              <a:t>–   Bajar el problema hasta que se pueda contar algo es la manera más rápida de volverlo abordable. </a:t>
+            </a:r>
+            <a:r>
+              <a:rPr sz="2000" b="1" i="0">
+                <a:solidFill>
+                  <a:srgbClr val="333333"/>
+                </a:solidFill>
+                <a:latin typeface="Calibri"/>
+              </a:rPr>
+              <a:t>Los cuatro criterios</a:t>
+            </a:r>
+            <a:r>
+              <a:rPr sz="2000" b="0" i="0">
+                <a:solidFill>
+                  <a:srgbClr val="333333"/>
+                </a:solidFill>
+                <a:latin typeface="Calibri"/>
+              </a:rPr>
+              <a:t> son un filtro y hay que aplicarlos en voz alta a cada problema propuesto</a:t>
+            </a:r>
+          </a:p>
+          <a:p>
+            <a:pPr>
+              <a:spcAft>
+                <a:spcPts val="800"/>
+              </a:spcAft>
+            </a:pPr>
+            <a:r>
+              <a:rPr sz="2000" b="0" i="0">
+                <a:solidFill>
+                  <a:srgbClr val="333333"/>
+                </a:solidFill>
+                <a:latin typeface="Calibri"/>
+              </a:rPr>
+              <a:t>–   Uno por uno. *Abordable* con navegador y herramientas gratuitas: nada que exija comprar equipos</a:t>
+            </a:r>
+          </a:p>
+          <a:p>
+            <a:pPr>
+              <a:spcAft>
+                <a:spcPts val="800"/>
+              </a:spcAft>
+            </a:pPr>
+            <a:r>
+              <a:rPr sz="2000" b="0" i="0">
+                <a:solidFill>
+                  <a:srgbClr val="333333"/>
+                </a:solidFill>
+                <a:latin typeface="Calibri"/>
+              </a:rPr>
+              <a:t>–   Contratar servicios de pago o conseguir permisos institucionales que no van a llegar en un semestre. *Medible*: existe la cifra. *Con acceso a los actores*: pueden hablar esta semana con alguien que vive el problema</a:t>
+            </a:r>
+          </a:p>
+        </p:txBody>
+      </p:sp>
+      <p:sp>
+        <p:nvSpPr>
+          <p:cNvPr id="6" name="TextBox 5"/>
+          <p:cNvSpPr txBox="1"/>
+          <p:nvPr/>
+        </p:nvSpPr>
+        <p:spPr>
+          <a:xfrm>
+            <a:off x="11185855" y="6473952"/>
+            <a:ext cx="640080" cy="274320"/>
+          </a:xfrm>
+          <a:prstGeom prst="rect">
+            <a:avLst/>
+          </a:prstGeom>
+          <a:noFill/>
+        </p:spPr>
+        <p:txBody>
+          <a:bodyPr wrap="square">
+            <a:spAutoFit/>
+          </a:bodyPr>
+          <a:lstStyle/>
+          <a:p>
+            <a:pPr algn="r"/>
+            <a:r>
+              <a:rPr sz="1100" b="0" i="0">
+                <a:solidFill>
+                  <a:srgbClr val="666666"/>
+                </a:solidFill>
+                <a:latin typeface="Calibri"/>
+              </a:rPr>
+              <a:t>16</a:t>
+            </a:r>
+          </a:p>
+        </p:txBody>
+      </p:sp>
+    </p:spTree>
+  </p:cSld>
+  <p:clrMapOvr>
+    <a:masterClrMapping/>
+  </p:clrMapOvr>
+</p:sld>
+</file>
+
+<file path=ppt/slides/slide17.xml><?xml version="1.0" encoding="utf-8"?>
+<p:sld xmlns:a="http://schemas.openxmlformats.org/drawingml/2006/main" xmlns:p="http://schemas.openxmlformats.org/presentationml/2006/main" xmlns:r="http://schemas.openxmlformats.org/officeDocument/2006/relationships">
+  <p:cSld>
+    <p:bg>
+      <p:bgPr>
+        <a:solidFill>
+          <a:srgbClr val="FFFFFF"/>
+        </a:solidFill>
+        <a:effectLst/>
+      </p:bgPr>
+    </p:bg>
+    <p:spTree>
+      <p:nvGrpSpPr>
+        <p:cNvPr id="1" name=""/>
+        <p:cNvGrpSpPr/>
+        <p:nvPr/>
+      </p:nvGrpSpPr>
+      <p:grpSpPr/>
+      <p:sp>
+        <p:nvSpPr>
+          <p:cNvPr id="2" name="Rectangle 1"/>
+          <p:cNvSpPr/>
+          <p:nvPr/>
+        </p:nvSpPr>
+        <p:spPr>
+          <a:xfrm>
+            <a:off x="0" y="0"/>
+            <a:ext cx="12191695" cy="960120"/>
+          </a:xfrm>
+          <a:prstGeom prst="rect">
+            <a:avLst/>
+          </a:prstGeom>
+          <a:solidFill>
+            <a:srgbClr val="095292"/>
+          </a:solidFill>
+          <a:ln>
+            <a:noFill/>
+          </a:ln>
+        </p:spPr>
+        <p:style>
+          <a:lnRef idx="1">
+            <a:schemeClr val="accent1"/>
+          </a:lnRef>
+          <a:fillRef idx="3">
+            <a:schemeClr val="accent1"/>
+          </a:fillRef>
+          <a:effectRef idx="2">
+            <a:schemeClr val="accent1"/>
+          </a:effectRef>
+          <a:fontRef idx="minor">
+            <a:schemeClr val="lt1"/>
+          </a:fontRef>
+        </p:style>
+        <p:txBody>
+          <a:bodyPr rtlCol="0" anchor="ctr"/>
+          <a:lstStyle/>
+          <a:p>
+            <a:pPr algn="ctr"/>
+          </a:p>
+        </p:txBody>
+      </p:sp>
+      <p:sp>
+        <p:nvSpPr>
+          <p:cNvPr id="3" name="Rectangle 2"/>
+          <p:cNvSpPr/>
+          <p:nvPr/>
+        </p:nvSpPr>
+        <p:spPr>
+          <a:xfrm>
+            <a:off x="0" y="960120"/>
+            <a:ext cx="12191695" cy="41148"/>
+          </a:xfrm>
+          <a:prstGeom prst="rect">
+            <a:avLst/>
+          </a:prstGeom>
+          <a:solidFill>
+            <a:srgbClr val="FFD000"/>
+          </a:solidFill>
+          <a:ln>
+            <a:noFill/>
+          </a:ln>
+        </p:spPr>
+        <p:style>
+          <a:lnRef idx="1">
+            <a:schemeClr val="accent1"/>
+          </a:lnRef>
+          <a:fillRef idx="3">
+            <a:schemeClr val="accent1"/>
+          </a:fillRef>
+          <a:effectRef idx="2">
+            <a:schemeClr val="accent1"/>
+          </a:effectRef>
+          <a:fontRef idx="minor">
+            <a:schemeClr val="lt1"/>
+          </a:fontRef>
+        </p:style>
+        <p:txBody>
+          <a:bodyPr rtlCol="0" anchor="ctr"/>
+          <a:lstStyle/>
+          <a:p>
+            <a:pPr algn="ctr"/>
+          </a:p>
+        </p:txBody>
+      </p:sp>
+      <p:sp>
+        <p:nvSpPr>
+          <p:cNvPr id="4" name="TextBox 3"/>
+          <p:cNvSpPr txBox="1"/>
+          <p:nvPr/>
+        </p:nvSpPr>
+        <p:spPr>
+          <a:xfrm>
+            <a:off x="457200" y="164592"/>
+            <a:ext cx="11277295" cy="502920"/>
+          </a:xfrm>
+          <a:prstGeom prst="rect">
+            <a:avLst/>
+          </a:prstGeom>
+          <a:noFill/>
+        </p:spPr>
+        <p:txBody>
+          <a:bodyPr wrap="square">
+            <a:spAutoFit/>
+          </a:bodyPr>
+          <a:lstStyle/>
+          <a:p>
+            <a:r>
+              <a:rPr sz="2600" b="1" i="0">
+                <a:solidFill>
+                  <a:srgbClr val="FFFFFF"/>
+                </a:solidFill>
+                <a:latin typeface="Calibri"/>
+              </a:rPr>
+              <a:t>La línea base y los cuatro criterios de viabilidad (3/3)</a:t>
+            </a:r>
+          </a:p>
+        </p:txBody>
+      </p:sp>
+      <p:sp>
+        <p:nvSpPr>
+          <p:cNvPr id="5" name="TextBox 4"/>
+          <p:cNvSpPr txBox="1"/>
+          <p:nvPr/>
+        </p:nvSpPr>
+        <p:spPr>
+          <a:xfrm>
+            <a:off x="457200" y="1170432"/>
+            <a:ext cx="11277295" cy="5230368"/>
+          </a:xfrm>
+          <a:prstGeom prst="rect">
+            <a:avLst/>
+          </a:prstGeom>
+          <a:noFill/>
+        </p:spPr>
+        <p:txBody>
+          <a:bodyPr wrap="square">
+            <a:spAutoFit/>
+          </a:bodyPr>
+          <a:lstStyle/>
+          <a:p>
+            <a:pPr>
+              <a:spcAft>
+                <a:spcPts val="800"/>
+              </a:spcAft>
+            </a:pPr>
+            <a:r>
+              <a:rPr sz="2000" b="0" i="0">
+                <a:solidFill>
+                  <a:srgbClr val="333333"/>
+                </a:solidFill>
+                <a:latin typeface="Calibri"/>
+              </a:rPr>
+              <a:t>–   Sin trámites; este criterio es el que descarta más propuestas y hay que ser firme</a:t>
+            </a:r>
+          </a:p>
+          <a:p>
+            <a:pPr>
+              <a:spcAft>
+                <a:spcPts val="800"/>
+              </a:spcAft>
+            </a:pPr>
+            <a:r>
+              <a:rPr sz="2000" b="0" i="0">
+                <a:solidFill>
+                  <a:srgbClr val="333333"/>
+                </a:solidFill>
+                <a:latin typeface="Calibri"/>
+              </a:rPr>
+              <a:t>–   Porque un proyecto sobre una entidad a la que nadie puede preguntarle nada termina siendo un ejercicio de imaginación con aspecto de proyecto. *Con dueño del problema*: hay una persona o un grupo concreto al que le duele y que reconocería la mejora</a:t>
+            </a:r>
+          </a:p>
+          <a:p>
+            <a:pPr>
+              <a:spcAft>
+                <a:spcPts val="800"/>
+              </a:spcAft>
+            </a:pPr>
+            <a:r>
+              <a:rPr sz="2000" b="0" i="0">
+                <a:solidFill>
+                  <a:srgbClr val="333333"/>
+                </a:solidFill>
+                <a:latin typeface="Calibri"/>
+              </a:rPr>
+              <a:t>–   Si el afectado es «la sociedad», no hay a quién mostrarle el resultado en la Clase 15.</a:t>
+            </a:r>
+          </a:p>
+          <a:p>
+            <a:pPr>
+              <a:spcAft>
+                <a:spcPts val="800"/>
+              </a:spcAft>
+            </a:pPr>
+            <a:r>
+              <a:rPr sz="2000" b="0" i="0">
+                <a:solidFill>
+                  <a:srgbClr val="333333"/>
+                </a:solidFill>
+                <a:latin typeface="Calibri"/>
+              </a:rPr>
+              <a:t>–   Una advertencia sobre el ánimo del grupo: aplicar estos criterios va a matar algunas ideas ambiciosas y eso frustra.</a:t>
+            </a:r>
+          </a:p>
+          <a:p>
+            <a:pPr>
+              <a:spcAft>
+                <a:spcPts val="800"/>
+              </a:spcAft>
+            </a:pPr>
+            <a:r>
+              <a:rPr sz="2000" b="0" i="0">
+                <a:solidFill>
+                  <a:srgbClr val="333333"/>
+                </a:solidFill>
+                <a:latin typeface="Calibri"/>
+              </a:rPr>
+              <a:t>–   Un proyecto pequeño y verificable saca mejor nota que uno grandioso e imposible, y hay que decirlo hoy, antes de que se enamoren de la idea.</a:t>
+            </a:r>
+          </a:p>
+        </p:txBody>
+      </p:sp>
+      <p:sp>
+        <p:nvSpPr>
+          <p:cNvPr id="6" name="TextBox 5"/>
+          <p:cNvSpPr txBox="1"/>
+          <p:nvPr/>
+        </p:nvSpPr>
+        <p:spPr>
+          <a:xfrm>
+            <a:off x="11185855" y="6473952"/>
+            <a:ext cx="640080" cy="274320"/>
+          </a:xfrm>
+          <a:prstGeom prst="rect">
+            <a:avLst/>
+          </a:prstGeom>
+          <a:noFill/>
+        </p:spPr>
+        <p:txBody>
+          <a:bodyPr wrap="square">
+            <a:spAutoFit/>
+          </a:bodyPr>
+          <a:lstStyle/>
+          <a:p>
+            <a:pPr algn="r"/>
+            <a:r>
+              <a:rPr sz="1100" b="0" i="0">
+                <a:solidFill>
+                  <a:srgbClr val="666666"/>
+                </a:solidFill>
+                <a:latin typeface="Calibri"/>
+              </a:rPr>
+              <a:t>17</a:t>
+            </a:r>
+          </a:p>
+        </p:txBody>
+      </p:sp>
+    </p:spTree>
+  </p:cSld>
+  <p:clrMapOvr>
+    <a:masterClrMapping/>
+  </p:clrMapOvr>
+</p:sld>
+</file>
+
+<file path=ppt/slides/slide18.xml><?xml version="1.0" encoding="utf-8"?>
+<p:sld xmlns:a="http://schemas.openxmlformats.org/drawingml/2006/main" xmlns:p="http://schemas.openxmlformats.org/presentationml/2006/main" xmlns:r="http://schemas.openxmlformats.org/officeDocument/2006/relationships">
+  <p:cSld>
+    <p:bg>
+      <p:bgPr>
+        <a:solidFill>
+          <a:srgbClr val="FFFFFF"/>
+        </a:solidFill>
+        <a:effectLst/>
+      </p:bgPr>
+    </p:bg>
+    <p:spTree>
+      <p:nvGrpSpPr>
+        <p:cNvPr id="1" name=""/>
+        <p:cNvGrpSpPr/>
+        <p:nvPr/>
+      </p:nvGrpSpPr>
+      <p:grpSpPr/>
+      <p:sp>
+        <p:nvSpPr>
+          <p:cNvPr id="2" name="Rectangle 1"/>
+          <p:cNvSpPr/>
+          <p:nvPr/>
+        </p:nvSpPr>
+        <p:spPr>
+          <a:xfrm>
+            <a:off x="0" y="0"/>
+            <a:ext cx="12191695" cy="960120"/>
+          </a:xfrm>
+          <a:prstGeom prst="rect">
+            <a:avLst/>
+          </a:prstGeom>
+          <a:solidFill>
+            <a:srgbClr val="095292"/>
+          </a:solidFill>
+          <a:ln>
+            <a:noFill/>
+          </a:ln>
+        </p:spPr>
+        <p:style>
+          <a:lnRef idx="1">
+            <a:schemeClr val="accent1"/>
+          </a:lnRef>
+          <a:fillRef idx="3">
+            <a:schemeClr val="accent1"/>
+          </a:fillRef>
+          <a:effectRef idx="2">
+            <a:schemeClr val="accent1"/>
+          </a:effectRef>
+          <a:fontRef idx="minor">
+            <a:schemeClr val="lt1"/>
+          </a:fontRef>
+        </p:style>
+        <p:txBody>
+          <a:bodyPr rtlCol="0" anchor="ctr"/>
+          <a:lstStyle/>
+          <a:p>
+            <a:pPr algn="ctr"/>
+          </a:p>
+        </p:txBody>
+      </p:sp>
+      <p:sp>
+        <p:nvSpPr>
+          <p:cNvPr id="3" name="Rectangle 2"/>
+          <p:cNvSpPr/>
+          <p:nvPr/>
+        </p:nvSpPr>
+        <p:spPr>
+          <a:xfrm>
+            <a:off x="0" y="960120"/>
+            <a:ext cx="12191695" cy="41148"/>
+          </a:xfrm>
+          <a:prstGeom prst="rect">
+            <a:avLst/>
+          </a:prstGeom>
+          <a:solidFill>
+            <a:srgbClr val="FFD000"/>
+          </a:solidFill>
+          <a:ln>
+            <a:noFill/>
+          </a:ln>
+        </p:spPr>
+        <p:style>
+          <a:lnRef idx="1">
+            <a:schemeClr val="accent1"/>
+          </a:lnRef>
+          <a:fillRef idx="3">
+            <a:schemeClr val="accent1"/>
+          </a:fillRef>
+          <a:effectRef idx="2">
+            <a:schemeClr val="accent1"/>
+          </a:effectRef>
+          <a:fontRef idx="minor">
+            <a:schemeClr val="lt1"/>
+          </a:fontRef>
+        </p:style>
+        <p:txBody>
+          <a:bodyPr rtlCol="0" anchor="ctr"/>
+          <a:lstStyle/>
+          <a:p>
+            <a:pPr algn="ctr"/>
+          </a:p>
+        </p:txBody>
+      </p:sp>
+      <p:sp>
+        <p:nvSpPr>
+          <p:cNvPr id="4" name="TextBox 3"/>
+          <p:cNvSpPr txBox="1"/>
+          <p:nvPr/>
+        </p:nvSpPr>
+        <p:spPr>
+          <a:xfrm>
+            <a:off x="457200" y="164592"/>
+            <a:ext cx="11277295" cy="502920"/>
+          </a:xfrm>
+          <a:prstGeom prst="rect">
+            <a:avLst/>
+          </a:prstGeom>
+          <a:noFill/>
+        </p:spPr>
+        <p:txBody>
+          <a:bodyPr wrap="square">
+            <a:spAutoFit/>
+          </a:bodyPr>
+          <a:lstStyle/>
+          <a:p>
+            <a:r>
+              <a:rPr sz="2600" b="1" i="0">
+                <a:solidFill>
+                  <a:srgbClr val="FFFFFF"/>
+                </a:solidFill>
+                <a:latin typeface="Calibri"/>
+              </a:rPr>
+              <a:t>Cómo cerrar el corte: la ficha y la evaluación en la plataforma del curso (1/2)</a:t>
+            </a:r>
+          </a:p>
+        </p:txBody>
+      </p:sp>
+      <p:sp>
+        <p:nvSpPr>
+          <p:cNvPr id="5" name="TextBox 4"/>
+          <p:cNvSpPr txBox="1"/>
+          <p:nvPr/>
+        </p:nvSpPr>
+        <p:spPr>
+          <a:xfrm>
+            <a:off x="457200" y="1170432"/>
+            <a:ext cx="11277295" cy="5230368"/>
+          </a:xfrm>
+          <a:prstGeom prst="rect">
+            <a:avLst/>
+          </a:prstGeom>
+          <a:noFill/>
+        </p:spPr>
+        <p:txBody>
+          <a:bodyPr wrap="square">
+            <a:spAutoFit/>
+          </a:bodyPr>
+          <a:lstStyle/>
+          <a:p>
+            <a:pPr>
+              <a:spcAft>
+                <a:spcPts val="800"/>
+              </a:spcAft>
+            </a:pPr>
+            <a:r>
+              <a:rPr sz="2000" b="0" i="0">
+                <a:solidFill>
+                  <a:srgbClr val="333333"/>
+                </a:solidFill>
+                <a:latin typeface="Calibri"/>
+              </a:rPr>
+              <a:t>–   El reparto del tiempo de hoy es distinto al de las otras sesiones y hay que respetarlo: </a:t>
+            </a:r>
+            <a:r>
+              <a:rPr sz="2000" b="1" i="0">
+                <a:solidFill>
+                  <a:srgbClr val="333333"/>
+                </a:solidFill>
+                <a:latin typeface="Calibri"/>
+              </a:rPr>
+              <a:t>teoría 25 minutos</a:t>
+            </a:r>
+            <a:r>
+              <a:rPr sz="2000" b="0" i="0">
+                <a:solidFill>
+                  <a:srgbClr val="333333"/>
+                </a:solidFill>
+                <a:latin typeface="Calibri"/>
+              </a:rPr>
+              <a:t>, no 45.</a:t>
+            </a:r>
+          </a:p>
+          <a:p>
+            <a:pPr>
+              <a:spcAft>
+                <a:spcPts val="800"/>
+              </a:spcAft>
+            </a:pPr>
+            <a:r>
+              <a:rPr sz="2000" b="0" i="0">
+                <a:solidFill>
+                  <a:srgbClr val="333333"/>
+                </a:solidFill>
+                <a:latin typeface="Calibri"/>
+              </a:rPr>
+              <a:t>–   El corte se cierra con dos entregas y las dos ocurren en clase, así que quedarse largo en la explicación significa aplicar la evaluación con la gente apurada</a:t>
+            </a:r>
+          </a:p>
+          <a:p>
+            <a:pPr>
+              <a:spcAft>
+                <a:spcPts val="800"/>
+              </a:spcAft>
+            </a:pPr>
+            <a:r>
+              <a:rPr sz="2000" b="0" i="0">
+                <a:solidFill>
+                  <a:srgbClr val="333333"/>
+                </a:solidFill>
+                <a:latin typeface="Calibri"/>
+              </a:rPr>
+              <a:t>–   Que es la peor manera de evaluar. </a:t>
+            </a:r>
+            <a:r>
+              <a:rPr sz="2000" b="1" i="0">
+                <a:solidFill>
+                  <a:srgbClr val="333333"/>
+                </a:solidFill>
+                <a:latin typeface="Calibri"/>
+              </a:rPr>
+              <a:t>La ficha del problema</a:t>
+            </a:r>
+            <a:r>
+              <a:rPr sz="2000" b="0" i="0">
+                <a:solidFill>
+                  <a:srgbClr val="333333"/>
+                </a:solidFill>
+                <a:latin typeface="Calibri"/>
+              </a:rPr>
+              <a:t> es el producto del corte 1 y conviene decirle al grupo exactamente qué peso tiene en el semestre: a partir de la sesión 7 todo se hace sobre ella.</a:t>
+            </a:r>
+          </a:p>
+          <a:p>
+            <a:pPr>
+              <a:spcAft>
+                <a:spcPts val="800"/>
+              </a:spcAft>
+            </a:pPr>
+            <a:r>
+              <a:rPr sz="2000" b="0" i="0">
+                <a:solidFill>
+                  <a:srgbClr val="333333"/>
+                </a:solidFill>
+                <a:latin typeface="Calibri"/>
+              </a:rPr>
+              <a:t>–   El ciclo de vida de la sesión 7 se aplica a ese problema; el prototipo de las sesiones 10 y 11 resuelve ese problema; la evaluación de impacto de la Clase 13 evalúa esa solución; el informe final de la Clase 16 compara contra esa línea base.</a:t>
+            </a:r>
+          </a:p>
+          <a:p>
+            <a:pPr>
+              <a:spcAft>
+                <a:spcPts val="800"/>
+              </a:spcAft>
+            </a:pPr>
+            <a:r>
+              <a:rPr sz="2000" b="0" i="0">
+                <a:solidFill>
+                  <a:srgbClr val="333333"/>
+                </a:solidFill>
+                <a:latin typeface="Calibri"/>
+              </a:rPr>
+              <a:t>–   Un equipo que hoy escriba una ficha vaga va a arrastrar el problema diez sesiones. </a:t>
+            </a:r>
+            <a:r>
+              <a:rPr sz="2000" b="1" i="0">
+                <a:solidFill>
+                  <a:srgbClr val="333333"/>
+                </a:solidFill>
+                <a:latin typeface="Calibri"/>
+              </a:rPr>
+              <a:t>La evaluación de corte</a:t>
+            </a:r>
+            <a:r>
+              <a:rPr sz="2000" b="0" i="0">
+                <a:solidFill>
+                  <a:srgbClr val="333333"/>
+                </a:solidFill>
+                <a:latin typeface="Calibri"/>
+              </a:rPr>
+              <a:t> son los últimos veinte minutos, en la plataforma del curso, individual, y cubre las sesiones 1 a 6.</a:t>
+            </a:r>
+          </a:p>
+        </p:txBody>
+      </p:sp>
+      <p:sp>
+        <p:nvSpPr>
+          <p:cNvPr id="6" name="TextBox 5"/>
+          <p:cNvSpPr txBox="1"/>
+          <p:nvPr/>
+        </p:nvSpPr>
+        <p:spPr>
+          <a:xfrm>
+            <a:off x="11185855" y="6473952"/>
+            <a:ext cx="640080" cy="274320"/>
+          </a:xfrm>
+          <a:prstGeom prst="rect">
+            <a:avLst/>
+          </a:prstGeom>
+          <a:noFill/>
+        </p:spPr>
+        <p:txBody>
+          <a:bodyPr wrap="square">
+            <a:spAutoFit/>
+          </a:bodyPr>
+          <a:lstStyle/>
+          <a:p>
+            <a:pPr algn="r"/>
+            <a:r>
+              <a:rPr sz="1100" b="0" i="0">
+                <a:solidFill>
+                  <a:srgbClr val="666666"/>
+                </a:solidFill>
+                <a:latin typeface="Calibri"/>
+              </a:rPr>
+              <a:t>18</a:t>
+            </a:r>
+          </a:p>
+        </p:txBody>
+      </p:sp>
+    </p:spTree>
+  </p:cSld>
+  <p:clrMapOvr>
+    <a:masterClrMapping/>
+  </p:clrMapOvr>
+</p:sld>
+</file>
+
+<file path=ppt/slides/slide19.xml><?xml version="1.0" encoding="utf-8"?>
+<p:sld xmlns:a="http://schemas.openxmlformats.org/drawingml/2006/main" xmlns:p="http://schemas.openxmlformats.org/presentationml/2006/main" xmlns:r="http://schemas.openxmlformats.org/officeDocument/2006/relationships">
+  <p:cSld>
+    <p:bg>
+      <p:bgPr>
+        <a:solidFill>
+          <a:srgbClr val="FFFFFF"/>
+        </a:solidFill>
+        <a:effectLst/>
+      </p:bgPr>
+    </p:bg>
+    <p:spTree>
+      <p:nvGrpSpPr>
+        <p:cNvPr id="1" name=""/>
+        <p:cNvGrpSpPr/>
+        <p:nvPr/>
+      </p:nvGrpSpPr>
+      <p:grpSpPr/>
+      <p:sp>
+        <p:nvSpPr>
+          <p:cNvPr id="2" name="Rectangle 1"/>
+          <p:cNvSpPr/>
+          <p:nvPr/>
+        </p:nvSpPr>
+        <p:spPr>
+          <a:xfrm>
+            <a:off x="0" y="0"/>
+            <a:ext cx="12191695" cy="960120"/>
+          </a:xfrm>
+          <a:prstGeom prst="rect">
+            <a:avLst/>
+          </a:prstGeom>
+          <a:solidFill>
+            <a:srgbClr val="095292"/>
+          </a:solidFill>
+          <a:ln>
+            <a:noFill/>
+          </a:ln>
+        </p:spPr>
+        <p:style>
+          <a:lnRef idx="1">
+            <a:schemeClr val="accent1"/>
+          </a:lnRef>
+          <a:fillRef idx="3">
+            <a:schemeClr val="accent1"/>
+          </a:fillRef>
+          <a:effectRef idx="2">
+            <a:schemeClr val="accent1"/>
+          </a:effectRef>
+          <a:fontRef idx="minor">
+            <a:schemeClr val="lt1"/>
+          </a:fontRef>
+        </p:style>
+        <p:txBody>
+          <a:bodyPr rtlCol="0" anchor="ctr"/>
+          <a:lstStyle/>
+          <a:p>
+            <a:pPr algn="ctr"/>
+          </a:p>
+        </p:txBody>
+      </p:sp>
+      <p:sp>
+        <p:nvSpPr>
+          <p:cNvPr id="3" name="Rectangle 2"/>
+          <p:cNvSpPr/>
+          <p:nvPr/>
+        </p:nvSpPr>
+        <p:spPr>
+          <a:xfrm>
+            <a:off x="0" y="960120"/>
+            <a:ext cx="12191695" cy="41148"/>
+          </a:xfrm>
+          <a:prstGeom prst="rect">
+            <a:avLst/>
+          </a:prstGeom>
+          <a:solidFill>
+            <a:srgbClr val="FFD000"/>
+          </a:solidFill>
+          <a:ln>
+            <a:noFill/>
+          </a:ln>
+        </p:spPr>
+        <p:style>
+          <a:lnRef idx="1">
+            <a:schemeClr val="accent1"/>
+          </a:lnRef>
+          <a:fillRef idx="3">
+            <a:schemeClr val="accent1"/>
+          </a:fillRef>
+          <a:effectRef idx="2">
+            <a:schemeClr val="accent1"/>
+          </a:effectRef>
+          <a:fontRef idx="minor">
+            <a:schemeClr val="lt1"/>
+          </a:fontRef>
+        </p:style>
+        <p:txBody>
+          <a:bodyPr rtlCol="0" anchor="ctr"/>
+          <a:lstStyle/>
+          <a:p>
+            <a:pPr algn="ctr"/>
+          </a:p>
+        </p:txBody>
+      </p:sp>
+      <p:sp>
+        <p:nvSpPr>
+          <p:cNvPr id="4" name="TextBox 3"/>
+          <p:cNvSpPr txBox="1"/>
+          <p:nvPr/>
+        </p:nvSpPr>
+        <p:spPr>
+          <a:xfrm>
+            <a:off x="457200" y="164592"/>
+            <a:ext cx="11277295" cy="502920"/>
+          </a:xfrm>
+          <a:prstGeom prst="rect">
+            <a:avLst/>
+          </a:prstGeom>
+          <a:noFill/>
+        </p:spPr>
+        <p:txBody>
+          <a:bodyPr wrap="square">
+            <a:spAutoFit/>
+          </a:bodyPr>
+          <a:lstStyle/>
+          <a:p>
+            <a:r>
+              <a:rPr sz="2600" b="1" i="0">
+                <a:solidFill>
+                  <a:srgbClr val="FFFFFF"/>
+                </a:solidFill>
+                <a:latin typeface="Calibri"/>
+              </a:rPr>
+              <a:t>Cómo cerrar el corte: la ficha y la evaluación en la plataforma del curso (2/2)</a:t>
+            </a:r>
+          </a:p>
+        </p:txBody>
+      </p:sp>
+      <p:sp>
+        <p:nvSpPr>
+          <p:cNvPr id="5" name="TextBox 4"/>
+          <p:cNvSpPr txBox="1"/>
+          <p:nvPr/>
+        </p:nvSpPr>
+        <p:spPr>
+          <a:xfrm>
+            <a:off x="457200" y="1170432"/>
+            <a:ext cx="11277295" cy="5230368"/>
+          </a:xfrm>
+          <a:prstGeom prst="rect">
+            <a:avLst/>
+          </a:prstGeom>
+          <a:noFill/>
+        </p:spPr>
+        <p:txBody>
+          <a:bodyPr wrap="square">
+            <a:spAutoFit/>
+          </a:bodyPr>
+          <a:lstStyle/>
+          <a:p>
+            <a:pPr>
+              <a:spcAft>
+                <a:spcPts val="800"/>
+              </a:spcAft>
+            </a:pPr>
+            <a:r>
+              <a:rPr sz="2000" b="0" i="0">
+                <a:solidFill>
+                  <a:srgbClr val="333333"/>
+                </a:solidFill>
+                <a:latin typeface="Calibri"/>
+              </a:rPr>
+              <a:t>–   Tres cosas operativas: el enlace va en el chat de la reunión, hay que decir explícitamente que </a:t>
+            </a:r>
+            <a:r>
+              <a:rPr sz="2000" b="1" i="0">
+                <a:solidFill>
+                  <a:srgbClr val="333333"/>
+                </a:solidFill>
+                <a:latin typeface="Calibri"/>
+              </a:rPr>
+              <a:t>la plataforma del curso no es una plataforma oficial de la universidad</a:t>
+            </a:r>
+            <a:r>
+              <a:rPr sz="2000" b="0" i="0">
+                <a:solidFill>
+                  <a:srgbClr val="333333"/>
+                </a:solidFill>
+                <a:latin typeface="Calibri"/>
+              </a:rPr>
+              <a:t> sino la herramienta que usa este curso</a:t>
+            </a:r>
+          </a:p>
+          <a:p>
+            <a:pPr>
+              <a:spcAft>
+                <a:spcPts val="800"/>
+              </a:spcAft>
+            </a:pPr>
+            <a:r>
+              <a:rPr sz="2000" b="0" i="0">
+                <a:solidFill>
+                  <a:srgbClr val="333333"/>
+                </a:solidFill>
+                <a:latin typeface="Calibri"/>
+              </a:rPr>
+              <a:t>–   Y hay que pedir que cualquier problema para abrirlo se avise </a:t>
+            </a:r>
+            <a:r>
+              <a:rPr sz="2000" b="1" i="0">
+                <a:solidFill>
+                  <a:srgbClr val="333333"/>
+                </a:solidFill>
+                <a:latin typeface="Calibri"/>
+              </a:rPr>
+              <a:t>en el chat, en el momento</a:t>
+            </a:r>
+            <a:r>
+              <a:rPr sz="2000" b="0" i="0">
+                <a:solidFill>
+                  <a:srgbClr val="333333"/>
+                </a:solidFill>
+                <a:latin typeface="Calibri"/>
+              </a:rPr>
+              <a:t>, no al día siguiente por correo.</a:t>
+            </a:r>
+          </a:p>
+          <a:p>
+            <a:pPr>
+              <a:spcAft>
+                <a:spcPts val="800"/>
+              </a:spcAft>
+            </a:pPr>
+            <a:r>
+              <a:rPr sz="2000" b="0" i="0">
+                <a:solidFill>
+                  <a:srgbClr val="333333"/>
+                </a:solidFill>
+                <a:latin typeface="Calibri"/>
+              </a:rPr>
+              <a:t>–   En un curso virtual el problema técnico no reportado se vuelve un reclamo de nota dos semanas después.</a:t>
+            </a:r>
+          </a:p>
+          <a:p>
+            <a:pPr>
+              <a:spcAft>
+                <a:spcPts val="800"/>
+              </a:spcAft>
+            </a:pPr>
+            <a:r>
+              <a:rPr sz="2000" b="0" i="0">
+                <a:solidFill>
+                  <a:srgbClr val="333333"/>
+                </a:solidFill>
+                <a:latin typeface="Calibri"/>
+              </a:rPr>
+              <a:t>–   Una última recomendación de manejo del grupo: no anuncie la evaluación al final de las exposiciones, anúnciela en el minuto uno, cuando presente la agenda.</a:t>
+            </a:r>
+          </a:p>
+          <a:p>
+            <a:pPr>
+              <a:spcAft>
+                <a:spcPts val="800"/>
+              </a:spcAft>
+            </a:pPr>
+            <a:r>
+              <a:rPr sz="2000" b="0" i="0">
+                <a:solidFill>
+                  <a:srgbClr val="333333"/>
+                </a:solidFill>
+                <a:latin typeface="Calibri"/>
+              </a:rPr>
+              <a:t>–   La gente organiza su atención distinto cuando sabe que hay una evaluación al cierre, y además evita que alguien se desconecte después de exponer.</a:t>
+            </a:r>
+          </a:p>
+        </p:txBody>
+      </p:sp>
+      <p:sp>
+        <p:nvSpPr>
+          <p:cNvPr id="6" name="TextBox 5"/>
+          <p:cNvSpPr txBox="1"/>
+          <p:nvPr/>
+        </p:nvSpPr>
+        <p:spPr>
+          <a:xfrm>
+            <a:off x="11185855" y="6473952"/>
+            <a:ext cx="640080" cy="274320"/>
+          </a:xfrm>
+          <a:prstGeom prst="rect">
+            <a:avLst/>
+          </a:prstGeom>
+          <a:noFill/>
+        </p:spPr>
+        <p:txBody>
+          <a:bodyPr wrap="square">
+            <a:spAutoFit/>
+          </a:bodyPr>
+          <a:lstStyle/>
+          <a:p>
+            <a:pPr algn="r"/>
+            <a:r>
+              <a:rPr sz="1100" b="0" i="0">
+                <a:solidFill>
+                  <a:srgbClr val="666666"/>
+                </a:solidFill>
+                <a:latin typeface="Calibri"/>
+              </a:rPr>
+              <a:t>19</a:t>
             </a:r>
           </a:p>
         </p:txBody>
@@ -7390,6 +7957,2895 @@
                 <a:latin typeface="Calibri"/>
               </a:rPr>
               <a:t>2</a:t>
+            </a:r>
+          </a:p>
+        </p:txBody>
+      </p:sp>
+    </p:spTree>
+  </p:cSld>
+  <p:clrMapOvr>
+    <a:masterClrMapping/>
+  </p:clrMapOvr>
+</p:sld>
+</file>
+
+<file path=ppt/slides/slide20.xml><?xml version="1.0" encoding="utf-8"?>
+<p:sld xmlns:a="http://schemas.openxmlformats.org/drawingml/2006/main" xmlns:p="http://schemas.openxmlformats.org/presentationml/2006/main" xmlns:r="http://schemas.openxmlformats.org/officeDocument/2006/relationships">
+  <p:cSld>
+    <p:bg>
+      <p:bgPr>
+        <a:solidFill>
+          <a:srgbClr val="FFFFFF"/>
+        </a:solidFill>
+        <a:effectLst/>
+      </p:bgPr>
+    </p:bg>
+    <p:spTree>
+      <p:nvGrpSpPr>
+        <p:cNvPr id="1" name=""/>
+        <p:cNvGrpSpPr/>
+        <p:nvPr/>
+      </p:nvGrpSpPr>
+      <p:grpSpPr/>
+      <p:sp>
+        <p:nvSpPr>
+          <p:cNvPr id="2" name="Rectangle 1"/>
+          <p:cNvSpPr/>
+          <p:nvPr/>
+        </p:nvSpPr>
+        <p:spPr>
+          <a:xfrm>
+            <a:off x="0" y="0"/>
+            <a:ext cx="12191695" cy="1170432"/>
+          </a:xfrm>
+          <a:prstGeom prst="rect">
+            <a:avLst/>
+          </a:prstGeom>
+          <a:solidFill>
+            <a:srgbClr val="095292"/>
+          </a:solidFill>
+          <a:ln>
+            <a:noFill/>
+          </a:ln>
+        </p:spPr>
+        <p:style>
+          <a:lnRef idx="1">
+            <a:schemeClr val="accent1"/>
+          </a:lnRef>
+          <a:fillRef idx="3">
+            <a:schemeClr val="accent1"/>
+          </a:fillRef>
+          <a:effectRef idx="2">
+            <a:schemeClr val="accent1"/>
+          </a:effectRef>
+          <a:fontRef idx="minor">
+            <a:schemeClr val="lt1"/>
+          </a:fontRef>
+        </p:style>
+        <p:txBody>
+          <a:bodyPr rtlCol="0" anchor="ctr"/>
+          <a:lstStyle/>
+          <a:p>
+            <a:pPr algn="ctr"/>
+          </a:p>
+        </p:txBody>
+      </p:sp>
+      <p:sp>
+        <p:nvSpPr>
+          <p:cNvPr id="3" name="Rectangle 2"/>
+          <p:cNvSpPr/>
+          <p:nvPr/>
+        </p:nvSpPr>
+        <p:spPr>
+          <a:xfrm>
+            <a:off x="0" y="1170432"/>
+            <a:ext cx="12191695" cy="41148"/>
+          </a:xfrm>
+          <a:prstGeom prst="rect">
+            <a:avLst/>
+          </a:prstGeom>
+          <a:solidFill>
+            <a:srgbClr val="FFD000"/>
+          </a:solidFill>
+          <a:ln>
+            <a:noFill/>
+          </a:ln>
+        </p:spPr>
+        <p:style>
+          <a:lnRef idx="1">
+            <a:schemeClr val="accent1"/>
+          </a:lnRef>
+          <a:fillRef idx="3">
+            <a:schemeClr val="accent1"/>
+          </a:fillRef>
+          <a:effectRef idx="2">
+            <a:schemeClr val="accent1"/>
+          </a:effectRef>
+          <a:fontRef idx="minor">
+            <a:schemeClr val="lt1"/>
+          </a:fontRef>
+        </p:style>
+        <p:txBody>
+          <a:bodyPr rtlCol="0" anchor="ctr"/>
+          <a:lstStyle/>
+          <a:p>
+            <a:pPr algn="ctr"/>
+          </a:p>
+        </p:txBody>
+      </p:sp>
+      <p:sp>
+        <p:nvSpPr>
+          <p:cNvPr id="4" name="TextBox 3"/>
+          <p:cNvSpPr txBox="1"/>
+          <p:nvPr/>
+        </p:nvSpPr>
+        <p:spPr>
+          <a:xfrm>
+            <a:off x="457200" y="164592"/>
+            <a:ext cx="11277295" cy="384048"/>
+          </a:xfrm>
+          <a:prstGeom prst="rect">
+            <a:avLst/>
+          </a:prstGeom>
+          <a:noFill/>
+        </p:spPr>
+        <p:txBody>
+          <a:bodyPr wrap="square">
+            <a:spAutoFit/>
+          </a:bodyPr>
+          <a:lstStyle/>
+          <a:p>
+            <a:r>
+              <a:rPr sz="2600" b="1" i="0">
+                <a:solidFill>
+                  <a:srgbClr val="FFFFFF"/>
+                </a:solidFill>
+                <a:latin typeface="Calibri"/>
+              </a:rPr>
+              <a:t>Taller de hoy: Ficha del problema del proyecto</a:t>
+            </a:r>
+          </a:p>
+        </p:txBody>
+      </p:sp>
+      <p:sp>
+        <p:nvSpPr>
+          <p:cNvPr id="5" name="TextBox 4"/>
+          <p:cNvSpPr txBox="1"/>
+          <p:nvPr/>
+        </p:nvSpPr>
+        <p:spPr>
+          <a:xfrm>
+            <a:off x="457200" y="566928"/>
+            <a:ext cx="11277295" cy="411480"/>
+          </a:xfrm>
+          <a:prstGeom prst="rect">
+            <a:avLst/>
+          </a:prstGeom>
+          <a:noFill/>
+        </p:spPr>
+        <p:txBody>
+          <a:bodyPr wrap="square">
+            <a:spAutoFit/>
+          </a:bodyPr>
+          <a:lstStyle/>
+          <a:p>
+            <a:r>
+              <a:rPr sz="1400" b="0" i="0">
+                <a:solidFill>
+                  <a:srgbClr val="B8D8EE"/>
+                </a:solidFill>
+                <a:latin typeface="Calibri"/>
+              </a:rPr>
+              <a:t>17 min en equipos · cada equipo, su propio problema · ficha del problema + árbol de causas</a:t>
+            </a:r>
+          </a:p>
+        </p:txBody>
+      </p:sp>
+      <p:sp>
+        <p:nvSpPr>
+          <p:cNvPr id="6" name="Rounded Rectangle 5"/>
+          <p:cNvSpPr/>
+          <p:nvPr/>
+        </p:nvSpPr>
+        <p:spPr>
+          <a:xfrm>
+            <a:off x="457200" y="1472184"/>
+            <a:ext cx="11277295" cy="566928"/>
+          </a:xfrm>
+          <a:prstGeom prst="roundRect">
+            <a:avLst>
+              <a:gd name="adj" fmla="val 12000"/>
+            </a:avLst>
+          </a:prstGeom>
+          <a:solidFill>
+            <a:srgbClr val="F2F2F2"/>
+          </a:solidFill>
+          <a:ln>
+            <a:noFill/>
+          </a:ln>
+        </p:spPr>
+        <p:style>
+          <a:lnRef idx="1">
+            <a:schemeClr val="accent1"/>
+          </a:lnRef>
+          <a:fillRef idx="3">
+            <a:schemeClr val="accent1"/>
+          </a:fillRef>
+          <a:effectRef idx="2">
+            <a:schemeClr val="accent1"/>
+          </a:effectRef>
+          <a:fontRef idx="minor">
+            <a:schemeClr val="lt1"/>
+          </a:fontRef>
+        </p:style>
+        <p:txBody>
+          <a:bodyPr rtlCol="0" anchor="ctr"/>
+          <a:lstStyle/>
+          <a:p>
+            <a:pPr algn="ctr"/>
+          </a:p>
+        </p:txBody>
+      </p:sp>
+      <p:sp>
+        <p:nvSpPr>
+          <p:cNvPr id="7" name="Rectangle 6"/>
+          <p:cNvSpPr/>
+          <p:nvPr/>
+        </p:nvSpPr>
+        <p:spPr>
+          <a:xfrm>
+            <a:off x="640080" y="1618487"/>
+            <a:ext cx="274320" cy="274320"/>
+          </a:xfrm>
+          <a:prstGeom prst="rect">
+            <a:avLst/>
+          </a:prstGeom>
+          <a:solidFill>
+            <a:srgbClr val="FFFFFF"/>
+          </a:solidFill>
+          <a:ln>
+            <a:solidFill>
+              <a:srgbClr val="333333"/>
+            </a:solidFill>
+          </a:ln>
+        </p:spPr>
+        <p:style>
+          <a:lnRef idx="1">
+            <a:schemeClr val="accent1"/>
+          </a:lnRef>
+          <a:fillRef idx="3">
+            <a:schemeClr val="accent1"/>
+          </a:fillRef>
+          <a:effectRef idx="2">
+            <a:schemeClr val="accent1"/>
+          </a:effectRef>
+          <a:fontRef idx="minor">
+            <a:schemeClr val="lt1"/>
+          </a:fontRef>
+        </p:style>
+        <p:txBody>
+          <a:bodyPr rtlCol="0" anchor="ctr"/>
+          <a:lstStyle/>
+          <a:p>
+            <a:pPr algn="ctr"/>
+          </a:p>
+        </p:txBody>
+      </p:sp>
+      <p:sp>
+        <p:nvSpPr>
+          <p:cNvPr id="8" name="Rectangle 7"/>
+          <p:cNvSpPr/>
+          <p:nvPr/>
+        </p:nvSpPr>
+        <p:spPr>
+          <a:xfrm>
+            <a:off x="640080" y="1618487"/>
+            <a:ext cx="73152" cy="274320"/>
+          </a:xfrm>
+          <a:prstGeom prst="rect">
+            <a:avLst/>
+          </a:prstGeom>
+          <a:solidFill>
+            <a:srgbClr val="269CCB"/>
+          </a:solidFill>
+          <a:ln>
+            <a:noFill/>
+          </a:ln>
+        </p:spPr>
+        <p:style>
+          <a:lnRef idx="1">
+            <a:schemeClr val="accent1"/>
+          </a:lnRef>
+          <a:fillRef idx="3">
+            <a:schemeClr val="accent1"/>
+          </a:fillRef>
+          <a:effectRef idx="2">
+            <a:schemeClr val="accent1"/>
+          </a:effectRef>
+          <a:fontRef idx="minor">
+            <a:schemeClr val="lt1"/>
+          </a:fontRef>
+        </p:style>
+        <p:txBody>
+          <a:bodyPr rtlCol="0" anchor="ctr"/>
+          <a:lstStyle/>
+          <a:p>
+            <a:pPr algn="ctr"/>
+          </a:p>
+        </p:txBody>
+      </p:sp>
+      <p:sp>
+        <p:nvSpPr>
+          <p:cNvPr id="9" name="TextBox 8"/>
+          <p:cNvSpPr txBox="1"/>
+          <p:nvPr/>
+        </p:nvSpPr>
+        <p:spPr>
+          <a:xfrm>
+            <a:off x="1097280" y="1563624"/>
+            <a:ext cx="10362895" cy="402336"/>
+          </a:xfrm>
+          <a:prstGeom prst="rect">
+            <a:avLst/>
+          </a:prstGeom>
+          <a:noFill/>
+        </p:spPr>
+        <p:txBody>
+          <a:bodyPr wrap="square" anchor="ctr"/>
+          <a:lstStyle/>
+          <a:p>
+            <a:r>
+              <a:rPr sz="1500" b="1" i="0">
+                <a:solidFill>
+                  <a:srgbClr val="333333"/>
+                </a:solidFill>
+                <a:latin typeface="Calibri"/>
+              </a:rPr>
+              <a:t>EL PROBLEMA EN UNA FRASE</a:t>
+            </a:r>
+            <a:r>
+              <a:rPr sz="1500" b="0" i="0">
+                <a:solidFill>
+                  <a:srgbClr val="333333"/>
+                </a:solidFill>
+                <a:latin typeface="Calibri"/>
+              </a:rPr>
+              <a:t> — Una sola frase con la fórmula: </a:t>
+            </a:r>
+            <a:r>
+              <a:rPr sz="1500" b="1" i="0">
+                <a:solidFill>
+                  <a:srgbClr val="333333"/>
+                </a:solidFill>
+                <a:latin typeface="Calibri"/>
+              </a:rPr>
+              <a:t>a quién le pasa qué, con qué consecuencia</a:t>
+            </a:r>
+            <a:r>
+              <a:rPr sz="1500" b="0" i="0">
+                <a:solidFill>
+                  <a:srgbClr val="333333"/>
+                </a:solidFill>
+                <a:latin typeface="Calibri"/>
+              </a:rPr>
+              <a:t>. Sin mencionar ninguna tecnología ni ninguna solución.</a:t>
+            </a:r>
+          </a:p>
+        </p:txBody>
+      </p:sp>
+      <p:sp>
+        <p:nvSpPr>
+          <p:cNvPr id="10" name="Rounded Rectangle 9"/>
+          <p:cNvSpPr/>
+          <p:nvPr/>
+        </p:nvSpPr>
+        <p:spPr>
+          <a:xfrm>
+            <a:off x="457200" y="2148839"/>
+            <a:ext cx="11277295" cy="566928"/>
+          </a:xfrm>
+          <a:prstGeom prst="roundRect">
+            <a:avLst>
+              <a:gd name="adj" fmla="val 12000"/>
+            </a:avLst>
+          </a:prstGeom>
+          <a:solidFill>
+            <a:srgbClr val="F2F2F2"/>
+          </a:solidFill>
+          <a:ln>
+            <a:noFill/>
+          </a:ln>
+        </p:spPr>
+        <p:style>
+          <a:lnRef idx="1">
+            <a:schemeClr val="accent1"/>
+          </a:lnRef>
+          <a:fillRef idx="3">
+            <a:schemeClr val="accent1"/>
+          </a:fillRef>
+          <a:effectRef idx="2">
+            <a:schemeClr val="accent1"/>
+          </a:effectRef>
+          <a:fontRef idx="minor">
+            <a:schemeClr val="lt1"/>
+          </a:fontRef>
+        </p:style>
+        <p:txBody>
+          <a:bodyPr rtlCol="0" anchor="ctr"/>
+          <a:lstStyle/>
+          <a:p>
+            <a:pPr algn="ctr"/>
+          </a:p>
+        </p:txBody>
+      </p:sp>
+      <p:sp>
+        <p:nvSpPr>
+          <p:cNvPr id="11" name="Rectangle 10"/>
+          <p:cNvSpPr/>
+          <p:nvPr/>
+        </p:nvSpPr>
+        <p:spPr>
+          <a:xfrm>
+            <a:off x="640080" y="2295144"/>
+            <a:ext cx="274320" cy="274320"/>
+          </a:xfrm>
+          <a:prstGeom prst="rect">
+            <a:avLst/>
+          </a:prstGeom>
+          <a:solidFill>
+            <a:srgbClr val="FFFFFF"/>
+          </a:solidFill>
+          <a:ln>
+            <a:solidFill>
+              <a:srgbClr val="333333"/>
+            </a:solidFill>
+          </a:ln>
+        </p:spPr>
+        <p:style>
+          <a:lnRef idx="1">
+            <a:schemeClr val="accent1"/>
+          </a:lnRef>
+          <a:fillRef idx="3">
+            <a:schemeClr val="accent1"/>
+          </a:fillRef>
+          <a:effectRef idx="2">
+            <a:schemeClr val="accent1"/>
+          </a:effectRef>
+          <a:fontRef idx="minor">
+            <a:schemeClr val="lt1"/>
+          </a:fontRef>
+        </p:style>
+        <p:txBody>
+          <a:bodyPr rtlCol="0" anchor="ctr"/>
+          <a:lstStyle/>
+          <a:p>
+            <a:pPr algn="ctr"/>
+          </a:p>
+        </p:txBody>
+      </p:sp>
+      <p:sp>
+        <p:nvSpPr>
+          <p:cNvPr id="12" name="Rectangle 11"/>
+          <p:cNvSpPr/>
+          <p:nvPr/>
+        </p:nvSpPr>
+        <p:spPr>
+          <a:xfrm>
+            <a:off x="640080" y="2295144"/>
+            <a:ext cx="73152" cy="274320"/>
+          </a:xfrm>
+          <a:prstGeom prst="rect">
+            <a:avLst/>
+          </a:prstGeom>
+          <a:solidFill>
+            <a:srgbClr val="269CCB"/>
+          </a:solidFill>
+          <a:ln>
+            <a:noFill/>
+          </a:ln>
+        </p:spPr>
+        <p:style>
+          <a:lnRef idx="1">
+            <a:schemeClr val="accent1"/>
+          </a:lnRef>
+          <a:fillRef idx="3">
+            <a:schemeClr val="accent1"/>
+          </a:fillRef>
+          <a:effectRef idx="2">
+            <a:schemeClr val="accent1"/>
+          </a:effectRef>
+          <a:fontRef idx="minor">
+            <a:schemeClr val="lt1"/>
+          </a:fontRef>
+        </p:style>
+        <p:txBody>
+          <a:bodyPr rtlCol="0" anchor="ctr"/>
+          <a:lstStyle/>
+          <a:p>
+            <a:pPr algn="ctr"/>
+          </a:p>
+        </p:txBody>
+      </p:sp>
+      <p:sp>
+        <p:nvSpPr>
+          <p:cNvPr id="13" name="TextBox 12"/>
+          <p:cNvSpPr txBox="1"/>
+          <p:nvPr/>
+        </p:nvSpPr>
+        <p:spPr>
+          <a:xfrm>
+            <a:off x="1097280" y="2240279"/>
+            <a:ext cx="10362895" cy="402336"/>
+          </a:xfrm>
+          <a:prstGeom prst="rect">
+            <a:avLst/>
+          </a:prstGeom>
+          <a:noFill/>
+        </p:spPr>
+        <p:txBody>
+          <a:bodyPr wrap="square" anchor="ctr"/>
+          <a:lstStyle/>
+          <a:p>
+            <a:r>
+              <a:rPr sz="1500" b="1" i="0">
+                <a:solidFill>
+                  <a:srgbClr val="333333"/>
+                </a:solidFill>
+                <a:latin typeface="Calibri"/>
+              </a:rPr>
+              <a:t>LA LÍNEA BASE</a:t>
+            </a:r>
+            <a:r>
+              <a:rPr sz="1500" b="0" i="0">
+                <a:solidFill>
+                  <a:srgbClr val="333333"/>
+                </a:solidFill>
+                <a:latin typeface="Calibri"/>
+              </a:rPr>
+              <a:t> — Una cifra que describa el problema </a:t>
+            </a:r>
+            <a:r>
+              <a:rPr sz="1500" b="1" i="0">
+                <a:solidFill>
+                  <a:srgbClr val="333333"/>
+                </a:solidFill>
+                <a:latin typeface="Calibri"/>
+              </a:rPr>
+              <a:t>hoy</a:t>
+            </a:r>
+            <a:r>
+              <a:rPr sz="1500" b="0" i="0">
+                <a:solidFill>
+                  <a:srgbClr val="333333"/>
+                </a:solidFill>
+                <a:latin typeface="Calibri"/>
+              </a:rPr>
+              <a:t>, antes de que ustedes toquen nada, más </a:t>
+            </a:r>
+            <a:r>
+              <a:rPr sz="1500" b="1" i="0">
+                <a:solidFill>
+                  <a:srgbClr val="333333"/>
+                </a:solidFill>
+                <a:latin typeface="Calibri"/>
+              </a:rPr>
+              <a:t>cómo la obtuvieron</a:t>
+            </a:r>
+            <a:r>
+              <a:rPr sz="1500" b="0" i="0">
+                <a:solidFill>
+                  <a:srgbClr val="333333"/>
+                </a:solidFill>
+                <a:latin typeface="Calibri"/>
+              </a:rPr>
+              <a:t> y cuándo. Si es estimación, escriban «estimado».</a:t>
+            </a:r>
+          </a:p>
+        </p:txBody>
+      </p:sp>
+      <p:sp>
+        <p:nvSpPr>
+          <p:cNvPr id="14" name="Rounded Rectangle 13"/>
+          <p:cNvSpPr/>
+          <p:nvPr/>
+        </p:nvSpPr>
+        <p:spPr>
+          <a:xfrm>
+            <a:off x="457200" y="2825496"/>
+            <a:ext cx="11277295" cy="566928"/>
+          </a:xfrm>
+          <a:prstGeom prst="roundRect">
+            <a:avLst>
+              <a:gd name="adj" fmla="val 12000"/>
+            </a:avLst>
+          </a:prstGeom>
+          <a:solidFill>
+            <a:srgbClr val="F2F2F2"/>
+          </a:solidFill>
+          <a:ln>
+            <a:noFill/>
+          </a:ln>
+        </p:spPr>
+        <p:style>
+          <a:lnRef idx="1">
+            <a:schemeClr val="accent1"/>
+          </a:lnRef>
+          <a:fillRef idx="3">
+            <a:schemeClr val="accent1"/>
+          </a:fillRef>
+          <a:effectRef idx="2">
+            <a:schemeClr val="accent1"/>
+          </a:effectRef>
+          <a:fontRef idx="minor">
+            <a:schemeClr val="lt1"/>
+          </a:fontRef>
+        </p:style>
+        <p:txBody>
+          <a:bodyPr rtlCol="0" anchor="ctr"/>
+          <a:lstStyle/>
+          <a:p>
+            <a:pPr algn="ctr"/>
+          </a:p>
+        </p:txBody>
+      </p:sp>
+      <p:sp>
+        <p:nvSpPr>
+          <p:cNvPr id="15" name="Rectangle 14"/>
+          <p:cNvSpPr/>
+          <p:nvPr/>
+        </p:nvSpPr>
+        <p:spPr>
+          <a:xfrm>
+            <a:off x="640080" y="2971800"/>
+            <a:ext cx="274320" cy="274320"/>
+          </a:xfrm>
+          <a:prstGeom prst="rect">
+            <a:avLst/>
+          </a:prstGeom>
+          <a:solidFill>
+            <a:srgbClr val="FFFFFF"/>
+          </a:solidFill>
+          <a:ln>
+            <a:solidFill>
+              <a:srgbClr val="333333"/>
+            </a:solidFill>
+          </a:ln>
+        </p:spPr>
+        <p:style>
+          <a:lnRef idx="1">
+            <a:schemeClr val="accent1"/>
+          </a:lnRef>
+          <a:fillRef idx="3">
+            <a:schemeClr val="accent1"/>
+          </a:fillRef>
+          <a:effectRef idx="2">
+            <a:schemeClr val="accent1"/>
+          </a:effectRef>
+          <a:fontRef idx="minor">
+            <a:schemeClr val="lt1"/>
+          </a:fontRef>
+        </p:style>
+        <p:txBody>
+          <a:bodyPr rtlCol="0" anchor="ctr"/>
+          <a:lstStyle/>
+          <a:p>
+            <a:pPr algn="ctr"/>
+          </a:p>
+        </p:txBody>
+      </p:sp>
+      <p:sp>
+        <p:nvSpPr>
+          <p:cNvPr id="16" name="Rectangle 15"/>
+          <p:cNvSpPr/>
+          <p:nvPr/>
+        </p:nvSpPr>
+        <p:spPr>
+          <a:xfrm>
+            <a:off x="640080" y="2971800"/>
+            <a:ext cx="73152" cy="274320"/>
+          </a:xfrm>
+          <a:prstGeom prst="rect">
+            <a:avLst/>
+          </a:prstGeom>
+          <a:solidFill>
+            <a:srgbClr val="269CCB"/>
+          </a:solidFill>
+          <a:ln>
+            <a:noFill/>
+          </a:ln>
+        </p:spPr>
+        <p:style>
+          <a:lnRef idx="1">
+            <a:schemeClr val="accent1"/>
+          </a:lnRef>
+          <a:fillRef idx="3">
+            <a:schemeClr val="accent1"/>
+          </a:fillRef>
+          <a:effectRef idx="2">
+            <a:schemeClr val="accent1"/>
+          </a:effectRef>
+          <a:fontRef idx="minor">
+            <a:schemeClr val="lt1"/>
+          </a:fontRef>
+        </p:style>
+        <p:txBody>
+          <a:bodyPr rtlCol="0" anchor="ctr"/>
+          <a:lstStyle/>
+          <a:p>
+            <a:pPr algn="ctr"/>
+          </a:p>
+        </p:txBody>
+      </p:sp>
+      <p:sp>
+        <p:nvSpPr>
+          <p:cNvPr id="17" name="TextBox 16"/>
+          <p:cNvSpPr txBox="1"/>
+          <p:nvPr/>
+        </p:nvSpPr>
+        <p:spPr>
+          <a:xfrm>
+            <a:off x="1097280" y="2916936"/>
+            <a:ext cx="10362895" cy="402336"/>
+          </a:xfrm>
+          <a:prstGeom prst="rect">
+            <a:avLst/>
+          </a:prstGeom>
+          <a:noFill/>
+        </p:spPr>
+        <p:txBody>
+          <a:bodyPr wrap="square" anchor="ctr"/>
+          <a:lstStyle/>
+          <a:p>
+            <a:r>
+              <a:rPr sz="1500" b="1" i="0">
+                <a:solidFill>
+                  <a:srgbClr val="333333"/>
+                </a:solidFill>
+                <a:latin typeface="Calibri"/>
+              </a:rPr>
+              <a:t>EL ÁRBOL DE CAUSAS</a:t>
+            </a:r>
+            <a:r>
+              <a:rPr sz="1500" b="0" i="0">
+                <a:solidFill>
+                  <a:srgbClr val="333333"/>
+                </a:solidFill>
+                <a:latin typeface="Calibri"/>
+              </a:rPr>
+              <a:t> — En Excalidraw: el problema en el tronco, los efectos arriba, dos o tres causas directas abajo y el segundo nivel de cada una. Marquen con un símbolo las causas que </a:t>
+            </a:r>
+            <a:r>
+              <a:rPr sz="1500" b="1" i="0">
+                <a:solidFill>
+                  <a:srgbClr val="333333"/>
+                </a:solidFill>
+                <a:latin typeface="Calibri"/>
+              </a:rPr>
+              <a:t>no</a:t>
+            </a:r>
+            <a:r>
+              <a:rPr sz="1500" b="0" i="0">
+                <a:solidFill>
+                  <a:srgbClr val="333333"/>
+                </a:solidFill>
+                <a:latin typeface="Calibri"/>
+              </a:rPr>
+              <a:t> pueden cambiar (restricciones).</a:t>
+            </a:r>
+          </a:p>
+        </p:txBody>
+      </p:sp>
+      <p:sp>
+        <p:nvSpPr>
+          <p:cNvPr id="18" name="Rounded Rectangle 17"/>
+          <p:cNvSpPr/>
+          <p:nvPr/>
+        </p:nvSpPr>
+        <p:spPr>
+          <a:xfrm>
+            <a:off x="457200" y="3502152"/>
+            <a:ext cx="11277295" cy="566928"/>
+          </a:xfrm>
+          <a:prstGeom prst="roundRect">
+            <a:avLst>
+              <a:gd name="adj" fmla="val 12000"/>
+            </a:avLst>
+          </a:prstGeom>
+          <a:solidFill>
+            <a:srgbClr val="F2F2F2"/>
+          </a:solidFill>
+          <a:ln>
+            <a:noFill/>
+          </a:ln>
+        </p:spPr>
+        <p:style>
+          <a:lnRef idx="1">
+            <a:schemeClr val="accent1"/>
+          </a:lnRef>
+          <a:fillRef idx="3">
+            <a:schemeClr val="accent1"/>
+          </a:fillRef>
+          <a:effectRef idx="2">
+            <a:schemeClr val="accent1"/>
+          </a:effectRef>
+          <a:fontRef idx="minor">
+            <a:schemeClr val="lt1"/>
+          </a:fontRef>
+        </p:style>
+        <p:txBody>
+          <a:bodyPr rtlCol="0" anchor="ctr"/>
+          <a:lstStyle/>
+          <a:p>
+            <a:pPr algn="ctr"/>
+          </a:p>
+        </p:txBody>
+      </p:sp>
+      <p:sp>
+        <p:nvSpPr>
+          <p:cNvPr id="19" name="Rectangle 18"/>
+          <p:cNvSpPr/>
+          <p:nvPr/>
+        </p:nvSpPr>
+        <p:spPr>
+          <a:xfrm>
+            <a:off x="640080" y="3648456"/>
+            <a:ext cx="274320" cy="274320"/>
+          </a:xfrm>
+          <a:prstGeom prst="rect">
+            <a:avLst/>
+          </a:prstGeom>
+          <a:solidFill>
+            <a:srgbClr val="FFFFFF"/>
+          </a:solidFill>
+          <a:ln>
+            <a:solidFill>
+              <a:srgbClr val="333333"/>
+            </a:solidFill>
+          </a:ln>
+        </p:spPr>
+        <p:style>
+          <a:lnRef idx="1">
+            <a:schemeClr val="accent1"/>
+          </a:lnRef>
+          <a:fillRef idx="3">
+            <a:schemeClr val="accent1"/>
+          </a:fillRef>
+          <a:effectRef idx="2">
+            <a:schemeClr val="accent1"/>
+          </a:effectRef>
+          <a:fontRef idx="minor">
+            <a:schemeClr val="lt1"/>
+          </a:fontRef>
+        </p:style>
+        <p:txBody>
+          <a:bodyPr rtlCol="0" anchor="ctr"/>
+          <a:lstStyle/>
+          <a:p>
+            <a:pPr algn="ctr"/>
+          </a:p>
+        </p:txBody>
+      </p:sp>
+      <p:sp>
+        <p:nvSpPr>
+          <p:cNvPr id="20" name="Rectangle 19"/>
+          <p:cNvSpPr/>
+          <p:nvPr/>
+        </p:nvSpPr>
+        <p:spPr>
+          <a:xfrm>
+            <a:off x="640080" y="3648456"/>
+            <a:ext cx="73152" cy="274320"/>
+          </a:xfrm>
+          <a:prstGeom prst="rect">
+            <a:avLst/>
+          </a:prstGeom>
+          <a:solidFill>
+            <a:srgbClr val="269CCB"/>
+          </a:solidFill>
+          <a:ln>
+            <a:noFill/>
+          </a:ln>
+        </p:spPr>
+        <p:style>
+          <a:lnRef idx="1">
+            <a:schemeClr val="accent1"/>
+          </a:lnRef>
+          <a:fillRef idx="3">
+            <a:schemeClr val="accent1"/>
+          </a:fillRef>
+          <a:effectRef idx="2">
+            <a:schemeClr val="accent1"/>
+          </a:effectRef>
+          <a:fontRef idx="minor">
+            <a:schemeClr val="lt1"/>
+          </a:fontRef>
+        </p:style>
+        <p:txBody>
+          <a:bodyPr rtlCol="0" anchor="ctr"/>
+          <a:lstStyle/>
+          <a:p>
+            <a:pPr algn="ctr"/>
+          </a:p>
+        </p:txBody>
+      </p:sp>
+      <p:sp>
+        <p:nvSpPr>
+          <p:cNvPr id="21" name="TextBox 20"/>
+          <p:cNvSpPr txBox="1"/>
+          <p:nvPr/>
+        </p:nvSpPr>
+        <p:spPr>
+          <a:xfrm>
+            <a:off x="1097280" y="3593592"/>
+            <a:ext cx="10362895" cy="402336"/>
+          </a:xfrm>
+          <a:prstGeom prst="rect">
+            <a:avLst/>
+          </a:prstGeom>
+          <a:noFill/>
+        </p:spPr>
+        <p:txBody>
+          <a:bodyPr wrap="square" anchor="ctr"/>
+          <a:lstStyle/>
+          <a:p>
+            <a:r>
+              <a:rPr sz="1500" b="1" i="0">
+                <a:solidFill>
+                  <a:srgbClr val="333333"/>
+                </a:solidFill>
+                <a:latin typeface="Calibri"/>
+              </a:rPr>
+              <a:t>ACTORES Y FRONTERA</a:t>
+            </a:r>
+            <a:r>
+              <a:rPr sz="1500" b="0" i="0">
+                <a:solidFill>
+                  <a:srgbClr val="333333"/>
+                </a:solidFill>
+                <a:latin typeface="Calibri"/>
+              </a:rPr>
+              <a:t> — Quién vive el problema (el dueño del problema), quién más se afecta sin ser usuario, y qué queda </a:t>
+            </a:r>
+            <a:r>
+              <a:rPr sz="1500" b="1" i="0">
+                <a:solidFill>
+                  <a:srgbClr val="333333"/>
+                </a:solidFill>
+                <a:latin typeface="Calibri"/>
+              </a:rPr>
+              <a:t>fuera</a:t>
+            </a:r>
+            <a:r>
+              <a:rPr sz="1500" b="0" i="0">
+                <a:solidFill>
+                  <a:srgbClr val="333333"/>
+                </a:solidFill>
+                <a:latin typeface="Calibri"/>
+              </a:rPr>
+              <a:t> de lo que ustedes van a abordar. Digan además </a:t>
+            </a:r>
+            <a:r>
+              <a:rPr sz="1500" b="1" i="0">
+                <a:solidFill>
+                  <a:srgbClr val="333333"/>
+                </a:solidFill>
+                <a:latin typeface="Calibri"/>
+              </a:rPr>
+              <a:t>a quién le pueden preguntar algo esta semana</a:t>
+            </a:r>
+            <a:r>
+              <a:rPr sz="1500" b="0" i="0">
+                <a:solidFill>
+                  <a:srgbClr val="333333"/>
+                </a:solidFill>
+                <a:latin typeface="Calibri"/>
+              </a:rPr>
+              <a:t>.</a:t>
+            </a:r>
+          </a:p>
+        </p:txBody>
+      </p:sp>
+      <p:sp>
+        <p:nvSpPr>
+          <p:cNvPr id="22" name="Rounded Rectangle 21"/>
+          <p:cNvSpPr/>
+          <p:nvPr/>
+        </p:nvSpPr>
+        <p:spPr>
+          <a:xfrm>
+            <a:off x="457200" y="4178808"/>
+            <a:ext cx="11277295" cy="566928"/>
+          </a:xfrm>
+          <a:prstGeom prst="roundRect">
+            <a:avLst>
+              <a:gd name="adj" fmla="val 12000"/>
+            </a:avLst>
+          </a:prstGeom>
+          <a:solidFill>
+            <a:srgbClr val="F2F2F2"/>
+          </a:solidFill>
+          <a:ln>
+            <a:noFill/>
+          </a:ln>
+        </p:spPr>
+        <p:style>
+          <a:lnRef idx="1">
+            <a:schemeClr val="accent1"/>
+          </a:lnRef>
+          <a:fillRef idx="3">
+            <a:schemeClr val="accent1"/>
+          </a:fillRef>
+          <a:effectRef idx="2">
+            <a:schemeClr val="accent1"/>
+          </a:effectRef>
+          <a:fontRef idx="minor">
+            <a:schemeClr val="lt1"/>
+          </a:fontRef>
+        </p:style>
+        <p:txBody>
+          <a:bodyPr rtlCol="0" anchor="ctr"/>
+          <a:lstStyle/>
+          <a:p>
+            <a:pPr algn="ctr"/>
+          </a:p>
+        </p:txBody>
+      </p:sp>
+      <p:sp>
+        <p:nvSpPr>
+          <p:cNvPr id="23" name="Rectangle 22"/>
+          <p:cNvSpPr/>
+          <p:nvPr/>
+        </p:nvSpPr>
+        <p:spPr>
+          <a:xfrm>
+            <a:off x="640080" y="4325112"/>
+            <a:ext cx="274320" cy="274320"/>
+          </a:xfrm>
+          <a:prstGeom prst="rect">
+            <a:avLst/>
+          </a:prstGeom>
+          <a:solidFill>
+            <a:srgbClr val="FFFFFF"/>
+          </a:solidFill>
+          <a:ln>
+            <a:solidFill>
+              <a:srgbClr val="333333"/>
+            </a:solidFill>
+          </a:ln>
+        </p:spPr>
+        <p:style>
+          <a:lnRef idx="1">
+            <a:schemeClr val="accent1"/>
+          </a:lnRef>
+          <a:fillRef idx="3">
+            <a:schemeClr val="accent1"/>
+          </a:fillRef>
+          <a:effectRef idx="2">
+            <a:schemeClr val="accent1"/>
+          </a:effectRef>
+          <a:fontRef idx="minor">
+            <a:schemeClr val="lt1"/>
+          </a:fontRef>
+        </p:style>
+        <p:txBody>
+          <a:bodyPr rtlCol="0" anchor="ctr"/>
+          <a:lstStyle/>
+          <a:p>
+            <a:pPr algn="ctr"/>
+          </a:p>
+        </p:txBody>
+      </p:sp>
+      <p:sp>
+        <p:nvSpPr>
+          <p:cNvPr id="24" name="Rectangle 23"/>
+          <p:cNvSpPr/>
+          <p:nvPr/>
+        </p:nvSpPr>
+        <p:spPr>
+          <a:xfrm>
+            <a:off x="640080" y="4325112"/>
+            <a:ext cx="73152" cy="274320"/>
+          </a:xfrm>
+          <a:prstGeom prst="rect">
+            <a:avLst/>
+          </a:prstGeom>
+          <a:solidFill>
+            <a:srgbClr val="269CCB"/>
+          </a:solidFill>
+          <a:ln>
+            <a:noFill/>
+          </a:ln>
+        </p:spPr>
+        <p:style>
+          <a:lnRef idx="1">
+            <a:schemeClr val="accent1"/>
+          </a:lnRef>
+          <a:fillRef idx="3">
+            <a:schemeClr val="accent1"/>
+          </a:fillRef>
+          <a:effectRef idx="2">
+            <a:schemeClr val="accent1"/>
+          </a:effectRef>
+          <a:fontRef idx="minor">
+            <a:schemeClr val="lt1"/>
+          </a:fontRef>
+        </p:style>
+        <p:txBody>
+          <a:bodyPr rtlCol="0" anchor="ctr"/>
+          <a:lstStyle/>
+          <a:p>
+            <a:pPr algn="ctr"/>
+          </a:p>
+        </p:txBody>
+      </p:sp>
+      <p:sp>
+        <p:nvSpPr>
+          <p:cNvPr id="25" name="TextBox 24"/>
+          <p:cNvSpPr txBox="1"/>
+          <p:nvPr/>
+        </p:nvSpPr>
+        <p:spPr>
+          <a:xfrm>
+            <a:off x="1097280" y="4270248"/>
+            <a:ext cx="10362895" cy="402336"/>
+          </a:xfrm>
+          <a:prstGeom prst="rect">
+            <a:avLst/>
+          </a:prstGeom>
+          <a:noFill/>
+        </p:spPr>
+        <p:txBody>
+          <a:bodyPr wrap="square" anchor="ctr"/>
+          <a:lstStyle/>
+          <a:p>
+            <a:r>
+              <a:rPr sz="1500" b="1" i="0">
+                <a:solidFill>
+                  <a:srgbClr val="333333"/>
+                </a:solidFill>
+                <a:latin typeface="Calibri"/>
+              </a:rPr>
+              <a:t>EL CRITERIO DE ÉXITO</a:t>
+            </a:r>
+            <a:r>
+              <a:rPr sz="1500" b="0" i="0">
+                <a:solidFill>
+                  <a:srgbClr val="333333"/>
+                </a:solidFill>
+                <a:latin typeface="Calibri"/>
+              </a:rPr>
+              <a:t> — Una frase de la forma: «el proyecto sirvió si &lt;la cifra de la línea base&gt; pasa de X a Y, medido así». Y la causa del árbol que van a atacar.</a:t>
+            </a:r>
+          </a:p>
+        </p:txBody>
+      </p:sp>
+      <p:sp>
+        <p:nvSpPr>
+          <p:cNvPr id="26" name="TextBox 25"/>
+          <p:cNvSpPr txBox="1"/>
+          <p:nvPr/>
+        </p:nvSpPr>
+        <p:spPr>
+          <a:xfrm>
+            <a:off x="11185855" y="6473952"/>
+            <a:ext cx="640080" cy="274320"/>
+          </a:xfrm>
+          <a:prstGeom prst="rect">
+            <a:avLst/>
+          </a:prstGeom>
+          <a:noFill/>
+        </p:spPr>
+        <p:txBody>
+          <a:bodyPr wrap="square">
+            <a:spAutoFit/>
+          </a:bodyPr>
+          <a:lstStyle/>
+          <a:p>
+            <a:pPr algn="r"/>
+            <a:r>
+              <a:rPr sz="1100" b="0" i="0">
+                <a:solidFill>
+                  <a:srgbClr val="666666"/>
+                </a:solidFill>
+                <a:latin typeface="Calibri"/>
+              </a:rPr>
+              <a:t>20</a:t>
+            </a:r>
+          </a:p>
+        </p:txBody>
+      </p:sp>
+    </p:spTree>
+  </p:cSld>
+  <p:clrMapOvr>
+    <a:masterClrMapping/>
+  </p:clrMapOvr>
+</p:sld>
+</file>
+
+<file path=ppt/slides/slide21.xml><?xml version="1.0" encoding="utf-8"?>
+<p:sld xmlns:a="http://schemas.openxmlformats.org/drawingml/2006/main" xmlns:p="http://schemas.openxmlformats.org/presentationml/2006/main" xmlns:r="http://schemas.openxmlformats.org/officeDocument/2006/relationships">
+  <p:cSld>
+    <p:bg>
+      <p:bgPr>
+        <a:solidFill>
+          <a:srgbClr val="FFFFFF"/>
+        </a:solidFill>
+        <a:effectLst/>
+      </p:bgPr>
+    </p:bg>
+    <p:spTree>
+      <p:nvGrpSpPr>
+        <p:cNvPr id="1" name=""/>
+        <p:cNvGrpSpPr/>
+        <p:nvPr/>
+      </p:nvGrpSpPr>
+      <p:grpSpPr/>
+      <p:sp>
+        <p:nvSpPr>
+          <p:cNvPr id="2" name="Rectangle 1"/>
+          <p:cNvSpPr/>
+          <p:nvPr/>
+        </p:nvSpPr>
+        <p:spPr>
+          <a:xfrm>
+            <a:off x="0" y="0"/>
+            <a:ext cx="12191695" cy="1170432"/>
+          </a:xfrm>
+          <a:prstGeom prst="rect">
+            <a:avLst/>
+          </a:prstGeom>
+          <a:solidFill>
+            <a:srgbClr val="095292"/>
+          </a:solidFill>
+          <a:ln>
+            <a:noFill/>
+          </a:ln>
+        </p:spPr>
+        <p:style>
+          <a:lnRef idx="1">
+            <a:schemeClr val="accent1"/>
+          </a:lnRef>
+          <a:fillRef idx="3">
+            <a:schemeClr val="accent1"/>
+          </a:fillRef>
+          <a:effectRef idx="2">
+            <a:schemeClr val="accent1"/>
+          </a:effectRef>
+          <a:fontRef idx="minor">
+            <a:schemeClr val="lt1"/>
+          </a:fontRef>
+        </p:style>
+        <p:txBody>
+          <a:bodyPr rtlCol="0" anchor="ctr"/>
+          <a:lstStyle/>
+          <a:p>
+            <a:pPr algn="ctr"/>
+          </a:p>
+        </p:txBody>
+      </p:sp>
+      <p:sp>
+        <p:nvSpPr>
+          <p:cNvPr id="3" name="Rectangle 2"/>
+          <p:cNvSpPr/>
+          <p:nvPr/>
+        </p:nvSpPr>
+        <p:spPr>
+          <a:xfrm>
+            <a:off x="0" y="1170432"/>
+            <a:ext cx="12191695" cy="41148"/>
+          </a:xfrm>
+          <a:prstGeom prst="rect">
+            <a:avLst/>
+          </a:prstGeom>
+          <a:solidFill>
+            <a:srgbClr val="FFD000"/>
+          </a:solidFill>
+          <a:ln>
+            <a:noFill/>
+          </a:ln>
+        </p:spPr>
+        <p:style>
+          <a:lnRef idx="1">
+            <a:schemeClr val="accent1"/>
+          </a:lnRef>
+          <a:fillRef idx="3">
+            <a:schemeClr val="accent1"/>
+          </a:fillRef>
+          <a:effectRef idx="2">
+            <a:schemeClr val="accent1"/>
+          </a:effectRef>
+          <a:fontRef idx="minor">
+            <a:schemeClr val="lt1"/>
+          </a:fontRef>
+        </p:style>
+        <p:txBody>
+          <a:bodyPr rtlCol="0" anchor="ctr"/>
+          <a:lstStyle/>
+          <a:p>
+            <a:pPr algn="ctr"/>
+          </a:p>
+        </p:txBody>
+      </p:sp>
+      <p:sp>
+        <p:nvSpPr>
+          <p:cNvPr id="4" name="TextBox 3"/>
+          <p:cNvSpPr txBox="1"/>
+          <p:nvPr/>
+        </p:nvSpPr>
+        <p:spPr>
+          <a:xfrm>
+            <a:off x="457200" y="164592"/>
+            <a:ext cx="11277295" cy="384048"/>
+          </a:xfrm>
+          <a:prstGeom prst="rect">
+            <a:avLst/>
+          </a:prstGeom>
+          <a:noFill/>
+        </p:spPr>
+        <p:txBody>
+          <a:bodyPr wrap="square">
+            <a:spAutoFit/>
+          </a:bodyPr>
+          <a:lstStyle/>
+          <a:p>
+            <a:r>
+              <a:rPr sz="2600" b="1" i="0">
+                <a:solidFill>
+                  <a:srgbClr val="FFFFFF"/>
+                </a:solidFill>
+                <a:latin typeface="Calibri"/>
+              </a:rPr>
+              <a:t>Cómo se expone en 3 minutos</a:t>
+            </a:r>
+          </a:p>
+        </p:txBody>
+      </p:sp>
+      <p:sp>
+        <p:nvSpPr>
+          <p:cNvPr id="5" name="TextBox 4"/>
+          <p:cNvSpPr txBox="1"/>
+          <p:nvPr/>
+        </p:nvSpPr>
+        <p:spPr>
+          <a:xfrm>
+            <a:off x="457200" y="566928"/>
+            <a:ext cx="11277295" cy="411480"/>
+          </a:xfrm>
+          <a:prstGeom prst="rect">
+            <a:avLst/>
+          </a:prstGeom>
+          <a:noFill/>
+        </p:spPr>
+        <p:txBody>
+          <a:bodyPr wrap="square">
+            <a:spAutoFit/>
+          </a:bodyPr>
+          <a:lstStyle/>
+          <a:p>
+            <a:r>
+              <a:rPr sz="1400" b="0" i="0">
+                <a:solidFill>
+                  <a:srgbClr val="B8D8EE"/>
+                </a:solidFill>
+                <a:latin typeface="Calibri"/>
+              </a:rPr>
+              <a:t>Habla el vocero con la pantalla ya compartida · cronómetro en pantalla · se corta al llegar a cero</a:t>
+            </a:r>
+          </a:p>
+        </p:txBody>
+      </p:sp>
+      <p:sp>
+        <p:nvSpPr>
+          <p:cNvPr id="6" name="Rounded Rectangle 5"/>
+          <p:cNvSpPr/>
+          <p:nvPr/>
+        </p:nvSpPr>
+        <p:spPr>
+          <a:xfrm>
+            <a:off x="457200" y="1444752"/>
+            <a:ext cx="11277295" cy="908913"/>
+          </a:xfrm>
+          <a:prstGeom prst="roundRect">
+            <a:avLst>
+              <a:gd name="adj" fmla="val 12000"/>
+            </a:avLst>
+          </a:prstGeom>
+          <a:solidFill>
+            <a:srgbClr val="F2F2F2"/>
+          </a:solidFill>
+          <a:ln>
+            <a:noFill/>
+          </a:ln>
+        </p:spPr>
+        <p:style>
+          <a:lnRef idx="1">
+            <a:schemeClr val="accent1"/>
+          </a:lnRef>
+          <a:fillRef idx="3">
+            <a:schemeClr val="accent1"/>
+          </a:fillRef>
+          <a:effectRef idx="2">
+            <a:schemeClr val="accent1"/>
+          </a:effectRef>
+          <a:fontRef idx="minor">
+            <a:schemeClr val="lt1"/>
+          </a:fontRef>
+        </p:style>
+        <p:txBody>
+          <a:bodyPr rtlCol="0" anchor="ctr"/>
+          <a:lstStyle/>
+          <a:p>
+            <a:pPr algn="ctr"/>
+          </a:p>
+        </p:txBody>
+      </p:sp>
+      <p:sp>
+        <p:nvSpPr>
+          <p:cNvPr id="7" name="Rounded Rectangle 6"/>
+          <p:cNvSpPr/>
+          <p:nvPr/>
+        </p:nvSpPr>
+        <p:spPr>
+          <a:xfrm>
+            <a:off x="594360" y="1679752"/>
+            <a:ext cx="438912" cy="438912"/>
+          </a:xfrm>
+          <a:prstGeom prst="roundRect">
+            <a:avLst>
+              <a:gd name="adj" fmla="val 12000"/>
+            </a:avLst>
+          </a:prstGeom>
+          <a:solidFill>
+            <a:srgbClr val="095292"/>
+          </a:solidFill>
+          <a:ln>
+            <a:noFill/>
+          </a:ln>
+        </p:spPr>
+        <p:style>
+          <a:lnRef idx="1">
+            <a:schemeClr val="accent1"/>
+          </a:lnRef>
+          <a:fillRef idx="3">
+            <a:schemeClr val="accent1"/>
+          </a:fillRef>
+          <a:effectRef idx="2">
+            <a:schemeClr val="accent1"/>
+          </a:effectRef>
+          <a:fontRef idx="minor">
+            <a:schemeClr val="lt1"/>
+          </a:fontRef>
+        </p:style>
+        <p:txBody>
+          <a:bodyPr rtlCol="0" anchor="ctr"/>
+          <a:lstStyle/>
+          <a:p>
+            <a:pPr algn="ctr"/>
+          </a:p>
+        </p:txBody>
+      </p:sp>
+      <p:sp>
+        <p:nvSpPr>
+          <p:cNvPr id="8" name="TextBox 7"/>
+          <p:cNvSpPr txBox="1"/>
+          <p:nvPr/>
+        </p:nvSpPr>
+        <p:spPr>
+          <a:xfrm>
+            <a:off x="594360" y="1679752"/>
+            <a:ext cx="438912" cy="438912"/>
+          </a:xfrm>
+          <a:prstGeom prst="rect">
+            <a:avLst/>
+          </a:prstGeom>
+          <a:noFill/>
+        </p:spPr>
+        <p:txBody>
+          <a:bodyPr wrap="square" anchor="ctr"/>
+          <a:lstStyle/>
+          <a:p>
+            <a:pPr algn="ctr"/>
+            <a:r>
+              <a:rPr sz="1600" b="1" i="0">
+                <a:solidFill>
+                  <a:srgbClr val="FFFFFF"/>
+                </a:solidFill>
+                <a:latin typeface="Calibri"/>
+              </a:rPr>
+              <a:t>1</a:t>
+            </a:r>
+          </a:p>
+        </p:txBody>
+      </p:sp>
+      <p:sp>
+        <p:nvSpPr>
+          <p:cNvPr id="9" name="TextBox 8"/>
+          <p:cNvSpPr txBox="1"/>
+          <p:nvPr/>
+        </p:nvSpPr>
+        <p:spPr>
+          <a:xfrm>
+            <a:off x="1188720" y="1536192"/>
+            <a:ext cx="10271455" cy="744321"/>
+          </a:xfrm>
+          <a:prstGeom prst="rect">
+            <a:avLst/>
+          </a:prstGeom>
+          <a:noFill/>
+        </p:spPr>
+        <p:txBody>
+          <a:bodyPr wrap="square" anchor="ctr"/>
+          <a:lstStyle/>
+          <a:p>
+            <a:r>
+              <a:rPr sz="1500" b="1" i="0">
+                <a:solidFill>
+                  <a:srgbClr val="095292"/>
+                </a:solidFill>
+                <a:latin typeface="Calibri"/>
+              </a:rPr>
+              <a:t>40 s · El problema en una frase</a:t>
+            </a:r>
+          </a:p>
+          <a:p>
+            <a:pPr>
+              <a:spcBef>
+                <a:spcPts val="200"/>
+              </a:spcBef>
+            </a:pPr>
+            <a:r>
+              <a:rPr sz="1300" b="0" i="0">
+                <a:solidFill>
+                  <a:srgbClr val="333333"/>
+                </a:solidFill>
+                <a:latin typeface="Calibri"/>
+              </a:rPr>
+              <a:t>Léanla tal cual está escrita. Sin tecnología dentro.</a:t>
+            </a:r>
+          </a:p>
+        </p:txBody>
+      </p:sp>
+      <p:sp>
+        <p:nvSpPr>
+          <p:cNvPr id="10" name="Rounded Rectangle 9"/>
+          <p:cNvSpPr/>
+          <p:nvPr/>
+        </p:nvSpPr>
+        <p:spPr>
+          <a:xfrm>
+            <a:off x="457200" y="2445105"/>
+            <a:ext cx="11277295" cy="908913"/>
+          </a:xfrm>
+          <a:prstGeom prst="roundRect">
+            <a:avLst>
+              <a:gd name="adj" fmla="val 12000"/>
+            </a:avLst>
+          </a:prstGeom>
+          <a:solidFill>
+            <a:srgbClr val="E8F4FA"/>
+          </a:solidFill>
+          <a:ln>
+            <a:noFill/>
+          </a:ln>
+        </p:spPr>
+        <p:style>
+          <a:lnRef idx="1">
+            <a:schemeClr val="accent1"/>
+          </a:lnRef>
+          <a:fillRef idx="3">
+            <a:schemeClr val="accent1"/>
+          </a:fillRef>
+          <a:effectRef idx="2">
+            <a:schemeClr val="accent1"/>
+          </a:effectRef>
+          <a:fontRef idx="minor">
+            <a:schemeClr val="lt1"/>
+          </a:fontRef>
+        </p:style>
+        <p:txBody>
+          <a:bodyPr rtlCol="0" anchor="ctr"/>
+          <a:lstStyle/>
+          <a:p>
+            <a:pPr algn="ctr"/>
+          </a:p>
+        </p:txBody>
+      </p:sp>
+      <p:sp>
+        <p:nvSpPr>
+          <p:cNvPr id="11" name="Rounded Rectangle 10"/>
+          <p:cNvSpPr/>
+          <p:nvPr/>
+        </p:nvSpPr>
+        <p:spPr>
+          <a:xfrm>
+            <a:off x="594360" y="2680106"/>
+            <a:ext cx="438912" cy="438912"/>
+          </a:xfrm>
+          <a:prstGeom prst="roundRect">
+            <a:avLst>
+              <a:gd name="adj" fmla="val 12000"/>
+            </a:avLst>
+          </a:prstGeom>
+          <a:solidFill>
+            <a:srgbClr val="095292"/>
+          </a:solidFill>
+          <a:ln>
+            <a:noFill/>
+          </a:ln>
+        </p:spPr>
+        <p:style>
+          <a:lnRef idx="1">
+            <a:schemeClr val="accent1"/>
+          </a:lnRef>
+          <a:fillRef idx="3">
+            <a:schemeClr val="accent1"/>
+          </a:fillRef>
+          <a:effectRef idx="2">
+            <a:schemeClr val="accent1"/>
+          </a:effectRef>
+          <a:fontRef idx="minor">
+            <a:schemeClr val="lt1"/>
+          </a:fontRef>
+        </p:style>
+        <p:txBody>
+          <a:bodyPr rtlCol="0" anchor="ctr"/>
+          <a:lstStyle/>
+          <a:p>
+            <a:pPr algn="ctr"/>
+          </a:p>
+        </p:txBody>
+      </p:sp>
+      <p:sp>
+        <p:nvSpPr>
+          <p:cNvPr id="12" name="TextBox 11"/>
+          <p:cNvSpPr txBox="1"/>
+          <p:nvPr/>
+        </p:nvSpPr>
+        <p:spPr>
+          <a:xfrm>
+            <a:off x="594360" y="2680106"/>
+            <a:ext cx="438912" cy="438912"/>
+          </a:xfrm>
+          <a:prstGeom prst="rect">
+            <a:avLst/>
+          </a:prstGeom>
+          <a:noFill/>
+        </p:spPr>
+        <p:txBody>
+          <a:bodyPr wrap="square" anchor="ctr"/>
+          <a:lstStyle/>
+          <a:p>
+            <a:pPr algn="ctr"/>
+            <a:r>
+              <a:rPr sz="1600" b="1" i="0">
+                <a:solidFill>
+                  <a:srgbClr val="FFFFFF"/>
+                </a:solidFill>
+                <a:latin typeface="Calibri"/>
+              </a:rPr>
+              <a:t>2</a:t>
+            </a:r>
+          </a:p>
+        </p:txBody>
+      </p:sp>
+      <p:sp>
+        <p:nvSpPr>
+          <p:cNvPr id="13" name="TextBox 12"/>
+          <p:cNvSpPr txBox="1"/>
+          <p:nvPr/>
+        </p:nvSpPr>
+        <p:spPr>
+          <a:xfrm>
+            <a:off x="1188720" y="2536545"/>
+            <a:ext cx="10271455" cy="744321"/>
+          </a:xfrm>
+          <a:prstGeom prst="rect">
+            <a:avLst/>
+          </a:prstGeom>
+          <a:noFill/>
+        </p:spPr>
+        <p:txBody>
+          <a:bodyPr wrap="square" anchor="ctr"/>
+          <a:lstStyle/>
+          <a:p>
+            <a:r>
+              <a:rPr sz="1500" b="1" i="0">
+                <a:solidFill>
+                  <a:srgbClr val="095292"/>
+                </a:solidFill>
+                <a:latin typeface="Calibri"/>
+              </a:rPr>
+              <a:t>30 s · La cifra</a:t>
+            </a:r>
+          </a:p>
+          <a:p>
+            <a:pPr>
+              <a:spcBef>
+                <a:spcPts val="200"/>
+              </a:spcBef>
+            </a:pPr>
+            <a:r>
+              <a:rPr sz="1300" b="0" i="0">
+                <a:solidFill>
+                  <a:srgbClr val="333333"/>
+                </a:solidFill>
+                <a:latin typeface="Calibri"/>
+              </a:rPr>
+              <a:t>La línea base y cómo la obtuvieron. Es el minuto obligatorio.</a:t>
+            </a:r>
+          </a:p>
+        </p:txBody>
+      </p:sp>
+      <p:sp>
+        <p:nvSpPr>
+          <p:cNvPr id="14" name="Rounded Rectangle 13"/>
+          <p:cNvSpPr/>
+          <p:nvPr/>
+        </p:nvSpPr>
+        <p:spPr>
+          <a:xfrm>
+            <a:off x="457200" y="3445459"/>
+            <a:ext cx="11277295" cy="908913"/>
+          </a:xfrm>
+          <a:prstGeom prst="roundRect">
+            <a:avLst>
+              <a:gd name="adj" fmla="val 12000"/>
+            </a:avLst>
+          </a:prstGeom>
+          <a:solidFill>
+            <a:srgbClr val="F2F2F2"/>
+          </a:solidFill>
+          <a:ln>
+            <a:noFill/>
+          </a:ln>
+        </p:spPr>
+        <p:style>
+          <a:lnRef idx="1">
+            <a:schemeClr val="accent1"/>
+          </a:lnRef>
+          <a:fillRef idx="3">
+            <a:schemeClr val="accent1"/>
+          </a:fillRef>
+          <a:effectRef idx="2">
+            <a:schemeClr val="accent1"/>
+          </a:effectRef>
+          <a:fontRef idx="minor">
+            <a:schemeClr val="lt1"/>
+          </a:fontRef>
+        </p:style>
+        <p:txBody>
+          <a:bodyPr rtlCol="0" anchor="ctr"/>
+          <a:lstStyle/>
+          <a:p>
+            <a:pPr algn="ctr"/>
+          </a:p>
+        </p:txBody>
+      </p:sp>
+      <p:sp>
+        <p:nvSpPr>
+          <p:cNvPr id="15" name="Rounded Rectangle 14"/>
+          <p:cNvSpPr/>
+          <p:nvPr/>
+        </p:nvSpPr>
+        <p:spPr>
+          <a:xfrm>
+            <a:off x="594360" y="3680460"/>
+            <a:ext cx="438912" cy="438912"/>
+          </a:xfrm>
+          <a:prstGeom prst="roundRect">
+            <a:avLst>
+              <a:gd name="adj" fmla="val 12000"/>
+            </a:avLst>
+          </a:prstGeom>
+          <a:solidFill>
+            <a:srgbClr val="095292"/>
+          </a:solidFill>
+          <a:ln>
+            <a:noFill/>
+          </a:ln>
+        </p:spPr>
+        <p:style>
+          <a:lnRef idx="1">
+            <a:schemeClr val="accent1"/>
+          </a:lnRef>
+          <a:fillRef idx="3">
+            <a:schemeClr val="accent1"/>
+          </a:fillRef>
+          <a:effectRef idx="2">
+            <a:schemeClr val="accent1"/>
+          </a:effectRef>
+          <a:fontRef idx="minor">
+            <a:schemeClr val="lt1"/>
+          </a:fontRef>
+        </p:style>
+        <p:txBody>
+          <a:bodyPr rtlCol="0" anchor="ctr"/>
+          <a:lstStyle/>
+          <a:p>
+            <a:pPr algn="ctr"/>
+          </a:p>
+        </p:txBody>
+      </p:sp>
+      <p:sp>
+        <p:nvSpPr>
+          <p:cNvPr id="16" name="TextBox 15"/>
+          <p:cNvSpPr txBox="1"/>
+          <p:nvPr/>
+        </p:nvSpPr>
+        <p:spPr>
+          <a:xfrm>
+            <a:off x="594360" y="3680460"/>
+            <a:ext cx="438912" cy="438912"/>
+          </a:xfrm>
+          <a:prstGeom prst="rect">
+            <a:avLst/>
+          </a:prstGeom>
+          <a:noFill/>
+        </p:spPr>
+        <p:txBody>
+          <a:bodyPr wrap="square" anchor="ctr"/>
+          <a:lstStyle/>
+          <a:p>
+            <a:pPr algn="ctr"/>
+            <a:r>
+              <a:rPr sz="1600" b="1" i="0">
+                <a:solidFill>
+                  <a:srgbClr val="FFFFFF"/>
+                </a:solidFill>
+                <a:latin typeface="Calibri"/>
+              </a:rPr>
+              <a:t>3</a:t>
+            </a:r>
+          </a:p>
+        </p:txBody>
+      </p:sp>
+      <p:sp>
+        <p:nvSpPr>
+          <p:cNvPr id="17" name="TextBox 16"/>
+          <p:cNvSpPr txBox="1"/>
+          <p:nvPr/>
+        </p:nvSpPr>
+        <p:spPr>
+          <a:xfrm>
+            <a:off x="1188720" y="3536899"/>
+            <a:ext cx="10271455" cy="744321"/>
+          </a:xfrm>
+          <a:prstGeom prst="rect">
+            <a:avLst/>
+          </a:prstGeom>
+          <a:noFill/>
+        </p:spPr>
+        <p:txBody>
+          <a:bodyPr wrap="square" anchor="ctr"/>
+          <a:lstStyle/>
+          <a:p>
+            <a:r>
+              <a:rPr sz="1500" b="1" i="0">
+                <a:solidFill>
+                  <a:srgbClr val="095292"/>
+                </a:solidFill>
+                <a:latin typeface="Calibri"/>
+              </a:rPr>
+              <a:t>50 s · El árbol</a:t>
+            </a:r>
+          </a:p>
+          <a:p>
+            <a:pPr>
+              <a:spcBef>
+                <a:spcPts val="200"/>
+              </a:spcBef>
+            </a:pPr>
+            <a:r>
+              <a:rPr sz="1300" b="0" i="0">
+                <a:solidFill>
+                  <a:srgbClr val="333333"/>
+                </a:solidFill>
+                <a:latin typeface="Calibri"/>
+              </a:rPr>
+              <a:t>Muestren el dibujo y señalen la causa que van a atacar.</a:t>
+            </a:r>
+          </a:p>
+        </p:txBody>
+      </p:sp>
+      <p:sp>
+        <p:nvSpPr>
+          <p:cNvPr id="18" name="Rounded Rectangle 17"/>
+          <p:cNvSpPr/>
+          <p:nvPr/>
+        </p:nvSpPr>
+        <p:spPr>
+          <a:xfrm>
+            <a:off x="457200" y="4445812"/>
+            <a:ext cx="11277295" cy="908913"/>
+          </a:xfrm>
+          <a:prstGeom prst="roundRect">
+            <a:avLst>
+              <a:gd name="adj" fmla="val 12000"/>
+            </a:avLst>
+          </a:prstGeom>
+          <a:solidFill>
+            <a:srgbClr val="E8F4FA"/>
+          </a:solidFill>
+          <a:ln>
+            <a:noFill/>
+          </a:ln>
+        </p:spPr>
+        <p:style>
+          <a:lnRef idx="1">
+            <a:schemeClr val="accent1"/>
+          </a:lnRef>
+          <a:fillRef idx="3">
+            <a:schemeClr val="accent1"/>
+          </a:fillRef>
+          <a:effectRef idx="2">
+            <a:schemeClr val="accent1"/>
+          </a:effectRef>
+          <a:fontRef idx="minor">
+            <a:schemeClr val="lt1"/>
+          </a:fontRef>
+        </p:style>
+        <p:txBody>
+          <a:bodyPr rtlCol="0" anchor="ctr"/>
+          <a:lstStyle/>
+          <a:p>
+            <a:pPr algn="ctr"/>
+          </a:p>
+        </p:txBody>
+      </p:sp>
+      <p:sp>
+        <p:nvSpPr>
+          <p:cNvPr id="19" name="Rounded Rectangle 18"/>
+          <p:cNvSpPr/>
+          <p:nvPr/>
+        </p:nvSpPr>
+        <p:spPr>
+          <a:xfrm>
+            <a:off x="594360" y="4680813"/>
+            <a:ext cx="438912" cy="438912"/>
+          </a:xfrm>
+          <a:prstGeom prst="roundRect">
+            <a:avLst>
+              <a:gd name="adj" fmla="val 12000"/>
+            </a:avLst>
+          </a:prstGeom>
+          <a:solidFill>
+            <a:srgbClr val="095292"/>
+          </a:solidFill>
+          <a:ln>
+            <a:noFill/>
+          </a:ln>
+        </p:spPr>
+        <p:style>
+          <a:lnRef idx="1">
+            <a:schemeClr val="accent1"/>
+          </a:lnRef>
+          <a:fillRef idx="3">
+            <a:schemeClr val="accent1"/>
+          </a:fillRef>
+          <a:effectRef idx="2">
+            <a:schemeClr val="accent1"/>
+          </a:effectRef>
+          <a:fontRef idx="minor">
+            <a:schemeClr val="lt1"/>
+          </a:fontRef>
+        </p:style>
+        <p:txBody>
+          <a:bodyPr rtlCol="0" anchor="ctr"/>
+          <a:lstStyle/>
+          <a:p>
+            <a:pPr algn="ctr"/>
+          </a:p>
+        </p:txBody>
+      </p:sp>
+      <p:sp>
+        <p:nvSpPr>
+          <p:cNvPr id="20" name="TextBox 19"/>
+          <p:cNvSpPr txBox="1"/>
+          <p:nvPr/>
+        </p:nvSpPr>
+        <p:spPr>
+          <a:xfrm>
+            <a:off x="594360" y="4680813"/>
+            <a:ext cx="438912" cy="438912"/>
+          </a:xfrm>
+          <a:prstGeom prst="rect">
+            <a:avLst/>
+          </a:prstGeom>
+          <a:noFill/>
+        </p:spPr>
+        <p:txBody>
+          <a:bodyPr wrap="square" anchor="ctr"/>
+          <a:lstStyle/>
+          <a:p>
+            <a:pPr algn="ctr"/>
+            <a:r>
+              <a:rPr sz="1600" b="1" i="0">
+                <a:solidFill>
+                  <a:srgbClr val="FFFFFF"/>
+                </a:solidFill>
+                <a:latin typeface="Calibri"/>
+              </a:rPr>
+              <a:t>4</a:t>
+            </a:r>
+          </a:p>
+        </p:txBody>
+      </p:sp>
+      <p:sp>
+        <p:nvSpPr>
+          <p:cNvPr id="21" name="TextBox 20"/>
+          <p:cNvSpPr txBox="1"/>
+          <p:nvPr/>
+        </p:nvSpPr>
+        <p:spPr>
+          <a:xfrm>
+            <a:off x="1188720" y="4537252"/>
+            <a:ext cx="10271455" cy="744321"/>
+          </a:xfrm>
+          <a:prstGeom prst="rect">
+            <a:avLst/>
+          </a:prstGeom>
+          <a:noFill/>
+        </p:spPr>
+        <p:txBody>
+          <a:bodyPr wrap="square" anchor="ctr"/>
+          <a:lstStyle/>
+          <a:p>
+            <a:r>
+              <a:rPr sz="1500" b="1" i="0">
+                <a:solidFill>
+                  <a:srgbClr val="095292"/>
+                </a:solidFill>
+                <a:latin typeface="Calibri"/>
+              </a:rPr>
+              <a:t>40 s · Actores y frontera</a:t>
+            </a:r>
+          </a:p>
+          <a:p>
+            <a:pPr>
+              <a:spcBef>
+                <a:spcPts val="200"/>
+              </a:spcBef>
+            </a:pPr>
+            <a:r>
+              <a:rPr sz="1300" b="0" i="0">
+                <a:solidFill>
+                  <a:srgbClr val="333333"/>
+                </a:solidFill>
+                <a:latin typeface="Calibri"/>
+              </a:rPr>
+              <a:t>Quién vive el problema, y a quién le van a preguntar esta semana.</a:t>
+            </a:r>
+          </a:p>
+        </p:txBody>
+      </p:sp>
+      <p:sp>
+        <p:nvSpPr>
+          <p:cNvPr id="22" name="Rounded Rectangle 21"/>
+          <p:cNvSpPr/>
+          <p:nvPr/>
+        </p:nvSpPr>
+        <p:spPr>
+          <a:xfrm>
+            <a:off x="457200" y="5446166"/>
+            <a:ext cx="11277295" cy="908913"/>
+          </a:xfrm>
+          <a:prstGeom prst="roundRect">
+            <a:avLst>
+              <a:gd name="adj" fmla="val 12000"/>
+            </a:avLst>
+          </a:prstGeom>
+          <a:solidFill>
+            <a:srgbClr val="F2F2F2"/>
+          </a:solidFill>
+          <a:ln>
+            <a:noFill/>
+          </a:ln>
+        </p:spPr>
+        <p:style>
+          <a:lnRef idx="1">
+            <a:schemeClr val="accent1"/>
+          </a:lnRef>
+          <a:fillRef idx="3">
+            <a:schemeClr val="accent1"/>
+          </a:fillRef>
+          <a:effectRef idx="2">
+            <a:schemeClr val="accent1"/>
+          </a:effectRef>
+          <a:fontRef idx="minor">
+            <a:schemeClr val="lt1"/>
+          </a:fontRef>
+        </p:style>
+        <p:txBody>
+          <a:bodyPr rtlCol="0" anchor="ctr"/>
+          <a:lstStyle/>
+          <a:p>
+            <a:pPr algn="ctr"/>
+          </a:p>
+        </p:txBody>
+      </p:sp>
+      <p:sp>
+        <p:nvSpPr>
+          <p:cNvPr id="23" name="Rounded Rectangle 22"/>
+          <p:cNvSpPr/>
+          <p:nvPr/>
+        </p:nvSpPr>
+        <p:spPr>
+          <a:xfrm>
+            <a:off x="594360" y="5681167"/>
+            <a:ext cx="438912" cy="438912"/>
+          </a:xfrm>
+          <a:prstGeom prst="roundRect">
+            <a:avLst>
+              <a:gd name="adj" fmla="val 12000"/>
+            </a:avLst>
+          </a:prstGeom>
+          <a:solidFill>
+            <a:srgbClr val="095292"/>
+          </a:solidFill>
+          <a:ln>
+            <a:noFill/>
+          </a:ln>
+        </p:spPr>
+        <p:style>
+          <a:lnRef idx="1">
+            <a:schemeClr val="accent1"/>
+          </a:lnRef>
+          <a:fillRef idx="3">
+            <a:schemeClr val="accent1"/>
+          </a:fillRef>
+          <a:effectRef idx="2">
+            <a:schemeClr val="accent1"/>
+          </a:effectRef>
+          <a:fontRef idx="minor">
+            <a:schemeClr val="lt1"/>
+          </a:fontRef>
+        </p:style>
+        <p:txBody>
+          <a:bodyPr rtlCol="0" anchor="ctr"/>
+          <a:lstStyle/>
+          <a:p>
+            <a:pPr algn="ctr"/>
+          </a:p>
+        </p:txBody>
+      </p:sp>
+      <p:sp>
+        <p:nvSpPr>
+          <p:cNvPr id="24" name="TextBox 23"/>
+          <p:cNvSpPr txBox="1"/>
+          <p:nvPr/>
+        </p:nvSpPr>
+        <p:spPr>
+          <a:xfrm>
+            <a:off x="594360" y="5681167"/>
+            <a:ext cx="438912" cy="438912"/>
+          </a:xfrm>
+          <a:prstGeom prst="rect">
+            <a:avLst/>
+          </a:prstGeom>
+          <a:noFill/>
+        </p:spPr>
+        <p:txBody>
+          <a:bodyPr wrap="square" anchor="ctr"/>
+          <a:lstStyle/>
+          <a:p>
+            <a:pPr algn="ctr"/>
+            <a:r>
+              <a:rPr sz="1600" b="1" i="0">
+                <a:solidFill>
+                  <a:srgbClr val="FFFFFF"/>
+                </a:solidFill>
+                <a:latin typeface="Calibri"/>
+              </a:rPr>
+              <a:t>5</a:t>
+            </a:r>
+          </a:p>
+        </p:txBody>
+      </p:sp>
+      <p:sp>
+        <p:nvSpPr>
+          <p:cNvPr id="25" name="TextBox 24"/>
+          <p:cNvSpPr txBox="1"/>
+          <p:nvPr/>
+        </p:nvSpPr>
+        <p:spPr>
+          <a:xfrm>
+            <a:off x="1188720" y="5537606"/>
+            <a:ext cx="10271455" cy="744321"/>
+          </a:xfrm>
+          <a:prstGeom prst="rect">
+            <a:avLst/>
+          </a:prstGeom>
+          <a:noFill/>
+        </p:spPr>
+        <p:txBody>
+          <a:bodyPr wrap="square" anchor="ctr"/>
+          <a:lstStyle/>
+          <a:p>
+            <a:r>
+              <a:rPr sz="1500" b="1" i="0">
+                <a:solidFill>
+                  <a:srgbClr val="095292"/>
+                </a:solidFill>
+                <a:latin typeface="Calibri"/>
+              </a:rPr>
+              <a:t>20 s · El criterio de éxito</a:t>
+            </a:r>
+          </a:p>
+          <a:p>
+            <a:pPr>
+              <a:spcBef>
+                <a:spcPts val="200"/>
+              </a:spcBef>
+            </a:pPr>
+            <a:r>
+              <a:rPr sz="1300" b="0" i="0">
+                <a:solidFill>
+                  <a:srgbClr val="333333"/>
+                </a:solidFill>
+                <a:latin typeface="Calibri"/>
+              </a:rPr>
+              <a:t>De X a Y, medido así.</a:t>
+            </a:r>
+          </a:p>
+        </p:txBody>
+      </p:sp>
+      <p:sp>
+        <p:nvSpPr>
+          <p:cNvPr id="26" name="TextBox 25"/>
+          <p:cNvSpPr txBox="1"/>
+          <p:nvPr/>
+        </p:nvSpPr>
+        <p:spPr>
+          <a:xfrm>
+            <a:off x="11185855" y="6473952"/>
+            <a:ext cx="640080" cy="274320"/>
+          </a:xfrm>
+          <a:prstGeom prst="rect">
+            <a:avLst/>
+          </a:prstGeom>
+          <a:noFill/>
+        </p:spPr>
+        <p:txBody>
+          <a:bodyPr wrap="square">
+            <a:spAutoFit/>
+          </a:bodyPr>
+          <a:lstStyle/>
+          <a:p>
+            <a:pPr algn="r"/>
+            <a:r>
+              <a:rPr sz="1100" b="0" i="0">
+                <a:solidFill>
+                  <a:srgbClr val="666666"/>
+                </a:solidFill>
+                <a:latin typeface="Calibri"/>
+              </a:rPr>
+              <a:t>21</a:t>
+            </a:r>
+          </a:p>
+        </p:txBody>
+      </p:sp>
+    </p:spTree>
+  </p:cSld>
+  <p:clrMapOvr>
+    <a:masterClrMapping/>
+  </p:clrMapOvr>
+</p:sld>
+</file>
+
+<file path=ppt/slides/slide22.xml><?xml version="1.0" encoding="utf-8"?>
+<p:sld xmlns:a="http://schemas.openxmlformats.org/drawingml/2006/main" xmlns:p="http://schemas.openxmlformats.org/presentationml/2006/main" xmlns:r="http://schemas.openxmlformats.org/officeDocument/2006/relationships">
+  <p:cSld>
+    <p:bg>
+      <p:bgPr>
+        <a:solidFill>
+          <a:srgbClr val="FFFFFF"/>
+        </a:solidFill>
+        <a:effectLst/>
+      </p:bgPr>
+    </p:bg>
+    <p:spTree>
+      <p:nvGrpSpPr>
+        <p:cNvPr id="1" name=""/>
+        <p:cNvGrpSpPr/>
+        <p:nvPr/>
+      </p:nvGrpSpPr>
+      <p:grpSpPr/>
+      <p:sp>
+        <p:nvSpPr>
+          <p:cNvPr id="2" name="Rectangle 1"/>
+          <p:cNvSpPr/>
+          <p:nvPr/>
+        </p:nvSpPr>
+        <p:spPr>
+          <a:xfrm>
+            <a:off x="0" y="0"/>
+            <a:ext cx="12191695" cy="960120"/>
+          </a:xfrm>
+          <a:prstGeom prst="rect">
+            <a:avLst/>
+          </a:prstGeom>
+          <a:solidFill>
+            <a:srgbClr val="095292"/>
+          </a:solidFill>
+          <a:ln>
+            <a:noFill/>
+          </a:ln>
+        </p:spPr>
+        <p:style>
+          <a:lnRef idx="1">
+            <a:schemeClr val="accent1"/>
+          </a:lnRef>
+          <a:fillRef idx="3">
+            <a:schemeClr val="accent1"/>
+          </a:fillRef>
+          <a:effectRef idx="2">
+            <a:schemeClr val="accent1"/>
+          </a:effectRef>
+          <a:fontRef idx="minor">
+            <a:schemeClr val="lt1"/>
+          </a:fontRef>
+        </p:style>
+        <p:txBody>
+          <a:bodyPr rtlCol="0" anchor="ctr"/>
+          <a:lstStyle/>
+          <a:p>
+            <a:pPr algn="ctr"/>
+          </a:p>
+        </p:txBody>
+      </p:sp>
+      <p:sp>
+        <p:nvSpPr>
+          <p:cNvPr id="3" name="Rectangle 2"/>
+          <p:cNvSpPr/>
+          <p:nvPr/>
+        </p:nvSpPr>
+        <p:spPr>
+          <a:xfrm>
+            <a:off x="0" y="960120"/>
+            <a:ext cx="12191695" cy="41148"/>
+          </a:xfrm>
+          <a:prstGeom prst="rect">
+            <a:avLst/>
+          </a:prstGeom>
+          <a:solidFill>
+            <a:srgbClr val="FFD000"/>
+          </a:solidFill>
+          <a:ln>
+            <a:noFill/>
+          </a:ln>
+        </p:spPr>
+        <p:style>
+          <a:lnRef idx="1">
+            <a:schemeClr val="accent1"/>
+          </a:lnRef>
+          <a:fillRef idx="3">
+            <a:schemeClr val="accent1"/>
+          </a:fillRef>
+          <a:effectRef idx="2">
+            <a:schemeClr val="accent1"/>
+          </a:effectRef>
+          <a:fontRef idx="minor">
+            <a:schemeClr val="lt1"/>
+          </a:fontRef>
+        </p:style>
+        <p:txBody>
+          <a:bodyPr rtlCol="0" anchor="ctr"/>
+          <a:lstStyle/>
+          <a:p>
+            <a:pPr algn="ctr"/>
+          </a:p>
+        </p:txBody>
+      </p:sp>
+      <p:sp>
+        <p:nvSpPr>
+          <p:cNvPr id="4" name="TextBox 3"/>
+          <p:cNvSpPr txBox="1"/>
+          <p:nvPr/>
+        </p:nvSpPr>
+        <p:spPr>
+          <a:xfrm>
+            <a:off x="457200" y="164592"/>
+            <a:ext cx="11277295" cy="502920"/>
+          </a:xfrm>
+          <a:prstGeom prst="rect">
+            <a:avLst/>
+          </a:prstGeom>
+          <a:noFill/>
+        </p:spPr>
+        <p:txBody>
+          <a:bodyPr wrap="square">
+            <a:spAutoFit/>
+          </a:bodyPr>
+          <a:lstStyle/>
+          <a:p>
+            <a:r>
+              <a:rPr sz="2600" b="1" i="0">
+                <a:solidFill>
+                  <a:srgbClr val="FFFFFF"/>
+                </a:solidFill>
+                <a:latin typeface="Calibri"/>
+              </a:rPr>
+              <a:t>Para la Clase 7</a:t>
+            </a:r>
+          </a:p>
+        </p:txBody>
+      </p:sp>
+      <p:sp>
+        <p:nvSpPr>
+          <p:cNvPr id="5" name="TextBox 4"/>
+          <p:cNvSpPr txBox="1"/>
+          <p:nvPr/>
+        </p:nvSpPr>
+        <p:spPr>
+          <a:xfrm>
+            <a:off x="457200" y="1170432"/>
+            <a:ext cx="11277295" cy="5230368"/>
+          </a:xfrm>
+          <a:prstGeom prst="rect">
+            <a:avLst/>
+          </a:prstGeom>
+          <a:noFill/>
+        </p:spPr>
+        <p:txBody>
+          <a:bodyPr wrap="square">
+            <a:spAutoFit/>
+          </a:bodyPr>
+          <a:lstStyle/>
+          <a:p>
+            <a:pPr>
+              <a:spcAft>
+                <a:spcPts val="800"/>
+              </a:spcAft>
+            </a:pPr>
+            <a:r>
+              <a:rPr sz="2000" b="0" i="0">
+                <a:solidFill>
+                  <a:srgbClr val="333333"/>
+                </a:solidFill>
+                <a:latin typeface="Calibri"/>
+              </a:rPr>
+              <a:t>–   </a:t>
+            </a:r>
+            <a:r>
+              <a:rPr sz="2000" b="1" i="0">
+                <a:solidFill>
+                  <a:srgbClr val="333333"/>
+                </a:solidFill>
+                <a:latin typeface="Calibri"/>
+              </a:rPr>
+              <a:t>Trabajo dirigido:</a:t>
+            </a:r>
+            <a:r>
+              <a:rPr sz="2000" b="0" i="0">
+                <a:solidFill>
+                  <a:srgbClr val="333333"/>
+                </a:solidFill>
+                <a:latin typeface="Calibri"/>
+              </a:rPr>
+              <a:t> Identificación de problemáticas locales — cerrar la ficha con la cifra medida de verdad, no estimada, si esta semana alcanzan a contar o preguntar.</a:t>
+            </a:r>
+          </a:p>
+          <a:p>
+            <a:pPr>
+              <a:spcAft>
+                <a:spcPts val="800"/>
+              </a:spcAft>
+            </a:pPr>
+            <a:r>
+              <a:rPr sz="2000" b="0" i="0">
+                <a:solidFill>
+                  <a:srgbClr val="333333"/>
+                </a:solidFill>
+                <a:latin typeface="Calibri"/>
+              </a:rPr>
+              <a:t>–   </a:t>
+            </a:r>
+            <a:r>
+              <a:rPr sz="2000" b="1" i="0">
+                <a:solidFill>
+                  <a:srgbClr val="333333"/>
+                </a:solidFill>
+                <a:latin typeface="Calibri"/>
+              </a:rPr>
+              <a:t>Trabajo independiente:</a:t>
+            </a:r>
+            <a:r>
+              <a:rPr sz="2000" b="0" i="0">
+                <a:solidFill>
+                  <a:srgbClr val="333333"/>
+                </a:solidFill>
+                <a:latin typeface="Calibri"/>
+              </a:rPr>
+              <a:t> Propuesta inicial de solución: media página con </a:t>
+            </a:r>
+            <a:r>
+              <a:rPr sz="2000" b="1" i="0">
+                <a:solidFill>
+                  <a:srgbClr val="333333"/>
+                </a:solidFill>
+                <a:latin typeface="Calibri"/>
+              </a:rPr>
+              <a:t>dos</a:t>
+            </a:r>
+            <a:r>
+              <a:rPr sz="2000" b="0" i="0">
+                <a:solidFill>
+                  <a:srgbClr val="333333"/>
+                </a:solidFill>
+                <a:latin typeface="Calibri"/>
+              </a:rPr>
+              <a:t> alternativas para atacar la causa elegida, sin decidir todavía cuál. Sin nombrar herramientas.</a:t>
+            </a:r>
+          </a:p>
+          <a:p>
+            <a:pPr>
+              <a:spcAft>
+                <a:spcPts val="800"/>
+              </a:spcAft>
+            </a:pPr>
+            <a:r>
+              <a:rPr sz="2000" b="0" i="0">
+                <a:solidFill>
+                  <a:srgbClr val="333333"/>
+                </a:solidFill>
+                <a:latin typeface="Calibri"/>
+              </a:rPr>
+              <a:t>–   </a:t>
+            </a:r>
+            <a:r>
+              <a:rPr sz="2000" b="1" i="0">
+                <a:solidFill>
+                  <a:srgbClr val="333333"/>
+                </a:solidFill>
+                <a:latin typeface="Calibri"/>
+              </a:rPr>
+              <a:t>Clase 7 · Ciclo de vida de los proyectos de ingeniería</a:t>
+            </a:r>
+            <a:r>
+              <a:rPr sz="2000" b="0" i="0">
+                <a:solidFill>
+                  <a:srgbClr val="333333"/>
+                </a:solidFill>
+                <a:latin typeface="Calibri"/>
+              </a:rPr>
+              <a:t> — el </a:t>
+            </a:r>
+            <a:r>
+              <a:rPr sz="2000" b="1" i="0">
+                <a:solidFill>
+                  <a:srgbClr val="333333"/>
+                </a:solidFill>
+                <a:latin typeface="Calibri"/>
+              </a:rPr>
+              <a:t>ciclo de vida de los proyectos de ingeniería</a:t>
+            </a:r>
+            <a:r>
+              <a:rPr sz="2000" b="0" i="0">
+                <a:solidFill>
+                  <a:srgbClr val="333333"/>
+                </a:solidFill>
+                <a:latin typeface="Calibri"/>
+              </a:rPr>
+              <a:t>, aplicado a la ficha de hoy: qué se hace antes de construir y por qué el orden importa.</a:t>
+            </a:r>
+          </a:p>
+          <a:p>
+            <a:pPr>
+              <a:spcAft>
+                <a:spcPts val="800"/>
+              </a:spcAft>
+            </a:pPr>
+            <a:r>
+              <a:rPr sz="2000" b="0" i="0">
+                <a:solidFill>
+                  <a:srgbClr val="333333"/>
+                </a:solidFill>
+                <a:latin typeface="Calibri"/>
+              </a:rPr>
+              <a:t>–   </a:t>
+            </a:r>
+            <a:r>
+              <a:rPr sz="2000" b="1" i="0">
+                <a:solidFill>
+                  <a:srgbClr val="333333"/>
+                </a:solidFill>
+                <a:latin typeface="Calibri"/>
+              </a:rPr>
+              <a:t>Aviso:</a:t>
+            </a:r>
+            <a:r>
+              <a:rPr sz="2000" b="0" i="0">
+                <a:solidFill>
+                  <a:srgbClr val="333333"/>
+                </a:solidFill>
+                <a:latin typeface="Calibri"/>
+              </a:rPr>
+              <a:t> Arranca el corte 2. La ficha del problema queda como referencia fija: llévenla al documento del equipo con el título «Ficha del problema — versión final del corte 1», porque se va a citar en todas las sesiones que siguen.</a:t>
+            </a:r>
+          </a:p>
+          <a:p>
+            <a:pPr>
+              <a:spcAft>
+                <a:spcPts val="800"/>
+              </a:spcAft>
+            </a:pPr>
+            <a:r>
+              <a:rPr sz="2000" b="0" i="0">
+                <a:solidFill>
+                  <a:srgbClr val="333333"/>
+                </a:solidFill>
+                <a:latin typeface="Calibri"/>
+              </a:rPr>
+              <a:t>–   </a:t>
+            </a:r>
+            <a:r>
+              <a:rPr sz="2000" b="1" i="0">
+                <a:solidFill>
+                  <a:srgbClr val="333333"/>
+                </a:solidFill>
+                <a:latin typeface="Calibri"/>
+              </a:rPr>
+              <a:t>Antes de salir:</a:t>
+            </a:r>
+            <a:r>
+              <a:rPr sz="2000" b="0" i="0">
+                <a:solidFill>
+                  <a:srgbClr val="333333"/>
+                </a:solidFill>
+                <a:latin typeface="Calibri"/>
+              </a:rPr>
+              <a:t> el enlace del documento del equipo en el chat, con permiso de lectura para el docente, y el nombre del vocero de hoy.</a:t>
+            </a:r>
+          </a:p>
+        </p:txBody>
+      </p:sp>
+      <p:sp>
+        <p:nvSpPr>
+          <p:cNvPr id="6" name="TextBox 5"/>
+          <p:cNvSpPr txBox="1"/>
+          <p:nvPr/>
+        </p:nvSpPr>
+        <p:spPr>
+          <a:xfrm>
+            <a:off x="11185855" y="6473952"/>
+            <a:ext cx="640080" cy="274320"/>
+          </a:xfrm>
+          <a:prstGeom prst="rect">
+            <a:avLst/>
+          </a:prstGeom>
+          <a:noFill/>
+        </p:spPr>
+        <p:txBody>
+          <a:bodyPr wrap="square">
+            <a:spAutoFit/>
+          </a:bodyPr>
+          <a:lstStyle/>
+          <a:p>
+            <a:pPr algn="r"/>
+            <a:r>
+              <a:rPr sz="1100" b="0" i="0">
+                <a:solidFill>
+                  <a:srgbClr val="666666"/>
+                </a:solidFill>
+                <a:latin typeface="Calibri"/>
+              </a:rPr>
+              <a:t>22</a:t>
+            </a:r>
+          </a:p>
+        </p:txBody>
+      </p:sp>
+    </p:spTree>
+  </p:cSld>
+  <p:clrMapOvr>
+    <a:masterClrMapping/>
+  </p:clrMapOvr>
+</p:sld>
+</file>
+
+<file path=ppt/slides/slide23.xml><?xml version="1.0" encoding="utf-8"?>
+<p:sld xmlns:a="http://schemas.openxmlformats.org/drawingml/2006/main" xmlns:p="http://schemas.openxmlformats.org/presentationml/2006/main" xmlns:r="http://schemas.openxmlformats.org/officeDocument/2006/relationships">
+  <p:cSld>
+    <p:bg>
+      <p:bgPr>
+        <a:solidFill>
+          <a:srgbClr val="FFFFFF"/>
+        </a:solidFill>
+        <a:effectLst/>
+      </p:bgPr>
+    </p:bg>
+    <p:spTree>
+      <p:nvGrpSpPr>
+        <p:cNvPr id="1" name=""/>
+        <p:cNvGrpSpPr/>
+        <p:nvPr/>
+      </p:nvGrpSpPr>
+      <p:grpSpPr/>
+      <p:sp>
+        <p:nvSpPr>
+          <p:cNvPr id="2" name="Rectangle 1"/>
+          <p:cNvSpPr/>
+          <p:nvPr/>
+        </p:nvSpPr>
+        <p:spPr>
+          <a:xfrm>
+            <a:off x="0" y="0"/>
+            <a:ext cx="12191695" cy="164592"/>
+          </a:xfrm>
+          <a:prstGeom prst="rect">
+            <a:avLst/>
+          </a:prstGeom>
+          <a:solidFill>
+            <a:srgbClr val="269CCB"/>
+          </a:solidFill>
+          <a:ln>
+            <a:noFill/>
+          </a:ln>
+        </p:spPr>
+        <p:style>
+          <a:lnRef idx="1">
+            <a:schemeClr val="accent1"/>
+          </a:lnRef>
+          <a:fillRef idx="3">
+            <a:schemeClr val="accent1"/>
+          </a:fillRef>
+          <a:effectRef idx="2">
+            <a:schemeClr val="accent1"/>
+          </a:effectRef>
+          <a:fontRef idx="minor">
+            <a:schemeClr val="lt1"/>
+          </a:fontRef>
+        </p:style>
+        <p:txBody>
+          <a:bodyPr rtlCol="0" anchor="ctr"/>
+          <a:lstStyle/>
+          <a:p>
+            <a:pPr algn="ctr"/>
+          </a:p>
+        </p:txBody>
+      </p:sp>
+      <p:pic>
+        <p:nvPicPr>
+          <p:cNvPr id="3" name="Picture 2" descr="logo_uniajc_color.png"/>
+          <p:cNvPicPr>
+            <a:picLocks noChangeAspect="1"/>
+          </p:cNvPicPr>
+          <p:nvPr/>
+        </p:nvPicPr>
+        <p:blipFill>
+          <a:blip r:embed="rId2"/>
+          <a:stretch>
+            <a:fillRect/>
+          </a:stretch>
+        </p:blipFill>
+        <p:spPr>
+          <a:xfrm>
+            <a:off x="10271455" y="5998464"/>
+            <a:ext cx="1463040" cy="643233"/>
+          </a:xfrm>
+          <a:prstGeom prst="rect">
+            <a:avLst/>
+          </a:prstGeom>
+        </p:spPr>
+      </p:pic>
+      <p:sp>
+        <p:nvSpPr>
+          <p:cNvPr id="4" name="TextBox 3"/>
+          <p:cNvSpPr txBox="1"/>
+          <p:nvPr/>
+        </p:nvSpPr>
+        <p:spPr>
+          <a:xfrm>
+            <a:off x="457200" y="1737360"/>
+            <a:ext cx="11277295" cy="1097280"/>
+          </a:xfrm>
+          <a:prstGeom prst="rect">
+            <a:avLst/>
+          </a:prstGeom>
+          <a:noFill/>
+        </p:spPr>
+        <p:txBody>
+          <a:bodyPr wrap="square" anchor="ctr"/>
+          <a:lstStyle/>
+          <a:p>
+            <a:pPr algn="ctr"/>
+            <a:r>
+              <a:rPr sz="3400" b="1" i="0">
+                <a:solidFill>
+                  <a:srgbClr val="095292"/>
+                </a:solidFill>
+                <a:latin typeface="Calibri"/>
+              </a:rPr>
+              <a:t>Cerró el corte 1 · nos vemos en la sesión 7</a:t>
+            </a:r>
+          </a:p>
+        </p:txBody>
+      </p:sp>
+      <p:sp>
+        <p:nvSpPr>
+          <p:cNvPr id="5" name="TextBox 4"/>
+          <p:cNvSpPr txBox="1"/>
+          <p:nvPr/>
+        </p:nvSpPr>
+        <p:spPr>
+          <a:xfrm>
+            <a:off x="457200" y="3017520"/>
+            <a:ext cx="11277295" cy="1645920"/>
+          </a:xfrm>
+          <a:prstGeom prst="rect">
+            <a:avLst/>
+          </a:prstGeom>
+          <a:noFill/>
+        </p:spPr>
+        <p:txBody>
+          <a:bodyPr wrap="square">
+            <a:spAutoFit/>
+          </a:bodyPr>
+          <a:lstStyle/>
+          <a:p>
+            <a:pPr algn="ctr">
+              <a:spcAft>
+                <a:spcPts val="600"/>
+              </a:spcAft>
+            </a:pPr>
+            <a:r>
+              <a:rPr sz="1600" b="0" i="0">
+                <a:solidFill>
+                  <a:srgbClr val="333333"/>
+                </a:solidFill>
+                <a:latin typeface="Calibri"/>
+              </a:rPr>
+              <a:t>Análisis de problemas tecnológicos del entorno · Clase 6</a:t>
+            </a:r>
+          </a:p>
+          <a:p>
+            <a:pPr algn="ctr">
+              <a:spcAft>
+                <a:spcPts val="600"/>
+              </a:spcAft>
+            </a:pPr>
+            <a:r>
+              <a:rPr sz="1600" b="0" i="0">
+                <a:solidFill>
+                  <a:srgbClr val="333333"/>
+                </a:solidFill>
+                <a:latin typeface="Calibri"/>
+              </a:rPr>
+              <a:t>FI300101 · UNIAJC · Ingeniería de Sistemas</a:t>
+            </a:r>
+          </a:p>
+        </p:txBody>
+      </p:sp>
+      <p:sp>
+        <p:nvSpPr>
+          <p:cNvPr id="6" name="TextBox 5"/>
+          <p:cNvSpPr txBox="1"/>
+          <p:nvPr/>
+        </p:nvSpPr>
+        <p:spPr>
+          <a:xfrm>
+            <a:off x="457200" y="4754880"/>
+            <a:ext cx="11277295" cy="640080"/>
+          </a:xfrm>
+          <a:prstGeom prst="rect">
+            <a:avLst/>
+          </a:prstGeom>
+          <a:noFill/>
+        </p:spPr>
+        <p:txBody>
+          <a:bodyPr wrap="square">
+            <a:spAutoFit/>
+          </a:bodyPr>
+          <a:lstStyle/>
+          <a:p>
+            <a:pPr algn="ctr"/>
+            <a:r>
+              <a:rPr sz="2000" b="1" i="0">
+                <a:solidFill>
+                  <a:srgbClr val="269CCB"/>
+                </a:solidFill>
+                <a:latin typeface="Calibri"/>
+              </a:rPr>
+              <a:t>El problema quedó escrito. Todo lo que sigue se hace sobre esa ficha</a:t>
             </a:r>
           </a:p>
         </p:txBody>

--- a/Introduccion a la Ingenieria/Clases/Clase 6 - Analisis de problemas tecnologicos del entorno/Presentacion.pptx
+++ b/Introduccion a la Ingenieria/Clases/Clase 6 - Analisis de problemas tecnologicos del entorno/Presentacion.pptx
@@ -28,6 +28,10 @@
     <p:sldId id="276" r:id="rId27"/>
     <p:sldId id="277" r:id="rId28"/>
     <p:sldId id="278" r:id="rId29"/>
+    <p:sldId id="279" r:id="rId30"/>
+    <p:sldId id="280" r:id="rId31"/>
+    <p:sldId id="281" r:id="rId32"/>
+    <p:sldId id="282" r:id="rId33"/>
   </p:sldIdLst>
   <p:sldSz cx="12191695" cy="6858000" type="screen4x3"/>
   <p:notesSz cx="6858000" cy="9144000"/>
@@ -3628,7 +3632,7 @@
                 </a:solidFill>
                 <a:latin typeface="Calibri"/>
               </a:rPr>
-              <a:t>La pregunta de entrada: la solución disfrazada de problema</a:t>
+              <a:t>La pregunta de entrada: la solución disfrazada de problema (1/2)</a:t>
             </a:r>
           </a:p>
         </p:txBody>
@@ -3718,54 +3722,6 @@
                 <a:latin typeface="Calibri"/>
               </a:rPr>
               <a:t> Si la respuesta es sí —y casi siempre lo es—, entonces el problema es otro y hay que buscarlo.</a:t>
-            </a:r>
-          </a:p>
-          <a:p>
-            <a:pPr>
-              <a:spcAft>
-                <a:spcPts val="800"/>
-              </a:spcAft>
-            </a:pPr>
-            <a:r>
-              <a:rPr sz="2000" b="0" i="0">
-                <a:solidFill>
-                  <a:srgbClr val="333333"/>
-                </a:solidFill>
-                <a:latin typeface="Calibri"/>
-              </a:rPr>
-              <a:t>–   Si el problema verdadero es que la gente no sabe si el libro que necesita está disponible, eso se puede resolver con una app, con una lista pegada en la puerta o con un número de WhatsApp.</a:t>
-            </a:r>
-          </a:p>
-          <a:p>
-            <a:pPr>
-              <a:spcAft>
-                <a:spcPts val="800"/>
-              </a:spcAft>
-            </a:pPr>
-            <a:r>
-              <a:rPr sz="2000" b="0" i="0">
-                <a:solidFill>
-                  <a:srgbClr val="333333"/>
-                </a:solidFill>
-                <a:latin typeface="Calibri"/>
-              </a:rPr>
-              <a:t>–   Que existan varias soluciones posibles es la señal de que el problema está bien escrito.</a:t>
-            </a:r>
-          </a:p>
-          <a:p>
-            <a:pPr>
-              <a:spcAft>
-                <a:spcPts val="800"/>
-              </a:spcAft>
-            </a:pPr>
-            <a:r>
-              <a:rPr sz="2000" b="0" i="0">
-                <a:solidFill>
-                  <a:srgbClr val="333333"/>
-                </a:solidFill>
-                <a:latin typeface="Calibri"/>
-              </a:rPr>
-              <a:t>–   Recoja las respuestas del muro en los diez minutos de apertura y no las corrija: en el minuto 12, con la primera diapositiva, van a ver ellos mismos que casi todo lo que escribieron era un síntoma o una solución.</a:t>
             </a:r>
           </a:p>
         </p:txBody>
@@ -3946,7 +3902,7 @@
                 </a:solidFill>
                 <a:latin typeface="Calibri"/>
               </a:rPr>
-              <a:t>Las tres cosas que se confunden y cómo se escribe un problema (1/2)</a:t>
+              <a:t>La pregunta de entrada: la solución disfrazada de problema (2/2)</a:t>
             </a:r>
           </a:p>
         </p:txBody>
@@ -3985,25 +3941,7 @@
                 </a:solidFill>
                 <a:latin typeface="Calibri"/>
               </a:rPr>
-              <a:t>–   </a:t>
-            </a:r>
-            <a:r>
-              <a:rPr sz="2000" b="1" i="0">
-                <a:solidFill>
-                  <a:srgbClr val="333333"/>
-                </a:solidFill>
-                <a:latin typeface="Calibri"/>
-              </a:rPr>
-              <a:t>El síntoma</a:t>
-            </a:r>
-            <a:r>
-              <a:rPr sz="2000" b="0" i="0">
-                <a:solidFill>
-                  <a:srgbClr val="333333"/>
-                </a:solidFill>
-                <a:latin typeface="Calibri"/>
-              </a:rPr>
-              <a:t> es la señal visible: la queja, la demora, la pérdida.</a:t>
+              <a:t>–   Si el problema verdadero es que la gente no sabe si el libro que necesita está disponible, eso se puede resolver con una app, con una lista pegada en la puerta o con un número de WhatsApp.</a:t>
             </a:r>
           </a:p>
           <a:p>
@@ -4019,7 +3957,7 @@
                 </a:solidFill>
                 <a:latin typeface="Calibri"/>
               </a:rPr>
-              <a:t>–   «La gente se queja del servicio» es un síntoma perfecto y un problema inservible, porque no dice de qué se queja ni qué no puede hacer.</a:t>
+              <a:t>–   Que existan varias soluciones posibles es la señal de que el problema está bien escrito.</a:t>
             </a:r>
           </a:p>
           <a:p>
@@ -4035,107 +3973,7 @@
                 </a:solidFill>
                 <a:latin typeface="Calibri"/>
               </a:rPr>
-              <a:t>–   Los síntomas son útiles —son la pista que lleva al problema— pero atacar un síntoma produce soluciones cosméticas: si el síntoma es que la fila es larga</a:t>
-            </a:r>
-          </a:p>
-          <a:p>
-            <a:pPr>
-              <a:spcAft>
-                <a:spcPts val="800"/>
-              </a:spcAft>
-            </a:pPr>
-            <a:r>
-              <a:rPr sz="2000" b="0" i="0">
-                <a:solidFill>
-                  <a:srgbClr val="333333"/>
-                </a:solidFill>
-                <a:latin typeface="Calibri"/>
-              </a:rPr>
-              <a:t>–   Poner sillas mejora la fila y no toca el problema. </a:t>
-            </a:r>
-            <a:r>
-              <a:rPr sz="2000" b="1" i="0">
-                <a:solidFill>
-                  <a:srgbClr val="333333"/>
-                </a:solidFill>
-                <a:latin typeface="Calibri"/>
-              </a:rPr>
-              <a:t>La solución disfrazada</a:t>
-            </a:r>
-            <a:r>
-              <a:rPr sz="2000" b="0" i="0">
-                <a:solidFill>
-                  <a:srgbClr val="333333"/>
-                </a:solidFill>
-                <a:latin typeface="Calibri"/>
-              </a:rPr>
-              <a:t> es la más peligrosa porque se ve profesional.</a:t>
-            </a:r>
-          </a:p>
-          <a:p>
-            <a:pPr>
-              <a:spcAft>
-                <a:spcPts val="800"/>
-              </a:spcAft>
-            </a:pPr>
-            <a:r>
-              <a:rPr sz="2000" b="0" i="0">
-                <a:solidFill>
-                  <a:srgbClr val="333333"/>
-                </a:solidFill>
-                <a:latin typeface="Calibri"/>
-              </a:rPr>
-              <a:t>–   «Falta un sistema», «hay que digitalizar el proceso», «queremos hacerlo con IA».</a:t>
-            </a:r>
-          </a:p>
-          <a:p>
-            <a:pPr>
-              <a:spcAft>
-                <a:spcPts val="800"/>
-              </a:spcAft>
-            </a:pPr>
-            <a:r>
-              <a:rPr sz="2000" b="0" i="0">
-                <a:solidFill>
-                  <a:srgbClr val="333333"/>
-                </a:solidFill>
-                <a:latin typeface="Calibri"/>
-              </a:rPr>
-              <a:t>–   Las tres eligen la herramienta antes de saber qué se va a resolver, y cierran el análisis: una vez que el equipo decidió que va a hacer una app con IA</a:t>
-            </a:r>
-          </a:p>
-          <a:p>
-            <a:pPr>
-              <a:spcAft>
-                <a:spcPts val="800"/>
-              </a:spcAft>
-            </a:pPr>
-            <a:r>
-              <a:rPr sz="2000" b="0" i="0">
-                <a:solidFill>
-                  <a:srgbClr val="333333"/>
-                </a:solidFill>
-                <a:latin typeface="Calibri"/>
-              </a:rPr>
-              <a:t>–   Va a interpretar cualquier hallazgo como confirmación. </a:t>
-            </a:r>
-            <a:r>
-              <a:rPr sz="2000" b="1" i="0">
-                <a:solidFill>
-                  <a:srgbClr val="333333"/>
-                </a:solidFill>
-                <a:latin typeface="Calibri"/>
-              </a:rPr>
-              <a:t>El juicio</a:t>
-            </a:r>
-            <a:r>
-              <a:rPr sz="2000" b="0" i="0">
-                <a:solidFill>
-                  <a:srgbClr val="333333"/>
-                </a:solidFill>
-                <a:latin typeface="Calibri"/>
-              </a:rPr>
-              <a:t> es la tercera y la más común en primer semestre: «no hay tecnología en el negocio», «el proceso es muy anticuado».</a:t>
+              <a:t>–   Recoja las respuestas del muro en los diez minutos de apertura y no las corrija: en el minuto 12, con la primera diapositiva, van a ver ellos mismos que casi todo lo que escribieron era un síntoma o una solución.</a:t>
             </a:r>
           </a:p>
         </p:txBody>
@@ -4316,7 +4154,7 @@
                 </a:solidFill>
                 <a:latin typeface="Calibri"/>
               </a:rPr>
-              <a:t>Las tres cosas que se confunden y cómo se escribe un problema (2/2)</a:t>
+              <a:t>Las tres cosas que se confunden y cómo se escribe un problema (1/3)</a:t>
             </a:r>
           </a:p>
         </p:txBody>
@@ -4355,7 +4193,25 @@
                 </a:solidFill>
                 <a:latin typeface="Calibri"/>
               </a:rPr>
-              <a:t>–   Son opiniones sobre un estado de cosas y no dicen a quién le cuesta qué.</a:t>
+              <a:t>–   </a:t>
+            </a:r>
+            <a:r>
+              <a:rPr sz="2000" b="1" i="0">
+                <a:solidFill>
+                  <a:srgbClr val="333333"/>
+                </a:solidFill>
+                <a:latin typeface="Calibri"/>
+              </a:rPr>
+              <a:t>El síntoma</a:t>
+            </a:r>
+            <a:r>
+              <a:rPr sz="2000" b="0" i="0">
+                <a:solidFill>
+                  <a:srgbClr val="333333"/>
+                </a:solidFill>
+                <a:latin typeface="Calibri"/>
+              </a:rPr>
+              <a:t> es la señal visible: la queja, la demora, la pérdida.</a:t>
             </a:r>
           </a:p>
           <a:p>
@@ -4371,7 +4227,7 @@
                 </a:solidFill>
                 <a:latin typeface="Calibri"/>
               </a:rPr>
-              <a:t>–   Un negocio sin tecnología puede estar funcionando perfectamente; la falta de tecnología no es un problema por sí misma</a:t>
+              <a:t>–   «La gente se queja del servicio» es un síntoma perfecto y un problema inservible, porque no dice de qué se queja ni qué no puede hacer.</a:t>
             </a:r>
           </a:p>
           <a:p>
@@ -4387,25 +4243,7 @@
                 </a:solidFill>
                 <a:latin typeface="Calibri"/>
               </a:rPr>
-              <a:t>–   Y esta es una idea que hay que decir en voz alta en un curso de ingeniería de sistemas, porque va contra el reflejo del gremio. </a:t>
-            </a:r>
-            <a:r>
-              <a:rPr sz="2000" b="1" i="0">
-                <a:solidFill>
-                  <a:srgbClr val="333333"/>
-                </a:solidFill>
-                <a:latin typeface="Calibri"/>
-              </a:rPr>
-              <a:t>La fórmula del enunciado</a:t>
-            </a:r>
-            <a:r>
-              <a:rPr sz="2000" b="0" i="0">
-                <a:solidFill>
-                  <a:srgbClr val="333333"/>
-                </a:solidFill>
-                <a:latin typeface="Calibri"/>
-              </a:rPr>
-              <a:t>, y conviene dictarla para que la copien: *a QUIÉN le pasa QUÉ, con qué CONSECUENCIA*, más una cifra.</a:t>
+              <a:t>–   Los síntomas son útiles —son la pista que lleva al problema— pero atacar un síntoma produce soluciones cosméticas: si el síntoma es que la fila es larga</a:t>
             </a:r>
           </a:p>
           <a:p>
@@ -4421,7 +4259,25 @@
                 </a:solidFill>
                 <a:latin typeface="Calibri"/>
               </a:rPr>
-              <a:t>–   Ejemplo bien escrito: «los usuarios de la biblioteca del barrio no saben si un libro está disponible antes de ir, así que hacen viajes en vano; de cada diez visitas, unas cuatro terminan sin préstamo».</a:t>
+              <a:t>–   Poner sillas mejora la fila y no toca el problema. </a:t>
+            </a:r>
+            <a:r>
+              <a:rPr sz="2000" b="1" i="0">
+                <a:solidFill>
+                  <a:srgbClr val="333333"/>
+                </a:solidFill>
+                <a:latin typeface="Calibri"/>
+              </a:rPr>
+              <a:t>La solución disfrazada</a:t>
+            </a:r>
+            <a:r>
+              <a:rPr sz="2000" b="0" i="0">
+                <a:solidFill>
+                  <a:srgbClr val="333333"/>
+                </a:solidFill>
+                <a:latin typeface="Calibri"/>
+              </a:rPr>
+              <a:t> es la más peligrosa porque se ve profesional.</a:t>
             </a:r>
           </a:p>
           <a:p>
@@ -4437,23 +4293,7 @@
                 </a:solidFill>
                 <a:latin typeface="Calibri"/>
               </a:rPr>
-              <a:t>–   Tiene sujeto (los usuarios), tiene el qué (no saben la disponibilidad), tiene la consecuencia (viajes en vano) y tiene una cifra.</a:t>
-            </a:r>
-          </a:p>
-          <a:p>
-            <a:pPr>
-              <a:spcAft>
-                <a:spcPts val="800"/>
-              </a:spcAft>
-            </a:pPr>
-            <a:r>
-              <a:rPr sz="2000" b="0" i="0">
-                <a:solidFill>
-                  <a:srgbClr val="333333"/>
-                </a:solidFill>
-                <a:latin typeface="Calibri"/>
-              </a:rPr>
-              <a:t>–   Y no menciona ninguna tecnología, que es lo que deja el espacio para diseñar.</a:t>
+              <a:t>–   «Falta un sistema», «hay que digitalizar el proceso», «queremos hacerlo con IA».</a:t>
             </a:r>
           </a:p>
         </p:txBody>
@@ -4634,7 +4474,7 @@
                 </a:solidFill>
                 <a:latin typeface="Calibri"/>
               </a:rPr>
-              <a:t>El árbol del problema: la herramienta que evita las soluciones cosméticas (1/2)</a:t>
+              <a:t>Las tres cosas que se confunden y cómo se escribe un problema (2/3)</a:t>
             </a:r>
           </a:p>
         </p:txBody>
@@ -4673,7 +4513,7 @@
                 </a:solidFill>
                 <a:latin typeface="Calibri"/>
               </a:rPr>
-              <a:t>–   El árbol de problemas es una técnica vieja y muy usada en formulación de proyectos, y para primer semestre tiene una virtud enorme: es un dibujo, así que se puede hacer en quince minutos y se puede discutir señalando con el dedo.</a:t>
+              <a:t>–   Las tres eligen la herramienta antes de saber qué se va a resolver, y cierran el análisis: una vez que el equipo decidió que va a hacer una app con IA</a:t>
             </a:r>
           </a:p>
           <a:p>
@@ -4689,7 +4529,7 @@
                 </a:solidFill>
                 <a:latin typeface="Calibri"/>
               </a:rPr>
-              <a:t>–   Se dibuja con el </a:t>
+              <a:t>–   Va a interpretar cualquier hallazgo como confirmación. </a:t>
             </a:r>
             <a:r>
               <a:rPr sz="2000" b="1" i="0">
@@ -4698,7 +4538,7 @@
                 </a:solidFill>
                 <a:latin typeface="Calibri"/>
               </a:rPr>
-              <a:t>problema en el tronco</a:t>
+              <a:t>El juicio</a:t>
             </a:r>
             <a:r>
               <a:rPr sz="2000" b="0" i="0">
@@ -4707,7 +4547,7 @@
                 </a:solidFill>
                 <a:latin typeface="Calibri"/>
               </a:rPr>
-              <a:t>, una sola frase.</a:t>
+              <a:t> es la tercera y la más común en primer semestre: «no hay tecnología en el negocio», «el proceso es muy anticuado».</a:t>
             </a:r>
           </a:p>
           <a:p>
@@ -4723,25 +4563,7 @@
                 </a:solidFill>
                 <a:latin typeface="Calibri"/>
               </a:rPr>
-              <a:t>–   Hacia arriba, las </a:t>
-            </a:r>
-            <a:r>
-              <a:rPr sz="2000" b="1" i="0">
-                <a:solidFill>
-                  <a:srgbClr val="333333"/>
-                </a:solidFill>
-                <a:latin typeface="Calibri"/>
-              </a:rPr>
-              <a:t>ramas son los efectos</a:t>
-            </a:r>
-            <a:r>
-              <a:rPr sz="2000" b="0" i="0">
-                <a:solidFill>
-                  <a:srgbClr val="333333"/>
-                </a:solidFill>
-                <a:latin typeface="Calibri"/>
-              </a:rPr>
-              <a:t>: lo que se ve, lo que la gente reporta, lo que duele.</a:t>
+              <a:t>–   Son opiniones sobre un estado de cosas y no dicen a quién le cuesta qué.</a:t>
             </a:r>
           </a:p>
           <a:p>
@@ -4757,25 +4579,7 @@
                 </a:solidFill>
                 <a:latin typeface="Calibri"/>
               </a:rPr>
-              <a:t>–   Hacia abajo, las </a:t>
-            </a:r>
-            <a:r>
-              <a:rPr sz="2000" b="1" i="0">
-                <a:solidFill>
-                  <a:srgbClr val="333333"/>
-                </a:solidFill>
-                <a:latin typeface="Calibri"/>
-              </a:rPr>
-              <a:t>raíces son las causas</a:t>
-            </a:r>
-            <a:r>
-              <a:rPr sz="2000" b="0" i="0">
-                <a:solidFill>
-                  <a:srgbClr val="333333"/>
-                </a:solidFill>
-                <a:latin typeface="Calibri"/>
-              </a:rPr>
-              <a:t>, y hay dos niveles: las causas directas (por qué ocurre el problema) y las causas de fondo (por qué ocurre cada causa).</a:t>
+              <a:t>–   Un negocio sin tecnología puede estar funcionando perfectamente; la falta de tecnología no es un problema por sí misma</a:t>
             </a:r>
           </a:p>
           <a:p>
@@ -4791,7 +4595,7 @@
                 </a:solidFill>
                 <a:latin typeface="Calibri"/>
               </a:rPr>
-              <a:t>–   Se dibuja de arriba hacia abajo y </a:t>
+              <a:t>–   Y esta es una idea que hay que decir en voz alta en un curso de ingeniería de sistemas, porque va contra el reflejo del gremio. </a:t>
             </a:r>
             <a:r>
               <a:rPr sz="2000" b="1" i="0">
@@ -4800,7 +4604,7 @@
                 </a:solidFill>
                 <a:latin typeface="Calibri"/>
               </a:rPr>
-              <a:t>se lee de abajo hacia arriba</a:t>
+              <a:t>La fórmula del enunciado</a:t>
             </a:r>
             <a:r>
               <a:rPr sz="2000" b="0" i="0">
@@ -4809,57 +4613,7 @@
                 </a:solidFill>
                 <a:latin typeface="Calibri"/>
               </a:rPr>
-              <a:t>, porque así se ve la cadena completa: esta causa de fondo produce esta causa, que produce el problema, que produce estos efectos.</a:t>
-            </a:r>
-          </a:p>
-          <a:p>
-            <a:pPr>
-              <a:spcAft>
-                <a:spcPts val="800"/>
-              </a:spcAft>
-            </a:pPr>
-            <a:r>
-              <a:rPr sz="2000" b="0" i="0">
-                <a:solidFill>
-                  <a:srgbClr val="333333"/>
-                </a:solidFill>
-                <a:latin typeface="Calibri"/>
-              </a:rPr>
-              <a:t>–   La regla que hay que repetir hasta el cansancio: </a:t>
-            </a:r>
-            <a:r>
-              <a:rPr sz="2000" b="1" i="0">
-                <a:solidFill>
-                  <a:srgbClr val="333333"/>
-                </a:solidFill>
-                <a:latin typeface="Calibri"/>
-              </a:rPr>
-              <a:t>el proyecto ataca una causa, no una rama</a:t>
-            </a:r>
-            <a:r>
-              <a:rPr sz="2000" b="0" i="0">
-                <a:solidFill>
-                  <a:srgbClr val="333333"/>
-                </a:solidFill>
-                <a:latin typeface="Calibri"/>
-              </a:rPr>
-              <a:t>.</a:t>
-            </a:r>
-          </a:p>
-          <a:p>
-            <a:pPr>
-              <a:spcAft>
-                <a:spcPts val="800"/>
-              </a:spcAft>
-            </a:pPr>
-            <a:r>
-              <a:rPr sz="2000" b="0" i="0">
-                <a:solidFill>
-                  <a:srgbClr val="333333"/>
-                </a:solidFill>
-                <a:latin typeface="Calibri"/>
-              </a:rPr>
-              <a:t>–   Si el equipo diseña para los efectos, produce algo que alivia la molestia y deja el problema intacto.</a:t>
+              <a:t>, y conviene dictarla para que la copien: *a QUIÉN le pasa QUÉ, con qué CONSECUENCIA*, más una cifra.</a:t>
             </a:r>
           </a:p>
         </p:txBody>
@@ -5040,7 +4794,7 @@
                 </a:solidFill>
                 <a:latin typeface="Calibri"/>
               </a:rPr>
-              <a:t>El árbol del problema: la herramienta que evita las soluciones cosméticas (2/2)</a:t>
+              <a:t>Las tres cosas que se confunden y cómo se escribe un problema (3/3)</a:t>
             </a:r>
           </a:p>
         </p:txBody>
@@ -5079,7 +4833,7 @@
                 </a:solidFill>
                 <a:latin typeface="Calibri"/>
               </a:rPr>
-              <a:t>–   Y la segunda regla, práctica: dos o tres causas directas, no diez.</a:t>
+              <a:t>–   Ejemplo bien escrito: «los usuarios de la biblioteca del barrio no saben si un libro está disponible antes de ir, así que hacen viajes en vano; de cada diez visitas, unas cuatro terminan sin préstamo».</a:t>
             </a:r>
           </a:p>
           <a:p>
@@ -5095,103 +4849,7 @@
                 </a:solidFill>
                 <a:latin typeface="Calibri"/>
               </a:rPr>
-              <a:t>–   Un árbol con diez raíces no es un análisis, es una lista de todo lo que se les ocurrió, y con eso no se puede decidir.</a:t>
-            </a:r>
-          </a:p>
-          <a:p>
-            <a:pPr>
-              <a:spcAft>
-                <a:spcPts val="800"/>
-              </a:spcAft>
-            </a:pPr>
-            <a:r>
-              <a:rPr sz="2000" b="0" i="0">
-                <a:solidFill>
-                  <a:srgbClr val="333333"/>
-                </a:solidFill>
-                <a:latin typeface="Calibri"/>
-              </a:rPr>
-              <a:t>–   El momento de aprendizaje real ocurre en el segundo nivel de raíces, y conviene provocarlo en las salas: cuando el equipo baja de «no hay un registro actualizado» a «el registro se actualiza a mano al final del día y nadie tiene tiempo»</a:t>
-            </a:r>
-          </a:p>
-          <a:p>
-            <a:pPr>
-              <a:spcAft>
-                <a:spcPts val="800"/>
-              </a:spcAft>
-            </a:pPr>
-            <a:r>
-              <a:rPr sz="2000" b="0" i="0">
-                <a:solidFill>
-                  <a:srgbClr val="333333"/>
-                </a:solidFill>
-                <a:latin typeface="Calibri"/>
-              </a:rPr>
-              <a:t>–   Ahí aparece por primera vez algo que un estudiante de primer semestre puede efectivamente cambiar en un semestre.</a:t>
-            </a:r>
-          </a:p>
-          <a:p>
-            <a:pPr>
-              <a:spcAft>
-                <a:spcPts val="800"/>
-              </a:spcAft>
-            </a:pPr>
-            <a:r>
-              <a:rPr sz="2000" b="0" i="0">
-                <a:solidFill>
-                  <a:srgbClr val="333333"/>
-                </a:solidFill>
-                <a:latin typeface="Calibri"/>
-              </a:rPr>
-              <a:t>–   Antes de ese nivel, todo se ve demasiado grande.</a:t>
-            </a:r>
-          </a:p>
-          <a:p>
-            <a:pPr>
-              <a:spcAft>
-                <a:spcPts val="800"/>
-              </a:spcAft>
-            </a:pPr>
-            <a:r>
-              <a:rPr sz="2000" b="0" i="0">
-                <a:solidFill>
-                  <a:srgbClr val="333333"/>
-                </a:solidFill>
-                <a:latin typeface="Calibri"/>
-              </a:rPr>
-              <a:t>–   Un detalle metodológico que ahorra discusiones: si una causa no se puede afectar con nada que el equipo pueda hacer —el presupuesto del municipio, la cultura ciudadana, la ley—, se dibuja igual, pero se marca.</a:t>
-            </a:r>
-          </a:p>
-          <a:p>
-            <a:pPr>
-              <a:spcAft>
-                <a:spcPts val="800"/>
-              </a:spcAft>
-            </a:pPr>
-            <a:r>
-              <a:rPr sz="2000" b="0" i="0">
-                <a:solidFill>
-                  <a:srgbClr val="333333"/>
-                </a:solidFill>
-                <a:latin typeface="Calibri"/>
-              </a:rPr>
-              <a:t>–   Se llama restricción y no es una derrota: es información.</a:t>
-            </a:r>
-          </a:p>
-          <a:p>
-            <a:pPr>
-              <a:spcAft>
-                <a:spcPts val="800"/>
-              </a:spcAft>
-            </a:pPr>
-            <a:r>
-              <a:rPr sz="2000" b="0" i="0">
-                <a:solidFill>
-                  <a:srgbClr val="333333"/>
-                </a:solidFill>
-                <a:latin typeface="Calibri"/>
-              </a:rPr>
-              <a:t>–   Un proyecto que sabe qué no puede cambiar es más serio que uno que promete cambiarlo todo.</a:t>
+              <a:t>–   Y no menciona ninguna tecnología, que es lo que deja el espacio para diseñar.</a:t>
             </a:r>
           </a:p>
         </p:txBody>
@@ -5372,7 +5030,7 @@
                 </a:solidFill>
                 <a:latin typeface="Calibri"/>
               </a:rPr>
-              <a:t>La línea base y los cuatro criterios de viabilidad (1/3)</a:t>
+              <a:t>El árbol del problema: la herramienta que evita las soluciones cosméticas (1/3)</a:t>
             </a:r>
           </a:p>
         </p:txBody>
@@ -5411,25 +5069,7 @@
                 </a:solidFill>
                 <a:latin typeface="Calibri"/>
               </a:rPr>
-              <a:t>–   </a:t>
-            </a:r>
-            <a:r>
-              <a:rPr sz="2000" b="1" i="0">
-                <a:solidFill>
-                  <a:srgbClr val="333333"/>
-                </a:solidFill>
-                <a:latin typeface="Calibri"/>
-              </a:rPr>
-              <a:t>La línea base</a:t>
-            </a:r>
-            <a:r>
-              <a:rPr sz="2000" b="0" i="0">
-                <a:solidFill>
-                  <a:srgbClr val="333333"/>
-                </a:solidFill>
-                <a:latin typeface="Calibri"/>
-              </a:rPr>
-              <a:t> es la exigencia que más resistencia genera y la que más valor tiene.</a:t>
+              <a:t>–   El árbol de problemas es una técnica vieja y muy usada en formulación de proyectos, y para primer semestre tiene una virtud enorme: es un dibujo, así que se puede hacer en quince minutos y se puede discutir señalando con el dedo.</a:t>
             </a:r>
           </a:p>
           <a:p>
@@ -5445,7 +5085,7 @@
                 </a:solidFill>
                 <a:latin typeface="Calibri"/>
               </a:rPr>
-              <a:t>–   Es una cifra sobre el problema </a:t>
+              <a:t>–   Hacia arriba, las </a:t>
             </a:r>
             <a:r>
               <a:rPr sz="2000" b="1" i="0">
@@ -5454,7 +5094,7 @@
                 </a:solidFill>
                 <a:latin typeface="Calibri"/>
               </a:rPr>
-              <a:t>como está hoy</a:t>
+              <a:t>ramas son los efectos</a:t>
             </a:r>
             <a:r>
               <a:rPr sz="2000" b="0" i="0">
@@ -5463,7 +5103,7 @@
                 </a:solidFill>
                 <a:latin typeface="Calibri"/>
               </a:rPr>
-              <a:t>, antes de que el equipo toque nada, y su función es simple: sin ella no hay forma de saber si el proyecto sirvió.</a:t>
+              <a:t>: lo que se ve, lo que la gente reporta, lo que duele.</a:t>
             </a:r>
           </a:p>
           <a:p>
@@ -5479,7 +5119,25 @@
                 </a:solidFill>
                 <a:latin typeface="Calibri"/>
               </a:rPr>
-              <a:t>–   En la Clase 16 el informe final va a pedir comparar, y un equipo sin línea base solo puede escribir «mejoramos el proceso», que es una afirmación vacía.</a:t>
+              <a:t>–   Hacia abajo, las </a:t>
+            </a:r>
+            <a:r>
+              <a:rPr sz="2000" b="1" i="0">
+                <a:solidFill>
+                  <a:srgbClr val="333333"/>
+                </a:solidFill>
+                <a:latin typeface="Calibri"/>
+              </a:rPr>
+              <a:t>raíces son las causas</a:t>
+            </a:r>
+            <a:r>
+              <a:rPr sz="2000" b="0" i="0">
+                <a:solidFill>
+                  <a:srgbClr val="333333"/>
+                </a:solidFill>
+                <a:latin typeface="Calibri"/>
+              </a:rPr>
+              <a:t>, y hay dos niveles: las causas directas (por qué ocurre el problema) y las causas de fondo (por qué ocurre cada causa).</a:t>
             </a:r>
           </a:p>
           <a:p>
@@ -5495,15 +5153,17 @@
                 </a:solidFill>
                 <a:latin typeface="Calibri"/>
               </a:rPr>
-              <a:t>–   Hay que quitarles de encima la idea de que medir requiere presupuesto o estadística.</a:t>
-            </a:r>
-          </a:p>
-          <a:p>
-            <a:pPr>
-              <a:spcAft>
-                <a:spcPts val="800"/>
-              </a:spcAft>
-            </a:pPr>
+              <a:t>–   Se dibuja de arriba hacia abajo y </a:t>
+            </a:r>
+            <a:r>
+              <a:rPr sz="2000" b="1" i="0">
+                <a:solidFill>
+                  <a:srgbClr val="333333"/>
+                </a:solidFill>
+                <a:latin typeface="Calibri"/>
+              </a:rPr>
+              <a:t>se lee de abajo hacia arriba</a:t>
+            </a:r>
             <a:r>
               <a:rPr sz="2000" b="0" i="0">
                 <a:solidFill>
@@ -5511,77 +5171,7 @@
                 </a:solidFill>
                 <a:latin typeface="Calibri"/>
               </a:rPr>
-              <a:t>–   La línea base de un proyecto de este curso se consigue de tres maneras: </a:t>
-            </a:r>
-            <a:r>
-              <a:rPr sz="2000" b="1" i="0">
-                <a:solidFill>
-                  <a:srgbClr val="333333"/>
-                </a:solidFill>
-                <a:latin typeface="Calibri"/>
-              </a:rPr>
-              <a:t>preguntando</a:t>
-            </a:r>
-            <a:r>
-              <a:rPr sz="2000" b="0" i="0">
-                <a:solidFill>
-                  <a:srgbClr val="333333"/>
-                </a:solidFill>
-                <a:latin typeface="Calibri"/>
-              </a:rPr>
-              <a:t> a la persona que hace el trabajo, </a:t>
-            </a:r>
-            <a:r>
-              <a:rPr sz="2000" b="1" i="0">
-                <a:solidFill>
-                  <a:srgbClr val="333333"/>
-                </a:solidFill>
-                <a:latin typeface="Calibri"/>
-              </a:rPr>
-              <a:t>contando</a:t>
-            </a:r>
-            <a:r>
-              <a:rPr sz="2000" b="0" i="0">
-                <a:solidFill>
-                  <a:srgbClr val="333333"/>
-                </a:solidFill>
-                <a:latin typeface="Calibri"/>
-              </a:rPr>
-              <a:t> durante una semana, o </a:t>
-            </a:r>
-            <a:r>
-              <a:rPr sz="2000" b="1" i="0">
-                <a:solidFill>
-                  <a:srgbClr val="333333"/>
-                </a:solidFill>
-                <a:latin typeface="Calibri"/>
-              </a:rPr>
-              <a:t>midiendo con un cronómetro</a:t>
-            </a:r>
-            <a:r>
-              <a:rPr sz="2000" b="0" i="0">
-                <a:solidFill>
-                  <a:srgbClr val="333333"/>
-                </a:solidFill>
-                <a:latin typeface="Calibri"/>
-              </a:rPr>
-              <a:t> un caso.</a:t>
-            </a:r>
-          </a:p>
-          <a:p>
-            <a:pPr>
-              <a:spcAft>
-                <a:spcPts val="800"/>
-              </a:spcAft>
-            </a:pPr>
-            <a:r>
-              <a:rPr sz="2000" b="0" i="0">
-                <a:solidFill>
-                  <a:srgbClr val="333333"/>
-                </a:solidFill>
-                <a:latin typeface="Calibri"/>
-              </a:rPr>
-              <a:t>–   «La secretaria dedica unas dos horas diarias a confirmar citas por teléfono, según lo que ella misma estima» es una línea base perfectamente aceptable, siempre que se diga que es una estimación y de quién viene.</a:t>
+              <a:t>, porque así se ve la cadena completa: esta causa de fondo produce esta causa, que produce el problema, que produce estos efectos.</a:t>
             </a:r>
           </a:p>
         </p:txBody>
@@ -5762,7 +5352,7 @@
                 </a:solidFill>
                 <a:latin typeface="Calibri"/>
               </a:rPr>
-              <a:t>La línea base y los cuatro criterios de viabilidad (2/3)</a:t>
+              <a:t>El árbol del problema: la herramienta que evita las soluciones cosméticas (2/3)</a:t>
             </a:r>
           </a:p>
         </p:txBody>
@@ -5801,7 +5391,7 @@
                 </a:solidFill>
                 <a:latin typeface="Calibri"/>
               </a:rPr>
-              <a:t>–   La regla de honestidad es la de la sesión 5, aplicada de nuevo: </a:t>
+              <a:t>–   La regla que hay que repetir hasta el cansancio: </a:t>
             </a:r>
             <a:r>
               <a:rPr sz="2000" b="1" i="0">
@@ -5810,7 +5400,7 @@
                 </a:solidFill>
                 <a:latin typeface="Calibri"/>
               </a:rPr>
-              <a:t>cifra con método y fecha, o no va</a:t>
+              <a:t>el proyecto ataca una causa, no una rama</a:t>
             </a:r>
             <a:r>
               <a:rPr sz="2000" b="0" i="0">
@@ -5835,25 +5425,7 @@
                 </a:solidFill>
                 <a:latin typeface="Calibri"/>
               </a:rPr>
-              <a:t>–   Y hay un diagnóstico gratis escondido en esta exigencia: </a:t>
-            </a:r>
-            <a:r>
-              <a:rPr sz="2000" b="1" i="0">
-                <a:solidFill>
-                  <a:srgbClr val="333333"/>
-                </a:solidFill>
-                <a:latin typeface="Calibri"/>
-              </a:rPr>
-              <a:t>si el problema no admite ninguna cifra, está mal delimitado</a:t>
-            </a:r>
-            <a:r>
-              <a:rPr sz="2000" b="0" i="0">
-                <a:solidFill>
-                  <a:srgbClr val="333333"/>
-                </a:solidFill>
-                <a:latin typeface="Calibri"/>
-              </a:rPr>
-              <a:t>, y casi siempre es porque es demasiado grande.</a:t>
+              <a:t>–   Y la segunda regla, práctica: dos o tres causas directas, no diez.</a:t>
             </a:r>
           </a:p>
           <a:p>
@@ -5869,7 +5441,7 @@
                 </a:solidFill>
                 <a:latin typeface="Calibri"/>
               </a:rPr>
-              <a:t>–   «La deserción estudiantil» no se puede medir con lo que tiene un equipo de primer semestre</a:t>
+              <a:t>–   Un árbol con diez raíces no es un análisis, es una lista de todo lo que se les ocurrió, y con eso no se puede decidir.</a:t>
             </a:r>
           </a:p>
           <a:p>
@@ -5885,7 +5457,7 @@
                 </a:solidFill>
                 <a:latin typeface="Calibri"/>
               </a:rPr>
-              <a:t>–   «cuántos de los 30 compañeros de mi grupo no saben en qué semestre pierden el beneficio de la beca» sí.</a:t>
+              <a:t>–   El momento de aprendizaje real ocurre en el segundo nivel de raíces, y conviene provocarlo en las salas: cuando el equipo baja de «no hay un registro actualizado» a «el registro se actualiza a mano al final del día y nadie tiene tiempo»</a:t>
             </a:r>
           </a:p>
           <a:p>
@@ -5901,57 +5473,7 @@
                 </a:solidFill>
                 <a:latin typeface="Calibri"/>
               </a:rPr>
-              <a:t>–   Bajar el problema hasta que se pueda contar algo es la manera más rápida de volverlo abordable. </a:t>
-            </a:r>
-            <a:r>
-              <a:rPr sz="2000" b="1" i="0">
-                <a:solidFill>
-                  <a:srgbClr val="333333"/>
-                </a:solidFill>
-                <a:latin typeface="Calibri"/>
-              </a:rPr>
-              <a:t>Los cuatro criterios</a:t>
-            </a:r>
-            <a:r>
-              <a:rPr sz="2000" b="0" i="0">
-                <a:solidFill>
-                  <a:srgbClr val="333333"/>
-                </a:solidFill>
-                <a:latin typeface="Calibri"/>
-              </a:rPr>
-              <a:t> son un filtro y hay que aplicarlos en voz alta a cada problema propuesto</a:t>
-            </a:r>
-          </a:p>
-          <a:p>
-            <a:pPr>
-              <a:spcAft>
-                <a:spcPts val="800"/>
-              </a:spcAft>
-            </a:pPr>
-            <a:r>
-              <a:rPr sz="2000" b="0" i="0">
-                <a:solidFill>
-                  <a:srgbClr val="333333"/>
-                </a:solidFill>
-                <a:latin typeface="Calibri"/>
-              </a:rPr>
-              <a:t>–   Uno por uno. *Abordable* con navegador y herramientas gratuitas: nada que exija comprar equipos</a:t>
-            </a:r>
-          </a:p>
-          <a:p>
-            <a:pPr>
-              <a:spcAft>
-                <a:spcPts val="800"/>
-              </a:spcAft>
-            </a:pPr>
-            <a:r>
-              <a:rPr sz="2000" b="0" i="0">
-                <a:solidFill>
-                  <a:srgbClr val="333333"/>
-                </a:solidFill>
-                <a:latin typeface="Calibri"/>
-              </a:rPr>
-              <a:t>–   Contratar servicios de pago o conseguir permisos institucionales que no van a llegar en un semestre. *Medible*: existe la cifra. *Con acceso a los actores*: pueden hablar esta semana con alguien que vive el problema</a:t>
+              <a:t>–   Ahí aparece por primera vez algo que un estudiante de primer semestre puede efectivamente cambiar en un semestre.</a:t>
             </a:r>
           </a:p>
         </p:txBody>
@@ -6132,7 +5654,7 @@
                 </a:solidFill>
                 <a:latin typeface="Calibri"/>
               </a:rPr>
-              <a:t>La línea base y los cuatro criterios de viabilidad (3/3)</a:t>
+              <a:t>El árbol del problema: la herramienta que evita las soluciones cosméticas (3/3)</a:t>
             </a:r>
           </a:p>
         </p:txBody>
@@ -6171,7 +5693,7 @@
                 </a:solidFill>
                 <a:latin typeface="Calibri"/>
               </a:rPr>
-              <a:t>–   Sin trámites; este criterio es el que descarta más propuestas y hay que ser firme</a:t>
+              <a:t>–   Un detalle metodológico que ahorra discusiones: si una causa no se puede afectar con nada que el equipo pueda hacer —el presupuesto del municipio, la cultura ciudadana, la ley—, se dibuja igual, pero se marca.</a:t>
             </a:r>
           </a:p>
           <a:p>
@@ -6187,7 +5709,7 @@
                 </a:solidFill>
                 <a:latin typeface="Calibri"/>
               </a:rPr>
-              <a:t>–   Porque un proyecto sobre una entidad a la que nadie puede preguntarle nada termina siendo un ejercicio de imaginación con aspecto de proyecto. *Con dueño del problema*: hay una persona o un grupo concreto al que le duele y que reconocería la mejora</a:t>
+              <a:t>–   Se llama restricción y no es una derrota: es información.</a:t>
             </a:r>
           </a:p>
           <a:p>
@@ -6203,39 +5725,7 @@
                 </a:solidFill>
                 <a:latin typeface="Calibri"/>
               </a:rPr>
-              <a:t>–   Si el afectado es «la sociedad», no hay a quién mostrarle el resultado en la Clase 15.</a:t>
-            </a:r>
-          </a:p>
-          <a:p>
-            <a:pPr>
-              <a:spcAft>
-                <a:spcPts val="800"/>
-              </a:spcAft>
-            </a:pPr>
-            <a:r>
-              <a:rPr sz="2000" b="0" i="0">
-                <a:solidFill>
-                  <a:srgbClr val="333333"/>
-                </a:solidFill>
-                <a:latin typeface="Calibri"/>
-              </a:rPr>
-              <a:t>–   Una advertencia sobre el ánimo del grupo: aplicar estos criterios va a matar algunas ideas ambiciosas y eso frustra.</a:t>
-            </a:r>
-          </a:p>
-          <a:p>
-            <a:pPr>
-              <a:spcAft>
-                <a:spcPts val="800"/>
-              </a:spcAft>
-            </a:pPr>
-            <a:r>
-              <a:rPr sz="2000" b="0" i="0">
-                <a:solidFill>
-                  <a:srgbClr val="333333"/>
-                </a:solidFill>
-                <a:latin typeface="Calibri"/>
-              </a:rPr>
-              <a:t>–   Un proyecto pequeño y verificable saca mejor nota que uno grandioso e imposible, y hay que decirlo hoy, antes de que se enamoren de la idea.</a:t>
+              <a:t>–   Un proyecto que sabe qué no puede cambiar es más serio que uno que promete cambiarlo todo.</a:t>
             </a:r>
           </a:p>
         </p:txBody>
@@ -6416,7 +5906,7 @@
                 </a:solidFill>
                 <a:latin typeface="Calibri"/>
               </a:rPr>
-              <a:t>Cómo cerrar el corte: la ficha y la evaluación en la plataforma del curso (1/2)</a:t>
+              <a:t>La línea base y los cuatro criterios de viabilidad (1/4)</a:t>
             </a:r>
           </a:p>
         </p:txBody>
@@ -6455,7 +5945,7 @@
                 </a:solidFill>
                 <a:latin typeface="Calibri"/>
               </a:rPr>
-              <a:t>–   El reparto del tiempo de hoy es distinto al de las otras sesiones y hay que respetarlo: </a:t>
+              <a:t>–   </a:t>
             </a:r>
             <a:r>
               <a:rPr sz="2000" b="1" i="0">
@@ -6464,7 +5954,7 @@
                 </a:solidFill>
                 <a:latin typeface="Calibri"/>
               </a:rPr>
-              <a:t>teoría 25 minutos</a:t>
+              <a:t>La línea base</a:t>
             </a:r>
             <a:r>
               <a:rPr sz="2000" b="0" i="0">
@@ -6473,7 +5963,7 @@
                 </a:solidFill>
                 <a:latin typeface="Calibri"/>
               </a:rPr>
-              <a:t>, no 45.</a:t>
+              <a:t> es la exigencia que más resistencia genera y la que más valor tiene.</a:t>
             </a:r>
           </a:p>
           <a:p>
@@ -6489,7 +5979,25 @@
                 </a:solidFill>
                 <a:latin typeface="Calibri"/>
               </a:rPr>
-              <a:t>–   El corte se cierra con dos entregas y las dos ocurren en clase, así que quedarse largo en la explicación significa aplicar la evaluación con la gente apurada</a:t>
+              <a:t>–   Es una cifra sobre el problema </a:t>
+            </a:r>
+            <a:r>
+              <a:rPr sz="2000" b="1" i="0">
+                <a:solidFill>
+                  <a:srgbClr val="333333"/>
+                </a:solidFill>
+                <a:latin typeface="Calibri"/>
+              </a:rPr>
+              <a:t>como está hoy</a:t>
+            </a:r>
+            <a:r>
+              <a:rPr sz="2000" b="0" i="0">
+                <a:solidFill>
+                  <a:srgbClr val="333333"/>
+                </a:solidFill>
+                <a:latin typeface="Calibri"/>
+              </a:rPr>
+              <a:t>, antes de que el equipo toque nada, y su función es simple: sin ella no hay forma de saber si el proyecto sirvió.</a:t>
             </a:r>
           </a:p>
           <a:p>
@@ -6505,25 +6013,7 @@
                 </a:solidFill>
                 <a:latin typeface="Calibri"/>
               </a:rPr>
-              <a:t>–   Que es la peor manera de evaluar. </a:t>
-            </a:r>
-            <a:r>
-              <a:rPr sz="2000" b="1" i="0">
-                <a:solidFill>
-                  <a:srgbClr val="333333"/>
-                </a:solidFill>
-                <a:latin typeface="Calibri"/>
-              </a:rPr>
-              <a:t>La ficha del problema</a:t>
-            </a:r>
-            <a:r>
-              <a:rPr sz="2000" b="0" i="0">
-                <a:solidFill>
-                  <a:srgbClr val="333333"/>
-                </a:solidFill>
-                <a:latin typeface="Calibri"/>
-              </a:rPr>
-              <a:t> es el producto del corte 1 y conviene decirle al grupo exactamente qué peso tiene en el semestre: a partir de la sesión 7 todo se hace sobre ella.</a:t>
+              <a:t>–   En la Clase 16 el informe final va a pedir comparar, y un equipo sin línea base solo puede escribir «mejoramos el proceso», que es una afirmación vacía.</a:t>
             </a:r>
           </a:p>
           <a:p>
@@ -6539,7 +6029,7 @@
                 </a:solidFill>
                 <a:latin typeface="Calibri"/>
               </a:rPr>
-              <a:t>–   El ciclo de vida de la sesión 7 se aplica a ese problema; el prototipo de las sesiones 10 y 11 resuelve ese problema; la evaluación de impacto de la Clase 13 evalúa esa solución; el informe final de la Clase 16 compara contra esa línea base.</a:t>
+              <a:t>–   Hay que quitarles de encima la idea de que medir requiere presupuesto o estadística.</a:t>
             </a:r>
           </a:p>
           <a:p>
@@ -6555,7 +6045,7 @@
                 </a:solidFill>
                 <a:latin typeface="Calibri"/>
               </a:rPr>
-              <a:t>–   Un equipo que hoy escriba una ficha vaga va a arrastrar el problema diez sesiones. </a:t>
+              <a:t>–   La línea base de un proyecto de este curso se consigue de tres maneras: </a:t>
             </a:r>
             <a:r>
               <a:rPr sz="2000" b="1" i="0">
@@ -6564,7 +6054,7 @@
                 </a:solidFill>
                 <a:latin typeface="Calibri"/>
               </a:rPr>
-              <a:t>La evaluación de corte</a:t>
+              <a:t>preguntando</a:t>
             </a:r>
             <a:r>
               <a:rPr sz="2000" b="0" i="0">
@@ -6573,7 +6063,43 @@
                 </a:solidFill>
                 <a:latin typeface="Calibri"/>
               </a:rPr>
-              <a:t> son los últimos veinte minutos, en la plataforma del curso, individual, y cubre las sesiones 1 a 6.</a:t>
+              <a:t> a la persona que hace el trabajo, </a:t>
+            </a:r>
+            <a:r>
+              <a:rPr sz="2000" b="1" i="0">
+                <a:solidFill>
+                  <a:srgbClr val="333333"/>
+                </a:solidFill>
+                <a:latin typeface="Calibri"/>
+              </a:rPr>
+              <a:t>contando</a:t>
+            </a:r>
+            <a:r>
+              <a:rPr sz="2000" b="0" i="0">
+                <a:solidFill>
+                  <a:srgbClr val="333333"/>
+                </a:solidFill>
+                <a:latin typeface="Calibri"/>
+              </a:rPr>
+              <a:t> durante una semana, o </a:t>
+            </a:r>
+            <a:r>
+              <a:rPr sz="2000" b="1" i="0">
+                <a:solidFill>
+                  <a:srgbClr val="333333"/>
+                </a:solidFill>
+                <a:latin typeface="Calibri"/>
+              </a:rPr>
+              <a:t>midiendo con un cronómetro</a:t>
+            </a:r>
+            <a:r>
+              <a:rPr sz="2000" b="0" i="0">
+                <a:solidFill>
+                  <a:srgbClr val="333333"/>
+                </a:solidFill>
+                <a:latin typeface="Calibri"/>
+              </a:rPr>
+              <a:t> un caso.</a:t>
             </a:r>
           </a:p>
         </p:txBody>
@@ -6754,7 +6280,7 @@
                 </a:solidFill>
                 <a:latin typeface="Calibri"/>
               </a:rPr>
-              <a:t>Cómo cerrar el corte: la ficha y la evaluación en la plataforma del curso (2/2)</a:t>
+              <a:t>La línea base y los cuatro criterios de viabilidad (2/4)</a:t>
             </a:r>
           </a:p>
         </p:txBody>
@@ -6793,25 +6319,7 @@
                 </a:solidFill>
                 <a:latin typeface="Calibri"/>
               </a:rPr>
-              <a:t>–   Tres cosas operativas: el enlace va en el chat de la reunión, hay que decir explícitamente que </a:t>
-            </a:r>
-            <a:r>
-              <a:rPr sz="2000" b="1" i="0">
-                <a:solidFill>
-                  <a:srgbClr val="333333"/>
-                </a:solidFill>
-                <a:latin typeface="Calibri"/>
-              </a:rPr>
-              <a:t>la plataforma del curso no es una plataforma oficial de la universidad</a:t>
-            </a:r>
-            <a:r>
-              <a:rPr sz="2000" b="0" i="0">
-                <a:solidFill>
-                  <a:srgbClr val="333333"/>
-                </a:solidFill>
-                <a:latin typeface="Calibri"/>
-              </a:rPr>
-              <a:t> sino la herramienta que usa este curso</a:t>
+              <a:t>–   «La secretaria dedica unas dos horas diarias a confirmar citas por teléfono, según lo que ella misma estima» es una línea base perfectamente aceptable, siempre que se diga que es una estimación y de quién viene.</a:t>
             </a:r>
           </a:p>
           <a:p>
@@ -6827,7 +6335,7 @@
                 </a:solidFill>
                 <a:latin typeface="Calibri"/>
               </a:rPr>
-              <a:t>–   Y hay que pedir que cualquier problema para abrirlo se avise </a:t>
+              <a:t>–   La regla de honestidad es la de la sesión 5, aplicada de nuevo: </a:t>
             </a:r>
             <a:r>
               <a:rPr sz="2000" b="1" i="0">
@@ -6836,7 +6344,7 @@
                 </a:solidFill>
                 <a:latin typeface="Calibri"/>
               </a:rPr>
-              <a:t>en el chat, en el momento</a:t>
+              <a:t>cifra con método y fecha, o no va</a:t>
             </a:r>
             <a:r>
               <a:rPr sz="2000" b="0" i="0">
@@ -6845,7 +6353,7 @@
                 </a:solidFill>
                 <a:latin typeface="Calibri"/>
               </a:rPr>
-              <a:t>, no al día siguiente por correo.</a:t>
+              <a:t>.</a:t>
             </a:r>
           </a:p>
           <a:p>
@@ -6861,7 +6369,25 @@
                 </a:solidFill>
                 <a:latin typeface="Calibri"/>
               </a:rPr>
-              <a:t>–   En un curso virtual el problema técnico no reportado se vuelve un reclamo de nota dos semanas después.</a:t>
+              <a:t>–   Y hay un diagnóstico gratis escondido en esta exigencia: </a:t>
+            </a:r>
+            <a:r>
+              <a:rPr sz="2000" b="1" i="0">
+                <a:solidFill>
+                  <a:srgbClr val="333333"/>
+                </a:solidFill>
+                <a:latin typeface="Calibri"/>
+              </a:rPr>
+              <a:t>si el problema no admite ninguna cifra, está mal delimitado</a:t>
+            </a:r>
+            <a:r>
+              <a:rPr sz="2000" b="0" i="0">
+                <a:solidFill>
+                  <a:srgbClr val="333333"/>
+                </a:solidFill>
+                <a:latin typeface="Calibri"/>
+              </a:rPr>
+              <a:t>, y casi siempre es porque es demasiado grande.</a:t>
             </a:r>
           </a:p>
           <a:p>
@@ -6877,7 +6403,7 @@
                 </a:solidFill>
                 <a:latin typeface="Calibri"/>
               </a:rPr>
-              <a:t>–   Una última recomendación de manejo del grupo: no anuncie la evaluación al final de las exposiciones, anúnciela en el minuto uno, cuando presente la agenda.</a:t>
+              <a:t>–   «La deserción estudiantil» no se puede medir con lo que tiene un equipo de primer semestre</a:t>
             </a:r>
           </a:p>
           <a:p>
@@ -6893,7 +6419,7 @@
                 </a:solidFill>
                 <a:latin typeface="Calibri"/>
               </a:rPr>
-              <a:t>–   La gente organiza su atención distinto cuando sabe que hay una evaluación al cierre, y además evita que alguien se desconecte después de exponer.</a:t>
+              <a:t>–   «cuántos de los 30 compañeros de mi grupo no saben en qué semestre pierden el beneficio de la beca» sí.</a:t>
             </a:r>
           </a:p>
         </p:txBody>
@@ -7996,7 +7522,7 @@
         <p:spPr>
           <a:xfrm>
             <a:off x="0" y="0"/>
-            <a:ext cx="12191695" cy="1170432"/>
+            <a:ext cx="12191695" cy="960120"/>
           </a:xfrm>
           <a:prstGeom prst="rect">
             <a:avLst/>
@@ -8038,7 +7564,7 @@
         </p:nvSpPr>
         <p:spPr>
           <a:xfrm>
-            <a:off x="0" y="1170432"/>
+            <a:off x="0" y="960120"/>
             <a:ext cx="12191695" cy="41148"/>
           </a:xfrm>
           <a:prstGeom prst="rect">
@@ -8082,7 +7608,7 @@
         <p:spPr>
           <a:xfrm>
             <a:off x="457200" y="164592"/>
-            <a:ext cx="11277295" cy="384048"/>
+            <a:ext cx="11277295" cy="502920"/>
           </a:xfrm>
           <a:prstGeom prst="rect">
             <a:avLst/>
@@ -8102,7 +7628,7 @@
                 </a:solidFill>
                 <a:latin typeface="Calibri"/>
               </a:rPr>
-              <a:t>Taller de hoy: Ficha del problema del proyecto</a:t>
+              <a:t>La línea base y los cuatro criterios de viabilidad (3/4)</a:t>
             </a:r>
           </a:p>
         </p:txBody>
@@ -8115,8 +7641,8 @@
         </p:nvSpPr>
         <p:spPr>
           <a:xfrm>
-            <a:off x="457200" y="566928"/>
-            <a:ext cx="11277295" cy="411480"/>
+            <a:off x="457200" y="1170432"/>
+            <a:ext cx="11277295" cy="5230368"/>
           </a:xfrm>
           <a:prstGeom prst="rect">
             <a:avLst/>
@@ -8129,999 +7655,108 @@
           </a:bodyPr>
           <a:lstStyle/>
           <a:p>
-            <a:r>
-              <a:rPr sz="1400" b="0" i="0">
-                <a:solidFill>
-                  <a:srgbClr val="B8D8EE"/>
-                </a:solidFill>
-                <a:latin typeface="Calibri"/>
-              </a:rPr>
-              <a:t>17 min en equipos · cada equipo, su propio problema · ficha del problema + árbol de causas</a:t>
-            </a:r>
-          </a:p>
-        </p:txBody>
-      </p:sp>
-      <p:sp>
-        <p:nvSpPr>
-          <p:cNvPr id="6" name="Rounded Rectangle 5"/>
-          <p:cNvSpPr/>
-          <p:nvPr/>
-        </p:nvSpPr>
-        <p:spPr>
-          <a:xfrm>
-            <a:off x="457200" y="1472184"/>
-            <a:ext cx="11277295" cy="566928"/>
-          </a:xfrm>
-          <a:prstGeom prst="roundRect">
-            <a:avLst>
-              <a:gd name="adj" fmla="val 12000"/>
-            </a:avLst>
-          </a:prstGeom>
-          <a:solidFill>
-            <a:srgbClr val="F2F2F2"/>
-          </a:solidFill>
-          <a:ln>
-            <a:noFill/>
-          </a:ln>
-        </p:spPr>
-        <p:style>
-          <a:lnRef idx="1">
-            <a:schemeClr val="accent1"/>
-          </a:lnRef>
-          <a:fillRef idx="3">
-            <a:schemeClr val="accent1"/>
-          </a:fillRef>
-          <a:effectRef idx="2">
-            <a:schemeClr val="accent1"/>
-          </a:effectRef>
-          <a:fontRef idx="minor">
-            <a:schemeClr val="lt1"/>
-          </a:fontRef>
-        </p:style>
-        <p:txBody>
-          <a:bodyPr rtlCol="0" anchor="ctr"/>
-          <a:lstStyle/>
-          <a:p>
-            <a:pPr algn="ctr"/>
-          </a:p>
-        </p:txBody>
-      </p:sp>
-      <p:sp>
-        <p:nvSpPr>
-          <p:cNvPr id="7" name="Rectangle 6"/>
-          <p:cNvSpPr/>
-          <p:nvPr/>
-        </p:nvSpPr>
-        <p:spPr>
-          <a:xfrm>
-            <a:off x="640080" y="1618487"/>
-            <a:ext cx="274320" cy="274320"/>
-          </a:xfrm>
-          <a:prstGeom prst="rect">
-            <a:avLst/>
-          </a:prstGeom>
-          <a:solidFill>
-            <a:srgbClr val="FFFFFF"/>
-          </a:solidFill>
-          <a:ln>
-            <a:solidFill>
-              <a:srgbClr val="333333"/>
-            </a:solidFill>
-          </a:ln>
-        </p:spPr>
-        <p:style>
-          <a:lnRef idx="1">
-            <a:schemeClr val="accent1"/>
-          </a:lnRef>
-          <a:fillRef idx="3">
-            <a:schemeClr val="accent1"/>
-          </a:fillRef>
-          <a:effectRef idx="2">
-            <a:schemeClr val="accent1"/>
-          </a:effectRef>
-          <a:fontRef idx="minor">
-            <a:schemeClr val="lt1"/>
-          </a:fontRef>
-        </p:style>
-        <p:txBody>
-          <a:bodyPr rtlCol="0" anchor="ctr"/>
-          <a:lstStyle/>
-          <a:p>
-            <a:pPr algn="ctr"/>
-          </a:p>
-        </p:txBody>
-      </p:sp>
-      <p:sp>
-        <p:nvSpPr>
-          <p:cNvPr id="8" name="Rectangle 7"/>
-          <p:cNvSpPr/>
-          <p:nvPr/>
-        </p:nvSpPr>
-        <p:spPr>
-          <a:xfrm>
-            <a:off x="640080" y="1618487"/>
-            <a:ext cx="73152" cy="274320"/>
-          </a:xfrm>
-          <a:prstGeom prst="rect">
-            <a:avLst/>
-          </a:prstGeom>
-          <a:solidFill>
-            <a:srgbClr val="269CCB"/>
-          </a:solidFill>
-          <a:ln>
-            <a:noFill/>
-          </a:ln>
-        </p:spPr>
-        <p:style>
-          <a:lnRef idx="1">
-            <a:schemeClr val="accent1"/>
-          </a:lnRef>
-          <a:fillRef idx="3">
-            <a:schemeClr val="accent1"/>
-          </a:fillRef>
-          <a:effectRef idx="2">
-            <a:schemeClr val="accent1"/>
-          </a:effectRef>
-          <a:fontRef idx="minor">
-            <a:schemeClr val="lt1"/>
-          </a:fontRef>
-        </p:style>
-        <p:txBody>
-          <a:bodyPr rtlCol="0" anchor="ctr"/>
-          <a:lstStyle/>
-          <a:p>
-            <a:pPr algn="ctr"/>
-          </a:p>
-        </p:txBody>
-      </p:sp>
-      <p:sp>
-        <p:nvSpPr>
-          <p:cNvPr id="9" name="TextBox 8"/>
-          <p:cNvSpPr txBox="1"/>
-          <p:nvPr/>
-        </p:nvSpPr>
-        <p:spPr>
-          <a:xfrm>
-            <a:off x="1097280" y="1563624"/>
-            <a:ext cx="10362895" cy="402336"/>
-          </a:xfrm>
-          <a:prstGeom prst="rect">
-            <a:avLst/>
-          </a:prstGeom>
-          <a:noFill/>
-        </p:spPr>
-        <p:txBody>
-          <a:bodyPr wrap="square" anchor="ctr"/>
-          <a:lstStyle/>
-          <a:p>
-            <a:r>
-              <a:rPr sz="1500" b="1" i="0">
-                <a:solidFill>
-                  <a:srgbClr val="333333"/>
-                </a:solidFill>
-                <a:latin typeface="Calibri"/>
-              </a:rPr>
-              <a:t>EL PROBLEMA EN UNA FRASE</a:t>
-            </a:r>
-            <a:r>
-              <a:rPr sz="1500" b="0" i="0">
-                <a:solidFill>
-                  <a:srgbClr val="333333"/>
-                </a:solidFill>
-                <a:latin typeface="Calibri"/>
-              </a:rPr>
-              <a:t> — Una sola frase con la fórmula: </a:t>
-            </a:r>
-            <a:r>
-              <a:rPr sz="1500" b="1" i="0">
-                <a:solidFill>
-                  <a:srgbClr val="333333"/>
-                </a:solidFill>
-                <a:latin typeface="Calibri"/>
-              </a:rPr>
-              <a:t>a quién le pasa qué, con qué consecuencia</a:t>
-            </a:r>
-            <a:r>
-              <a:rPr sz="1500" b="0" i="0">
-                <a:solidFill>
-                  <a:srgbClr val="333333"/>
-                </a:solidFill>
-                <a:latin typeface="Calibri"/>
-              </a:rPr>
-              <a:t>. Sin mencionar ninguna tecnología ni ninguna solución.</a:t>
-            </a:r>
-          </a:p>
-        </p:txBody>
-      </p:sp>
-      <p:sp>
-        <p:nvSpPr>
-          <p:cNvPr id="10" name="Rounded Rectangle 9"/>
-          <p:cNvSpPr/>
-          <p:nvPr/>
-        </p:nvSpPr>
-        <p:spPr>
-          <a:xfrm>
-            <a:off x="457200" y="2148839"/>
-            <a:ext cx="11277295" cy="566928"/>
-          </a:xfrm>
-          <a:prstGeom prst="roundRect">
-            <a:avLst>
-              <a:gd name="adj" fmla="val 12000"/>
-            </a:avLst>
-          </a:prstGeom>
-          <a:solidFill>
-            <a:srgbClr val="F2F2F2"/>
-          </a:solidFill>
-          <a:ln>
-            <a:noFill/>
-          </a:ln>
-        </p:spPr>
-        <p:style>
-          <a:lnRef idx="1">
-            <a:schemeClr val="accent1"/>
-          </a:lnRef>
-          <a:fillRef idx="3">
-            <a:schemeClr val="accent1"/>
-          </a:fillRef>
-          <a:effectRef idx="2">
-            <a:schemeClr val="accent1"/>
-          </a:effectRef>
-          <a:fontRef idx="minor">
-            <a:schemeClr val="lt1"/>
-          </a:fontRef>
-        </p:style>
-        <p:txBody>
-          <a:bodyPr rtlCol="0" anchor="ctr"/>
-          <a:lstStyle/>
-          <a:p>
-            <a:pPr algn="ctr"/>
-          </a:p>
-        </p:txBody>
-      </p:sp>
-      <p:sp>
-        <p:nvSpPr>
-          <p:cNvPr id="11" name="Rectangle 10"/>
-          <p:cNvSpPr/>
-          <p:nvPr/>
-        </p:nvSpPr>
-        <p:spPr>
-          <a:xfrm>
-            <a:off x="640080" y="2295144"/>
-            <a:ext cx="274320" cy="274320"/>
-          </a:xfrm>
-          <a:prstGeom prst="rect">
-            <a:avLst/>
-          </a:prstGeom>
-          <a:solidFill>
-            <a:srgbClr val="FFFFFF"/>
-          </a:solidFill>
-          <a:ln>
-            <a:solidFill>
-              <a:srgbClr val="333333"/>
-            </a:solidFill>
-          </a:ln>
-        </p:spPr>
-        <p:style>
-          <a:lnRef idx="1">
-            <a:schemeClr val="accent1"/>
-          </a:lnRef>
-          <a:fillRef idx="3">
-            <a:schemeClr val="accent1"/>
-          </a:fillRef>
-          <a:effectRef idx="2">
-            <a:schemeClr val="accent1"/>
-          </a:effectRef>
-          <a:fontRef idx="minor">
-            <a:schemeClr val="lt1"/>
-          </a:fontRef>
-        </p:style>
-        <p:txBody>
-          <a:bodyPr rtlCol="0" anchor="ctr"/>
-          <a:lstStyle/>
-          <a:p>
-            <a:pPr algn="ctr"/>
-          </a:p>
-        </p:txBody>
-      </p:sp>
-      <p:sp>
-        <p:nvSpPr>
-          <p:cNvPr id="12" name="Rectangle 11"/>
-          <p:cNvSpPr/>
-          <p:nvPr/>
-        </p:nvSpPr>
-        <p:spPr>
-          <a:xfrm>
-            <a:off x="640080" y="2295144"/>
-            <a:ext cx="73152" cy="274320"/>
-          </a:xfrm>
-          <a:prstGeom prst="rect">
-            <a:avLst/>
-          </a:prstGeom>
-          <a:solidFill>
-            <a:srgbClr val="269CCB"/>
-          </a:solidFill>
-          <a:ln>
-            <a:noFill/>
-          </a:ln>
-        </p:spPr>
-        <p:style>
-          <a:lnRef idx="1">
-            <a:schemeClr val="accent1"/>
-          </a:lnRef>
-          <a:fillRef idx="3">
-            <a:schemeClr val="accent1"/>
-          </a:fillRef>
-          <a:effectRef idx="2">
-            <a:schemeClr val="accent1"/>
-          </a:effectRef>
-          <a:fontRef idx="minor">
-            <a:schemeClr val="lt1"/>
-          </a:fontRef>
-        </p:style>
-        <p:txBody>
-          <a:bodyPr rtlCol="0" anchor="ctr"/>
-          <a:lstStyle/>
-          <a:p>
-            <a:pPr algn="ctr"/>
-          </a:p>
-        </p:txBody>
-      </p:sp>
-      <p:sp>
-        <p:nvSpPr>
-          <p:cNvPr id="13" name="TextBox 12"/>
-          <p:cNvSpPr txBox="1"/>
-          <p:nvPr/>
-        </p:nvSpPr>
-        <p:spPr>
-          <a:xfrm>
-            <a:off x="1097280" y="2240279"/>
-            <a:ext cx="10362895" cy="402336"/>
-          </a:xfrm>
-          <a:prstGeom prst="rect">
-            <a:avLst/>
-          </a:prstGeom>
-          <a:noFill/>
-        </p:spPr>
-        <p:txBody>
-          <a:bodyPr wrap="square" anchor="ctr"/>
-          <a:lstStyle/>
-          <a:p>
-            <a:r>
-              <a:rPr sz="1500" b="1" i="0">
-                <a:solidFill>
-                  <a:srgbClr val="333333"/>
-                </a:solidFill>
-                <a:latin typeface="Calibri"/>
-              </a:rPr>
-              <a:t>LA LÍNEA BASE</a:t>
-            </a:r>
-            <a:r>
-              <a:rPr sz="1500" b="0" i="0">
-                <a:solidFill>
-                  <a:srgbClr val="333333"/>
-                </a:solidFill>
-                <a:latin typeface="Calibri"/>
-              </a:rPr>
-              <a:t> — Una cifra que describa el problema </a:t>
-            </a:r>
-            <a:r>
-              <a:rPr sz="1500" b="1" i="0">
-                <a:solidFill>
-                  <a:srgbClr val="333333"/>
-                </a:solidFill>
-                <a:latin typeface="Calibri"/>
-              </a:rPr>
-              <a:t>hoy</a:t>
-            </a:r>
-            <a:r>
-              <a:rPr sz="1500" b="0" i="0">
-                <a:solidFill>
-                  <a:srgbClr val="333333"/>
-                </a:solidFill>
-                <a:latin typeface="Calibri"/>
-              </a:rPr>
-              <a:t>, antes de que ustedes toquen nada, más </a:t>
-            </a:r>
-            <a:r>
-              <a:rPr sz="1500" b="1" i="0">
-                <a:solidFill>
-                  <a:srgbClr val="333333"/>
-                </a:solidFill>
-                <a:latin typeface="Calibri"/>
-              </a:rPr>
-              <a:t>cómo la obtuvieron</a:t>
-            </a:r>
-            <a:r>
-              <a:rPr sz="1500" b="0" i="0">
-                <a:solidFill>
-                  <a:srgbClr val="333333"/>
-                </a:solidFill>
-                <a:latin typeface="Calibri"/>
-              </a:rPr>
-              <a:t> y cuándo. Si es estimación, escriban «estimado».</a:t>
-            </a:r>
-          </a:p>
-        </p:txBody>
-      </p:sp>
-      <p:sp>
-        <p:nvSpPr>
-          <p:cNvPr id="14" name="Rounded Rectangle 13"/>
-          <p:cNvSpPr/>
-          <p:nvPr/>
-        </p:nvSpPr>
-        <p:spPr>
-          <a:xfrm>
-            <a:off x="457200" y="2825496"/>
-            <a:ext cx="11277295" cy="566928"/>
-          </a:xfrm>
-          <a:prstGeom prst="roundRect">
-            <a:avLst>
-              <a:gd name="adj" fmla="val 12000"/>
-            </a:avLst>
-          </a:prstGeom>
-          <a:solidFill>
-            <a:srgbClr val="F2F2F2"/>
-          </a:solidFill>
-          <a:ln>
-            <a:noFill/>
-          </a:ln>
-        </p:spPr>
-        <p:style>
-          <a:lnRef idx="1">
-            <a:schemeClr val="accent1"/>
-          </a:lnRef>
-          <a:fillRef idx="3">
-            <a:schemeClr val="accent1"/>
-          </a:fillRef>
-          <a:effectRef idx="2">
-            <a:schemeClr val="accent1"/>
-          </a:effectRef>
-          <a:fontRef idx="minor">
-            <a:schemeClr val="lt1"/>
-          </a:fontRef>
-        </p:style>
-        <p:txBody>
-          <a:bodyPr rtlCol="0" anchor="ctr"/>
-          <a:lstStyle/>
-          <a:p>
-            <a:pPr algn="ctr"/>
-          </a:p>
-        </p:txBody>
-      </p:sp>
-      <p:sp>
-        <p:nvSpPr>
-          <p:cNvPr id="15" name="Rectangle 14"/>
-          <p:cNvSpPr/>
-          <p:nvPr/>
-        </p:nvSpPr>
-        <p:spPr>
-          <a:xfrm>
-            <a:off x="640080" y="2971800"/>
-            <a:ext cx="274320" cy="274320"/>
-          </a:xfrm>
-          <a:prstGeom prst="rect">
-            <a:avLst/>
-          </a:prstGeom>
-          <a:solidFill>
-            <a:srgbClr val="FFFFFF"/>
-          </a:solidFill>
-          <a:ln>
-            <a:solidFill>
-              <a:srgbClr val="333333"/>
-            </a:solidFill>
-          </a:ln>
-        </p:spPr>
-        <p:style>
-          <a:lnRef idx="1">
-            <a:schemeClr val="accent1"/>
-          </a:lnRef>
-          <a:fillRef idx="3">
-            <a:schemeClr val="accent1"/>
-          </a:fillRef>
-          <a:effectRef idx="2">
-            <a:schemeClr val="accent1"/>
-          </a:effectRef>
-          <a:fontRef idx="minor">
-            <a:schemeClr val="lt1"/>
-          </a:fontRef>
-        </p:style>
-        <p:txBody>
-          <a:bodyPr rtlCol="0" anchor="ctr"/>
-          <a:lstStyle/>
-          <a:p>
-            <a:pPr algn="ctr"/>
-          </a:p>
-        </p:txBody>
-      </p:sp>
-      <p:sp>
-        <p:nvSpPr>
-          <p:cNvPr id="16" name="Rectangle 15"/>
-          <p:cNvSpPr/>
-          <p:nvPr/>
-        </p:nvSpPr>
-        <p:spPr>
-          <a:xfrm>
-            <a:off x="640080" y="2971800"/>
-            <a:ext cx="73152" cy="274320"/>
-          </a:xfrm>
-          <a:prstGeom prst="rect">
-            <a:avLst/>
-          </a:prstGeom>
-          <a:solidFill>
-            <a:srgbClr val="269CCB"/>
-          </a:solidFill>
-          <a:ln>
-            <a:noFill/>
-          </a:ln>
-        </p:spPr>
-        <p:style>
-          <a:lnRef idx="1">
-            <a:schemeClr val="accent1"/>
-          </a:lnRef>
-          <a:fillRef idx="3">
-            <a:schemeClr val="accent1"/>
-          </a:fillRef>
-          <a:effectRef idx="2">
-            <a:schemeClr val="accent1"/>
-          </a:effectRef>
-          <a:fontRef idx="minor">
-            <a:schemeClr val="lt1"/>
-          </a:fontRef>
-        </p:style>
-        <p:txBody>
-          <a:bodyPr rtlCol="0" anchor="ctr"/>
-          <a:lstStyle/>
-          <a:p>
-            <a:pPr algn="ctr"/>
-          </a:p>
-        </p:txBody>
-      </p:sp>
-      <p:sp>
-        <p:nvSpPr>
-          <p:cNvPr id="17" name="TextBox 16"/>
-          <p:cNvSpPr txBox="1"/>
-          <p:nvPr/>
-        </p:nvSpPr>
-        <p:spPr>
-          <a:xfrm>
-            <a:off x="1097280" y="2916936"/>
-            <a:ext cx="10362895" cy="402336"/>
-          </a:xfrm>
-          <a:prstGeom prst="rect">
-            <a:avLst/>
-          </a:prstGeom>
-          <a:noFill/>
-        </p:spPr>
-        <p:txBody>
-          <a:bodyPr wrap="square" anchor="ctr"/>
-          <a:lstStyle/>
-          <a:p>
-            <a:r>
-              <a:rPr sz="1500" b="1" i="0">
-                <a:solidFill>
-                  <a:srgbClr val="333333"/>
-                </a:solidFill>
-                <a:latin typeface="Calibri"/>
-              </a:rPr>
-              <a:t>EL ÁRBOL DE CAUSAS</a:t>
-            </a:r>
-            <a:r>
-              <a:rPr sz="1500" b="0" i="0">
-                <a:solidFill>
-                  <a:srgbClr val="333333"/>
-                </a:solidFill>
-                <a:latin typeface="Calibri"/>
-              </a:rPr>
-              <a:t> — En Excalidraw: el problema en el tronco, los efectos arriba, dos o tres causas directas abajo y el segundo nivel de cada una. Marquen con un símbolo las causas que </a:t>
-            </a:r>
-            <a:r>
-              <a:rPr sz="1500" b="1" i="0">
-                <a:solidFill>
-                  <a:srgbClr val="333333"/>
-                </a:solidFill>
-                <a:latin typeface="Calibri"/>
-              </a:rPr>
-              <a:t>no</a:t>
-            </a:r>
-            <a:r>
-              <a:rPr sz="1500" b="0" i="0">
-                <a:solidFill>
-                  <a:srgbClr val="333333"/>
-                </a:solidFill>
-                <a:latin typeface="Calibri"/>
-              </a:rPr>
-              <a:t> pueden cambiar (restricciones).</a:t>
-            </a:r>
-          </a:p>
-        </p:txBody>
-      </p:sp>
-      <p:sp>
-        <p:nvSpPr>
-          <p:cNvPr id="18" name="Rounded Rectangle 17"/>
-          <p:cNvSpPr/>
-          <p:nvPr/>
-        </p:nvSpPr>
-        <p:spPr>
-          <a:xfrm>
-            <a:off x="457200" y="3502152"/>
-            <a:ext cx="11277295" cy="566928"/>
-          </a:xfrm>
-          <a:prstGeom prst="roundRect">
-            <a:avLst>
-              <a:gd name="adj" fmla="val 12000"/>
-            </a:avLst>
-          </a:prstGeom>
-          <a:solidFill>
-            <a:srgbClr val="F2F2F2"/>
-          </a:solidFill>
-          <a:ln>
-            <a:noFill/>
-          </a:ln>
-        </p:spPr>
-        <p:style>
-          <a:lnRef idx="1">
-            <a:schemeClr val="accent1"/>
-          </a:lnRef>
-          <a:fillRef idx="3">
-            <a:schemeClr val="accent1"/>
-          </a:fillRef>
-          <a:effectRef idx="2">
-            <a:schemeClr val="accent1"/>
-          </a:effectRef>
-          <a:fontRef idx="minor">
-            <a:schemeClr val="lt1"/>
-          </a:fontRef>
-        </p:style>
-        <p:txBody>
-          <a:bodyPr rtlCol="0" anchor="ctr"/>
-          <a:lstStyle/>
-          <a:p>
-            <a:pPr algn="ctr"/>
-          </a:p>
-        </p:txBody>
-      </p:sp>
-      <p:sp>
-        <p:nvSpPr>
-          <p:cNvPr id="19" name="Rectangle 18"/>
-          <p:cNvSpPr/>
-          <p:nvPr/>
-        </p:nvSpPr>
-        <p:spPr>
-          <a:xfrm>
-            <a:off x="640080" y="3648456"/>
-            <a:ext cx="274320" cy="274320"/>
-          </a:xfrm>
-          <a:prstGeom prst="rect">
-            <a:avLst/>
-          </a:prstGeom>
-          <a:solidFill>
-            <a:srgbClr val="FFFFFF"/>
-          </a:solidFill>
-          <a:ln>
-            <a:solidFill>
-              <a:srgbClr val="333333"/>
-            </a:solidFill>
-          </a:ln>
-        </p:spPr>
-        <p:style>
-          <a:lnRef idx="1">
-            <a:schemeClr val="accent1"/>
-          </a:lnRef>
-          <a:fillRef idx="3">
-            <a:schemeClr val="accent1"/>
-          </a:fillRef>
-          <a:effectRef idx="2">
-            <a:schemeClr val="accent1"/>
-          </a:effectRef>
-          <a:fontRef idx="minor">
-            <a:schemeClr val="lt1"/>
-          </a:fontRef>
-        </p:style>
-        <p:txBody>
-          <a:bodyPr rtlCol="0" anchor="ctr"/>
-          <a:lstStyle/>
-          <a:p>
-            <a:pPr algn="ctr"/>
-          </a:p>
-        </p:txBody>
-      </p:sp>
-      <p:sp>
-        <p:nvSpPr>
-          <p:cNvPr id="20" name="Rectangle 19"/>
-          <p:cNvSpPr/>
-          <p:nvPr/>
-        </p:nvSpPr>
-        <p:spPr>
-          <a:xfrm>
-            <a:off x="640080" y="3648456"/>
-            <a:ext cx="73152" cy="274320"/>
-          </a:xfrm>
-          <a:prstGeom prst="rect">
-            <a:avLst/>
-          </a:prstGeom>
-          <a:solidFill>
-            <a:srgbClr val="269CCB"/>
-          </a:solidFill>
-          <a:ln>
-            <a:noFill/>
-          </a:ln>
-        </p:spPr>
-        <p:style>
-          <a:lnRef idx="1">
-            <a:schemeClr val="accent1"/>
-          </a:lnRef>
-          <a:fillRef idx="3">
-            <a:schemeClr val="accent1"/>
-          </a:fillRef>
-          <a:effectRef idx="2">
-            <a:schemeClr val="accent1"/>
-          </a:effectRef>
-          <a:fontRef idx="minor">
-            <a:schemeClr val="lt1"/>
-          </a:fontRef>
-        </p:style>
-        <p:txBody>
-          <a:bodyPr rtlCol="0" anchor="ctr"/>
-          <a:lstStyle/>
-          <a:p>
-            <a:pPr algn="ctr"/>
-          </a:p>
-        </p:txBody>
-      </p:sp>
-      <p:sp>
-        <p:nvSpPr>
-          <p:cNvPr id="21" name="TextBox 20"/>
-          <p:cNvSpPr txBox="1"/>
-          <p:nvPr/>
-        </p:nvSpPr>
-        <p:spPr>
-          <a:xfrm>
-            <a:off x="1097280" y="3593592"/>
-            <a:ext cx="10362895" cy="402336"/>
-          </a:xfrm>
-          <a:prstGeom prst="rect">
-            <a:avLst/>
-          </a:prstGeom>
-          <a:noFill/>
-        </p:spPr>
-        <p:txBody>
-          <a:bodyPr wrap="square" anchor="ctr"/>
-          <a:lstStyle/>
-          <a:p>
-            <a:r>
-              <a:rPr sz="1500" b="1" i="0">
-                <a:solidFill>
-                  <a:srgbClr val="333333"/>
-                </a:solidFill>
-                <a:latin typeface="Calibri"/>
-              </a:rPr>
-              <a:t>ACTORES Y FRONTERA</a:t>
-            </a:r>
-            <a:r>
-              <a:rPr sz="1500" b="0" i="0">
-                <a:solidFill>
-                  <a:srgbClr val="333333"/>
-                </a:solidFill>
-                <a:latin typeface="Calibri"/>
-              </a:rPr>
-              <a:t> — Quién vive el problema (el dueño del problema), quién más se afecta sin ser usuario, y qué queda </a:t>
-            </a:r>
-            <a:r>
-              <a:rPr sz="1500" b="1" i="0">
-                <a:solidFill>
-                  <a:srgbClr val="333333"/>
-                </a:solidFill>
-                <a:latin typeface="Calibri"/>
-              </a:rPr>
-              <a:t>fuera</a:t>
-            </a:r>
-            <a:r>
-              <a:rPr sz="1500" b="0" i="0">
-                <a:solidFill>
-                  <a:srgbClr val="333333"/>
-                </a:solidFill>
-                <a:latin typeface="Calibri"/>
-              </a:rPr>
-              <a:t> de lo que ustedes van a abordar. Digan además </a:t>
-            </a:r>
-            <a:r>
-              <a:rPr sz="1500" b="1" i="0">
-                <a:solidFill>
-                  <a:srgbClr val="333333"/>
-                </a:solidFill>
-                <a:latin typeface="Calibri"/>
-              </a:rPr>
-              <a:t>a quién le pueden preguntar algo esta semana</a:t>
-            </a:r>
-            <a:r>
-              <a:rPr sz="1500" b="0" i="0">
-                <a:solidFill>
-                  <a:srgbClr val="333333"/>
-                </a:solidFill>
-                <a:latin typeface="Calibri"/>
-              </a:rPr>
-              <a:t>.</a:t>
-            </a:r>
-          </a:p>
-        </p:txBody>
-      </p:sp>
-      <p:sp>
-        <p:nvSpPr>
-          <p:cNvPr id="22" name="Rounded Rectangle 21"/>
-          <p:cNvSpPr/>
-          <p:nvPr/>
-        </p:nvSpPr>
-        <p:spPr>
-          <a:xfrm>
-            <a:off x="457200" y="4178808"/>
-            <a:ext cx="11277295" cy="566928"/>
-          </a:xfrm>
-          <a:prstGeom prst="roundRect">
-            <a:avLst>
-              <a:gd name="adj" fmla="val 12000"/>
-            </a:avLst>
-          </a:prstGeom>
-          <a:solidFill>
-            <a:srgbClr val="F2F2F2"/>
-          </a:solidFill>
-          <a:ln>
-            <a:noFill/>
-          </a:ln>
-        </p:spPr>
-        <p:style>
-          <a:lnRef idx="1">
-            <a:schemeClr val="accent1"/>
-          </a:lnRef>
-          <a:fillRef idx="3">
-            <a:schemeClr val="accent1"/>
-          </a:fillRef>
-          <a:effectRef idx="2">
-            <a:schemeClr val="accent1"/>
-          </a:effectRef>
-          <a:fontRef idx="minor">
-            <a:schemeClr val="lt1"/>
-          </a:fontRef>
-        </p:style>
-        <p:txBody>
-          <a:bodyPr rtlCol="0" anchor="ctr"/>
-          <a:lstStyle/>
-          <a:p>
-            <a:pPr algn="ctr"/>
-          </a:p>
-        </p:txBody>
-      </p:sp>
-      <p:sp>
-        <p:nvSpPr>
-          <p:cNvPr id="23" name="Rectangle 22"/>
-          <p:cNvSpPr/>
-          <p:nvPr/>
-        </p:nvSpPr>
-        <p:spPr>
-          <a:xfrm>
-            <a:off x="640080" y="4325112"/>
-            <a:ext cx="274320" cy="274320"/>
-          </a:xfrm>
-          <a:prstGeom prst="rect">
-            <a:avLst/>
-          </a:prstGeom>
-          <a:solidFill>
-            <a:srgbClr val="FFFFFF"/>
-          </a:solidFill>
-          <a:ln>
-            <a:solidFill>
-              <a:srgbClr val="333333"/>
-            </a:solidFill>
-          </a:ln>
-        </p:spPr>
-        <p:style>
-          <a:lnRef idx="1">
-            <a:schemeClr val="accent1"/>
-          </a:lnRef>
-          <a:fillRef idx="3">
-            <a:schemeClr val="accent1"/>
-          </a:fillRef>
-          <a:effectRef idx="2">
-            <a:schemeClr val="accent1"/>
-          </a:effectRef>
-          <a:fontRef idx="minor">
-            <a:schemeClr val="lt1"/>
-          </a:fontRef>
-        </p:style>
-        <p:txBody>
-          <a:bodyPr rtlCol="0" anchor="ctr"/>
-          <a:lstStyle/>
-          <a:p>
-            <a:pPr algn="ctr"/>
-          </a:p>
-        </p:txBody>
-      </p:sp>
-      <p:sp>
-        <p:nvSpPr>
-          <p:cNvPr id="24" name="Rectangle 23"/>
-          <p:cNvSpPr/>
-          <p:nvPr/>
-        </p:nvSpPr>
-        <p:spPr>
-          <a:xfrm>
-            <a:off x="640080" y="4325112"/>
-            <a:ext cx="73152" cy="274320"/>
-          </a:xfrm>
-          <a:prstGeom prst="rect">
-            <a:avLst/>
-          </a:prstGeom>
-          <a:solidFill>
-            <a:srgbClr val="269CCB"/>
-          </a:solidFill>
-          <a:ln>
-            <a:noFill/>
-          </a:ln>
-        </p:spPr>
-        <p:style>
-          <a:lnRef idx="1">
-            <a:schemeClr val="accent1"/>
-          </a:lnRef>
-          <a:fillRef idx="3">
-            <a:schemeClr val="accent1"/>
-          </a:fillRef>
-          <a:effectRef idx="2">
-            <a:schemeClr val="accent1"/>
-          </a:effectRef>
-          <a:fontRef idx="minor">
-            <a:schemeClr val="lt1"/>
-          </a:fontRef>
-        </p:style>
-        <p:txBody>
-          <a:bodyPr rtlCol="0" anchor="ctr"/>
-          <a:lstStyle/>
-          <a:p>
-            <a:pPr algn="ctr"/>
-          </a:p>
-        </p:txBody>
-      </p:sp>
-      <p:sp>
-        <p:nvSpPr>
-          <p:cNvPr id="25" name="TextBox 24"/>
-          <p:cNvSpPr txBox="1"/>
-          <p:nvPr/>
-        </p:nvSpPr>
-        <p:spPr>
-          <a:xfrm>
-            <a:off x="1097280" y="4270248"/>
-            <a:ext cx="10362895" cy="402336"/>
-          </a:xfrm>
-          <a:prstGeom prst="rect">
-            <a:avLst/>
-          </a:prstGeom>
-          <a:noFill/>
-        </p:spPr>
-        <p:txBody>
-          <a:bodyPr wrap="square" anchor="ctr"/>
-          <a:lstStyle/>
-          <a:p>
-            <a:r>
-              <a:rPr sz="1500" b="1" i="0">
-                <a:solidFill>
-                  <a:srgbClr val="333333"/>
-                </a:solidFill>
-                <a:latin typeface="Calibri"/>
-              </a:rPr>
-              <a:t>EL CRITERIO DE ÉXITO</a:t>
-            </a:r>
-            <a:r>
-              <a:rPr sz="1500" b="0" i="0">
-                <a:solidFill>
-                  <a:srgbClr val="333333"/>
-                </a:solidFill>
-                <a:latin typeface="Calibri"/>
-              </a:rPr>
-              <a:t> — Una frase de la forma: «el proyecto sirvió si &lt;la cifra de la línea base&gt; pasa de X a Y, medido así». Y la causa del árbol que van a atacar.</a:t>
-            </a:r>
-          </a:p>
-        </p:txBody>
-      </p:sp>
-      <p:sp>
-        <p:nvSpPr>
-          <p:cNvPr id="26" name="TextBox 25"/>
+            <a:pPr>
+              <a:spcAft>
+                <a:spcPts val="800"/>
+              </a:spcAft>
+            </a:pPr>
+            <a:r>
+              <a:rPr sz="2000" b="0" i="0">
+                <a:solidFill>
+                  <a:srgbClr val="333333"/>
+                </a:solidFill>
+                <a:latin typeface="Calibri"/>
+              </a:rPr>
+              <a:t>–   Bajar el problema hasta que se pueda contar algo es la manera más rápida de volverlo abordable. </a:t>
+            </a:r>
+            <a:r>
+              <a:rPr sz="2000" b="1" i="0">
+                <a:solidFill>
+                  <a:srgbClr val="333333"/>
+                </a:solidFill>
+                <a:latin typeface="Calibri"/>
+              </a:rPr>
+              <a:t>Los cuatro criterios</a:t>
+            </a:r>
+            <a:r>
+              <a:rPr sz="2000" b="0" i="0">
+                <a:solidFill>
+                  <a:srgbClr val="333333"/>
+                </a:solidFill>
+                <a:latin typeface="Calibri"/>
+              </a:rPr>
+              <a:t> son un filtro y hay que aplicarlos en voz alta a cada problema propuesto</a:t>
+            </a:r>
+          </a:p>
+          <a:p>
+            <a:pPr>
+              <a:spcAft>
+                <a:spcPts val="800"/>
+              </a:spcAft>
+            </a:pPr>
+            <a:r>
+              <a:rPr sz="2000" b="0" i="0">
+                <a:solidFill>
+                  <a:srgbClr val="333333"/>
+                </a:solidFill>
+                <a:latin typeface="Calibri"/>
+              </a:rPr>
+              <a:t>–   Uno por uno. *Abordable* con navegador y herramientas gratuitas: nada que exija comprar equipos</a:t>
+            </a:r>
+          </a:p>
+          <a:p>
+            <a:pPr>
+              <a:spcAft>
+                <a:spcPts val="800"/>
+              </a:spcAft>
+            </a:pPr>
+            <a:r>
+              <a:rPr sz="2000" b="0" i="0">
+                <a:solidFill>
+                  <a:srgbClr val="333333"/>
+                </a:solidFill>
+                <a:latin typeface="Calibri"/>
+              </a:rPr>
+              <a:t>–   Contratar servicios de pago o conseguir permisos institucionales que no van a llegar en un semestre. *Medible*: existe la cifra. *Con acceso a los actores*: pueden hablar esta semana con alguien que vive el problema</a:t>
+            </a:r>
+          </a:p>
+          <a:p>
+            <a:pPr>
+              <a:spcAft>
+                <a:spcPts val="800"/>
+              </a:spcAft>
+            </a:pPr>
+            <a:r>
+              <a:rPr sz="2000" b="0" i="0">
+                <a:solidFill>
+                  <a:srgbClr val="333333"/>
+                </a:solidFill>
+                <a:latin typeface="Calibri"/>
+              </a:rPr>
+              <a:t>–   Sin trámites; este criterio es el que descarta más propuestas y hay que ser firme</a:t>
+            </a:r>
+          </a:p>
+          <a:p>
+            <a:pPr>
+              <a:spcAft>
+                <a:spcPts val="800"/>
+              </a:spcAft>
+            </a:pPr>
+            <a:r>
+              <a:rPr sz="2000" b="0" i="0">
+                <a:solidFill>
+                  <a:srgbClr val="333333"/>
+                </a:solidFill>
+                <a:latin typeface="Calibri"/>
+              </a:rPr>
+              <a:t>–   Porque un proyecto sobre una entidad a la que nadie puede preguntarle nada termina siendo un ejercicio de imaginación con aspecto de proyecto. *Con dueño del problema*: hay una persona o un grupo concreto al que le duele y que reconocería la mejora</a:t>
+            </a:r>
+          </a:p>
+        </p:txBody>
+      </p:sp>
+      <p:sp>
+        <p:nvSpPr>
+          <p:cNvPr id="6" name="TextBox 5"/>
           <p:cNvSpPr txBox="1"/>
           <p:nvPr/>
         </p:nvSpPr>
@@ -9189,7 +7824,7 @@
         <p:spPr>
           <a:xfrm>
             <a:off x="0" y="0"/>
-            <a:ext cx="12191695" cy="1170432"/>
+            <a:ext cx="12191695" cy="960120"/>
           </a:xfrm>
           <a:prstGeom prst="rect">
             <a:avLst/>
@@ -9231,7 +7866,7 @@
         </p:nvSpPr>
         <p:spPr>
           <a:xfrm>
-            <a:off x="0" y="1170432"/>
+            <a:off x="0" y="960120"/>
             <a:ext cx="12191695" cy="41148"/>
           </a:xfrm>
           <a:prstGeom prst="rect">
@@ -9275,7 +7910,7 @@
         <p:spPr>
           <a:xfrm>
             <a:off x="457200" y="164592"/>
-            <a:ext cx="11277295" cy="384048"/>
+            <a:ext cx="11277295" cy="502920"/>
           </a:xfrm>
           <a:prstGeom prst="rect">
             <a:avLst/>
@@ -9295,7 +7930,7 @@
                 </a:solidFill>
                 <a:latin typeface="Calibri"/>
               </a:rPr>
-              <a:t>Cómo se expone en 3 minutos</a:t>
+              <a:t>La línea base y los cuatro criterios de viabilidad (4/4)</a:t>
             </a:r>
           </a:p>
         </p:txBody>
@@ -9308,8 +7943,8 @@
         </p:nvSpPr>
         <p:spPr>
           <a:xfrm>
-            <a:off x="457200" y="566928"/>
-            <a:ext cx="11277295" cy="411480"/>
+            <a:off x="457200" y="1170432"/>
+            <a:ext cx="11277295" cy="5230368"/>
           </a:xfrm>
           <a:prstGeom prst="rect">
             <a:avLst/>
@@ -9322,876 +7957,58 @@
           </a:bodyPr>
           <a:lstStyle/>
           <a:p>
-            <a:r>
-              <a:rPr sz="1400" b="0" i="0">
-                <a:solidFill>
-                  <a:srgbClr val="B8D8EE"/>
-                </a:solidFill>
-                <a:latin typeface="Calibri"/>
-              </a:rPr>
-              <a:t>Habla el vocero con la pantalla ya compartida · cronómetro en pantalla · se corta al llegar a cero</a:t>
-            </a:r>
-          </a:p>
-        </p:txBody>
-      </p:sp>
-      <p:sp>
-        <p:nvSpPr>
-          <p:cNvPr id="6" name="Rounded Rectangle 5"/>
-          <p:cNvSpPr/>
-          <p:nvPr/>
-        </p:nvSpPr>
-        <p:spPr>
-          <a:xfrm>
-            <a:off x="457200" y="1444752"/>
-            <a:ext cx="11277295" cy="908913"/>
-          </a:xfrm>
-          <a:prstGeom prst="roundRect">
-            <a:avLst>
-              <a:gd name="adj" fmla="val 12000"/>
-            </a:avLst>
-          </a:prstGeom>
-          <a:solidFill>
-            <a:srgbClr val="F2F2F2"/>
-          </a:solidFill>
-          <a:ln>
-            <a:noFill/>
-          </a:ln>
-        </p:spPr>
-        <p:style>
-          <a:lnRef idx="1">
-            <a:schemeClr val="accent1"/>
-          </a:lnRef>
-          <a:fillRef idx="3">
-            <a:schemeClr val="accent1"/>
-          </a:fillRef>
-          <a:effectRef idx="2">
-            <a:schemeClr val="accent1"/>
-          </a:effectRef>
-          <a:fontRef idx="minor">
-            <a:schemeClr val="lt1"/>
-          </a:fontRef>
-        </p:style>
-        <p:txBody>
-          <a:bodyPr rtlCol="0" anchor="ctr"/>
-          <a:lstStyle/>
-          <a:p>
-            <a:pPr algn="ctr"/>
-          </a:p>
-        </p:txBody>
-      </p:sp>
-      <p:sp>
-        <p:nvSpPr>
-          <p:cNvPr id="7" name="Rounded Rectangle 6"/>
-          <p:cNvSpPr/>
-          <p:nvPr/>
-        </p:nvSpPr>
-        <p:spPr>
-          <a:xfrm>
-            <a:off x="594360" y="1679752"/>
-            <a:ext cx="438912" cy="438912"/>
-          </a:xfrm>
-          <a:prstGeom prst="roundRect">
-            <a:avLst>
-              <a:gd name="adj" fmla="val 12000"/>
-            </a:avLst>
-          </a:prstGeom>
-          <a:solidFill>
-            <a:srgbClr val="095292"/>
-          </a:solidFill>
-          <a:ln>
-            <a:noFill/>
-          </a:ln>
-        </p:spPr>
-        <p:style>
-          <a:lnRef idx="1">
-            <a:schemeClr val="accent1"/>
-          </a:lnRef>
-          <a:fillRef idx="3">
-            <a:schemeClr val="accent1"/>
-          </a:fillRef>
-          <a:effectRef idx="2">
-            <a:schemeClr val="accent1"/>
-          </a:effectRef>
-          <a:fontRef idx="minor">
-            <a:schemeClr val="lt1"/>
-          </a:fontRef>
-        </p:style>
-        <p:txBody>
-          <a:bodyPr rtlCol="0" anchor="ctr"/>
-          <a:lstStyle/>
-          <a:p>
-            <a:pPr algn="ctr"/>
-          </a:p>
-        </p:txBody>
-      </p:sp>
-      <p:sp>
-        <p:nvSpPr>
-          <p:cNvPr id="8" name="TextBox 7"/>
-          <p:cNvSpPr txBox="1"/>
-          <p:nvPr/>
-        </p:nvSpPr>
-        <p:spPr>
-          <a:xfrm>
-            <a:off x="594360" y="1679752"/>
-            <a:ext cx="438912" cy="438912"/>
-          </a:xfrm>
-          <a:prstGeom prst="rect">
-            <a:avLst/>
-          </a:prstGeom>
-          <a:noFill/>
-        </p:spPr>
-        <p:txBody>
-          <a:bodyPr wrap="square" anchor="ctr"/>
-          <a:lstStyle/>
-          <a:p>
-            <a:pPr algn="ctr"/>
-            <a:r>
-              <a:rPr sz="1600" b="1" i="0">
-                <a:solidFill>
-                  <a:srgbClr val="FFFFFF"/>
-                </a:solidFill>
-                <a:latin typeface="Calibri"/>
-              </a:rPr>
-              <a:t>1</a:t>
-            </a:r>
-          </a:p>
-        </p:txBody>
-      </p:sp>
-      <p:sp>
-        <p:nvSpPr>
-          <p:cNvPr id="9" name="TextBox 8"/>
-          <p:cNvSpPr txBox="1"/>
-          <p:nvPr/>
-        </p:nvSpPr>
-        <p:spPr>
-          <a:xfrm>
-            <a:off x="1188720" y="1536192"/>
-            <a:ext cx="10271455" cy="744321"/>
-          </a:xfrm>
-          <a:prstGeom prst="rect">
-            <a:avLst/>
-          </a:prstGeom>
-          <a:noFill/>
-        </p:spPr>
-        <p:txBody>
-          <a:bodyPr wrap="square" anchor="ctr"/>
-          <a:lstStyle/>
-          <a:p>
-            <a:r>
-              <a:rPr sz="1500" b="1" i="0">
-                <a:solidFill>
-                  <a:srgbClr val="095292"/>
-                </a:solidFill>
-                <a:latin typeface="Calibri"/>
-              </a:rPr>
-              <a:t>40 s · El problema en una frase</a:t>
-            </a:r>
-          </a:p>
-          <a:p>
             <a:pPr>
-              <a:spcBef>
-                <a:spcPts val="200"/>
-              </a:spcBef>
+              <a:spcAft>
+                <a:spcPts val="800"/>
+              </a:spcAft>
             </a:pPr>
             <a:r>
-              <a:rPr sz="1300" b="0" i="0">
-                <a:solidFill>
-                  <a:srgbClr val="333333"/>
-                </a:solidFill>
-                <a:latin typeface="Calibri"/>
-              </a:rPr>
-              <a:t>Léanla tal cual está escrita. Sin tecnología dentro.</a:t>
-            </a:r>
-          </a:p>
-        </p:txBody>
-      </p:sp>
-      <p:sp>
-        <p:nvSpPr>
-          <p:cNvPr id="10" name="Rounded Rectangle 9"/>
-          <p:cNvSpPr/>
-          <p:nvPr/>
-        </p:nvSpPr>
-        <p:spPr>
-          <a:xfrm>
-            <a:off x="457200" y="2445105"/>
-            <a:ext cx="11277295" cy="908913"/>
-          </a:xfrm>
-          <a:prstGeom prst="roundRect">
-            <a:avLst>
-              <a:gd name="adj" fmla="val 12000"/>
-            </a:avLst>
-          </a:prstGeom>
-          <a:solidFill>
-            <a:srgbClr val="E8F4FA"/>
-          </a:solidFill>
-          <a:ln>
-            <a:noFill/>
-          </a:ln>
-        </p:spPr>
-        <p:style>
-          <a:lnRef idx="1">
-            <a:schemeClr val="accent1"/>
-          </a:lnRef>
-          <a:fillRef idx="3">
-            <a:schemeClr val="accent1"/>
-          </a:fillRef>
-          <a:effectRef idx="2">
-            <a:schemeClr val="accent1"/>
-          </a:effectRef>
-          <a:fontRef idx="minor">
-            <a:schemeClr val="lt1"/>
-          </a:fontRef>
-        </p:style>
-        <p:txBody>
-          <a:bodyPr rtlCol="0" anchor="ctr"/>
-          <a:lstStyle/>
-          <a:p>
-            <a:pPr algn="ctr"/>
-          </a:p>
-        </p:txBody>
-      </p:sp>
-      <p:sp>
-        <p:nvSpPr>
-          <p:cNvPr id="11" name="Rounded Rectangle 10"/>
-          <p:cNvSpPr/>
-          <p:nvPr/>
-        </p:nvSpPr>
-        <p:spPr>
-          <a:xfrm>
-            <a:off x="594360" y="2680106"/>
-            <a:ext cx="438912" cy="438912"/>
-          </a:xfrm>
-          <a:prstGeom prst="roundRect">
-            <a:avLst>
-              <a:gd name="adj" fmla="val 12000"/>
-            </a:avLst>
-          </a:prstGeom>
-          <a:solidFill>
-            <a:srgbClr val="095292"/>
-          </a:solidFill>
-          <a:ln>
-            <a:noFill/>
-          </a:ln>
-        </p:spPr>
-        <p:style>
-          <a:lnRef idx="1">
-            <a:schemeClr val="accent1"/>
-          </a:lnRef>
-          <a:fillRef idx="3">
-            <a:schemeClr val="accent1"/>
-          </a:fillRef>
-          <a:effectRef idx="2">
-            <a:schemeClr val="accent1"/>
-          </a:effectRef>
-          <a:fontRef idx="minor">
-            <a:schemeClr val="lt1"/>
-          </a:fontRef>
-        </p:style>
-        <p:txBody>
-          <a:bodyPr rtlCol="0" anchor="ctr"/>
-          <a:lstStyle/>
-          <a:p>
-            <a:pPr algn="ctr"/>
-          </a:p>
-        </p:txBody>
-      </p:sp>
-      <p:sp>
-        <p:nvSpPr>
-          <p:cNvPr id="12" name="TextBox 11"/>
-          <p:cNvSpPr txBox="1"/>
-          <p:nvPr/>
-        </p:nvSpPr>
-        <p:spPr>
-          <a:xfrm>
-            <a:off x="594360" y="2680106"/>
-            <a:ext cx="438912" cy="438912"/>
-          </a:xfrm>
-          <a:prstGeom prst="rect">
-            <a:avLst/>
-          </a:prstGeom>
-          <a:noFill/>
-        </p:spPr>
-        <p:txBody>
-          <a:bodyPr wrap="square" anchor="ctr"/>
-          <a:lstStyle/>
-          <a:p>
-            <a:pPr algn="ctr"/>
-            <a:r>
-              <a:rPr sz="1600" b="1" i="0">
-                <a:solidFill>
-                  <a:srgbClr val="FFFFFF"/>
-                </a:solidFill>
-                <a:latin typeface="Calibri"/>
-              </a:rPr>
-              <a:t>2</a:t>
-            </a:r>
-          </a:p>
-        </p:txBody>
-      </p:sp>
-      <p:sp>
-        <p:nvSpPr>
-          <p:cNvPr id="13" name="TextBox 12"/>
-          <p:cNvSpPr txBox="1"/>
-          <p:nvPr/>
-        </p:nvSpPr>
-        <p:spPr>
-          <a:xfrm>
-            <a:off x="1188720" y="2536545"/>
-            <a:ext cx="10271455" cy="744321"/>
-          </a:xfrm>
-          <a:prstGeom prst="rect">
-            <a:avLst/>
-          </a:prstGeom>
-          <a:noFill/>
-        </p:spPr>
-        <p:txBody>
-          <a:bodyPr wrap="square" anchor="ctr"/>
-          <a:lstStyle/>
-          <a:p>
-            <a:r>
-              <a:rPr sz="1500" b="1" i="0">
-                <a:solidFill>
-                  <a:srgbClr val="095292"/>
-                </a:solidFill>
-                <a:latin typeface="Calibri"/>
-              </a:rPr>
-              <a:t>30 s · La cifra</a:t>
+              <a:rPr sz="2000" b="0" i="0">
+                <a:solidFill>
+                  <a:srgbClr val="333333"/>
+                </a:solidFill>
+                <a:latin typeface="Calibri"/>
+              </a:rPr>
+              <a:t>–   Si el afectado es «la sociedad», no hay a quién mostrarle el resultado en la Clase 15.</a:t>
             </a:r>
           </a:p>
           <a:p>
             <a:pPr>
-              <a:spcBef>
-                <a:spcPts val="200"/>
-              </a:spcBef>
+              <a:spcAft>
+                <a:spcPts val="800"/>
+              </a:spcAft>
             </a:pPr>
             <a:r>
-              <a:rPr sz="1300" b="0" i="0">
-                <a:solidFill>
-                  <a:srgbClr val="333333"/>
-                </a:solidFill>
-                <a:latin typeface="Calibri"/>
-              </a:rPr>
-              <a:t>La línea base y cómo la obtuvieron. Es el minuto obligatorio.</a:t>
-            </a:r>
-          </a:p>
-        </p:txBody>
-      </p:sp>
-      <p:sp>
-        <p:nvSpPr>
-          <p:cNvPr id="14" name="Rounded Rectangle 13"/>
-          <p:cNvSpPr/>
-          <p:nvPr/>
-        </p:nvSpPr>
-        <p:spPr>
-          <a:xfrm>
-            <a:off x="457200" y="3445459"/>
-            <a:ext cx="11277295" cy="908913"/>
-          </a:xfrm>
-          <a:prstGeom prst="roundRect">
-            <a:avLst>
-              <a:gd name="adj" fmla="val 12000"/>
-            </a:avLst>
-          </a:prstGeom>
-          <a:solidFill>
-            <a:srgbClr val="F2F2F2"/>
-          </a:solidFill>
-          <a:ln>
-            <a:noFill/>
-          </a:ln>
-        </p:spPr>
-        <p:style>
-          <a:lnRef idx="1">
-            <a:schemeClr val="accent1"/>
-          </a:lnRef>
-          <a:fillRef idx="3">
-            <a:schemeClr val="accent1"/>
-          </a:fillRef>
-          <a:effectRef idx="2">
-            <a:schemeClr val="accent1"/>
-          </a:effectRef>
-          <a:fontRef idx="minor">
-            <a:schemeClr val="lt1"/>
-          </a:fontRef>
-        </p:style>
-        <p:txBody>
-          <a:bodyPr rtlCol="0" anchor="ctr"/>
-          <a:lstStyle/>
-          <a:p>
-            <a:pPr algn="ctr"/>
-          </a:p>
-        </p:txBody>
-      </p:sp>
-      <p:sp>
-        <p:nvSpPr>
-          <p:cNvPr id="15" name="Rounded Rectangle 14"/>
-          <p:cNvSpPr/>
-          <p:nvPr/>
-        </p:nvSpPr>
-        <p:spPr>
-          <a:xfrm>
-            <a:off x="594360" y="3680460"/>
-            <a:ext cx="438912" cy="438912"/>
-          </a:xfrm>
-          <a:prstGeom prst="roundRect">
-            <a:avLst>
-              <a:gd name="adj" fmla="val 12000"/>
-            </a:avLst>
-          </a:prstGeom>
-          <a:solidFill>
-            <a:srgbClr val="095292"/>
-          </a:solidFill>
-          <a:ln>
-            <a:noFill/>
-          </a:ln>
-        </p:spPr>
-        <p:style>
-          <a:lnRef idx="1">
-            <a:schemeClr val="accent1"/>
-          </a:lnRef>
-          <a:fillRef idx="3">
-            <a:schemeClr val="accent1"/>
-          </a:fillRef>
-          <a:effectRef idx="2">
-            <a:schemeClr val="accent1"/>
-          </a:effectRef>
-          <a:fontRef idx="minor">
-            <a:schemeClr val="lt1"/>
-          </a:fontRef>
-        </p:style>
-        <p:txBody>
-          <a:bodyPr rtlCol="0" anchor="ctr"/>
-          <a:lstStyle/>
-          <a:p>
-            <a:pPr algn="ctr"/>
-          </a:p>
-        </p:txBody>
-      </p:sp>
-      <p:sp>
-        <p:nvSpPr>
-          <p:cNvPr id="16" name="TextBox 15"/>
-          <p:cNvSpPr txBox="1"/>
-          <p:nvPr/>
-        </p:nvSpPr>
-        <p:spPr>
-          <a:xfrm>
-            <a:off x="594360" y="3680460"/>
-            <a:ext cx="438912" cy="438912"/>
-          </a:xfrm>
-          <a:prstGeom prst="rect">
-            <a:avLst/>
-          </a:prstGeom>
-          <a:noFill/>
-        </p:spPr>
-        <p:txBody>
-          <a:bodyPr wrap="square" anchor="ctr"/>
-          <a:lstStyle/>
-          <a:p>
-            <a:pPr algn="ctr"/>
-            <a:r>
-              <a:rPr sz="1600" b="1" i="0">
-                <a:solidFill>
-                  <a:srgbClr val="FFFFFF"/>
-                </a:solidFill>
-                <a:latin typeface="Calibri"/>
-              </a:rPr>
-              <a:t>3</a:t>
-            </a:r>
-          </a:p>
-        </p:txBody>
-      </p:sp>
-      <p:sp>
-        <p:nvSpPr>
-          <p:cNvPr id="17" name="TextBox 16"/>
-          <p:cNvSpPr txBox="1"/>
-          <p:nvPr/>
-        </p:nvSpPr>
-        <p:spPr>
-          <a:xfrm>
-            <a:off x="1188720" y="3536899"/>
-            <a:ext cx="10271455" cy="744321"/>
-          </a:xfrm>
-          <a:prstGeom prst="rect">
-            <a:avLst/>
-          </a:prstGeom>
-          <a:noFill/>
-        </p:spPr>
-        <p:txBody>
-          <a:bodyPr wrap="square" anchor="ctr"/>
-          <a:lstStyle/>
-          <a:p>
-            <a:r>
-              <a:rPr sz="1500" b="1" i="0">
-                <a:solidFill>
-                  <a:srgbClr val="095292"/>
-                </a:solidFill>
-                <a:latin typeface="Calibri"/>
-              </a:rPr>
-              <a:t>50 s · El árbol</a:t>
+              <a:rPr sz="2000" b="0" i="0">
+                <a:solidFill>
+                  <a:srgbClr val="333333"/>
+                </a:solidFill>
+                <a:latin typeface="Calibri"/>
+              </a:rPr>
+              <a:t>–   Una advertencia sobre el ánimo del grupo: aplicar estos criterios va a matar algunas ideas ambiciosas y eso frustra.</a:t>
             </a:r>
           </a:p>
           <a:p>
             <a:pPr>
-              <a:spcBef>
-                <a:spcPts val="200"/>
-              </a:spcBef>
+              <a:spcAft>
+                <a:spcPts val="800"/>
+              </a:spcAft>
             </a:pPr>
             <a:r>
-              <a:rPr sz="1300" b="0" i="0">
-                <a:solidFill>
-                  <a:srgbClr val="333333"/>
-                </a:solidFill>
-                <a:latin typeface="Calibri"/>
-              </a:rPr>
-              <a:t>Muestren el dibujo y señalen la causa que van a atacar.</a:t>
-            </a:r>
-          </a:p>
-        </p:txBody>
-      </p:sp>
-      <p:sp>
-        <p:nvSpPr>
-          <p:cNvPr id="18" name="Rounded Rectangle 17"/>
-          <p:cNvSpPr/>
-          <p:nvPr/>
-        </p:nvSpPr>
-        <p:spPr>
-          <a:xfrm>
-            <a:off x="457200" y="4445812"/>
-            <a:ext cx="11277295" cy="908913"/>
-          </a:xfrm>
-          <a:prstGeom prst="roundRect">
-            <a:avLst>
-              <a:gd name="adj" fmla="val 12000"/>
-            </a:avLst>
-          </a:prstGeom>
-          <a:solidFill>
-            <a:srgbClr val="E8F4FA"/>
-          </a:solidFill>
-          <a:ln>
-            <a:noFill/>
-          </a:ln>
-        </p:spPr>
-        <p:style>
-          <a:lnRef idx="1">
-            <a:schemeClr val="accent1"/>
-          </a:lnRef>
-          <a:fillRef idx="3">
-            <a:schemeClr val="accent1"/>
-          </a:fillRef>
-          <a:effectRef idx="2">
-            <a:schemeClr val="accent1"/>
-          </a:effectRef>
-          <a:fontRef idx="minor">
-            <a:schemeClr val="lt1"/>
-          </a:fontRef>
-        </p:style>
-        <p:txBody>
-          <a:bodyPr rtlCol="0" anchor="ctr"/>
-          <a:lstStyle/>
-          <a:p>
-            <a:pPr algn="ctr"/>
-          </a:p>
-        </p:txBody>
-      </p:sp>
-      <p:sp>
-        <p:nvSpPr>
-          <p:cNvPr id="19" name="Rounded Rectangle 18"/>
-          <p:cNvSpPr/>
-          <p:nvPr/>
-        </p:nvSpPr>
-        <p:spPr>
-          <a:xfrm>
-            <a:off x="594360" y="4680813"/>
-            <a:ext cx="438912" cy="438912"/>
-          </a:xfrm>
-          <a:prstGeom prst="roundRect">
-            <a:avLst>
-              <a:gd name="adj" fmla="val 12000"/>
-            </a:avLst>
-          </a:prstGeom>
-          <a:solidFill>
-            <a:srgbClr val="095292"/>
-          </a:solidFill>
-          <a:ln>
-            <a:noFill/>
-          </a:ln>
-        </p:spPr>
-        <p:style>
-          <a:lnRef idx="1">
-            <a:schemeClr val="accent1"/>
-          </a:lnRef>
-          <a:fillRef idx="3">
-            <a:schemeClr val="accent1"/>
-          </a:fillRef>
-          <a:effectRef idx="2">
-            <a:schemeClr val="accent1"/>
-          </a:effectRef>
-          <a:fontRef idx="minor">
-            <a:schemeClr val="lt1"/>
-          </a:fontRef>
-        </p:style>
-        <p:txBody>
-          <a:bodyPr rtlCol="0" anchor="ctr"/>
-          <a:lstStyle/>
-          <a:p>
-            <a:pPr algn="ctr"/>
-          </a:p>
-        </p:txBody>
-      </p:sp>
-      <p:sp>
-        <p:nvSpPr>
-          <p:cNvPr id="20" name="TextBox 19"/>
-          <p:cNvSpPr txBox="1"/>
-          <p:nvPr/>
-        </p:nvSpPr>
-        <p:spPr>
-          <a:xfrm>
-            <a:off x="594360" y="4680813"/>
-            <a:ext cx="438912" cy="438912"/>
-          </a:xfrm>
-          <a:prstGeom prst="rect">
-            <a:avLst/>
-          </a:prstGeom>
-          <a:noFill/>
-        </p:spPr>
-        <p:txBody>
-          <a:bodyPr wrap="square" anchor="ctr"/>
-          <a:lstStyle/>
-          <a:p>
-            <a:pPr algn="ctr"/>
-            <a:r>
-              <a:rPr sz="1600" b="1" i="0">
-                <a:solidFill>
-                  <a:srgbClr val="FFFFFF"/>
-                </a:solidFill>
-                <a:latin typeface="Calibri"/>
-              </a:rPr>
-              <a:t>4</a:t>
-            </a:r>
-          </a:p>
-        </p:txBody>
-      </p:sp>
-      <p:sp>
-        <p:nvSpPr>
-          <p:cNvPr id="21" name="TextBox 20"/>
-          <p:cNvSpPr txBox="1"/>
-          <p:nvPr/>
-        </p:nvSpPr>
-        <p:spPr>
-          <a:xfrm>
-            <a:off x="1188720" y="4537252"/>
-            <a:ext cx="10271455" cy="744321"/>
-          </a:xfrm>
-          <a:prstGeom prst="rect">
-            <a:avLst/>
-          </a:prstGeom>
-          <a:noFill/>
-        </p:spPr>
-        <p:txBody>
-          <a:bodyPr wrap="square" anchor="ctr"/>
-          <a:lstStyle/>
-          <a:p>
-            <a:r>
-              <a:rPr sz="1500" b="1" i="0">
-                <a:solidFill>
-                  <a:srgbClr val="095292"/>
-                </a:solidFill>
-                <a:latin typeface="Calibri"/>
-              </a:rPr>
-              <a:t>40 s · Actores y frontera</a:t>
-            </a:r>
-          </a:p>
-          <a:p>
-            <a:pPr>
-              <a:spcBef>
-                <a:spcPts val="200"/>
-              </a:spcBef>
-            </a:pPr>
-            <a:r>
-              <a:rPr sz="1300" b="0" i="0">
-                <a:solidFill>
-                  <a:srgbClr val="333333"/>
-                </a:solidFill>
-                <a:latin typeface="Calibri"/>
-              </a:rPr>
-              <a:t>Quién vive el problema, y a quién le van a preguntar esta semana.</a:t>
-            </a:r>
-          </a:p>
-        </p:txBody>
-      </p:sp>
-      <p:sp>
-        <p:nvSpPr>
-          <p:cNvPr id="22" name="Rounded Rectangle 21"/>
-          <p:cNvSpPr/>
-          <p:nvPr/>
-        </p:nvSpPr>
-        <p:spPr>
-          <a:xfrm>
-            <a:off x="457200" y="5446166"/>
-            <a:ext cx="11277295" cy="908913"/>
-          </a:xfrm>
-          <a:prstGeom prst="roundRect">
-            <a:avLst>
-              <a:gd name="adj" fmla="val 12000"/>
-            </a:avLst>
-          </a:prstGeom>
-          <a:solidFill>
-            <a:srgbClr val="F2F2F2"/>
-          </a:solidFill>
-          <a:ln>
-            <a:noFill/>
-          </a:ln>
-        </p:spPr>
-        <p:style>
-          <a:lnRef idx="1">
-            <a:schemeClr val="accent1"/>
-          </a:lnRef>
-          <a:fillRef idx="3">
-            <a:schemeClr val="accent1"/>
-          </a:fillRef>
-          <a:effectRef idx="2">
-            <a:schemeClr val="accent1"/>
-          </a:effectRef>
-          <a:fontRef idx="minor">
-            <a:schemeClr val="lt1"/>
-          </a:fontRef>
-        </p:style>
-        <p:txBody>
-          <a:bodyPr rtlCol="0" anchor="ctr"/>
-          <a:lstStyle/>
-          <a:p>
-            <a:pPr algn="ctr"/>
-          </a:p>
-        </p:txBody>
-      </p:sp>
-      <p:sp>
-        <p:nvSpPr>
-          <p:cNvPr id="23" name="Rounded Rectangle 22"/>
-          <p:cNvSpPr/>
-          <p:nvPr/>
-        </p:nvSpPr>
-        <p:spPr>
-          <a:xfrm>
-            <a:off x="594360" y="5681167"/>
-            <a:ext cx="438912" cy="438912"/>
-          </a:xfrm>
-          <a:prstGeom prst="roundRect">
-            <a:avLst>
-              <a:gd name="adj" fmla="val 12000"/>
-            </a:avLst>
-          </a:prstGeom>
-          <a:solidFill>
-            <a:srgbClr val="095292"/>
-          </a:solidFill>
-          <a:ln>
-            <a:noFill/>
-          </a:ln>
-        </p:spPr>
-        <p:style>
-          <a:lnRef idx="1">
-            <a:schemeClr val="accent1"/>
-          </a:lnRef>
-          <a:fillRef idx="3">
-            <a:schemeClr val="accent1"/>
-          </a:fillRef>
-          <a:effectRef idx="2">
-            <a:schemeClr val="accent1"/>
-          </a:effectRef>
-          <a:fontRef idx="minor">
-            <a:schemeClr val="lt1"/>
-          </a:fontRef>
-        </p:style>
-        <p:txBody>
-          <a:bodyPr rtlCol="0" anchor="ctr"/>
-          <a:lstStyle/>
-          <a:p>
-            <a:pPr algn="ctr"/>
-          </a:p>
-        </p:txBody>
-      </p:sp>
-      <p:sp>
-        <p:nvSpPr>
-          <p:cNvPr id="24" name="TextBox 23"/>
-          <p:cNvSpPr txBox="1"/>
-          <p:nvPr/>
-        </p:nvSpPr>
-        <p:spPr>
-          <a:xfrm>
-            <a:off x="594360" y="5681167"/>
-            <a:ext cx="438912" cy="438912"/>
-          </a:xfrm>
-          <a:prstGeom prst="rect">
-            <a:avLst/>
-          </a:prstGeom>
-          <a:noFill/>
-        </p:spPr>
-        <p:txBody>
-          <a:bodyPr wrap="square" anchor="ctr"/>
-          <a:lstStyle/>
-          <a:p>
-            <a:pPr algn="ctr"/>
-            <a:r>
-              <a:rPr sz="1600" b="1" i="0">
-                <a:solidFill>
-                  <a:srgbClr val="FFFFFF"/>
-                </a:solidFill>
-                <a:latin typeface="Calibri"/>
-              </a:rPr>
-              <a:t>5</a:t>
-            </a:r>
-          </a:p>
-        </p:txBody>
-      </p:sp>
-      <p:sp>
-        <p:nvSpPr>
-          <p:cNvPr id="25" name="TextBox 24"/>
-          <p:cNvSpPr txBox="1"/>
-          <p:nvPr/>
-        </p:nvSpPr>
-        <p:spPr>
-          <a:xfrm>
-            <a:off x="1188720" y="5537606"/>
-            <a:ext cx="10271455" cy="744321"/>
-          </a:xfrm>
-          <a:prstGeom prst="rect">
-            <a:avLst/>
-          </a:prstGeom>
-          <a:noFill/>
-        </p:spPr>
-        <p:txBody>
-          <a:bodyPr wrap="square" anchor="ctr"/>
-          <a:lstStyle/>
-          <a:p>
-            <a:r>
-              <a:rPr sz="1500" b="1" i="0">
-                <a:solidFill>
-                  <a:srgbClr val="095292"/>
-                </a:solidFill>
-                <a:latin typeface="Calibri"/>
-              </a:rPr>
-              <a:t>20 s · El criterio de éxito</a:t>
-            </a:r>
-          </a:p>
-          <a:p>
-            <a:pPr>
-              <a:spcBef>
-                <a:spcPts val="200"/>
-              </a:spcBef>
-            </a:pPr>
-            <a:r>
-              <a:rPr sz="1300" b="0" i="0">
-                <a:solidFill>
-                  <a:srgbClr val="333333"/>
-                </a:solidFill>
-                <a:latin typeface="Calibri"/>
-              </a:rPr>
-              <a:t>De X a Y, medido así.</a:t>
-            </a:r>
-          </a:p>
-        </p:txBody>
-      </p:sp>
-      <p:sp>
-        <p:nvSpPr>
-          <p:cNvPr id="26" name="TextBox 25"/>
+              <a:rPr sz="2000" b="0" i="0">
+                <a:solidFill>
+                  <a:srgbClr val="333333"/>
+                </a:solidFill>
+                <a:latin typeface="Calibri"/>
+              </a:rPr>
+              <a:t>–   Un proyecto pequeño y verificable saca mejor nota que uno grandioso e imposible, y hay que decirlo hoy, antes de que se enamoren de la idea.</a:t>
+            </a:r>
+          </a:p>
+        </p:txBody>
+      </p:sp>
+      <p:sp>
+        <p:nvSpPr>
+          <p:cNvPr id="6" name="TextBox 5"/>
           <p:cNvSpPr txBox="1"/>
           <p:nvPr/>
         </p:nvSpPr>
@@ -10365,7 +8182,7 @@
                 </a:solidFill>
                 <a:latin typeface="Calibri"/>
               </a:rPr>
-              <a:t>Para la Clase 7</a:t>
+              <a:t>Cómo cerrar el corte: la ficha y la evaluación en la plataforma del curso (1/2)</a:t>
             </a:r>
           </a:p>
         </p:txBody>
@@ -10404,7 +8221,7 @@
                 </a:solidFill>
                 <a:latin typeface="Calibri"/>
               </a:rPr>
-              <a:t>–   </a:t>
+              <a:t>–   El reparto del tiempo de hoy es distinto al de las otras sesiones y hay que respetarlo: </a:t>
             </a:r>
             <a:r>
               <a:rPr sz="2000" b="1" i="0">
@@ -10413,7 +8230,7 @@
                 </a:solidFill>
                 <a:latin typeface="Calibri"/>
               </a:rPr>
-              <a:t>Trabajo dirigido:</a:t>
+              <a:t>teoría 25 minutos</a:t>
             </a:r>
             <a:r>
               <a:rPr sz="2000" b="0" i="0">
@@ -10422,7 +8239,7 @@
                 </a:solidFill>
                 <a:latin typeface="Calibri"/>
               </a:rPr>
-              <a:t> Identificación de problemáticas locales — cerrar la ficha con la cifra medida de verdad, no estimada, si esta semana alcanzan a contar o preguntar.</a:t>
+              <a:t>, no 45.</a:t>
             </a:r>
           </a:p>
           <a:p>
@@ -10438,43 +8255,7 @@
                 </a:solidFill>
                 <a:latin typeface="Calibri"/>
               </a:rPr>
-              <a:t>–   </a:t>
-            </a:r>
-            <a:r>
-              <a:rPr sz="2000" b="1" i="0">
-                <a:solidFill>
-                  <a:srgbClr val="333333"/>
-                </a:solidFill>
-                <a:latin typeface="Calibri"/>
-              </a:rPr>
-              <a:t>Trabajo independiente:</a:t>
-            </a:r>
-            <a:r>
-              <a:rPr sz="2000" b="0" i="0">
-                <a:solidFill>
-                  <a:srgbClr val="333333"/>
-                </a:solidFill>
-                <a:latin typeface="Calibri"/>
-              </a:rPr>
-              <a:t> Propuesta inicial de solución: media página con </a:t>
-            </a:r>
-            <a:r>
-              <a:rPr sz="2000" b="1" i="0">
-                <a:solidFill>
-                  <a:srgbClr val="333333"/>
-                </a:solidFill>
-                <a:latin typeface="Calibri"/>
-              </a:rPr>
-              <a:t>dos</a:t>
-            </a:r>
-            <a:r>
-              <a:rPr sz="2000" b="0" i="0">
-                <a:solidFill>
-                  <a:srgbClr val="333333"/>
-                </a:solidFill>
-                <a:latin typeface="Calibri"/>
-              </a:rPr>
-              <a:t> alternativas para atacar la causa elegida, sin decidir todavía cuál. Sin nombrar herramientas.</a:t>
+              <a:t>–   El corte se cierra con dos entregas y las dos ocurren en clase, así que quedarse largo en la explicación significa aplicar la evaluación con la gente apurada</a:t>
             </a:r>
           </a:p>
           <a:p>
@@ -10490,7 +8271,7 @@
                 </a:solidFill>
                 <a:latin typeface="Calibri"/>
               </a:rPr>
-              <a:t>–   </a:t>
+              <a:t>–   Que es la peor manera de evaluar. </a:t>
             </a:r>
             <a:r>
               <a:rPr sz="2000" b="1" i="0">
@@ -10499,7 +8280,7 @@
                 </a:solidFill>
                 <a:latin typeface="Calibri"/>
               </a:rPr>
-              <a:t>Clase 7 · Ciclo de vida de los proyectos de ingeniería</a:t>
+              <a:t>La ficha del problema</a:t>
             </a:r>
             <a:r>
               <a:rPr sz="2000" b="0" i="0">
@@ -10508,25 +8289,7 @@
                 </a:solidFill>
                 <a:latin typeface="Calibri"/>
               </a:rPr>
-              <a:t> — el </a:t>
-            </a:r>
-            <a:r>
-              <a:rPr sz="2000" b="1" i="0">
-                <a:solidFill>
-                  <a:srgbClr val="333333"/>
-                </a:solidFill>
-                <a:latin typeface="Calibri"/>
-              </a:rPr>
-              <a:t>ciclo de vida de los proyectos de ingeniería</a:t>
-            </a:r>
-            <a:r>
-              <a:rPr sz="2000" b="0" i="0">
-                <a:solidFill>
-                  <a:srgbClr val="333333"/>
-                </a:solidFill>
-                <a:latin typeface="Calibri"/>
-              </a:rPr>
-              <a:t>, aplicado a la ficha de hoy: qué se hace antes de construir y por qué el orden importa.</a:t>
+              <a:t> es el producto del corte 1 y conviene decirle al grupo exactamente qué peso tiene en el semestre: a partir de la sesión 7 todo se hace sobre ella.</a:t>
             </a:r>
           </a:p>
           <a:p>
@@ -10542,59 +8305,7 @@
                 </a:solidFill>
                 <a:latin typeface="Calibri"/>
               </a:rPr>
-              <a:t>–   </a:t>
-            </a:r>
-            <a:r>
-              <a:rPr sz="2000" b="1" i="0">
-                <a:solidFill>
-                  <a:srgbClr val="333333"/>
-                </a:solidFill>
-                <a:latin typeface="Calibri"/>
-              </a:rPr>
-              <a:t>Aviso:</a:t>
-            </a:r>
-            <a:r>
-              <a:rPr sz="2000" b="0" i="0">
-                <a:solidFill>
-                  <a:srgbClr val="333333"/>
-                </a:solidFill>
-                <a:latin typeface="Calibri"/>
-              </a:rPr>
-              <a:t> Arranca el corte 2. La ficha del problema queda como referencia fija: llévenla al documento del equipo con el título «Ficha del problema — versión final del corte 1», porque se va a citar en todas las sesiones que siguen.</a:t>
-            </a:r>
-          </a:p>
-          <a:p>
-            <a:pPr>
-              <a:spcAft>
-                <a:spcPts val="800"/>
-              </a:spcAft>
-            </a:pPr>
-            <a:r>
-              <a:rPr sz="2000" b="0" i="0">
-                <a:solidFill>
-                  <a:srgbClr val="333333"/>
-                </a:solidFill>
-                <a:latin typeface="Calibri"/>
-              </a:rPr>
-              <a:t>–   </a:t>
-            </a:r>
-            <a:r>
-              <a:rPr sz="2000" b="1" i="0">
-                <a:solidFill>
-                  <a:srgbClr val="333333"/>
-                </a:solidFill>
-                <a:latin typeface="Calibri"/>
-              </a:rPr>
-              <a:t>Antes de salir:</a:t>
-            </a:r>
-            <a:r>
-              <a:rPr sz="2000" b="0" i="0">
-                <a:solidFill>
-                  <a:srgbClr val="333333"/>
-                </a:solidFill>
-                <a:latin typeface="Calibri"/>
-              </a:rPr>
-              <a:t> el enlace del documento del equipo en el chat, con permiso de lectura para el docente, y el nombre del vocero de hoy.</a:t>
+              <a:t>–   El ciclo de vida de la sesión 7 se aplica a ese problema; el prototipo de las sesiones 10 y 11 resuelve ese problema; la evaluación de impacto de la Clase 13 evalúa esa solución; el informe final de la Clase 16 compara contra esa línea base.</a:t>
             </a:r>
           </a:p>
         </p:txBody>
@@ -10643,6 +8354,3001 @@
 </file>
 
 <file path=ppt/slides/slide23.xml><?xml version="1.0" encoding="utf-8"?>
+<p:sld xmlns:a="http://schemas.openxmlformats.org/drawingml/2006/main" xmlns:p="http://schemas.openxmlformats.org/presentationml/2006/main" xmlns:r="http://schemas.openxmlformats.org/officeDocument/2006/relationships">
+  <p:cSld>
+    <p:bg>
+      <p:bgPr>
+        <a:solidFill>
+          <a:srgbClr val="FFFFFF"/>
+        </a:solidFill>
+        <a:effectLst/>
+      </p:bgPr>
+    </p:bg>
+    <p:spTree>
+      <p:nvGrpSpPr>
+        <p:cNvPr id="1" name=""/>
+        <p:cNvGrpSpPr/>
+        <p:nvPr/>
+      </p:nvGrpSpPr>
+      <p:grpSpPr/>
+      <p:sp>
+        <p:nvSpPr>
+          <p:cNvPr id="2" name="Rectangle 1"/>
+          <p:cNvSpPr/>
+          <p:nvPr/>
+        </p:nvSpPr>
+        <p:spPr>
+          <a:xfrm>
+            <a:off x="0" y="0"/>
+            <a:ext cx="12191695" cy="960120"/>
+          </a:xfrm>
+          <a:prstGeom prst="rect">
+            <a:avLst/>
+          </a:prstGeom>
+          <a:solidFill>
+            <a:srgbClr val="095292"/>
+          </a:solidFill>
+          <a:ln>
+            <a:noFill/>
+          </a:ln>
+        </p:spPr>
+        <p:style>
+          <a:lnRef idx="1">
+            <a:schemeClr val="accent1"/>
+          </a:lnRef>
+          <a:fillRef idx="3">
+            <a:schemeClr val="accent1"/>
+          </a:fillRef>
+          <a:effectRef idx="2">
+            <a:schemeClr val="accent1"/>
+          </a:effectRef>
+          <a:fontRef idx="minor">
+            <a:schemeClr val="lt1"/>
+          </a:fontRef>
+        </p:style>
+        <p:txBody>
+          <a:bodyPr rtlCol="0" anchor="ctr"/>
+          <a:lstStyle/>
+          <a:p>
+            <a:pPr algn="ctr"/>
+          </a:p>
+        </p:txBody>
+      </p:sp>
+      <p:sp>
+        <p:nvSpPr>
+          <p:cNvPr id="3" name="Rectangle 2"/>
+          <p:cNvSpPr/>
+          <p:nvPr/>
+        </p:nvSpPr>
+        <p:spPr>
+          <a:xfrm>
+            <a:off x="0" y="960120"/>
+            <a:ext cx="12191695" cy="41148"/>
+          </a:xfrm>
+          <a:prstGeom prst="rect">
+            <a:avLst/>
+          </a:prstGeom>
+          <a:solidFill>
+            <a:srgbClr val="FFD000"/>
+          </a:solidFill>
+          <a:ln>
+            <a:noFill/>
+          </a:ln>
+        </p:spPr>
+        <p:style>
+          <a:lnRef idx="1">
+            <a:schemeClr val="accent1"/>
+          </a:lnRef>
+          <a:fillRef idx="3">
+            <a:schemeClr val="accent1"/>
+          </a:fillRef>
+          <a:effectRef idx="2">
+            <a:schemeClr val="accent1"/>
+          </a:effectRef>
+          <a:fontRef idx="minor">
+            <a:schemeClr val="lt1"/>
+          </a:fontRef>
+        </p:style>
+        <p:txBody>
+          <a:bodyPr rtlCol="0" anchor="ctr"/>
+          <a:lstStyle/>
+          <a:p>
+            <a:pPr algn="ctr"/>
+          </a:p>
+        </p:txBody>
+      </p:sp>
+      <p:sp>
+        <p:nvSpPr>
+          <p:cNvPr id="4" name="TextBox 3"/>
+          <p:cNvSpPr txBox="1"/>
+          <p:nvPr/>
+        </p:nvSpPr>
+        <p:spPr>
+          <a:xfrm>
+            <a:off x="457200" y="164592"/>
+            <a:ext cx="11277295" cy="502920"/>
+          </a:xfrm>
+          <a:prstGeom prst="rect">
+            <a:avLst/>
+          </a:prstGeom>
+          <a:noFill/>
+        </p:spPr>
+        <p:txBody>
+          <a:bodyPr wrap="square">
+            <a:spAutoFit/>
+          </a:bodyPr>
+          <a:lstStyle/>
+          <a:p>
+            <a:r>
+              <a:rPr sz="2600" b="1" i="0">
+                <a:solidFill>
+                  <a:srgbClr val="FFFFFF"/>
+                </a:solidFill>
+                <a:latin typeface="Calibri"/>
+              </a:rPr>
+              <a:t>Cómo cerrar el corte: la ficha y la evaluación en la plataforma del curso (2/2)</a:t>
+            </a:r>
+          </a:p>
+        </p:txBody>
+      </p:sp>
+      <p:sp>
+        <p:nvSpPr>
+          <p:cNvPr id="5" name="TextBox 4"/>
+          <p:cNvSpPr txBox="1"/>
+          <p:nvPr/>
+        </p:nvSpPr>
+        <p:spPr>
+          <a:xfrm>
+            <a:off x="457200" y="1170432"/>
+            <a:ext cx="11277295" cy="5230368"/>
+          </a:xfrm>
+          <a:prstGeom prst="rect">
+            <a:avLst/>
+          </a:prstGeom>
+          <a:noFill/>
+        </p:spPr>
+        <p:txBody>
+          <a:bodyPr wrap="square">
+            <a:spAutoFit/>
+          </a:bodyPr>
+          <a:lstStyle/>
+          <a:p>
+            <a:pPr>
+              <a:spcAft>
+                <a:spcPts val="800"/>
+              </a:spcAft>
+            </a:pPr>
+            <a:r>
+              <a:rPr sz="2000" b="0" i="0">
+                <a:solidFill>
+                  <a:srgbClr val="333333"/>
+                </a:solidFill>
+                <a:latin typeface="Calibri"/>
+              </a:rPr>
+              <a:t>–   Un equipo que hoy escriba una ficha vaga va a arrastrar el problema diez sesiones. </a:t>
+            </a:r>
+            <a:r>
+              <a:rPr sz="2000" b="1" i="0">
+                <a:solidFill>
+                  <a:srgbClr val="333333"/>
+                </a:solidFill>
+                <a:latin typeface="Calibri"/>
+              </a:rPr>
+              <a:t>La evaluación de corte</a:t>
+            </a:r>
+            <a:r>
+              <a:rPr sz="2000" b="0" i="0">
+                <a:solidFill>
+                  <a:srgbClr val="333333"/>
+                </a:solidFill>
+                <a:latin typeface="Calibri"/>
+              </a:rPr>
+              <a:t> son los últimos veinte minutos, en la plataforma del curso, individual, y cubre las sesiones 1 a 6.</a:t>
+            </a:r>
+          </a:p>
+          <a:p>
+            <a:pPr>
+              <a:spcAft>
+                <a:spcPts val="800"/>
+              </a:spcAft>
+            </a:pPr>
+            <a:r>
+              <a:rPr sz="2000" b="0" i="0">
+                <a:solidFill>
+                  <a:srgbClr val="333333"/>
+                </a:solidFill>
+                <a:latin typeface="Calibri"/>
+              </a:rPr>
+              <a:t>–   Tres cosas operativas: el enlace va en el chat de la reunión, hay que decir explícitamente que </a:t>
+            </a:r>
+            <a:r>
+              <a:rPr sz="2000" b="1" i="0">
+                <a:solidFill>
+                  <a:srgbClr val="333333"/>
+                </a:solidFill>
+                <a:latin typeface="Calibri"/>
+              </a:rPr>
+              <a:t>la plataforma del curso no es una plataforma oficial de la universidad</a:t>
+            </a:r>
+            <a:r>
+              <a:rPr sz="2000" b="0" i="0">
+                <a:solidFill>
+                  <a:srgbClr val="333333"/>
+                </a:solidFill>
+                <a:latin typeface="Calibri"/>
+              </a:rPr>
+              <a:t> sino la herramienta que usa este curso</a:t>
+            </a:r>
+          </a:p>
+          <a:p>
+            <a:pPr>
+              <a:spcAft>
+                <a:spcPts val="800"/>
+              </a:spcAft>
+            </a:pPr>
+            <a:r>
+              <a:rPr sz="2000" b="0" i="0">
+                <a:solidFill>
+                  <a:srgbClr val="333333"/>
+                </a:solidFill>
+                <a:latin typeface="Calibri"/>
+              </a:rPr>
+              <a:t>–   Y hay que pedir que cualquier problema para abrirlo se avise </a:t>
+            </a:r>
+            <a:r>
+              <a:rPr sz="2000" b="1" i="0">
+                <a:solidFill>
+                  <a:srgbClr val="333333"/>
+                </a:solidFill>
+                <a:latin typeface="Calibri"/>
+              </a:rPr>
+              <a:t>en el chat, en el momento</a:t>
+            </a:r>
+            <a:r>
+              <a:rPr sz="2000" b="0" i="0">
+                <a:solidFill>
+                  <a:srgbClr val="333333"/>
+                </a:solidFill>
+                <a:latin typeface="Calibri"/>
+              </a:rPr>
+              <a:t>, no al día siguiente por correo.</a:t>
+            </a:r>
+          </a:p>
+          <a:p>
+            <a:pPr>
+              <a:spcAft>
+                <a:spcPts val="800"/>
+              </a:spcAft>
+            </a:pPr>
+            <a:r>
+              <a:rPr sz="2000" b="0" i="0">
+                <a:solidFill>
+                  <a:srgbClr val="333333"/>
+                </a:solidFill>
+                <a:latin typeface="Calibri"/>
+              </a:rPr>
+              <a:t>–   Una última recomendación de manejo del grupo: no anuncie la evaluación al final de las exposiciones, anúnciela en el minuto uno, cuando presente la agenda.</a:t>
+            </a:r>
+          </a:p>
+        </p:txBody>
+      </p:sp>
+      <p:sp>
+        <p:nvSpPr>
+          <p:cNvPr id="6" name="TextBox 5"/>
+          <p:cNvSpPr txBox="1"/>
+          <p:nvPr/>
+        </p:nvSpPr>
+        <p:spPr>
+          <a:xfrm>
+            <a:off x="11185855" y="6473952"/>
+            <a:ext cx="640080" cy="274320"/>
+          </a:xfrm>
+          <a:prstGeom prst="rect">
+            <a:avLst/>
+          </a:prstGeom>
+          <a:noFill/>
+        </p:spPr>
+        <p:txBody>
+          <a:bodyPr wrap="square">
+            <a:spAutoFit/>
+          </a:bodyPr>
+          <a:lstStyle/>
+          <a:p>
+            <a:pPr algn="r"/>
+            <a:r>
+              <a:rPr sz="1100" b="0" i="0">
+                <a:solidFill>
+                  <a:srgbClr val="666666"/>
+                </a:solidFill>
+                <a:latin typeface="Calibri"/>
+              </a:rPr>
+              <a:t>23</a:t>
+            </a:r>
+          </a:p>
+        </p:txBody>
+      </p:sp>
+    </p:spTree>
+  </p:cSld>
+  <p:clrMapOvr>
+    <a:masterClrMapping/>
+  </p:clrMapOvr>
+</p:sld>
+</file>
+
+<file path=ppt/slides/slide24.xml><?xml version="1.0" encoding="utf-8"?>
+<p:sld xmlns:a="http://schemas.openxmlformats.org/drawingml/2006/main" xmlns:p="http://schemas.openxmlformats.org/presentationml/2006/main" xmlns:r="http://schemas.openxmlformats.org/officeDocument/2006/relationships">
+  <p:cSld>
+    <p:bg>
+      <p:bgPr>
+        <a:solidFill>
+          <a:srgbClr val="FFFFFF"/>
+        </a:solidFill>
+        <a:effectLst/>
+      </p:bgPr>
+    </p:bg>
+    <p:spTree>
+      <p:nvGrpSpPr>
+        <p:cNvPr id="1" name=""/>
+        <p:cNvGrpSpPr/>
+        <p:nvPr/>
+      </p:nvGrpSpPr>
+      <p:grpSpPr/>
+      <p:sp>
+        <p:nvSpPr>
+          <p:cNvPr id="2" name="Rectangle 1"/>
+          <p:cNvSpPr/>
+          <p:nvPr/>
+        </p:nvSpPr>
+        <p:spPr>
+          <a:xfrm>
+            <a:off x="0" y="0"/>
+            <a:ext cx="12191695" cy="1170432"/>
+          </a:xfrm>
+          <a:prstGeom prst="rect">
+            <a:avLst/>
+          </a:prstGeom>
+          <a:solidFill>
+            <a:srgbClr val="095292"/>
+          </a:solidFill>
+          <a:ln>
+            <a:noFill/>
+          </a:ln>
+        </p:spPr>
+        <p:style>
+          <a:lnRef idx="1">
+            <a:schemeClr val="accent1"/>
+          </a:lnRef>
+          <a:fillRef idx="3">
+            <a:schemeClr val="accent1"/>
+          </a:fillRef>
+          <a:effectRef idx="2">
+            <a:schemeClr val="accent1"/>
+          </a:effectRef>
+          <a:fontRef idx="minor">
+            <a:schemeClr val="lt1"/>
+          </a:fontRef>
+        </p:style>
+        <p:txBody>
+          <a:bodyPr rtlCol="0" anchor="ctr"/>
+          <a:lstStyle/>
+          <a:p>
+            <a:pPr algn="ctr"/>
+          </a:p>
+        </p:txBody>
+      </p:sp>
+      <p:sp>
+        <p:nvSpPr>
+          <p:cNvPr id="3" name="Rectangle 2"/>
+          <p:cNvSpPr/>
+          <p:nvPr/>
+        </p:nvSpPr>
+        <p:spPr>
+          <a:xfrm>
+            <a:off x="0" y="1170432"/>
+            <a:ext cx="12191695" cy="41148"/>
+          </a:xfrm>
+          <a:prstGeom prst="rect">
+            <a:avLst/>
+          </a:prstGeom>
+          <a:solidFill>
+            <a:srgbClr val="FFD000"/>
+          </a:solidFill>
+          <a:ln>
+            <a:noFill/>
+          </a:ln>
+        </p:spPr>
+        <p:style>
+          <a:lnRef idx="1">
+            <a:schemeClr val="accent1"/>
+          </a:lnRef>
+          <a:fillRef idx="3">
+            <a:schemeClr val="accent1"/>
+          </a:fillRef>
+          <a:effectRef idx="2">
+            <a:schemeClr val="accent1"/>
+          </a:effectRef>
+          <a:fontRef idx="minor">
+            <a:schemeClr val="lt1"/>
+          </a:fontRef>
+        </p:style>
+        <p:txBody>
+          <a:bodyPr rtlCol="0" anchor="ctr"/>
+          <a:lstStyle/>
+          <a:p>
+            <a:pPr algn="ctr"/>
+          </a:p>
+        </p:txBody>
+      </p:sp>
+      <p:sp>
+        <p:nvSpPr>
+          <p:cNvPr id="4" name="TextBox 3"/>
+          <p:cNvSpPr txBox="1"/>
+          <p:nvPr/>
+        </p:nvSpPr>
+        <p:spPr>
+          <a:xfrm>
+            <a:off x="457200" y="164592"/>
+            <a:ext cx="11277295" cy="384048"/>
+          </a:xfrm>
+          <a:prstGeom prst="rect">
+            <a:avLst/>
+          </a:prstGeom>
+          <a:noFill/>
+        </p:spPr>
+        <p:txBody>
+          <a:bodyPr wrap="square">
+            <a:spAutoFit/>
+          </a:bodyPr>
+          <a:lstStyle/>
+          <a:p>
+            <a:r>
+              <a:rPr sz="2600" b="1" i="0">
+                <a:solidFill>
+                  <a:srgbClr val="FFFFFF"/>
+                </a:solidFill>
+                <a:latin typeface="Calibri"/>
+              </a:rPr>
+              <a:t>Taller de hoy: Ficha del problema del proyecto</a:t>
+            </a:r>
+          </a:p>
+        </p:txBody>
+      </p:sp>
+      <p:sp>
+        <p:nvSpPr>
+          <p:cNvPr id="5" name="TextBox 4"/>
+          <p:cNvSpPr txBox="1"/>
+          <p:nvPr/>
+        </p:nvSpPr>
+        <p:spPr>
+          <a:xfrm>
+            <a:off x="457200" y="566928"/>
+            <a:ext cx="11277295" cy="411480"/>
+          </a:xfrm>
+          <a:prstGeom prst="rect">
+            <a:avLst/>
+          </a:prstGeom>
+          <a:noFill/>
+        </p:spPr>
+        <p:txBody>
+          <a:bodyPr wrap="square">
+            <a:spAutoFit/>
+          </a:bodyPr>
+          <a:lstStyle/>
+          <a:p>
+            <a:r>
+              <a:rPr sz="1400" b="0" i="0">
+                <a:solidFill>
+                  <a:srgbClr val="B8D8EE"/>
+                </a:solidFill>
+                <a:latin typeface="Calibri"/>
+              </a:rPr>
+              <a:t>17 min en equipos · cada equipo, su propio problema · ficha del problema + árbol de causas</a:t>
+            </a:r>
+          </a:p>
+        </p:txBody>
+      </p:sp>
+      <p:sp>
+        <p:nvSpPr>
+          <p:cNvPr id="6" name="Rounded Rectangle 5"/>
+          <p:cNvSpPr/>
+          <p:nvPr/>
+        </p:nvSpPr>
+        <p:spPr>
+          <a:xfrm>
+            <a:off x="457200" y="1472184"/>
+            <a:ext cx="11277295" cy="566928"/>
+          </a:xfrm>
+          <a:prstGeom prst="roundRect">
+            <a:avLst>
+              <a:gd name="adj" fmla="val 12000"/>
+            </a:avLst>
+          </a:prstGeom>
+          <a:solidFill>
+            <a:srgbClr val="F2F2F2"/>
+          </a:solidFill>
+          <a:ln>
+            <a:noFill/>
+          </a:ln>
+        </p:spPr>
+        <p:style>
+          <a:lnRef idx="1">
+            <a:schemeClr val="accent1"/>
+          </a:lnRef>
+          <a:fillRef idx="3">
+            <a:schemeClr val="accent1"/>
+          </a:fillRef>
+          <a:effectRef idx="2">
+            <a:schemeClr val="accent1"/>
+          </a:effectRef>
+          <a:fontRef idx="minor">
+            <a:schemeClr val="lt1"/>
+          </a:fontRef>
+        </p:style>
+        <p:txBody>
+          <a:bodyPr rtlCol="0" anchor="ctr"/>
+          <a:lstStyle/>
+          <a:p>
+            <a:pPr algn="ctr"/>
+          </a:p>
+        </p:txBody>
+      </p:sp>
+      <p:sp>
+        <p:nvSpPr>
+          <p:cNvPr id="7" name="Rectangle 6"/>
+          <p:cNvSpPr/>
+          <p:nvPr/>
+        </p:nvSpPr>
+        <p:spPr>
+          <a:xfrm>
+            <a:off x="640080" y="1618487"/>
+            <a:ext cx="274320" cy="274320"/>
+          </a:xfrm>
+          <a:prstGeom prst="rect">
+            <a:avLst/>
+          </a:prstGeom>
+          <a:solidFill>
+            <a:srgbClr val="FFFFFF"/>
+          </a:solidFill>
+          <a:ln>
+            <a:solidFill>
+              <a:srgbClr val="333333"/>
+            </a:solidFill>
+          </a:ln>
+        </p:spPr>
+        <p:style>
+          <a:lnRef idx="1">
+            <a:schemeClr val="accent1"/>
+          </a:lnRef>
+          <a:fillRef idx="3">
+            <a:schemeClr val="accent1"/>
+          </a:fillRef>
+          <a:effectRef idx="2">
+            <a:schemeClr val="accent1"/>
+          </a:effectRef>
+          <a:fontRef idx="minor">
+            <a:schemeClr val="lt1"/>
+          </a:fontRef>
+        </p:style>
+        <p:txBody>
+          <a:bodyPr rtlCol="0" anchor="ctr"/>
+          <a:lstStyle/>
+          <a:p>
+            <a:pPr algn="ctr"/>
+          </a:p>
+        </p:txBody>
+      </p:sp>
+      <p:sp>
+        <p:nvSpPr>
+          <p:cNvPr id="8" name="Rectangle 7"/>
+          <p:cNvSpPr/>
+          <p:nvPr/>
+        </p:nvSpPr>
+        <p:spPr>
+          <a:xfrm>
+            <a:off x="640080" y="1618487"/>
+            <a:ext cx="73152" cy="274320"/>
+          </a:xfrm>
+          <a:prstGeom prst="rect">
+            <a:avLst/>
+          </a:prstGeom>
+          <a:solidFill>
+            <a:srgbClr val="269CCB"/>
+          </a:solidFill>
+          <a:ln>
+            <a:noFill/>
+          </a:ln>
+        </p:spPr>
+        <p:style>
+          <a:lnRef idx="1">
+            <a:schemeClr val="accent1"/>
+          </a:lnRef>
+          <a:fillRef idx="3">
+            <a:schemeClr val="accent1"/>
+          </a:fillRef>
+          <a:effectRef idx="2">
+            <a:schemeClr val="accent1"/>
+          </a:effectRef>
+          <a:fontRef idx="minor">
+            <a:schemeClr val="lt1"/>
+          </a:fontRef>
+        </p:style>
+        <p:txBody>
+          <a:bodyPr rtlCol="0" anchor="ctr"/>
+          <a:lstStyle/>
+          <a:p>
+            <a:pPr algn="ctr"/>
+          </a:p>
+        </p:txBody>
+      </p:sp>
+      <p:sp>
+        <p:nvSpPr>
+          <p:cNvPr id="9" name="TextBox 8"/>
+          <p:cNvSpPr txBox="1"/>
+          <p:nvPr/>
+        </p:nvSpPr>
+        <p:spPr>
+          <a:xfrm>
+            <a:off x="1097280" y="1563624"/>
+            <a:ext cx="10362895" cy="402336"/>
+          </a:xfrm>
+          <a:prstGeom prst="rect">
+            <a:avLst/>
+          </a:prstGeom>
+          <a:noFill/>
+        </p:spPr>
+        <p:txBody>
+          <a:bodyPr wrap="square" anchor="ctr"/>
+          <a:lstStyle/>
+          <a:p>
+            <a:r>
+              <a:rPr sz="1500" b="1" i="0">
+                <a:solidFill>
+                  <a:srgbClr val="333333"/>
+                </a:solidFill>
+                <a:latin typeface="Calibri"/>
+              </a:rPr>
+              <a:t>EL PROBLEMA EN UNA FRASE</a:t>
+            </a:r>
+            <a:r>
+              <a:rPr sz="1500" b="0" i="0">
+                <a:solidFill>
+                  <a:srgbClr val="333333"/>
+                </a:solidFill>
+                <a:latin typeface="Calibri"/>
+              </a:rPr>
+              <a:t> — Una sola frase con la fórmula: </a:t>
+            </a:r>
+            <a:r>
+              <a:rPr sz="1500" b="1" i="0">
+                <a:solidFill>
+                  <a:srgbClr val="333333"/>
+                </a:solidFill>
+                <a:latin typeface="Calibri"/>
+              </a:rPr>
+              <a:t>a quién le pasa qué, con qué consecuencia</a:t>
+            </a:r>
+            <a:r>
+              <a:rPr sz="1500" b="0" i="0">
+                <a:solidFill>
+                  <a:srgbClr val="333333"/>
+                </a:solidFill>
+                <a:latin typeface="Calibri"/>
+              </a:rPr>
+              <a:t>. Sin mencionar ninguna tecnología ni ninguna solución.</a:t>
+            </a:r>
+          </a:p>
+        </p:txBody>
+      </p:sp>
+      <p:sp>
+        <p:nvSpPr>
+          <p:cNvPr id="10" name="Rounded Rectangle 9"/>
+          <p:cNvSpPr/>
+          <p:nvPr/>
+        </p:nvSpPr>
+        <p:spPr>
+          <a:xfrm>
+            <a:off x="457200" y="2148839"/>
+            <a:ext cx="11277295" cy="566928"/>
+          </a:xfrm>
+          <a:prstGeom prst="roundRect">
+            <a:avLst>
+              <a:gd name="adj" fmla="val 12000"/>
+            </a:avLst>
+          </a:prstGeom>
+          <a:solidFill>
+            <a:srgbClr val="F2F2F2"/>
+          </a:solidFill>
+          <a:ln>
+            <a:noFill/>
+          </a:ln>
+        </p:spPr>
+        <p:style>
+          <a:lnRef idx="1">
+            <a:schemeClr val="accent1"/>
+          </a:lnRef>
+          <a:fillRef idx="3">
+            <a:schemeClr val="accent1"/>
+          </a:fillRef>
+          <a:effectRef idx="2">
+            <a:schemeClr val="accent1"/>
+          </a:effectRef>
+          <a:fontRef idx="minor">
+            <a:schemeClr val="lt1"/>
+          </a:fontRef>
+        </p:style>
+        <p:txBody>
+          <a:bodyPr rtlCol="0" anchor="ctr"/>
+          <a:lstStyle/>
+          <a:p>
+            <a:pPr algn="ctr"/>
+          </a:p>
+        </p:txBody>
+      </p:sp>
+      <p:sp>
+        <p:nvSpPr>
+          <p:cNvPr id="11" name="Rectangle 10"/>
+          <p:cNvSpPr/>
+          <p:nvPr/>
+        </p:nvSpPr>
+        <p:spPr>
+          <a:xfrm>
+            <a:off x="640080" y="2295144"/>
+            <a:ext cx="274320" cy="274320"/>
+          </a:xfrm>
+          <a:prstGeom prst="rect">
+            <a:avLst/>
+          </a:prstGeom>
+          <a:solidFill>
+            <a:srgbClr val="FFFFFF"/>
+          </a:solidFill>
+          <a:ln>
+            <a:solidFill>
+              <a:srgbClr val="333333"/>
+            </a:solidFill>
+          </a:ln>
+        </p:spPr>
+        <p:style>
+          <a:lnRef idx="1">
+            <a:schemeClr val="accent1"/>
+          </a:lnRef>
+          <a:fillRef idx="3">
+            <a:schemeClr val="accent1"/>
+          </a:fillRef>
+          <a:effectRef idx="2">
+            <a:schemeClr val="accent1"/>
+          </a:effectRef>
+          <a:fontRef idx="minor">
+            <a:schemeClr val="lt1"/>
+          </a:fontRef>
+        </p:style>
+        <p:txBody>
+          <a:bodyPr rtlCol="0" anchor="ctr"/>
+          <a:lstStyle/>
+          <a:p>
+            <a:pPr algn="ctr"/>
+          </a:p>
+        </p:txBody>
+      </p:sp>
+      <p:sp>
+        <p:nvSpPr>
+          <p:cNvPr id="12" name="Rectangle 11"/>
+          <p:cNvSpPr/>
+          <p:nvPr/>
+        </p:nvSpPr>
+        <p:spPr>
+          <a:xfrm>
+            <a:off x="640080" y="2295144"/>
+            <a:ext cx="73152" cy="274320"/>
+          </a:xfrm>
+          <a:prstGeom prst="rect">
+            <a:avLst/>
+          </a:prstGeom>
+          <a:solidFill>
+            <a:srgbClr val="269CCB"/>
+          </a:solidFill>
+          <a:ln>
+            <a:noFill/>
+          </a:ln>
+        </p:spPr>
+        <p:style>
+          <a:lnRef idx="1">
+            <a:schemeClr val="accent1"/>
+          </a:lnRef>
+          <a:fillRef idx="3">
+            <a:schemeClr val="accent1"/>
+          </a:fillRef>
+          <a:effectRef idx="2">
+            <a:schemeClr val="accent1"/>
+          </a:effectRef>
+          <a:fontRef idx="minor">
+            <a:schemeClr val="lt1"/>
+          </a:fontRef>
+        </p:style>
+        <p:txBody>
+          <a:bodyPr rtlCol="0" anchor="ctr"/>
+          <a:lstStyle/>
+          <a:p>
+            <a:pPr algn="ctr"/>
+          </a:p>
+        </p:txBody>
+      </p:sp>
+      <p:sp>
+        <p:nvSpPr>
+          <p:cNvPr id="13" name="TextBox 12"/>
+          <p:cNvSpPr txBox="1"/>
+          <p:nvPr/>
+        </p:nvSpPr>
+        <p:spPr>
+          <a:xfrm>
+            <a:off x="1097280" y="2240279"/>
+            <a:ext cx="10362895" cy="402336"/>
+          </a:xfrm>
+          <a:prstGeom prst="rect">
+            <a:avLst/>
+          </a:prstGeom>
+          <a:noFill/>
+        </p:spPr>
+        <p:txBody>
+          <a:bodyPr wrap="square" anchor="ctr"/>
+          <a:lstStyle/>
+          <a:p>
+            <a:r>
+              <a:rPr sz="1500" b="1" i="0">
+                <a:solidFill>
+                  <a:srgbClr val="333333"/>
+                </a:solidFill>
+                <a:latin typeface="Calibri"/>
+              </a:rPr>
+              <a:t>LA LÍNEA BASE</a:t>
+            </a:r>
+            <a:r>
+              <a:rPr sz="1500" b="0" i="0">
+                <a:solidFill>
+                  <a:srgbClr val="333333"/>
+                </a:solidFill>
+                <a:latin typeface="Calibri"/>
+              </a:rPr>
+              <a:t> — Una cifra que describa el problema </a:t>
+            </a:r>
+            <a:r>
+              <a:rPr sz="1500" b="1" i="0">
+                <a:solidFill>
+                  <a:srgbClr val="333333"/>
+                </a:solidFill>
+                <a:latin typeface="Calibri"/>
+              </a:rPr>
+              <a:t>hoy</a:t>
+            </a:r>
+            <a:r>
+              <a:rPr sz="1500" b="0" i="0">
+                <a:solidFill>
+                  <a:srgbClr val="333333"/>
+                </a:solidFill>
+                <a:latin typeface="Calibri"/>
+              </a:rPr>
+              <a:t>, antes de que ustedes toquen nada, más </a:t>
+            </a:r>
+            <a:r>
+              <a:rPr sz="1500" b="1" i="0">
+                <a:solidFill>
+                  <a:srgbClr val="333333"/>
+                </a:solidFill>
+                <a:latin typeface="Calibri"/>
+              </a:rPr>
+              <a:t>cómo la obtuvieron</a:t>
+            </a:r>
+            <a:r>
+              <a:rPr sz="1500" b="0" i="0">
+                <a:solidFill>
+                  <a:srgbClr val="333333"/>
+                </a:solidFill>
+                <a:latin typeface="Calibri"/>
+              </a:rPr>
+              <a:t> y cuándo. Si es estimación, escriban «estimado».</a:t>
+            </a:r>
+          </a:p>
+        </p:txBody>
+      </p:sp>
+      <p:sp>
+        <p:nvSpPr>
+          <p:cNvPr id="14" name="Rounded Rectangle 13"/>
+          <p:cNvSpPr/>
+          <p:nvPr/>
+        </p:nvSpPr>
+        <p:spPr>
+          <a:xfrm>
+            <a:off x="457200" y="2825496"/>
+            <a:ext cx="11277295" cy="566928"/>
+          </a:xfrm>
+          <a:prstGeom prst="roundRect">
+            <a:avLst>
+              <a:gd name="adj" fmla="val 12000"/>
+            </a:avLst>
+          </a:prstGeom>
+          <a:solidFill>
+            <a:srgbClr val="F2F2F2"/>
+          </a:solidFill>
+          <a:ln>
+            <a:noFill/>
+          </a:ln>
+        </p:spPr>
+        <p:style>
+          <a:lnRef idx="1">
+            <a:schemeClr val="accent1"/>
+          </a:lnRef>
+          <a:fillRef idx="3">
+            <a:schemeClr val="accent1"/>
+          </a:fillRef>
+          <a:effectRef idx="2">
+            <a:schemeClr val="accent1"/>
+          </a:effectRef>
+          <a:fontRef idx="minor">
+            <a:schemeClr val="lt1"/>
+          </a:fontRef>
+        </p:style>
+        <p:txBody>
+          <a:bodyPr rtlCol="0" anchor="ctr"/>
+          <a:lstStyle/>
+          <a:p>
+            <a:pPr algn="ctr"/>
+          </a:p>
+        </p:txBody>
+      </p:sp>
+      <p:sp>
+        <p:nvSpPr>
+          <p:cNvPr id="15" name="Rectangle 14"/>
+          <p:cNvSpPr/>
+          <p:nvPr/>
+        </p:nvSpPr>
+        <p:spPr>
+          <a:xfrm>
+            <a:off x="640080" y="2971800"/>
+            <a:ext cx="274320" cy="274320"/>
+          </a:xfrm>
+          <a:prstGeom prst="rect">
+            <a:avLst/>
+          </a:prstGeom>
+          <a:solidFill>
+            <a:srgbClr val="FFFFFF"/>
+          </a:solidFill>
+          <a:ln>
+            <a:solidFill>
+              <a:srgbClr val="333333"/>
+            </a:solidFill>
+          </a:ln>
+        </p:spPr>
+        <p:style>
+          <a:lnRef idx="1">
+            <a:schemeClr val="accent1"/>
+          </a:lnRef>
+          <a:fillRef idx="3">
+            <a:schemeClr val="accent1"/>
+          </a:fillRef>
+          <a:effectRef idx="2">
+            <a:schemeClr val="accent1"/>
+          </a:effectRef>
+          <a:fontRef idx="minor">
+            <a:schemeClr val="lt1"/>
+          </a:fontRef>
+        </p:style>
+        <p:txBody>
+          <a:bodyPr rtlCol="0" anchor="ctr"/>
+          <a:lstStyle/>
+          <a:p>
+            <a:pPr algn="ctr"/>
+          </a:p>
+        </p:txBody>
+      </p:sp>
+      <p:sp>
+        <p:nvSpPr>
+          <p:cNvPr id="16" name="Rectangle 15"/>
+          <p:cNvSpPr/>
+          <p:nvPr/>
+        </p:nvSpPr>
+        <p:spPr>
+          <a:xfrm>
+            <a:off x="640080" y="2971800"/>
+            <a:ext cx="73152" cy="274320"/>
+          </a:xfrm>
+          <a:prstGeom prst="rect">
+            <a:avLst/>
+          </a:prstGeom>
+          <a:solidFill>
+            <a:srgbClr val="269CCB"/>
+          </a:solidFill>
+          <a:ln>
+            <a:noFill/>
+          </a:ln>
+        </p:spPr>
+        <p:style>
+          <a:lnRef idx="1">
+            <a:schemeClr val="accent1"/>
+          </a:lnRef>
+          <a:fillRef idx="3">
+            <a:schemeClr val="accent1"/>
+          </a:fillRef>
+          <a:effectRef idx="2">
+            <a:schemeClr val="accent1"/>
+          </a:effectRef>
+          <a:fontRef idx="minor">
+            <a:schemeClr val="lt1"/>
+          </a:fontRef>
+        </p:style>
+        <p:txBody>
+          <a:bodyPr rtlCol="0" anchor="ctr"/>
+          <a:lstStyle/>
+          <a:p>
+            <a:pPr algn="ctr"/>
+          </a:p>
+        </p:txBody>
+      </p:sp>
+      <p:sp>
+        <p:nvSpPr>
+          <p:cNvPr id="17" name="TextBox 16"/>
+          <p:cNvSpPr txBox="1"/>
+          <p:nvPr/>
+        </p:nvSpPr>
+        <p:spPr>
+          <a:xfrm>
+            <a:off x="1097280" y="2916936"/>
+            <a:ext cx="10362895" cy="402336"/>
+          </a:xfrm>
+          <a:prstGeom prst="rect">
+            <a:avLst/>
+          </a:prstGeom>
+          <a:noFill/>
+        </p:spPr>
+        <p:txBody>
+          <a:bodyPr wrap="square" anchor="ctr"/>
+          <a:lstStyle/>
+          <a:p>
+            <a:r>
+              <a:rPr sz="1500" b="1" i="0">
+                <a:solidFill>
+                  <a:srgbClr val="333333"/>
+                </a:solidFill>
+                <a:latin typeface="Calibri"/>
+              </a:rPr>
+              <a:t>EL ÁRBOL DE CAUSAS</a:t>
+            </a:r>
+            <a:r>
+              <a:rPr sz="1500" b="0" i="0">
+                <a:solidFill>
+                  <a:srgbClr val="333333"/>
+                </a:solidFill>
+                <a:latin typeface="Calibri"/>
+              </a:rPr>
+              <a:t> — En Excalidraw: el problema en el tronco, los efectos arriba, dos o tres causas directas abajo y el segundo nivel de cada una. Marquen con un símbolo las causas que </a:t>
+            </a:r>
+            <a:r>
+              <a:rPr sz="1500" b="1" i="0">
+                <a:solidFill>
+                  <a:srgbClr val="333333"/>
+                </a:solidFill>
+                <a:latin typeface="Calibri"/>
+              </a:rPr>
+              <a:t>no</a:t>
+            </a:r>
+            <a:r>
+              <a:rPr sz="1500" b="0" i="0">
+                <a:solidFill>
+                  <a:srgbClr val="333333"/>
+                </a:solidFill>
+                <a:latin typeface="Calibri"/>
+              </a:rPr>
+              <a:t> pueden cambiar (restricciones).</a:t>
+            </a:r>
+          </a:p>
+        </p:txBody>
+      </p:sp>
+      <p:sp>
+        <p:nvSpPr>
+          <p:cNvPr id="18" name="Rounded Rectangle 17"/>
+          <p:cNvSpPr/>
+          <p:nvPr/>
+        </p:nvSpPr>
+        <p:spPr>
+          <a:xfrm>
+            <a:off x="457200" y="3502152"/>
+            <a:ext cx="11277295" cy="566928"/>
+          </a:xfrm>
+          <a:prstGeom prst="roundRect">
+            <a:avLst>
+              <a:gd name="adj" fmla="val 12000"/>
+            </a:avLst>
+          </a:prstGeom>
+          <a:solidFill>
+            <a:srgbClr val="F2F2F2"/>
+          </a:solidFill>
+          <a:ln>
+            <a:noFill/>
+          </a:ln>
+        </p:spPr>
+        <p:style>
+          <a:lnRef idx="1">
+            <a:schemeClr val="accent1"/>
+          </a:lnRef>
+          <a:fillRef idx="3">
+            <a:schemeClr val="accent1"/>
+          </a:fillRef>
+          <a:effectRef idx="2">
+            <a:schemeClr val="accent1"/>
+          </a:effectRef>
+          <a:fontRef idx="minor">
+            <a:schemeClr val="lt1"/>
+          </a:fontRef>
+        </p:style>
+        <p:txBody>
+          <a:bodyPr rtlCol="0" anchor="ctr"/>
+          <a:lstStyle/>
+          <a:p>
+            <a:pPr algn="ctr"/>
+          </a:p>
+        </p:txBody>
+      </p:sp>
+      <p:sp>
+        <p:nvSpPr>
+          <p:cNvPr id="19" name="Rectangle 18"/>
+          <p:cNvSpPr/>
+          <p:nvPr/>
+        </p:nvSpPr>
+        <p:spPr>
+          <a:xfrm>
+            <a:off x="640080" y="3648456"/>
+            <a:ext cx="274320" cy="274320"/>
+          </a:xfrm>
+          <a:prstGeom prst="rect">
+            <a:avLst/>
+          </a:prstGeom>
+          <a:solidFill>
+            <a:srgbClr val="FFFFFF"/>
+          </a:solidFill>
+          <a:ln>
+            <a:solidFill>
+              <a:srgbClr val="333333"/>
+            </a:solidFill>
+          </a:ln>
+        </p:spPr>
+        <p:style>
+          <a:lnRef idx="1">
+            <a:schemeClr val="accent1"/>
+          </a:lnRef>
+          <a:fillRef idx="3">
+            <a:schemeClr val="accent1"/>
+          </a:fillRef>
+          <a:effectRef idx="2">
+            <a:schemeClr val="accent1"/>
+          </a:effectRef>
+          <a:fontRef idx="minor">
+            <a:schemeClr val="lt1"/>
+          </a:fontRef>
+        </p:style>
+        <p:txBody>
+          <a:bodyPr rtlCol="0" anchor="ctr"/>
+          <a:lstStyle/>
+          <a:p>
+            <a:pPr algn="ctr"/>
+          </a:p>
+        </p:txBody>
+      </p:sp>
+      <p:sp>
+        <p:nvSpPr>
+          <p:cNvPr id="20" name="Rectangle 19"/>
+          <p:cNvSpPr/>
+          <p:nvPr/>
+        </p:nvSpPr>
+        <p:spPr>
+          <a:xfrm>
+            <a:off x="640080" y="3648456"/>
+            <a:ext cx="73152" cy="274320"/>
+          </a:xfrm>
+          <a:prstGeom prst="rect">
+            <a:avLst/>
+          </a:prstGeom>
+          <a:solidFill>
+            <a:srgbClr val="269CCB"/>
+          </a:solidFill>
+          <a:ln>
+            <a:noFill/>
+          </a:ln>
+        </p:spPr>
+        <p:style>
+          <a:lnRef idx="1">
+            <a:schemeClr val="accent1"/>
+          </a:lnRef>
+          <a:fillRef idx="3">
+            <a:schemeClr val="accent1"/>
+          </a:fillRef>
+          <a:effectRef idx="2">
+            <a:schemeClr val="accent1"/>
+          </a:effectRef>
+          <a:fontRef idx="minor">
+            <a:schemeClr val="lt1"/>
+          </a:fontRef>
+        </p:style>
+        <p:txBody>
+          <a:bodyPr rtlCol="0" anchor="ctr"/>
+          <a:lstStyle/>
+          <a:p>
+            <a:pPr algn="ctr"/>
+          </a:p>
+        </p:txBody>
+      </p:sp>
+      <p:sp>
+        <p:nvSpPr>
+          <p:cNvPr id="21" name="TextBox 20"/>
+          <p:cNvSpPr txBox="1"/>
+          <p:nvPr/>
+        </p:nvSpPr>
+        <p:spPr>
+          <a:xfrm>
+            <a:off x="1097280" y="3593592"/>
+            <a:ext cx="10362895" cy="402336"/>
+          </a:xfrm>
+          <a:prstGeom prst="rect">
+            <a:avLst/>
+          </a:prstGeom>
+          <a:noFill/>
+        </p:spPr>
+        <p:txBody>
+          <a:bodyPr wrap="square" anchor="ctr"/>
+          <a:lstStyle/>
+          <a:p>
+            <a:r>
+              <a:rPr sz="1500" b="1" i="0">
+                <a:solidFill>
+                  <a:srgbClr val="333333"/>
+                </a:solidFill>
+                <a:latin typeface="Calibri"/>
+              </a:rPr>
+              <a:t>ACTORES Y FRONTERA</a:t>
+            </a:r>
+            <a:r>
+              <a:rPr sz="1500" b="0" i="0">
+                <a:solidFill>
+                  <a:srgbClr val="333333"/>
+                </a:solidFill>
+                <a:latin typeface="Calibri"/>
+              </a:rPr>
+              <a:t> — Quién vive el problema (el dueño del problema), quién más se afecta sin ser usuario, y qué queda </a:t>
+            </a:r>
+            <a:r>
+              <a:rPr sz="1500" b="1" i="0">
+                <a:solidFill>
+                  <a:srgbClr val="333333"/>
+                </a:solidFill>
+                <a:latin typeface="Calibri"/>
+              </a:rPr>
+              <a:t>fuera</a:t>
+            </a:r>
+            <a:r>
+              <a:rPr sz="1500" b="0" i="0">
+                <a:solidFill>
+                  <a:srgbClr val="333333"/>
+                </a:solidFill>
+                <a:latin typeface="Calibri"/>
+              </a:rPr>
+              <a:t> de lo que ustedes van a abordar. Digan además </a:t>
+            </a:r>
+            <a:r>
+              <a:rPr sz="1500" b="1" i="0">
+                <a:solidFill>
+                  <a:srgbClr val="333333"/>
+                </a:solidFill>
+                <a:latin typeface="Calibri"/>
+              </a:rPr>
+              <a:t>a quién le pueden preguntar algo esta semana</a:t>
+            </a:r>
+            <a:r>
+              <a:rPr sz="1500" b="0" i="0">
+                <a:solidFill>
+                  <a:srgbClr val="333333"/>
+                </a:solidFill>
+                <a:latin typeface="Calibri"/>
+              </a:rPr>
+              <a:t>.</a:t>
+            </a:r>
+          </a:p>
+        </p:txBody>
+      </p:sp>
+      <p:sp>
+        <p:nvSpPr>
+          <p:cNvPr id="22" name="Rounded Rectangle 21"/>
+          <p:cNvSpPr/>
+          <p:nvPr/>
+        </p:nvSpPr>
+        <p:spPr>
+          <a:xfrm>
+            <a:off x="457200" y="4178808"/>
+            <a:ext cx="11277295" cy="566928"/>
+          </a:xfrm>
+          <a:prstGeom prst="roundRect">
+            <a:avLst>
+              <a:gd name="adj" fmla="val 12000"/>
+            </a:avLst>
+          </a:prstGeom>
+          <a:solidFill>
+            <a:srgbClr val="F2F2F2"/>
+          </a:solidFill>
+          <a:ln>
+            <a:noFill/>
+          </a:ln>
+        </p:spPr>
+        <p:style>
+          <a:lnRef idx="1">
+            <a:schemeClr val="accent1"/>
+          </a:lnRef>
+          <a:fillRef idx="3">
+            <a:schemeClr val="accent1"/>
+          </a:fillRef>
+          <a:effectRef idx="2">
+            <a:schemeClr val="accent1"/>
+          </a:effectRef>
+          <a:fontRef idx="minor">
+            <a:schemeClr val="lt1"/>
+          </a:fontRef>
+        </p:style>
+        <p:txBody>
+          <a:bodyPr rtlCol="0" anchor="ctr"/>
+          <a:lstStyle/>
+          <a:p>
+            <a:pPr algn="ctr"/>
+          </a:p>
+        </p:txBody>
+      </p:sp>
+      <p:sp>
+        <p:nvSpPr>
+          <p:cNvPr id="23" name="Rectangle 22"/>
+          <p:cNvSpPr/>
+          <p:nvPr/>
+        </p:nvSpPr>
+        <p:spPr>
+          <a:xfrm>
+            <a:off x="640080" y="4325112"/>
+            <a:ext cx="274320" cy="274320"/>
+          </a:xfrm>
+          <a:prstGeom prst="rect">
+            <a:avLst/>
+          </a:prstGeom>
+          <a:solidFill>
+            <a:srgbClr val="FFFFFF"/>
+          </a:solidFill>
+          <a:ln>
+            <a:solidFill>
+              <a:srgbClr val="333333"/>
+            </a:solidFill>
+          </a:ln>
+        </p:spPr>
+        <p:style>
+          <a:lnRef idx="1">
+            <a:schemeClr val="accent1"/>
+          </a:lnRef>
+          <a:fillRef idx="3">
+            <a:schemeClr val="accent1"/>
+          </a:fillRef>
+          <a:effectRef idx="2">
+            <a:schemeClr val="accent1"/>
+          </a:effectRef>
+          <a:fontRef idx="minor">
+            <a:schemeClr val="lt1"/>
+          </a:fontRef>
+        </p:style>
+        <p:txBody>
+          <a:bodyPr rtlCol="0" anchor="ctr"/>
+          <a:lstStyle/>
+          <a:p>
+            <a:pPr algn="ctr"/>
+          </a:p>
+        </p:txBody>
+      </p:sp>
+      <p:sp>
+        <p:nvSpPr>
+          <p:cNvPr id="24" name="Rectangle 23"/>
+          <p:cNvSpPr/>
+          <p:nvPr/>
+        </p:nvSpPr>
+        <p:spPr>
+          <a:xfrm>
+            <a:off x="640080" y="4325112"/>
+            <a:ext cx="73152" cy="274320"/>
+          </a:xfrm>
+          <a:prstGeom prst="rect">
+            <a:avLst/>
+          </a:prstGeom>
+          <a:solidFill>
+            <a:srgbClr val="269CCB"/>
+          </a:solidFill>
+          <a:ln>
+            <a:noFill/>
+          </a:ln>
+        </p:spPr>
+        <p:style>
+          <a:lnRef idx="1">
+            <a:schemeClr val="accent1"/>
+          </a:lnRef>
+          <a:fillRef idx="3">
+            <a:schemeClr val="accent1"/>
+          </a:fillRef>
+          <a:effectRef idx="2">
+            <a:schemeClr val="accent1"/>
+          </a:effectRef>
+          <a:fontRef idx="minor">
+            <a:schemeClr val="lt1"/>
+          </a:fontRef>
+        </p:style>
+        <p:txBody>
+          <a:bodyPr rtlCol="0" anchor="ctr"/>
+          <a:lstStyle/>
+          <a:p>
+            <a:pPr algn="ctr"/>
+          </a:p>
+        </p:txBody>
+      </p:sp>
+      <p:sp>
+        <p:nvSpPr>
+          <p:cNvPr id="25" name="TextBox 24"/>
+          <p:cNvSpPr txBox="1"/>
+          <p:nvPr/>
+        </p:nvSpPr>
+        <p:spPr>
+          <a:xfrm>
+            <a:off x="1097280" y="4270248"/>
+            <a:ext cx="10362895" cy="402336"/>
+          </a:xfrm>
+          <a:prstGeom prst="rect">
+            <a:avLst/>
+          </a:prstGeom>
+          <a:noFill/>
+        </p:spPr>
+        <p:txBody>
+          <a:bodyPr wrap="square" anchor="ctr"/>
+          <a:lstStyle/>
+          <a:p>
+            <a:r>
+              <a:rPr sz="1500" b="1" i="0">
+                <a:solidFill>
+                  <a:srgbClr val="333333"/>
+                </a:solidFill>
+                <a:latin typeface="Calibri"/>
+              </a:rPr>
+              <a:t>EL CRITERIO DE ÉXITO</a:t>
+            </a:r>
+            <a:r>
+              <a:rPr sz="1500" b="0" i="0">
+                <a:solidFill>
+                  <a:srgbClr val="333333"/>
+                </a:solidFill>
+                <a:latin typeface="Calibri"/>
+              </a:rPr>
+              <a:t> — Una frase de la forma: «el proyecto sirvió si &lt;la cifra de la línea base&gt; pasa de X a Y, medido así». Y la causa del árbol que van a atacar.</a:t>
+            </a:r>
+          </a:p>
+        </p:txBody>
+      </p:sp>
+      <p:sp>
+        <p:nvSpPr>
+          <p:cNvPr id="26" name="TextBox 25"/>
+          <p:cNvSpPr txBox="1"/>
+          <p:nvPr/>
+        </p:nvSpPr>
+        <p:spPr>
+          <a:xfrm>
+            <a:off x="11185855" y="6473952"/>
+            <a:ext cx="640080" cy="274320"/>
+          </a:xfrm>
+          <a:prstGeom prst="rect">
+            <a:avLst/>
+          </a:prstGeom>
+          <a:noFill/>
+        </p:spPr>
+        <p:txBody>
+          <a:bodyPr wrap="square">
+            <a:spAutoFit/>
+          </a:bodyPr>
+          <a:lstStyle/>
+          <a:p>
+            <a:pPr algn="r"/>
+            <a:r>
+              <a:rPr sz="1100" b="0" i="0">
+                <a:solidFill>
+                  <a:srgbClr val="666666"/>
+                </a:solidFill>
+                <a:latin typeface="Calibri"/>
+              </a:rPr>
+              <a:t>24</a:t>
+            </a:r>
+          </a:p>
+        </p:txBody>
+      </p:sp>
+    </p:spTree>
+  </p:cSld>
+  <p:clrMapOvr>
+    <a:masterClrMapping/>
+  </p:clrMapOvr>
+</p:sld>
+</file>
+
+<file path=ppt/slides/slide25.xml><?xml version="1.0" encoding="utf-8"?>
+<p:sld xmlns:a="http://schemas.openxmlformats.org/drawingml/2006/main" xmlns:p="http://schemas.openxmlformats.org/presentationml/2006/main" xmlns:r="http://schemas.openxmlformats.org/officeDocument/2006/relationships">
+  <p:cSld>
+    <p:bg>
+      <p:bgPr>
+        <a:solidFill>
+          <a:srgbClr val="FFFFFF"/>
+        </a:solidFill>
+        <a:effectLst/>
+      </p:bgPr>
+    </p:bg>
+    <p:spTree>
+      <p:nvGrpSpPr>
+        <p:cNvPr id="1" name=""/>
+        <p:cNvGrpSpPr/>
+        <p:nvPr/>
+      </p:nvGrpSpPr>
+      <p:grpSpPr/>
+      <p:sp>
+        <p:nvSpPr>
+          <p:cNvPr id="2" name="Rectangle 1"/>
+          <p:cNvSpPr/>
+          <p:nvPr/>
+        </p:nvSpPr>
+        <p:spPr>
+          <a:xfrm>
+            <a:off x="0" y="0"/>
+            <a:ext cx="12191695" cy="1170432"/>
+          </a:xfrm>
+          <a:prstGeom prst="rect">
+            <a:avLst/>
+          </a:prstGeom>
+          <a:solidFill>
+            <a:srgbClr val="095292"/>
+          </a:solidFill>
+          <a:ln>
+            <a:noFill/>
+          </a:ln>
+        </p:spPr>
+        <p:style>
+          <a:lnRef idx="1">
+            <a:schemeClr val="accent1"/>
+          </a:lnRef>
+          <a:fillRef idx="3">
+            <a:schemeClr val="accent1"/>
+          </a:fillRef>
+          <a:effectRef idx="2">
+            <a:schemeClr val="accent1"/>
+          </a:effectRef>
+          <a:fontRef idx="minor">
+            <a:schemeClr val="lt1"/>
+          </a:fontRef>
+        </p:style>
+        <p:txBody>
+          <a:bodyPr rtlCol="0" anchor="ctr"/>
+          <a:lstStyle/>
+          <a:p>
+            <a:pPr algn="ctr"/>
+          </a:p>
+        </p:txBody>
+      </p:sp>
+      <p:sp>
+        <p:nvSpPr>
+          <p:cNvPr id="3" name="Rectangle 2"/>
+          <p:cNvSpPr/>
+          <p:nvPr/>
+        </p:nvSpPr>
+        <p:spPr>
+          <a:xfrm>
+            <a:off x="0" y="1170432"/>
+            <a:ext cx="12191695" cy="41148"/>
+          </a:xfrm>
+          <a:prstGeom prst="rect">
+            <a:avLst/>
+          </a:prstGeom>
+          <a:solidFill>
+            <a:srgbClr val="FFD000"/>
+          </a:solidFill>
+          <a:ln>
+            <a:noFill/>
+          </a:ln>
+        </p:spPr>
+        <p:style>
+          <a:lnRef idx="1">
+            <a:schemeClr val="accent1"/>
+          </a:lnRef>
+          <a:fillRef idx="3">
+            <a:schemeClr val="accent1"/>
+          </a:fillRef>
+          <a:effectRef idx="2">
+            <a:schemeClr val="accent1"/>
+          </a:effectRef>
+          <a:fontRef idx="minor">
+            <a:schemeClr val="lt1"/>
+          </a:fontRef>
+        </p:style>
+        <p:txBody>
+          <a:bodyPr rtlCol="0" anchor="ctr"/>
+          <a:lstStyle/>
+          <a:p>
+            <a:pPr algn="ctr"/>
+          </a:p>
+        </p:txBody>
+      </p:sp>
+      <p:sp>
+        <p:nvSpPr>
+          <p:cNvPr id="4" name="TextBox 3"/>
+          <p:cNvSpPr txBox="1"/>
+          <p:nvPr/>
+        </p:nvSpPr>
+        <p:spPr>
+          <a:xfrm>
+            <a:off x="457200" y="164592"/>
+            <a:ext cx="11277295" cy="384048"/>
+          </a:xfrm>
+          <a:prstGeom prst="rect">
+            <a:avLst/>
+          </a:prstGeom>
+          <a:noFill/>
+        </p:spPr>
+        <p:txBody>
+          <a:bodyPr wrap="square">
+            <a:spAutoFit/>
+          </a:bodyPr>
+          <a:lstStyle/>
+          <a:p>
+            <a:r>
+              <a:rPr sz="2600" b="1" i="0">
+                <a:solidFill>
+                  <a:srgbClr val="FFFFFF"/>
+                </a:solidFill>
+                <a:latin typeface="Calibri"/>
+              </a:rPr>
+              <a:t>Cómo se expone en 3 minutos</a:t>
+            </a:r>
+          </a:p>
+        </p:txBody>
+      </p:sp>
+      <p:sp>
+        <p:nvSpPr>
+          <p:cNvPr id="5" name="TextBox 4"/>
+          <p:cNvSpPr txBox="1"/>
+          <p:nvPr/>
+        </p:nvSpPr>
+        <p:spPr>
+          <a:xfrm>
+            <a:off x="457200" y="566928"/>
+            <a:ext cx="11277295" cy="411480"/>
+          </a:xfrm>
+          <a:prstGeom prst="rect">
+            <a:avLst/>
+          </a:prstGeom>
+          <a:noFill/>
+        </p:spPr>
+        <p:txBody>
+          <a:bodyPr wrap="square">
+            <a:spAutoFit/>
+          </a:bodyPr>
+          <a:lstStyle/>
+          <a:p>
+            <a:r>
+              <a:rPr sz="1400" b="0" i="0">
+                <a:solidFill>
+                  <a:srgbClr val="B8D8EE"/>
+                </a:solidFill>
+                <a:latin typeface="Calibri"/>
+              </a:rPr>
+              <a:t>Habla el vocero con la pantalla ya compartida · cronómetro en pantalla · se corta al llegar a cero</a:t>
+            </a:r>
+          </a:p>
+        </p:txBody>
+      </p:sp>
+      <p:sp>
+        <p:nvSpPr>
+          <p:cNvPr id="6" name="Rounded Rectangle 5"/>
+          <p:cNvSpPr/>
+          <p:nvPr/>
+        </p:nvSpPr>
+        <p:spPr>
+          <a:xfrm>
+            <a:off x="457200" y="1444752"/>
+            <a:ext cx="11277295" cy="908913"/>
+          </a:xfrm>
+          <a:prstGeom prst="roundRect">
+            <a:avLst>
+              <a:gd name="adj" fmla="val 12000"/>
+            </a:avLst>
+          </a:prstGeom>
+          <a:solidFill>
+            <a:srgbClr val="F2F2F2"/>
+          </a:solidFill>
+          <a:ln>
+            <a:noFill/>
+          </a:ln>
+        </p:spPr>
+        <p:style>
+          <a:lnRef idx="1">
+            <a:schemeClr val="accent1"/>
+          </a:lnRef>
+          <a:fillRef idx="3">
+            <a:schemeClr val="accent1"/>
+          </a:fillRef>
+          <a:effectRef idx="2">
+            <a:schemeClr val="accent1"/>
+          </a:effectRef>
+          <a:fontRef idx="minor">
+            <a:schemeClr val="lt1"/>
+          </a:fontRef>
+        </p:style>
+        <p:txBody>
+          <a:bodyPr rtlCol="0" anchor="ctr"/>
+          <a:lstStyle/>
+          <a:p>
+            <a:pPr algn="ctr"/>
+          </a:p>
+        </p:txBody>
+      </p:sp>
+      <p:sp>
+        <p:nvSpPr>
+          <p:cNvPr id="7" name="Rounded Rectangle 6"/>
+          <p:cNvSpPr/>
+          <p:nvPr/>
+        </p:nvSpPr>
+        <p:spPr>
+          <a:xfrm>
+            <a:off x="594360" y="1679752"/>
+            <a:ext cx="438912" cy="438912"/>
+          </a:xfrm>
+          <a:prstGeom prst="roundRect">
+            <a:avLst>
+              <a:gd name="adj" fmla="val 12000"/>
+            </a:avLst>
+          </a:prstGeom>
+          <a:solidFill>
+            <a:srgbClr val="095292"/>
+          </a:solidFill>
+          <a:ln>
+            <a:noFill/>
+          </a:ln>
+        </p:spPr>
+        <p:style>
+          <a:lnRef idx="1">
+            <a:schemeClr val="accent1"/>
+          </a:lnRef>
+          <a:fillRef idx="3">
+            <a:schemeClr val="accent1"/>
+          </a:fillRef>
+          <a:effectRef idx="2">
+            <a:schemeClr val="accent1"/>
+          </a:effectRef>
+          <a:fontRef idx="minor">
+            <a:schemeClr val="lt1"/>
+          </a:fontRef>
+        </p:style>
+        <p:txBody>
+          <a:bodyPr rtlCol="0" anchor="ctr"/>
+          <a:lstStyle/>
+          <a:p>
+            <a:pPr algn="ctr"/>
+          </a:p>
+        </p:txBody>
+      </p:sp>
+      <p:sp>
+        <p:nvSpPr>
+          <p:cNvPr id="8" name="TextBox 7"/>
+          <p:cNvSpPr txBox="1"/>
+          <p:nvPr/>
+        </p:nvSpPr>
+        <p:spPr>
+          <a:xfrm>
+            <a:off x="594360" y="1679752"/>
+            <a:ext cx="438912" cy="438912"/>
+          </a:xfrm>
+          <a:prstGeom prst="rect">
+            <a:avLst/>
+          </a:prstGeom>
+          <a:noFill/>
+        </p:spPr>
+        <p:txBody>
+          <a:bodyPr wrap="square" anchor="ctr"/>
+          <a:lstStyle/>
+          <a:p>
+            <a:pPr algn="ctr"/>
+            <a:r>
+              <a:rPr sz="1600" b="1" i="0">
+                <a:solidFill>
+                  <a:srgbClr val="FFFFFF"/>
+                </a:solidFill>
+                <a:latin typeface="Calibri"/>
+              </a:rPr>
+              <a:t>1</a:t>
+            </a:r>
+          </a:p>
+        </p:txBody>
+      </p:sp>
+      <p:sp>
+        <p:nvSpPr>
+          <p:cNvPr id="9" name="TextBox 8"/>
+          <p:cNvSpPr txBox="1"/>
+          <p:nvPr/>
+        </p:nvSpPr>
+        <p:spPr>
+          <a:xfrm>
+            <a:off x="1188720" y="1536192"/>
+            <a:ext cx="10271455" cy="744321"/>
+          </a:xfrm>
+          <a:prstGeom prst="rect">
+            <a:avLst/>
+          </a:prstGeom>
+          <a:noFill/>
+        </p:spPr>
+        <p:txBody>
+          <a:bodyPr wrap="square" anchor="ctr"/>
+          <a:lstStyle/>
+          <a:p>
+            <a:r>
+              <a:rPr sz="1500" b="1" i="0">
+                <a:solidFill>
+                  <a:srgbClr val="095292"/>
+                </a:solidFill>
+                <a:latin typeface="Calibri"/>
+              </a:rPr>
+              <a:t>40 s · El problema en una frase</a:t>
+            </a:r>
+          </a:p>
+          <a:p>
+            <a:pPr>
+              <a:spcBef>
+                <a:spcPts val="200"/>
+              </a:spcBef>
+            </a:pPr>
+            <a:r>
+              <a:rPr sz="1300" b="0" i="0">
+                <a:solidFill>
+                  <a:srgbClr val="333333"/>
+                </a:solidFill>
+                <a:latin typeface="Calibri"/>
+              </a:rPr>
+              <a:t>Léanla tal cual está escrita. Sin tecnología dentro.</a:t>
+            </a:r>
+          </a:p>
+        </p:txBody>
+      </p:sp>
+      <p:sp>
+        <p:nvSpPr>
+          <p:cNvPr id="10" name="Rounded Rectangle 9"/>
+          <p:cNvSpPr/>
+          <p:nvPr/>
+        </p:nvSpPr>
+        <p:spPr>
+          <a:xfrm>
+            <a:off x="457200" y="2445105"/>
+            <a:ext cx="11277295" cy="908913"/>
+          </a:xfrm>
+          <a:prstGeom prst="roundRect">
+            <a:avLst>
+              <a:gd name="adj" fmla="val 12000"/>
+            </a:avLst>
+          </a:prstGeom>
+          <a:solidFill>
+            <a:srgbClr val="E8F4FA"/>
+          </a:solidFill>
+          <a:ln>
+            <a:noFill/>
+          </a:ln>
+        </p:spPr>
+        <p:style>
+          <a:lnRef idx="1">
+            <a:schemeClr val="accent1"/>
+          </a:lnRef>
+          <a:fillRef idx="3">
+            <a:schemeClr val="accent1"/>
+          </a:fillRef>
+          <a:effectRef idx="2">
+            <a:schemeClr val="accent1"/>
+          </a:effectRef>
+          <a:fontRef idx="minor">
+            <a:schemeClr val="lt1"/>
+          </a:fontRef>
+        </p:style>
+        <p:txBody>
+          <a:bodyPr rtlCol="0" anchor="ctr"/>
+          <a:lstStyle/>
+          <a:p>
+            <a:pPr algn="ctr"/>
+          </a:p>
+        </p:txBody>
+      </p:sp>
+      <p:sp>
+        <p:nvSpPr>
+          <p:cNvPr id="11" name="Rounded Rectangle 10"/>
+          <p:cNvSpPr/>
+          <p:nvPr/>
+        </p:nvSpPr>
+        <p:spPr>
+          <a:xfrm>
+            <a:off x="594360" y="2680106"/>
+            <a:ext cx="438912" cy="438912"/>
+          </a:xfrm>
+          <a:prstGeom prst="roundRect">
+            <a:avLst>
+              <a:gd name="adj" fmla="val 12000"/>
+            </a:avLst>
+          </a:prstGeom>
+          <a:solidFill>
+            <a:srgbClr val="095292"/>
+          </a:solidFill>
+          <a:ln>
+            <a:noFill/>
+          </a:ln>
+        </p:spPr>
+        <p:style>
+          <a:lnRef idx="1">
+            <a:schemeClr val="accent1"/>
+          </a:lnRef>
+          <a:fillRef idx="3">
+            <a:schemeClr val="accent1"/>
+          </a:fillRef>
+          <a:effectRef idx="2">
+            <a:schemeClr val="accent1"/>
+          </a:effectRef>
+          <a:fontRef idx="minor">
+            <a:schemeClr val="lt1"/>
+          </a:fontRef>
+        </p:style>
+        <p:txBody>
+          <a:bodyPr rtlCol="0" anchor="ctr"/>
+          <a:lstStyle/>
+          <a:p>
+            <a:pPr algn="ctr"/>
+          </a:p>
+        </p:txBody>
+      </p:sp>
+      <p:sp>
+        <p:nvSpPr>
+          <p:cNvPr id="12" name="TextBox 11"/>
+          <p:cNvSpPr txBox="1"/>
+          <p:nvPr/>
+        </p:nvSpPr>
+        <p:spPr>
+          <a:xfrm>
+            <a:off x="594360" y="2680106"/>
+            <a:ext cx="438912" cy="438912"/>
+          </a:xfrm>
+          <a:prstGeom prst="rect">
+            <a:avLst/>
+          </a:prstGeom>
+          <a:noFill/>
+        </p:spPr>
+        <p:txBody>
+          <a:bodyPr wrap="square" anchor="ctr"/>
+          <a:lstStyle/>
+          <a:p>
+            <a:pPr algn="ctr"/>
+            <a:r>
+              <a:rPr sz="1600" b="1" i="0">
+                <a:solidFill>
+                  <a:srgbClr val="FFFFFF"/>
+                </a:solidFill>
+                <a:latin typeface="Calibri"/>
+              </a:rPr>
+              <a:t>2</a:t>
+            </a:r>
+          </a:p>
+        </p:txBody>
+      </p:sp>
+      <p:sp>
+        <p:nvSpPr>
+          <p:cNvPr id="13" name="TextBox 12"/>
+          <p:cNvSpPr txBox="1"/>
+          <p:nvPr/>
+        </p:nvSpPr>
+        <p:spPr>
+          <a:xfrm>
+            <a:off x="1188720" y="2536545"/>
+            <a:ext cx="10271455" cy="744321"/>
+          </a:xfrm>
+          <a:prstGeom prst="rect">
+            <a:avLst/>
+          </a:prstGeom>
+          <a:noFill/>
+        </p:spPr>
+        <p:txBody>
+          <a:bodyPr wrap="square" anchor="ctr"/>
+          <a:lstStyle/>
+          <a:p>
+            <a:r>
+              <a:rPr sz="1500" b="1" i="0">
+                <a:solidFill>
+                  <a:srgbClr val="095292"/>
+                </a:solidFill>
+                <a:latin typeface="Calibri"/>
+              </a:rPr>
+              <a:t>30 s · La cifra</a:t>
+            </a:r>
+          </a:p>
+          <a:p>
+            <a:pPr>
+              <a:spcBef>
+                <a:spcPts val="200"/>
+              </a:spcBef>
+            </a:pPr>
+            <a:r>
+              <a:rPr sz="1300" b="0" i="0">
+                <a:solidFill>
+                  <a:srgbClr val="333333"/>
+                </a:solidFill>
+                <a:latin typeface="Calibri"/>
+              </a:rPr>
+              <a:t>La línea base y cómo la obtuvieron. Es el minuto obligatorio.</a:t>
+            </a:r>
+          </a:p>
+        </p:txBody>
+      </p:sp>
+      <p:sp>
+        <p:nvSpPr>
+          <p:cNvPr id="14" name="Rounded Rectangle 13"/>
+          <p:cNvSpPr/>
+          <p:nvPr/>
+        </p:nvSpPr>
+        <p:spPr>
+          <a:xfrm>
+            <a:off x="457200" y="3445459"/>
+            <a:ext cx="11277295" cy="908913"/>
+          </a:xfrm>
+          <a:prstGeom prst="roundRect">
+            <a:avLst>
+              <a:gd name="adj" fmla="val 12000"/>
+            </a:avLst>
+          </a:prstGeom>
+          <a:solidFill>
+            <a:srgbClr val="F2F2F2"/>
+          </a:solidFill>
+          <a:ln>
+            <a:noFill/>
+          </a:ln>
+        </p:spPr>
+        <p:style>
+          <a:lnRef idx="1">
+            <a:schemeClr val="accent1"/>
+          </a:lnRef>
+          <a:fillRef idx="3">
+            <a:schemeClr val="accent1"/>
+          </a:fillRef>
+          <a:effectRef idx="2">
+            <a:schemeClr val="accent1"/>
+          </a:effectRef>
+          <a:fontRef idx="minor">
+            <a:schemeClr val="lt1"/>
+          </a:fontRef>
+        </p:style>
+        <p:txBody>
+          <a:bodyPr rtlCol="0" anchor="ctr"/>
+          <a:lstStyle/>
+          <a:p>
+            <a:pPr algn="ctr"/>
+          </a:p>
+        </p:txBody>
+      </p:sp>
+      <p:sp>
+        <p:nvSpPr>
+          <p:cNvPr id="15" name="Rounded Rectangle 14"/>
+          <p:cNvSpPr/>
+          <p:nvPr/>
+        </p:nvSpPr>
+        <p:spPr>
+          <a:xfrm>
+            <a:off x="594360" y="3680460"/>
+            <a:ext cx="438912" cy="438912"/>
+          </a:xfrm>
+          <a:prstGeom prst="roundRect">
+            <a:avLst>
+              <a:gd name="adj" fmla="val 12000"/>
+            </a:avLst>
+          </a:prstGeom>
+          <a:solidFill>
+            <a:srgbClr val="095292"/>
+          </a:solidFill>
+          <a:ln>
+            <a:noFill/>
+          </a:ln>
+        </p:spPr>
+        <p:style>
+          <a:lnRef idx="1">
+            <a:schemeClr val="accent1"/>
+          </a:lnRef>
+          <a:fillRef idx="3">
+            <a:schemeClr val="accent1"/>
+          </a:fillRef>
+          <a:effectRef idx="2">
+            <a:schemeClr val="accent1"/>
+          </a:effectRef>
+          <a:fontRef idx="minor">
+            <a:schemeClr val="lt1"/>
+          </a:fontRef>
+        </p:style>
+        <p:txBody>
+          <a:bodyPr rtlCol="0" anchor="ctr"/>
+          <a:lstStyle/>
+          <a:p>
+            <a:pPr algn="ctr"/>
+          </a:p>
+        </p:txBody>
+      </p:sp>
+      <p:sp>
+        <p:nvSpPr>
+          <p:cNvPr id="16" name="TextBox 15"/>
+          <p:cNvSpPr txBox="1"/>
+          <p:nvPr/>
+        </p:nvSpPr>
+        <p:spPr>
+          <a:xfrm>
+            <a:off x="594360" y="3680460"/>
+            <a:ext cx="438912" cy="438912"/>
+          </a:xfrm>
+          <a:prstGeom prst="rect">
+            <a:avLst/>
+          </a:prstGeom>
+          <a:noFill/>
+        </p:spPr>
+        <p:txBody>
+          <a:bodyPr wrap="square" anchor="ctr"/>
+          <a:lstStyle/>
+          <a:p>
+            <a:pPr algn="ctr"/>
+            <a:r>
+              <a:rPr sz="1600" b="1" i="0">
+                <a:solidFill>
+                  <a:srgbClr val="FFFFFF"/>
+                </a:solidFill>
+                <a:latin typeface="Calibri"/>
+              </a:rPr>
+              <a:t>3</a:t>
+            </a:r>
+          </a:p>
+        </p:txBody>
+      </p:sp>
+      <p:sp>
+        <p:nvSpPr>
+          <p:cNvPr id="17" name="TextBox 16"/>
+          <p:cNvSpPr txBox="1"/>
+          <p:nvPr/>
+        </p:nvSpPr>
+        <p:spPr>
+          <a:xfrm>
+            <a:off x="1188720" y="3536899"/>
+            <a:ext cx="10271455" cy="744321"/>
+          </a:xfrm>
+          <a:prstGeom prst="rect">
+            <a:avLst/>
+          </a:prstGeom>
+          <a:noFill/>
+        </p:spPr>
+        <p:txBody>
+          <a:bodyPr wrap="square" anchor="ctr"/>
+          <a:lstStyle/>
+          <a:p>
+            <a:r>
+              <a:rPr sz="1500" b="1" i="0">
+                <a:solidFill>
+                  <a:srgbClr val="095292"/>
+                </a:solidFill>
+                <a:latin typeface="Calibri"/>
+              </a:rPr>
+              <a:t>50 s · El árbol</a:t>
+            </a:r>
+          </a:p>
+          <a:p>
+            <a:pPr>
+              <a:spcBef>
+                <a:spcPts val="200"/>
+              </a:spcBef>
+            </a:pPr>
+            <a:r>
+              <a:rPr sz="1300" b="0" i="0">
+                <a:solidFill>
+                  <a:srgbClr val="333333"/>
+                </a:solidFill>
+                <a:latin typeface="Calibri"/>
+              </a:rPr>
+              <a:t>Muestren el dibujo y señalen la causa que van a atacar.</a:t>
+            </a:r>
+          </a:p>
+        </p:txBody>
+      </p:sp>
+      <p:sp>
+        <p:nvSpPr>
+          <p:cNvPr id="18" name="Rounded Rectangle 17"/>
+          <p:cNvSpPr/>
+          <p:nvPr/>
+        </p:nvSpPr>
+        <p:spPr>
+          <a:xfrm>
+            <a:off x="457200" y="4445812"/>
+            <a:ext cx="11277295" cy="908913"/>
+          </a:xfrm>
+          <a:prstGeom prst="roundRect">
+            <a:avLst>
+              <a:gd name="adj" fmla="val 12000"/>
+            </a:avLst>
+          </a:prstGeom>
+          <a:solidFill>
+            <a:srgbClr val="E8F4FA"/>
+          </a:solidFill>
+          <a:ln>
+            <a:noFill/>
+          </a:ln>
+        </p:spPr>
+        <p:style>
+          <a:lnRef idx="1">
+            <a:schemeClr val="accent1"/>
+          </a:lnRef>
+          <a:fillRef idx="3">
+            <a:schemeClr val="accent1"/>
+          </a:fillRef>
+          <a:effectRef idx="2">
+            <a:schemeClr val="accent1"/>
+          </a:effectRef>
+          <a:fontRef idx="minor">
+            <a:schemeClr val="lt1"/>
+          </a:fontRef>
+        </p:style>
+        <p:txBody>
+          <a:bodyPr rtlCol="0" anchor="ctr"/>
+          <a:lstStyle/>
+          <a:p>
+            <a:pPr algn="ctr"/>
+          </a:p>
+        </p:txBody>
+      </p:sp>
+      <p:sp>
+        <p:nvSpPr>
+          <p:cNvPr id="19" name="Rounded Rectangle 18"/>
+          <p:cNvSpPr/>
+          <p:nvPr/>
+        </p:nvSpPr>
+        <p:spPr>
+          <a:xfrm>
+            <a:off x="594360" y="4680813"/>
+            <a:ext cx="438912" cy="438912"/>
+          </a:xfrm>
+          <a:prstGeom prst="roundRect">
+            <a:avLst>
+              <a:gd name="adj" fmla="val 12000"/>
+            </a:avLst>
+          </a:prstGeom>
+          <a:solidFill>
+            <a:srgbClr val="095292"/>
+          </a:solidFill>
+          <a:ln>
+            <a:noFill/>
+          </a:ln>
+        </p:spPr>
+        <p:style>
+          <a:lnRef idx="1">
+            <a:schemeClr val="accent1"/>
+          </a:lnRef>
+          <a:fillRef idx="3">
+            <a:schemeClr val="accent1"/>
+          </a:fillRef>
+          <a:effectRef idx="2">
+            <a:schemeClr val="accent1"/>
+          </a:effectRef>
+          <a:fontRef idx="minor">
+            <a:schemeClr val="lt1"/>
+          </a:fontRef>
+        </p:style>
+        <p:txBody>
+          <a:bodyPr rtlCol="0" anchor="ctr"/>
+          <a:lstStyle/>
+          <a:p>
+            <a:pPr algn="ctr"/>
+          </a:p>
+        </p:txBody>
+      </p:sp>
+      <p:sp>
+        <p:nvSpPr>
+          <p:cNvPr id="20" name="TextBox 19"/>
+          <p:cNvSpPr txBox="1"/>
+          <p:nvPr/>
+        </p:nvSpPr>
+        <p:spPr>
+          <a:xfrm>
+            <a:off x="594360" y="4680813"/>
+            <a:ext cx="438912" cy="438912"/>
+          </a:xfrm>
+          <a:prstGeom prst="rect">
+            <a:avLst/>
+          </a:prstGeom>
+          <a:noFill/>
+        </p:spPr>
+        <p:txBody>
+          <a:bodyPr wrap="square" anchor="ctr"/>
+          <a:lstStyle/>
+          <a:p>
+            <a:pPr algn="ctr"/>
+            <a:r>
+              <a:rPr sz="1600" b="1" i="0">
+                <a:solidFill>
+                  <a:srgbClr val="FFFFFF"/>
+                </a:solidFill>
+                <a:latin typeface="Calibri"/>
+              </a:rPr>
+              <a:t>4</a:t>
+            </a:r>
+          </a:p>
+        </p:txBody>
+      </p:sp>
+      <p:sp>
+        <p:nvSpPr>
+          <p:cNvPr id="21" name="TextBox 20"/>
+          <p:cNvSpPr txBox="1"/>
+          <p:nvPr/>
+        </p:nvSpPr>
+        <p:spPr>
+          <a:xfrm>
+            <a:off x="1188720" y="4537252"/>
+            <a:ext cx="10271455" cy="744321"/>
+          </a:xfrm>
+          <a:prstGeom prst="rect">
+            <a:avLst/>
+          </a:prstGeom>
+          <a:noFill/>
+        </p:spPr>
+        <p:txBody>
+          <a:bodyPr wrap="square" anchor="ctr"/>
+          <a:lstStyle/>
+          <a:p>
+            <a:r>
+              <a:rPr sz="1500" b="1" i="0">
+                <a:solidFill>
+                  <a:srgbClr val="095292"/>
+                </a:solidFill>
+                <a:latin typeface="Calibri"/>
+              </a:rPr>
+              <a:t>40 s · Actores y frontera</a:t>
+            </a:r>
+          </a:p>
+          <a:p>
+            <a:pPr>
+              <a:spcBef>
+                <a:spcPts val="200"/>
+              </a:spcBef>
+            </a:pPr>
+            <a:r>
+              <a:rPr sz="1300" b="0" i="0">
+                <a:solidFill>
+                  <a:srgbClr val="333333"/>
+                </a:solidFill>
+                <a:latin typeface="Calibri"/>
+              </a:rPr>
+              <a:t>Quién vive el problema, y a quién le van a preguntar esta semana.</a:t>
+            </a:r>
+          </a:p>
+        </p:txBody>
+      </p:sp>
+      <p:sp>
+        <p:nvSpPr>
+          <p:cNvPr id="22" name="Rounded Rectangle 21"/>
+          <p:cNvSpPr/>
+          <p:nvPr/>
+        </p:nvSpPr>
+        <p:spPr>
+          <a:xfrm>
+            <a:off x="457200" y="5446166"/>
+            <a:ext cx="11277295" cy="908913"/>
+          </a:xfrm>
+          <a:prstGeom prst="roundRect">
+            <a:avLst>
+              <a:gd name="adj" fmla="val 12000"/>
+            </a:avLst>
+          </a:prstGeom>
+          <a:solidFill>
+            <a:srgbClr val="F2F2F2"/>
+          </a:solidFill>
+          <a:ln>
+            <a:noFill/>
+          </a:ln>
+        </p:spPr>
+        <p:style>
+          <a:lnRef idx="1">
+            <a:schemeClr val="accent1"/>
+          </a:lnRef>
+          <a:fillRef idx="3">
+            <a:schemeClr val="accent1"/>
+          </a:fillRef>
+          <a:effectRef idx="2">
+            <a:schemeClr val="accent1"/>
+          </a:effectRef>
+          <a:fontRef idx="minor">
+            <a:schemeClr val="lt1"/>
+          </a:fontRef>
+        </p:style>
+        <p:txBody>
+          <a:bodyPr rtlCol="0" anchor="ctr"/>
+          <a:lstStyle/>
+          <a:p>
+            <a:pPr algn="ctr"/>
+          </a:p>
+        </p:txBody>
+      </p:sp>
+      <p:sp>
+        <p:nvSpPr>
+          <p:cNvPr id="23" name="Rounded Rectangle 22"/>
+          <p:cNvSpPr/>
+          <p:nvPr/>
+        </p:nvSpPr>
+        <p:spPr>
+          <a:xfrm>
+            <a:off x="594360" y="5681167"/>
+            <a:ext cx="438912" cy="438912"/>
+          </a:xfrm>
+          <a:prstGeom prst="roundRect">
+            <a:avLst>
+              <a:gd name="adj" fmla="val 12000"/>
+            </a:avLst>
+          </a:prstGeom>
+          <a:solidFill>
+            <a:srgbClr val="095292"/>
+          </a:solidFill>
+          <a:ln>
+            <a:noFill/>
+          </a:ln>
+        </p:spPr>
+        <p:style>
+          <a:lnRef idx="1">
+            <a:schemeClr val="accent1"/>
+          </a:lnRef>
+          <a:fillRef idx="3">
+            <a:schemeClr val="accent1"/>
+          </a:fillRef>
+          <a:effectRef idx="2">
+            <a:schemeClr val="accent1"/>
+          </a:effectRef>
+          <a:fontRef idx="minor">
+            <a:schemeClr val="lt1"/>
+          </a:fontRef>
+        </p:style>
+        <p:txBody>
+          <a:bodyPr rtlCol="0" anchor="ctr"/>
+          <a:lstStyle/>
+          <a:p>
+            <a:pPr algn="ctr"/>
+          </a:p>
+        </p:txBody>
+      </p:sp>
+      <p:sp>
+        <p:nvSpPr>
+          <p:cNvPr id="24" name="TextBox 23"/>
+          <p:cNvSpPr txBox="1"/>
+          <p:nvPr/>
+        </p:nvSpPr>
+        <p:spPr>
+          <a:xfrm>
+            <a:off x="594360" y="5681167"/>
+            <a:ext cx="438912" cy="438912"/>
+          </a:xfrm>
+          <a:prstGeom prst="rect">
+            <a:avLst/>
+          </a:prstGeom>
+          <a:noFill/>
+        </p:spPr>
+        <p:txBody>
+          <a:bodyPr wrap="square" anchor="ctr"/>
+          <a:lstStyle/>
+          <a:p>
+            <a:pPr algn="ctr"/>
+            <a:r>
+              <a:rPr sz="1600" b="1" i="0">
+                <a:solidFill>
+                  <a:srgbClr val="FFFFFF"/>
+                </a:solidFill>
+                <a:latin typeface="Calibri"/>
+              </a:rPr>
+              <a:t>5</a:t>
+            </a:r>
+          </a:p>
+        </p:txBody>
+      </p:sp>
+      <p:sp>
+        <p:nvSpPr>
+          <p:cNvPr id="25" name="TextBox 24"/>
+          <p:cNvSpPr txBox="1"/>
+          <p:nvPr/>
+        </p:nvSpPr>
+        <p:spPr>
+          <a:xfrm>
+            <a:off x="1188720" y="5537606"/>
+            <a:ext cx="10271455" cy="744321"/>
+          </a:xfrm>
+          <a:prstGeom prst="rect">
+            <a:avLst/>
+          </a:prstGeom>
+          <a:noFill/>
+        </p:spPr>
+        <p:txBody>
+          <a:bodyPr wrap="square" anchor="ctr"/>
+          <a:lstStyle/>
+          <a:p>
+            <a:r>
+              <a:rPr sz="1500" b="1" i="0">
+                <a:solidFill>
+                  <a:srgbClr val="095292"/>
+                </a:solidFill>
+                <a:latin typeface="Calibri"/>
+              </a:rPr>
+              <a:t>20 s · El criterio de éxito</a:t>
+            </a:r>
+          </a:p>
+          <a:p>
+            <a:pPr>
+              <a:spcBef>
+                <a:spcPts val="200"/>
+              </a:spcBef>
+            </a:pPr>
+            <a:r>
+              <a:rPr sz="1300" b="0" i="0">
+                <a:solidFill>
+                  <a:srgbClr val="333333"/>
+                </a:solidFill>
+                <a:latin typeface="Calibri"/>
+              </a:rPr>
+              <a:t>De X a Y, medido así.</a:t>
+            </a:r>
+          </a:p>
+        </p:txBody>
+      </p:sp>
+      <p:sp>
+        <p:nvSpPr>
+          <p:cNvPr id="26" name="TextBox 25"/>
+          <p:cNvSpPr txBox="1"/>
+          <p:nvPr/>
+        </p:nvSpPr>
+        <p:spPr>
+          <a:xfrm>
+            <a:off x="11185855" y="6473952"/>
+            <a:ext cx="640080" cy="274320"/>
+          </a:xfrm>
+          <a:prstGeom prst="rect">
+            <a:avLst/>
+          </a:prstGeom>
+          <a:noFill/>
+        </p:spPr>
+        <p:txBody>
+          <a:bodyPr wrap="square">
+            <a:spAutoFit/>
+          </a:bodyPr>
+          <a:lstStyle/>
+          <a:p>
+            <a:pPr algn="r"/>
+            <a:r>
+              <a:rPr sz="1100" b="0" i="0">
+                <a:solidFill>
+                  <a:srgbClr val="666666"/>
+                </a:solidFill>
+                <a:latin typeface="Calibri"/>
+              </a:rPr>
+              <a:t>25</a:t>
+            </a:r>
+          </a:p>
+        </p:txBody>
+      </p:sp>
+    </p:spTree>
+  </p:cSld>
+  <p:clrMapOvr>
+    <a:masterClrMapping/>
+  </p:clrMapOvr>
+</p:sld>
+</file>
+
+<file path=ppt/slides/slide26.xml><?xml version="1.0" encoding="utf-8"?>
+<p:sld xmlns:a="http://schemas.openxmlformats.org/drawingml/2006/main" xmlns:p="http://schemas.openxmlformats.org/presentationml/2006/main" xmlns:r="http://schemas.openxmlformats.org/officeDocument/2006/relationships">
+  <p:cSld>
+    <p:bg>
+      <p:bgPr>
+        <a:solidFill>
+          <a:srgbClr val="FFFFFF"/>
+        </a:solidFill>
+        <a:effectLst/>
+      </p:bgPr>
+    </p:bg>
+    <p:spTree>
+      <p:nvGrpSpPr>
+        <p:cNvPr id="1" name=""/>
+        <p:cNvGrpSpPr/>
+        <p:nvPr/>
+      </p:nvGrpSpPr>
+      <p:grpSpPr/>
+      <p:sp>
+        <p:nvSpPr>
+          <p:cNvPr id="2" name="Rectangle 1"/>
+          <p:cNvSpPr/>
+          <p:nvPr/>
+        </p:nvSpPr>
+        <p:spPr>
+          <a:xfrm>
+            <a:off x="0" y="0"/>
+            <a:ext cx="12191695" cy="960120"/>
+          </a:xfrm>
+          <a:prstGeom prst="rect">
+            <a:avLst/>
+          </a:prstGeom>
+          <a:solidFill>
+            <a:srgbClr val="095292"/>
+          </a:solidFill>
+          <a:ln>
+            <a:noFill/>
+          </a:ln>
+        </p:spPr>
+        <p:style>
+          <a:lnRef idx="1">
+            <a:schemeClr val="accent1"/>
+          </a:lnRef>
+          <a:fillRef idx="3">
+            <a:schemeClr val="accent1"/>
+          </a:fillRef>
+          <a:effectRef idx="2">
+            <a:schemeClr val="accent1"/>
+          </a:effectRef>
+          <a:fontRef idx="minor">
+            <a:schemeClr val="lt1"/>
+          </a:fontRef>
+        </p:style>
+        <p:txBody>
+          <a:bodyPr rtlCol="0" anchor="ctr"/>
+          <a:lstStyle/>
+          <a:p>
+            <a:pPr algn="ctr"/>
+          </a:p>
+        </p:txBody>
+      </p:sp>
+      <p:sp>
+        <p:nvSpPr>
+          <p:cNvPr id="3" name="Rectangle 2"/>
+          <p:cNvSpPr/>
+          <p:nvPr/>
+        </p:nvSpPr>
+        <p:spPr>
+          <a:xfrm>
+            <a:off x="0" y="960120"/>
+            <a:ext cx="12191695" cy="41148"/>
+          </a:xfrm>
+          <a:prstGeom prst="rect">
+            <a:avLst/>
+          </a:prstGeom>
+          <a:solidFill>
+            <a:srgbClr val="FFD000"/>
+          </a:solidFill>
+          <a:ln>
+            <a:noFill/>
+          </a:ln>
+        </p:spPr>
+        <p:style>
+          <a:lnRef idx="1">
+            <a:schemeClr val="accent1"/>
+          </a:lnRef>
+          <a:fillRef idx="3">
+            <a:schemeClr val="accent1"/>
+          </a:fillRef>
+          <a:effectRef idx="2">
+            <a:schemeClr val="accent1"/>
+          </a:effectRef>
+          <a:fontRef idx="minor">
+            <a:schemeClr val="lt1"/>
+          </a:fontRef>
+        </p:style>
+        <p:txBody>
+          <a:bodyPr rtlCol="0" anchor="ctr"/>
+          <a:lstStyle/>
+          <a:p>
+            <a:pPr algn="ctr"/>
+          </a:p>
+        </p:txBody>
+      </p:sp>
+      <p:sp>
+        <p:nvSpPr>
+          <p:cNvPr id="4" name="TextBox 3"/>
+          <p:cNvSpPr txBox="1"/>
+          <p:nvPr/>
+        </p:nvSpPr>
+        <p:spPr>
+          <a:xfrm>
+            <a:off x="457200" y="164592"/>
+            <a:ext cx="11277295" cy="502920"/>
+          </a:xfrm>
+          <a:prstGeom prst="rect">
+            <a:avLst/>
+          </a:prstGeom>
+          <a:noFill/>
+        </p:spPr>
+        <p:txBody>
+          <a:bodyPr wrap="square">
+            <a:spAutoFit/>
+          </a:bodyPr>
+          <a:lstStyle/>
+          <a:p>
+            <a:r>
+              <a:rPr sz="2600" b="1" i="0">
+                <a:solidFill>
+                  <a:srgbClr val="FFFFFF"/>
+                </a:solidFill>
+                <a:latin typeface="Calibri"/>
+              </a:rPr>
+              <a:t>Para la Clase 7</a:t>
+            </a:r>
+          </a:p>
+        </p:txBody>
+      </p:sp>
+      <p:sp>
+        <p:nvSpPr>
+          <p:cNvPr id="5" name="TextBox 4"/>
+          <p:cNvSpPr txBox="1"/>
+          <p:nvPr/>
+        </p:nvSpPr>
+        <p:spPr>
+          <a:xfrm>
+            <a:off x="457200" y="1170432"/>
+            <a:ext cx="11277295" cy="5230368"/>
+          </a:xfrm>
+          <a:prstGeom prst="rect">
+            <a:avLst/>
+          </a:prstGeom>
+          <a:noFill/>
+        </p:spPr>
+        <p:txBody>
+          <a:bodyPr wrap="square">
+            <a:spAutoFit/>
+          </a:bodyPr>
+          <a:lstStyle/>
+          <a:p>
+            <a:pPr>
+              <a:spcAft>
+                <a:spcPts val="800"/>
+              </a:spcAft>
+            </a:pPr>
+            <a:r>
+              <a:rPr sz="2000" b="0" i="0">
+                <a:solidFill>
+                  <a:srgbClr val="333333"/>
+                </a:solidFill>
+                <a:latin typeface="Calibri"/>
+              </a:rPr>
+              <a:t>–   </a:t>
+            </a:r>
+            <a:r>
+              <a:rPr sz="2000" b="1" i="0">
+                <a:solidFill>
+                  <a:srgbClr val="333333"/>
+                </a:solidFill>
+                <a:latin typeface="Calibri"/>
+              </a:rPr>
+              <a:t>Trabajo dirigido:</a:t>
+            </a:r>
+            <a:r>
+              <a:rPr sz="2000" b="0" i="0">
+                <a:solidFill>
+                  <a:srgbClr val="333333"/>
+                </a:solidFill>
+                <a:latin typeface="Calibri"/>
+              </a:rPr>
+              <a:t> Identificación de problemáticas locales — cerrar la ficha con la cifra medida de verdad, no estimada, si esta semana alcanzan a contar o preguntar.</a:t>
+            </a:r>
+          </a:p>
+          <a:p>
+            <a:pPr>
+              <a:spcAft>
+                <a:spcPts val="800"/>
+              </a:spcAft>
+            </a:pPr>
+            <a:r>
+              <a:rPr sz="2000" b="0" i="0">
+                <a:solidFill>
+                  <a:srgbClr val="333333"/>
+                </a:solidFill>
+                <a:latin typeface="Calibri"/>
+              </a:rPr>
+              <a:t>–   </a:t>
+            </a:r>
+            <a:r>
+              <a:rPr sz="2000" b="1" i="0">
+                <a:solidFill>
+                  <a:srgbClr val="333333"/>
+                </a:solidFill>
+                <a:latin typeface="Calibri"/>
+              </a:rPr>
+              <a:t>Trabajo independiente:</a:t>
+            </a:r>
+            <a:r>
+              <a:rPr sz="2000" b="0" i="0">
+                <a:solidFill>
+                  <a:srgbClr val="333333"/>
+                </a:solidFill>
+                <a:latin typeface="Calibri"/>
+              </a:rPr>
+              <a:t> Propuesta inicial de solución: media página con </a:t>
+            </a:r>
+            <a:r>
+              <a:rPr sz="2000" b="1" i="0">
+                <a:solidFill>
+                  <a:srgbClr val="333333"/>
+                </a:solidFill>
+                <a:latin typeface="Calibri"/>
+              </a:rPr>
+              <a:t>dos</a:t>
+            </a:r>
+            <a:r>
+              <a:rPr sz="2000" b="0" i="0">
+                <a:solidFill>
+                  <a:srgbClr val="333333"/>
+                </a:solidFill>
+                <a:latin typeface="Calibri"/>
+              </a:rPr>
+              <a:t> alternativas para atacar la causa elegida, sin decidir todavía cuál. Sin nombrar herramientas.</a:t>
+            </a:r>
+          </a:p>
+          <a:p>
+            <a:pPr>
+              <a:spcAft>
+                <a:spcPts val="800"/>
+              </a:spcAft>
+            </a:pPr>
+            <a:r>
+              <a:rPr sz="2000" b="0" i="0">
+                <a:solidFill>
+                  <a:srgbClr val="333333"/>
+                </a:solidFill>
+                <a:latin typeface="Calibri"/>
+              </a:rPr>
+              <a:t>–   </a:t>
+            </a:r>
+            <a:r>
+              <a:rPr sz="2000" b="1" i="0">
+                <a:solidFill>
+                  <a:srgbClr val="333333"/>
+                </a:solidFill>
+                <a:latin typeface="Calibri"/>
+              </a:rPr>
+              <a:t>Clase 7 · Ciclo de vida de los proyectos de ingeniería</a:t>
+            </a:r>
+            <a:r>
+              <a:rPr sz="2000" b="0" i="0">
+                <a:solidFill>
+                  <a:srgbClr val="333333"/>
+                </a:solidFill>
+                <a:latin typeface="Calibri"/>
+              </a:rPr>
+              <a:t> — el </a:t>
+            </a:r>
+            <a:r>
+              <a:rPr sz="2000" b="1" i="0">
+                <a:solidFill>
+                  <a:srgbClr val="333333"/>
+                </a:solidFill>
+                <a:latin typeface="Calibri"/>
+              </a:rPr>
+              <a:t>ciclo de vida de los proyectos de ingeniería</a:t>
+            </a:r>
+            <a:r>
+              <a:rPr sz="2000" b="0" i="0">
+                <a:solidFill>
+                  <a:srgbClr val="333333"/>
+                </a:solidFill>
+                <a:latin typeface="Calibri"/>
+              </a:rPr>
+              <a:t>, aplicado a la ficha de hoy: qué se hace antes de construir y por qué el orden importa.</a:t>
+            </a:r>
+          </a:p>
+          <a:p>
+            <a:pPr>
+              <a:spcAft>
+                <a:spcPts val="800"/>
+              </a:spcAft>
+            </a:pPr>
+            <a:r>
+              <a:rPr sz="2000" b="0" i="0">
+                <a:solidFill>
+                  <a:srgbClr val="333333"/>
+                </a:solidFill>
+                <a:latin typeface="Calibri"/>
+              </a:rPr>
+              <a:t>–   </a:t>
+            </a:r>
+            <a:r>
+              <a:rPr sz="2000" b="1" i="0">
+                <a:solidFill>
+                  <a:srgbClr val="333333"/>
+                </a:solidFill>
+                <a:latin typeface="Calibri"/>
+              </a:rPr>
+              <a:t>Aviso:</a:t>
+            </a:r>
+            <a:r>
+              <a:rPr sz="2000" b="0" i="0">
+                <a:solidFill>
+                  <a:srgbClr val="333333"/>
+                </a:solidFill>
+                <a:latin typeface="Calibri"/>
+              </a:rPr>
+              <a:t> Arranca el corte 2. La ficha del problema queda como referencia fija: llévenla al documento del equipo con el título «Ficha del problema — versión final del corte 1», porque se va a citar en todas las sesiones que siguen.</a:t>
+            </a:r>
+          </a:p>
+          <a:p>
+            <a:pPr>
+              <a:spcAft>
+                <a:spcPts val="800"/>
+              </a:spcAft>
+            </a:pPr>
+            <a:r>
+              <a:rPr sz="2000" b="0" i="0">
+                <a:solidFill>
+                  <a:srgbClr val="333333"/>
+                </a:solidFill>
+                <a:latin typeface="Calibri"/>
+              </a:rPr>
+              <a:t>–   </a:t>
+            </a:r>
+            <a:r>
+              <a:rPr sz="2000" b="1" i="0">
+                <a:solidFill>
+                  <a:srgbClr val="333333"/>
+                </a:solidFill>
+                <a:latin typeface="Calibri"/>
+              </a:rPr>
+              <a:t>Antes de salir:</a:t>
+            </a:r>
+            <a:r>
+              <a:rPr sz="2000" b="0" i="0">
+                <a:solidFill>
+                  <a:srgbClr val="333333"/>
+                </a:solidFill>
+                <a:latin typeface="Calibri"/>
+              </a:rPr>
+              <a:t> el enlace del documento del equipo en el chat, con permiso de lectura para el docente, y el nombre del vocero de hoy.</a:t>
+            </a:r>
+          </a:p>
+        </p:txBody>
+      </p:sp>
+      <p:sp>
+        <p:nvSpPr>
+          <p:cNvPr id="6" name="TextBox 5"/>
+          <p:cNvSpPr txBox="1"/>
+          <p:nvPr/>
+        </p:nvSpPr>
+        <p:spPr>
+          <a:xfrm>
+            <a:off x="11185855" y="6473952"/>
+            <a:ext cx="640080" cy="274320"/>
+          </a:xfrm>
+          <a:prstGeom prst="rect">
+            <a:avLst/>
+          </a:prstGeom>
+          <a:noFill/>
+        </p:spPr>
+        <p:txBody>
+          <a:bodyPr wrap="square">
+            <a:spAutoFit/>
+          </a:bodyPr>
+          <a:lstStyle/>
+          <a:p>
+            <a:pPr algn="r"/>
+            <a:r>
+              <a:rPr sz="1100" b="0" i="0">
+                <a:solidFill>
+                  <a:srgbClr val="666666"/>
+                </a:solidFill>
+                <a:latin typeface="Calibri"/>
+              </a:rPr>
+              <a:t>26</a:t>
+            </a:r>
+          </a:p>
+        </p:txBody>
+      </p:sp>
+    </p:spTree>
+  </p:cSld>
+  <p:clrMapOvr>
+    <a:masterClrMapping/>
+  </p:clrMapOvr>
+</p:sld>
+</file>
+
+<file path=ppt/slides/slide27.xml><?xml version="1.0" encoding="utf-8"?>
 <p:sld xmlns:a="http://schemas.openxmlformats.org/drawingml/2006/main" xmlns:p="http://schemas.openxmlformats.org/presentationml/2006/main" xmlns:r="http://schemas.openxmlformats.org/officeDocument/2006/relationships">
   <p:cSld>
     <p:bg>

--- a/Introduccion a la Ingenieria/Clases/Clase 6 - Analisis de problemas tecnologicos del entorno/Presentacion.pptx
+++ b/Introduccion a la Ingenieria/Clases/Clase 6 - Analisis de problemas tecnologicos del entorno/Presentacion.pptx
@@ -32,6 +32,8 @@
     <p:sldId id="280" r:id="rId31"/>
     <p:sldId id="281" r:id="rId32"/>
     <p:sldId id="282" r:id="rId33"/>
+    <p:sldId id="283" r:id="rId34"/>
+    <p:sldId id="284" r:id="rId35"/>
   </p:sldIdLst>
   <p:sldSz cx="12191695" cy="6858000" type="screen4x3"/>
   <p:notesSz cx="6858000" cy="9144000"/>
@@ -8702,7 +8704,7 @@
         <p:spPr>
           <a:xfrm>
             <a:off x="0" y="0"/>
-            <a:ext cx="12191695" cy="1170432"/>
+            <a:ext cx="12191695" cy="960120"/>
           </a:xfrm>
           <a:prstGeom prst="rect">
             <a:avLst/>
@@ -8744,7 +8746,7 @@
         </p:nvSpPr>
         <p:spPr>
           <a:xfrm>
-            <a:off x="0" y="1170432"/>
+            <a:off x="0" y="960120"/>
             <a:ext cx="12191695" cy="41148"/>
           </a:xfrm>
           <a:prstGeom prst="rect">
@@ -8788,7 +8790,7 @@
         <p:spPr>
           <a:xfrm>
             <a:off x="457200" y="164592"/>
-            <a:ext cx="11277295" cy="384048"/>
+            <a:ext cx="11277295" cy="502920"/>
           </a:xfrm>
           <a:prstGeom prst="rect">
             <a:avLst/>
@@ -8808,55 +8810,21 @@
                 </a:solidFill>
                 <a:latin typeface="Calibri"/>
               </a:rPr>
-              <a:t>Taller de hoy: Ficha del problema del proyecto</a:t>
-            </a:r>
-          </a:p>
-        </p:txBody>
-      </p:sp>
-      <p:sp>
-        <p:nvSpPr>
-          <p:cNvPr id="5" name="TextBox 4"/>
-          <p:cNvSpPr txBox="1"/>
-          <p:nvPr/>
-        </p:nvSpPr>
-        <p:spPr>
-          <a:xfrm>
-            <a:off x="457200" y="566928"/>
-            <a:ext cx="11277295" cy="411480"/>
-          </a:xfrm>
-          <a:prstGeom prst="rect">
-            <a:avLst/>
-          </a:prstGeom>
-          <a:noFill/>
-        </p:spPr>
-        <p:txBody>
-          <a:bodyPr wrap="square">
-            <a:spAutoFit/>
-          </a:bodyPr>
-          <a:lstStyle/>
-          <a:p>
-            <a:r>
-              <a:rPr sz="1400" b="0" i="0">
-                <a:solidFill>
-                  <a:srgbClr val="B8D8EE"/>
-                </a:solidFill>
-                <a:latin typeface="Calibri"/>
-              </a:rPr>
-              <a:t>17 min en equipos · cada equipo, su propio problema · ficha del problema + árbol de causas</a:t>
-            </a:r>
-          </a:p>
-        </p:txBody>
-      </p:sp>
-      <p:sp>
-        <p:nvSpPr>
-          <p:cNvPr id="6" name="Rounded Rectangle 5"/>
+              <a:t>Plantilla del entregable: los 5 bloques</a:t>
+            </a:r>
+          </a:p>
+        </p:txBody>
+      </p:sp>
+      <p:sp>
+        <p:nvSpPr>
+          <p:cNvPr id="5" name="Rounded Rectangle 4"/>
           <p:cNvSpPr/>
           <p:nvPr/>
         </p:nvSpPr>
         <p:spPr>
           <a:xfrm>
-            <a:off x="457200" y="1472184"/>
-            <a:ext cx="11277295" cy="566928"/>
+            <a:off x="457200" y="1261872"/>
+            <a:ext cx="11277295" cy="5093208"/>
           </a:xfrm>
           <a:prstGeom prst="roundRect">
             <a:avLst>
@@ -8864,7 +8832,7 @@
             </a:avLst>
           </a:prstGeom>
           <a:solidFill>
-            <a:srgbClr val="F2F2F2"/>
+            <a:srgbClr val="1E2A38"/>
           </a:solidFill>
           <a:ln>
             <a:noFill/>
@@ -8894,25 +8862,23 @@
       </p:sp>
       <p:sp>
         <p:nvSpPr>
-          <p:cNvPr id="7" name="Rectangle 6"/>
+          <p:cNvPr id="6" name="Rectangle 5"/>
           <p:cNvSpPr/>
           <p:nvPr/>
         </p:nvSpPr>
         <p:spPr>
           <a:xfrm>
-            <a:off x="640080" y="1618487"/>
-            <a:ext cx="274320" cy="274320"/>
+            <a:off x="457200" y="1261872"/>
+            <a:ext cx="11277295" cy="320040"/>
           </a:xfrm>
           <a:prstGeom prst="rect">
             <a:avLst/>
           </a:prstGeom>
           <a:solidFill>
-            <a:srgbClr val="FFFFFF"/>
+            <a:srgbClr val="095292"/>
           </a:solidFill>
           <a:ln>
-            <a:solidFill>
-              <a:srgbClr val="333333"/>
-            </a:solidFill>
+            <a:noFill/>
           </a:ln>
         </p:spPr>
         <p:style>
@@ -8939,895 +8905,222 @@
       </p:sp>
       <p:sp>
         <p:nvSpPr>
-          <p:cNvPr id="8" name="Rectangle 7"/>
-          <p:cNvSpPr/>
-          <p:nvPr/>
-        </p:nvSpPr>
-        <p:spPr>
-          <a:xfrm>
-            <a:off x="640080" y="1618487"/>
-            <a:ext cx="73152" cy="274320"/>
-          </a:xfrm>
-          <a:prstGeom prst="rect">
-            <a:avLst/>
-          </a:prstGeom>
-          <a:solidFill>
-            <a:srgbClr val="269CCB"/>
-          </a:solidFill>
-          <a:ln>
-            <a:noFill/>
-          </a:ln>
-        </p:spPr>
-        <p:style>
-          <a:lnRef idx="1">
-            <a:schemeClr val="accent1"/>
-          </a:lnRef>
-          <a:fillRef idx="3">
-            <a:schemeClr val="accent1"/>
-          </a:fillRef>
-          <a:effectRef idx="2">
-            <a:schemeClr val="accent1"/>
-          </a:effectRef>
-          <a:fontRef idx="minor">
-            <a:schemeClr val="lt1"/>
-          </a:fontRef>
-        </p:style>
-        <p:txBody>
-          <a:bodyPr rtlCol="0" anchor="ctr"/>
-          <a:lstStyle/>
-          <a:p>
-            <a:pPr algn="ctr"/>
+          <p:cNvPr id="7" name="TextBox 6"/>
+          <p:cNvSpPr txBox="1"/>
+          <p:nvPr/>
+        </p:nvSpPr>
+        <p:spPr>
+          <a:xfrm>
+            <a:off x="685800" y="1307592"/>
+            <a:ext cx="10820095" cy="256032"/>
+          </a:xfrm>
+          <a:prstGeom prst="rect">
+            <a:avLst/>
+          </a:prstGeom>
+          <a:noFill/>
+        </p:spPr>
+        <p:txBody>
+          <a:bodyPr wrap="square" anchor="ctr"/>
+          <a:lstStyle/>
+          <a:p>
+            <a:r>
+              <a:rPr sz="1000" b="1" i="0">
+                <a:solidFill>
+                  <a:srgbClr val="269CCB"/>
+                </a:solidFill>
+                <a:latin typeface="Calibri"/>
+              </a:rPr>
+              <a:t>● ● ●</a:t>
+            </a:r>
+          </a:p>
+        </p:txBody>
+      </p:sp>
+      <p:sp>
+        <p:nvSpPr>
+          <p:cNvPr id="8" name="TextBox 7"/>
+          <p:cNvSpPr txBox="1"/>
+          <p:nvPr/>
+        </p:nvSpPr>
+        <p:spPr>
+          <a:xfrm>
+            <a:off x="777240" y="1719072"/>
+            <a:ext cx="10637215" cy="4453128"/>
+          </a:xfrm>
+          <a:prstGeom prst="rect">
+            <a:avLst/>
+          </a:prstGeom>
+          <a:noFill/>
+        </p:spPr>
+        <p:txBody>
+          <a:bodyPr wrap="square">
+            <a:spAutoFit/>
+          </a:bodyPr>
+          <a:lstStyle/>
+          <a:p>
+            <a:pPr>
+              <a:spcAft>
+                <a:spcPts val="400"/>
+              </a:spcAft>
+            </a:pPr>
+            <a:r>
+              <a:rPr sz="1400" b="0" i="0">
+                <a:solidFill>
+                  <a:srgbClr val="FFFFFF"/>
+                </a:solidFill>
+                <a:latin typeface="Calibri"/>
+              </a:rPr>
+              <a:t># Ficha del problema del proyecto</a:t>
+            </a:r>
+          </a:p>
+          <a:p>
+            <a:pPr>
+              <a:spcAft>
+                <a:spcPts val="400"/>
+              </a:spcAft>
+            </a:pPr>
+            <a:r>
+              <a:rPr sz="1400" b="0" i="0">
+                <a:solidFill>
+                  <a:srgbClr val="FFFFFF"/>
+                </a:solidFill>
+                <a:latin typeface="Calibri"/>
+              </a:rPr>
+              <a:t># Documento del equipo · un bloque por titulo, sin cambiar los nombres</a:t>
+            </a:r>
+          </a:p>
+          <a:p>
+            <a:pPr>
+              <a:spcAft>
+                <a:spcPts val="400"/>
+              </a:spcAft>
+            </a:pPr>
+            <a:r>
+              <a:rPr sz="1400" b="0" i="0">
+                <a:solidFill>
+                  <a:srgbClr val="FFFFFF"/>
+                </a:solidFill>
+                <a:latin typeface="Calibri"/>
+              </a:rPr>
+              <a:t/>
+            </a:r>
+          </a:p>
+          <a:p>
+            <a:pPr>
+              <a:spcAft>
+                <a:spcPts val="400"/>
+              </a:spcAft>
+            </a:pPr>
+            <a:r>
+              <a:rPr sz="1400" b="0" i="0">
+                <a:solidFill>
+                  <a:srgbClr val="FFFFFF"/>
+                </a:solidFill>
+                <a:latin typeface="Calibri"/>
+              </a:rPr>
+              <a:t>## 1. EL PROBLEMA EN UNA FRASE</a:t>
+            </a:r>
+          </a:p>
+          <a:p>
+            <a:pPr>
+              <a:spcAft>
+                <a:spcPts val="400"/>
+              </a:spcAft>
+            </a:pPr>
+            <a:r>
+              <a:rPr sz="1400" b="0" i="0">
+                <a:solidFill>
+                  <a:srgbClr val="FFFFFF"/>
+                </a:solidFill>
+                <a:latin typeface="Calibri"/>
+              </a:rPr>
+              <a:t>## 2. LA LÍNEA BASE</a:t>
+            </a:r>
+          </a:p>
+          <a:p>
+            <a:pPr>
+              <a:spcAft>
+                <a:spcPts val="400"/>
+              </a:spcAft>
+            </a:pPr>
+            <a:r>
+              <a:rPr sz="1400" b="0" i="0">
+                <a:solidFill>
+                  <a:srgbClr val="FFFFFF"/>
+                </a:solidFill>
+                <a:latin typeface="Calibri"/>
+              </a:rPr>
+              <a:t>## 3. EL ÁRBOL DE CAUSAS</a:t>
+            </a:r>
+          </a:p>
+          <a:p>
+            <a:pPr>
+              <a:spcAft>
+                <a:spcPts val="400"/>
+              </a:spcAft>
+            </a:pPr>
+            <a:r>
+              <a:rPr sz="1400" b="0" i="0">
+                <a:solidFill>
+                  <a:srgbClr val="FFFFFF"/>
+                </a:solidFill>
+                <a:latin typeface="Calibri"/>
+              </a:rPr>
+              <a:t>## 4. ACTORES Y FRONTERA</a:t>
+            </a:r>
+          </a:p>
+          <a:p>
+            <a:pPr>
+              <a:spcAft>
+                <a:spcPts val="400"/>
+              </a:spcAft>
+            </a:pPr>
+            <a:r>
+              <a:rPr sz="1400" b="0" i="0">
+                <a:solidFill>
+                  <a:srgbClr val="FFFFFF"/>
+                </a:solidFill>
+                <a:latin typeface="Calibri"/>
+              </a:rPr>
+              <a:t>## 5. EL CRITERIO DE ÉXITO</a:t>
+            </a:r>
+          </a:p>
+          <a:p>
+            <a:pPr>
+              <a:spcAft>
+                <a:spcPts val="400"/>
+              </a:spcAft>
+            </a:pPr>
+            <a:r>
+              <a:rPr sz="1400" b="0" i="0">
+                <a:solidFill>
+                  <a:srgbClr val="FFFFFF"/>
+                </a:solidFill>
+                <a:latin typeface="Calibri"/>
+              </a:rPr>
+              <a:t/>
+            </a:r>
+          </a:p>
+          <a:p>
+            <a:pPr>
+              <a:spcAft>
+                <a:spcPts val="400"/>
+              </a:spcAft>
+            </a:pPr>
+            <a:r>
+              <a:rPr sz="1400" b="0" i="0">
+                <a:solidFill>
+                  <a:srgbClr val="FFFFFF"/>
+                </a:solidFill>
+                <a:latin typeface="Calibri"/>
+              </a:rPr>
+              <a:t># Los titulos van TAL CUAL: son con los que se califica.</a:t>
+            </a:r>
           </a:p>
         </p:txBody>
       </p:sp>
       <p:sp>
         <p:nvSpPr>
           <p:cNvPr id="9" name="TextBox 8"/>
-          <p:cNvSpPr txBox="1"/>
-          <p:nvPr/>
-        </p:nvSpPr>
-        <p:spPr>
-          <a:xfrm>
-            <a:off x="1097280" y="1563624"/>
-            <a:ext cx="10362895" cy="402336"/>
-          </a:xfrm>
-          <a:prstGeom prst="rect">
-            <a:avLst/>
-          </a:prstGeom>
-          <a:noFill/>
-        </p:spPr>
-        <p:txBody>
-          <a:bodyPr wrap="square" anchor="ctr"/>
-          <a:lstStyle/>
-          <a:p>
-            <a:r>
-              <a:rPr sz="1500" b="1" i="0">
-                <a:solidFill>
-                  <a:srgbClr val="333333"/>
-                </a:solidFill>
-                <a:latin typeface="Calibri"/>
-              </a:rPr>
-              <a:t>EL PROBLEMA EN UNA FRASE</a:t>
-            </a:r>
-            <a:r>
-              <a:rPr sz="1500" b="0" i="0">
-                <a:solidFill>
-                  <a:srgbClr val="333333"/>
-                </a:solidFill>
-                <a:latin typeface="Calibri"/>
-              </a:rPr>
-              <a:t> — Una sola frase con la fórmula: </a:t>
-            </a:r>
-            <a:r>
-              <a:rPr sz="1500" b="1" i="0">
-                <a:solidFill>
-                  <a:srgbClr val="333333"/>
-                </a:solidFill>
-                <a:latin typeface="Calibri"/>
-              </a:rPr>
-              <a:t>a quién le pasa qué, con qué consecuencia</a:t>
-            </a:r>
-            <a:r>
-              <a:rPr sz="1500" b="0" i="0">
-                <a:solidFill>
-                  <a:srgbClr val="333333"/>
-                </a:solidFill>
-                <a:latin typeface="Calibri"/>
-              </a:rPr>
-              <a:t>. Sin mencionar ninguna tecnología ni ninguna solución.</a:t>
-            </a:r>
-          </a:p>
-        </p:txBody>
-      </p:sp>
-      <p:sp>
-        <p:nvSpPr>
-          <p:cNvPr id="10" name="Rounded Rectangle 9"/>
-          <p:cNvSpPr/>
-          <p:nvPr/>
-        </p:nvSpPr>
-        <p:spPr>
-          <a:xfrm>
-            <a:off x="457200" y="2148839"/>
-            <a:ext cx="11277295" cy="566928"/>
-          </a:xfrm>
-          <a:prstGeom prst="roundRect">
-            <a:avLst>
-              <a:gd name="adj" fmla="val 12000"/>
-            </a:avLst>
-          </a:prstGeom>
-          <a:solidFill>
-            <a:srgbClr val="F2F2F2"/>
-          </a:solidFill>
-          <a:ln>
-            <a:noFill/>
-          </a:ln>
-        </p:spPr>
-        <p:style>
-          <a:lnRef idx="1">
-            <a:schemeClr val="accent1"/>
-          </a:lnRef>
-          <a:fillRef idx="3">
-            <a:schemeClr val="accent1"/>
-          </a:fillRef>
-          <a:effectRef idx="2">
-            <a:schemeClr val="accent1"/>
-          </a:effectRef>
-          <a:fontRef idx="minor">
-            <a:schemeClr val="lt1"/>
-          </a:fontRef>
-        </p:style>
-        <p:txBody>
-          <a:bodyPr rtlCol="0" anchor="ctr"/>
-          <a:lstStyle/>
-          <a:p>
-            <a:pPr algn="ctr"/>
-          </a:p>
-        </p:txBody>
-      </p:sp>
-      <p:sp>
-        <p:nvSpPr>
-          <p:cNvPr id="11" name="Rectangle 10"/>
-          <p:cNvSpPr/>
-          <p:nvPr/>
-        </p:nvSpPr>
-        <p:spPr>
-          <a:xfrm>
-            <a:off x="640080" y="2295144"/>
-            <a:ext cx="274320" cy="274320"/>
-          </a:xfrm>
-          <a:prstGeom prst="rect">
-            <a:avLst/>
-          </a:prstGeom>
-          <a:solidFill>
-            <a:srgbClr val="FFFFFF"/>
-          </a:solidFill>
-          <a:ln>
-            <a:solidFill>
-              <a:srgbClr val="333333"/>
-            </a:solidFill>
-          </a:ln>
-        </p:spPr>
-        <p:style>
-          <a:lnRef idx="1">
-            <a:schemeClr val="accent1"/>
-          </a:lnRef>
-          <a:fillRef idx="3">
-            <a:schemeClr val="accent1"/>
-          </a:fillRef>
-          <a:effectRef idx="2">
-            <a:schemeClr val="accent1"/>
-          </a:effectRef>
-          <a:fontRef idx="minor">
-            <a:schemeClr val="lt1"/>
-          </a:fontRef>
-        </p:style>
-        <p:txBody>
-          <a:bodyPr rtlCol="0" anchor="ctr"/>
-          <a:lstStyle/>
-          <a:p>
-            <a:pPr algn="ctr"/>
-          </a:p>
-        </p:txBody>
-      </p:sp>
-      <p:sp>
-        <p:nvSpPr>
-          <p:cNvPr id="12" name="Rectangle 11"/>
-          <p:cNvSpPr/>
-          <p:nvPr/>
-        </p:nvSpPr>
-        <p:spPr>
-          <a:xfrm>
-            <a:off x="640080" y="2295144"/>
-            <a:ext cx="73152" cy="274320"/>
-          </a:xfrm>
-          <a:prstGeom prst="rect">
-            <a:avLst/>
-          </a:prstGeom>
-          <a:solidFill>
-            <a:srgbClr val="269CCB"/>
-          </a:solidFill>
-          <a:ln>
-            <a:noFill/>
-          </a:ln>
-        </p:spPr>
-        <p:style>
-          <a:lnRef idx="1">
-            <a:schemeClr val="accent1"/>
-          </a:lnRef>
-          <a:fillRef idx="3">
-            <a:schemeClr val="accent1"/>
-          </a:fillRef>
-          <a:effectRef idx="2">
-            <a:schemeClr val="accent1"/>
-          </a:effectRef>
-          <a:fontRef idx="minor">
-            <a:schemeClr val="lt1"/>
-          </a:fontRef>
-        </p:style>
-        <p:txBody>
-          <a:bodyPr rtlCol="0" anchor="ctr"/>
-          <a:lstStyle/>
-          <a:p>
-            <a:pPr algn="ctr"/>
-          </a:p>
-        </p:txBody>
-      </p:sp>
-      <p:sp>
-        <p:nvSpPr>
-          <p:cNvPr id="13" name="TextBox 12"/>
-          <p:cNvSpPr txBox="1"/>
-          <p:nvPr/>
-        </p:nvSpPr>
-        <p:spPr>
-          <a:xfrm>
-            <a:off x="1097280" y="2240279"/>
-            <a:ext cx="10362895" cy="402336"/>
-          </a:xfrm>
-          <a:prstGeom prst="rect">
-            <a:avLst/>
-          </a:prstGeom>
-          <a:noFill/>
-        </p:spPr>
-        <p:txBody>
-          <a:bodyPr wrap="square" anchor="ctr"/>
-          <a:lstStyle/>
-          <a:p>
-            <a:r>
-              <a:rPr sz="1500" b="1" i="0">
-                <a:solidFill>
-                  <a:srgbClr val="333333"/>
-                </a:solidFill>
-                <a:latin typeface="Calibri"/>
-              </a:rPr>
-              <a:t>LA LÍNEA BASE</a:t>
-            </a:r>
-            <a:r>
-              <a:rPr sz="1500" b="0" i="0">
-                <a:solidFill>
-                  <a:srgbClr val="333333"/>
-                </a:solidFill>
-                <a:latin typeface="Calibri"/>
-              </a:rPr>
-              <a:t> — Una cifra que describa el problema </a:t>
-            </a:r>
-            <a:r>
-              <a:rPr sz="1500" b="1" i="0">
-                <a:solidFill>
-                  <a:srgbClr val="333333"/>
-                </a:solidFill>
-                <a:latin typeface="Calibri"/>
-              </a:rPr>
-              <a:t>hoy</a:t>
-            </a:r>
-            <a:r>
-              <a:rPr sz="1500" b="0" i="0">
-                <a:solidFill>
-                  <a:srgbClr val="333333"/>
-                </a:solidFill>
-                <a:latin typeface="Calibri"/>
-              </a:rPr>
-              <a:t>, antes de que ustedes toquen nada, más </a:t>
-            </a:r>
-            <a:r>
-              <a:rPr sz="1500" b="1" i="0">
-                <a:solidFill>
-                  <a:srgbClr val="333333"/>
-                </a:solidFill>
-                <a:latin typeface="Calibri"/>
-              </a:rPr>
-              <a:t>cómo la obtuvieron</a:t>
-            </a:r>
-            <a:r>
-              <a:rPr sz="1500" b="0" i="0">
-                <a:solidFill>
-                  <a:srgbClr val="333333"/>
-                </a:solidFill>
-                <a:latin typeface="Calibri"/>
-              </a:rPr>
-              <a:t> y cuándo. Si es estimación, escriban «estimado».</a:t>
-            </a:r>
-          </a:p>
-        </p:txBody>
-      </p:sp>
-      <p:sp>
-        <p:nvSpPr>
-          <p:cNvPr id="14" name="Rounded Rectangle 13"/>
-          <p:cNvSpPr/>
-          <p:nvPr/>
-        </p:nvSpPr>
-        <p:spPr>
-          <a:xfrm>
-            <a:off x="457200" y="2825496"/>
-            <a:ext cx="11277295" cy="566928"/>
-          </a:xfrm>
-          <a:prstGeom prst="roundRect">
-            <a:avLst>
-              <a:gd name="adj" fmla="val 12000"/>
-            </a:avLst>
-          </a:prstGeom>
-          <a:solidFill>
-            <a:srgbClr val="F2F2F2"/>
-          </a:solidFill>
-          <a:ln>
-            <a:noFill/>
-          </a:ln>
-        </p:spPr>
-        <p:style>
-          <a:lnRef idx="1">
-            <a:schemeClr val="accent1"/>
-          </a:lnRef>
-          <a:fillRef idx="3">
-            <a:schemeClr val="accent1"/>
-          </a:fillRef>
-          <a:effectRef idx="2">
-            <a:schemeClr val="accent1"/>
-          </a:effectRef>
-          <a:fontRef idx="minor">
-            <a:schemeClr val="lt1"/>
-          </a:fontRef>
-        </p:style>
-        <p:txBody>
-          <a:bodyPr rtlCol="0" anchor="ctr"/>
-          <a:lstStyle/>
-          <a:p>
-            <a:pPr algn="ctr"/>
-          </a:p>
-        </p:txBody>
-      </p:sp>
-      <p:sp>
-        <p:nvSpPr>
-          <p:cNvPr id="15" name="Rectangle 14"/>
-          <p:cNvSpPr/>
-          <p:nvPr/>
-        </p:nvSpPr>
-        <p:spPr>
-          <a:xfrm>
-            <a:off x="640080" y="2971800"/>
-            <a:ext cx="274320" cy="274320"/>
-          </a:xfrm>
-          <a:prstGeom prst="rect">
-            <a:avLst/>
-          </a:prstGeom>
-          <a:solidFill>
-            <a:srgbClr val="FFFFFF"/>
-          </a:solidFill>
-          <a:ln>
-            <a:solidFill>
-              <a:srgbClr val="333333"/>
-            </a:solidFill>
-          </a:ln>
-        </p:spPr>
-        <p:style>
-          <a:lnRef idx="1">
-            <a:schemeClr val="accent1"/>
-          </a:lnRef>
-          <a:fillRef idx="3">
-            <a:schemeClr val="accent1"/>
-          </a:fillRef>
-          <a:effectRef idx="2">
-            <a:schemeClr val="accent1"/>
-          </a:effectRef>
-          <a:fontRef idx="minor">
-            <a:schemeClr val="lt1"/>
-          </a:fontRef>
-        </p:style>
-        <p:txBody>
-          <a:bodyPr rtlCol="0" anchor="ctr"/>
-          <a:lstStyle/>
-          <a:p>
-            <a:pPr algn="ctr"/>
-          </a:p>
-        </p:txBody>
-      </p:sp>
-      <p:sp>
-        <p:nvSpPr>
-          <p:cNvPr id="16" name="Rectangle 15"/>
-          <p:cNvSpPr/>
-          <p:nvPr/>
-        </p:nvSpPr>
-        <p:spPr>
-          <a:xfrm>
-            <a:off x="640080" y="2971800"/>
-            <a:ext cx="73152" cy="274320"/>
-          </a:xfrm>
-          <a:prstGeom prst="rect">
-            <a:avLst/>
-          </a:prstGeom>
-          <a:solidFill>
-            <a:srgbClr val="269CCB"/>
-          </a:solidFill>
-          <a:ln>
-            <a:noFill/>
-          </a:ln>
-        </p:spPr>
-        <p:style>
-          <a:lnRef idx="1">
-            <a:schemeClr val="accent1"/>
-          </a:lnRef>
-          <a:fillRef idx="3">
-            <a:schemeClr val="accent1"/>
-          </a:fillRef>
-          <a:effectRef idx="2">
-            <a:schemeClr val="accent1"/>
-          </a:effectRef>
-          <a:fontRef idx="minor">
-            <a:schemeClr val="lt1"/>
-          </a:fontRef>
-        </p:style>
-        <p:txBody>
-          <a:bodyPr rtlCol="0" anchor="ctr"/>
-          <a:lstStyle/>
-          <a:p>
-            <a:pPr algn="ctr"/>
-          </a:p>
-        </p:txBody>
-      </p:sp>
-      <p:sp>
-        <p:nvSpPr>
-          <p:cNvPr id="17" name="TextBox 16"/>
-          <p:cNvSpPr txBox="1"/>
-          <p:nvPr/>
-        </p:nvSpPr>
-        <p:spPr>
-          <a:xfrm>
-            <a:off x="1097280" y="2916936"/>
-            <a:ext cx="10362895" cy="402336"/>
-          </a:xfrm>
-          <a:prstGeom prst="rect">
-            <a:avLst/>
-          </a:prstGeom>
-          <a:noFill/>
-        </p:spPr>
-        <p:txBody>
-          <a:bodyPr wrap="square" anchor="ctr"/>
-          <a:lstStyle/>
-          <a:p>
-            <a:r>
-              <a:rPr sz="1500" b="1" i="0">
-                <a:solidFill>
-                  <a:srgbClr val="333333"/>
-                </a:solidFill>
-                <a:latin typeface="Calibri"/>
-              </a:rPr>
-              <a:t>EL ÁRBOL DE CAUSAS</a:t>
-            </a:r>
-            <a:r>
-              <a:rPr sz="1500" b="0" i="0">
-                <a:solidFill>
-                  <a:srgbClr val="333333"/>
-                </a:solidFill>
-                <a:latin typeface="Calibri"/>
-              </a:rPr>
-              <a:t> — En Excalidraw: el problema en el tronco, los efectos arriba, dos o tres causas directas abajo y el segundo nivel de cada una. Marquen con un símbolo las causas que </a:t>
-            </a:r>
-            <a:r>
-              <a:rPr sz="1500" b="1" i="0">
-                <a:solidFill>
-                  <a:srgbClr val="333333"/>
-                </a:solidFill>
-                <a:latin typeface="Calibri"/>
-              </a:rPr>
-              <a:t>no</a:t>
-            </a:r>
-            <a:r>
-              <a:rPr sz="1500" b="0" i="0">
-                <a:solidFill>
-                  <a:srgbClr val="333333"/>
-                </a:solidFill>
-                <a:latin typeface="Calibri"/>
-              </a:rPr>
-              <a:t> pueden cambiar (restricciones).</a:t>
-            </a:r>
-          </a:p>
-        </p:txBody>
-      </p:sp>
-      <p:sp>
-        <p:nvSpPr>
-          <p:cNvPr id="18" name="Rounded Rectangle 17"/>
-          <p:cNvSpPr/>
-          <p:nvPr/>
-        </p:nvSpPr>
-        <p:spPr>
-          <a:xfrm>
-            <a:off x="457200" y="3502152"/>
-            <a:ext cx="11277295" cy="566928"/>
-          </a:xfrm>
-          <a:prstGeom prst="roundRect">
-            <a:avLst>
-              <a:gd name="adj" fmla="val 12000"/>
-            </a:avLst>
-          </a:prstGeom>
-          <a:solidFill>
-            <a:srgbClr val="F2F2F2"/>
-          </a:solidFill>
-          <a:ln>
-            <a:noFill/>
-          </a:ln>
-        </p:spPr>
-        <p:style>
-          <a:lnRef idx="1">
-            <a:schemeClr val="accent1"/>
-          </a:lnRef>
-          <a:fillRef idx="3">
-            <a:schemeClr val="accent1"/>
-          </a:fillRef>
-          <a:effectRef idx="2">
-            <a:schemeClr val="accent1"/>
-          </a:effectRef>
-          <a:fontRef idx="minor">
-            <a:schemeClr val="lt1"/>
-          </a:fontRef>
-        </p:style>
-        <p:txBody>
-          <a:bodyPr rtlCol="0" anchor="ctr"/>
-          <a:lstStyle/>
-          <a:p>
-            <a:pPr algn="ctr"/>
-          </a:p>
-        </p:txBody>
-      </p:sp>
-      <p:sp>
-        <p:nvSpPr>
-          <p:cNvPr id="19" name="Rectangle 18"/>
-          <p:cNvSpPr/>
-          <p:nvPr/>
-        </p:nvSpPr>
-        <p:spPr>
-          <a:xfrm>
-            <a:off x="640080" y="3648456"/>
-            <a:ext cx="274320" cy="274320"/>
-          </a:xfrm>
-          <a:prstGeom prst="rect">
-            <a:avLst/>
-          </a:prstGeom>
-          <a:solidFill>
-            <a:srgbClr val="FFFFFF"/>
-          </a:solidFill>
-          <a:ln>
-            <a:solidFill>
-              <a:srgbClr val="333333"/>
-            </a:solidFill>
-          </a:ln>
-        </p:spPr>
-        <p:style>
-          <a:lnRef idx="1">
-            <a:schemeClr val="accent1"/>
-          </a:lnRef>
-          <a:fillRef idx="3">
-            <a:schemeClr val="accent1"/>
-          </a:fillRef>
-          <a:effectRef idx="2">
-            <a:schemeClr val="accent1"/>
-          </a:effectRef>
-          <a:fontRef idx="minor">
-            <a:schemeClr val="lt1"/>
-          </a:fontRef>
-        </p:style>
-        <p:txBody>
-          <a:bodyPr rtlCol="0" anchor="ctr"/>
-          <a:lstStyle/>
-          <a:p>
-            <a:pPr algn="ctr"/>
-          </a:p>
-        </p:txBody>
-      </p:sp>
-      <p:sp>
-        <p:nvSpPr>
-          <p:cNvPr id="20" name="Rectangle 19"/>
-          <p:cNvSpPr/>
-          <p:nvPr/>
-        </p:nvSpPr>
-        <p:spPr>
-          <a:xfrm>
-            <a:off x="640080" y="3648456"/>
-            <a:ext cx="73152" cy="274320"/>
-          </a:xfrm>
-          <a:prstGeom prst="rect">
-            <a:avLst/>
-          </a:prstGeom>
-          <a:solidFill>
-            <a:srgbClr val="269CCB"/>
-          </a:solidFill>
-          <a:ln>
-            <a:noFill/>
-          </a:ln>
-        </p:spPr>
-        <p:style>
-          <a:lnRef idx="1">
-            <a:schemeClr val="accent1"/>
-          </a:lnRef>
-          <a:fillRef idx="3">
-            <a:schemeClr val="accent1"/>
-          </a:fillRef>
-          <a:effectRef idx="2">
-            <a:schemeClr val="accent1"/>
-          </a:effectRef>
-          <a:fontRef idx="minor">
-            <a:schemeClr val="lt1"/>
-          </a:fontRef>
-        </p:style>
-        <p:txBody>
-          <a:bodyPr rtlCol="0" anchor="ctr"/>
-          <a:lstStyle/>
-          <a:p>
-            <a:pPr algn="ctr"/>
-          </a:p>
-        </p:txBody>
-      </p:sp>
-      <p:sp>
-        <p:nvSpPr>
-          <p:cNvPr id="21" name="TextBox 20"/>
-          <p:cNvSpPr txBox="1"/>
-          <p:nvPr/>
-        </p:nvSpPr>
-        <p:spPr>
-          <a:xfrm>
-            <a:off x="1097280" y="3593592"/>
-            <a:ext cx="10362895" cy="402336"/>
-          </a:xfrm>
-          <a:prstGeom prst="rect">
-            <a:avLst/>
-          </a:prstGeom>
-          <a:noFill/>
-        </p:spPr>
-        <p:txBody>
-          <a:bodyPr wrap="square" anchor="ctr"/>
-          <a:lstStyle/>
-          <a:p>
-            <a:r>
-              <a:rPr sz="1500" b="1" i="0">
-                <a:solidFill>
-                  <a:srgbClr val="333333"/>
-                </a:solidFill>
-                <a:latin typeface="Calibri"/>
-              </a:rPr>
-              <a:t>ACTORES Y FRONTERA</a:t>
-            </a:r>
-            <a:r>
-              <a:rPr sz="1500" b="0" i="0">
-                <a:solidFill>
-                  <a:srgbClr val="333333"/>
-                </a:solidFill>
-                <a:latin typeface="Calibri"/>
-              </a:rPr>
-              <a:t> — Quién vive el problema (el dueño del problema), quién más se afecta sin ser usuario, y qué queda </a:t>
-            </a:r>
-            <a:r>
-              <a:rPr sz="1500" b="1" i="0">
-                <a:solidFill>
-                  <a:srgbClr val="333333"/>
-                </a:solidFill>
-                <a:latin typeface="Calibri"/>
-              </a:rPr>
-              <a:t>fuera</a:t>
-            </a:r>
-            <a:r>
-              <a:rPr sz="1500" b="0" i="0">
-                <a:solidFill>
-                  <a:srgbClr val="333333"/>
-                </a:solidFill>
-                <a:latin typeface="Calibri"/>
-              </a:rPr>
-              <a:t> de lo que ustedes van a abordar. Digan además </a:t>
-            </a:r>
-            <a:r>
-              <a:rPr sz="1500" b="1" i="0">
-                <a:solidFill>
-                  <a:srgbClr val="333333"/>
-                </a:solidFill>
-                <a:latin typeface="Calibri"/>
-              </a:rPr>
-              <a:t>a quién le pueden preguntar algo esta semana</a:t>
-            </a:r>
-            <a:r>
-              <a:rPr sz="1500" b="0" i="0">
-                <a:solidFill>
-                  <a:srgbClr val="333333"/>
-                </a:solidFill>
-                <a:latin typeface="Calibri"/>
-              </a:rPr>
-              <a:t>.</a:t>
-            </a:r>
-          </a:p>
-        </p:txBody>
-      </p:sp>
-      <p:sp>
-        <p:nvSpPr>
-          <p:cNvPr id="22" name="Rounded Rectangle 21"/>
-          <p:cNvSpPr/>
-          <p:nvPr/>
-        </p:nvSpPr>
-        <p:spPr>
-          <a:xfrm>
-            <a:off x="457200" y="4178808"/>
-            <a:ext cx="11277295" cy="566928"/>
-          </a:xfrm>
-          <a:prstGeom prst="roundRect">
-            <a:avLst>
-              <a:gd name="adj" fmla="val 12000"/>
-            </a:avLst>
-          </a:prstGeom>
-          <a:solidFill>
-            <a:srgbClr val="F2F2F2"/>
-          </a:solidFill>
-          <a:ln>
-            <a:noFill/>
-          </a:ln>
-        </p:spPr>
-        <p:style>
-          <a:lnRef idx="1">
-            <a:schemeClr val="accent1"/>
-          </a:lnRef>
-          <a:fillRef idx="3">
-            <a:schemeClr val="accent1"/>
-          </a:fillRef>
-          <a:effectRef idx="2">
-            <a:schemeClr val="accent1"/>
-          </a:effectRef>
-          <a:fontRef idx="minor">
-            <a:schemeClr val="lt1"/>
-          </a:fontRef>
-        </p:style>
-        <p:txBody>
-          <a:bodyPr rtlCol="0" anchor="ctr"/>
-          <a:lstStyle/>
-          <a:p>
-            <a:pPr algn="ctr"/>
-          </a:p>
-        </p:txBody>
-      </p:sp>
-      <p:sp>
-        <p:nvSpPr>
-          <p:cNvPr id="23" name="Rectangle 22"/>
-          <p:cNvSpPr/>
-          <p:nvPr/>
-        </p:nvSpPr>
-        <p:spPr>
-          <a:xfrm>
-            <a:off x="640080" y="4325112"/>
-            <a:ext cx="274320" cy="274320"/>
-          </a:xfrm>
-          <a:prstGeom prst="rect">
-            <a:avLst/>
-          </a:prstGeom>
-          <a:solidFill>
-            <a:srgbClr val="FFFFFF"/>
-          </a:solidFill>
-          <a:ln>
-            <a:solidFill>
-              <a:srgbClr val="333333"/>
-            </a:solidFill>
-          </a:ln>
-        </p:spPr>
-        <p:style>
-          <a:lnRef idx="1">
-            <a:schemeClr val="accent1"/>
-          </a:lnRef>
-          <a:fillRef idx="3">
-            <a:schemeClr val="accent1"/>
-          </a:fillRef>
-          <a:effectRef idx="2">
-            <a:schemeClr val="accent1"/>
-          </a:effectRef>
-          <a:fontRef idx="minor">
-            <a:schemeClr val="lt1"/>
-          </a:fontRef>
-        </p:style>
-        <p:txBody>
-          <a:bodyPr rtlCol="0" anchor="ctr"/>
-          <a:lstStyle/>
-          <a:p>
-            <a:pPr algn="ctr"/>
-          </a:p>
-        </p:txBody>
-      </p:sp>
-      <p:sp>
-        <p:nvSpPr>
-          <p:cNvPr id="24" name="Rectangle 23"/>
-          <p:cNvSpPr/>
-          <p:nvPr/>
-        </p:nvSpPr>
-        <p:spPr>
-          <a:xfrm>
-            <a:off x="640080" y="4325112"/>
-            <a:ext cx="73152" cy="274320"/>
-          </a:xfrm>
-          <a:prstGeom prst="rect">
-            <a:avLst/>
-          </a:prstGeom>
-          <a:solidFill>
-            <a:srgbClr val="269CCB"/>
-          </a:solidFill>
-          <a:ln>
-            <a:noFill/>
-          </a:ln>
-        </p:spPr>
-        <p:style>
-          <a:lnRef idx="1">
-            <a:schemeClr val="accent1"/>
-          </a:lnRef>
-          <a:fillRef idx="3">
-            <a:schemeClr val="accent1"/>
-          </a:fillRef>
-          <a:effectRef idx="2">
-            <a:schemeClr val="accent1"/>
-          </a:effectRef>
-          <a:fontRef idx="minor">
-            <a:schemeClr val="lt1"/>
-          </a:fontRef>
-        </p:style>
-        <p:txBody>
-          <a:bodyPr rtlCol="0" anchor="ctr"/>
-          <a:lstStyle/>
-          <a:p>
-            <a:pPr algn="ctr"/>
-          </a:p>
-        </p:txBody>
-      </p:sp>
-      <p:sp>
-        <p:nvSpPr>
-          <p:cNvPr id="25" name="TextBox 24"/>
-          <p:cNvSpPr txBox="1"/>
-          <p:nvPr/>
-        </p:nvSpPr>
-        <p:spPr>
-          <a:xfrm>
-            <a:off x="1097280" y="4270248"/>
-            <a:ext cx="10362895" cy="402336"/>
-          </a:xfrm>
-          <a:prstGeom prst="rect">
-            <a:avLst/>
-          </a:prstGeom>
-          <a:noFill/>
-        </p:spPr>
-        <p:txBody>
-          <a:bodyPr wrap="square" anchor="ctr"/>
-          <a:lstStyle/>
-          <a:p>
-            <a:r>
-              <a:rPr sz="1500" b="1" i="0">
-                <a:solidFill>
-                  <a:srgbClr val="333333"/>
-                </a:solidFill>
-                <a:latin typeface="Calibri"/>
-              </a:rPr>
-              <a:t>EL CRITERIO DE ÉXITO</a:t>
-            </a:r>
-            <a:r>
-              <a:rPr sz="1500" b="0" i="0">
-                <a:solidFill>
-                  <a:srgbClr val="333333"/>
-                </a:solidFill>
-                <a:latin typeface="Calibri"/>
-              </a:rPr>
-              <a:t> — Una frase de la forma: «el proyecto sirvió si &lt;la cifra de la línea base&gt; pasa de X a Y, medido así». Y la causa del árbol que van a atacar.</a:t>
-            </a:r>
-          </a:p>
-        </p:txBody>
-      </p:sp>
-      <p:sp>
-        <p:nvSpPr>
-          <p:cNvPr id="26" name="TextBox 25"/>
           <p:cNvSpPr txBox="1"/>
           <p:nvPr/>
         </p:nvSpPr>
@@ -9895,7 +9188,7 @@
         <p:spPr>
           <a:xfrm>
             <a:off x="0" y="0"/>
-            <a:ext cx="12191695" cy="1170432"/>
+            <a:ext cx="12191695" cy="960120"/>
           </a:xfrm>
           <a:prstGeom prst="rect">
             <a:avLst/>
@@ -9937,7 +9230,7 @@
         </p:nvSpPr>
         <p:spPr>
           <a:xfrm>
-            <a:off x="0" y="1170432"/>
+            <a:off x="0" y="960120"/>
             <a:ext cx="12191695" cy="41148"/>
           </a:xfrm>
           <a:prstGeom prst="rect">
@@ -9981,7 +9274,7 @@
         <p:spPr>
           <a:xfrm>
             <a:off x="457200" y="164592"/>
-            <a:ext cx="11277295" cy="384048"/>
+            <a:ext cx="11277295" cy="502920"/>
           </a:xfrm>
           <a:prstGeom prst="rect">
             <a:avLst/>
@@ -10001,55 +9294,21 @@
                 </a:solidFill>
                 <a:latin typeface="Calibri"/>
               </a:rPr>
-              <a:t>Cómo se expone en 3 minutos</a:t>
-            </a:r>
-          </a:p>
-        </p:txBody>
-      </p:sp>
-      <p:sp>
-        <p:nvSpPr>
-          <p:cNvPr id="5" name="TextBox 4"/>
-          <p:cNvSpPr txBox="1"/>
-          <p:nvPr/>
-        </p:nvSpPr>
-        <p:spPr>
-          <a:xfrm>
-            <a:off x="457200" y="566928"/>
-            <a:ext cx="11277295" cy="411480"/>
-          </a:xfrm>
-          <a:prstGeom prst="rect">
-            <a:avLst/>
-          </a:prstGeom>
-          <a:noFill/>
-        </p:spPr>
-        <p:txBody>
-          <a:bodyPr wrap="square">
-            <a:spAutoFit/>
-          </a:bodyPr>
-          <a:lstStyle/>
-          <a:p>
-            <a:r>
-              <a:rPr sz="1400" b="0" i="0">
-                <a:solidFill>
-                  <a:srgbClr val="B8D8EE"/>
-                </a:solidFill>
-                <a:latin typeface="Calibri"/>
-              </a:rPr>
-              <a:t>Habla el vocero con la pantalla ya compartida · cronómetro en pantalla · se corta al llegar a cero</a:t>
-            </a:r>
-          </a:p>
-        </p:txBody>
-      </p:sp>
-      <p:sp>
-        <p:nvSpPr>
-          <p:cNvPr id="6" name="Rounded Rectangle 5"/>
+              <a:t>Guion de la exposicion, con tiempos</a:t>
+            </a:r>
+          </a:p>
+        </p:txBody>
+      </p:sp>
+      <p:sp>
+        <p:nvSpPr>
+          <p:cNvPr id="5" name="Rounded Rectangle 4"/>
           <p:cNvSpPr/>
           <p:nvPr/>
         </p:nvSpPr>
         <p:spPr>
           <a:xfrm>
-            <a:off x="457200" y="1444752"/>
-            <a:ext cx="11277295" cy="908913"/>
+            <a:off x="457200" y="1261872"/>
+            <a:ext cx="11277295" cy="5093208"/>
           </a:xfrm>
           <a:prstGeom prst="roundRect">
             <a:avLst>
@@ -10057,7 +9316,7 @@
             </a:avLst>
           </a:prstGeom>
           <a:solidFill>
-            <a:srgbClr val="F2F2F2"/>
+            <a:srgbClr val="1E2A38"/>
           </a:solidFill>
           <a:ln>
             <a:noFill/>
@@ -10087,19 +9346,17 @@
       </p:sp>
       <p:sp>
         <p:nvSpPr>
-          <p:cNvPr id="7" name="Rounded Rectangle 6"/>
+          <p:cNvPr id="6" name="Rectangle 5"/>
           <p:cNvSpPr/>
           <p:nvPr/>
         </p:nvSpPr>
         <p:spPr>
           <a:xfrm>
-            <a:off x="594360" y="1679752"/>
-            <a:ext cx="438912" cy="438912"/>
-          </a:xfrm>
-          <a:prstGeom prst="roundRect">
-            <a:avLst>
-              <a:gd name="adj" fmla="val 12000"/>
-            </a:avLst>
+            <a:off x="457200" y="1261872"/>
+            <a:ext cx="11277295" cy="320040"/>
+          </a:xfrm>
+          <a:prstGeom prst="rect">
+            <a:avLst/>
           </a:prstGeom>
           <a:solidFill>
             <a:srgbClr val="095292"/>
@@ -10132,14 +9389,46 @@
       </p:sp>
       <p:sp>
         <p:nvSpPr>
+          <p:cNvPr id="7" name="TextBox 6"/>
+          <p:cNvSpPr txBox="1"/>
+          <p:nvPr/>
+        </p:nvSpPr>
+        <p:spPr>
+          <a:xfrm>
+            <a:off x="685800" y="1307592"/>
+            <a:ext cx="10820095" cy="256032"/>
+          </a:xfrm>
+          <a:prstGeom prst="rect">
+            <a:avLst/>
+          </a:prstGeom>
+          <a:noFill/>
+        </p:spPr>
+        <p:txBody>
+          <a:bodyPr wrap="square" anchor="ctr"/>
+          <a:lstStyle/>
+          <a:p>
+            <a:r>
+              <a:rPr sz="1000" b="1" i="0">
+                <a:solidFill>
+                  <a:srgbClr val="269CCB"/>
+                </a:solidFill>
+                <a:latin typeface="Calibri"/>
+              </a:rPr>
+              <a:t>● ● ●</a:t>
+            </a:r>
+          </a:p>
+        </p:txBody>
+      </p:sp>
+      <p:sp>
+        <p:nvSpPr>
           <p:cNvPr id="8" name="TextBox 7"/>
           <p:cNvSpPr txBox="1"/>
           <p:nvPr/>
         </p:nvSpPr>
         <p:spPr>
           <a:xfrm>
-            <a:off x="594360" y="1679752"/>
-            <a:ext cx="438912" cy="438912"/>
+            <a:off x="777240" y="1719072"/>
+            <a:ext cx="10637215" cy="4453128"/>
           </a:xfrm>
           <a:prstGeom prst="rect">
             <a:avLst/>
@@ -10147,18 +9436,168 @@
           <a:noFill/>
         </p:spPr>
         <p:txBody>
-          <a:bodyPr wrap="square" anchor="ctr"/>
-          <a:lstStyle/>
-          <a:p>
-            <a:pPr algn="ctr"/>
-            <a:r>
-              <a:rPr sz="1600" b="1" i="0">
+          <a:bodyPr wrap="square">
+            <a:spAutoFit/>
+          </a:bodyPr>
+          <a:lstStyle/>
+          <a:p>
+            <a:pPr>
+              <a:spcAft>
+                <a:spcPts val="400"/>
+              </a:spcAft>
+            </a:pPr>
+            <a:r>
+              <a:rPr sz="1400" b="0" i="0">
                 <a:solidFill>
                   <a:srgbClr val="FFFFFF"/>
                 </a:solidFill>
                 <a:latin typeface="Calibri"/>
               </a:rPr>
-              <a:t>1</a:t>
+              <a:t># Exposicion de hoy · lo que se califica es el reparto, no el total</a:t>
+            </a:r>
+          </a:p>
+          <a:p>
+            <a:pPr>
+              <a:spcAft>
+                <a:spcPts val="400"/>
+              </a:spcAft>
+            </a:pPr>
+            <a:r>
+              <a:rPr sz="1400" b="0" i="0">
+                <a:solidFill>
+                  <a:srgbClr val="FFFFFF"/>
+                </a:solidFill>
+                <a:latin typeface="Calibri"/>
+              </a:rPr>
+              <a:t/>
+            </a:r>
+          </a:p>
+          <a:p>
+            <a:pPr>
+              <a:spcAft>
+                <a:spcPts val="400"/>
+              </a:spcAft>
+            </a:pPr>
+            <a:r>
+              <a:rPr sz="1400" b="0" i="0">
+                <a:solidFill>
+                  <a:srgbClr val="FFFFFF"/>
+                </a:solidFill>
+                <a:latin typeface="Calibri"/>
+              </a:rPr>
+              <a:t>40 s · El problema en una frase    Léanla tal cual está escrita. Sin tecnología</a:t>
+            </a:r>
+          </a:p>
+          <a:p>
+            <a:pPr>
+              <a:spcAft>
+                <a:spcPts val="400"/>
+              </a:spcAft>
+            </a:pPr>
+            <a:r>
+              <a:rPr sz="1400" b="0" i="0">
+                <a:solidFill>
+                  <a:srgbClr val="FFFFFF"/>
+                </a:solidFill>
+                <a:latin typeface="Calibri"/>
+              </a:rPr>
+              <a:t>30 s · La cifra                    La línea base y cómo la obtuvieron. Es el mi</a:t>
+            </a:r>
+          </a:p>
+          <a:p>
+            <a:pPr>
+              <a:spcAft>
+                <a:spcPts val="400"/>
+              </a:spcAft>
+            </a:pPr>
+            <a:r>
+              <a:rPr sz="1400" b="0" i="0">
+                <a:solidFill>
+                  <a:srgbClr val="FFFFFF"/>
+                </a:solidFill>
+                <a:latin typeface="Calibri"/>
+              </a:rPr>
+              <a:t>50 s · El árbol                    Muestren el dibujo y señalen la causa que va</a:t>
+            </a:r>
+          </a:p>
+          <a:p>
+            <a:pPr>
+              <a:spcAft>
+                <a:spcPts val="400"/>
+              </a:spcAft>
+            </a:pPr>
+            <a:r>
+              <a:rPr sz="1400" b="0" i="0">
+                <a:solidFill>
+                  <a:srgbClr val="FFFFFF"/>
+                </a:solidFill>
+                <a:latin typeface="Calibri"/>
+              </a:rPr>
+              <a:t>40 s · Actores y frontera          Quién vive el problema, y a quién le van a p</a:t>
+            </a:r>
+          </a:p>
+          <a:p>
+            <a:pPr>
+              <a:spcAft>
+                <a:spcPts val="400"/>
+              </a:spcAft>
+            </a:pPr>
+            <a:r>
+              <a:rPr sz="1400" b="0" i="0">
+                <a:solidFill>
+                  <a:srgbClr val="FFFFFF"/>
+                </a:solidFill>
+                <a:latin typeface="Calibri"/>
+              </a:rPr>
+              <a:t>20 s · El criterio de éxito        De X a Y, medido así.</a:t>
+            </a:r>
+          </a:p>
+          <a:p>
+            <a:pPr>
+              <a:spcAft>
+                <a:spcPts val="400"/>
+              </a:spcAft>
+            </a:pPr>
+            <a:r>
+              <a:rPr sz="1400" b="0" i="0">
+                <a:solidFill>
+                  <a:srgbClr val="FFFFFF"/>
+                </a:solidFill>
+                <a:latin typeface="Calibri"/>
+              </a:rPr>
+              <a:t/>
+            </a:r>
+          </a:p>
+          <a:p>
+            <a:pPr>
+              <a:spcAft>
+                <a:spcPts val="400"/>
+              </a:spcAft>
+            </a:pPr>
+            <a:r>
+              <a:rPr sz="1400" b="0" i="0">
+                <a:solidFill>
+                  <a:srgbClr val="FFFFFF"/>
+                </a:solidFill>
+                <a:latin typeface="Calibri"/>
+              </a:rPr>
+              <a:t># El tramo marcado como obligatorio es el que el jurado califica:</a:t>
+            </a:r>
+          </a:p>
+          <a:p>
+            <a:pPr>
+              <a:spcAft>
+                <a:spcPts val="400"/>
+              </a:spcAft>
+            </a:pPr>
+            <a:r>
+              <a:rPr sz="1400" b="0" i="0">
+                <a:solidFill>
+                  <a:srgbClr val="FFFFFF"/>
+                </a:solidFill>
+                <a:latin typeface="Calibri"/>
+              </a:rPr>
+              <a:t># si el guion no esta cronometrado, es el que se queda sin tiempo.</a:t>
             </a:r>
           </a:p>
         </p:txBody>
@@ -10166,738 +9605,6 @@
       <p:sp>
         <p:nvSpPr>
           <p:cNvPr id="9" name="TextBox 8"/>
-          <p:cNvSpPr txBox="1"/>
-          <p:nvPr/>
-        </p:nvSpPr>
-        <p:spPr>
-          <a:xfrm>
-            <a:off x="1188720" y="1536192"/>
-            <a:ext cx="10271455" cy="744321"/>
-          </a:xfrm>
-          <a:prstGeom prst="rect">
-            <a:avLst/>
-          </a:prstGeom>
-          <a:noFill/>
-        </p:spPr>
-        <p:txBody>
-          <a:bodyPr wrap="square" anchor="ctr"/>
-          <a:lstStyle/>
-          <a:p>
-            <a:r>
-              <a:rPr sz="1500" b="1" i="0">
-                <a:solidFill>
-                  <a:srgbClr val="095292"/>
-                </a:solidFill>
-                <a:latin typeface="Calibri"/>
-              </a:rPr>
-              <a:t>40 s · El problema en una frase</a:t>
-            </a:r>
-          </a:p>
-          <a:p>
-            <a:pPr>
-              <a:spcBef>
-                <a:spcPts val="200"/>
-              </a:spcBef>
-            </a:pPr>
-            <a:r>
-              <a:rPr sz="1300" b="0" i="0">
-                <a:solidFill>
-                  <a:srgbClr val="333333"/>
-                </a:solidFill>
-                <a:latin typeface="Calibri"/>
-              </a:rPr>
-              <a:t>Léanla tal cual está escrita. Sin tecnología dentro.</a:t>
-            </a:r>
-          </a:p>
-        </p:txBody>
-      </p:sp>
-      <p:sp>
-        <p:nvSpPr>
-          <p:cNvPr id="10" name="Rounded Rectangle 9"/>
-          <p:cNvSpPr/>
-          <p:nvPr/>
-        </p:nvSpPr>
-        <p:spPr>
-          <a:xfrm>
-            <a:off x="457200" y="2445105"/>
-            <a:ext cx="11277295" cy="908913"/>
-          </a:xfrm>
-          <a:prstGeom prst="roundRect">
-            <a:avLst>
-              <a:gd name="adj" fmla="val 12000"/>
-            </a:avLst>
-          </a:prstGeom>
-          <a:solidFill>
-            <a:srgbClr val="E8F4FA"/>
-          </a:solidFill>
-          <a:ln>
-            <a:noFill/>
-          </a:ln>
-        </p:spPr>
-        <p:style>
-          <a:lnRef idx="1">
-            <a:schemeClr val="accent1"/>
-          </a:lnRef>
-          <a:fillRef idx="3">
-            <a:schemeClr val="accent1"/>
-          </a:fillRef>
-          <a:effectRef idx="2">
-            <a:schemeClr val="accent1"/>
-          </a:effectRef>
-          <a:fontRef idx="minor">
-            <a:schemeClr val="lt1"/>
-          </a:fontRef>
-        </p:style>
-        <p:txBody>
-          <a:bodyPr rtlCol="0" anchor="ctr"/>
-          <a:lstStyle/>
-          <a:p>
-            <a:pPr algn="ctr"/>
-          </a:p>
-        </p:txBody>
-      </p:sp>
-      <p:sp>
-        <p:nvSpPr>
-          <p:cNvPr id="11" name="Rounded Rectangle 10"/>
-          <p:cNvSpPr/>
-          <p:nvPr/>
-        </p:nvSpPr>
-        <p:spPr>
-          <a:xfrm>
-            <a:off x="594360" y="2680106"/>
-            <a:ext cx="438912" cy="438912"/>
-          </a:xfrm>
-          <a:prstGeom prst="roundRect">
-            <a:avLst>
-              <a:gd name="adj" fmla="val 12000"/>
-            </a:avLst>
-          </a:prstGeom>
-          <a:solidFill>
-            <a:srgbClr val="095292"/>
-          </a:solidFill>
-          <a:ln>
-            <a:noFill/>
-          </a:ln>
-        </p:spPr>
-        <p:style>
-          <a:lnRef idx="1">
-            <a:schemeClr val="accent1"/>
-          </a:lnRef>
-          <a:fillRef idx="3">
-            <a:schemeClr val="accent1"/>
-          </a:fillRef>
-          <a:effectRef idx="2">
-            <a:schemeClr val="accent1"/>
-          </a:effectRef>
-          <a:fontRef idx="minor">
-            <a:schemeClr val="lt1"/>
-          </a:fontRef>
-        </p:style>
-        <p:txBody>
-          <a:bodyPr rtlCol="0" anchor="ctr"/>
-          <a:lstStyle/>
-          <a:p>
-            <a:pPr algn="ctr"/>
-          </a:p>
-        </p:txBody>
-      </p:sp>
-      <p:sp>
-        <p:nvSpPr>
-          <p:cNvPr id="12" name="TextBox 11"/>
-          <p:cNvSpPr txBox="1"/>
-          <p:nvPr/>
-        </p:nvSpPr>
-        <p:spPr>
-          <a:xfrm>
-            <a:off x="594360" y="2680106"/>
-            <a:ext cx="438912" cy="438912"/>
-          </a:xfrm>
-          <a:prstGeom prst="rect">
-            <a:avLst/>
-          </a:prstGeom>
-          <a:noFill/>
-        </p:spPr>
-        <p:txBody>
-          <a:bodyPr wrap="square" anchor="ctr"/>
-          <a:lstStyle/>
-          <a:p>
-            <a:pPr algn="ctr"/>
-            <a:r>
-              <a:rPr sz="1600" b="1" i="0">
-                <a:solidFill>
-                  <a:srgbClr val="FFFFFF"/>
-                </a:solidFill>
-                <a:latin typeface="Calibri"/>
-              </a:rPr>
-              <a:t>2</a:t>
-            </a:r>
-          </a:p>
-        </p:txBody>
-      </p:sp>
-      <p:sp>
-        <p:nvSpPr>
-          <p:cNvPr id="13" name="TextBox 12"/>
-          <p:cNvSpPr txBox="1"/>
-          <p:nvPr/>
-        </p:nvSpPr>
-        <p:spPr>
-          <a:xfrm>
-            <a:off x="1188720" y="2536545"/>
-            <a:ext cx="10271455" cy="744321"/>
-          </a:xfrm>
-          <a:prstGeom prst="rect">
-            <a:avLst/>
-          </a:prstGeom>
-          <a:noFill/>
-        </p:spPr>
-        <p:txBody>
-          <a:bodyPr wrap="square" anchor="ctr"/>
-          <a:lstStyle/>
-          <a:p>
-            <a:r>
-              <a:rPr sz="1500" b="1" i="0">
-                <a:solidFill>
-                  <a:srgbClr val="095292"/>
-                </a:solidFill>
-                <a:latin typeface="Calibri"/>
-              </a:rPr>
-              <a:t>30 s · La cifra</a:t>
-            </a:r>
-          </a:p>
-          <a:p>
-            <a:pPr>
-              <a:spcBef>
-                <a:spcPts val="200"/>
-              </a:spcBef>
-            </a:pPr>
-            <a:r>
-              <a:rPr sz="1300" b="0" i="0">
-                <a:solidFill>
-                  <a:srgbClr val="333333"/>
-                </a:solidFill>
-                <a:latin typeface="Calibri"/>
-              </a:rPr>
-              <a:t>La línea base y cómo la obtuvieron. Es el minuto obligatorio.</a:t>
-            </a:r>
-          </a:p>
-        </p:txBody>
-      </p:sp>
-      <p:sp>
-        <p:nvSpPr>
-          <p:cNvPr id="14" name="Rounded Rectangle 13"/>
-          <p:cNvSpPr/>
-          <p:nvPr/>
-        </p:nvSpPr>
-        <p:spPr>
-          <a:xfrm>
-            <a:off x="457200" y="3445459"/>
-            <a:ext cx="11277295" cy="908913"/>
-          </a:xfrm>
-          <a:prstGeom prst="roundRect">
-            <a:avLst>
-              <a:gd name="adj" fmla="val 12000"/>
-            </a:avLst>
-          </a:prstGeom>
-          <a:solidFill>
-            <a:srgbClr val="F2F2F2"/>
-          </a:solidFill>
-          <a:ln>
-            <a:noFill/>
-          </a:ln>
-        </p:spPr>
-        <p:style>
-          <a:lnRef idx="1">
-            <a:schemeClr val="accent1"/>
-          </a:lnRef>
-          <a:fillRef idx="3">
-            <a:schemeClr val="accent1"/>
-          </a:fillRef>
-          <a:effectRef idx="2">
-            <a:schemeClr val="accent1"/>
-          </a:effectRef>
-          <a:fontRef idx="minor">
-            <a:schemeClr val="lt1"/>
-          </a:fontRef>
-        </p:style>
-        <p:txBody>
-          <a:bodyPr rtlCol="0" anchor="ctr"/>
-          <a:lstStyle/>
-          <a:p>
-            <a:pPr algn="ctr"/>
-          </a:p>
-        </p:txBody>
-      </p:sp>
-      <p:sp>
-        <p:nvSpPr>
-          <p:cNvPr id="15" name="Rounded Rectangle 14"/>
-          <p:cNvSpPr/>
-          <p:nvPr/>
-        </p:nvSpPr>
-        <p:spPr>
-          <a:xfrm>
-            <a:off x="594360" y="3680460"/>
-            <a:ext cx="438912" cy="438912"/>
-          </a:xfrm>
-          <a:prstGeom prst="roundRect">
-            <a:avLst>
-              <a:gd name="adj" fmla="val 12000"/>
-            </a:avLst>
-          </a:prstGeom>
-          <a:solidFill>
-            <a:srgbClr val="095292"/>
-          </a:solidFill>
-          <a:ln>
-            <a:noFill/>
-          </a:ln>
-        </p:spPr>
-        <p:style>
-          <a:lnRef idx="1">
-            <a:schemeClr val="accent1"/>
-          </a:lnRef>
-          <a:fillRef idx="3">
-            <a:schemeClr val="accent1"/>
-          </a:fillRef>
-          <a:effectRef idx="2">
-            <a:schemeClr val="accent1"/>
-          </a:effectRef>
-          <a:fontRef idx="minor">
-            <a:schemeClr val="lt1"/>
-          </a:fontRef>
-        </p:style>
-        <p:txBody>
-          <a:bodyPr rtlCol="0" anchor="ctr"/>
-          <a:lstStyle/>
-          <a:p>
-            <a:pPr algn="ctr"/>
-          </a:p>
-        </p:txBody>
-      </p:sp>
-      <p:sp>
-        <p:nvSpPr>
-          <p:cNvPr id="16" name="TextBox 15"/>
-          <p:cNvSpPr txBox="1"/>
-          <p:nvPr/>
-        </p:nvSpPr>
-        <p:spPr>
-          <a:xfrm>
-            <a:off x="594360" y="3680460"/>
-            <a:ext cx="438912" cy="438912"/>
-          </a:xfrm>
-          <a:prstGeom prst="rect">
-            <a:avLst/>
-          </a:prstGeom>
-          <a:noFill/>
-        </p:spPr>
-        <p:txBody>
-          <a:bodyPr wrap="square" anchor="ctr"/>
-          <a:lstStyle/>
-          <a:p>
-            <a:pPr algn="ctr"/>
-            <a:r>
-              <a:rPr sz="1600" b="1" i="0">
-                <a:solidFill>
-                  <a:srgbClr val="FFFFFF"/>
-                </a:solidFill>
-                <a:latin typeface="Calibri"/>
-              </a:rPr>
-              <a:t>3</a:t>
-            </a:r>
-          </a:p>
-        </p:txBody>
-      </p:sp>
-      <p:sp>
-        <p:nvSpPr>
-          <p:cNvPr id="17" name="TextBox 16"/>
-          <p:cNvSpPr txBox="1"/>
-          <p:nvPr/>
-        </p:nvSpPr>
-        <p:spPr>
-          <a:xfrm>
-            <a:off x="1188720" y="3536899"/>
-            <a:ext cx="10271455" cy="744321"/>
-          </a:xfrm>
-          <a:prstGeom prst="rect">
-            <a:avLst/>
-          </a:prstGeom>
-          <a:noFill/>
-        </p:spPr>
-        <p:txBody>
-          <a:bodyPr wrap="square" anchor="ctr"/>
-          <a:lstStyle/>
-          <a:p>
-            <a:r>
-              <a:rPr sz="1500" b="1" i="0">
-                <a:solidFill>
-                  <a:srgbClr val="095292"/>
-                </a:solidFill>
-                <a:latin typeface="Calibri"/>
-              </a:rPr>
-              <a:t>50 s · El árbol</a:t>
-            </a:r>
-          </a:p>
-          <a:p>
-            <a:pPr>
-              <a:spcBef>
-                <a:spcPts val="200"/>
-              </a:spcBef>
-            </a:pPr>
-            <a:r>
-              <a:rPr sz="1300" b="0" i="0">
-                <a:solidFill>
-                  <a:srgbClr val="333333"/>
-                </a:solidFill>
-                <a:latin typeface="Calibri"/>
-              </a:rPr>
-              <a:t>Muestren el dibujo y señalen la causa que van a atacar.</a:t>
-            </a:r>
-          </a:p>
-        </p:txBody>
-      </p:sp>
-      <p:sp>
-        <p:nvSpPr>
-          <p:cNvPr id="18" name="Rounded Rectangle 17"/>
-          <p:cNvSpPr/>
-          <p:nvPr/>
-        </p:nvSpPr>
-        <p:spPr>
-          <a:xfrm>
-            <a:off x="457200" y="4445812"/>
-            <a:ext cx="11277295" cy="908913"/>
-          </a:xfrm>
-          <a:prstGeom prst="roundRect">
-            <a:avLst>
-              <a:gd name="adj" fmla="val 12000"/>
-            </a:avLst>
-          </a:prstGeom>
-          <a:solidFill>
-            <a:srgbClr val="E8F4FA"/>
-          </a:solidFill>
-          <a:ln>
-            <a:noFill/>
-          </a:ln>
-        </p:spPr>
-        <p:style>
-          <a:lnRef idx="1">
-            <a:schemeClr val="accent1"/>
-          </a:lnRef>
-          <a:fillRef idx="3">
-            <a:schemeClr val="accent1"/>
-          </a:fillRef>
-          <a:effectRef idx="2">
-            <a:schemeClr val="accent1"/>
-          </a:effectRef>
-          <a:fontRef idx="minor">
-            <a:schemeClr val="lt1"/>
-          </a:fontRef>
-        </p:style>
-        <p:txBody>
-          <a:bodyPr rtlCol="0" anchor="ctr"/>
-          <a:lstStyle/>
-          <a:p>
-            <a:pPr algn="ctr"/>
-          </a:p>
-        </p:txBody>
-      </p:sp>
-      <p:sp>
-        <p:nvSpPr>
-          <p:cNvPr id="19" name="Rounded Rectangle 18"/>
-          <p:cNvSpPr/>
-          <p:nvPr/>
-        </p:nvSpPr>
-        <p:spPr>
-          <a:xfrm>
-            <a:off x="594360" y="4680813"/>
-            <a:ext cx="438912" cy="438912"/>
-          </a:xfrm>
-          <a:prstGeom prst="roundRect">
-            <a:avLst>
-              <a:gd name="adj" fmla="val 12000"/>
-            </a:avLst>
-          </a:prstGeom>
-          <a:solidFill>
-            <a:srgbClr val="095292"/>
-          </a:solidFill>
-          <a:ln>
-            <a:noFill/>
-          </a:ln>
-        </p:spPr>
-        <p:style>
-          <a:lnRef idx="1">
-            <a:schemeClr val="accent1"/>
-          </a:lnRef>
-          <a:fillRef idx="3">
-            <a:schemeClr val="accent1"/>
-          </a:fillRef>
-          <a:effectRef idx="2">
-            <a:schemeClr val="accent1"/>
-          </a:effectRef>
-          <a:fontRef idx="minor">
-            <a:schemeClr val="lt1"/>
-          </a:fontRef>
-        </p:style>
-        <p:txBody>
-          <a:bodyPr rtlCol="0" anchor="ctr"/>
-          <a:lstStyle/>
-          <a:p>
-            <a:pPr algn="ctr"/>
-          </a:p>
-        </p:txBody>
-      </p:sp>
-      <p:sp>
-        <p:nvSpPr>
-          <p:cNvPr id="20" name="TextBox 19"/>
-          <p:cNvSpPr txBox="1"/>
-          <p:nvPr/>
-        </p:nvSpPr>
-        <p:spPr>
-          <a:xfrm>
-            <a:off x="594360" y="4680813"/>
-            <a:ext cx="438912" cy="438912"/>
-          </a:xfrm>
-          <a:prstGeom prst="rect">
-            <a:avLst/>
-          </a:prstGeom>
-          <a:noFill/>
-        </p:spPr>
-        <p:txBody>
-          <a:bodyPr wrap="square" anchor="ctr"/>
-          <a:lstStyle/>
-          <a:p>
-            <a:pPr algn="ctr"/>
-            <a:r>
-              <a:rPr sz="1600" b="1" i="0">
-                <a:solidFill>
-                  <a:srgbClr val="FFFFFF"/>
-                </a:solidFill>
-                <a:latin typeface="Calibri"/>
-              </a:rPr>
-              <a:t>4</a:t>
-            </a:r>
-          </a:p>
-        </p:txBody>
-      </p:sp>
-      <p:sp>
-        <p:nvSpPr>
-          <p:cNvPr id="21" name="TextBox 20"/>
-          <p:cNvSpPr txBox="1"/>
-          <p:nvPr/>
-        </p:nvSpPr>
-        <p:spPr>
-          <a:xfrm>
-            <a:off x="1188720" y="4537252"/>
-            <a:ext cx="10271455" cy="744321"/>
-          </a:xfrm>
-          <a:prstGeom prst="rect">
-            <a:avLst/>
-          </a:prstGeom>
-          <a:noFill/>
-        </p:spPr>
-        <p:txBody>
-          <a:bodyPr wrap="square" anchor="ctr"/>
-          <a:lstStyle/>
-          <a:p>
-            <a:r>
-              <a:rPr sz="1500" b="1" i="0">
-                <a:solidFill>
-                  <a:srgbClr val="095292"/>
-                </a:solidFill>
-                <a:latin typeface="Calibri"/>
-              </a:rPr>
-              <a:t>40 s · Actores y frontera</a:t>
-            </a:r>
-          </a:p>
-          <a:p>
-            <a:pPr>
-              <a:spcBef>
-                <a:spcPts val="200"/>
-              </a:spcBef>
-            </a:pPr>
-            <a:r>
-              <a:rPr sz="1300" b="0" i="0">
-                <a:solidFill>
-                  <a:srgbClr val="333333"/>
-                </a:solidFill>
-                <a:latin typeface="Calibri"/>
-              </a:rPr>
-              <a:t>Quién vive el problema, y a quién le van a preguntar esta semana.</a:t>
-            </a:r>
-          </a:p>
-        </p:txBody>
-      </p:sp>
-      <p:sp>
-        <p:nvSpPr>
-          <p:cNvPr id="22" name="Rounded Rectangle 21"/>
-          <p:cNvSpPr/>
-          <p:nvPr/>
-        </p:nvSpPr>
-        <p:spPr>
-          <a:xfrm>
-            <a:off x="457200" y="5446166"/>
-            <a:ext cx="11277295" cy="908913"/>
-          </a:xfrm>
-          <a:prstGeom prst="roundRect">
-            <a:avLst>
-              <a:gd name="adj" fmla="val 12000"/>
-            </a:avLst>
-          </a:prstGeom>
-          <a:solidFill>
-            <a:srgbClr val="F2F2F2"/>
-          </a:solidFill>
-          <a:ln>
-            <a:noFill/>
-          </a:ln>
-        </p:spPr>
-        <p:style>
-          <a:lnRef idx="1">
-            <a:schemeClr val="accent1"/>
-          </a:lnRef>
-          <a:fillRef idx="3">
-            <a:schemeClr val="accent1"/>
-          </a:fillRef>
-          <a:effectRef idx="2">
-            <a:schemeClr val="accent1"/>
-          </a:effectRef>
-          <a:fontRef idx="minor">
-            <a:schemeClr val="lt1"/>
-          </a:fontRef>
-        </p:style>
-        <p:txBody>
-          <a:bodyPr rtlCol="0" anchor="ctr"/>
-          <a:lstStyle/>
-          <a:p>
-            <a:pPr algn="ctr"/>
-          </a:p>
-        </p:txBody>
-      </p:sp>
-      <p:sp>
-        <p:nvSpPr>
-          <p:cNvPr id="23" name="Rounded Rectangle 22"/>
-          <p:cNvSpPr/>
-          <p:nvPr/>
-        </p:nvSpPr>
-        <p:spPr>
-          <a:xfrm>
-            <a:off x="594360" y="5681167"/>
-            <a:ext cx="438912" cy="438912"/>
-          </a:xfrm>
-          <a:prstGeom prst="roundRect">
-            <a:avLst>
-              <a:gd name="adj" fmla="val 12000"/>
-            </a:avLst>
-          </a:prstGeom>
-          <a:solidFill>
-            <a:srgbClr val="095292"/>
-          </a:solidFill>
-          <a:ln>
-            <a:noFill/>
-          </a:ln>
-        </p:spPr>
-        <p:style>
-          <a:lnRef idx="1">
-            <a:schemeClr val="accent1"/>
-          </a:lnRef>
-          <a:fillRef idx="3">
-            <a:schemeClr val="accent1"/>
-          </a:fillRef>
-          <a:effectRef idx="2">
-            <a:schemeClr val="accent1"/>
-          </a:effectRef>
-          <a:fontRef idx="minor">
-            <a:schemeClr val="lt1"/>
-          </a:fontRef>
-        </p:style>
-        <p:txBody>
-          <a:bodyPr rtlCol="0" anchor="ctr"/>
-          <a:lstStyle/>
-          <a:p>
-            <a:pPr algn="ctr"/>
-          </a:p>
-        </p:txBody>
-      </p:sp>
-      <p:sp>
-        <p:nvSpPr>
-          <p:cNvPr id="24" name="TextBox 23"/>
-          <p:cNvSpPr txBox="1"/>
-          <p:nvPr/>
-        </p:nvSpPr>
-        <p:spPr>
-          <a:xfrm>
-            <a:off x="594360" y="5681167"/>
-            <a:ext cx="438912" cy="438912"/>
-          </a:xfrm>
-          <a:prstGeom prst="rect">
-            <a:avLst/>
-          </a:prstGeom>
-          <a:noFill/>
-        </p:spPr>
-        <p:txBody>
-          <a:bodyPr wrap="square" anchor="ctr"/>
-          <a:lstStyle/>
-          <a:p>
-            <a:pPr algn="ctr"/>
-            <a:r>
-              <a:rPr sz="1600" b="1" i="0">
-                <a:solidFill>
-                  <a:srgbClr val="FFFFFF"/>
-                </a:solidFill>
-                <a:latin typeface="Calibri"/>
-              </a:rPr>
-              <a:t>5</a:t>
-            </a:r>
-          </a:p>
-        </p:txBody>
-      </p:sp>
-      <p:sp>
-        <p:nvSpPr>
-          <p:cNvPr id="25" name="TextBox 24"/>
-          <p:cNvSpPr txBox="1"/>
-          <p:nvPr/>
-        </p:nvSpPr>
-        <p:spPr>
-          <a:xfrm>
-            <a:off x="1188720" y="5537606"/>
-            <a:ext cx="10271455" cy="744321"/>
-          </a:xfrm>
-          <a:prstGeom prst="rect">
-            <a:avLst/>
-          </a:prstGeom>
-          <a:noFill/>
-        </p:spPr>
-        <p:txBody>
-          <a:bodyPr wrap="square" anchor="ctr"/>
-          <a:lstStyle/>
-          <a:p>
-            <a:r>
-              <a:rPr sz="1500" b="1" i="0">
-                <a:solidFill>
-                  <a:srgbClr val="095292"/>
-                </a:solidFill>
-                <a:latin typeface="Calibri"/>
-              </a:rPr>
-              <a:t>20 s · El criterio de éxito</a:t>
-            </a:r>
-          </a:p>
-          <a:p>
-            <a:pPr>
-              <a:spcBef>
-                <a:spcPts val="200"/>
-              </a:spcBef>
-            </a:pPr>
-            <a:r>
-              <a:rPr sz="1300" b="0" i="0">
-                <a:solidFill>
-                  <a:srgbClr val="333333"/>
-                </a:solidFill>
-                <a:latin typeface="Calibri"/>
-              </a:rPr>
-              <a:t>De X a Y, medido así.</a:t>
-            </a:r>
-          </a:p>
-        </p:txBody>
-      </p:sp>
-      <p:sp>
-        <p:nvSpPr>
-          <p:cNvPr id="26" name="TextBox 25"/>
           <p:cNvSpPr txBox="1"/>
           <p:nvPr/>
         </p:nvSpPr>
@@ -10965,7 +9672,7 @@
         <p:spPr>
           <a:xfrm>
             <a:off x="0" y="0"/>
-            <a:ext cx="12191695" cy="960120"/>
+            <a:ext cx="12191695" cy="1170432"/>
           </a:xfrm>
           <a:prstGeom prst="rect">
             <a:avLst/>
@@ -11007,7 +9714,7 @@
         </p:nvSpPr>
         <p:spPr>
           <a:xfrm>
-            <a:off x="0" y="960120"/>
+            <a:off x="0" y="1170432"/>
             <a:ext cx="12191695" cy="41148"/>
           </a:xfrm>
           <a:prstGeom prst="rect">
@@ -11051,7 +9758,7 @@
         <p:spPr>
           <a:xfrm>
             <a:off x="457200" y="164592"/>
-            <a:ext cx="11277295" cy="502920"/>
+            <a:ext cx="11277295" cy="384048"/>
           </a:xfrm>
           <a:prstGeom prst="rect">
             <a:avLst/>
@@ -11071,7 +9778,7 @@
                 </a:solidFill>
                 <a:latin typeface="Calibri"/>
               </a:rPr>
-              <a:t>Para la Clase 7</a:t>
+              <a:t>Taller de hoy: Ficha del problema del proyecto</a:t>
             </a:r>
           </a:p>
         </p:txBody>
@@ -11084,8 +9791,8 @@
         </p:nvSpPr>
         <p:spPr>
           <a:xfrm>
-            <a:off x="457200" y="1170432"/>
-            <a:ext cx="11277295" cy="5230368"/>
+            <a:off x="457200" y="566928"/>
+            <a:ext cx="11277295" cy="411480"/>
           </a:xfrm>
           <a:prstGeom prst="rect">
             <a:avLst/>
@@ -11098,216 +9805,999 @@
           </a:bodyPr>
           <a:lstStyle/>
           <a:p>
-            <a:pPr>
-              <a:spcAft>
-                <a:spcPts val="800"/>
-              </a:spcAft>
-            </a:pPr>
-            <a:r>
-              <a:rPr sz="2000" b="0" i="0">
-                <a:solidFill>
-                  <a:srgbClr val="333333"/>
-                </a:solidFill>
-                <a:latin typeface="Calibri"/>
-              </a:rPr>
-              <a:t>–   </a:t>
-            </a:r>
-            <a:r>
-              <a:rPr sz="2000" b="1" i="0">
-                <a:solidFill>
-                  <a:srgbClr val="333333"/>
-                </a:solidFill>
-                <a:latin typeface="Calibri"/>
-              </a:rPr>
-              <a:t>Trabajo dirigido:</a:t>
-            </a:r>
-            <a:r>
-              <a:rPr sz="2000" b="0" i="0">
-                <a:solidFill>
-                  <a:srgbClr val="333333"/>
-                </a:solidFill>
-                <a:latin typeface="Calibri"/>
-              </a:rPr>
-              <a:t> Identificación de problemáticas locales — cerrar la ficha con la cifra medida de verdad, no estimada, si esta semana alcanzan a contar o preguntar.</a:t>
-            </a:r>
-          </a:p>
-          <a:p>
-            <a:pPr>
-              <a:spcAft>
-                <a:spcPts val="800"/>
-              </a:spcAft>
-            </a:pPr>
-            <a:r>
-              <a:rPr sz="2000" b="0" i="0">
-                <a:solidFill>
-                  <a:srgbClr val="333333"/>
-                </a:solidFill>
-                <a:latin typeface="Calibri"/>
-              </a:rPr>
-              <a:t>–   </a:t>
-            </a:r>
-            <a:r>
-              <a:rPr sz="2000" b="1" i="0">
-                <a:solidFill>
-                  <a:srgbClr val="333333"/>
-                </a:solidFill>
-                <a:latin typeface="Calibri"/>
-              </a:rPr>
-              <a:t>Trabajo independiente:</a:t>
-            </a:r>
-            <a:r>
-              <a:rPr sz="2000" b="0" i="0">
-                <a:solidFill>
-                  <a:srgbClr val="333333"/>
-                </a:solidFill>
-                <a:latin typeface="Calibri"/>
-              </a:rPr>
-              <a:t> Propuesta inicial de solución: media página con </a:t>
-            </a:r>
-            <a:r>
-              <a:rPr sz="2000" b="1" i="0">
-                <a:solidFill>
-                  <a:srgbClr val="333333"/>
-                </a:solidFill>
-                <a:latin typeface="Calibri"/>
-              </a:rPr>
-              <a:t>dos</a:t>
-            </a:r>
-            <a:r>
-              <a:rPr sz="2000" b="0" i="0">
-                <a:solidFill>
-                  <a:srgbClr val="333333"/>
-                </a:solidFill>
-                <a:latin typeface="Calibri"/>
-              </a:rPr>
-              <a:t> alternativas para atacar la causa elegida, sin decidir todavía cuál. Sin nombrar herramientas.</a:t>
-            </a:r>
-          </a:p>
-          <a:p>
-            <a:pPr>
-              <a:spcAft>
-                <a:spcPts val="800"/>
-              </a:spcAft>
-            </a:pPr>
-            <a:r>
-              <a:rPr sz="2000" b="0" i="0">
-                <a:solidFill>
-                  <a:srgbClr val="333333"/>
-                </a:solidFill>
-                <a:latin typeface="Calibri"/>
-              </a:rPr>
-              <a:t>–   </a:t>
-            </a:r>
-            <a:r>
-              <a:rPr sz="2000" b="1" i="0">
-                <a:solidFill>
-                  <a:srgbClr val="333333"/>
-                </a:solidFill>
-                <a:latin typeface="Calibri"/>
-              </a:rPr>
-              <a:t>Clase 7 · Ciclo de vida de los proyectos de ingeniería</a:t>
-            </a:r>
-            <a:r>
-              <a:rPr sz="2000" b="0" i="0">
-                <a:solidFill>
-                  <a:srgbClr val="333333"/>
-                </a:solidFill>
-                <a:latin typeface="Calibri"/>
-              </a:rPr>
-              <a:t> — el </a:t>
-            </a:r>
-            <a:r>
-              <a:rPr sz="2000" b="1" i="0">
-                <a:solidFill>
-                  <a:srgbClr val="333333"/>
-                </a:solidFill>
-                <a:latin typeface="Calibri"/>
-              </a:rPr>
-              <a:t>ciclo de vida de los proyectos de ingeniería</a:t>
-            </a:r>
-            <a:r>
-              <a:rPr sz="2000" b="0" i="0">
-                <a:solidFill>
-                  <a:srgbClr val="333333"/>
-                </a:solidFill>
-                <a:latin typeface="Calibri"/>
-              </a:rPr>
-              <a:t>, aplicado a la ficha de hoy: qué se hace antes de construir y por qué el orden importa.</a:t>
-            </a:r>
-          </a:p>
-          <a:p>
-            <a:pPr>
-              <a:spcAft>
-                <a:spcPts val="800"/>
-              </a:spcAft>
-            </a:pPr>
-            <a:r>
-              <a:rPr sz="2000" b="0" i="0">
-                <a:solidFill>
-                  <a:srgbClr val="333333"/>
-                </a:solidFill>
-                <a:latin typeface="Calibri"/>
-              </a:rPr>
-              <a:t>–   </a:t>
-            </a:r>
-            <a:r>
-              <a:rPr sz="2000" b="1" i="0">
-                <a:solidFill>
-                  <a:srgbClr val="333333"/>
-                </a:solidFill>
-                <a:latin typeface="Calibri"/>
-              </a:rPr>
-              <a:t>Aviso:</a:t>
-            </a:r>
-            <a:r>
-              <a:rPr sz="2000" b="0" i="0">
-                <a:solidFill>
-                  <a:srgbClr val="333333"/>
-                </a:solidFill>
-                <a:latin typeface="Calibri"/>
-              </a:rPr>
-              <a:t> Arranca el corte 2. La ficha del problema queda como referencia fija: llévenla al documento del equipo con el título «Ficha del problema — versión final del corte 1», porque se va a citar en todas las sesiones que siguen.</a:t>
-            </a:r>
-          </a:p>
-          <a:p>
-            <a:pPr>
-              <a:spcAft>
-                <a:spcPts val="800"/>
-              </a:spcAft>
-            </a:pPr>
-            <a:r>
-              <a:rPr sz="2000" b="0" i="0">
-                <a:solidFill>
-                  <a:srgbClr val="333333"/>
-                </a:solidFill>
-                <a:latin typeface="Calibri"/>
-              </a:rPr>
-              <a:t>–   </a:t>
-            </a:r>
-            <a:r>
-              <a:rPr sz="2000" b="1" i="0">
-                <a:solidFill>
-                  <a:srgbClr val="333333"/>
-                </a:solidFill>
-                <a:latin typeface="Calibri"/>
-              </a:rPr>
-              <a:t>Antes de salir:</a:t>
-            </a:r>
-            <a:r>
-              <a:rPr sz="2000" b="0" i="0">
-                <a:solidFill>
-                  <a:srgbClr val="333333"/>
-                </a:solidFill>
-                <a:latin typeface="Calibri"/>
-              </a:rPr>
-              <a:t> el enlace del documento del equipo en el chat, con permiso de lectura para el docente, y el nombre del vocero de hoy.</a:t>
-            </a:r>
-          </a:p>
-        </p:txBody>
-      </p:sp>
-      <p:sp>
-        <p:nvSpPr>
-          <p:cNvPr id="6" name="TextBox 5"/>
+            <a:r>
+              <a:rPr sz="1400" b="0" i="0">
+                <a:solidFill>
+                  <a:srgbClr val="B8D8EE"/>
+                </a:solidFill>
+                <a:latin typeface="Calibri"/>
+              </a:rPr>
+              <a:t>17 min en equipos · cada equipo, su propio problema · ficha del problema + árbol de causas</a:t>
+            </a:r>
+          </a:p>
+        </p:txBody>
+      </p:sp>
+      <p:sp>
+        <p:nvSpPr>
+          <p:cNvPr id="6" name="Rounded Rectangle 5"/>
+          <p:cNvSpPr/>
+          <p:nvPr/>
+        </p:nvSpPr>
+        <p:spPr>
+          <a:xfrm>
+            <a:off x="457200" y="1472184"/>
+            <a:ext cx="11277295" cy="566928"/>
+          </a:xfrm>
+          <a:prstGeom prst="roundRect">
+            <a:avLst>
+              <a:gd name="adj" fmla="val 12000"/>
+            </a:avLst>
+          </a:prstGeom>
+          <a:solidFill>
+            <a:srgbClr val="F2F2F2"/>
+          </a:solidFill>
+          <a:ln>
+            <a:noFill/>
+          </a:ln>
+        </p:spPr>
+        <p:style>
+          <a:lnRef idx="1">
+            <a:schemeClr val="accent1"/>
+          </a:lnRef>
+          <a:fillRef idx="3">
+            <a:schemeClr val="accent1"/>
+          </a:fillRef>
+          <a:effectRef idx="2">
+            <a:schemeClr val="accent1"/>
+          </a:effectRef>
+          <a:fontRef idx="minor">
+            <a:schemeClr val="lt1"/>
+          </a:fontRef>
+        </p:style>
+        <p:txBody>
+          <a:bodyPr rtlCol="0" anchor="ctr"/>
+          <a:lstStyle/>
+          <a:p>
+            <a:pPr algn="ctr"/>
+          </a:p>
+        </p:txBody>
+      </p:sp>
+      <p:sp>
+        <p:nvSpPr>
+          <p:cNvPr id="7" name="Rectangle 6"/>
+          <p:cNvSpPr/>
+          <p:nvPr/>
+        </p:nvSpPr>
+        <p:spPr>
+          <a:xfrm>
+            <a:off x="640080" y="1618487"/>
+            <a:ext cx="274320" cy="274320"/>
+          </a:xfrm>
+          <a:prstGeom prst="rect">
+            <a:avLst/>
+          </a:prstGeom>
+          <a:solidFill>
+            <a:srgbClr val="FFFFFF"/>
+          </a:solidFill>
+          <a:ln>
+            <a:solidFill>
+              <a:srgbClr val="333333"/>
+            </a:solidFill>
+          </a:ln>
+        </p:spPr>
+        <p:style>
+          <a:lnRef idx="1">
+            <a:schemeClr val="accent1"/>
+          </a:lnRef>
+          <a:fillRef idx="3">
+            <a:schemeClr val="accent1"/>
+          </a:fillRef>
+          <a:effectRef idx="2">
+            <a:schemeClr val="accent1"/>
+          </a:effectRef>
+          <a:fontRef idx="minor">
+            <a:schemeClr val="lt1"/>
+          </a:fontRef>
+        </p:style>
+        <p:txBody>
+          <a:bodyPr rtlCol="0" anchor="ctr"/>
+          <a:lstStyle/>
+          <a:p>
+            <a:pPr algn="ctr"/>
+          </a:p>
+        </p:txBody>
+      </p:sp>
+      <p:sp>
+        <p:nvSpPr>
+          <p:cNvPr id="8" name="Rectangle 7"/>
+          <p:cNvSpPr/>
+          <p:nvPr/>
+        </p:nvSpPr>
+        <p:spPr>
+          <a:xfrm>
+            <a:off x="640080" y="1618487"/>
+            <a:ext cx="73152" cy="274320"/>
+          </a:xfrm>
+          <a:prstGeom prst="rect">
+            <a:avLst/>
+          </a:prstGeom>
+          <a:solidFill>
+            <a:srgbClr val="269CCB"/>
+          </a:solidFill>
+          <a:ln>
+            <a:noFill/>
+          </a:ln>
+        </p:spPr>
+        <p:style>
+          <a:lnRef idx="1">
+            <a:schemeClr val="accent1"/>
+          </a:lnRef>
+          <a:fillRef idx="3">
+            <a:schemeClr val="accent1"/>
+          </a:fillRef>
+          <a:effectRef idx="2">
+            <a:schemeClr val="accent1"/>
+          </a:effectRef>
+          <a:fontRef idx="minor">
+            <a:schemeClr val="lt1"/>
+          </a:fontRef>
+        </p:style>
+        <p:txBody>
+          <a:bodyPr rtlCol="0" anchor="ctr"/>
+          <a:lstStyle/>
+          <a:p>
+            <a:pPr algn="ctr"/>
+          </a:p>
+        </p:txBody>
+      </p:sp>
+      <p:sp>
+        <p:nvSpPr>
+          <p:cNvPr id="9" name="TextBox 8"/>
+          <p:cNvSpPr txBox="1"/>
+          <p:nvPr/>
+        </p:nvSpPr>
+        <p:spPr>
+          <a:xfrm>
+            <a:off x="1097280" y="1563624"/>
+            <a:ext cx="10362895" cy="402336"/>
+          </a:xfrm>
+          <a:prstGeom prst="rect">
+            <a:avLst/>
+          </a:prstGeom>
+          <a:noFill/>
+        </p:spPr>
+        <p:txBody>
+          <a:bodyPr wrap="square" anchor="ctr"/>
+          <a:lstStyle/>
+          <a:p>
+            <a:r>
+              <a:rPr sz="1500" b="1" i="0">
+                <a:solidFill>
+                  <a:srgbClr val="333333"/>
+                </a:solidFill>
+                <a:latin typeface="Calibri"/>
+              </a:rPr>
+              <a:t>EL PROBLEMA EN UNA FRASE</a:t>
+            </a:r>
+            <a:r>
+              <a:rPr sz="1500" b="0" i="0">
+                <a:solidFill>
+                  <a:srgbClr val="333333"/>
+                </a:solidFill>
+                <a:latin typeface="Calibri"/>
+              </a:rPr>
+              <a:t> — Una sola frase con la fórmula: </a:t>
+            </a:r>
+            <a:r>
+              <a:rPr sz="1500" b="1" i="0">
+                <a:solidFill>
+                  <a:srgbClr val="333333"/>
+                </a:solidFill>
+                <a:latin typeface="Calibri"/>
+              </a:rPr>
+              <a:t>a quién le pasa qué, con qué consecuencia</a:t>
+            </a:r>
+            <a:r>
+              <a:rPr sz="1500" b="0" i="0">
+                <a:solidFill>
+                  <a:srgbClr val="333333"/>
+                </a:solidFill>
+                <a:latin typeface="Calibri"/>
+              </a:rPr>
+              <a:t>. Sin mencionar ninguna tecnología ni ninguna solución.</a:t>
+            </a:r>
+          </a:p>
+        </p:txBody>
+      </p:sp>
+      <p:sp>
+        <p:nvSpPr>
+          <p:cNvPr id="10" name="Rounded Rectangle 9"/>
+          <p:cNvSpPr/>
+          <p:nvPr/>
+        </p:nvSpPr>
+        <p:spPr>
+          <a:xfrm>
+            <a:off x="457200" y="2148839"/>
+            <a:ext cx="11277295" cy="566928"/>
+          </a:xfrm>
+          <a:prstGeom prst="roundRect">
+            <a:avLst>
+              <a:gd name="adj" fmla="val 12000"/>
+            </a:avLst>
+          </a:prstGeom>
+          <a:solidFill>
+            <a:srgbClr val="F2F2F2"/>
+          </a:solidFill>
+          <a:ln>
+            <a:noFill/>
+          </a:ln>
+        </p:spPr>
+        <p:style>
+          <a:lnRef idx="1">
+            <a:schemeClr val="accent1"/>
+          </a:lnRef>
+          <a:fillRef idx="3">
+            <a:schemeClr val="accent1"/>
+          </a:fillRef>
+          <a:effectRef idx="2">
+            <a:schemeClr val="accent1"/>
+          </a:effectRef>
+          <a:fontRef idx="minor">
+            <a:schemeClr val="lt1"/>
+          </a:fontRef>
+        </p:style>
+        <p:txBody>
+          <a:bodyPr rtlCol="0" anchor="ctr"/>
+          <a:lstStyle/>
+          <a:p>
+            <a:pPr algn="ctr"/>
+          </a:p>
+        </p:txBody>
+      </p:sp>
+      <p:sp>
+        <p:nvSpPr>
+          <p:cNvPr id="11" name="Rectangle 10"/>
+          <p:cNvSpPr/>
+          <p:nvPr/>
+        </p:nvSpPr>
+        <p:spPr>
+          <a:xfrm>
+            <a:off x="640080" y="2295144"/>
+            <a:ext cx="274320" cy="274320"/>
+          </a:xfrm>
+          <a:prstGeom prst="rect">
+            <a:avLst/>
+          </a:prstGeom>
+          <a:solidFill>
+            <a:srgbClr val="FFFFFF"/>
+          </a:solidFill>
+          <a:ln>
+            <a:solidFill>
+              <a:srgbClr val="333333"/>
+            </a:solidFill>
+          </a:ln>
+        </p:spPr>
+        <p:style>
+          <a:lnRef idx="1">
+            <a:schemeClr val="accent1"/>
+          </a:lnRef>
+          <a:fillRef idx="3">
+            <a:schemeClr val="accent1"/>
+          </a:fillRef>
+          <a:effectRef idx="2">
+            <a:schemeClr val="accent1"/>
+          </a:effectRef>
+          <a:fontRef idx="minor">
+            <a:schemeClr val="lt1"/>
+          </a:fontRef>
+        </p:style>
+        <p:txBody>
+          <a:bodyPr rtlCol="0" anchor="ctr"/>
+          <a:lstStyle/>
+          <a:p>
+            <a:pPr algn="ctr"/>
+          </a:p>
+        </p:txBody>
+      </p:sp>
+      <p:sp>
+        <p:nvSpPr>
+          <p:cNvPr id="12" name="Rectangle 11"/>
+          <p:cNvSpPr/>
+          <p:nvPr/>
+        </p:nvSpPr>
+        <p:spPr>
+          <a:xfrm>
+            <a:off x="640080" y="2295144"/>
+            <a:ext cx="73152" cy="274320"/>
+          </a:xfrm>
+          <a:prstGeom prst="rect">
+            <a:avLst/>
+          </a:prstGeom>
+          <a:solidFill>
+            <a:srgbClr val="269CCB"/>
+          </a:solidFill>
+          <a:ln>
+            <a:noFill/>
+          </a:ln>
+        </p:spPr>
+        <p:style>
+          <a:lnRef idx="1">
+            <a:schemeClr val="accent1"/>
+          </a:lnRef>
+          <a:fillRef idx="3">
+            <a:schemeClr val="accent1"/>
+          </a:fillRef>
+          <a:effectRef idx="2">
+            <a:schemeClr val="accent1"/>
+          </a:effectRef>
+          <a:fontRef idx="minor">
+            <a:schemeClr val="lt1"/>
+          </a:fontRef>
+        </p:style>
+        <p:txBody>
+          <a:bodyPr rtlCol="0" anchor="ctr"/>
+          <a:lstStyle/>
+          <a:p>
+            <a:pPr algn="ctr"/>
+          </a:p>
+        </p:txBody>
+      </p:sp>
+      <p:sp>
+        <p:nvSpPr>
+          <p:cNvPr id="13" name="TextBox 12"/>
+          <p:cNvSpPr txBox="1"/>
+          <p:nvPr/>
+        </p:nvSpPr>
+        <p:spPr>
+          <a:xfrm>
+            <a:off x="1097280" y="2240279"/>
+            <a:ext cx="10362895" cy="402336"/>
+          </a:xfrm>
+          <a:prstGeom prst="rect">
+            <a:avLst/>
+          </a:prstGeom>
+          <a:noFill/>
+        </p:spPr>
+        <p:txBody>
+          <a:bodyPr wrap="square" anchor="ctr"/>
+          <a:lstStyle/>
+          <a:p>
+            <a:r>
+              <a:rPr sz="1500" b="1" i="0">
+                <a:solidFill>
+                  <a:srgbClr val="333333"/>
+                </a:solidFill>
+                <a:latin typeface="Calibri"/>
+              </a:rPr>
+              <a:t>LA LÍNEA BASE</a:t>
+            </a:r>
+            <a:r>
+              <a:rPr sz="1500" b="0" i="0">
+                <a:solidFill>
+                  <a:srgbClr val="333333"/>
+                </a:solidFill>
+                <a:latin typeface="Calibri"/>
+              </a:rPr>
+              <a:t> — Una cifra que describa el problema </a:t>
+            </a:r>
+            <a:r>
+              <a:rPr sz="1500" b="1" i="0">
+                <a:solidFill>
+                  <a:srgbClr val="333333"/>
+                </a:solidFill>
+                <a:latin typeface="Calibri"/>
+              </a:rPr>
+              <a:t>hoy</a:t>
+            </a:r>
+            <a:r>
+              <a:rPr sz="1500" b="0" i="0">
+                <a:solidFill>
+                  <a:srgbClr val="333333"/>
+                </a:solidFill>
+                <a:latin typeface="Calibri"/>
+              </a:rPr>
+              <a:t>, antes de que ustedes toquen nada, más </a:t>
+            </a:r>
+            <a:r>
+              <a:rPr sz="1500" b="1" i="0">
+                <a:solidFill>
+                  <a:srgbClr val="333333"/>
+                </a:solidFill>
+                <a:latin typeface="Calibri"/>
+              </a:rPr>
+              <a:t>cómo la obtuvieron</a:t>
+            </a:r>
+            <a:r>
+              <a:rPr sz="1500" b="0" i="0">
+                <a:solidFill>
+                  <a:srgbClr val="333333"/>
+                </a:solidFill>
+                <a:latin typeface="Calibri"/>
+              </a:rPr>
+              <a:t> y cuándo. Si es estimación, escriban «estimado».</a:t>
+            </a:r>
+          </a:p>
+        </p:txBody>
+      </p:sp>
+      <p:sp>
+        <p:nvSpPr>
+          <p:cNvPr id="14" name="Rounded Rectangle 13"/>
+          <p:cNvSpPr/>
+          <p:nvPr/>
+        </p:nvSpPr>
+        <p:spPr>
+          <a:xfrm>
+            <a:off x="457200" y="2825496"/>
+            <a:ext cx="11277295" cy="566928"/>
+          </a:xfrm>
+          <a:prstGeom prst="roundRect">
+            <a:avLst>
+              <a:gd name="adj" fmla="val 12000"/>
+            </a:avLst>
+          </a:prstGeom>
+          <a:solidFill>
+            <a:srgbClr val="F2F2F2"/>
+          </a:solidFill>
+          <a:ln>
+            <a:noFill/>
+          </a:ln>
+        </p:spPr>
+        <p:style>
+          <a:lnRef idx="1">
+            <a:schemeClr val="accent1"/>
+          </a:lnRef>
+          <a:fillRef idx="3">
+            <a:schemeClr val="accent1"/>
+          </a:fillRef>
+          <a:effectRef idx="2">
+            <a:schemeClr val="accent1"/>
+          </a:effectRef>
+          <a:fontRef idx="minor">
+            <a:schemeClr val="lt1"/>
+          </a:fontRef>
+        </p:style>
+        <p:txBody>
+          <a:bodyPr rtlCol="0" anchor="ctr"/>
+          <a:lstStyle/>
+          <a:p>
+            <a:pPr algn="ctr"/>
+          </a:p>
+        </p:txBody>
+      </p:sp>
+      <p:sp>
+        <p:nvSpPr>
+          <p:cNvPr id="15" name="Rectangle 14"/>
+          <p:cNvSpPr/>
+          <p:nvPr/>
+        </p:nvSpPr>
+        <p:spPr>
+          <a:xfrm>
+            <a:off x="640080" y="2971800"/>
+            <a:ext cx="274320" cy="274320"/>
+          </a:xfrm>
+          <a:prstGeom prst="rect">
+            <a:avLst/>
+          </a:prstGeom>
+          <a:solidFill>
+            <a:srgbClr val="FFFFFF"/>
+          </a:solidFill>
+          <a:ln>
+            <a:solidFill>
+              <a:srgbClr val="333333"/>
+            </a:solidFill>
+          </a:ln>
+        </p:spPr>
+        <p:style>
+          <a:lnRef idx="1">
+            <a:schemeClr val="accent1"/>
+          </a:lnRef>
+          <a:fillRef idx="3">
+            <a:schemeClr val="accent1"/>
+          </a:fillRef>
+          <a:effectRef idx="2">
+            <a:schemeClr val="accent1"/>
+          </a:effectRef>
+          <a:fontRef idx="minor">
+            <a:schemeClr val="lt1"/>
+          </a:fontRef>
+        </p:style>
+        <p:txBody>
+          <a:bodyPr rtlCol="0" anchor="ctr"/>
+          <a:lstStyle/>
+          <a:p>
+            <a:pPr algn="ctr"/>
+          </a:p>
+        </p:txBody>
+      </p:sp>
+      <p:sp>
+        <p:nvSpPr>
+          <p:cNvPr id="16" name="Rectangle 15"/>
+          <p:cNvSpPr/>
+          <p:nvPr/>
+        </p:nvSpPr>
+        <p:spPr>
+          <a:xfrm>
+            <a:off x="640080" y="2971800"/>
+            <a:ext cx="73152" cy="274320"/>
+          </a:xfrm>
+          <a:prstGeom prst="rect">
+            <a:avLst/>
+          </a:prstGeom>
+          <a:solidFill>
+            <a:srgbClr val="269CCB"/>
+          </a:solidFill>
+          <a:ln>
+            <a:noFill/>
+          </a:ln>
+        </p:spPr>
+        <p:style>
+          <a:lnRef idx="1">
+            <a:schemeClr val="accent1"/>
+          </a:lnRef>
+          <a:fillRef idx="3">
+            <a:schemeClr val="accent1"/>
+          </a:fillRef>
+          <a:effectRef idx="2">
+            <a:schemeClr val="accent1"/>
+          </a:effectRef>
+          <a:fontRef idx="minor">
+            <a:schemeClr val="lt1"/>
+          </a:fontRef>
+        </p:style>
+        <p:txBody>
+          <a:bodyPr rtlCol="0" anchor="ctr"/>
+          <a:lstStyle/>
+          <a:p>
+            <a:pPr algn="ctr"/>
+          </a:p>
+        </p:txBody>
+      </p:sp>
+      <p:sp>
+        <p:nvSpPr>
+          <p:cNvPr id="17" name="TextBox 16"/>
+          <p:cNvSpPr txBox="1"/>
+          <p:nvPr/>
+        </p:nvSpPr>
+        <p:spPr>
+          <a:xfrm>
+            <a:off x="1097280" y="2916936"/>
+            <a:ext cx="10362895" cy="402336"/>
+          </a:xfrm>
+          <a:prstGeom prst="rect">
+            <a:avLst/>
+          </a:prstGeom>
+          <a:noFill/>
+        </p:spPr>
+        <p:txBody>
+          <a:bodyPr wrap="square" anchor="ctr"/>
+          <a:lstStyle/>
+          <a:p>
+            <a:r>
+              <a:rPr sz="1500" b="1" i="0">
+                <a:solidFill>
+                  <a:srgbClr val="333333"/>
+                </a:solidFill>
+                <a:latin typeface="Calibri"/>
+              </a:rPr>
+              <a:t>EL ÁRBOL DE CAUSAS</a:t>
+            </a:r>
+            <a:r>
+              <a:rPr sz="1500" b="0" i="0">
+                <a:solidFill>
+                  <a:srgbClr val="333333"/>
+                </a:solidFill>
+                <a:latin typeface="Calibri"/>
+              </a:rPr>
+              <a:t> — En Excalidraw: el problema en el tronco, los efectos arriba, dos o tres causas directas abajo y el segundo nivel de cada una. Marquen con un símbolo las causas que </a:t>
+            </a:r>
+            <a:r>
+              <a:rPr sz="1500" b="1" i="0">
+                <a:solidFill>
+                  <a:srgbClr val="333333"/>
+                </a:solidFill>
+                <a:latin typeface="Calibri"/>
+              </a:rPr>
+              <a:t>no</a:t>
+            </a:r>
+            <a:r>
+              <a:rPr sz="1500" b="0" i="0">
+                <a:solidFill>
+                  <a:srgbClr val="333333"/>
+                </a:solidFill>
+                <a:latin typeface="Calibri"/>
+              </a:rPr>
+              <a:t> pueden cambiar (restricciones).</a:t>
+            </a:r>
+          </a:p>
+        </p:txBody>
+      </p:sp>
+      <p:sp>
+        <p:nvSpPr>
+          <p:cNvPr id="18" name="Rounded Rectangle 17"/>
+          <p:cNvSpPr/>
+          <p:nvPr/>
+        </p:nvSpPr>
+        <p:spPr>
+          <a:xfrm>
+            <a:off x="457200" y="3502152"/>
+            <a:ext cx="11277295" cy="566928"/>
+          </a:xfrm>
+          <a:prstGeom prst="roundRect">
+            <a:avLst>
+              <a:gd name="adj" fmla="val 12000"/>
+            </a:avLst>
+          </a:prstGeom>
+          <a:solidFill>
+            <a:srgbClr val="F2F2F2"/>
+          </a:solidFill>
+          <a:ln>
+            <a:noFill/>
+          </a:ln>
+        </p:spPr>
+        <p:style>
+          <a:lnRef idx="1">
+            <a:schemeClr val="accent1"/>
+          </a:lnRef>
+          <a:fillRef idx="3">
+            <a:schemeClr val="accent1"/>
+          </a:fillRef>
+          <a:effectRef idx="2">
+            <a:schemeClr val="accent1"/>
+          </a:effectRef>
+          <a:fontRef idx="minor">
+            <a:schemeClr val="lt1"/>
+          </a:fontRef>
+        </p:style>
+        <p:txBody>
+          <a:bodyPr rtlCol="0" anchor="ctr"/>
+          <a:lstStyle/>
+          <a:p>
+            <a:pPr algn="ctr"/>
+          </a:p>
+        </p:txBody>
+      </p:sp>
+      <p:sp>
+        <p:nvSpPr>
+          <p:cNvPr id="19" name="Rectangle 18"/>
+          <p:cNvSpPr/>
+          <p:nvPr/>
+        </p:nvSpPr>
+        <p:spPr>
+          <a:xfrm>
+            <a:off x="640080" y="3648456"/>
+            <a:ext cx="274320" cy="274320"/>
+          </a:xfrm>
+          <a:prstGeom prst="rect">
+            <a:avLst/>
+          </a:prstGeom>
+          <a:solidFill>
+            <a:srgbClr val="FFFFFF"/>
+          </a:solidFill>
+          <a:ln>
+            <a:solidFill>
+              <a:srgbClr val="333333"/>
+            </a:solidFill>
+          </a:ln>
+        </p:spPr>
+        <p:style>
+          <a:lnRef idx="1">
+            <a:schemeClr val="accent1"/>
+          </a:lnRef>
+          <a:fillRef idx="3">
+            <a:schemeClr val="accent1"/>
+          </a:fillRef>
+          <a:effectRef idx="2">
+            <a:schemeClr val="accent1"/>
+          </a:effectRef>
+          <a:fontRef idx="minor">
+            <a:schemeClr val="lt1"/>
+          </a:fontRef>
+        </p:style>
+        <p:txBody>
+          <a:bodyPr rtlCol="0" anchor="ctr"/>
+          <a:lstStyle/>
+          <a:p>
+            <a:pPr algn="ctr"/>
+          </a:p>
+        </p:txBody>
+      </p:sp>
+      <p:sp>
+        <p:nvSpPr>
+          <p:cNvPr id="20" name="Rectangle 19"/>
+          <p:cNvSpPr/>
+          <p:nvPr/>
+        </p:nvSpPr>
+        <p:spPr>
+          <a:xfrm>
+            <a:off x="640080" y="3648456"/>
+            <a:ext cx="73152" cy="274320"/>
+          </a:xfrm>
+          <a:prstGeom prst="rect">
+            <a:avLst/>
+          </a:prstGeom>
+          <a:solidFill>
+            <a:srgbClr val="269CCB"/>
+          </a:solidFill>
+          <a:ln>
+            <a:noFill/>
+          </a:ln>
+        </p:spPr>
+        <p:style>
+          <a:lnRef idx="1">
+            <a:schemeClr val="accent1"/>
+          </a:lnRef>
+          <a:fillRef idx="3">
+            <a:schemeClr val="accent1"/>
+          </a:fillRef>
+          <a:effectRef idx="2">
+            <a:schemeClr val="accent1"/>
+          </a:effectRef>
+          <a:fontRef idx="minor">
+            <a:schemeClr val="lt1"/>
+          </a:fontRef>
+        </p:style>
+        <p:txBody>
+          <a:bodyPr rtlCol="0" anchor="ctr"/>
+          <a:lstStyle/>
+          <a:p>
+            <a:pPr algn="ctr"/>
+          </a:p>
+        </p:txBody>
+      </p:sp>
+      <p:sp>
+        <p:nvSpPr>
+          <p:cNvPr id="21" name="TextBox 20"/>
+          <p:cNvSpPr txBox="1"/>
+          <p:nvPr/>
+        </p:nvSpPr>
+        <p:spPr>
+          <a:xfrm>
+            <a:off x="1097280" y="3593592"/>
+            <a:ext cx="10362895" cy="402336"/>
+          </a:xfrm>
+          <a:prstGeom prst="rect">
+            <a:avLst/>
+          </a:prstGeom>
+          <a:noFill/>
+        </p:spPr>
+        <p:txBody>
+          <a:bodyPr wrap="square" anchor="ctr"/>
+          <a:lstStyle/>
+          <a:p>
+            <a:r>
+              <a:rPr sz="1500" b="1" i="0">
+                <a:solidFill>
+                  <a:srgbClr val="333333"/>
+                </a:solidFill>
+                <a:latin typeface="Calibri"/>
+              </a:rPr>
+              <a:t>ACTORES Y FRONTERA</a:t>
+            </a:r>
+            <a:r>
+              <a:rPr sz="1500" b="0" i="0">
+                <a:solidFill>
+                  <a:srgbClr val="333333"/>
+                </a:solidFill>
+                <a:latin typeface="Calibri"/>
+              </a:rPr>
+              <a:t> — Quién vive el problema (el dueño del problema), quién más se afecta sin ser usuario, y qué queda </a:t>
+            </a:r>
+            <a:r>
+              <a:rPr sz="1500" b="1" i="0">
+                <a:solidFill>
+                  <a:srgbClr val="333333"/>
+                </a:solidFill>
+                <a:latin typeface="Calibri"/>
+              </a:rPr>
+              <a:t>fuera</a:t>
+            </a:r>
+            <a:r>
+              <a:rPr sz="1500" b="0" i="0">
+                <a:solidFill>
+                  <a:srgbClr val="333333"/>
+                </a:solidFill>
+                <a:latin typeface="Calibri"/>
+              </a:rPr>
+              <a:t> de lo que ustedes van a abordar. Digan además </a:t>
+            </a:r>
+            <a:r>
+              <a:rPr sz="1500" b="1" i="0">
+                <a:solidFill>
+                  <a:srgbClr val="333333"/>
+                </a:solidFill>
+                <a:latin typeface="Calibri"/>
+              </a:rPr>
+              <a:t>a quién le pueden preguntar algo esta semana</a:t>
+            </a:r>
+            <a:r>
+              <a:rPr sz="1500" b="0" i="0">
+                <a:solidFill>
+                  <a:srgbClr val="333333"/>
+                </a:solidFill>
+                <a:latin typeface="Calibri"/>
+              </a:rPr>
+              <a:t>.</a:t>
+            </a:r>
+          </a:p>
+        </p:txBody>
+      </p:sp>
+      <p:sp>
+        <p:nvSpPr>
+          <p:cNvPr id="22" name="Rounded Rectangle 21"/>
+          <p:cNvSpPr/>
+          <p:nvPr/>
+        </p:nvSpPr>
+        <p:spPr>
+          <a:xfrm>
+            <a:off x="457200" y="4178808"/>
+            <a:ext cx="11277295" cy="566928"/>
+          </a:xfrm>
+          <a:prstGeom prst="roundRect">
+            <a:avLst>
+              <a:gd name="adj" fmla="val 12000"/>
+            </a:avLst>
+          </a:prstGeom>
+          <a:solidFill>
+            <a:srgbClr val="F2F2F2"/>
+          </a:solidFill>
+          <a:ln>
+            <a:noFill/>
+          </a:ln>
+        </p:spPr>
+        <p:style>
+          <a:lnRef idx="1">
+            <a:schemeClr val="accent1"/>
+          </a:lnRef>
+          <a:fillRef idx="3">
+            <a:schemeClr val="accent1"/>
+          </a:fillRef>
+          <a:effectRef idx="2">
+            <a:schemeClr val="accent1"/>
+          </a:effectRef>
+          <a:fontRef idx="minor">
+            <a:schemeClr val="lt1"/>
+          </a:fontRef>
+        </p:style>
+        <p:txBody>
+          <a:bodyPr rtlCol="0" anchor="ctr"/>
+          <a:lstStyle/>
+          <a:p>
+            <a:pPr algn="ctr"/>
+          </a:p>
+        </p:txBody>
+      </p:sp>
+      <p:sp>
+        <p:nvSpPr>
+          <p:cNvPr id="23" name="Rectangle 22"/>
+          <p:cNvSpPr/>
+          <p:nvPr/>
+        </p:nvSpPr>
+        <p:spPr>
+          <a:xfrm>
+            <a:off x="640080" y="4325112"/>
+            <a:ext cx="274320" cy="274320"/>
+          </a:xfrm>
+          <a:prstGeom prst="rect">
+            <a:avLst/>
+          </a:prstGeom>
+          <a:solidFill>
+            <a:srgbClr val="FFFFFF"/>
+          </a:solidFill>
+          <a:ln>
+            <a:solidFill>
+              <a:srgbClr val="333333"/>
+            </a:solidFill>
+          </a:ln>
+        </p:spPr>
+        <p:style>
+          <a:lnRef idx="1">
+            <a:schemeClr val="accent1"/>
+          </a:lnRef>
+          <a:fillRef idx="3">
+            <a:schemeClr val="accent1"/>
+          </a:fillRef>
+          <a:effectRef idx="2">
+            <a:schemeClr val="accent1"/>
+          </a:effectRef>
+          <a:fontRef idx="minor">
+            <a:schemeClr val="lt1"/>
+          </a:fontRef>
+        </p:style>
+        <p:txBody>
+          <a:bodyPr rtlCol="0" anchor="ctr"/>
+          <a:lstStyle/>
+          <a:p>
+            <a:pPr algn="ctr"/>
+          </a:p>
+        </p:txBody>
+      </p:sp>
+      <p:sp>
+        <p:nvSpPr>
+          <p:cNvPr id="24" name="Rectangle 23"/>
+          <p:cNvSpPr/>
+          <p:nvPr/>
+        </p:nvSpPr>
+        <p:spPr>
+          <a:xfrm>
+            <a:off x="640080" y="4325112"/>
+            <a:ext cx="73152" cy="274320"/>
+          </a:xfrm>
+          <a:prstGeom prst="rect">
+            <a:avLst/>
+          </a:prstGeom>
+          <a:solidFill>
+            <a:srgbClr val="269CCB"/>
+          </a:solidFill>
+          <a:ln>
+            <a:noFill/>
+          </a:ln>
+        </p:spPr>
+        <p:style>
+          <a:lnRef idx="1">
+            <a:schemeClr val="accent1"/>
+          </a:lnRef>
+          <a:fillRef idx="3">
+            <a:schemeClr val="accent1"/>
+          </a:fillRef>
+          <a:effectRef idx="2">
+            <a:schemeClr val="accent1"/>
+          </a:effectRef>
+          <a:fontRef idx="minor">
+            <a:schemeClr val="lt1"/>
+          </a:fontRef>
+        </p:style>
+        <p:txBody>
+          <a:bodyPr rtlCol="0" anchor="ctr"/>
+          <a:lstStyle/>
+          <a:p>
+            <a:pPr algn="ctr"/>
+          </a:p>
+        </p:txBody>
+      </p:sp>
+      <p:sp>
+        <p:nvSpPr>
+          <p:cNvPr id="25" name="TextBox 24"/>
+          <p:cNvSpPr txBox="1"/>
+          <p:nvPr/>
+        </p:nvSpPr>
+        <p:spPr>
+          <a:xfrm>
+            <a:off x="1097280" y="4270248"/>
+            <a:ext cx="10362895" cy="402336"/>
+          </a:xfrm>
+          <a:prstGeom prst="rect">
+            <a:avLst/>
+          </a:prstGeom>
+          <a:noFill/>
+        </p:spPr>
+        <p:txBody>
+          <a:bodyPr wrap="square" anchor="ctr"/>
+          <a:lstStyle/>
+          <a:p>
+            <a:r>
+              <a:rPr sz="1500" b="1" i="0">
+                <a:solidFill>
+                  <a:srgbClr val="333333"/>
+                </a:solidFill>
+                <a:latin typeface="Calibri"/>
+              </a:rPr>
+              <a:t>EL CRITERIO DE ÉXITO</a:t>
+            </a:r>
+            <a:r>
+              <a:rPr sz="1500" b="0" i="0">
+                <a:solidFill>
+                  <a:srgbClr val="333333"/>
+                </a:solidFill>
+                <a:latin typeface="Calibri"/>
+              </a:rPr>
+              <a:t> — Una frase de la forma: «el proyecto sirvió si &lt;la cifra de la línea base&gt; pasa de X a Y, medido así». Y la causa del árbol que van a atacar.</a:t>
+            </a:r>
+          </a:p>
+        </p:txBody>
+      </p:sp>
+      <p:sp>
+        <p:nvSpPr>
+          <p:cNvPr id="26" name="TextBox 25"/>
           <p:cNvSpPr txBox="1"/>
           <p:nvPr/>
         </p:nvSpPr>
@@ -11349,6 +10839,1486 @@
 </file>
 
 <file path=ppt/slides/slide27.xml><?xml version="1.0" encoding="utf-8"?>
+<p:sld xmlns:a="http://schemas.openxmlformats.org/drawingml/2006/main" xmlns:p="http://schemas.openxmlformats.org/presentationml/2006/main" xmlns:r="http://schemas.openxmlformats.org/officeDocument/2006/relationships">
+  <p:cSld>
+    <p:bg>
+      <p:bgPr>
+        <a:solidFill>
+          <a:srgbClr val="FFFFFF"/>
+        </a:solidFill>
+        <a:effectLst/>
+      </p:bgPr>
+    </p:bg>
+    <p:spTree>
+      <p:nvGrpSpPr>
+        <p:cNvPr id="1" name=""/>
+        <p:cNvGrpSpPr/>
+        <p:nvPr/>
+      </p:nvGrpSpPr>
+      <p:grpSpPr/>
+      <p:sp>
+        <p:nvSpPr>
+          <p:cNvPr id="2" name="Rectangle 1"/>
+          <p:cNvSpPr/>
+          <p:nvPr/>
+        </p:nvSpPr>
+        <p:spPr>
+          <a:xfrm>
+            <a:off x="0" y="0"/>
+            <a:ext cx="12191695" cy="1170432"/>
+          </a:xfrm>
+          <a:prstGeom prst="rect">
+            <a:avLst/>
+          </a:prstGeom>
+          <a:solidFill>
+            <a:srgbClr val="095292"/>
+          </a:solidFill>
+          <a:ln>
+            <a:noFill/>
+          </a:ln>
+        </p:spPr>
+        <p:style>
+          <a:lnRef idx="1">
+            <a:schemeClr val="accent1"/>
+          </a:lnRef>
+          <a:fillRef idx="3">
+            <a:schemeClr val="accent1"/>
+          </a:fillRef>
+          <a:effectRef idx="2">
+            <a:schemeClr val="accent1"/>
+          </a:effectRef>
+          <a:fontRef idx="minor">
+            <a:schemeClr val="lt1"/>
+          </a:fontRef>
+        </p:style>
+        <p:txBody>
+          <a:bodyPr rtlCol="0" anchor="ctr"/>
+          <a:lstStyle/>
+          <a:p>
+            <a:pPr algn="ctr"/>
+          </a:p>
+        </p:txBody>
+      </p:sp>
+      <p:sp>
+        <p:nvSpPr>
+          <p:cNvPr id="3" name="Rectangle 2"/>
+          <p:cNvSpPr/>
+          <p:nvPr/>
+        </p:nvSpPr>
+        <p:spPr>
+          <a:xfrm>
+            <a:off x="0" y="1170432"/>
+            <a:ext cx="12191695" cy="41148"/>
+          </a:xfrm>
+          <a:prstGeom prst="rect">
+            <a:avLst/>
+          </a:prstGeom>
+          <a:solidFill>
+            <a:srgbClr val="FFD000"/>
+          </a:solidFill>
+          <a:ln>
+            <a:noFill/>
+          </a:ln>
+        </p:spPr>
+        <p:style>
+          <a:lnRef idx="1">
+            <a:schemeClr val="accent1"/>
+          </a:lnRef>
+          <a:fillRef idx="3">
+            <a:schemeClr val="accent1"/>
+          </a:fillRef>
+          <a:effectRef idx="2">
+            <a:schemeClr val="accent1"/>
+          </a:effectRef>
+          <a:fontRef idx="minor">
+            <a:schemeClr val="lt1"/>
+          </a:fontRef>
+        </p:style>
+        <p:txBody>
+          <a:bodyPr rtlCol="0" anchor="ctr"/>
+          <a:lstStyle/>
+          <a:p>
+            <a:pPr algn="ctr"/>
+          </a:p>
+        </p:txBody>
+      </p:sp>
+      <p:sp>
+        <p:nvSpPr>
+          <p:cNvPr id="4" name="TextBox 3"/>
+          <p:cNvSpPr txBox="1"/>
+          <p:nvPr/>
+        </p:nvSpPr>
+        <p:spPr>
+          <a:xfrm>
+            <a:off x="457200" y="164592"/>
+            <a:ext cx="11277295" cy="384048"/>
+          </a:xfrm>
+          <a:prstGeom prst="rect">
+            <a:avLst/>
+          </a:prstGeom>
+          <a:noFill/>
+        </p:spPr>
+        <p:txBody>
+          <a:bodyPr wrap="square">
+            <a:spAutoFit/>
+          </a:bodyPr>
+          <a:lstStyle/>
+          <a:p>
+            <a:r>
+              <a:rPr sz="2600" b="1" i="0">
+                <a:solidFill>
+                  <a:srgbClr val="FFFFFF"/>
+                </a:solidFill>
+                <a:latin typeface="Calibri"/>
+              </a:rPr>
+              <a:t>Cómo se expone en 3 minutos</a:t>
+            </a:r>
+          </a:p>
+        </p:txBody>
+      </p:sp>
+      <p:sp>
+        <p:nvSpPr>
+          <p:cNvPr id="5" name="TextBox 4"/>
+          <p:cNvSpPr txBox="1"/>
+          <p:nvPr/>
+        </p:nvSpPr>
+        <p:spPr>
+          <a:xfrm>
+            <a:off x="457200" y="566928"/>
+            <a:ext cx="11277295" cy="411480"/>
+          </a:xfrm>
+          <a:prstGeom prst="rect">
+            <a:avLst/>
+          </a:prstGeom>
+          <a:noFill/>
+        </p:spPr>
+        <p:txBody>
+          <a:bodyPr wrap="square">
+            <a:spAutoFit/>
+          </a:bodyPr>
+          <a:lstStyle/>
+          <a:p>
+            <a:r>
+              <a:rPr sz="1400" b="0" i="0">
+                <a:solidFill>
+                  <a:srgbClr val="B8D8EE"/>
+                </a:solidFill>
+                <a:latin typeface="Calibri"/>
+              </a:rPr>
+              <a:t>Habla el vocero con la pantalla ya compartida · cronómetro en pantalla · se corta al llegar a cero</a:t>
+            </a:r>
+          </a:p>
+        </p:txBody>
+      </p:sp>
+      <p:sp>
+        <p:nvSpPr>
+          <p:cNvPr id="6" name="Rounded Rectangle 5"/>
+          <p:cNvSpPr/>
+          <p:nvPr/>
+        </p:nvSpPr>
+        <p:spPr>
+          <a:xfrm>
+            <a:off x="457200" y="1444752"/>
+            <a:ext cx="11277295" cy="908913"/>
+          </a:xfrm>
+          <a:prstGeom prst="roundRect">
+            <a:avLst>
+              <a:gd name="adj" fmla="val 12000"/>
+            </a:avLst>
+          </a:prstGeom>
+          <a:solidFill>
+            <a:srgbClr val="F2F2F2"/>
+          </a:solidFill>
+          <a:ln>
+            <a:noFill/>
+          </a:ln>
+        </p:spPr>
+        <p:style>
+          <a:lnRef idx="1">
+            <a:schemeClr val="accent1"/>
+          </a:lnRef>
+          <a:fillRef idx="3">
+            <a:schemeClr val="accent1"/>
+          </a:fillRef>
+          <a:effectRef idx="2">
+            <a:schemeClr val="accent1"/>
+          </a:effectRef>
+          <a:fontRef idx="minor">
+            <a:schemeClr val="lt1"/>
+          </a:fontRef>
+        </p:style>
+        <p:txBody>
+          <a:bodyPr rtlCol="0" anchor="ctr"/>
+          <a:lstStyle/>
+          <a:p>
+            <a:pPr algn="ctr"/>
+          </a:p>
+        </p:txBody>
+      </p:sp>
+      <p:sp>
+        <p:nvSpPr>
+          <p:cNvPr id="7" name="Rounded Rectangle 6"/>
+          <p:cNvSpPr/>
+          <p:nvPr/>
+        </p:nvSpPr>
+        <p:spPr>
+          <a:xfrm>
+            <a:off x="594360" y="1679752"/>
+            <a:ext cx="438912" cy="438912"/>
+          </a:xfrm>
+          <a:prstGeom prst="roundRect">
+            <a:avLst>
+              <a:gd name="adj" fmla="val 12000"/>
+            </a:avLst>
+          </a:prstGeom>
+          <a:solidFill>
+            <a:srgbClr val="095292"/>
+          </a:solidFill>
+          <a:ln>
+            <a:noFill/>
+          </a:ln>
+        </p:spPr>
+        <p:style>
+          <a:lnRef idx="1">
+            <a:schemeClr val="accent1"/>
+          </a:lnRef>
+          <a:fillRef idx="3">
+            <a:schemeClr val="accent1"/>
+          </a:fillRef>
+          <a:effectRef idx="2">
+            <a:schemeClr val="accent1"/>
+          </a:effectRef>
+          <a:fontRef idx="minor">
+            <a:schemeClr val="lt1"/>
+          </a:fontRef>
+        </p:style>
+        <p:txBody>
+          <a:bodyPr rtlCol="0" anchor="ctr"/>
+          <a:lstStyle/>
+          <a:p>
+            <a:pPr algn="ctr"/>
+          </a:p>
+        </p:txBody>
+      </p:sp>
+      <p:sp>
+        <p:nvSpPr>
+          <p:cNvPr id="8" name="TextBox 7"/>
+          <p:cNvSpPr txBox="1"/>
+          <p:nvPr/>
+        </p:nvSpPr>
+        <p:spPr>
+          <a:xfrm>
+            <a:off x="594360" y="1679752"/>
+            <a:ext cx="438912" cy="438912"/>
+          </a:xfrm>
+          <a:prstGeom prst="rect">
+            <a:avLst/>
+          </a:prstGeom>
+          <a:noFill/>
+        </p:spPr>
+        <p:txBody>
+          <a:bodyPr wrap="square" anchor="ctr"/>
+          <a:lstStyle/>
+          <a:p>
+            <a:pPr algn="ctr"/>
+            <a:r>
+              <a:rPr sz="1600" b="1" i="0">
+                <a:solidFill>
+                  <a:srgbClr val="FFFFFF"/>
+                </a:solidFill>
+                <a:latin typeface="Calibri"/>
+              </a:rPr>
+              <a:t>1</a:t>
+            </a:r>
+          </a:p>
+        </p:txBody>
+      </p:sp>
+      <p:sp>
+        <p:nvSpPr>
+          <p:cNvPr id="9" name="TextBox 8"/>
+          <p:cNvSpPr txBox="1"/>
+          <p:nvPr/>
+        </p:nvSpPr>
+        <p:spPr>
+          <a:xfrm>
+            <a:off x="1188720" y="1536192"/>
+            <a:ext cx="10271455" cy="744321"/>
+          </a:xfrm>
+          <a:prstGeom prst="rect">
+            <a:avLst/>
+          </a:prstGeom>
+          <a:noFill/>
+        </p:spPr>
+        <p:txBody>
+          <a:bodyPr wrap="square" anchor="ctr"/>
+          <a:lstStyle/>
+          <a:p>
+            <a:r>
+              <a:rPr sz="1500" b="1" i="0">
+                <a:solidFill>
+                  <a:srgbClr val="095292"/>
+                </a:solidFill>
+                <a:latin typeface="Calibri"/>
+              </a:rPr>
+              <a:t>40 s · El problema en una frase</a:t>
+            </a:r>
+          </a:p>
+          <a:p>
+            <a:pPr>
+              <a:spcBef>
+                <a:spcPts val="200"/>
+              </a:spcBef>
+            </a:pPr>
+            <a:r>
+              <a:rPr sz="1300" b="0" i="0">
+                <a:solidFill>
+                  <a:srgbClr val="333333"/>
+                </a:solidFill>
+                <a:latin typeface="Calibri"/>
+              </a:rPr>
+              <a:t>Léanla tal cual está escrita. Sin tecnología dentro.</a:t>
+            </a:r>
+          </a:p>
+        </p:txBody>
+      </p:sp>
+      <p:sp>
+        <p:nvSpPr>
+          <p:cNvPr id="10" name="Rounded Rectangle 9"/>
+          <p:cNvSpPr/>
+          <p:nvPr/>
+        </p:nvSpPr>
+        <p:spPr>
+          <a:xfrm>
+            <a:off x="457200" y="2445105"/>
+            <a:ext cx="11277295" cy="908913"/>
+          </a:xfrm>
+          <a:prstGeom prst="roundRect">
+            <a:avLst>
+              <a:gd name="adj" fmla="val 12000"/>
+            </a:avLst>
+          </a:prstGeom>
+          <a:solidFill>
+            <a:srgbClr val="E8F4FA"/>
+          </a:solidFill>
+          <a:ln>
+            <a:noFill/>
+          </a:ln>
+        </p:spPr>
+        <p:style>
+          <a:lnRef idx="1">
+            <a:schemeClr val="accent1"/>
+          </a:lnRef>
+          <a:fillRef idx="3">
+            <a:schemeClr val="accent1"/>
+          </a:fillRef>
+          <a:effectRef idx="2">
+            <a:schemeClr val="accent1"/>
+          </a:effectRef>
+          <a:fontRef idx="minor">
+            <a:schemeClr val="lt1"/>
+          </a:fontRef>
+        </p:style>
+        <p:txBody>
+          <a:bodyPr rtlCol="0" anchor="ctr"/>
+          <a:lstStyle/>
+          <a:p>
+            <a:pPr algn="ctr"/>
+          </a:p>
+        </p:txBody>
+      </p:sp>
+      <p:sp>
+        <p:nvSpPr>
+          <p:cNvPr id="11" name="Rounded Rectangle 10"/>
+          <p:cNvSpPr/>
+          <p:nvPr/>
+        </p:nvSpPr>
+        <p:spPr>
+          <a:xfrm>
+            <a:off x="594360" y="2680106"/>
+            <a:ext cx="438912" cy="438912"/>
+          </a:xfrm>
+          <a:prstGeom prst="roundRect">
+            <a:avLst>
+              <a:gd name="adj" fmla="val 12000"/>
+            </a:avLst>
+          </a:prstGeom>
+          <a:solidFill>
+            <a:srgbClr val="095292"/>
+          </a:solidFill>
+          <a:ln>
+            <a:noFill/>
+          </a:ln>
+        </p:spPr>
+        <p:style>
+          <a:lnRef idx="1">
+            <a:schemeClr val="accent1"/>
+          </a:lnRef>
+          <a:fillRef idx="3">
+            <a:schemeClr val="accent1"/>
+          </a:fillRef>
+          <a:effectRef idx="2">
+            <a:schemeClr val="accent1"/>
+          </a:effectRef>
+          <a:fontRef idx="minor">
+            <a:schemeClr val="lt1"/>
+          </a:fontRef>
+        </p:style>
+        <p:txBody>
+          <a:bodyPr rtlCol="0" anchor="ctr"/>
+          <a:lstStyle/>
+          <a:p>
+            <a:pPr algn="ctr"/>
+          </a:p>
+        </p:txBody>
+      </p:sp>
+      <p:sp>
+        <p:nvSpPr>
+          <p:cNvPr id="12" name="TextBox 11"/>
+          <p:cNvSpPr txBox="1"/>
+          <p:nvPr/>
+        </p:nvSpPr>
+        <p:spPr>
+          <a:xfrm>
+            <a:off x="594360" y="2680106"/>
+            <a:ext cx="438912" cy="438912"/>
+          </a:xfrm>
+          <a:prstGeom prst="rect">
+            <a:avLst/>
+          </a:prstGeom>
+          <a:noFill/>
+        </p:spPr>
+        <p:txBody>
+          <a:bodyPr wrap="square" anchor="ctr"/>
+          <a:lstStyle/>
+          <a:p>
+            <a:pPr algn="ctr"/>
+            <a:r>
+              <a:rPr sz="1600" b="1" i="0">
+                <a:solidFill>
+                  <a:srgbClr val="FFFFFF"/>
+                </a:solidFill>
+                <a:latin typeface="Calibri"/>
+              </a:rPr>
+              <a:t>2</a:t>
+            </a:r>
+          </a:p>
+        </p:txBody>
+      </p:sp>
+      <p:sp>
+        <p:nvSpPr>
+          <p:cNvPr id="13" name="TextBox 12"/>
+          <p:cNvSpPr txBox="1"/>
+          <p:nvPr/>
+        </p:nvSpPr>
+        <p:spPr>
+          <a:xfrm>
+            <a:off x="1188720" y="2536545"/>
+            <a:ext cx="10271455" cy="744321"/>
+          </a:xfrm>
+          <a:prstGeom prst="rect">
+            <a:avLst/>
+          </a:prstGeom>
+          <a:noFill/>
+        </p:spPr>
+        <p:txBody>
+          <a:bodyPr wrap="square" anchor="ctr"/>
+          <a:lstStyle/>
+          <a:p>
+            <a:r>
+              <a:rPr sz="1500" b="1" i="0">
+                <a:solidFill>
+                  <a:srgbClr val="095292"/>
+                </a:solidFill>
+                <a:latin typeface="Calibri"/>
+              </a:rPr>
+              <a:t>30 s · La cifra</a:t>
+            </a:r>
+          </a:p>
+          <a:p>
+            <a:pPr>
+              <a:spcBef>
+                <a:spcPts val="200"/>
+              </a:spcBef>
+            </a:pPr>
+            <a:r>
+              <a:rPr sz="1300" b="0" i="0">
+                <a:solidFill>
+                  <a:srgbClr val="333333"/>
+                </a:solidFill>
+                <a:latin typeface="Calibri"/>
+              </a:rPr>
+              <a:t>La línea base y cómo la obtuvieron. Es el minuto obligatorio.</a:t>
+            </a:r>
+          </a:p>
+        </p:txBody>
+      </p:sp>
+      <p:sp>
+        <p:nvSpPr>
+          <p:cNvPr id="14" name="Rounded Rectangle 13"/>
+          <p:cNvSpPr/>
+          <p:nvPr/>
+        </p:nvSpPr>
+        <p:spPr>
+          <a:xfrm>
+            <a:off x="457200" y="3445459"/>
+            <a:ext cx="11277295" cy="908913"/>
+          </a:xfrm>
+          <a:prstGeom prst="roundRect">
+            <a:avLst>
+              <a:gd name="adj" fmla="val 12000"/>
+            </a:avLst>
+          </a:prstGeom>
+          <a:solidFill>
+            <a:srgbClr val="F2F2F2"/>
+          </a:solidFill>
+          <a:ln>
+            <a:noFill/>
+          </a:ln>
+        </p:spPr>
+        <p:style>
+          <a:lnRef idx="1">
+            <a:schemeClr val="accent1"/>
+          </a:lnRef>
+          <a:fillRef idx="3">
+            <a:schemeClr val="accent1"/>
+          </a:fillRef>
+          <a:effectRef idx="2">
+            <a:schemeClr val="accent1"/>
+          </a:effectRef>
+          <a:fontRef idx="minor">
+            <a:schemeClr val="lt1"/>
+          </a:fontRef>
+        </p:style>
+        <p:txBody>
+          <a:bodyPr rtlCol="0" anchor="ctr"/>
+          <a:lstStyle/>
+          <a:p>
+            <a:pPr algn="ctr"/>
+          </a:p>
+        </p:txBody>
+      </p:sp>
+      <p:sp>
+        <p:nvSpPr>
+          <p:cNvPr id="15" name="Rounded Rectangle 14"/>
+          <p:cNvSpPr/>
+          <p:nvPr/>
+        </p:nvSpPr>
+        <p:spPr>
+          <a:xfrm>
+            <a:off x="594360" y="3680460"/>
+            <a:ext cx="438912" cy="438912"/>
+          </a:xfrm>
+          <a:prstGeom prst="roundRect">
+            <a:avLst>
+              <a:gd name="adj" fmla="val 12000"/>
+            </a:avLst>
+          </a:prstGeom>
+          <a:solidFill>
+            <a:srgbClr val="095292"/>
+          </a:solidFill>
+          <a:ln>
+            <a:noFill/>
+          </a:ln>
+        </p:spPr>
+        <p:style>
+          <a:lnRef idx="1">
+            <a:schemeClr val="accent1"/>
+          </a:lnRef>
+          <a:fillRef idx="3">
+            <a:schemeClr val="accent1"/>
+          </a:fillRef>
+          <a:effectRef idx="2">
+            <a:schemeClr val="accent1"/>
+          </a:effectRef>
+          <a:fontRef idx="minor">
+            <a:schemeClr val="lt1"/>
+          </a:fontRef>
+        </p:style>
+        <p:txBody>
+          <a:bodyPr rtlCol="0" anchor="ctr"/>
+          <a:lstStyle/>
+          <a:p>
+            <a:pPr algn="ctr"/>
+          </a:p>
+        </p:txBody>
+      </p:sp>
+      <p:sp>
+        <p:nvSpPr>
+          <p:cNvPr id="16" name="TextBox 15"/>
+          <p:cNvSpPr txBox="1"/>
+          <p:nvPr/>
+        </p:nvSpPr>
+        <p:spPr>
+          <a:xfrm>
+            <a:off x="594360" y="3680460"/>
+            <a:ext cx="438912" cy="438912"/>
+          </a:xfrm>
+          <a:prstGeom prst="rect">
+            <a:avLst/>
+          </a:prstGeom>
+          <a:noFill/>
+        </p:spPr>
+        <p:txBody>
+          <a:bodyPr wrap="square" anchor="ctr"/>
+          <a:lstStyle/>
+          <a:p>
+            <a:pPr algn="ctr"/>
+            <a:r>
+              <a:rPr sz="1600" b="1" i="0">
+                <a:solidFill>
+                  <a:srgbClr val="FFFFFF"/>
+                </a:solidFill>
+                <a:latin typeface="Calibri"/>
+              </a:rPr>
+              <a:t>3</a:t>
+            </a:r>
+          </a:p>
+        </p:txBody>
+      </p:sp>
+      <p:sp>
+        <p:nvSpPr>
+          <p:cNvPr id="17" name="TextBox 16"/>
+          <p:cNvSpPr txBox="1"/>
+          <p:nvPr/>
+        </p:nvSpPr>
+        <p:spPr>
+          <a:xfrm>
+            <a:off x="1188720" y="3536899"/>
+            <a:ext cx="10271455" cy="744321"/>
+          </a:xfrm>
+          <a:prstGeom prst="rect">
+            <a:avLst/>
+          </a:prstGeom>
+          <a:noFill/>
+        </p:spPr>
+        <p:txBody>
+          <a:bodyPr wrap="square" anchor="ctr"/>
+          <a:lstStyle/>
+          <a:p>
+            <a:r>
+              <a:rPr sz="1500" b="1" i="0">
+                <a:solidFill>
+                  <a:srgbClr val="095292"/>
+                </a:solidFill>
+                <a:latin typeface="Calibri"/>
+              </a:rPr>
+              <a:t>50 s · El árbol</a:t>
+            </a:r>
+          </a:p>
+          <a:p>
+            <a:pPr>
+              <a:spcBef>
+                <a:spcPts val="200"/>
+              </a:spcBef>
+            </a:pPr>
+            <a:r>
+              <a:rPr sz="1300" b="0" i="0">
+                <a:solidFill>
+                  <a:srgbClr val="333333"/>
+                </a:solidFill>
+                <a:latin typeface="Calibri"/>
+              </a:rPr>
+              <a:t>Muestren el dibujo y señalen la causa que van a atacar.</a:t>
+            </a:r>
+          </a:p>
+        </p:txBody>
+      </p:sp>
+      <p:sp>
+        <p:nvSpPr>
+          <p:cNvPr id="18" name="Rounded Rectangle 17"/>
+          <p:cNvSpPr/>
+          <p:nvPr/>
+        </p:nvSpPr>
+        <p:spPr>
+          <a:xfrm>
+            <a:off x="457200" y="4445812"/>
+            <a:ext cx="11277295" cy="908913"/>
+          </a:xfrm>
+          <a:prstGeom prst="roundRect">
+            <a:avLst>
+              <a:gd name="adj" fmla="val 12000"/>
+            </a:avLst>
+          </a:prstGeom>
+          <a:solidFill>
+            <a:srgbClr val="E8F4FA"/>
+          </a:solidFill>
+          <a:ln>
+            <a:noFill/>
+          </a:ln>
+        </p:spPr>
+        <p:style>
+          <a:lnRef idx="1">
+            <a:schemeClr val="accent1"/>
+          </a:lnRef>
+          <a:fillRef idx="3">
+            <a:schemeClr val="accent1"/>
+          </a:fillRef>
+          <a:effectRef idx="2">
+            <a:schemeClr val="accent1"/>
+          </a:effectRef>
+          <a:fontRef idx="minor">
+            <a:schemeClr val="lt1"/>
+          </a:fontRef>
+        </p:style>
+        <p:txBody>
+          <a:bodyPr rtlCol="0" anchor="ctr"/>
+          <a:lstStyle/>
+          <a:p>
+            <a:pPr algn="ctr"/>
+          </a:p>
+        </p:txBody>
+      </p:sp>
+      <p:sp>
+        <p:nvSpPr>
+          <p:cNvPr id="19" name="Rounded Rectangle 18"/>
+          <p:cNvSpPr/>
+          <p:nvPr/>
+        </p:nvSpPr>
+        <p:spPr>
+          <a:xfrm>
+            <a:off x="594360" y="4680813"/>
+            <a:ext cx="438912" cy="438912"/>
+          </a:xfrm>
+          <a:prstGeom prst="roundRect">
+            <a:avLst>
+              <a:gd name="adj" fmla="val 12000"/>
+            </a:avLst>
+          </a:prstGeom>
+          <a:solidFill>
+            <a:srgbClr val="095292"/>
+          </a:solidFill>
+          <a:ln>
+            <a:noFill/>
+          </a:ln>
+        </p:spPr>
+        <p:style>
+          <a:lnRef idx="1">
+            <a:schemeClr val="accent1"/>
+          </a:lnRef>
+          <a:fillRef idx="3">
+            <a:schemeClr val="accent1"/>
+          </a:fillRef>
+          <a:effectRef idx="2">
+            <a:schemeClr val="accent1"/>
+          </a:effectRef>
+          <a:fontRef idx="minor">
+            <a:schemeClr val="lt1"/>
+          </a:fontRef>
+        </p:style>
+        <p:txBody>
+          <a:bodyPr rtlCol="0" anchor="ctr"/>
+          <a:lstStyle/>
+          <a:p>
+            <a:pPr algn="ctr"/>
+          </a:p>
+        </p:txBody>
+      </p:sp>
+      <p:sp>
+        <p:nvSpPr>
+          <p:cNvPr id="20" name="TextBox 19"/>
+          <p:cNvSpPr txBox="1"/>
+          <p:nvPr/>
+        </p:nvSpPr>
+        <p:spPr>
+          <a:xfrm>
+            <a:off x="594360" y="4680813"/>
+            <a:ext cx="438912" cy="438912"/>
+          </a:xfrm>
+          <a:prstGeom prst="rect">
+            <a:avLst/>
+          </a:prstGeom>
+          <a:noFill/>
+        </p:spPr>
+        <p:txBody>
+          <a:bodyPr wrap="square" anchor="ctr"/>
+          <a:lstStyle/>
+          <a:p>
+            <a:pPr algn="ctr"/>
+            <a:r>
+              <a:rPr sz="1600" b="1" i="0">
+                <a:solidFill>
+                  <a:srgbClr val="FFFFFF"/>
+                </a:solidFill>
+                <a:latin typeface="Calibri"/>
+              </a:rPr>
+              <a:t>4</a:t>
+            </a:r>
+          </a:p>
+        </p:txBody>
+      </p:sp>
+      <p:sp>
+        <p:nvSpPr>
+          <p:cNvPr id="21" name="TextBox 20"/>
+          <p:cNvSpPr txBox="1"/>
+          <p:nvPr/>
+        </p:nvSpPr>
+        <p:spPr>
+          <a:xfrm>
+            <a:off x="1188720" y="4537252"/>
+            <a:ext cx="10271455" cy="744321"/>
+          </a:xfrm>
+          <a:prstGeom prst="rect">
+            <a:avLst/>
+          </a:prstGeom>
+          <a:noFill/>
+        </p:spPr>
+        <p:txBody>
+          <a:bodyPr wrap="square" anchor="ctr"/>
+          <a:lstStyle/>
+          <a:p>
+            <a:r>
+              <a:rPr sz="1500" b="1" i="0">
+                <a:solidFill>
+                  <a:srgbClr val="095292"/>
+                </a:solidFill>
+                <a:latin typeface="Calibri"/>
+              </a:rPr>
+              <a:t>40 s · Actores y frontera</a:t>
+            </a:r>
+          </a:p>
+          <a:p>
+            <a:pPr>
+              <a:spcBef>
+                <a:spcPts val="200"/>
+              </a:spcBef>
+            </a:pPr>
+            <a:r>
+              <a:rPr sz="1300" b="0" i="0">
+                <a:solidFill>
+                  <a:srgbClr val="333333"/>
+                </a:solidFill>
+                <a:latin typeface="Calibri"/>
+              </a:rPr>
+              <a:t>Quién vive el problema, y a quién le van a preguntar esta semana.</a:t>
+            </a:r>
+          </a:p>
+        </p:txBody>
+      </p:sp>
+      <p:sp>
+        <p:nvSpPr>
+          <p:cNvPr id="22" name="Rounded Rectangle 21"/>
+          <p:cNvSpPr/>
+          <p:nvPr/>
+        </p:nvSpPr>
+        <p:spPr>
+          <a:xfrm>
+            <a:off x="457200" y="5446166"/>
+            <a:ext cx="11277295" cy="908913"/>
+          </a:xfrm>
+          <a:prstGeom prst="roundRect">
+            <a:avLst>
+              <a:gd name="adj" fmla="val 12000"/>
+            </a:avLst>
+          </a:prstGeom>
+          <a:solidFill>
+            <a:srgbClr val="F2F2F2"/>
+          </a:solidFill>
+          <a:ln>
+            <a:noFill/>
+          </a:ln>
+        </p:spPr>
+        <p:style>
+          <a:lnRef idx="1">
+            <a:schemeClr val="accent1"/>
+          </a:lnRef>
+          <a:fillRef idx="3">
+            <a:schemeClr val="accent1"/>
+          </a:fillRef>
+          <a:effectRef idx="2">
+            <a:schemeClr val="accent1"/>
+          </a:effectRef>
+          <a:fontRef idx="minor">
+            <a:schemeClr val="lt1"/>
+          </a:fontRef>
+        </p:style>
+        <p:txBody>
+          <a:bodyPr rtlCol="0" anchor="ctr"/>
+          <a:lstStyle/>
+          <a:p>
+            <a:pPr algn="ctr"/>
+          </a:p>
+        </p:txBody>
+      </p:sp>
+      <p:sp>
+        <p:nvSpPr>
+          <p:cNvPr id="23" name="Rounded Rectangle 22"/>
+          <p:cNvSpPr/>
+          <p:nvPr/>
+        </p:nvSpPr>
+        <p:spPr>
+          <a:xfrm>
+            <a:off x="594360" y="5681167"/>
+            <a:ext cx="438912" cy="438912"/>
+          </a:xfrm>
+          <a:prstGeom prst="roundRect">
+            <a:avLst>
+              <a:gd name="adj" fmla="val 12000"/>
+            </a:avLst>
+          </a:prstGeom>
+          <a:solidFill>
+            <a:srgbClr val="095292"/>
+          </a:solidFill>
+          <a:ln>
+            <a:noFill/>
+          </a:ln>
+        </p:spPr>
+        <p:style>
+          <a:lnRef idx="1">
+            <a:schemeClr val="accent1"/>
+          </a:lnRef>
+          <a:fillRef idx="3">
+            <a:schemeClr val="accent1"/>
+          </a:fillRef>
+          <a:effectRef idx="2">
+            <a:schemeClr val="accent1"/>
+          </a:effectRef>
+          <a:fontRef idx="minor">
+            <a:schemeClr val="lt1"/>
+          </a:fontRef>
+        </p:style>
+        <p:txBody>
+          <a:bodyPr rtlCol="0" anchor="ctr"/>
+          <a:lstStyle/>
+          <a:p>
+            <a:pPr algn="ctr"/>
+          </a:p>
+        </p:txBody>
+      </p:sp>
+      <p:sp>
+        <p:nvSpPr>
+          <p:cNvPr id="24" name="TextBox 23"/>
+          <p:cNvSpPr txBox="1"/>
+          <p:nvPr/>
+        </p:nvSpPr>
+        <p:spPr>
+          <a:xfrm>
+            <a:off x="594360" y="5681167"/>
+            <a:ext cx="438912" cy="438912"/>
+          </a:xfrm>
+          <a:prstGeom prst="rect">
+            <a:avLst/>
+          </a:prstGeom>
+          <a:noFill/>
+        </p:spPr>
+        <p:txBody>
+          <a:bodyPr wrap="square" anchor="ctr"/>
+          <a:lstStyle/>
+          <a:p>
+            <a:pPr algn="ctr"/>
+            <a:r>
+              <a:rPr sz="1600" b="1" i="0">
+                <a:solidFill>
+                  <a:srgbClr val="FFFFFF"/>
+                </a:solidFill>
+                <a:latin typeface="Calibri"/>
+              </a:rPr>
+              <a:t>5</a:t>
+            </a:r>
+          </a:p>
+        </p:txBody>
+      </p:sp>
+      <p:sp>
+        <p:nvSpPr>
+          <p:cNvPr id="25" name="TextBox 24"/>
+          <p:cNvSpPr txBox="1"/>
+          <p:nvPr/>
+        </p:nvSpPr>
+        <p:spPr>
+          <a:xfrm>
+            <a:off x="1188720" y="5537606"/>
+            <a:ext cx="10271455" cy="744321"/>
+          </a:xfrm>
+          <a:prstGeom prst="rect">
+            <a:avLst/>
+          </a:prstGeom>
+          <a:noFill/>
+        </p:spPr>
+        <p:txBody>
+          <a:bodyPr wrap="square" anchor="ctr"/>
+          <a:lstStyle/>
+          <a:p>
+            <a:r>
+              <a:rPr sz="1500" b="1" i="0">
+                <a:solidFill>
+                  <a:srgbClr val="095292"/>
+                </a:solidFill>
+                <a:latin typeface="Calibri"/>
+              </a:rPr>
+              <a:t>20 s · El criterio de éxito</a:t>
+            </a:r>
+          </a:p>
+          <a:p>
+            <a:pPr>
+              <a:spcBef>
+                <a:spcPts val="200"/>
+              </a:spcBef>
+            </a:pPr>
+            <a:r>
+              <a:rPr sz="1300" b="0" i="0">
+                <a:solidFill>
+                  <a:srgbClr val="333333"/>
+                </a:solidFill>
+                <a:latin typeface="Calibri"/>
+              </a:rPr>
+              <a:t>De X a Y, medido así.</a:t>
+            </a:r>
+          </a:p>
+        </p:txBody>
+      </p:sp>
+      <p:sp>
+        <p:nvSpPr>
+          <p:cNvPr id="26" name="TextBox 25"/>
+          <p:cNvSpPr txBox="1"/>
+          <p:nvPr/>
+        </p:nvSpPr>
+        <p:spPr>
+          <a:xfrm>
+            <a:off x="11185855" y="6473952"/>
+            <a:ext cx="640080" cy="274320"/>
+          </a:xfrm>
+          <a:prstGeom prst="rect">
+            <a:avLst/>
+          </a:prstGeom>
+          <a:noFill/>
+        </p:spPr>
+        <p:txBody>
+          <a:bodyPr wrap="square">
+            <a:spAutoFit/>
+          </a:bodyPr>
+          <a:lstStyle/>
+          <a:p>
+            <a:pPr algn="r"/>
+            <a:r>
+              <a:rPr sz="1100" b="0" i="0">
+                <a:solidFill>
+                  <a:srgbClr val="666666"/>
+                </a:solidFill>
+                <a:latin typeface="Calibri"/>
+              </a:rPr>
+              <a:t>27</a:t>
+            </a:r>
+          </a:p>
+        </p:txBody>
+      </p:sp>
+    </p:spTree>
+  </p:cSld>
+  <p:clrMapOvr>
+    <a:masterClrMapping/>
+  </p:clrMapOvr>
+</p:sld>
+</file>
+
+<file path=ppt/slides/slide28.xml><?xml version="1.0" encoding="utf-8"?>
+<p:sld xmlns:a="http://schemas.openxmlformats.org/drawingml/2006/main" xmlns:p="http://schemas.openxmlformats.org/presentationml/2006/main" xmlns:r="http://schemas.openxmlformats.org/officeDocument/2006/relationships">
+  <p:cSld>
+    <p:bg>
+      <p:bgPr>
+        <a:solidFill>
+          <a:srgbClr val="FFFFFF"/>
+        </a:solidFill>
+        <a:effectLst/>
+      </p:bgPr>
+    </p:bg>
+    <p:spTree>
+      <p:nvGrpSpPr>
+        <p:cNvPr id="1" name=""/>
+        <p:cNvGrpSpPr/>
+        <p:nvPr/>
+      </p:nvGrpSpPr>
+      <p:grpSpPr/>
+      <p:sp>
+        <p:nvSpPr>
+          <p:cNvPr id="2" name="Rectangle 1"/>
+          <p:cNvSpPr/>
+          <p:nvPr/>
+        </p:nvSpPr>
+        <p:spPr>
+          <a:xfrm>
+            <a:off x="0" y="0"/>
+            <a:ext cx="12191695" cy="960120"/>
+          </a:xfrm>
+          <a:prstGeom prst="rect">
+            <a:avLst/>
+          </a:prstGeom>
+          <a:solidFill>
+            <a:srgbClr val="095292"/>
+          </a:solidFill>
+          <a:ln>
+            <a:noFill/>
+          </a:ln>
+        </p:spPr>
+        <p:style>
+          <a:lnRef idx="1">
+            <a:schemeClr val="accent1"/>
+          </a:lnRef>
+          <a:fillRef idx="3">
+            <a:schemeClr val="accent1"/>
+          </a:fillRef>
+          <a:effectRef idx="2">
+            <a:schemeClr val="accent1"/>
+          </a:effectRef>
+          <a:fontRef idx="minor">
+            <a:schemeClr val="lt1"/>
+          </a:fontRef>
+        </p:style>
+        <p:txBody>
+          <a:bodyPr rtlCol="0" anchor="ctr"/>
+          <a:lstStyle/>
+          <a:p>
+            <a:pPr algn="ctr"/>
+          </a:p>
+        </p:txBody>
+      </p:sp>
+      <p:sp>
+        <p:nvSpPr>
+          <p:cNvPr id="3" name="Rectangle 2"/>
+          <p:cNvSpPr/>
+          <p:nvPr/>
+        </p:nvSpPr>
+        <p:spPr>
+          <a:xfrm>
+            <a:off x="0" y="960120"/>
+            <a:ext cx="12191695" cy="41148"/>
+          </a:xfrm>
+          <a:prstGeom prst="rect">
+            <a:avLst/>
+          </a:prstGeom>
+          <a:solidFill>
+            <a:srgbClr val="FFD000"/>
+          </a:solidFill>
+          <a:ln>
+            <a:noFill/>
+          </a:ln>
+        </p:spPr>
+        <p:style>
+          <a:lnRef idx="1">
+            <a:schemeClr val="accent1"/>
+          </a:lnRef>
+          <a:fillRef idx="3">
+            <a:schemeClr val="accent1"/>
+          </a:fillRef>
+          <a:effectRef idx="2">
+            <a:schemeClr val="accent1"/>
+          </a:effectRef>
+          <a:fontRef idx="minor">
+            <a:schemeClr val="lt1"/>
+          </a:fontRef>
+        </p:style>
+        <p:txBody>
+          <a:bodyPr rtlCol="0" anchor="ctr"/>
+          <a:lstStyle/>
+          <a:p>
+            <a:pPr algn="ctr"/>
+          </a:p>
+        </p:txBody>
+      </p:sp>
+      <p:sp>
+        <p:nvSpPr>
+          <p:cNvPr id="4" name="TextBox 3"/>
+          <p:cNvSpPr txBox="1"/>
+          <p:nvPr/>
+        </p:nvSpPr>
+        <p:spPr>
+          <a:xfrm>
+            <a:off x="457200" y="164592"/>
+            <a:ext cx="11277295" cy="502920"/>
+          </a:xfrm>
+          <a:prstGeom prst="rect">
+            <a:avLst/>
+          </a:prstGeom>
+          <a:noFill/>
+        </p:spPr>
+        <p:txBody>
+          <a:bodyPr wrap="square">
+            <a:spAutoFit/>
+          </a:bodyPr>
+          <a:lstStyle/>
+          <a:p>
+            <a:r>
+              <a:rPr sz="2600" b="1" i="0">
+                <a:solidFill>
+                  <a:srgbClr val="FFFFFF"/>
+                </a:solidFill>
+                <a:latin typeface="Calibri"/>
+              </a:rPr>
+              <a:t>Para la Clase 7</a:t>
+            </a:r>
+          </a:p>
+        </p:txBody>
+      </p:sp>
+      <p:sp>
+        <p:nvSpPr>
+          <p:cNvPr id="5" name="TextBox 4"/>
+          <p:cNvSpPr txBox="1"/>
+          <p:nvPr/>
+        </p:nvSpPr>
+        <p:spPr>
+          <a:xfrm>
+            <a:off x="457200" y="1170432"/>
+            <a:ext cx="11277295" cy="5230368"/>
+          </a:xfrm>
+          <a:prstGeom prst="rect">
+            <a:avLst/>
+          </a:prstGeom>
+          <a:noFill/>
+        </p:spPr>
+        <p:txBody>
+          <a:bodyPr wrap="square">
+            <a:spAutoFit/>
+          </a:bodyPr>
+          <a:lstStyle/>
+          <a:p>
+            <a:pPr>
+              <a:spcAft>
+                <a:spcPts val="800"/>
+              </a:spcAft>
+            </a:pPr>
+            <a:r>
+              <a:rPr sz="2000" b="0" i="0">
+                <a:solidFill>
+                  <a:srgbClr val="333333"/>
+                </a:solidFill>
+                <a:latin typeface="Calibri"/>
+              </a:rPr>
+              <a:t>–   </a:t>
+            </a:r>
+            <a:r>
+              <a:rPr sz="2000" b="1" i="0">
+                <a:solidFill>
+                  <a:srgbClr val="333333"/>
+                </a:solidFill>
+                <a:latin typeface="Calibri"/>
+              </a:rPr>
+              <a:t>Trabajo dirigido:</a:t>
+            </a:r>
+            <a:r>
+              <a:rPr sz="2000" b="0" i="0">
+                <a:solidFill>
+                  <a:srgbClr val="333333"/>
+                </a:solidFill>
+                <a:latin typeface="Calibri"/>
+              </a:rPr>
+              <a:t> Identificación de problemáticas locales — cerrar la ficha con la cifra medida de verdad, no estimada, si esta semana alcanzan a contar o preguntar.</a:t>
+            </a:r>
+          </a:p>
+          <a:p>
+            <a:pPr>
+              <a:spcAft>
+                <a:spcPts val="800"/>
+              </a:spcAft>
+            </a:pPr>
+            <a:r>
+              <a:rPr sz="2000" b="0" i="0">
+                <a:solidFill>
+                  <a:srgbClr val="333333"/>
+                </a:solidFill>
+                <a:latin typeface="Calibri"/>
+              </a:rPr>
+              <a:t>–   </a:t>
+            </a:r>
+            <a:r>
+              <a:rPr sz="2000" b="1" i="0">
+                <a:solidFill>
+                  <a:srgbClr val="333333"/>
+                </a:solidFill>
+                <a:latin typeface="Calibri"/>
+              </a:rPr>
+              <a:t>Trabajo independiente:</a:t>
+            </a:r>
+            <a:r>
+              <a:rPr sz="2000" b="0" i="0">
+                <a:solidFill>
+                  <a:srgbClr val="333333"/>
+                </a:solidFill>
+                <a:latin typeface="Calibri"/>
+              </a:rPr>
+              <a:t> Propuesta inicial de solución: media página con </a:t>
+            </a:r>
+            <a:r>
+              <a:rPr sz="2000" b="1" i="0">
+                <a:solidFill>
+                  <a:srgbClr val="333333"/>
+                </a:solidFill>
+                <a:latin typeface="Calibri"/>
+              </a:rPr>
+              <a:t>dos</a:t>
+            </a:r>
+            <a:r>
+              <a:rPr sz="2000" b="0" i="0">
+                <a:solidFill>
+                  <a:srgbClr val="333333"/>
+                </a:solidFill>
+                <a:latin typeface="Calibri"/>
+              </a:rPr>
+              <a:t> alternativas para atacar la causa elegida, sin decidir todavía cuál. Sin nombrar herramientas.</a:t>
+            </a:r>
+          </a:p>
+          <a:p>
+            <a:pPr>
+              <a:spcAft>
+                <a:spcPts val="800"/>
+              </a:spcAft>
+            </a:pPr>
+            <a:r>
+              <a:rPr sz="2000" b="0" i="0">
+                <a:solidFill>
+                  <a:srgbClr val="333333"/>
+                </a:solidFill>
+                <a:latin typeface="Calibri"/>
+              </a:rPr>
+              <a:t>–   </a:t>
+            </a:r>
+            <a:r>
+              <a:rPr sz="2000" b="1" i="0">
+                <a:solidFill>
+                  <a:srgbClr val="333333"/>
+                </a:solidFill>
+                <a:latin typeface="Calibri"/>
+              </a:rPr>
+              <a:t>Clase 7 · Ciclo de vida de los proyectos de ingeniería</a:t>
+            </a:r>
+            <a:r>
+              <a:rPr sz="2000" b="0" i="0">
+                <a:solidFill>
+                  <a:srgbClr val="333333"/>
+                </a:solidFill>
+                <a:latin typeface="Calibri"/>
+              </a:rPr>
+              <a:t> — el </a:t>
+            </a:r>
+            <a:r>
+              <a:rPr sz="2000" b="1" i="0">
+                <a:solidFill>
+                  <a:srgbClr val="333333"/>
+                </a:solidFill>
+                <a:latin typeface="Calibri"/>
+              </a:rPr>
+              <a:t>ciclo de vida de los proyectos de ingeniería</a:t>
+            </a:r>
+            <a:r>
+              <a:rPr sz="2000" b="0" i="0">
+                <a:solidFill>
+                  <a:srgbClr val="333333"/>
+                </a:solidFill>
+                <a:latin typeface="Calibri"/>
+              </a:rPr>
+              <a:t>, aplicado a la ficha de hoy: qué se hace antes de construir y por qué el orden importa.</a:t>
+            </a:r>
+          </a:p>
+          <a:p>
+            <a:pPr>
+              <a:spcAft>
+                <a:spcPts val="800"/>
+              </a:spcAft>
+            </a:pPr>
+            <a:r>
+              <a:rPr sz="2000" b="0" i="0">
+                <a:solidFill>
+                  <a:srgbClr val="333333"/>
+                </a:solidFill>
+                <a:latin typeface="Calibri"/>
+              </a:rPr>
+              <a:t>–   </a:t>
+            </a:r>
+            <a:r>
+              <a:rPr sz="2000" b="1" i="0">
+                <a:solidFill>
+                  <a:srgbClr val="333333"/>
+                </a:solidFill>
+                <a:latin typeface="Calibri"/>
+              </a:rPr>
+              <a:t>Aviso:</a:t>
+            </a:r>
+            <a:r>
+              <a:rPr sz="2000" b="0" i="0">
+                <a:solidFill>
+                  <a:srgbClr val="333333"/>
+                </a:solidFill>
+                <a:latin typeface="Calibri"/>
+              </a:rPr>
+              <a:t> Arranca el corte 2. La ficha del problema queda como referencia fija: llévenla al documento del equipo con el título «Ficha del problema — versión final del corte 1», porque se va a citar en todas las sesiones que siguen.</a:t>
+            </a:r>
+          </a:p>
+          <a:p>
+            <a:pPr>
+              <a:spcAft>
+                <a:spcPts val="800"/>
+              </a:spcAft>
+            </a:pPr>
+            <a:r>
+              <a:rPr sz="2000" b="0" i="0">
+                <a:solidFill>
+                  <a:srgbClr val="333333"/>
+                </a:solidFill>
+                <a:latin typeface="Calibri"/>
+              </a:rPr>
+              <a:t>–   </a:t>
+            </a:r>
+            <a:r>
+              <a:rPr sz="2000" b="1" i="0">
+                <a:solidFill>
+                  <a:srgbClr val="333333"/>
+                </a:solidFill>
+                <a:latin typeface="Calibri"/>
+              </a:rPr>
+              <a:t>Antes de salir:</a:t>
+            </a:r>
+            <a:r>
+              <a:rPr sz="2000" b="0" i="0">
+                <a:solidFill>
+                  <a:srgbClr val="333333"/>
+                </a:solidFill>
+                <a:latin typeface="Calibri"/>
+              </a:rPr>
+              <a:t> el enlace del documento del equipo en el chat, con permiso de lectura para el docente, y el nombre del vocero de hoy.</a:t>
+            </a:r>
+          </a:p>
+        </p:txBody>
+      </p:sp>
+      <p:sp>
+        <p:nvSpPr>
+          <p:cNvPr id="6" name="TextBox 5"/>
+          <p:cNvSpPr txBox="1"/>
+          <p:nvPr/>
+        </p:nvSpPr>
+        <p:spPr>
+          <a:xfrm>
+            <a:off x="11185855" y="6473952"/>
+            <a:ext cx="640080" cy="274320"/>
+          </a:xfrm>
+          <a:prstGeom prst="rect">
+            <a:avLst/>
+          </a:prstGeom>
+          <a:noFill/>
+        </p:spPr>
+        <p:txBody>
+          <a:bodyPr wrap="square">
+            <a:spAutoFit/>
+          </a:bodyPr>
+          <a:lstStyle/>
+          <a:p>
+            <a:pPr algn="r"/>
+            <a:r>
+              <a:rPr sz="1100" b="0" i="0">
+                <a:solidFill>
+                  <a:srgbClr val="666666"/>
+                </a:solidFill>
+                <a:latin typeface="Calibri"/>
+              </a:rPr>
+              <a:t>28</a:t>
+            </a:r>
+          </a:p>
+        </p:txBody>
+      </p:sp>
+    </p:spTree>
+  </p:cSld>
+  <p:clrMapOvr>
+    <a:masterClrMapping/>
+  </p:clrMapOvr>
+</p:sld>
+</file>
+
+<file path=ppt/slides/slide29.xml><?xml version="1.0" encoding="utf-8"?>
 <p:sld xmlns:a="http://schemas.openxmlformats.org/drawingml/2006/main" xmlns:p="http://schemas.openxmlformats.org/presentationml/2006/main" xmlns:r="http://schemas.openxmlformats.org/officeDocument/2006/relationships">
   <p:cSld>
     <p:bg>

--- a/Introduccion a la Ingenieria/Clases/Clase 6 - Analisis de problemas tecnologicos del entorno/Presentacion.pptx
+++ b/Introduccion a la Ingenieria/Clases/Clase 6 - Analisis de problemas tecnologicos del entorno/Presentacion.pptx
@@ -19,9 +19,6 @@
     <p:sldId id="267" r:id="rId19"/>
     <p:sldId id="268" r:id="rId20"/>
     <p:sldId id="269" r:id="rId21"/>
-    <p:sldId id="270" r:id="rId22"/>
-    <p:sldId id="271" r:id="rId23"/>
-    <p:sldId id="272" r:id="rId24"/>
   </p:sldIdLst>
   <p:sldSz cx="12191695" cy="6858000" type="screen4x3"/>
   <p:notesSz cx="6858000" cy="9144000"/>
@@ -7146,2679 +7143,6 @@
 </file>
 
 <file path=ppt/slides/slide14.xml><?xml version="1.0" encoding="utf-8"?>
-<p:sld xmlns:a="http://schemas.openxmlformats.org/drawingml/2006/main" xmlns:p="http://schemas.openxmlformats.org/presentationml/2006/main" xmlns:r="http://schemas.openxmlformats.org/officeDocument/2006/relationships">
-  <p:cSld>
-    <p:bg>
-      <p:bgPr>
-        <a:solidFill>
-          <a:srgbClr val="FFFFFF"/>
-        </a:solidFill>
-        <a:effectLst/>
-      </p:bgPr>
-    </p:bg>
-    <p:spTree>
-      <p:nvGrpSpPr>
-        <p:cNvPr id="1" name=""/>
-        <p:cNvGrpSpPr/>
-        <p:nvPr/>
-      </p:nvGrpSpPr>
-      <p:grpSpPr/>
-      <p:sp>
-        <p:nvSpPr>
-          <p:cNvPr id="2" name="Rectangle 1"/>
-          <p:cNvSpPr/>
-          <p:nvPr/>
-        </p:nvSpPr>
-        <p:spPr>
-          <a:xfrm>
-            <a:off x="0" y="0"/>
-            <a:ext cx="12191695" cy="1170432"/>
-          </a:xfrm>
-          <a:prstGeom prst="rect">
-            <a:avLst/>
-          </a:prstGeom>
-          <a:solidFill>
-            <a:srgbClr val="095292"/>
-          </a:solidFill>
-          <a:ln>
-            <a:noFill/>
-          </a:ln>
-        </p:spPr>
-        <p:style>
-          <a:lnRef idx="1">
-            <a:schemeClr val="accent1"/>
-          </a:lnRef>
-          <a:fillRef idx="3">
-            <a:schemeClr val="accent1"/>
-          </a:fillRef>
-          <a:effectRef idx="2">
-            <a:schemeClr val="accent1"/>
-          </a:effectRef>
-          <a:fontRef idx="minor">
-            <a:schemeClr val="lt1"/>
-          </a:fontRef>
-        </p:style>
-        <p:txBody>
-          <a:bodyPr rtlCol="0" anchor="ctr"/>
-          <a:lstStyle/>
-          <a:p>
-            <a:pPr algn="ctr"/>
-          </a:p>
-        </p:txBody>
-      </p:sp>
-      <p:sp>
-        <p:nvSpPr>
-          <p:cNvPr id="3" name="Rectangle 2"/>
-          <p:cNvSpPr/>
-          <p:nvPr/>
-        </p:nvSpPr>
-        <p:spPr>
-          <a:xfrm>
-            <a:off x="0" y="1170432"/>
-            <a:ext cx="12191695" cy="41148"/>
-          </a:xfrm>
-          <a:prstGeom prst="rect">
-            <a:avLst/>
-          </a:prstGeom>
-          <a:solidFill>
-            <a:srgbClr val="FFD000"/>
-          </a:solidFill>
-          <a:ln>
-            <a:noFill/>
-          </a:ln>
-        </p:spPr>
-        <p:style>
-          <a:lnRef idx="1">
-            <a:schemeClr val="accent1"/>
-          </a:lnRef>
-          <a:fillRef idx="3">
-            <a:schemeClr val="accent1"/>
-          </a:fillRef>
-          <a:effectRef idx="2">
-            <a:schemeClr val="accent1"/>
-          </a:effectRef>
-          <a:fontRef idx="minor">
-            <a:schemeClr val="lt1"/>
-          </a:fontRef>
-        </p:style>
-        <p:txBody>
-          <a:bodyPr rtlCol="0" anchor="ctr"/>
-          <a:lstStyle/>
-          <a:p>
-            <a:pPr algn="ctr"/>
-          </a:p>
-        </p:txBody>
-      </p:sp>
-      <p:sp>
-        <p:nvSpPr>
-          <p:cNvPr id="4" name="TextBox 3"/>
-          <p:cNvSpPr txBox="1"/>
-          <p:nvPr/>
-        </p:nvSpPr>
-        <p:spPr>
-          <a:xfrm>
-            <a:off x="457200" y="164592"/>
-            <a:ext cx="11277295" cy="384048"/>
-          </a:xfrm>
-          <a:prstGeom prst="rect">
-            <a:avLst/>
-          </a:prstGeom>
-          <a:noFill/>
-        </p:spPr>
-        <p:txBody>
-          <a:bodyPr wrap="square">
-            <a:spAutoFit/>
-          </a:bodyPr>
-          <a:lstStyle/>
-          <a:p>
-            <a:r>
-              <a:rPr sz="2600" b="1" i="0">
-                <a:solidFill>
-                  <a:srgbClr val="FFFFFF"/>
-                </a:solidFill>
-                <a:latin typeface="Calibri"/>
-              </a:rPr>
-              <a:t>Taller de hoy: Ficha del problema del proyecto</a:t>
-            </a:r>
-          </a:p>
-        </p:txBody>
-      </p:sp>
-      <p:sp>
-        <p:nvSpPr>
-          <p:cNvPr id="5" name="TextBox 4"/>
-          <p:cNvSpPr txBox="1"/>
-          <p:nvPr/>
-        </p:nvSpPr>
-        <p:spPr>
-          <a:xfrm>
-            <a:off x="457200" y="566928"/>
-            <a:ext cx="11277295" cy="411480"/>
-          </a:xfrm>
-          <a:prstGeom prst="rect">
-            <a:avLst/>
-          </a:prstGeom>
-          <a:noFill/>
-        </p:spPr>
-        <p:txBody>
-          <a:bodyPr wrap="square">
-            <a:spAutoFit/>
-          </a:bodyPr>
-          <a:lstStyle/>
-          <a:p>
-            <a:r>
-              <a:rPr sz="1400" b="0" i="0">
-                <a:solidFill>
-                  <a:srgbClr val="B8D8EE"/>
-                </a:solidFill>
-                <a:latin typeface="Calibri"/>
-              </a:rPr>
-              <a:t>17 min en equipos · cada equipo, su propio problema · ficha del problema + árbol de causas</a:t>
-            </a:r>
-          </a:p>
-        </p:txBody>
-      </p:sp>
-      <p:sp>
-        <p:nvSpPr>
-          <p:cNvPr id="6" name="Rounded Rectangle 5"/>
-          <p:cNvSpPr/>
-          <p:nvPr/>
-        </p:nvSpPr>
-        <p:spPr>
-          <a:xfrm>
-            <a:off x="457200" y="1472184"/>
-            <a:ext cx="11277295" cy="566928"/>
-          </a:xfrm>
-          <a:prstGeom prst="roundRect">
-            <a:avLst>
-              <a:gd name="adj" fmla="val 12000"/>
-            </a:avLst>
-          </a:prstGeom>
-          <a:solidFill>
-            <a:srgbClr val="F2F2F2"/>
-          </a:solidFill>
-          <a:ln>
-            <a:noFill/>
-          </a:ln>
-        </p:spPr>
-        <p:style>
-          <a:lnRef idx="1">
-            <a:schemeClr val="accent1"/>
-          </a:lnRef>
-          <a:fillRef idx="3">
-            <a:schemeClr val="accent1"/>
-          </a:fillRef>
-          <a:effectRef idx="2">
-            <a:schemeClr val="accent1"/>
-          </a:effectRef>
-          <a:fontRef idx="minor">
-            <a:schemeClr val="lt1"/>
-          </a:fontRef>
-        </p:style>
-        <p:txBody>
-          <a:bodyPr rtlCol="0" anchor="ctr"/>
-          <a:lstStyle/>
-          <a:p>
-            <a:pPr algn="ctr"/>
-          </a:p>
-        </p:txBody>
-      </p:sp>
-      <p:sp>
-        <p:nvSpPr>
-          <p:cNvPr id="7" name="Rectangle 6"/>
-          <p:cNvSpPr/>
-          <p:nvPr/>
-        </p:nvSpPr>
-        <p:spPr>
-          <a:xfrm>
-            <a:off x="640080" y="1618487"/>
-            <a:ext cx="274320" cy="274320"/>
-          </a:xfrm>
-          <a:prstGeom prst="rect">
-            <a:avLst/>
-          </a:prstGeom>
-          <a:solidFill>
-            <a:srgbClr val="FFFFFF"/>
-          </a:solidFill>
-          <a:ln>
-            <a:solidFill>
-              <a:srgbClr val="333333"/>
-            </a:solidFill>
-          </a:ln>
-        </p:spPr>
-        <p:style>
-          <a:lnRef idx="1">
-            <a:schemeClr val="accent1"/>
-          </a:lnRef>
-          <a:fillRef idx="3">
-            <a:schemeClr val="accent1"/>
-          </a:fillRef>
-          <a:effectRef idx="2">
-            <a:schemeClr val="accent1"/>
-          </a:effectRef>
-          <a:fontRef idx="minor">
-            <a:schemeClr val="lt1"/>
-          </a:fontRef>
-        </p:style>
-        <p:txBody>
-          <a:bodyPr rtlCol="0" anchor="ctr"/>
-          <a:lstStyle/>
-          <a:p>
-            <a:pPr algn="ctr"/>
-          </a:p>
-        </p:txBody>
-      </p:sp>
-      <p:sp>
-        <p:nvSpPr>
-          <p:cNvPr id="8" name="Rectangle 7"/>
-          <p:cNvSpPr/>
-          <p:nvPr/>
-        </p:nvSpPr>
-        <p:spPr>
-          <a:xfrm>
-            <a:off x="640080" y="1618487"/>
-            <a:ext cx="73152" cy="274320"/>
-          </a:xfrm>
-          <a:prstGeom prst="rect">
-            <a:avLst/>
-          </a:prstGeom>
-          <a:solidFill>
-            <a:srgbClr val="269CCB"/>
-          </a:solidFill>
-          <a:ln>
-            <a:noFill/>
-          </a:ln>
-        </p:spPr>
-        <p:style>
-          <a:lnRef idx="1">
-            <a:schemeClr val="accent1"/>
-          </a:lnRef>
-          <a:fillRef idx="3">
-            <a:schemeClr val="accent1"/>
-          </a:fillRef>
-          <a:effectRef idx="2">
-            <a:schemeClr val="accent1"/>
-          </a:effectRef>
-          <a:fontRef idx="minor">
-            <a:schemeClr val="lt1"/>
-          </a:fontRef>
-        </p:style>
-        <p:txBody>
-          <a:bodyPr rtlCol="0" anchor="ctr"/>
-          <a:lstStyle/>
-          <a:p>
-            <a:pPr algn="ctr"/>
-          </a:p>
-        </p:txBody>
-      </p:sp>
-      <p:sp>
-        <p:nvSpPr>
-          <p:cNvPr id="9" name="TextBox 8"/>
-          <p:cNvSpPr txBox="1"/>
-          <p:nvPr/>
-        </p:nvSpPr>
-        <p:spPr>
-          <a:xfrm>
-            <a:off x="1097280" y="1563624"/>
-            <a:ext cx="10362895" cy="402336"/>
-          </a:xfrm>
-          <a:prstGeom prst="rect">
-            <a:avLst/>
-          </a:prstGeom>
-          <a:noFill/>
-        </p:spPr>
-        <p:txBody>
-          <a:bodyPr wrap="square" anchor="ctr"/>
-          <a:lstStyle/>
-          <a:p>
-            <a:r>
-              <a:rPr sz="1500" b="1" i="0">
-                <a:solidFill>
-                  <a:srgbClr val="333333"/>
-                </a:solidFill>
-                <a:latin typeface="Calibri"/>
-              </a:rPr>
-              <a:t>EL PROBLEMA EN UNA FRASE</a:t>
-            </a:r>
-            <a:r>
-              <a:rPr sz="1500" b="0" i="0">
-                <a:solidFill>
-                  <a:srgbClr val="333333"/>
-                </a:solidFill>
-                <a:latin typeface="Calibri"/>
-              </a:rPr>
-              <a:t> — Una sola frase con la fórmula: </a:t>
-            </a:r>
-            <a:r>
-              <a:rPr sz="1500" b="1" i="0">
-                <a:solidFill>
-                  <a:srgbClr val="333333"/>
-                </a:solidFill>
-                <a:latin typeface="Calibri"/>
-              </a:rPr>
-              <a:t>a quién le pasa qué, con qué consecuencia</a:t>
-            </a:r>
-            <a:r>
-              <a:rPr sz="1500" b="0" i="0">
-                <a:solidFill>
-                  <a:srgbClr val="333333"/>
-                </a:solidFill>
-                <a:latin typeface="Calibri"/>
-              </a:rPr>
-              <a:t>. Sin mencionar ninguna tecnología ni ninguna solución.</a:t>
-            </a:r>
-          </a:p>
-        </p:txBody>
-      </p:sp>
-      <p:sp>
-        <p:nvSpPr>
-          <p:cNvPr id="10" name="Rounded Rectangle 9"/>
-          <p:cNvSpPr/>
-          <p:nvPr/>
-        </p:nvSpPr>
-        <p:spPr>
-          <a:xfrm>
-            <a:off x="457200" y="2148839"/>
-            <a:ext cx="11277295" cy="566928"/>
-          </a:xfrm>
-          <a:prstGeom prst="roundRect">
-            <a:avLst>
-              <a:gd name="adj" fmla="val 12000"/>
-            </a:avLst>
-          </a:prstGeom>
-          <a:solidFill>
-            <a:srgbClr val="F2F2F2"/>
-          </a:solidFill>
-          <a:ln>
-            <a:noFill/>
-          </a:ln>
-        </p:spPr>
-        <p:style>
-          <a:lnRef idx="1">
-            <a:schemeClr val="accent1"/>
-          </a:lnRef>
-          <a:fillRef idx="3">
-            <a:schemeClr val="accent1"/>
-          </a:fillRef>
-          <a:effectRef idx="2">
-            <a:schemeClr val="accent1"/>
-          </a:effectRef>
-          <a:fontRef idx="minor">
-            <a:schemeClr val="lt1"/>
-          </a:fontRef>
-        </p:style>
-        <p:txBody>
-          <a:bodyPr rtlCol="0" anchor="ctr"/>
-          <a:lstStyle/>
-          <a:p>
-            <a:pPr algn="ctr"/>
-          </a:p>
-        </p:txBody>
-      </p:sp>
-      <p:sp>
-        <p:nvSpPr>
-          <p:cNvPr id="11" name="Rectangle 10"/>
-          <p:cNvSpPr/>
-          <p:nvPr/>
-        </p:nvSpPr>
-        <p:spPr>
-          <a:xfrm>
-            <a:off x="640080" y="2295144"/>
-            <a:ext cx="274320" cy="274320"/>
-          </a:xfrm>
-          <a:prstGeom prst="rect">
-            <a:avLst/>
-          </a:prstGeom>
-          <a:solidFill>
-            <a:srgbClr val="FFFFFF"/>
-          </a:solidFill>
-          <a:ln>
-            <a:solidFill>
-              <a:srgbClr val="333333"/>
-            </a:solidFill>
-          </a:ln>
-        </p:spPr>
-        <p:style>
-          <a:lnRef idx="1">
-            <a:schemeClr val="accent1"/>
-          </a:lnRef>
-          <a:fillRef idx="3">
-            <a:schemeClr val="accent1"/>
-          </a:fillRef>
-          <a:effectRef idx="2">
-            <a:schemeClr val="accent1"/>
-          </a:effectRef>
-          <a:fontRef idx="minor">
-            <a:schemeClr val="lt1"/>
-          </a:fontRef>
-        </p:style>
-        <p:txBody>
-          <a:bodyPr rtlCol="0" anchor="ctr"/>
-          <a:lstStyle/>
-          <a:p>
-            <a:pPr algn="ctr"/>
-          </a:p>
-        </p:txBody>
-      </p:sp>
-      <p:sp>
-        <p:nvSpPr>
-          <p:cNvPr id="12" name="Rectangle 11"/>
-          <p:cNvSpPr/>
-          <p:nvPr/>
-        </p:nvSpPr>
-        <p:spPr>
-          <a:xfrm>
-            <a:off x="640080" y="2295144"/>
-            <a:ext cx="73152" cy="274320"/>
-          </a:xfrm>
-          <a:prstGeom prst="rect">
-            <a:avLst/>
-          </a:prstGeom>
-          <a:solidFill>
-            <a:srgbClr val="269CCB"/>
-          </a:solidFill>
-          <a:ln>
-            <a:noFill/>
-          </a:ln>
-        </p:spPr>
-        <p:style>
-          <a:lnRef idx="1">
-            <a:schemeClr val="accent1"/>
-          </a:lnRef>
-          <a:fillRef idx="3">
-            <a:schemeClr val="accent1"/>
-          </a:fillRef>
-          <a:effectRef idx="2">
-            <a:schemeClr val="accent1"/>
-          </a:effectRef>
-          <a:fontRef idx="minor">
-            <a:schemeClr val="lt1"/>
-          </a:fontRef>
-        </p:style>
-        <p:txBody>
-          <a:bodyPr rtlCol="0" anchor="ctr"/>
-          <a:lstStyle/>
-          <a:p>
-            <a:pPr algn="ctr"/>
-          </a:p>
-        </p:txBody>
-      </p:sp>
-      <p:sp>
-        <p:nvSpPr>
-          <p:cNvPr id="13" name="TextBox 12"/>
-          <p:cNvSpPr txBox="1"/>
-          <p:nvPr/>
-        </p:nvSpPr>
-        <p:spPr>
-          <a:xfrm>
-            <a:off x="1097280" y="2240279"/>
-            <a:ext cx="10362895" cy="402336"/>
-          </a:xfrm>
-          <a:prstGeom prst="rect">
-            <a:avLst/>
-          </a:prstGeom>
-          <a:noFill/>
-        </p:spPr>
-        <p:txBody>
-          <a:bodyPr wrap="square" anchor="ctr"/>
-          <a:lstStyle/>
-          <a:p>
-            <a:r>
-              <a:rPr sz="1500" b="1" i="0">
-                <a:solidFill>
-                  <a:srgbClr val="333333"/>
-                </a:solidFill>
-                <a:latin typeface="Calibri"/>
-              </a:rPr>
-              <a:t>LA LÍNEA BASE</a:t>
-            </a:r>
-            <a:r>
-              <a:rPr sz="1500" b="0" i="0">
-                <a:solidFill>
-                  <a:srgbClr val="333333"/>
-                </a:solidFill>
-                <a:latin typeface="Calibri"/>
-              </a:rPr>
-              <a:t> — Una cifra que describa el problema </a:t>
-            </a:r>
-            <a:r>
-              <a:rPr sz="1500" b="1" i="0">
-                <a:solidFill>
-                  <a:srgbClr val="333333"/>
-                </a:solidFill>
-                <a:latin typeface="Calibri"/>
-              </a:rPr>
-              <a:t>hoy</a:t>
-            </a:r>
-            <a:r>
-              <a:rPr sz="1500" b="0" i="0">
-                <a:solidFill>
-                  <a:srgbClr val="333333"/>
-                </a:solidFill>
-                <a:latin typeface="Calibri"/>
-              </a:rPr>
-              <a:t>, antes de que ustedes toquen nada, más </a:t>
-            </a:r>
-            <a:r>
-              <a:rPr sz="1500" b="1" i="0">
-                <a:solidFill>
-                  <a:srgbClr val="333333"/>
-                </a:solidFill>
-                <a:latin typeface="Calibri"/>
-              </a:rPr>
-              <a:t>cómo la obtuvieron</a:t>
-            </a:r>
-            <a:r>
-              <a:rPr sz="1500" b="0" i="0">
-                <a:solidFill>
-                  <a:srgbClr val="333333"/>
-                </a:solidFill>
-                <a:latin typeface="Calibri"/>
-              </a:rPr>
-              <a:t> y cuándo. Si es estimación, escriban «estimado».</a:t>
-            </a:r>
-          </a:p>
-        </p:txBody>
-      </p:sp>
-      <p:sp>
-        <p:nvSpPr>
-          <p:cNvPr id="14" name="Rounded Rectangle 13"/>
-          <p:cNvSpPr/>
-          <p:nvPr/>
-        </p:nvSpPr>
-        <p:spPr>
-          <a:xfrm>
-            <a:off x="457200" y="2825496"/>
-            <a:ext cx="11277295" cy="566928"/>
-          </a:xfrm>
-          <a:prstGeom prst="roundRect">
-            <a:avLst>
-              <a:gd name="adj" fmla="val 12000"/>
-            </a:avLst>
-          </a:prstGeom>
-          <a:solidFill>
-            <a:srgbClr val="F2F2F2"/>
-          </a:solidFill>
-          <a:ln>
-            <a:noFill/>
-          </a:ln>
-        </p:spPr>
-        <p:style>
-          <a:lnRef idx="1">
-            <a:schemeClr val="accent1"/>
-          </a:lnRef>
-          <a:fillRef idx="3">
-            <a:schemeClr val="accent1"/>
-          </a:fillRef>
-          <a:effectRef idx="2">
-            <a:schemeClr val="accent1"/>
-          </a:effectRef>
-          <a:fontRef idx="minor">
-            <a:schemeClr val="lt1"/>
-          </a:fontRef>
-        </p:style>
-        <p:txBody>
-          <a:bodyPr rtlCol="0" anchor="ctr"/>
-          <a:lstStyle/>
-          <a:p>
-            <a:pPr algn="ctr"/>
-          </a:p>
-        </p:txBody>
-      </p:sp>
-      <p:sp>
-        <p:nvSpPr>
-          <p:cNvPr id="15" name="Rectangle 14"/>
-          <p:cNvSpPr/>
-          <p:nvPr/>
-        </p:nvSpPr>
-        <p:spPr>
-          <a:xfrm>
-            <a:off x="640080" y="2971800"/>
-            <a:ext cx="274320" cy="274320"/>
-          </a:xfrm>
-          <a:prstGeom prst="rect">
-            <a:avLst/>
-          </a:prstGeom>
-          <a:solidFill>
-            <a:srgbClr val="FFFFFF"/>
-          </a:solidFill>
-          <a:ln>
-            <a:solidFill>
-              <a:srgbClr val="333333"/>
-            </a:solidFill>
-          </a:ln>
-        </p:spPr>
-        <p:style>
-          <a:lnRef idx="1">
-            <a:schemeClr val="accent1"/>
-          </a:lnRef>
-          <a:fillRef idx="3">
-            <a:schemeClr val="accent1"/>
-          </a:fillRef>
-          <a:effectRef idx="2">
-            <a:schemeClr val="accent1"/>
-          </a:effectRef>
-          <a:fontRef idx="minor">
-            <a:schemeClr val="lt1"/>
-          </a:fontRef>
-        </p:style>
-        <p:txBody>
-          <a:bodyPr rtlCol="0" anchor="ctr"/>
-          <a:lstStyle/>
-          <a:p>
-            <a:pPr algn="ctr"/>
-          </a:p>
-        </p:txBody>
-      </p:sp>
-      <p:sp>
-        <p:nvSpPr>
-          <p:cNvPr id="16" name="Rectangle 15"/>
-          <p:cNvSpPr/>
-          <p:nvPr/>
-        </p:nvSpPr>
-        <p:spPr>
-          <a:xfrm>
-            <a:off x="640080" y="2971800"/>
-            <a:ext cx="73152" cy="274320"/>
-          </a:xfrm>
-          <a:prstGeom prst="rect">
-            <a:avLst/>
-          </a:prstGeom>
-          <a:solidFill>
-            <a:srgbClr val="269CCB"/>
-          </a:solidFill>
-          <a:ln>
-            <a:noFill/>
-          </a:ln>
-        </p:spPr>
-        <p:style>
-          <a:lnRef idx="1">
-            <a:schemeClr val="accent1"/>
-          </a:lnRef>
-          <a:fillRef idx="3">
-            <a:schemeClr val="accent1"/>
-          </a:fillRef>
-          <a:effectRef idx="2">
-            <a:schemeClr val="accent1"/>
-          </a:effectRef>
-          <a:fontRef idx="minor">
-            <a:schemeClr val="lt1"/>
-          </a:fontRef>
-        </p:style>
-        <p:txBody>
-          <a:bodyPr rtlCol="0" anchor="ctr"/>
-          <a:lstStyle/>
-          <a:p>
-            <a:pPr algn="ctr"/>
-          </a:p>
-        </p:txBody>
-      </p:sp>
-      <p:sp>
-        <p:nvSpPr>
-          <p:cNvPr id="17" name="TextBox 16"/>
-          <p:cNvSpPr txBox="1"/>
-          <p:nvPr/>
-        </p:nvSpPr>
-        <p:spPr>
-          <a:xfrm>
-            <a:off x="1097280" y="2916936"/>
-            <a:ext cx="10362895" cy="402336"/>
-          </a:xfrm>
-          <a:prstGeom prst="rect">
-            <a:avLst/>
-          </a:prstGeom>
-          <a:noFill/>
-        </p:spPr>
-        <p:txBody>
-          <a:bodyPr wrap="square" anchor="ctr"/>
-          <a:lstStyle/>
-          <a:p>
-            <a:r>
-              <a:rPr sz="1500" b="1" i="0">
-                <a:solidFill>
-                  <a:srgbClr val="333333"/>
-                </a:solidFill>
-                <a:latin typeface="Calibri"/>
-              </a:rPr>
-              <a:t>EL ÁRBOL DE CAUSAS</a:t>
-            </a:r>
-            <a:r>
-              <a:rPr sz="1500" b="0" i="0">
-                <a:solidFill>
-                  <a:srgbClr val="333333"/>
-                </a:solidFill>
-                <a:latin typeface="Calibri"/>
-              </a:rPr>
-              <a:t> — En Excalidraw: el problema en el tronco, los efectos arriba, dos o tres causas directas abajo y el segundo nivel de cada una. Marquen con un símbolo las causas que </a:t>
-            </a:r>
-            <a:r>
-              <a:rPr sz="1500" b="1" i="0">
-                <a:solidFill>
-                  <a:srgbClr val="333333"/>
-                </a:solidFill>
-                <a:latin typeface="Calibri"/>
-              </a:rPr>
-              <a:t>no</a:t>
-            </a:r>
-            <a:r>
-              <a:rPr sz="1500" b="0" i="0">
-                <a:solidFill>
-                  <a:srgbClr val="333333"/>
-                </a:solidFill>
-                <a:latin typeface="Calibri"/>
-              </a:rPr>
-              <a:t> pueden cambiar (restricciones).</a:t>
-            </a:r>
-          </a:p>
-        </p:txBody>
-      </p:sp>
-      <p:sp>
-        <p:nvSpPr>
-          <p:cNvPr id="18" name="Rounded Rectangle 17"/>
-          <p:cNvSpPr/>
-          <p:nvPr/>
-        </p:nvSpPr>
-        <p:spPr>
-          <a:xfrm>
-            <a:off x="457200" y="3502152"/>
-            <a:ext cx="11277295" cy="566928"/>
-          </a:xfrm>
-          <a:prstGeom prst="roundRect">
-            <a:avLst>
-              <a:gd name="adj" fmla="val 12000"/>
-            </a:avLst>
-          </a:prstGeom>
-          <a:solidFill>
-            <a:srgbClr val="F2F2F2"/>
-          </a:solidFill>
-          <a:ln>
-            <a:noFill/>
-          </a:ln>
-        </p:spPr>
-        <p:style>
-          <a:lnRef idx="1">
-            <a:schemeClr val="accent1"/>
-          </a:lnRef>
-          <a:fillRef idx="3">
-            <a:schemeClr val="accent1"/>
-          </a:fillRef>
-          <a:effectRef idx="2">
-            <a:schemeClr val="accent1"/>
-          </a:effectRef>
-          <a:fontRef idx="minor">
-            <a:schemeClr val="lt1"/>
-          </a:fontRef>
-        </p:style>
-        <p:txBody>
-          <a:bodyPr rtlCol="0" anchor="ctr"/>
-          <a:lstStyle/>
-          <a:p>
-            <a:pPr algn="ctr"/>
-          </a:p>
-        </p:txBody>
-      </p:sp>
-      <p:sp>
-        <p:nvSpPr>
-          <p:cNvPr id="19" name="Rectangle 18"/>
-          <p:cNvSpPr/>
-          <p:nvPr/>
-        </p:nvSpPr>
-        <p:spPr>
-          <a:xfrm>
-            <a:off x="640080" y="3648456"/>
-            <a:ext cx="274320" cy="274320"/>
-          </a:xfrm>
-          <a:prstGeom prst="rect">
-            <a:avLst/>
-          </a:prstGeom>
-          <a:solidFill>
-            <a:srgbClr val="FFFFFF"/>
-          </a:solidFill>
-          <a:ln>
-            <a:solidFill>
-              <a:srgbClr val="333333"/>
-            </a:solidFill>
-          </a:ln>
-        </p:spPr>
-        <p:style>
-          <a:lnRef idx="1">
-            <a:schemeClr val="accent1"/>
-          </a:lnRef>
-          <a:fillRef idx="3">
-            <a:schemeClr val="accent1"/>
-          </a:fillRef>
-          <a:effectRef idx="2">
-            <a:schemeClr val="accent1"/>
-          </a:effectRef>
-          <a:fontRef idx="minor">
-            <a:schemeClr val="lt1"/>
-          </a:fontRef>
-        </p:style>
-        <p:txBody>
-          <a:bodyPr rtlCol="0" anchor="ctr"/>
-          <a:lstStyle/>
-          <a:p>
-            <a:pPr algn="ctr"/>
-          </a:p>
-        </p:txBody>
-      </p:sp>
-      <p:sp>
-        <p:nvSpPr>
-          <p:cNvPr id="20" name="Rectangle 19"/>
-          <p:cNvSpPr/>
-          <p:nvPr/>
-        </p:nvSpPr>
-        <p:spPr>
-          <a:xfrm>
-            <a:off x="640080" y="3648456"/>
-            <a:ext cx="73152" cy="274320"/>
-          </a:xfrm>
-          <a:prstGeom prst="rect">
-            <a:avLst/>
-          </a:prstGeom>
-          <a:solidFill>
-            <a:srgbClr val="269CCB"/>
-          </a:solidFill>
-          <a:ln>
-            <a:noFill/>
-          </a:ln>
-        </p:spPr>
-        <p:style>
-          <a:lnRef idx="1">
-            <a:schemeClr val="accent1"/>
-          </a:lnRef>
-          <a:fillRef idx="3">
-            <a:schemeClr val="accent1"/>
-          </a:fillRef>
-          <a:effectRef idx="2">
-            <a:schemeClr val="accent1"/>
-          </a:effectRef>
-          <a:fontRef idx="minor">
-            <a:schemeClr val="lt1"/>
-          </a:fontRef>
-        </p:style>
-        <p:txBody>
-          <a:bodyPr rtlCol="0" anchor="ctr"/>
-          <a:lstStyle/>
-          <a:p>
-            <a:pPr algn="ctr"/>
-          </a:p>
-        </p:txBody>
-      </p:sp>
-      <p:sp>
-        <p:nvSpPr>
-          <p:cNvPr id="21" name="TextBox 20"/>
-          <p:cNvSpPr txBox="1"/>
-          <p:nvPr/>
-        </p:nvSpPr>
-        <p:spPr>
-          <a:xfrm>
-            <a:off x="1097280" y="3593592"/>
-            <a:ext cx="10362895" cy="402336"/>
-          </a:xfrm>
-          <a:prstGeom prst="rect">
-            <a:avLst/>
-          </a:prstGeom>
-          <a:noFill/>
-        </p:spPr>
-        <p:txBody>
-          <a:bodyPr wrap="square" anchor="ctr"/>
-          <a:lstStyle/>
-          <a:p>
-            <a:r>
-              <a:rPr sz="1500" b="1" i="0">
-                <a:solidFill>
-                  <a:srgbClr val="333333"/>
-                </a:solidFill>
-                <a:latin typeface="Calibri"/>
-              </a:rPr>
-              <a:t>ACTORES Y FRONTERA</a:t>
-            </a:r>
-            <a:r>
-              <a:rPr sz="1500" b="0" i="0">
-                <a:solidFill>
-                  <a:srgbClr val="333333"/>
-                </a:solidFill>
-                <a:latin typeface="Calibri"/>
-              </a:rPr>
-              <a:t> — Quién vive el problema (el dueño del problema), quién más se afecta sin ser usuario, y qué queda </a:t>
-            </a:r>
-            <a:r>
-              <a:rPr sz="1500" b="1" i="0">
-                <a:solidFill>
-                  <a:srgbClr val="333333"/>
-                </a:solidFill>
-                <a:latin typeface="Calibri"/>
-              </a:rPr>
-              <a:t>fuera</a:t>
-            </a:r>
-            <a:r>
-              <a:rPr sz="1500" b="0" i="0">
-                <a:solidFill>
-                  <a:srgbClr val="333333"/>
-                </a:solidFill>
-                <a:latin typeface="Calibri"/>
-              </a:rPr>
-              <a:t> de lo que ustedes van a abordar. Digan además </a:t>
-            </a:r>
-            <a:r>
-              <a:rPr sz="1500" b="1" i="0">
-                <a:solidFill>
-                  <a:srgbClr val="333333"/>
-                </a:solidFill>
-                <a:latin typeface="Calibri"/>
-              </a:rPr>
-              <a:t>a quién le pueden preguntar algo esta semana</a:t>
-            </a:r>
-            <a:r>
-              <a:rPr sz="1500" b="0" i="0">
-                <a:solidFill>
-                  <a:srgbClr val="333333"/>
-                </a:solidFill>
-                <a:latin typeface="Calibri"/>
-              </a:rPr>
-              <a:t>.</a:t>
-            </a:r>
-          </a:p>
-        </p:txBody>
-      </p:sp>
-      <p:sp>
-        <p:nvSpPr>
-          <p:cNvPr id="22" name="Rounded Rectangle 21"/>
-          <p:cNvSpPr/>
-          <p:nvPr/>
-        </p:nvSpPr>
-        <p:spPr>
-          <a:xfrm>
-            <a:off x="457200" y="4178808"/>
-            <a:ext cx="11277295" cy="566928"/>
-          </a:xfrm>
-          <a:prstGeom prst="roundRect">
-            <a:avLst>
-              <a:gd name="adj" fmla="val 12000"/>
-            </a:avLst>
-          </a:prstGeom>
-          <a:solidFill>
-            <a:srgbClr val="F2F2F2"/>
-          </a:solidFill>
-          <a:ln>
-            <a:noFill/>
-          </a:ln>
-        </p:spPr>
-        <p:style>
-          <a:lnRef idx="1">
-            <a:schemeClr val="accent1"/>
-          </a:lnRef>
-          <a:fillRef idx="3">
-            <a:schemeClr val="accent1"/>
-          </a:fillRef>
-          <a:effectRef idx="2">
-            <a:schemeClr val="accent1"/>
-          </a:effectRef>
-          <a:fontRef idx="minor">
-            <a:schemeClr val="lt1"/>
-          </a:fontRef>
-        </p:style>
-        <p:txBody>
-          <a:bodyPr rtlCol="0" anchor="ctr"/>
-          <a:lstStyle/>
-          <a:p>
-            <a:pPr algn="ctr"/>
-          </a:p>
-        </p:txBody>
-      </p:sp>
-      <p:sp>
-        <p:nvSpPr>
-          <p:cNvPr id="23" name="Rectangle 22"/>
-          <p:cNvSpPr/>
-          <p:nvPr/>
-        </p:nvSpPr>
-        <p:spPr>
-          <a:xfrm>
-            <a:off x="640080" y="4325112"/>
-            <a:ext cx="274320" cy="274320"/>
-          </a:xfrm>
-          <a:prstGeom prst="rect">
-            <a:avLst/>
-          </a:prstGeom>
-          <a:solidFill>
-            <a:srgbClr val="FFFFFF"/>
-          </a:solidFill>
-          <a:ln>
-            <a:solidFill>
-              <a:srgbClr val="333333"/>
-            </a:solidFill>
-          </a:ln>
-        </p:spPr>
-        <p:style>
-          <a:lnRef idx="1">
-            <a:schemeClr val="accent1"/>
-          </a:lnRef>
-          <a:fillRef idx="3">
-            <a:schemeClr val="accent1"/>
-          </a:fillRef>
-          <a:effectRef idx="2">
-            <a:schemeClr val="accent1"/>
-          </a:effectRef>
-          <a:fontRef idx="minor">
-            <a:schemeClr val="lt1"/>
-          </a:fontRef>
-        </p:style>
-        <p:txBody>
-          <a:bodyPr rtlCol="0" anchor="ctr"/>
-          <a:lstStyle/>
-          <a:p>
-            <a:pPr algn="ctr"/>
-          </a:p>
-        </p:txBody>
-      </p:sp>
-      <p:sp>
-        <p:nvSpPr>
-          <p:cNvPr id="24" name="Rectangle 23"/>
-          <p:cNvSpPr/>
-          <p:nvPr/>
-        </p:nvSpPr>
-        <p:spPr>
-          <a:xfrm>
-            <a:off x="640080" y="4325112"/>
-            <a:ext cx="73152" cy="274320"/>
-          </a:xfrm>
-          <a:prstGeom prst="rect">
-            <a:avLst/>
-          </a:prstGeom>
-          <a:solidFill>
-            <a:srgbClr val="269CCB"/>
-          </a:solidFill>
-          <a:ln>
-            <a:noFill/>
-          </a:ln>
-        </p:spPr>
-        <p:style>
-          <a:lnRef idx="1">
-            <a:schemeClr val="accent1"/>
-          </a:lnRef>
-          <a:fillRef idx="3">
-            <a:schemeClr val="accent1"/>
-          </a:fillRef>
-          <a:effectRef idx="2">
-            <a:schemeClr val="accent1"/>
-          </a:effectRef>
-          <a:fontRef idx="minor">
-            <a:schemeClr val="lt1"/>
-          </a:fontRef>
-        </p:style>
-        <p:txBody>
-          <a:bodyPr rtlCol="0" anchor="ctr"/>
-          <a:lstStyle/>
-          <a:p>
-            <a:pPr algn="ctr"/>
-          </a:p>
-        </p:txBody>
-      </p:sp>
-      <p:sp>
-        <p:nvSpPr>
-          <p:cNvPr id="25" name="TextBox 24"/>
-          <p:cNvSpPr txBox="1"/>
-          <p:nvPr/>
-        </p:nvSpPr>
-        <p:spPr>
-          <a:xfrm>
-            <a:off x="1097280" y="4270248"/>
-            <a:ext cx="10362895" cy="402336"/>
-          </a:xfrm>
-          <a:prstGeom prst="rect">
-            <a:avLst/>
-          </a:prstGeom>
-          <a:noFill/>
-        </p:spPr>
-        <p:txBody>
-          <a:bodyPr wrap="square" anchor="ctr"/>
-          <a:lstStyle/>
-          <a:p>
-            <a:r>
-              <a:rPr sz="1500" b="1" i="0">
-                <a:solidFill>
-                  <a:srgbClr val="333333"/>
-                </a:solidFill>
-                <a:latin typeface="Calibri"/>
-              </a:rPr>
-              <a:t>EL CRITERIO DE ÉXITO</a:t>
-            </a:r>
-            <a:r>
-              <a:rPr sz="1500" b="0" i="0">
-                <a:solidFill>
-                  <a:srgbClr val="333333"/>
-                </a:solidFill>
-                <a:latin typeface="Calibri"/>
-              </a:rPr>
-              <a:t> — Una frase de la forma: «el proyecto sirvió si &lt;la cifra de la línea base&gt; pasa de X a Y, medido así». Y la causa del árbol que van a atacar.</a:t>
-            </a:r>
-          </a:p>
-        </p:txBody>
-      </p:sp>
-      <p:sp>
-        <p:nvSpPr>
-          <p:cNvPr id="26" name="TextBox 25"/>
-          <p:cNvSpPr txBox="1"/>
-          <p:nvPr/>
-        </p:nvSpPr>
-        <p:spPr>
-          <a:xfrm>
-            <a:off x="11185855" y="6473952"/>
-            <a:ext cx="640080" cy="274320"/>
-          </a:xfrm>
-          <a:prstGeom prst="rect">
-            <a:avLst/>
-          </a:prstGeom>
-          <a:noFill/>
-        </p:spPr>
-        <p:txBody>
-          <a:bodyPr wrap="square">
-            <a:spAutoFit/>
-          </a:bodyPr>
-          <a:lstStyle/>
-          <a:p>
-            <a:pPr algn="r"/>
-            <a:r>
-              <a:rPr sz="1100" b="0" i="0">
-                <a:solidFill>
-                  <a:srgbClr val="666666"/>
-                </a:solidFill>
-                <a:latin typeface="Calibri"/>
-              </a:rPr>
-              <a:t>14</a:t>
-            </a:r>
-          </a:p>
-        </p:txBody>
-      </p:sp>
-    </p:spTree>
-  </p:cSld>
-  <p:clrMapOvr>
-    <a:masterClrMapping/>
-  </p:clrMapOvr>
-</p:sld>
-</file>
-
-<file path=ppt/slides/slide15.xml><?xml version="1.0" encoding="utf-8"?>
-<p:sld xmlns:a="http://schemas.openxmlformats.org/drawingml/2006/main" xmlns:p="http://schemas.openxmlformats.org/presentationml/2006/main" xmlns:r="http://schemas.openxmlformats.org/officeDocument/2006/relationships">
-  <p:cSld>
-    <p:bg>
-      <p:bgPr>
-        <a:solidFill>
-          <a:srgbClr val="FFFFFF"/>
-        </a:solidFill>
-        <a:effectLst/>
-      </p:bgPr>
-    </p:bg>
-    <p:spTree>
-      <p:nvGrpSpPr>
-        <p:cNvPr id="1" name=""/>
-        <p:cNvGrpSpPr/>
-        <p:nvPr/>
-      </p:nvGrpSpPr>
-      <p:grpSpPr/>
-      <p:sp>
-        <p:nvSpPr>
-          <p:cNvPr id="2" name="Rectangle 1"/>
-          <p:cNvSpPr/>
-          <p:nvPr/>
-        </p:nvSpPr>
-        <p:spPr>
-          <a:xfrm>
-            <a:off x="0" y="0"/>
-            <a:ext cx="12191695" cy="1170432"/>
-          </a:xfrm>
-          <a:prstGeom prst="rect">
-            <a:avLst/>
-          </a:prstGeom>
-          <a:solidFill>
-            <a:srgbClr val="095292"/>
-          </a:solidFill>
-          <a:ln>
-            <a:noFill/>
-          </a:ln>
-        </p:spPr>
-        <p:style>
-          <a:lnRef idx="1">
-            <a:schemeClr val="accent1"/>
-          </a:lnRef>
-          <a:fillRef idx="3">
-            <a:schemeClr val="accent1"/>
-          </a:fillRef>
-          <a:effectRef idx="2">
-            <a:schemeClr val="accent1"/>
-          </a:effectRef>
-          <a:fontRef idx="minor">
-            <a:schemeClr val="lt1"/>
-          </a:fontRef>
-        </p:style>
-        <p:txBody>
-          <a:bodyPr rtlCol="0" anchor="ctr"/>
-          <a:lstStyle/>
-          <a:p>
-            <a:pPr algn="ctr"/>
-          </a:p>
-        </p:txBody>
-      </p:sp>
-      <p:sp>
-        <p:nvSpPr>
-          <p:cNvPr id="3" name="Rectangle 2"/>
-          <p:cNvSpPr/>
-          <p:nvPr/>
-        </p:nvSpPr>
-        <p:spPr>
-          <a:xfrm>
-            <a:off x="0" y="1170432"/>
-            <a:ext cx="12191695" cy="41148"/>
-          </a:xfrm>
-          <a:prstGeom prst="rect">
-            <a:avLst/>
-          </a:prstGeom>
-          <a:solidFill>
-            <a:srgbClr val="FFD000"/>
-          </a:solidFill>
-          <a:ln>
-            <a:noFill/>
-          </a:ln>
-        </p:spPr>
-        <p:style>
-          <a:lnRef idx="1">
-            <a:schemeClr val="accent1"/>
-          </a:lnRef>
-          <a:fillRef idx="3">
-            <a:schemeClr val="accent1"/>
-          </a:fillRef>
-          <a:effectRef idx="2">
-            <a:schemeClr val="accent1"/>
-          </a:effectRef>
-          <a:fontRef idx="minor">
-            <a:schemeClr val="lt1"/>
-          </a:fontRef>
-        </p:style>
-        <p:txBody>
-          <a:bodyPr rtlCol="0" anchor="ctr"/>
-          <a:lstStyle/>
-          <a:p>
-            <a:pPr algn="ctr"/>
-          </a:p>
-        </p:txBody>
-      </p:sp>
-      <p:sp>
-        <p:nvSpPr>
-          <p:cNvPr id="4" name="TextBox 3"/>
-          <p:cNvSpPr txBox="1"/>
-          <p:nvPr/>
-        </p:nvSpPr>
-        <p:spPr>
-          <a:xfrm>
-            <a:off x="457200" y="164592"/>
-            <a:ext cx="11277295" cy="384048"/>
-          </a:xfrm>
-          <a:prstGeom prst="rect">
-            <a:avLst/>
-          </a:prstGeom>
-          <a:noFill/>
-        </p:spPr>
-        <p:txBody>
-          <a:bodyPr wrap="square">
-            <a:spAutoFit/>
-          </a:bodyPr>
-          <a:lstStyle/>
-          <a:p>
-            <a:r>
-              <a:rPr sz="2600" b="1" i="0">
-                <a:solidFill>
-                  <a:srgbClr val="FFFFFF"/>
-                </a:solidFill>
-                <a:latin typeface="Calibri"/>
-              </a:rPr>
-              <a:t>Cómo se expone en 3 minutos</a:t>
-            </a:r>
-          </a:p>
-        </p:txBody>
-      </p:sp>
-      <p:sp>
-        <p:nvSpPr>
-          <p:cNvPr id="5" name="TextBox 4"/>
-          <p:cNvSpPr txBox="1"/>
-          <p:nvPr/>
-        </p:nvSpPr>
-        <p:spPr>
-          <a:xfrm>
-            <a:off x="457200" y="566928"/>
-            <a:ext cx="11277295" cy="411480"/>
-          </a:xfrm>
-          <a:prstGeom prst="rect">
-            <a:avLst/>
-          </a:prstGeom>
-          <a:noFill/>
-        </p:spPr>
-        <p:txBody>
-          <a:bodyPr wrap="square">
-            <a:spAutoFit/>
-          </a:bodyPr>
-          <a:lstStyle/>
-          <a:p>
-            <a:r>
-              <a:rPr sz="1400" b="0" i="0">
-                <a:solidFill>
-                  <a:srgbClr val="B8D8EE"/>
-                </a:solidFill>
-                <a:latin typeface="Calibri"/>
-              </a:rPr>
-              <a:t>Habla el vocero con la pantalla ya compartida · cronómetro en pantalla · se corta al llegar a cero</a:t>
-            </a:r>
-          </a:p>
-        </p:txBody>
-      </p:sp>
-      <p:sp>
-        <p:nvSpPr>
-          <p:cNvPr id="6" name="Rounded Rectangle 5"/>
-          <p:cNvSpPr/>
-          <p:nvPr/>
-        </p:nvSpPr>
-        <p:spPr>
-          <a:xfrm>
-            <a:off x="457200" y="1444752"/>
-            <a:ext cx="11277295" cy="908913"/>
-          </a:xfrm>
-          <a:prstGeom prst="roundRect">
-            <a:avLst>
-              <a:gd name="adj" fmla="val 12000"/>
-            </a:avLst>
-          </a:prstGeom>
-          <a:solidFill>
-            <a:srgbClr val="F2F2F2"/>
-          </a:solidFill>
-          <a:ln>
-            <a:noFill/>
-          </a:ln>
-        </p:spPr>
-        <p:style>
-          <a:lnRef idx="1">
-            <a:schemeClr val="accent1"/>
-          </a:lnRef>
-          <a:fillRef idx="3">
-            <a:schemeClr val="accent1"/>
-          </a:fillRef>
-          <a:effectRef idx="2">
-            <a:schemeClr val="accent1"/>
-          </a:effectRef>
-          <a:fontRef idx="minor">
-            <a:schemeClr val="lt1"/>
-          </a:fontRef>
-        </p:style>
-        <p:txBody>
-          <a:bodyPr rtlCol="0" anchor="ctr"/>
-          <a:lstStyle/>
-          <a:p>
-            <a:pPr algn="ctr"/>
-          </a:p>
-        </p:txBody>
-      </p:sp>
-      <p:sp>
-        <p:nvSpPr>
-          <p:cNvPr id="7" name="Rounded Rectangle 6"/>
-          <p:cNvSpPr/>
-          <p:nvPr/>
-        </p:nvSpPr>
-        <p:spPr>
-          <a:xfrm>
-            <a:off x="594360" y="1679752"/>
-            <a:ext cx="438912" cy="438912"/>
-          </a:xfrm>
-          <a:prstGeom prst="roundRect">
-            <a:avLst>
-              <a:gd name="adj" fmla="val 12000"/>
-            </a:avLst>
-          </a:prstGeom>
-          <a:solidFill>
-            <a:srgbClr val="095292"/>
-          </a:solidFill>
-          <a:ln>
-            <a:noFill/>
-          </a:ln>
-        </p:spPr>
-        <p:style>
-          <a:lnRef idx="1">
-            <a:schemeClr val="accent1"/>
-          </a:lnRef>
-          <a:fillRef idx="3">
-            <a:schemeClr val="accent1"/>
-          </a:fillRef>
-          <a:effectRef idx="2">
-            <a:schemeClr val="accent1"/>
-          </a:effectRef>
-          <a:fontRef idx="minor">
-            <a:schemeClr val="lt1"/>
-          </a:fontRef>
-        </p:style>
-        <p:txBody>
-          <a:bodyPr rtlCol="0" anchor="ctr"/>
-          <a:lstStyle/>
-          <a:p>
-            <a:pPr algn="ctr"/>
-          </a:p>
-        </p:txBody>
-      </p:sp>
-      <p:sp>
-        <p:nvSpPr>
-          <p:cNvPr id="8" name="TextBox 7"/>
-          <p:cNvSpPr txBox="1"/>
-          <p:nvPr/>
-        </p:nvSpPr>
-        <p:spPr>
-          <a:xfrm>
-            <a:off x="594360" y="1679752"/>
-            <a:ext cx="438912" cy="438912"/>
-          </a:xfrm>
-          <a:prstGeom prst="rect">
-            <a:avLst/>
-          </a:prstGeom>
-          <a:noFill/>
-        </p:spPr>
-        <p:txBody>
-          <a:bodyPr wrap="square" anchor="ctr"/>
-          <a:lstStyle/>
-          <a:p>
-            <a:pPr algn="ctr"/>
-            <a:r>
-              <a:rPr sz="1600" b="1" i="0">
-                <a:solidFill>
-                  <a:srgbClr val="FFFFFF"/>
-                </a:solidFill>
-                <a:latin typeface="Calibri"/>
-              </a:rPr>
-              <a:t>1</a:t>
-            </a:r>
-          </a:p>
-        </p:txBody>
-      </p:sp>
-      <p:sp>
-        <p:nvSpPr>
-          <p:cNvPr id="9" name="TextBox 8"/>
-          <p:cNvSpPr txBox="1"/>
-          <p:nvPr/>
-        </p:nvSpPr>
-        <p:spPr>
-          <a:xfrm>
-            <a:off x="1188720" y="1536192"/>
-            <a:ext cx="10271455" cy="744321"/>
-          </a:xfrm>
-          <a:prstGeom prst="rect">
-            <a:avLst/>
-          </a:prstGeom>
-          <a:noFill/>
-        </p:spPr>
-        <p:txBody>
-          <a:bodyPr wrap="square" anchor="ctr"/>
-          <a:lstStyle/>
-          <a:p>
-            <a:r>
-              <a:rPr sz="1500" b="1" i="0">
-                <a:solidFill>
-                  <a:srgbClr val="095292"/>
-                </a:solidFill>
-                <a:latin typeface="Calibri"/>
-              </a:rPr>
-              <a:t>40 s · El problema en una frase</a:t>
-            </a:r>
-          </a:p>
-          <a:p>
-            <a:pPr>
-              <a:spcBef>
-                <a:spcPts val="200"/>
-              </a:spcBef>
-            </a:pPr>
-            <a:r>
-              <a:rPr sz="1300" b="0" i="0">
-                <a:solidFill>
-                  <a:srgbClr val="333333"/>
-                </a:solidFill>
-                <a:latin typeface="Calibri"/>
-              </a:rPr>
-              <a:t>Léanla tal cual está escrita. Sin tecnología dentro.</a:t>
-            </a:r>
-          </a:p>
-        </p:txBody>
-      </p:sp>
-      <p:sp>
-        <p:nvSpPr>
-          <p:cNvPr id="10" name="Rounded Rectangle 9"/>
-          <p:cNvSpPr/>
-          <p:nvPr/>
-        </p:nvSpPr>
-        <p:spPr>
-          <a:xfrm>
-            <a:off x="457200" y="2445105"/>
-            <a:ext cx="11277295" cy="908913"/>
-          </a:xfrm>
-          <a:prstGeom prst="roundRect">
-            <a:avLst>
-              <a:gd name="adj" fmla="val 12000"/>
-            </a:avLst>
-          </a:prstGeom>
-          <a:solidFill>
-            <a:srgbClr val="E8F4FA"/>
-          </a:solidFill>
-          <a:ln>
-            <a:noFill/>
-          </a:ln>
-        </p:spPr>
-        <p:style>
-          <a:lnRef idx="1">
-            <a:schemeClr val="accent1"/>
-          </a:lnRef>
-          <a:fillRef idx="3">
-            <a:schemeClr val="accent1"/>
-          </a:fillRef>
-          <a:effectRef idx="2">
-            <a:schemeClr val="accent1"/>
-          </a:effectRef>
-          <a:fontRef idx="minor">
-            <a:schemeClr val="lt1"/>
-          </a:fontRef>
-        </p:style>
-        <p:txBody>
-          <a:bodyPr rtlCol="0" anchor="ctr"/>
-          <a:lstStyle/>
-          <a:p>
-            <a:pPr algn="ctr"/>
-          </a:p>
-        </p:txBody>
-      </p:sp>
-      <p:sp>
-        <p:nvSpPr>
-          <p:cNvPr id="11" name="Rounded Rectangle 10"/>
-          <p:cNvSpPr/>
-          <p:nvPr/>
-        </p:nvSpPr>
-        <p:spPr>
-          <a:xfrm>
-            <a:off x="594360" y="2680106"/>
-            <a:ext cx="438912" cy="438912"/>
-          </a:xfrm>
-          <a:prstGeom prst="roundRect">
-            <a:avLst>
-              <a:gd name="adj" fmla="val 12000"/>
-            </a:avLst>
-          </a:prstGeom>
-          <a:solidFill>
-            <a:srgbClr val="095292"/>
-          </a:solidFill>
-          <a:ln>
-            <a:noFill/>
-          </a:ln>
-        </p:spPr>
-        <p:style>
-          <a:lnRef idx="1">
-            <a:schemeClr val="accent1"/>
-          </a:lnRef>
-          <a:fillRef idx="3">
-            <a:schemeClr val="accent1"/>
-          </a:fillRef>
-          <a:effectRef idx="2">
-            <a:schemeClr val="accent1"/>
-          </a:effectRef>
-          <a:fontRef idx="minor">
-            <a:schemeClr val="lt1"/>
-          </a:fontRef>
-        </p:style>
-        <p:txBody>
-          <a:bodyPr rtlCol="0" anchor="ctr"/>
-          <a:lstStyle/>
-          <a:p>
-            <a:pPr algn="ctr"/>
-          </a:p>
-        </p:txBody>
-      </p:sp>
-      <p:sp>
-        <p:nvSpPr>
-          <p:cNvPr id="12" name="TextBox 11"/>
-          <p:cNvSpPr txBox="1"/>
-          <p:nvPr/>
-        </p:nvSpPr>
-        <p:spPr>
-          <a:xfrm>
-            <a:off x="594360" y="2680106"/>
-            <a:ext cx="438912" cy="438912"/>
-          </a:xfrm>
-          <a:prstGeom prst="rect">
-            <a:avLst/>
-          </a:prstGeom>
-          <a:noFill/>
-        </p:spPr>
-        <p:txBody>
-          <a:bodyPr wrap="square" anchor="ctr"/>
-          <a:lstStyle/>
-          <a:p>
-            <a:pPr algn="ctr"/>
-            <a:r>
-              <a:rPr sz="1600" b="1" i="0">
-                <a:solidFill>
-                  <a:srgbClr val="FFFFFF"/>
-                </a:solidFill>
-                <a:latin typeface="Calibri"/>
-              </a:rPr>
-              <a:t>2</a:t>
-            </a:r>
-          </a:p>
-        </p:txBody>
-      </p:sp>
-      <p:sp>
-        <p:nvSpPr>
-          <p:cNvPr id="13" name="TextBox 12"/>
-          <p:cNvSpPr txBox="1"/>
-          <p:nvPr/>
-        </p:nvSpPr>
-        <p:spPr>
-          <a:xfrm>
-            <a:off x="1188720" y="2536545"/>
-            <a:ext cx="10271455" cy="744321"/>
-          </a:xfrm>
-          <a:prstGeom prst="rect">
-            <a:avLst/>
-          </a:prstGeom>
-          <a:noFill/>
-        </p:spPr>
-        <p:txBody>
-          <a:bodyPr wrap="square" anchor="ctr"/>
-          <a:lstStyle/>
-          <a:p>
-            <a:r>
-              <a:rPr sz="1500" b="1" i="0">
-                <a:solidFill>
-                  <a:srgbClr val="095292"/>
-                </a:solidFill>
-                <a:latin typeface="Calibri"/>
-              </a:rPr>
-              <a:t>30 s · La cifra</a:t>
-            </a:r>
-          </a:p>
-          <a:p>
-            <a:pPr>
-              <a:spcBef>
-                <a:spcPts val="200"/>
-              </a:spcBef>
-            </a:pPr>
-            <a:r>
-              <a:rPr sz="1300" b="0" i="0">
-                <a:solidFill>
-                  <a:srgbClr val="333333"/>
-                </a:solidFill>
-                <a:latin typeface="Calibri"/>
-              </a:rPr>
-              <a:t>La línea base y cómo la obtuvieron. Es el minuto obligatorio.</a:t>
-            </a:r>
-          </a:p>
-        </p:txBody>
-      </p:sp>
-      <p:sp>
-        <p:nvSpPr>
-          <p:cNvPr id="14" name="Rounded Rectangle 13"/>
-          <p:cNvSpPr/>
-          <p:nvPr/>
-        </p:nvSpPr>
-        <p:spPr>
-          <a:xfrm>
-            <a:off x="457200" y="3445459"/>
-            <a:ext cx="11277295" cy="908913"/>
-          </a:xfrm>
-          <a:prstGeom prst="roundRect">
-            <a:avLst>
-              <a:gd name="adj" fmla="val 12000"/>
-            </a:avLst>
-          </a:prstGeom>
-          <a:solidFill>
-            <a:srgbClr val="F2F2F2"/>
-          </a:solidFill>
-          <a:ln>
-            <a:noFill/>
-          </a:ln>
-        </p:spPr>
-        <p:style>
-          <a:lnRef idx="1">
-            <a:schemeClr val="accent1"/>
-          </a:lnRef>
-          <a:fillRef idx="3">
-            <a:schemeClr val="accent1"/>
-          </a:fillRef>
-          <a:effectRef idx="2">
-            <a:schemeClr val="accent1"/>
-          </a:effectRef>
-          <a:fontRef idx="minor">
-            <a:schemeClr val="lt1"/>
-          </a:fontRef>
-        </p:style>
-        <p:txBody>
-          <a:bodyPr rtlCol="0" anchor="ctr"/>
-          <a:lstStyle/>
-          <a:p>
-            <a:pPr algn="ctr"/>
-          </a:p>
-        </p:txBody>
-      </p:sp>
-      <p:sp>
-        <p:nvSpPr>
-          <p:cNvPr id="15" name="Rounded Rectangle 14"/>
-          <p:cNvSpPr/>
-          <p:nvPr/>
-        </p:nvSpPr>
-        <p:spPr>
-          <a:xfrm>
-            <a:off x="594360" y="3680460"/>
-            <a:ext cx="438912" cy="438912"/>
-          </a:xfrm>
-          <a:prstGeom prst="roundRect">
-            <a:avLst>
-              <a:gd name="adj" fmla="val 12000"/>
-            </a:avLst>
-          </a:prstGeom>
-          <a:solidFill>
-            <a:srgbClr val="095292"/>
-          </a:solidFill>
-          <a:ln>
-            <a:noFill/>
-          </a:ln>
-        </p:spPr>
-        <p:style>
-          <a:lnRef idx="1">
-            <a:schemeClr val="accent1"/>
-          </a:lnRef>
-          <a:fillRef idx="3">
-            <a:schemeClr val="accent1"/>
-          </a:fillRef>
-          <a:effectRef idx="2">
-            <a:schemeClr val="accent1"/>
-          </a:effectRef>
-          <a:fontRef idx="minor">
-            <a:schemeClr val="lt1"/>
-          </a:fontRef>
-        </p:style>
-        <p:txBody>
-          <a:bodyPr rtlCol="0" anchor="ctr"/>
-          <a:lstStyle/>
-          <a:p>
-            <a:pPr algn="ctr"/>
-          </a:p>
-        </p:txBody>
-      </p:sp>
-      <p:sp>
-        <p:nvSpPr>
-          <p:cNvPr id="16" name="TextBox 15"/>
-          <p:cNvSpPr txBox="1"/>
-          <p:nvPr/>
-        </p:nvSpPr>
-        <p:spPr>
-          <a:xfrm>
-            <a:off x="594360" y="3680460"/>
-            <a:ext cx="438912" cy="438912"/>
-          </a:xfrm>
-          <a:prstGeom prst="rect">
-            <a:avLst/>
-          </a:prstGeom>
-          <a:noFill/>
-        </p:spPr>
-        <p:txBody>
-          <a:bodyPr wrap="square" anchor="ctr"/>
-          <a:lstStyle/>
-          <a:p>
-            <a:pPr algn="ctr"/>
-            <a:r>
-              <a:rPr sz="1600" b="1" i="0">
-                <a:solidFill>
-                  <a:srgbClr val="FFFFFF"/>
-                </a:solidFill>
-                <a:latin typeface="Calibri"/>
-              </a:rPr>
-              <a:t>3</a:t>
-            </a:r>
-          </a:p>
-        </p:txBody>
-      </p:sp>
-      <p:sp>
-        <p:nvSpPr>
-          <p:cNvPr id="17" name="TextBox 16"/>
-          <p:cNvSpPr txBox="1"/>
-          <p:nvPr/>
-        </p:nvSpPr>
-        <p:spPr>
-          <a:xfrm>
-            <a:off x="1188720" y="3536899"/>
-            <a:ext cx="10271455" cy="744321"/>
-          </a:xfrm>
-          <a:prstGeom prst="rect">
-            <a:avLst/>
-          </a:prstGeom>
-          <a:noFill/>
-        </p:spPr>
-        <p:txBody>
-          <a:bodyPr wrap="square" anchor="ctr"/>
-          <a:lstStyle/>
-          <a:p>
-            <a:r>
-              <a:rPr sz="1500" b="1" i="0">
-                <a:solidFill>
-                  <a:srgbClr val="095292"/>
-                </a:solidFill>
-                <a:latin typeface="Calibri"/>
-              </a:rPr>
-              <a:t>50 s · El árbol</a:t>
-            </a:r>
-          </a:p>
-          <a:p>
-            <a:pPr>
-              <a:spcBef>
-                <a:spcPts val="200"/>
-              </a:spcBef>
-            </a:pPr>
-            <a:r>
-              <a:rPr sz="1300" b="0" i="0">
-                <a:solidFill>
-                  <a:srgbClr val="333333"/>
-                </a:solidFill>
-                <a:latin typeface="Calibri"/>
-              </a:rPr>
-              <a:t>Muestren el dibujo y señalen la causa que van a atacar.</a:t>
-            </a:r>
-          </a:p>
-        </p:txBody>
-      </p:sp>
-      <p:sp>
-        <p:nvSpPr>
-          <p:cNvPr id="18" name="Rounded Rectangle 17"/>
-          <p:cNvSpPr/>
-          <p:nvPr/>
-        </p:nvSpPr>
-        <p:spPr>
-          <a:xfrm>
-            <a:off x="457200" y="4445812"/>
-            <a:ext cx="11277295" cy="908913"/>
-          </a:xfrm>
-          <a:prstGeom prst="roundRect">
-            <a:avLst>
-              <a:gd name="adj" fmla="val 12000"/>
-            </a:avLst>
-          </a:prstGeom>
-          <a:solidFill>
-            <a:srgbClr val="E8F4FA"/>
-          </a:solidFill>
-          <a:ln>
-            <a:noFill/>
-          </a:ln>
-        </p:spPr>
-        <p:style>
-          <a:lnRef idx="1">
-            <a:schemeClr val="accent1"/>
-          </a:lnRef>
-          <a:fillRef idx="3">
-            <a:schemeClr val="accent1"/>
-          </a:fillRef>
-          <a:effectRef idx="2">
-            <a:schemeClr val="accent1"/>
-          </a:effectRef>
-          <a:fontRef idx="minor">
-            <a:schemeClr val="lt1"/>
-          </a:fontRef>
-        </p:style>
-        <p:txBody>
-          <a:bodyPr rtlCol="0" anchor="ctr"/>
-          <a:lstStyle/>
-          <a:p>
-            <a:pPr algn="ctr"/>
-          </a:p>
-        </p:txBody>
-      </p:sp>
-      <p:sp>
-        <p:nvSpPr>
-          <p:cNvPr id="19" name="Rounded Rectangle 18"/>
-          <p:cNvSpPr/>
-          <p:nvPr/>
-        </p:nvSpPr>
-        <p:spPr>
-          <a:xfrm>
-            <a:off x="594360" y="4680813"/>
-            <a:ext cx="438912" cy="438912"/>
-          </a:xfrm>
-          <a:prstGeom prst="roundRect">
-            <a:avLst>
-              <a:gd name="adj" fmla="val 12000"/>
-            </a:avLst>
-          </a:prstGeom>
-          <a:solidFill>
-            <a:srgbClr val="095292"/>
-          </a:solidFill>
-          <a:ln>
-            <a:noFill/>
-          </a:ln>
-        </p:spPr>
-        <p:style>
-          <a:lnRef idx="1">
-            <a:schemeClr val="accent1"/>
-          </a:lnRef>
-          <a:fillRef idx="3">
-            <a:schemeClr val="accent1"/>
-          </a:fillRef>
-          <a:effectRef idx="2">
-            <a:schemeClr val="accent1"/>
-          </a:effectRef>
-          <a:fontRef idx="minor">
-            <a:schemeClr val="lt1"/>
-          </a:fontRef>
-        </p:style>
-        <p:txBody>
-          <a:bodyPr rtlCol="0" anchor="ctr"/>
-          <a:lstStyle/>
-          <a:p>
-            <a:pPr algn="ctr"/>
-          </a:p>
-        </p:txBody>
-      </p:sp>
-      <p:sp>
-        <p:nvSpPr>
-          <p:cNvPr id="20" name="TextBox 19"/>
-          <p:cNvSpPr txBox="1"/>
-          <p:nvPr/>
-        </p:nvSpPr>
-        <p:spPr>
-          <a:xfrm>
-            <a:off x="594360" y="4680813"/>
-            <a:ext cx="438912" cy="438912"/>
-          </a:xfrm>
-          <a:prstGeom prst="rect">
-            <a:avLst/>
-          </a:prstGeom>
-          <a:noFill/>
-        </p:spPr>
-        <p:txBody>
-          <a:bodyPr wrap="square" anchor="ctr"/>
-          <a:lstStyle/>
-          <a:p>
-            <a:pPr algn="ctr"/>
-            <a:r>
-              <a:rPr sz="1600" b="1" i="0">
-                <a:solidFill>
-                  <a:srgbClr val="FFFFFF"/>
-                </a:solidFill>
-                <a:latin typeface="Calibri"/>
-              </a:rPr>
-              <a:t>4</a:t>
-            </a:r>
-          </a:p>
-        </p:txBody>
-      </p:sp>
-      <p:sp>
-        <p:nvSpPr>
-          <p:cNvPr id="21" name="TextBox 20"/>
-          <p:cNvSpPr txBox="1"/>
-          <p:nvPr/>
-        </p:nvSpPr>
-        <p:spPr>
-          <a:xfrm>
-            <a:off x="1188720" y="4537252"/>
-            <a:ext cx="10271455" cy="744321"/>
-          </a:xfrm>
-          <a:prstGeom prst="rect">
-            <a:avLst/>
-          </a:prstGeom>
-          <a:noFill/>
-        </p:spPr>
-        <p:txBody>
-          <a:bodyPr wrap="square" anchor="ctr"/>
-          <a:lstStyle/>
-          <a:p>
-            <a:r>
-              <a:rPr sz="1500" b="1" i="0">
-                <a:solidFill>
-                  <a:srgbClr val="095292"/>
-                </a:solidFill>
-                <a:latin typeface="Calibri"/>
-              </a:rPr>
-              <a:t>40 s · Actores y frontera</a:t>
-            </a:r>
-          </a:p>
-          <a:p>
-            <a:pPr>
-              <a:spcBef>
-                <a:spcPts val="200"/>
-              </a:spcBef>
-            </a:pPr>
-            <a:r>
-              <a:rPr sz="1300" b="0" i="0">
-                <a:solidFill>
-                  <a:srgbClr val="333333"/>
-                </a:solidFill>
-                <a:latin typeface="Calibri"/>
-              </a:rPr>
-              <a:t>Quién vive el problema, y a quién le van a preguntar esta semana.</a:t>
-            </a:r>
-          </a:p>
-        </p:txBody>
-      </p:sp>
-      <p:sp>
-        <p:nvSpPr>
-          <p:cNvPr id="22" name="Rounded Rectangle 21"/>
-          <p:cNvSpPr/>
-          <p:nvPr/>
-        </p:nvSpPr>
-        <p:spPr>
-          <a:xfrm>
-            <a:off x="457200" y="5446166"/>
-            <a:ext cx="11277295" cy="908913"/>
-          </a:xfrm>
-          <a:prstGeom prst="roundRect">
-            <a:avLst>
-              <a:gd name="adj" fmla="val 12000"/>
-            </a:avLst>
-          </a:prstGeom>
-          <a:solidFill>
-            <a:srgbClr val="F2F2F2"/>
-          </a:solidFill>
-          <a:ln>
-            <a:noFill/>
-          </a:ln>
-        </p:spPr>
-        <p:style>
-          <a:lnRef idx="1">
-            <a:schemeClr val="accent1"/>
-          </a:lnRef>
-          <a:fillRef idx="3">
-            <a:schemeClr val="accent1"/>
-          </a:fillRef>
-          <a:effectRef idx="2">
-            <a:schemeClr val="accent1"/>
-          </a:effectRef>
-          <a:fontRef idx="minor">
-            <a:schemeClr val="lt1"/>
-          </a:fontRef>
-        </p:style>
-        <p:txBody>
-          <a:bodyPr rtlCol="0" anchor="ctr"/>
-          <a:lstStyle/>
-          <a:p>
-            <a:pPr algn="ctr"/>
-          </a:p>
-        </p:txBody>
-      </p:sp>
-      <p:sp>
-        <p:nvSpPr>
-          <p:cNvPr id="23" name="Rounded Rectangle 22"/>
-          <p:cNvSpPr/>
-          <p:nvPr/>
-        </p:nvSpPr>
-        <p:spPr>
-          <a:xfrm>
-            <a:off x="594360" y="5681167"/>
-            <a:ext cx="438912" cy="438912"/>
-          </a:xfrm>
-          <a:prstGeom prst="roundRect">
-            <a:avLst>
-              <a:gd name="adj" fmla="val 12000"/>
-            </a:avLst>
-          </a:prstGeom>
-          <a:solidFill>
-            <a:srgbClr val="095292"/>
-          </a:solidFill>
-          <a:ln>
-            <a:noFill/>
-          </a:ln>
-        </p:spPr>
-        <p:style>
-          <a:lnRef idx="1">
-            <a:schemeClr val="accent1"/>
-          </a:lnRef>
-          <a:fillRef idx="3">
-            <a:schemeClr val="accent1"/>
-          </a:fillRef>
-          <a:effectRef idx="2">
-            <a:schemeClr val="accent1"/>
-          </a:effectRef>
-          <a:fontRef idx="minor">
-            <a:schemeClr val="lt1"/>
-          </a:fontRef>
-        </p:style>
-        <p:txBody>
-          <a:bodyPr rtlCol="0" anchor="ctr"/>
-          <a:lstStyle/>
-          <a:p>
-            <a:pPr algn="ctr"/>
-          </a:p>
-        </p:txBody>
-      </p:sp>
-      <p:sp>
-        <p:nvSpPr>
-          <p:cNvPr id="24" name="TextBox 23"/>
-          <p:cNvSpPr txBox="1"/>
-          <p:nvPr/>
-        </p:nvSpPr>
-        <p:spPr>
-          <a:xfrm>
-            <a:off x="594360" y="5681167"/>
-            <a:ext cx="438912" cy="438912"/>
-          </a:xfrm>
-          <a:prstGeom prst="rect">
-            <a:avLst/>
-          </a:prstGeom>
-          <a:noFill/>
-        </p:spPr>
-        <p:txBody>
-          <a:bodyPr wrap="square" anchor="ctr"/>
-          <a:lstStyle/>
-          <a:p>
-            <a:pPr algn="ctr"/>
-            <a:r>
-              <a:rPr sz="1600" b="1" i="0">
-                <a:solidFill>
-                  <a:srgbClr val="FFFFFF"/>
-                </a:solidFill>
-                <a:latin typeface="Calibri"/>
-              </a:rPr>
-              <a:t>5</a:t>
-            </a:r>
-          </a:p>
-        </p:txBody>
-      </p:sp>
-      <p:sp>
-        <p:nvSpPr>
-          <p:cNvPr id="25" name="TextBox 24"/>
-          <p:cNvSpPr txBox="1"/>
-          <p:nvPr/>
-        </p:nvSpPr>
-        <p:spPr>
-          <a:xfrm>
-            <a:off x="1188720" y="5537606"/>
-            <a:ext cx="10271455" cy="744321"/>
-          </a:xfrm>
-          <a:prstGeom prst="rect">
-            <a:avLst/>
-          </a:prstGeom>
-          <a:noFill/>
-        </p:spPr>
-        <p:txBody>
-          <a:bodyPr wrap="square" anchor="ctr"/>
-          <a:lstStyle/>
-          <a:p>
-            <a:r>
-              <a:rPr sz="1500" b="1" i="0">
-                <a:solidFill>
-                  <a:srgbClr val="095292"/>
-                </a:solidFill>
-                <a:latin typeface="Calibri"/>
-              </a:rPr>
-              <a:t>20 s · El criterio de éxito</a:t>
-            </a:r>
-          </a:p>
-          <a:p>
-            <a:pPr>
-              <a:spcBef>
-                <a:spcPts val="200"/>
-              </a:spcBef>
-            </a:pPr>
-            <a:r>
-              <a:rPr sz="1300" b="0" i="0">
-                <a:solidFill>
-                  <a:srgbClr val="333333"/>
-                </a:solidFill>
-                <a:latin typeface="Calibri"/>
-              </a:rPr>
-              <a:t>De X a Y, medido así.</a:t>
-            </a:r>
-          </a:p>
-        </p:txBody>
-      </p:sp>
-      <p:sp>
-        <p:nvSpPr>
-          <p:cNvPr id="26" name="TextBox 25"/>
-          <p:cNvSpPr txBox="1"/>
-          <p:nvPr/>
-        </p:nvSpPr>
-        <p:spPr>
-          <a:xfrm>
-            <a:off x="11185855" y="6473952"/>
-            <a:ext cx="640080" cy="274320"/>
-          </a:xfrm>
-          <a:prstGeom prst="rect">
-            <a:avLst/>
-          </a:prstGeom>
-          <a:noFill/>
-        </p:spPr>
-        <p:txBody>
-          <a:bodyPr wrap="square">
-            <a:spAutoFit/>
-          </a:bodyPr>
-          <a:lstStyle/>
-          <a:p>
-            <a:pPr algn="r"/>
-            <a:r>
-              <a:rPr sz="1100" b="0" i="0">
-                <a:solidFill>
-                  <a:srgbClr val="666666"/>
-                </a:solidFill>
-                <a:latin typeface="Calibri"/>
-              </a:rPr>
-              <a:t>15</a:t>
-            </a:r>
-          </a:p>
-        </p:txBody>
-      </p:sp>
-    </p:spTree>
-  </p:cSld>
-  <p:clrMapOvr>
-    <a:masterClrMapping/>
-  </p:clrMapOvr>
-</p:sld>
-</file>
-
-<file path=ppt/slides/slide16.xml><?xml version="1.0" encoding="utf-8"?>
-<p:sld xmlns:a="http://schemas.openxmlformats.org/drawingml/2006/main" xmlns:p="http://schemas.openxmlformats.org/presentationml/2006/main" xmlns:r="http://schemas.openxmlformats.org/officeDocument/2006/relationships">
-  <p:cSld>
-    <p:bg>
-      <p:bgPr>
-        <a:solidFill>
-          <a:srgbClr val="FFFFFF"/>
-        </a:solidFill>
-        <a:effectLst/>
-      </p:bgPr>
-    </p:bg>
-    <p:spTree>
-      <p:nvGrpSpPr>
-        <p:cNvPr id="1" name=""/>
-        <p:cNvGrpSpPr/>
-        <p:nvPr/>
-      </p:nvGrpSpPr>
-      <p:grpSpPr/>
-      <p:sp>
-        <p:nvSpPr>
-          <p:cNvPr id="2" name="Rectangle 1"/>
-          <p:cNvSpPr/>
-          <p:nvPr/>
-        </p:nvSpPr>
-        <p:spPr>
-          <a:xfrm>
-            <a:off x="0" y="0"/>
-            <a:ext cx="12191695" cy="960120"/>
-          </a:xfrm>
-          <a:prstGeom prst="rect">
-            <a:avLst/>
-          </a:prstGeom>
-          <a:solidFill>
-            <a:srgbClr val="095292"/>
-          </a:solidFill>
-          <a:ln>
-            <a:noFill/>
-          </a:ln>
-        </p:spPr>
-        <p:style>
-          <a:lnRef idx="1">
-            <a:schemeClr val="accent1"/>
-          </a:lnRef>
-          <a:fillRef idx="3">
-            <a:schemeClr val="accent1"/>
-          </a:fillRef>
-          <a:effectRef idx="2">
-            <a:schemeClr val="accent1"/>
-          </a:effectRef>
-          <a:fontRef idx="minor">
-            <a:schemeClr val="lt1"/>
-          </a:fontRef>
-        </p:style>
-        <p:txBody>
-          <a:bodyPr rtlCol="0" anchor="ctr"/>
-          <a:lstStyle/>
-          <a:p>
-            <a:pPr algn="ctr"/>
-          </a:p>
-        </p:txBody>
-      </p:sp>
-      <p:sp>
-        <p:nvSpPr>
-          <p:cNvPr id="3" name="Rectangle 2"/>
-          <p:cNvSpPr/>
-          <p:nvPr/>
-        </p:nvSpPr>
-        <p:spPr>
-          <a:xfrm>
-            <a:off x="0" y="960120"/>
-            <a:ext cx="12191695" cy="41148"/>
-          </a:xfrm>
-          <a:prstGeom prst="rect">
-            <a:avLst/>
-          </a:prstGeom>
-          <a:solidFill>
-            <a:srgbClr val="FFD000"/>
-          </a:solidFill>
-          <a:ln>
-            <a:noFill/>
-          </a:ln>
-        </p:spPr>
-        <p:style>
-          <a:lnRef idx="1">
-            <a:schemeClr val="accent1"/>
-          </a:lnRef>
-          <a:fillRef idx="3">
-            <a:schemeClr val="accent1"/>
-          </a:fillRef>
-          <a:effectRef idx="2">
-            <a:schemeClr val="accent1"/>
-          </a:effectRef>
-          <a:fontRef idx="minor">
-            <a:schemeClr val="lt1"/>
-          </a:fontRef>
-        </p:style>
-        <p:txBody>
-          <a:bodyPr rtlCol="0" anchor="ctr"/>
-          <a:lstStyle/>
-          <a:p>
-            <a:pPr algn="ctr"/>
-          </a:p>
-        </p:txBody>
-      </p:sp>
-      <p:sp>
-        <p:nvSpPr>
-          <p:cNvPr id="4" name="TextBox 3"/>
-          <p:cNvSpPr txBox="1"/>
-          <p:nvPr/>
-        </p:nvSpPr>
-        <p:spPr>
-          <a:xfrm>
-            <a:off x="457200" y="164592"/>
-            <a:ext cx="11277295" cy="502920"/>
-          </a:xfrm>
-          <a:prstGeom prst="rect">
-            <a:avLst/>
-          </a:prstGeom>
-          <a:noFill/>
-        </p:spPr>
-        <p:txBody>
-          <a:bodyPr wrap="square">
-            <a:spAutoFit/>
-          </a:bodyPr>
-          <a:lstStyle/>
-          <a:p>
-            <a:r>
-              <a:rPr sz="2600" b="1" i="0">
-                <a:solidFill>
-                  <a:srgbClr val="FFFFFF"/>
-                </a:solidFill>
-                <a:latin typeface="Calibri"/>
-              </a:rPr>
-              <a:t>Para la Clase 7</a:t>
-            </a:r>
-          </a:p>
-        </p:txBody>
-      </p:sp>
-      <p:sp>
-        <p:nvSpPr>
-          <p:cNvPr id="5" name="TextBox 4"/>
-          <p:cNvSpPr txBox="1"/>
-          <p:nvPr/>
-        </p:nvSpPr>
-        <p:spPr>
-          <a:xfrm>
-            <a:off x="457200" y="1170432"/>
-            <a:ext cx="11277295" cy="5230368"/>
-          </a:xfrm>
-          <a:prstGeom prst="rect">
-            <a:avLst/>
-          </a:prstGeom>
-          <a:noFill/>
-        </p:spPr>
-        <p:txBody>
-          <a:bodyPr wrap="square">
-            <a:spAutoFit/>
-          </a:bodyPr>
-          <a:lstStyle/>
-          <a:p>
-            <a:pPr>
-              <a:spcAft>
-                <a:spcPts val="800"/>
-              </a:spcAft>
-            </a:pPr>
-            <a:r>
-              <a:rPr sz="2000" b="0" i="0">
-                <a:solidFill>
-                  <a:srgbClr val="333333"/>
-                </a:solidFill>
-                <a:latin typeface="Calibri"/>
-              </a:rPr>
-              <a:t>–   </a:t>
-            </a:r>
-            <a:r>
-              <a:rPr sz="2000" b="1" i="0">
-                <a:solidFill>
-                  <a:srgbClr val="333333"/>
-                </a:solidFill>
-                <a:latin typeface="Calibri"/>
-              </a:rPr>
-              <a:t>Trabajo dirigido:</a:t>
-            </a:r>
-            <a:r>
-              <a:rPr sz="2000" b="0" i="0">
-                <a:solidFill>
-                  <a:srgbClr val="333333"/>
-                </a:solidFill>
-                <a:latin typeface="Calibri"/>
-              </a:rPr>
-              <a:t> Identificación de problemáticas locales — cerrar la ficha con la cifra medida de verdad, no estimada, si esta semana alcanzan a contar o preguntar.</a:t>
-            </a:r>
-          </a:p>
-          <a:p>
-            <a:pPr>
-              <a:spcAft>
-                <a:spcPts val="800"/>
-              </a:spcAft>
-            </a:pPr>
-            <a:r>
-              <a:rPr sz="2000" b="0" i="0">
-                <a:solidFill>
-                  <a:srgbClr val="333333"/>
-                </a:solidFill>
-                <a:latin typeface="Calibri"/>
-              </a:rPr>
-              <a:t>–   </a:t>
-            </a:r>
-            <a:r>
-              <a:rPr sz="2000" b="1" i="0">
-                <a:solidFill>
-                  <a:srgbClr val="333333"/>
-                </a:solidFill>
-                <a:latin typeface="Calibri"/>
-              </a:rPr>
-              <a:t>Trabajo independiente:</a:t>
-            </a:r>
-            <a:r>
-              <a:rPr sz="2000" b="0" i="0">
-                <a:solidFill>
-                  <a:srgbClr val="333333"/>
-                </a:solidFill>
-                <a:latin typeface="Calibri"/>
-              </a:rPr>
-              <a:t> Propuesta inicial de solución: media página con </a:t>
-            </a:r>
-            <a:r>
-              <a:rPr sz="2000" b="1" i="0">
-                <a:solidFill>
-                  <a:srgbClr val="333333"/>
-                </a:solidFill>
-                <a:latin typeface="Calibri"/>
-              </a:rPr>
-              <a:t>dos</a:t>
-            </a:r>
-            <a:r>
-              <a:rPr sz="2000" b="0" i="0">
-                <a:solidFill>
-                  <a:srgbClr val="333333"/>
-                </a:solidFill>
-                <a:latin typeface="Calibri"/>
-              </a:rPr>
-              <a:t> alternativas para atacar la causa elegida, sin decidir todavía cuál. Sin nombrar herramientas.</a:t>
-            </a:r>
-          </a:p>
-          <a:p>
-            <a:pPr>
-              <a:spcAft>
-                <a:spcPts val="800"/>
-              </a:spcAft>
-            </a:pPr>
-            <a:r>
-              <a:rPr sz="2000" b="0" i="0">
-                <a:solidFill>
-                  <a:srgbClr val="333333"/>
-                </a:solidFill>
-                <a:latin typeface="Calibri"/>
-              </a:rPr>
-              <a:t>–   </a:t>
-            </a:r>
-            <a:r>
-              <a:rPr sz="2000" b="1" i="0">
-                <a:solidFill>
-                  <a:srgbClr val="333333"/>
-                </a:solidFill>
-                <a:latin typeface="Calibri"/>
-              </a:rPr>
-              <a:t>Clase 7 · Ciclo de vida de los proyectos de ingeniería</a:t>
-            </a:r>
-            <a:r>
-              <a:rPr sz="2000" b="0" i="0">
-                <a:solidFill>
-                  <a:srgbClr val="333333"/>
-                </a:solidFill>
-                <a:latin typeface="Calibri"/>
-              </a:rPr>
-              <a:t> — el </a:t>
-            </a:r>
-            <a:r>
-              <a:rPr sz="2000" b="1" i="0">
-                <a:solidFill>
-                  <a:srgbClr val="333333"/>
-                </a:solidFill>
-                <a:latin typeface="Calibri"/>
-              </a:rPr>
-              <a:t>ciclo de vida de los proyectos de ingeniería</a:t>
-            </a:r>
-            <a:r>
-              <a:rPr sz="2000" b="0" i="0">
-                <a:solidFill>
-                  <a:srgbClr val="333333"/>
-                </a:solidFill>
-                <a:latin typeface="Calibri"/>
-              </a:rPr>
-              <a:t>, aplicado a la ficha de hoy: qué se hace antes de construir y por qué el orden importa.</a:t>
-            </a:r>
-          </a:p>
-          <a:p>
-            <a:pPr>
-              <a:spcAft>
-                <a:spcPts val="800"/>
-              </a:spcAft>
-            </a:pPr>
-            <a:r>
-              <a:rPr sz="2000" b="0" i="0">
-                <a:solidFill>
-                  <a:srgbClr val="333333"/>
-                </a:solidFill>
-                <a:latin typeface="Calibri"/>
-              </a:rPr>
-              <a:t>–   </a:t>
-            </a:r>
-            <a:r>
-              <a:rPr sz="2000" b="1" i="0">
-                <a:solidFill>
-                  <a:srgbClr val="333333"/>
-                </a:solidFill>
-                <a:latin typeface="Calibri"/>
-              </a:rPr>
-              <a:t>Aviso:</a:t>
-            </a:r>
-            <a:r>
-              <a:rPr sz="2000" b="0" i="0">
-                <a:solidFill>
-                  <a:srgbClr val="333333"/>
-                </a:solidFill>
-                <a:latin typeface="Calibri"/>
-              </a:rPr>
-              <a:t> Arranca el corte 2. La ficha del problema queda como referencia fija: llévenla al documento del equipo con el título «Ficha del problema — versión final del corte 1», porque se va a citar en todas las sesiones que siguen.</a:t>
-            </a:r>
-          </a:p>
-          <a:p>
-            <a:pPr>
-              <a:spcAft>
-                <a:spcPts val="800"/>
-              </a:spcAft>
-            </a:pPr>
-            <a:r>
-              <a:rPr sz="2000" b="0" i="0">
-                <a:solidFill>
-                  <a:srgbClr val="333333"/>
-                </a:solidFill>
-                <a:latin typeface="Calibri"/>
-              </a:rPr>
-              <a:t>–   </a:t>
-            </a:r>
-            <a:r>
-              <a:rPr sz="2000" b="1" i="0">
-                <a:solidFill>
-                  <a:srgbClr val="333333"/>
-                </a:solidFill>
-                <a:latin typeface="Calibri"/>
-              </a:rPr>
-              <a:t>Antes de salir:</a:t>
-            </a:r>
-            <a:r>
-              <a:rPr sz="2000" b="0" i="0">
-                <a:solidFill>
-                  <a:srgbClr val="333333"/>
-                </a:solidFill>
-                <a:latin typeface="Calibri"/>
-              </a:rPr>
-              <a:t> el enlace del documento del equipo en el chat, con permiso de lectura para el docente, y el nombre del vocero de hoy.</a:t>
-            </a:r>
-          </a:p>
-        </p:txBody>
-      </p:sp>
-      <p:sp>
-        <p:nvSpPr>
-          <p:cNvPr id="6" name="TextBox 5"/>
-          <p:cNvSpPr txBox="1"/>
-          <p:nvPr/>
-        </p:nvSpPr>
-        <p:spPr>
-          <a:xfrm>
-            <a:off x="11185855" y="6473952"/>
-            <a:ext cx="640080" cy="274320"/>
-          </a:xfrm>
-          <a:prstGeom prst="rect">
-            <a:avLst/>
-          </a:prstGeom>
-          <a:noFill/>
-        </p:spPr>
-        <p:txBody>
-          <a:bodyPr wrap="square">
-            <a:spAutoFit/>
-          </a:bodyPr>
-          <a:lstStyle/>
-          <a:p>
-            <a:pPr algn="r"/>
-            <a:r>
-              <a:rPr sz="1100" b="0" i="0">
-                <a:solidFill>
-                  <a:srgbClr val="666666"/>
-                </a:solidFill>
-                <a:latin typeface="Calibri"/>
-              </a:rPr>
-              <a:t>16</a:t>
-            </a:r>
-          </a:p>
-        </p:txBody>
-      </p:sp>
-    </p:spTree>
-  </p:cSld>
-  <p:clrMapOvr>
-    <a:masterClrMapping/>
-  </p:clrMapOvr>
-</p:sld>
-</file>
-
-<file path=ppt/slides/slide17.xml><?xml version="1.0" encoding="utf-8"?>
 <p:sld xmlns:a="http://schemas.openxmlformats.org/drawingml/2006/main" xmlns:p="http://schemas.openxmlformats.org/presentationml/2006/main" xmlns:r="http://schemas.openxmlformats.org/officeDocument/2006/relationships">
   <p:cSld>
     <p:bg>

--- a/Introduccion a la Ingenieria/Clases/Clase 6 - Analisis de problemas tecnologicos del entorno/Presentacion.pptx
+++ b/Introduccion a la Ingenieria/Clases/Clase 6 - Analisis de problemas tecnologicos del entorno/Presentacion.pptx
@@ -18,7 +18,6 @@
     <p:sldId id="266" r:id="rId18"/>
     <p:sldId id="267" r:id="rId19"/>
     <p:sldId id="268" r:id="rId20"/>
-    <p:sldId id="269" r:id="rId21"/>
   </p:sldIdLst>
   <p:sldSz cx="12191695" cy="6858000" type="screen4x3"/>
   <p:notesSz cx="6858000" cy="9144000"/>
@@ -516,100 +515,6 @@
           <a:p>
             <a:r>
               <a:t>Fíjese que en ningún paso aparece «hacer una app». Si un equipo llega al problema con la solución ya puesta, devuélvalo al primer paso.</a:t>
-            </a:r>
-          </a:p>
-        </p:txBody>
-      </p:sp>
-      <p:sp>
-        <p:nvSpPr>
-          <p:cNvPr id="4" name="Slide Number Placeholder 3"/>
-          <p:cNvSpPr>
-            <a:spLocks noGrp="1"/>
-          </p:cNvSpPr>
-          <p:nvPr>
-            <p:ph type="sldNum" idx="5" sz="quarter"/>
-          </p:nvPr>
-        </p:nvSpPr>
-        <p:spPr/>
-      </p:sp>
-    </p:spTree>
-  </p:cSld>
-  <p:clrMapOvr>
-    <a:masterClrMapping/>
-  </p:clrMapOvr>
-</p:notes>
-</file>
-
-<file path=ppt/notesSlides/notesSlide10.xml><?xml version="1.0" encoding="utf-8"?>
-<p:notes xmlns:a="http://schemas.openxmlformats.org/drawingml/2006/main" xmlns:p="http://schemas.openxmlformats.org/presentationml/2006/main" xmlns:r="http://schemas.openxmlformats.org/officeDocument/2006/relationships">
-  <p:cSld>
-    <p:spTree>
-      <p:nvGrpSpPr>
-        <p:cNvPr id="1" name=""/>
-        <p:cNvGrpSpPr/>
-        <p:nvPr/>
-      </p:nvGrpSpPr>
-      <p:grpSpPr>
-        <a:xfrm>
-          <a:off x="0" y="0"/>
-          <a:ext cx="0" cy="0"/>
-          <a:chOff x="0" y="0"/>
-          <a:chExt cx="0" cy="0"/>
-        </a:xfrm>
-      </p:grpSpPr>
-      <p:sp>
-        <p:nvSpPr>
-          <p:cNvPr id="2" name="Slide Image Placeholder 1"/>
-          <p:cNvSpPr>
-            <a:spLocks noGrp="1"/>
-          </p:cNvSpPr>
-          <p:nvPr>
-            <p:ph type="sldImg" idx="2"/>
-          </p:nvPr>
-        </p:nvSpPr>
-        <p:spPr/>
-      </p:sp>
-      <p:sp>
-        <p:nvSpPr>
-          <p:cNvPr id="3" name="Notes Placeholder 2"/>
-          <p:cNvSpPr>
-            <a:spLocks noGrp="1"/>
-          </p:cNvSpPr>
-          <p:nvPr>
-            <p:ph type="body" idx="3" sz="quarter"/>
-          </p:nvPr>
-        </p:nvSpPr>
-        <p:spPr/>
-        <p:txBody>
-          <a:bodyPr/>
-          <a:lstStyle/>
-          <a:p>
-            <a:r>
-              <a:t>CÓMO CERRAR EL CORTE: LA FICHA Y LA EVALUACIÓN EN EXAMLAB</a:t>
-            </a:r>
-          </a:p>
-          <a:p/>
-          <a:p>
-            <a:r>
-              <a:t>El reparto del tiempo de hoy es distinto al de las otras sesiones y hay que respetarlo: teoría 25 minutos, no 45. El corte se cierra con dos entregas y las dos ocurren en clase, así que quedarse largo en la explicación significa aplicar la evaluación con la gente apurada, que es la peor manera de evaluar.</a:t>
-            </a:r>
-          </a:p>
-          <a:p/>
-          <a:p>
-            <a:r>
-              <a:t>La ficha del problema es el producto del corte 1 y conviene decirle al grupo exactamente qué peso tiene en el semestre: a partir de la sesión 7 todo se hace sobre ella. El ciclo de vida de la sesión 7 se aplica a ese problema; el prototipo de las sesiones 10 y 11 resuelve ese problema; la evaluación de impacto de la Clase 13 evalúa esa solución; el informe final de la Clase 16 compara contra esa línea base. Un equipo que hoy escriba una ficha vaga va a arrastrar el problema diez sesiones.</a:t>
-            </a:r>
-          </a:p>
-          <a:p/>
-          <a:p>
-            <a:r>
-              <a:t>La evaluación de corte son los últimos veinte minutos, en ExamLab, individual, y cubre las sesiones 1 a 6. Tres cosas operativas: el enlace va en el chat de la reunión, hay que decir explícitamente que ExamLab no es una plataforma oficial de la universidad sino la herramienta que usa este curso, y hay que pedir que cualquier problema para abrirlo se avise en el chat, en el momento, no al día siguiente por correo. En un curso virtual el problema técnico no reportado se vuelve un reclamo de nota dos semanas después.</a:t>
-            </a:r>
-          </a:p>
-          <a:p/>
-          <a:p>
-            <a:r>
-              <a:t>Una última recomendación de manejo del grupo: no anuncie la evaluación al final de las exposiciones, anúnciela en el minuto uno, cuando presente la agenda. La gente organiza su atención distinto cuando sabe que hay una evaluación al cierre, y además evita que alguien se desconecte después de exponer.</a:t>
             </a:r>
           </a:p>
         </p:txBody>
@@ -6547,628 +6452,6 @@
         <p:spPr>
           <a:xfrm>
             <a:off x="0" y="0"/>
-            <a:ext cx="12191695" cy="960120"/>
-          </a:xfrm>
-          <a:prstGeom prst="rect">
-            <a:avLst/>
-          </a:prstGeom>
-          <a:solidFill>
-            <a:srgbClr val="095292"/>
-          </a:solidFill>
-          <a:ln>
-            <a:noFill/>
-          </a:ln>
-        </p:spPr>
-        <p:style>
-          <a:lnRef idx="1">
-            <a:schemeClr val="accent1"/>
-          </a:lnRef>
-          <a:fillRef idx="3">
-            <a:schemeClr val="accent1"/>
-          </a:fillRef>
-          <a:effectRef idx="2">
-            <a:schemeClr val="accent1"/>
-          </a:effectRef>
-          <a:fontRef idx="minor">
-            <a:schemeClr val="lt1"/>
-          </a:fontRef>
-        </p:style>
-        <p:txBody>
-          <a:bodyPr rtlCol="0" anchor="ctr"/>
-          <a:lstStyle/>
-          <a:p>
-            <a:pPr algn="ctr"/>
-          </a:p>
-        </p:txBody>
-      </p:sp>
-      <p:sp>
-        <p:nvSpPr>
-          <p:cNvPr id="3" name="Rectangle 2"/>
-          <p:cNvSpPr/>
-          <p:nvPr/>
-        </p:nvSpPr>
-        <p:spPr>
-          <a:xfrm>
-            <a:off x="0" y="960120"/>
-            <a:ext cx="12191695" cy="41148"/>
-          </a:xfrm>
-          <a:prstGeom prst="rect">
-            <a:avLst/>
-          </a:prstGeom>
-          <a:solidFill>
-            <a:srgbClr val="FFD000"/>
-          </a:solidFill>
-          <a:ln>
-            <a:noFill/>
-          </a:ln>
-        </p:spPr>
-        <p:style>
-          <a:lnRef idx="1">
-            <a:schemeClr val="accent1"/>
-          </a:lnRef>
-          <a:fillRef idx="3">
-            <a:schemeClr val="accent1"/>
-          </a:fillRef>
-          <a:effectRef idx="2">
-            <a:schemeClr val="accent1"/>
-          </a:effectRef>
-          <a:fontRef idx="minor">
-            <a:schemeClr val="lt1"/>
-          </a:fontRef>
-        </p:style>
-        <p:txBody>
-          <a:bodyPr rtlCol="0" anchor="ctr"/>
-          <a:lstStyle/>
-          <a:p>
-            <a:pPr algn="ctr"/>
-          </a:p>
-        </p:txBody>
-      </p:sp>
-      <p:sp>
-        <p:nvSpPr>
-          <p:cNvPr id="4" name="TextBox 3"/>
-          <p:cNvSpPr txBox="1"/>
-          <p:nvPr/>
-        </p:nvSpPr>
-        <p:spPr>
-          <a:xfrm>
-            <a:off x="457200" y="164592"/>
-            <a:ext cx="11277295" cy="502920"/>
-          </a:xfrm>
-          <a:prstGeom prst="rect">
-            <a:avLst/>
-          </a:prstGeom>
-          <a:noFill/>
-        </p:spPr>
-        <p:txBody>
-          <a:bodyPr wrap="square">
-            <a:spAutoFit/>
-          </a:bodyPr>
-          <a:lstStyle/>
-          <a:p>
-            <a:r>
-              <a:rPr sz="2600" b="1" i="0">
-                <a:solidFill>
-                  <a:srgbClr val="FFFFFF"/>
-                </a:solidFill>
-                <a:latin typeface="Calibri"/>
-              </a:rPr>
-              <a:t>Cómo cierra el corte 1 hoy</a:t>
-            </a:r>
-          </a:p>
-        </p:txBody>
-      </p:sp>
-      <p:sp>
-        <p:nvSpPr>
-          <p:cNvPr id="5" name="Rounded Rectangle 4"/>
-          <p:cNvSpPr/>
-          <p:nvPr/>
-        </p:nvSpPr>
-        <p:spPr>
-          <a:xfrm>
-            <a:off x="457200" y="1261872"/>
-            <a:ext cx="11277295" cy="1051560"/>
-          </a:xfrm>
-          <a:prstGeom prst="roundRect">
-            <a:avLst>
-              <a:gd name="adj" fmla="val 12000"/>
-            </a:avLst>
-          </a:prstGeom>
-          <a:solidFill>
-            <a:srgbClr val="E8F4FA"/>
-          </a:solidFill>
-          <a:ln>
-            <a:noFill/>
-          </a:ln>
-        </p:spPr>
-        <p:style>
-          <a:lnRef idx="1">
-            <a:schemeClr val="accent1"/>
-          </a:lnRef>
-          <a:fillRef idx="3">
-            <a:schemeClr val="accent1"/>
-          </a:fillRef>
-          <a:effectRef idx="2">
-            <a:schemeClr val="accent1"/>
-          </a:effectRef>
-          <a:fontRef idx="minor">
-            <a:schemeClr val="lt1"/>
-          </a:fontRef>
-        </p:style>
-        <p:txBody>
-          <a:bodyPr rtlCol="0" anchor="ctr"/>
-          <a:lstStyle/>
-          <a:p>
-            <a:pPr algn="ctr"/>
-          </a:p>
-        </p:txBody>
-      </p:sp>
-      <p:sp>
-        <p:nvSpPr>
-          <p:cNvPr id="6" name="Rectangle 5"/>
-          <p:cNvSpPr/>
-          <p:nvPr/>
-        </p:nvSpPr>
-        <p:spPr>
-          <a:xfrm>
-            <a:off x="457200" y="1261872"/>
-            <a:ext cx="128016" cy="1051560"/>
-          </a:xfrm>
-          <a:prstGeom prst="rect">
-            <a:avLst/>
-          </a:prstGeom>
-          <a:solidFill>
-            <a:srgbClr val="269CCB"/>
-          </a:solidFill>
-          <a:ln>
-            <a:noFill/>
-          </a:ln>
-        </p:spPr>
-        <p:style>
-          <a:lnRef idx="1">
-            <a:schemeClr val="accent1"/>
-          </a:lnRef>
-          <a:fillRef idx="3">
-            <a:schemeClr val="accent1"/>
-          </a:fillRef>
-          <a:effectRef idx="2">
-            <a:schemeClr val="accent1"/>
-          </a:effectRef>
-          <a:fontRef idx="minor">
-            <a:schemeClr val="lt1"/>
-          </a:fontRef>
-        </p:style>
-        <p:txBody>
-          <a:bodyPr rtlCol="0" anchor="ctr"/>
-          <a:lstStyle/>
-          <a:p>
-            <a:pPr algn="ctr"/>
-          </a:p>
-        </p:txBody>
-      </p:sp>
-      <p:sp>
-        <p:nvSpPr>
-          <p:cNvPr id="7" name="TextBox 6"/>
-          <p:cNvSpPr txBox="1"/>
-          <p:nvPr/>
-        </p:nvSpPr>
-        <p:spPr>
-          <a:xfrm>
-            <a:off x="777240" y="1399031"/>
-            <a:ext cx="10774375" cy="822959"/>
-          </a:xfrm>
-          <a:prstGeom prst="rect">
-            <a:avLst/>
-          </a:prstGeom>
-          <a:noFill/>
-        </p:spPr>
-        <p:txBody>
-          <a:bodyPr wrap="square">
-            <a:spAutoFit/>
-          </a:bodyPr>
-          <a:lstStyle/>
-          <a:p>
-            <a:r>
-              <a:rPr sz="1200" b="1" i="0">
-                <a:solidFill>
-                  <a:srgbClr val="269CCB"/>
-                </a:solidFill>
-                <a:latin typeface="Calibri"/>
-              </a:rPr>
-              <a:t>Info</a:t>
-            </a:r>
-          </a:p>
-          <a:p>
-            <a:pPr>
-              <a:spcBef>
-                <a:spcPts val="400"/>
-              </a:spcBef>
-            </a:pPr>
-            <a:r>
-              <a:rPr sz="1400" b="1" i="0">
-                <a:solidFill>
-                  <a:srgbClr val="333333"/>
-                </a:solidFill>
-                <a:latin typeface="Calibri"/>
-              </a:rPr>
-              <a:t>La ficha del problema es el producto del corte.</a:t>
-            </a:r>
-            <a:r>
-              <a:rPr sz="1400" b="0" i="0">
-                <a:solidFill>
-                  <a:srgbClr val="333333"/>
-                </a:solidFill>
-                <a:latin typeface="Calibri"/>
-              </a:rPr>
-              <a:t> Se entrega hoy, en el documento del equipo, y a partir de la sesión 7 todo el trabajo se hace sobre ella: el ciclo de vida, el prototipo, el impacto y el informe final. Cambiarla después cuesta trabajo, así que vale la pena escribirla bien hoy.</a:t>
-            </a:r>
-          </a:p>
-        </p:txBody>
-      </p:sp>
-      <p:sp>
-        <p:nvSpPr>
-          <p:cNvPr id="8" name="Rounded Rectangle 7"/>
-          <p:cNvSpPr/>
-          <p:nvPr/>
-        </p:nvSpPr>
-        <p:spPr>
-          <a:xfrm>
-            <a:off x="457200" y="2478024"/>
-            <a:ext cx="11277295" cy="1051560"/>
-          </a:xfrm>
-          <a:prstGeom prst="roundRect">
-            <a:avLst>
-              <a:gd name="adj" fmla="val 12000"/>
-            </a:avLst>
-          </a:prstGeom>
-          <a:solidFill>
-            <a:srgbClr val="E8F4FA"/>
-          </a:solidFill>
-          <a:ln>
-            <a:noFill/>
-          </a:ln>
-        </p:spPr>
-        <p:style>
-          <a:lnRef idx="1">
-            <a:schemeClr val="accent1"/>
-          </a:lnRef>
-          <a:fillRef idx="3">
-            <a:schemeClr val="accent1"/>
-          </a:fillRef>
-          <a:effectRef idx="2">
-            <a:schemeClr val="accent1"/>
-          </a:effectRef>
-          <a:fontRef idx="minor">
-            <a:schemeClr val="lt1"/>
-          </a:fontRef>
-        </p:style>
-        <p:txBody>
-          <a:bodyPr rtlCol="0" anchor="ctr"/>
-          <a:lstStyle/>
-          <a:p>
-            <a:pPr algn="ctr"/>
-          </a:p>
-        </p:txBody>
-      </p:sp>
-      <p:sp>
-        <p:nvSpPr>
-          <p:cNvPr id="9" name="Rectangle 8"/>
-          <p:cNvSpPr/>
-          <p:nvPr/>
-        </p:nvSpPr>
-        <p:spPr>
-          <a:xfrm>
-            <a:off x="457200" y="2478024"/>
-            <a:ext cx="128016" cy="1051560"/>
-          </a:xfrm>
-          <a:prstGeom prst="rect">
-            <a:avLst/>
-          </a:prstGeom>
-          <a:solidFill>
-            <a:srgbClr val="269CCB"/>
-          </a:solidFill>
-          <a:ln>
-            <a:noFill/>
-          </a:ln>
-        </p:spPr>
-        <p:style>
-          <a:lnRef idx="1">
-            <a:schemeClr val="accent1"/>
-          </a:lnRef>
-          <a:fillRef idx="3">
-            <a:schemeClr val="accent1"/>
-          </a:fillRef>
-          <a:effectRef idx="2">
-            <a:schemeClr val="accent1"/>
-          </a:effectRef>
-          <a:fontRef idx="minor">
-            <a:schemeClr val="lt1"/>
-          </a:fontRef>
-        </p:style>
-        <p:txBody>
-          <a:bodyPr rtlCol="0" anchor="ctr"/>
-          <a:lstStyle/>
-          <a:p>
-            <a:pPr algn="ctr"/>
-          </a:p>
-        </p:txBody>
-      </p:sp>
-      <p:sp>
-        <p:nvSpPr>
-          <p:cNvPr id="10" name="TextBox 9"/>
-          <p:cNvSpPr txBox="1"/>
-          <p:nvPr/>
-        </p:nvSpPr>
-        <p:spPr>
-          <a:xfrm>
-            <a:off x="777240" y="2615184"/>
-            <a:ext cx="10774375" cy="822959"/>
-          </a:xfrm>
-          <a:prstGeom prst="rect">
-            <a:avLst/>
-          </a:prstGeom>
-          <a:noFill/>
-        </p:spPr>
-        <p:txBody>
-          <a:bodyPr wrap="square">
-            <a:spAutoFit/>
-          </a:bodyPr>
-          <a:lstStyle/>
-          <a:p>
-            <a:r>
-              <a:rPr sz="1200" b="1" i="0">
-                <a:solidFill>
-                  <a:srgbClr val="269CCB"/>
-                </a:solidFill>
-                <a:latin typeface="Calibri"/>
-              </a:rPr>
-              <a:t>Info</a:t>
-            </a:r>
-          </a:p>
-          <a:p>
-            <a:pPr>
-              <a:spcBef>
-                <a:spcPts val="400"/>
-              </a:spcBef>
-            </a:pPr>
-            <a:r>
-              <a:rPr sz="1400" b="1" i="0">
-                <a:solidFill>
-                  <a:srgbClr val="333333"/>
-                </a:solidFill>
-                <a:latin typeface="Calibri"/>
-              </a:rPr>
-              <a:t>Los últimos 20 minutos son la evaluación de corte, en la plataforma del curso.</a:t>
-            </a:r>
-            <a:r>
-              <a:rPr sz="1400" b="0" i="0">
-                <a:solidFill>
-                  <a:srgbClr val="333333"/>
-                </a:solidFill>
-                <a:latin typeface="Calibri"/>
-              </a:rPr>
-              <a:t> Cubre las sesiones 1 a 6: qué es la ingeniería y qué no, historia y hitos, elementos de un sistema, principios éticos y normas, huella ambiental, y problema contra síntoma. Es individual y se responde en la misma sesión.</a:t>
-            </a:r>
-          </a:p>
-        </p:txBody>
-      </p:sp>
-      <p:sp>
-        <p:nvSpPr>
-          <p:cNvPr id="11" name="Rounded Rectangle 10"/>
-          <p:cNvSpPr/>
-          <p:nvPr/>
-        </p:nvSpPr>
-        <p:spPr>
-          <a:xfrm>
-            <a:off x="457200" y="3694176"/>
-            <a:ext cx="11277295" cy="1051560"/>
-          </a:xfrm>
-          <a:prstGeom prst="roundRect">
-            <a:avLst>
-              <a:gd name="adj" fmla="val 12000"/>
-            </a:avLst>
-          </a:prstGeom>
-          <a:solidFill>
-            <a:srgbClr val="FFF8E1"/>
-          </a:solidFill>
-          <a:ln>
-            <a:noFill/>
-          </a:ln>
-        </p:spPr>
-        <p:style>
-          <a:lnRef idx="1">
-            <a:schemeClr val="accent1"/>
-          </a:lnRef>
-          <a:fillRef idx="3">
-            <a:schemeClr val="accent1"/>
-          </a:fillRef>
-          <a:effectRef idx="2">
-            <a:schemeClr val="accent1"/>
-          </a:effectRef>
-          <a:fontRef idx="minor">
-            <a:schemeClr val="lt1"/>
-          </a:fontRef>
-        </p:style>
-        <p:txBody>
-          <a:bodyPr rtlCol="0" anchor="ctr"/>
-          <a:lstStyle/>
-          <a:p>
-            <a:pPr algn="ctr"/>
-          </a:p>
-        </p:txBody>
-      </p:sp>
-      <p:sp>
-        <p:nvSpPr>
-          <p:cNvPr id="12" name="Rectangle 11"/>
-          <p:cNvSpPr/>
-          <p:nvPr/>
-        </p:nvSpPr>
-        <p:spPr>
-          <a:xfrm>
-            <a:off x="457200" y="3694176"/>
-            <a:ext cx="128016" cy="1051560"/>
-          </a:xfrm>
-          <a:prstGeom prst="rect">
-            <a:avLst/>
-          </a:prstGeom>
-          <a:solidFill>
-            <a:srgbClr val="FFD000"/>
-          </a:solidFill>
-          <a:ln>
-            <a:noFill/>
-          </a:ln>
-        </p:spPr>
-        <p:style>
-          <a:lnRef idx="1">
-            <a:schemeClr val="accent1"/>
-          </a:lnRef>
-          <a:fillRef idx="3">
-            <a:schemeClr val="accent1"/>
-          </a:fillRef>
-          <a:effectRef idx="2">
-            <a:schemeClr val="accent1"/>
-          </a:effectRef>
-          <a:fontRef idx="minor">
-            <a:schemeClr val="lt1"/>
-          </a:fontRef>
-        </p:style>
-        <p:txBody>
-          <a:bodyPr rtlCol="0" anchor="ctr"/>
-          <a:lstStyle/>
-          <a:p>
-            <a:pPr algn="ctr"/>
-          </a:p>
-        </p:txBody>
-      </p:sp>
-      <p:sp>
-        <p:nvSpPr>
-          <p:cNvPr id="13" name="TextBox 12"/>
-          <p:cNvSpPr txBox="1"/>
-          <p:nvPr/>
-        </p:nvSpPr>
-        <p:spPr>
-          <a:xfrm>
-            <a:off x="777240" y="3831336"/>
-            <a:ext cx="10774375" cy="822959"/>
-          </a:xfrm>
-          <a:prstGeom prst="rect">
-            <a:avLst/>
-          </a:prstGeom>
-          <a:noFill/>
-        </p:spPr>
-        <p:txBody>
-          <a:bodyPr wrap="square">
-            <a:spAutoFit/>
-          </a:bodyPr>
-          <a:lstStyle/>
-          <a:p>
-            <a:r>
-              <a:rPr sz="1200" b="1" i="0">
-                <a:solidFill>
-                  <a:srgbClr val="FFD000"/>
-                </a:solidFill>
-                <a:latin typeface="Calibri"/>
-              </a:rPr>
-              <a:t>Aclaración</a:t>
-            </a:r>
-          </a:p>
-          <a:p>
-            <a:pPr>
-              <a:spcBef>
-                <a:spcPts val="400"/>
-              </a:spcBef>
-            </a:pPr>
-            <a:r>
-              <a:rPr sz="1400" b="1" i="0">
-                <a:solidFill>
-                  <a:srgbClr val="333333"/>
-                </a:solidFill>
-                <a:latin typeface="Calibri"/>
-              </a:rPr>
-              <a:t>la plataforma del curso no es una plataforma oficial de la universidad</a:t>
-            </a:r>
-            <a:r>
-              <a:rPr sz="1400" b="0" i="0">
-                <a:solidFill>
-                  <a:srgbClr val="333333"/>
-                </a:solidFill>
-                <a:latin typeface="Calibri"/>
-              </a:rPr>
-              <a:t>: es la herramienta que usa este curso para las evaluaciones, y el enlace se comparte en el chat. Si a alguien no le abre, avise de inmediato en el chat y se resuelve en el momento — no al día siguiente.</a:t>
-            </a:r>
-          </a:p>
-        </p:txBody>
-      </p:sp>
-      <p:sp>
-        <p:nvSpPr>
-          <p:cNvPr id="14" name="TextBox 13"/>
-          <p:cNvSpPr txBox="1"/>
-          <p:nvPr/>
-        </p:nvSpPr>
-        <p:spPr>
-          <a:xfrm>
-            <a:off x="11185855" y="6473952"/>
-            <a:ext cx="640080" cy="274320"/>
-          </a:xfrm>
-          <a:prstGeom prst="rect">
-            <a:avLst/>
-          </a:prstGeom>
-          <a:noFill/>
-        </p:spPr>
-        <p:txBody>
-          <a:bodyPr wrap="square">
-            <a:spAutoFit/>
-          </a:bodyPr>
-          <a:lstStyle/>
-          <a:p>
-            <a:pPr algn="r"/>
-            <a:r>
-              <a:rPr sz="1100" b="0" i="0">
-                <a:solidFill>
-                  <a:srgbClr val="666666"/>
-                </a:solidFill>
-                <a:latin typeface="Calibri"/>
-              </a:rPr>
-              <a:t>13</a:t>
-            </a:r>
-          </a:p>
-        </p:txBody>
-      </p:sp>
-    </p:spTree>
-  </p:cSld>
-  <p:clrMapOvr>
-    <a:masterClrMapping/>
-  </p:clrMapOvr>
-</p:sld>
-</file>
-
-<file path=ppt/slides/slide14.xml><?xml version="1.0" encoding="utf-8"?>
-<p:sld xmlns:a="http://schemas.openxmlformats.org/drawingml/2006/main" xmlns:p="http://schemas.openxmlformats.org/presentationml/2006/main" xmlns:r="http://schemas.openxmlformats.org/officeDocument/2006/relationships">
-  <p:cSld>
-    <p:bg>
-      <p:bgPr>
-        <a:solidFill>
-          <a:srgbClr val="FFFFFF"/>
-        </a:solidFill>
-        <a:effectLst/>
-      </p:bgPr>
-    </p:bg>
-    <p:spTree>
-      <p:nvGrpSpPr>
-        <p:cNvPr id="1" name=""/>
-        <p:cNvGrpSpPr/>
-        <p:nvPr/>
-      </p:nvGrpSpPr>
-      <p:grpSpPr/>
-      <p:sp>
-        <p:nvSpPr>
-          <p:cNvPr id="2" name="Rectangle 1"/>
-          <p:cNvSpPr/>
-          <p:nvPr/>
-        </p:nvSpPr>
-        <p:spPr>
-          <a:xfrm>
-            <a:off x="0" y="0"/>
             <a:ext cx="12191695" cy="164592"/>
           </a:xfrm>
           <a:prstGeom prst="rect">
@@ -7913,7 +7196,7 @@
                 </a:solidFill>
                 <a:latin typeface="Calibri"/>
               </a:rPr>
-              <a:t>Actividad en equipos — Ficha del problema del proyecto, en salas de grupo</a:t>
+              <a:t>Actividad en equipos — opcional · la guía está en la carpeta de la clase</a:t>
             </a:r>
           </a:p>
         </p:txBody>
@@ -8028,7 +7311,7 @@
                 </a:solidFill>
                 <a:latin typeface="Calibri"/>
               </a:rPr>
-              <a:t>Exposiciones — 5 equipos × 3 min — el problema en una frase y su cifra</a:t>
+              <a:t>Exposiciones — de la práctica, si se hizo</a:t>
             </a:r>
           </a:p>
         </p:txBody>
@@ -8143,7 +7426,7 @@
                 </a:solidFill>
                 <a:latin typeface="Calibri"/>
               </a:rPr>
-              <a:t>Evaluación de corte 1 — En la plataforma del curso · cubre las sesiones 1 a 6</a:t>
+              <a:t>Evaluación de corte 1 — sobre lo visto en el corte hasta hoy</a:t>
             </a:r>
           </a:p>
         </p:txBody>
@@ -8287,58 +7570,22 @@
           <a:p>
             <a:pPr algn="ctr"/>
             <a:r>
-              <a:rPr sz="1100" b="1" i="1">
+              <a:rPr sz="1200" b="1" i="1">
                 <a:solidFill>
                   <a:srgbClr val="666666"/>
                 </a:solidFill>
                 <a:latin typeface="Calibri"/>
               </a:rPr>
-              <a:t>Esta sesión cierra el corte 1 (30 %).</a:t>
-            </a:r>
-            <a:r>
-              <a:rPr sz="1100" b="0" i="1">
+              <a:t>Esta sesión cierra el corte 1.</a:t>
+            </a:r>
+            <a:r>
+              <a:rPr sz="1200" b="0" i="1">
                 <a:solidFill>
                   <a:srgbClr val="666666"/>
                 </a:solidFill>
                 <a:latin typeface="Calibri"/>
               </a:rPr>
-              <a:t> Trae dos cosas que las demás no tienen: la </a:t>
-            </a:r>
-            <a:r>
-              <a:rPr sz="1100" b="1" i="1">
-                <a:solidFill>
-                  <a:srgbClr val="666666"/>
-                </a:solidFill>
-                <a:latin typeface="Calibri"/>
-              </a:rPr>
-              <a:t>ficha del problema del proyecto</a:t>
-            </a:r>
-            <a:r>
-              <a:rPr sz="1100" b="0" i="1">
-                <a:solidFill>
-                  <a:srgbClr val="666666"/>
-                </a:solidFill>
-                <a:latin typeface="Calibri"/>
-              </a:rPr>
-              <a:t>, que es el producto del corte y gobierna el resto del semestre, y la </a:t>
-            </a:r>
-            <a:r>
-              <a:rPr sz="1100" b="1" i="1">
-                <a:solidFill>
-                  <a:srgbClr val="666666"/>
-                </a:solidFill>
-                <a:latin typeface="Calibri"/>
-              </a:rPr>
-              <a:t>evaluación de corte en la plataforma del curso</a:t>
-            </a:r>
-            <a:r>
-              <a:rPr sz="1100" b="0" i="1">
-                <a:solidFill>
-                  <a:srgbClr val="666666"/>
-                </a:solidFill>
-                <a:latin typeface="Calibri"/>
-              </a:rPr>
-              <a:t>, que se aplica en los últimos 20 minutos y cubre las sesiones 1 a 6. Por eso el bloque de teoría baja de 45 a 25 minutos: hay que llegar con tiempo, no con la explicación a medias.</a:t>
+              <a:t> Los últimos 20 minutos son la evaluación de corte, sobre lo visto hasta hoy. Por eso el bloque de teoría baja de 45 a 25 minutos: hay que llegar con tiempo, no con la explicación a medias.</a:t>
             </a:r>
           </a:p>
         </p:txBody>

--- a/Introduccion a la Ingenieria/Clases/Clase 6 - Analisis de problemas tecnologicos del entorno/Presentacion.pptx
+++ b/Introduccion a la Ingenieria/Clases/Clase 6 - Analisis de problemas tecnologicos del entorno/Presentacion.pptx
@@ -8,9 +8,9 @@
     <p:sldId id="256" r:id="rId7"/>
     <p:sldId id="257" r:id="rId8"/>
     <p:sldId id="258" r:id="rId9"/>
-    <p:sldId id="259" r:id="rId10"/>
-    <p:sldId id="260" r:id="rId11"/>
-    <p:sldId id="261" r:id="rId12"/>
+    <p:sldId id="259" r:id="rId11"/>
+    <p:sldId id="260" r:id="rId12"/>
+    <p:sldId id="261" r:id="rId13"/>
     <p:sldId id="262" r:id="rId14"/>
     <p:sldId id="263" r:id="rId15"/>
     <p:sldId id="264" r:id="rId16"/>
@@ -514,7 +514,137 @@
           <a:lstStyle/>
           <a:p>
             <a:r>
-              <a:t>Fíjese que en ningún paso aparece «hacer una app». Si un equipo llega al problema con la solución ya puesta, devuélvalo al primer paso.</a:t>
+              <a:t>TEXTO COMPLETO DE LA LÁMINA (se proyecta resumido):</a:t>
+            </a:r>
+          </a:p>
+          <a:p/>
+          <a:p>
+            <a:r>
+              <a:t>Distinguir un problema de un síntoma y de una solución disfrazada de problema.</a:t>
+            </a:r>
+          </a:p>
+          <a:p/>
+          <a:p>
+            <a:r>
+              <a:t>Construir el árbol de causas de un problema del entorno.</a:t>
+            </a:r>
+          </a:p>
+          <a:p/>
+          <a:p>
+            <a:r>
+              <a:t>Escribir una línea base: una cifra que se pueda decir hoy sobre el problema.</a:t>
+            </a:r>
+          </a:p>
+          <a:p/>
+          <a:p>
+            <a:r>
+              <a:t>Verificar que el problema elegido cabe en un semestre con los cuatro criterios.</a:t>
+            </a:r>
+          </a:p>
+          <a:p/>
+          <a:p>
+            <a:r>
+              <a:t>Entregar la ficha del problema del proyecto del equipo.</a:t>
+            </a:r>
+          </a:p>
+        </p:txBody>
+      </p:sp>
+      <p:sp>
+        <p:nvSpPr>
+          <p:cNvPr id="4" name="Slide Number Placeholder 3"/>
+          <p:cNvSpPr>
+            <a:spLocks noGrp="1"/>
+          </p:cNvSpPr>
+          <p:nvPr>
+            <p:ph type="sldNum" idx="5" sz="quarter"/>
+          </p:nvPr>
+        </p:nvSpPr>
+        <p:spPr/>
+      </p:sp>
+    </p:spTree>
+  </p:cSld>
+  <p:clrMapOvr>
+    <a:masterClrMapping/>
+  </p:clrMapOvr>
+</p:notes>
+</file>
+
+<file path=ppt/notesSlides/notesSlide10.xml><?xml version="1.0" encoding="utf-8"?>
+<p:notes xmlns:a="http://schemas.openxmlformats.org/drawingml/2006/main" xmlns:p="http://schemas.openxmlformats.org/presentationml/2006/main" xmlns:r="http://schemas.openxmlformats.org/officeDocument/2006/relationships">
+  <p:cSld>
+    <p:spTree>
+      <p:nvGrpSpPr>
+        <p:cNvPr id="1" name=""/>
+        <p:cNvGrpSpPr/>
+        <p:nvPr/>
+      </p:nvGrpSpPr>
+      <p:grpSpPr>
+        <a:xfrm>
+          <a:off x="0" y="0"/>
+          <a:ext cx="0" cy="0"/>
+          <a:chOff x="0" y="0"/>
+          <a:chExt cx="0" cy="0"/>
+        </a:xfrm>
+      </p:grpSpPr>
+      <p:sp>
+        <p:nvSpPr>
+          <p:cNvPr id="2" name="Slide Image Placeholder 1"/>
+          <p:cNvSpPr>
+            <a:spLocks noGrp="1"/>
+          </p:cNvSpPr>
+          <p:nvPr>
+            <p:ph type="sldImg" idx="2"/>
+          </p:nvPr>
+        </p:nvSpPr>
+        <p:spPr/>
+      </p:sp>
+      <p:sp>
+        <p:nvSpPr>
+          <p:cNvPr id="3" name="Notes Placeholder 2"/>
+          <p:cNvSpPr>
+            <a:spLocks noGrp="1"/>
+          </p:cNvSpPr>
+          <p:nvPr>
+            <p:ph type="body" idx="3" sz="quarter"/>
+          </p:nvPr>
+        </p:nvSpPr>
+        <p:spPr/>
+        <p:txBody>
+          <a:bodyPr/>
+          <a:lstStyle/>
+          <a:p>
+            <a:r>
+              <a:t>LA LÍNEA BASE Y LOS CUATRO CRITERIOS DE VIABILIDAD</a:t>
+            </a:r>
+          </a:p>
+          <a:p/>
+          <a:p>
+            <a:r>
+              <a:t>La línea base es la exigencia que más resistencia genera y la que más valor tiene. Es una cifra sobre el problema como está hoy, antes de que el equipo toque nada, y su función es simple: sin ella no hay forma de saber si el proyecto sirvió. En la Clase 16 el informe final va a pedir comparar, y un equipo sin línea base solo puede escribir «mejoramos el proceso», que es una afirmación vacía.</a:t>
+            </a:r>
+          </a:p>
+          <a:p/>
+          <a:p>
+            <a:r>
+              <a:t>Hay que quitarles de encima la idea de que medir requiere presupuesto o estadística. La línea base de un proyecto de este curso se consigue de tres maneras: preguntando a la persona que hace el trabajo, contando durante una semana, o midiendo con un cronómetro un caso. «La secretaria dedica unas dos horas diarias a confirmar citas por teléfono, según lo que ella misma estima» es una línea base perfectamente aceptable, siempre que se diga que es una estimación y de quién viene. La regla de honestidad es la de la sesión 5, aplicada de nuevo: cifra con método y fecha, o no va.</a:t>
+            </a:r>
+          </a:p>
+          <a:p/>
+          <a:p>
+            <a:r>
+              <a:t>Y hay un diagnóstico gratis escondido en esta exigencia: si el problema no admite ninguna cifra, está mal delimitado, y casi siempre es porque es demasiado grande. «La deserción estudiantil» no se puede medir con lo que tiene un equipo de primer semestre; «cuántos de los 30 compañeros de mi grupo no saben en qué semestre pierden el beneficio de la beca» sí. Bajar el problema hasta que se pueda contar algo es la manera más rápida de volverlo abordable.</a:t>
+            </a:r>
+          </a:p>
+          <a:p/>
+          <a:p>
+            <a:r>
+              <a:t>Los cuatro criterios son un filtro y hay que aplicarlos en voz alta a cada problema propuesto, uno por uno. *Abordable* con navegador y herramientas gratuitas: nada que exija comprar equipos, contratar servicios de pago o conseguir permisos institucionales que no van a llegar en un semestre. *Medible*: existe la cifra. *Con acceso a los actores*: pueden hablar esta semana con alguien que vive el problema, sin trámites; este criterio es el que descarta más propuestas y hay que ser firme, porque un proyecto sobre una entidad a la que nadie puede preguntarle nada termina siendo un ejercicio de imaginación con aspecto de proyecto. *Con dueño del problema*: hay una persona o un grupo concreto al que le duele y que reconocería la mejora; si el afectado es «la sociedad», no hay a quién mostrarle el resultado en la Clase 15.</a:t>
+            </a:r>
+          </a:p>
+          <a:p/>
+          <a:p>
+            <a:r>
+              <a:t>Una advertencia sobre el ánimo del grupo: aplicar estos criterios va a matar algunas ideas ambiciosas y eso frustra. Vale la pena decirles por qué se hace: es mejor resolver algo pequeño de verdad que simular algo grande, y en un primer semestre el objetivo es que aprendan a formular y a demostrar, no que salven la ciudad. Un proyecto pequeño y verificable saca mejor nota que uno grandioso e imposible, y hay que decirlo hoy, antes de que se enamoren de la idea.</a:t>
             </a:r>
           </a:p>
         </p:txBody>
@@ -584,7 +714,7 @@
           <a:lstStyle/>
           <a:p>
             <a:r>
-              <a:t>Lo valioso está en las causas de fondo: buscar el fiado página por página es algo que sí se puede cambiar en un semestre. Comprar otra caja no.</a:t>
+              <a:t>Fíjese que en ningún paso aparece «hacer una app». Si un equipo llega al problema con la solución ya puesta, devuélvalo al primer paso.</a:t>
             </a:r>
           </a:p>
         </p:txBody>
@@ -654,7 +784,7 @@
           <a:lstStyle/>
           <a:p>
             <a:r>
-              <a:t>La regla de honestidad: toda cifra lleva cómo se obtuvo y cuándo. Un «14 min» suelto no vale; «14 min, 10 clientes, viernes en la noche» sí.</a:t>
+              <a:t>Lo valioso está en las causas de fondo: buscar el fiado página por página es algo que sí se puede cambiar en un semestre. Comprar otra caja no.</a:t>
             </a:r>
           </a:p>
         </p:txBody>
@@ -724,7 +854,73 @@
           <a:lstStyle/>
           <a:p>
             <a:r>
-              <a:t>Si un equipo no puede ponerle una cifra a su problema, casi siempre es porque es demasiado grande. La salida es bajarlo hasta un lugar y un grupo de personas concretos.</a:t>
+              <a:t>TEXTO COMPLETO DE LA LÁMINA (se proyecta resumido):</a:t>
+            </a:r>
+          </a:p>
+          <a:p/>
+          <a:p>
+            <a:r>
+              <a:t>Qué es. Una cifra que describa el problema como está hoy, antes de que ustedes toquen nada. «La secretaria dedica unas 2 horas diarias a confirmar citas por teléfono.» «De 40 libros prestados al mes, unos 12 vuelven tarde.»</a:t>
+            </a:r>
+          </a:p>
+          <a:p/>
+          <a:p>
+            <a:r>
+              <a:t>Por qué es obligatoria. Sin línea base no se puede saber si el proyecto sirvió. Un informe final que dice «mejoramos el proceso» no demuestra nada; uno que dice «pasó de 2 horas a 20 minutos» sí. En la Clase 16 se les va a pedir exactamente eso.</a:t>
+            </a:r>
+          </a:p>
+          <a:p/>
+          <a:p>
+            <a:r>
+              <a:t>Cómo se consigue sin presupuesto. Preguntando, contando y midiendo con un cronómetro. Tres preguntas a la persona que hace el trabajo, un conteo de una semana, o el tiempo de un caso medido a mano. No hace falta una encuesta científica: hace falta un número honesto y decir cómo se obtuvo.</a:t>
+            </a:r>
+          </a:p>
+          <a:p/>
+          <a:p>
+            <a:r>
+              <a:t>La regla de honestidad. Toda cifra va con cómo se obtuvo y cuándo. Si es una estimación, se escribe «estimado». Una cifra inventada es peor que ninguna, porque el resto del proyecto se apoya en ella.</a:t>
+            </a:r>
+          </a:p>
+          <a:p/>
+          <a:p>
+            <a:r>
+              <a:t>Si el problema no tiene cifra posible, es señal de que está mal delimitado: casi siempre es demasiado grande. Bájenlo hasta que se pueda contar algo.</a:t>
+            </a:r>
+          </a:p>
+          <a:p/>
+          <a:p>
+            <a:r>
+              <a:t>LA LÍNEA BASE Y LOS CUATRO CRITERIOS DE VIABILIDAD</a:t>
+            </a:r>
+          </a:p>
+          <a:p/>
+          <a:p>
+            <a:r>
+              <a:t>La línea base es la exigencia que más resistencia genera y la que más valor tiene. Es una cifra sobre el problema como está hoy, antes de que el equipo toque nada, y su función es simple: sin ella no hay forma de saber si el proyecto sirvió. En la Clase 16 el informe final va a pedir comparar, y un equipo sin línea base solo puede escribir «mejoramos el proceso», que es una afirmación vacía.</a:t>
+            </a:r>
+          </a:p>
+          <a:p/>
+          <a:p>
+            <a:r>
+              <a:t>Hay que quitarles de encima la idea de que medir requiere presupuesto o estadística. La línea base de un proyecto de este curso se consigue de tres maneras: preguntando a la persona que hace el trabajo, contando durante una semana, o midiendo con un cronómetro un caso. «La secretaria dedica unas dos horas diarias a confirmar citas por teléfono, según lo que ella misma estima» es una línea base perfectamente aceptable, siempre que se diga que es una estimación y de quién viene. La regla de honestidad es la de la sesión 5, aplicada de nuevo: cifra con método y fecha, o no va.</a:t>
+            </a:r>
+          </a:p>
+          <a:p/>
+          <a:p>
+            <a:r>
+              <a:t>Y hay un diagnóstico gratis escondido en esta exigencia: si el problema no admite ninguna cifra, está mal delimitado, y casi siempre es porque es demasiado grande. «La deserción estudiantil» no se puede medir con lo que tiene un equipo de primer semestre; «cuántos de los 30 compañeros de mi grupo no saben en qué semestre pierden el beneficio de la beca» sí. Bajar el problema hasta que se pueda contar algo es la manera más rápida de volverlo abordable.</a:t>
+            </a:r>
+          </a:p>
+          <a:p/>
+          <a:p>
+            <a:r>
+              <a:t>Los cuatro criterios son un filtro y hay que aplicarlos en voz alta a cada problema propuesto, uno por uno. *Abordable* con navegador y herramientas gratuitas: nada que exija comprar equipos, contratar servicios de pago o conseguir permisos institucionales que no van a llegar en un semestre. *Medible*: existe la cifra. *Con acceso a los actores*: pueden hablar esta semana con alguien que vive el problema, sin trámites; este criterio es el que descarta más propuestas y hay que ser firme, porque un proyecto sobre una entidad a la que nadie puede preguntarle nada termina siendo un ejercicio de imaginación con aspecto de proyecto. *Con dueño del problema*: hay una persona o un grupo concreto al que le duele y que reconocería la mejora; si el afectado es «la sociedad», no hay a quién mostrarle el resultado en la Clase 15.</a:t>
+            </a:r>
+          </a:p>
+          <a:p/>
+          <a:p>
+            <a:r>
+              <a:t>Una advertencia sobre el ánimo del grupo: aplicar estos criterios va a matar algunas ideas ambiciosas y eso frustra. Vale la pena decirles por qué se hace: es mejor resolver algo pequeño de verdad que simular algo grande, y en un primer semestre el objetivo es que aprendan a formular y a demostrar, no que salven la ciudad. Un proyecto pequeño y verificable saca mejor nota que uno grandioso e imposible, y hay que decirlo hoy, antes de que se enamoren de la idea.</a:t>
             </a:r>
           </a:p>
         </p:txBody>
@@ -794,25 +990,7 @@
           <a:lstStyle/>
           <a:p>
             <a:r>
-              <a:t>LA PREGUNTA DE ENTRADA: LA SOLUCIÓN DISFRAZADA DE PROBLEMA</a:t>
-            </a:r>
-          </a:p>
-          <a:p/>
-          <a:p>
-            <a:r>
-              <a:t>«En el barrio falta una app» es la frase que un profesor de primer semestre va a oír docenas de veces, y es el error más costoso del curso porque no se ve: parece un problema, tiene sujeto, tiene carencia, y sin embargo ya trae la solución adentro. Si el problema es «falta una app», entonces cualquier app resuelve el problema, y el proyecto se convierte en un ejercicio de construir algo sin saber para qué.</a:t>
-            </a:r>
-          </a:p>
-          <a:p/>
-          <a:p>
-            <a:r>
-              <a:t>La prueba que conviene enseñar es de una sola pregunta y sirve para toda la vida: ¿esto se podría resolver sin ninguna app? Si la respuesta es sí —y casi siempre lo es—, entonces el problema es otro y hay que buscarlo. Si el problema verdadero es que la gente no sabe si el libro que necesita está disponible, eso se puede resolver con una app, con una lista pegada en la puerta o con un número de WhatsApp. Que existan varias soluciones posibles es la señal de que el problema está bien escrito.</a:t>
-            </a:r>
-          </a:p>
-          <a:p/>
-          <a:p>
-            <a:r>
-              <a:t>Recoja las respuestas del muro en los diez minutos de apertura y no las corrija: en el minuto 12, con la primera diapositiva, van a ver ellos mismos que casi todo lo que escribieron era un síntoma o una solución.</a:t>
+              <a:t>La regla de honestidad: toda cifra lleva cómo se obtuvo y cuándo. Un «14 min» suelto no vale; «14 min, 10 clientes, viernes en la noche» sí.</a:t>
             </a:r>
           </a:p>
         </p:txBody>
@@ -882,31 +1060,7 @@
           <a:lstStyle/>
           <a:p>
             <a:r>
-              <a:t>LAS TRES COSAS QUE SE CONFUNDEN Y CÓMO SE ESCRIBE UN PROBLEMA</a:t>
-            </a:r>
-          </a:p>
-          <a:p/>
-          <a:p>
-            <a:r>
-              <a:t>El síntoma es la señal visible: la queja, la demora, la pérdida. «La gente se queja del servicio» es un síntoma perfecto y un problema inservible, porque no dice de qué se queja ni qué no puede hacer. Los síntomas son útiles —son la pista que lleva al problema— pero atacar un síntoma produce soluciones cosméticas: si el síntoma es que la fila es larga, poner sillas mejora la fila y no toca el problema.</a:t>
-            </a:r>
-          </a:p>
-          <a:p/>
-          <a:p>
-            <a:r>
-              <a:t>La solución disfrazada es la más peligrosa porque se ve profesional. «Falta un sistema», «hay que digitalizar el proceso», «queremos hacerlo con IA». Las tres eligen la herramienta antes de saber qué se va a resolver, y cierran el análisis: una vez que el equipo decidió que va a hacer una app con IA, va a interpretar cualquier hallazgo como confirmación.</a:t>
-            </a:r>
-          </a:p>
-          <a:p/>
-          <a:p>
-            <a:r>
-              <a:t>El juicio es la tercera y la más común en primer semestre: «no hay tecnología en el negocio», «el proceso es muy anticuado». Son opiniones sobre un estado de cosas y no dicen a quién le cuesta qué. Un negocio sin tecnología puede estar funcionando perfectamente; la falta de tecnología no es un problema por sí misma, y esta es una idea que hay que decir en voz alta en un curso de ingeniería de sistemas, porque va contra el reflejo del gremio.</a:t>
-            </a:r>
-          </a:p>
-          <a:p/>
-          <a:p>
-            <a:r>
-              <a:t>La fórmula del enunciado, y conviene dictarla para que la copien: *a QUIÉN le pasa QUÉ, con qué CONSECUENCIA*, más una cifra. Ejemplo bien escrito: «los usuarios de la biblioteca del barrio no saben si un libro está disponible antes de ir, así que hacen viajes en vano; de cada diez visitas, unas cuatro terminan sin préstamo». Tiene sujeto (los usuarios), tiene el qué (no saben la disponibilidad), tiene la consecuencia (viajes en vano) y tiene una cifra. Y no menciona ninguna tecnología, que es lo que deja el espacio para diseñar.</a:t>
+              <a:t>Si un equipo no puede ponerle una cifra a su problema, casi siempre es porque es demasiado grande. La salida es bajarlo hasta un lugar y un grupo de personas concretos.</a:t>
             </a:r>
           </a:p>
         </p:txBody>
@@ -976,37 +1130,25 @@
           <a:lstStyle/>
           <a:p>
             <a:r>
-              <a:t>EL ÁRBOL DEL PROBLEMA: LA HERRAMIENTA QUE EVITA LAS SOLUCIONES COSMÉTICAS</a:t>
+              <a:t>LA PREGUNTA DE ENTRADA: LA SOLUCIÓN DISFRAZADA DE PROBLEMA</a:t>
             </a:r>
           </a:p>
           <a:p/>
           <a:p>
             <a:r>
-              <a:t>El árbol de problemas es una técnica vieja y muy usada en formulación de proyectos, y para primer semestre tiene una virtud enorme: es un dibujo, así que se puede hacer en quince minutos y se puede discutir señalando con el dedo.</a:t>
+              <a:t>«En el barrio falta una app» es la frase que un profesor de primer semestre va a oír docenas de veces, y es el error más costoso del curso porque no se ve: parece un problema, tiene sujeto, tiene carencia, y sin embargo ya trae la solución adentro. Si el problema es «falta una app», entonces cualquier app resuelve el problema, y el proyecto se convierte en un ejercicio de construir algo sin saber para qué.</a:t>
             </a:r>
           </a:p>
           <a:p/>
           <a:p>
             <a:r>
-              <a:t>Se dibuja con el problema en el tronco, una sola frase. Hacia arriba, las ramas son los efectos: lo que se ve, lo que la gente reporta, lo que duele. Hacia abajo, las raíces son las causas, y hay dos niveles: las causas directas (por qué ocurre el problema) y las causas de fondo (por qué ocurre cada causa). Se dibuja de arriba hacia abajo y se lee de abajo hacia arriba, porque así se ve la cadena completa: esta causa de fondo produce esta causa, que produce el problema, que produce estos efectos.</a:t>
+              <a:t>La prueba que conviene enseñar es de una sola pregunta y sirve para toda la vida: ¿esto se podría resolver sin ninguna app? Si la respuesta es sí —y casi siempre lo es—, entonces el problema es otro y hay que buscarlo. Si el problema verdadero es que la gente no sabe si el libro que necesita está disponible, eso se puede resolver con una app, con una lista pegada en la puerta o con un número de WhatsApp. Que existan varias soluciones posibles es la señal de que el problema está bien escrito.</a:t>
             </a:r>
           </a:p>
           <a:p/>
           <a:p>
             <a:r>
-              <a:t>La regla que hay que repetir hasta el cansancio: el proyecto ataca una causa, no una rama. Si el equipo diseña para los efectos, produce algo que alivia la molestia y deja el problema intacto. Y la segunda regla, práctica: dos o tres causas directas, no diez. Un árbol con diez raíces no es un análisis, es una lista de todo lo que se les ocurrió, y con eso no se puede decidir.</a:t>
-            </a:r>
-          </a:p>
-          <a:p/>
-          <a:p>
-            <a:r>
-              <a:t>El momento de aprendizaje real ocurre en el segundo nivel de raíces, y conviene provocarlo en las salas: cuando el equipo baja de «no hay un registro actualizado» a «el registro se actualiza a mano al final del día y nadie tiene tiempo», ahí aparece por primera vez algo que un estudiante de primer semestre puede efectivamente cambiar en un semestre. Antes de ese nivel, todo se ve demasiado grande.</a:t>
-            </a:r>
-          </a:p>
-          <a:p/>
-          <a:p>
-            <a:r>
-              <a:t>Un detalle metodológico que ahorra discusiones: si una causa no se puede afectar con nada que el equipo pueda hacer —el presupuesto del municipio, la cultura ciudadana, la ley—, se dibuja igual, pero se marca. Se llama restricción y no es una derrota: es información. Un proyecto que sabe qué no puede cambiar es más serio que uno que promete cambiarlo todo.</a:t>
+              <a:t>Recoja las respuestas del muro en los diez minutos de apertura y no las corrija: en el minuto 12, con la primera diapositiva, van a ver ellos mismos que casi todo lo que escribieron era un síntoma o una solución.</a:t>
             </a:r>
           </a:p>
         </p:txBody>
@@ -1076,37 +1218,31 @@
           <a:lstStyle/>
           <a:p>
             <a:r>
-              <a:t>LA LÍNEA BASE Y LOS CUATRO CRITERIOS DE VIABILIDAD</a:t>
+              <a:t>LAS TRES COSAS QUE SE CONFUNDEN Y CÓMO SE ESCRIBE UN PROBLEMA</a:t>
             </a:r>
           </a:p>
           <a:p/>
           <a:p>
             <a:r>
-              <a:t>La línea base es la exigencia que más resistencia genera y la que más valor tiene. Es una cifra sobre el problema como está hoy, antes de que el equipo toque nada, y su función es simple: sin ella no hay forma de saber si el proyecto sirvió. En la Clase 16 el informe final va a pedir comparar, y un equipo sin línea base solo puede escribir «mejoramos el proceso», que es una afirmación vacía.</a:t>
+              <a:t>El síntoma es la señal visible: la queja, la demora, la pérdida. «La gente se queja del servicio» es un síntoma perfecto y un problema inservible, porque no dice de qué se queja ni qué no puede hacer. Los síntomas son útiles —son la pista que lleva al problema— pero atacar un síntoma produce soluciones cosméticas: si el síntoma es que la fila es larga, poner sillas mejora la fila y no toca el problema.</a:t>
             </a:r>
           </a:p>
           <a:p/>
           <a:p>
             <a:r>
-              <a:t>Hay que quitarles de encima la idea de que medir requiere presupuesto o estadística. La línea base de un proyecto de este curso se consigue de tres maneras: preguntando a la persona que hace el trabajo, contando durante una semana, o midiendo con un cronómetro un caso. «La secretaria dedica unas dos horas diarias a confirmar citas por teléfono, según lo que ella misma estima» es una línea base perfectamente aceptable, siempre que se diga que es una estimación y de quién viene. La regla de honestidad es la de la sesión 5, aplicada de nuevo: cifra con método y fecha, o no va.</a:t>
+              <a:t>La solución disfrazada es la más peligrosa porque se ve profesional. «Falta un sistema», «hay que digitalizar el proceso», «queremos hacerlo con IA». Las tres eligen la herramienta antes de saber qué se va a resolver, y cierran el análisis: una vez que el equipo decidió que va a hacer una app con IA, va a interpretar cualquier hallazgo como confirmación.</a:t>
             </a:r>
           </a:p>
           <a:p/>
           <a:p>
             <a:r>
-              <a:t>Y hay un diagnóstico gratis escondido en esta exigencia: si el problema no admite ninguna cifra, está mal delimitado, y casi siempre es porque es demasiado grande. «La deserción estudiantil» no se puede medir con lo que tiene un equipo de primer semestre; «cuántos de los 30 compañeros de mi grupo no saben en qué semestre pierden el beneficio de la beca» sí. Bajar el problema hasta que se pueda contar algo es la manera más rápida de volverlo abordable.</a:t>
+              <a:t>El juicio es la tercera y la más común en primer semestre: «no hay tecnología en el negocio», «el proceso es muy anticuado». Son opiniones sobre un estado de cosas y no dicen a quién le cuesta qué. Un negocio sin tecnología puede estar funcionando perfectamente; la falta de tecnología no es un problema por sí misma, y esta es una idea que hay que decir en voz alta en un curso de ingeniería de sistemas, porque va contra el reflejo del gremio.</a:t>
             </a:r>
           </a:p>
           <a:p/>
           <a:p>
             <a:r>
-              <a:t>Los cuatro criterios son un filtro y hay que aplicarlos en voz alta a cada problema propuesto, uno por uno. *Abordable* con navegador y herramientas gratuitas: nada que exija comprar equipos, contratar servicios de pago o conseguir permisos institucionales que no van a llegar en un semestre. *Medible*: existe la cifra. *Con acceso a los actores*: pueden hablar esta semana con alguien que vive el problema, sin trámites; este criterio es el que descarta más propuestas y hay que ser firme, porque un proyecto sobre una entidad a la que nadie puede preguntarle nada termina siendo un ejercicio de imaginación con aspecto de proyecto. *Con dueño del problema*: hay una persona o un grupo concreto al que le duele y que reconocería la mejora; si el afectado es «la sociedad», no hay a quién mostrarle el resultado en la Clase 15.</a:t>
-            </a:r>
-          </a:p>
-          <a:p/>
-          <a:p>
-            <a:r>
-              <a:t>Una advertencia sobre el ánimo del grupo: aplicar estos criterios va a matar algunas ideas ambiciosas y eso frustra. Vale la pena decirles por qué se hace: es mejor resolver algo pequeño de verdad que simular algo grande, y en un primer semestre el objetivo es que aprendan a formular y a demostrar, no que salven la ciudad. Un proyecto pequeño y verificable saca mejor nota que uno grandioso e imposible, y hay que decirlo hoy, antes de que se enamoren de la idea.</a:t>
+              <a:t>La fórmula del enunciado, y conviene dictarla para que la copien: *a QUIÉN le pasa QUÉ, con qué CONSECUENCIA*, más una cifra. Ejemplo bien escrito: «los usuarios de la biblioteca del barrio no saben si un libro está disponible antes de ir, así que hacen viajes en vano; de cada diez visitas, unas cuatro terminan sin préstamo». Tiene sujeto (los usuarios), tiene el qué (no saben la disponibilidad), tiene la consecuencia (viajes en vano) y tiene una cifra. Y no menciona ninguna tecnología, que es lo que deja el espacio para diseñar.</a:t>
             </a:r>
           </a:p>
         </p:txBody>
@@ -1176,37 +1312,37 @@
           <a:lstStyle/>
           <a:p>
             <a:r>
-              <a:t>LA LÍNEA BASE Y LOS CUATRO CRITERIOS DE VIABILIDAD</a:t>
+              <a:t>EL ÁRBOL DEL PROBLEMA: LA HERRAMIENTA QUE EVITA LAS SOLUCIONES COSMÉTICAS</a:t>
             </a:r>
           </a:p>
           <a:p/>
           <a:p>
             <a:r>
-              <a:t>La línea base es la exigencia que más resistencia genera y la que más valor tiene. Es una cifra sobre el problema como está hoy, antes de que el equipo toque nada, y su función es simple: sin ella no hay forma de saber si el proyecto sirvió. En la Clase 16 el informe final va a pedir comparar, y un equipo sin línea base solo puede escribir «mejoramos el proceso», que es una afirmación vacía.</a:t>
+              <a:t>El árbol de problemas es una técnica vieja y muy usada en formulación de proyectos, y para primer semestre tiene una virtud enorme: es un dibujo, así que se puede hacer en quince minutos y se puede discutir señalando con el dedo.</a:t>
             </a:r>
           </a:p>
           <a:p/>
           <a:p>
             <a:r>
-              <a:t>Hay que quitarles de encima la idea de que medir requiere presupuesto o estadística. La línea base de un proyecto de este curso se consigue de tres maneras: preguntando a la persona que hace el trabajo, contando durante una semana, o midiendo con un cronómetro un caso. «La secretaria dedica unas dos horas diarias a confirmar citas por teléfono, según lo que ella misma estima» es una línea base perfectamente aceptable, siempre que se diga que es una estimación y de quién viene. La regla de honestidad es la de la sesión 5, aplicada de nuevo: cifra con método y fecha, o no va.</a:t>
+              <a:t>Se dibuja con el problema en el tronco, una sola frase. Hacia arriba, las ramas son los efectos: lo que se ve, lo que la gente reporta, lo que duele. Hacia abajo, las raíces son las causas, y hay dos niveles: las causas directas (por qué ocurre el problema) y las causas de fondo (por qué ocurre cada causa). Se dibuja de arriba hacia abajo y se lee de abajo hacia arriba, porque así se ve la cadena completa: esta causa de fondo produce esta causa, que produce el problema, que produce estos efectos.</a:t>
             </a:r>
           </a:p>
           <a:p/>
           <a:p>
             <a:r>
-              <a:t>Y hay un diagnóstico gratis escondido en esta exigencia: si el problema no admite ninguna cifra, está mal delimitado, y casi siempre es porque es demasiado grande. «La deserción estudiantil» no se puede medir con lo que tiene un equipo de primer semestre; «cuántos de los 30 compañeros de mi grupo no saben en qué semestre pierden el beneficio de la beca» sí. Bajar el problema hasta que se pueda contar algo es la manera más rápida de volverlo abordable.</a:t>
+              <a:t>La regla que hay que repetir hasta el cansancio: el proyecto ataca una causa, no una rama. Si el equipo diseña para los efectos, produce algo que alivia la molestia y deja el problema intacto. Y la segunda regla, práctica: dos o tres causas directas, no diez. Un árbol con diez raíces no es un análisis, es una lista de todo lo que se les ocurrió, y con eso no se puede decidir.</a:t>
             </a:r>
           </a:p>
           <a:p/>
           <a:p>
             <a:r>
-              <a:t>Los cuatro criterios son un filtro y hay que aplicarlos en voz alta a cada problema propuesto, uno por uno. *Abordable* con navegador y herramientas gratuitas: nada que exija comprar equipos, contratar servicios de pago o conseguir permisos institucionales que no van a llegar en un semestre. *Medible*: existe la cifra. *Con acceso a los actores*: pueden hablar esta semana con alguien que vive el problema, sin trámites; este criterio es el que descarta más propuestas y hay que ser firme, porque un proyecto sobre una entidad a la que nadie puede preguntarle nada termina siendo un ejercicio de imaginación con aspecto de proyecto. *Con dueño del problema*: hay una persona o un grupo concreto al que le duele y que reconocería la mejora; si el afectado es «la sociedad», no hay a quién mostrarle el resultado en la Clase 15.</a:t>
+              <a:t>El momento de aprendizaje real ocurre en el segundo nivel de raíces, y conviene provocarlo en las salas: cuando el equipo baja de «no hay un registro actualizado» a «el registro se actualiza a mano al final del día y nadie tiene tiempo», ahí aparece por primera vez algo que un estudiante de primer semestre puede efectivamente cambiar en un semestre. Antes de ese nivel, todo se ve demasiado grande.</a:t>
             </a:r>
           </a:p>
           <a:p/>
           <a:p>
             <a:r>
-              <a:t>Una advertencia sobre el ánimo del grupo: aplicar estos criterios va a matar algunas ideas ambiciosas y eso frustra. Vale la pena decirles por qué se hace: es mejor resolver algo pequeño de verdad que simular algo grande, y en un primer semestre el objetivo es que aprendan a formular y a demostrar, no que salven la ciudad. Un proyecto pequeño y verificable saca mejor nota que uno grandioso e imposible, y hay que decirlo hoy, antes de que se enamoren de la idea.</a:t>
+              <a:t>Un detalle metodológico que ahorra discusiones: si una causa no se puede afectar con nada que el equipo pueda hacer —el presupuesto del municipio, la cultura ciudadana, la ley—, se dibuja igual, pero se marca. Se llama restricción y no es una derrota: es información. Un proyecto que sabe qué no puede cambiar es más serio que uno que promete cambiarlo todo.</a:t>
             </a:r>
           </a:p>
         </p:txBody>
@@ -4737,14 +4873,118 @@
       </p:sp>
       <p:sp>
         <p:nvSpPr>
-          <p:cNvPr id="5" name="TextBox 4"/>
+          <p:cNvPr id="5" name="Rounded Rectangle 4"/>
+          <p:cNvSpPr/>
+          <p:nvPr/>
+        </p:nvSpPr>
+        <p:spPr>
+          <a:xfrm>
+            <a:off x="5797149" y="1573813"/>
+            <a:ext cx="6010497" cy="4057845"/>
+          </a:xfrm>
+          <a:prstGeom prst="roundRect">
+            <a:avLst>
+              <a:gd name="adj" fmla="val 4000"/>
+            </a:avLst>
+          </a:prstGeom>
+          <a:solidFill>
+            <a:srgbClr val="E8EEF4"/>
+          </a:solidFill>
+          <a:ln>
+            <a:noFill/>
+          </a:ln>
+        </p:spPr>
+        <p:style>
+          <a:lnRef idx="1">
+            <a:schemeClr val="accent1"/>
+          </a:lnRef>
+          <a:fillRef idx="3">
+            <a:schemeClr val="accent1"/>
+          </a:fillRef>
+          <a:effectRef idx="2">
+            <a:schemeClr val="accent1"/>
+          </a:effectRef>
+          <a:fontRef idx="minor">
+            <a:schemeClr val="lt1"/>
+          </a:fontRef>
+        </p:style>
+        <p:txBody>
+          <a:bodyPr rtlCol="0" anchor="ctr"/>
+          <a:lstStyle/>
+          <a:p>
+            <a:pPr algn="ctr"/>
+          </a:p>
+        </p:txBody>
+      </p:sp>
+      <p:pic>
+        <p:nvPicPr>
+          <p:cNvPr id="6" name="Picture 5" descr="smartphone-stopwatch-timer-hand.jpg"/>
+          <p:cNvPicPr>
+            <a:picLocks noChangeAspect="1"/>
+          </p:cNvPicPr>
+          <p:nvPr/>
+        </p:nvPicPr>
+        <p:blipFill>
+          <a:blip r:embed="rId2"/>
+          <a:stretch>
+            <a:fillRect/>
+          </a:stretch>
+        </p:blipFill>
+        <p:spPr>
+          <a:xfrm>
+            <a:off x="5870301" y="1646965"/>
+            <a:ext cx="5864193" cy="3911541"/>
+          </a:xfrm>
+          <a:prstGeom prst="rect">
+            <a:avLst/>
+          </a:prstGeom>
+        </p:spPr>
+      </p:pic>
+      <p:sp>
+        <p:nvSpPr>
+          <p:cNvPr id="7" name="TextBox 6"/>
           <p:cNvSpPr txBox="1"/>
           <p:nvPr/>
         </p:nvSpPr>
         <p:spPr>
           <a:xfrm>
-            <a:off x="457200" y="1170432"/>
-            <a:ext cx="11277295" cy="5230368"/>
+            <a:off x="5870301" y="5961888"/>
+            <a:ext cx="5864193" cy="320040"/>
+          </a:xfrm>
+          <a:prstGeom prst="rect">
+            <a:avLst/>
+          </a:prstGeom>
+          <a:noFill/>
+        </p:spPr>
+        <p:txBody>
+          <a:bodyPr wrap="square">
+            <a:spAutoFit/>
+          </a:bodyPr>
+          <a:lstStyle/>
+          <a:p>
+            <a:pPr algn="ctr"/>
+            <a:r>
+              <a:rPr sz="1100" b="0" i="1">
+                <a:solidFill>
+                  <a:srgbClr val="666666"/>
+                </a:solidFill>
+                <a:latin typeface="Calibri"/>
+              </a:rPr>
+              <a:t>Foto: Castorly Stock · Pexels</a:t>
+            </a:r>
+          </a:p>
+        </p:txBody>
+      </p:sp>
+      <p:sp>
+        <p:nvSpPr>
+          <p:cNvPr id="8" name="TextBox 7"/>
+          <p:cNvSpPr txBox="1"/>
+          <p:nvPr/>
+        </p:nvSpPr>
+        <p:spPr>
+          <a:xfrm>
+            <a:off x="457200" y="1353312"/>
+            <a:ext cx="5093061" cy="5047488"/>
           </a:xfrm>
           <a:prstGeom prst="rect">
             <a:avLst/>
@@ -4892,61 +5132,11 @@
               <a:t>.</a:t>
             </a:r>
           </a:p>
-          <a:p>
-            <a:pPr>
-              <a:spcAft>
-                <a:spcPts val="800"/>
-              </a:spcAft>
-            </a:pPr>
-            <a:r>
-              <a:rPr sz="2000" b="0" i="0">
-                <a:solidFill>
-                  <a:srgbClr val="333333"/>
-                </a:solidFill>
-                <a:latin typeface="Calibri"/>
-              </a:rPr>
-              <a:t>–   Al final del semestre se mide </a:t>
-            </a:r>
-            <a:r>
-              <a:rPr sz="2000" b="1" i="0">
-                <a:solidFill>
-                  <a:srgbClr val="333333"/>
-                </a:solidFill>
-                <a:latin typeface="Calibri"/>
-              </a:rPr>
-              <a:t>igual</a:t>
-            </a:r>
-            <a:r>
-              <a:rPr sz="2000" b="0" i="0">
-                <a:solidFill>
-                  <a:srgbClr val="333333"/>
-                </a:solidFill>
-                <a:latin typeface="Calibri"/>
-              </a:rPr>
-              <a:t> y se compara. Así se sabe si el proyecto sirvió.</a:t>
-            </a:r>
-          </a:p>
-          <a:p>
-            <a:pPr>
-              <a:spcAft>
-                <a:spcPts val="800"/>
-              </a:spcAft>
-            </a:pPr>
-            <a:r>
-              <a:rPr sz="2000" b="0" i="0">
-                <a:solidFill>
-                  <a:srgbClr val="333333"/>
-                </a:solidFill>
-                <a:latin typeface="Calibri"/>
-              </a:rPr>
-              <a:t>–   Sin esa cifra, «mejoramos la atención» no se puede comprobar.</a:t>
-            </a:r>
-          </a:p>
-        </p:txBody>
-      </p:sp>
-      <p:sp>
-        <p:nvSpPr>
-          <p:cNvPr id="6" name="TextBox 5"/>
+        </p:txBody>
+      </p:sp>
+      <p:sp>
+        <p:nvSpPr>
+          <p:cNvPr id="9" name="TextBox 8"/>
           <p:cNvSpPr txBox="1"/>
           <p:nvPr/>
         </p:nvSpPr>
@@ -6382,9 +6572,57 @@
           </a:p>
         </p:txBody>
       </p:sp>
-      <p:sp>
-        <p:nvSpPr>
-          <p:cNvPr id="13" name="TextBox 12"/>
+      <p:pic>
+        <p:nvPicPr>
+          <p:cNvPr id="13" name="Picture 12" descr="sello_mal.png"/>
+          <p:cNvPicPr>
+            <a:picLocks noChangeAspect="1"/>
+          </p:cNvPicPr>
+          <p:nvPr/>
+        </p:nvPicPr>
+        <p:blipFill>
+          <a:blip r:embed="rId2"/>
+          <a:stretch>
+            <a:fillRect/>
+          </a:stretch>
+        </p:blipFill>
+        <p:spPr>
+          <a:xfrm>
+            <a:off x="566928" y="1316736"/>
+            <a:ext cx="393192" cy="393192"/>
+          </a:xfrm>
+          <a:prstGeom prst="rect">
+            <a:avLst/>
+          </a:prstGeom>
+        </p:spPr>
+      </p:pic>
+      <p:pic>
+        <p:nvPicPr>
+          <p:cNvPr id="14" name="Picture 13" descr="sello_bien.png"/>
+          <p:cNvPicPr>
+            <a:picLocks noChangeAspect="1"/>
+          </p:cNvPicPr>
+          <p:nvPr/>
+        </p:nvPicPr>
+        <p:blipFill>
+          <a:blip r:embed="rId3"/>
+          <a:stretch>
+            <a:fillRect/>
+          </a:stretch>
+        </p:blipFill>
+        <p:spPr>
+          <a:xfrm>
+            <a:off x="6365595" y="1316736"/>
+            <a:ext cx="393192" cy="393192"/>
+          </a:xfrm>
+          <a:prstGeom prst="rect">
+            <a:avLst/>
+          </a:prstGeom>
+        </p:spPr>
+      </p:pic>
+      <p:sp>
+        <p:nvSpPr>
+          <p:cNvPr id="15" name="TextBox 14"/>
           <p:cNvSpPr txBox="1"/>
           <p:nvPr/>
         </p:nvSpPr>
@@ -7773,14 +8011,118 @@
       </p:sp>
       <p:sp>
         <p:nvSpPr>
-          <p:cNvPr id="5" name="TextBox 4"/>
+          <p:cNvPr id="5" name="Rounded Rectangle 4"/>
+          <p:cNvSpPr/>
+          <p:nvPr/>
+        </p:nvSpPr>
+        <p:spPr>
+          <a:xfrm>
+            <a:off x="5797149" y="1573813"/>
+            <a:ext cx="6010497" cy="4057845"/>
+          </a:xfrm>
+          <a:prstGeom prst="roundRect">
+            <a:avLst>
+              <a:gd name="adj" fmla="val 4000"/>
+            </a:avLst>
+          </a:prstGeom>
+          <a:solidFill>
+            <a:srgbClr val="E8EEF4"/>
+          </a:solidFill>
+          <a:ln>
+            <a:noFill/>
+          </a:ln>
+        </p:spPr>
+        <p:style>
+          <a:lnRef idx="1">
+            <a:schemeClr val="accent1"/>
+          </a:lnRef>
+          <a:fillRef idx="3">
+            <a:schemeClr val="accent1"/>
+          </a:fillRef>
+          <a:effectRef idx="2">
+            <a:schemeClr val="accent1"/>
+          </a:effectRef>
+          <a:fontRef idx="minor">
+            <a:schemeClr val="lt1"/>
+          </a:fontRef>
+        </p:style>
+        <p:txBody>
+          <a:bodyPr rtlCol="0" anchor="ctr"/>
+          <a:lstStyle/>
+          <a:p>
+            <a:pPr algn="ctr"/>
+          </a:p>
+        </p:txBody>
+      </p:sp>
+      <p:pic>
+        <p:nvPicPr>
+          <p:cNvPr id="6" name="Picture 5" descr="students-learning-laptops-classroom.jpg"/>
+          <p:cNvPicPr>
+            <a:picLocks noChangeAspect="1"/>
+          </p:cNvPicPr>
+          <p:nvPr/>
+        </p:nvPicPr>
+        <p:blipFill>
+          <a:blip r:embed="rId2"/>
+          <a:stretch>
+            <a:fillRect/>
+          </a:stretch>
+        </p:blipFill>
+        <p:spPr>
+          <a:xfrm>
+            <a:off x="5870301" y="1646965"/>
+            <a:ext cx="5864193" cy="3911541"/>
+          </a:xfrm>
+          <a:prstGeom prst="rect">
+            <a:avLst/>
+          </a:prstGeom>
+        </p:spPr>
+      </p:pic>
+      <p:sp>
+        <p:nvSpPr>
+          <p:cNvPr id="7" name="TextBox 6"/>
           <p:cNvSpPr txBox="1"/>
           <p:nvPr/>
         </p:nvSpPr>
         <p:spPr>
           <a:xfrm>
-            <a:off x="457200" y="1170432"/>
-            <a:ext cx="11277295" cy="5230368"/>
+            <a:off x="5870301" y="5961888"/>
+            <a:ext cx="5864193" cy="320040"/>
+          </a:xfrm>
+          <a:prstGeom prst="rect">
+            <a:avLst/>
+          </a:prstGeom>
+          <a:noFill/>
+        </p:spPr>
+        <p:txBody>
+          <a:bodyPr wrap="square">
+            <a:spAutoFit/>
+          </a:bodyPr>
+          <a:lstStyle/>
+          <a:p>
+            <a:pPr algn="ctr"/>
+            <a:r>
+              <a:rPr sz="1100" b="0" i="1">
+                <a:solidFill>
+                  <a:srgbClr val="666666"/>
+                </a:solidFill>
+                <a:latin typeface="Calibri"/>
+              </a:rPr>
+              <a:t>Foto: Mikhail Nilov · Pexels</a:t>
+            </a:r>
+          </a:p>
+        </p:txBody>
+      </p:sp>
+      <p:sp>
+        <p:nvSpPr>
+          <p:cNvPr id="8" name="TextBox 7"/>
+          <p:cNvSpPr txBox="1"/>
+          <p:nvPr/>
+        </p:nvSpPr>
+        <p:spPr>
+          <a:xfrm>
+            <a:off x="457200" y="1353312"/>
+            <a:ext cx="5093061" cy="5047488"/>
           </a:xfrm>
           <a:prstGeom prst="rect">
             <a:avLst/>
@@ -7964,45 +8306,11 @@
               <a:t> con los cuatro criterios.</a:t>
             </a:r>
           </a:p>
-          <a:p>
-            <a:pPr>
-              <a:spcAft>
-                <a:spcPts val="800"/>
-              </a:spcAft>
-            </a:pPr>
-            <a:r>
-              <a:rPr sz="2000" b="0" i="0">
-                <a:solidFill>
-                  <a:srgbClr val="333333"/>
-                </a:solidFill>
-                <a:latin typeface="Calibri"/>
-              </a:rPr>
-              <a:t>–   Entregar la </a:t>
-            </a:r>
-            <a:r>
-              <a:rPr sz="2000" b="1" i="0">
-                <a:solidFill>
-                  <a:srgbClr val="333333"/>
-                </a:solidFill>
-                <a:latin typeface="Calibri"/>
-              </a:rPr>
-              <a:t>ficha del problema</a:t>
-            </a:r>
-            <a:r>
-              <a:rPr sz="2000" b="0" i="0">
-                <a:solidFill>
-                  <a:srgbClr val="333333"/>
-                </a:solidFill>
-                <a:latin typeface="Calibri"/>
-              </a:rPr>
-              <a:t> del proyecto del equipo.</a:t>
-            </a:r>
-          </a:p>
-        </p:txBody>
-      </p:sp>
-      <p:sp>
-        <p:nvSpPr>
-          <p:cNvPr id="6" name="TextBox 5"/>
+        </p:txBody>
+      </p:sp>
+      <p:sp>
+        <p:nvSpPr>
+          <p:cNvPr id="9" name="TextBox 8"/>
           <p:cNvSpPr txBox="1"/>
           <p:nvPr/>
         </p:nvSpPr>
@@ -9047,9 +9355,57 @@
           </a:p>
         </p:txBody>
       </p:sp>
-      <p:sp>
-        <p:nvSpPr>
-          <p:cNvPr id="14" name="TextBox 13"/>
+      <p:pic>
+        <p:nvPicPr>
+          <p:cNvPr id="14" name="Picture 13" descr="sello_mal.png"/>
+          <p:cNvPicPr>
+            <a:picLocks noChangeAspect="1"/>
+          </p:cNvPicPr>
+          <p:nvPr/>
+        </p:nvPicPr>
+        <p:blipFill>
+          <a:blip r:embed="rId2"/>
+          <a:stretch>
+            <a:fillRect/>
+          </a:stretch>
+        </p:blipFill>
+        <p:spPr>
+          <a:xfrm>
+            <a:off x="566928" y="1527048"/>
+            <a:ext cx="393192" cy="393192"/>
+          </a:xfrm>
+          <a:prstGeom prst="rect">
+            <a:avLst/>
+          </a:prstGeom>
+        </p:spPr>
+      </p:pic>
+      <p:pic>
+        <p:nvPicPr>
+          <p:cNvPr id="15" name="Picture 14" descr="sello_bien.png"/>
+          <p:cNvPicPr>
+            <a:picLocks noChangeAspect="1"/>
+          </p:cNvPicPr>
+          <p:nvPr/>
+        </p:nvPicPr>
+        <p:blipFill>
+          <a:blip r:embed="rId3"/>
+          <a:stretch>
+            <a:fillRect/>
+          </a:stretch>
+        </p:blipFill>
+        <p:spPr>
+          <a:xfrm>
+            <a:off x="6365595" y="1527048"/>
+            <a:ext cx="393192" cy="393192"/>
+          </a:xfrm>
+          <a:prstGeom prst="rect">
+            <a:avLst/>
+          </a:prstGeom>
+        </p:spPr>
+      </p:pic>
+      <p:sp>
+        <p:nvSpPr>
+          <p:cNvPr id="16" name="TextBox 15"/>
           <p:cNvSpPr txBox="1"/>
           <p:nvPr/>
         </p:nvSpPr>
@@ -9270,16 +9626,16 @@
         </p:nvSpPr>
         <p:spPr>
           <a:xfrm>
-            <a:off x="457200" y="1659636"/>
-            <a:ext cx="11277295" cy="1051560"/>
+            <a:off x="5934611" y="1399031"/>
+            <a:ext cx="5735574" cy="4617720"/>
           </a:xfrm>
           <a:prstGeom prst="roundRect">
             <a:avLst>
-              <a:gd name="adj" fmla="val 12000"/>
+              <a:gd name="adj" fmla="val 4000"/>
             </a:avLst>
           </a:prstGeom>
           <a:solidFill>
-            <a:srgbClr val="F2F2F2"/>
+            <a:srgbClr val="E8EEF4"/>
           </a:solidFill>
           <a:ln>
             <a:noFill/>
@@ -9307,61 +9663,147 @@
           </a:p>
         </p:txBody>
       </p:sp>
-      <p:sp>
-        <p:nvSpPr>
-          <p:cNvPr id="7" name="Rounded Rectangle 6"/>
-          <p:cNvSpPr/>
-          <p:nvPr/>
-        </p:nvSpPr>
-        <p:spPr>
-          <a:xfrm>
-            <a:off x="594360" y="1965960"/>
-            <a:ext cx="438912" cy="438912"/>
-          </a:xfrm>
-          <a:prstGeom prst="roundRect">
-            <a:avLst>
-              <a:gd name="adj" fmla="val 12000"/>
-            </a:avLst>
-          </a:prstGeom>
-          <a:solidFill>
-            <a:srgbClr val="095292"/>
-          </a:solidFill>
-          <a:ln>
-            <a:noFill/>
-          </a:ln>
-        </p:spPr>
-        <p:style>
-          <a:lnRef idx="1">
-            <a:schemeClr val="accent1"/>
-          </a:lnRef>
-          <a:fillRef idx="3">
-            <a:schemeClr val="accent1"/>
-          </a:fillRef>
-          <a:effectRef idx="2">
-            <a:schemeClr val="accent1"/>
-          </a:effectRef>
-          <a:fontRef idx="minor">
-            <a:schemeClr val="lt1"/>
-          </a:fontRef>
-        </p:style>
-        <p:txBody>
-          <a:bodyPr rtlCol="0" anchor="ctr"/>
+      <p:pic>
+        <p:nvPicPr>
+          <p:cNvPr id="7" name="Picture 6" descr="queja-problema-paso1.png"/>
+          <p:cNvPicPr>
+            <a:picLocks noChangeAspect="1"/>
+          </p:cNvPicPr>
+          <p:nvPr/>
+        </p:nvPicPr>
+        <p:blipFill>
+          <a:blip r:embed="rId2"/>
+          <a:stretch>
+            <a:fillRect/>
+          </a:stretch>
+        </p:blipFill>
+        <p:spPr>
+          <a:xfrm>
+            <a:off x="6007763" y="1472184"/>
+            <a:ext cx="5589270" cy="4471416"/>
+          </a:xfrm>
+          <a:prstGeom prst="rect">
+            <a:avLst/>
+          </a:prstGeom>
+        </p:spPr>
+      </p:pic>
+      <p:pic>
+        <p:nvPicPr>
+          <p:cNvPr id="8" name="Picture 7" descr="queja-problema-paso2.png"/>
+          <p:cNvPicPr>
+            <a:picLocks noChangeAspect="1"/>
+          </p:cNvPicPr>
+          <p:nvPr/>
+        </p:nvPicPr>
+        <p:blipFill>
+          <a:blip r:embed="rId3"/>
+          <a:stretch>
+            <a:fillRect/>
+          </a:stretch>
+        </p:blipFill>
+        <p:spPr>
+          <a:xfrm>
+            <a:off x="6007763" y="1472184"/>
+            <a:ext cx="5589270" cy="4471416"/>
+          </a:xfrm>
+          <a:prstGeom prst="rect">
+            <a:avLst/>
+          </a:prstGeom>
+        </p:spPr>
+      </p:pic>
+      <p:pic>
+        <p:nvPicPr>
+          <p:cNvPr id="9" name="Picture 8" descr="queja-problema-paso3.png"/>
+          <p:cNvPicPr>
+            <a:picLocks noChangeAspect="1"/>
+          </p:cNvPicPr>
+          <p:nvPr/>
+        </p:nvPicPr>
+        <p:blipFill>
+          <a:blip r:embed="rId4"/>
+          <a:stretch>
+            <a:fillRect/>
+          </a:stretch>
+        </p:blipFill>
+        <p:spPr>
+          <a:xfrm>
+            <a:off x="6007763" y="1472184"/>
+            <a:ext cx="5589270" cy="4471416"/>
+          </a:xfrm>
+          <a:prstGeom prst="rect">
+            <a:avLst/>
+          </a:prstGeom>
+        </p:spPr>
+      </p:pic>
+      <p:pic>
+        <p:nvPicPr>
+          <p:cNvPr id="10" name="Picture 9" descr="queja-problema-paso4.png"/>
+          <p:cNvPicPr>
+            <a:picLocks noChangeAspect="1"/>
+          </p:cNvPicPr>
+          <p:nvPr/>
+        </p:nvPicPr>
+        <p:blipFill>
+          <a:blip r:embed="rId5"/>
+          <a:stretch>
+            <a:fillRect/>
+          </a:stretch>
+        </p:blipFill>
+        <p:spPr>
+          <a:xfrm>
+            <a:off x="6007763" y="1472184"/>
+            <a:ext cx="5589270" cy="4471416"/>
+          </a:xfrm>
+          <a:prstGeom prst="rect">
+            <a:avLst/>
+          </a:prstGeom>
+        </p:spPr>
+      </p:pic>
+      <p:sp>
+        <p:nvSpPr>
+          <p:cNvPr id="18" name="TextBox 17"/>
+          <p:cNvSpPr txBox="1"/>
+          <p:nvPr/>
+        </p:nvSpPr>
+        <p:spPr>
+          <a:xfrm>
+            <a:off x="5870301" y="5961888"/>
+            <a:ext cx="5864193" cy="320040"/>
+          </a:xfrm>
+          <a:prstGeom prst="rect">
+            <a:avLst/>
+          </a:prstGeom>
+          <a:noFill/>
+        </p:spPr>
+        <p:txBody>
+          <a:bodyPr wrap="square">
+            <a:spAutoFit/>
+          </a:bodyPr>
           <a:lstStyle/>
           <a:p>
             <a:pPr algn="ctr"/>
-          </a:p>
-        </p:txBody>
-      </p:sp>
-      <p:sp>
-        <p:nvSpPr>
-          <p:cNvPr id="8" name="TextBox 7"/>
+            <a:r>
+              <a:rPr sz="1100" b="0" i="1">
+                <a:solidFill>
+                  <a:srgbClr val="666666"/>
+                </a:solidFill>
+                <a:latin typeface="Calibri"/>
+              </a:rPr>
+              <a:t>Clic para avanzar la animación</a:t>
+            </a:r>
+          </a:p>
+        </p:txBody>
+      </p:sp>
+      <p:sp>
+        <p:nvSpPr>
+          <p:cNvPr id="19" name="TextBox 18"/>
           <p:cNvSpPr txBox="1"/>
           <p:nvPr/>
         </p:nvSpPr>
         <p:spPr>
           <a:xfrm>
-            <a:off x="594360" y="1965960"/>
-            <a:ext cx="438912" cy="438912"/>
+            <a:off x="457200" y="1563624"/>
+            <a:ext cx="5093061" cy="4837176"/>
           </a:xfrm>
           <a:prstGeom prst="rect">
             <a:avLst/>
@@ -9369,604 +9811,169 @@
           <a:noFill/>
         </p:spPr>
         <p:txBody>
-          <a:bodyPr wrap="square" anchor="ctr"/>
-          <a:lstStyle/>
-          <a:p>
-            <a:pPr algn="ctr"/>
-            <a:r>
-              <a:rPr sz="1600" b="1" i="0">
-                <a:solidFill>
-                  <a:srgbClr val="FFFFFF"/>
-                </a:solidFill>
-                <a:latin typeface="Calibri"/>
-              </a:rPr>
-              <a:t>1</a:t>
-            </a:r>
-          </a:p>
-        </p:txBody>
-      </p:sp>
-      <p:sp>
-        <p:nvSpPr>
-          <p:cNvPr id="9" name="TextBox 8"/>
-          <p:cNvSpPr txBox="1"/>
-          <p:nvPr/>
-        </p:nvSpPr>
-        <p:spPr>
-          <a:xfrm>
-            <a:off x="1188720" y="1751076"/>
-            <a:ext cx="10271455" cy="886968"/>
-          </a:xfrm>
-          <a:prstGeom prst="rect">
-            <a:avLst/>
-          </a:prstGeom>
-          <a:noFill/>
-        </p:spPr>
-        <p:txBody>
-          <a:bodyPr wrap="square" anchor="ctr"/>
-          <a:lstStyle/>
-          <a:p>
-            <a:r>
-              <a:rPr sz="1500" b="1" i="0">
-                <a:solidFill>
-                  <a:srgbClr val="095292"/>
-                </a:solidFill>
-                <a:latin typeface="Calibri"/>
-              </a:rPr>
-              <a:t>La queja</a:t>
-            </a:r>
-          </a:p>
+          <a:bodyPr wrap="square">
+            <a:spAutoFit/>
+          </a:bodyPr>
+          <a:lstStyle/>
           <a:p>
             <a:pPr>
-              <a:spcBef>
-                <a:spcPts val="200"/>
-              </a:spcBef>
+              <a:spcAft>
+                <a:spcPts val="800"/>
+              </a:spcAft>
             </a:pPr>
             <a:r>
-              <a:rPr sz="1300" b="0" i="0">
+              <a:rPr sz="2000" b="0" i="0">
                 <a:solidFill>
                   <a:srgbClr val="333333"/>
                 </a:solidFill>
                 <a:latin typeface="Calibri"/>
               </a:rPr>
-              <a:t>«La gente se queja de la biblioteca del barrio». Es un síntoma.</a:t>
-            </a:r>
-          </a:p>
-        </p:txBody>
-      </p:sp>
-      <p:sp>
-        <p:nvSpPr>
-          <p:cNvPr id="10" name="Rounded Rectangle 9"/>
-          <p:cNvSpPr/>
-          <p:nvPr/>
-        </p:nvSpPr>
-        <p:spPr>
-          <a:xfrm>
-            <a:off x="457200" y="2802636"/>
-            <a:ext cx="11277295" cy="1051560"/>
-          </a:xfrm>
-          <a:prstGeom prst="roundRect">
-            <a:avLst>
-              <a:gd name="adj" fmla="val 12000"/>
-            </a:avLst>
-          </a:prstGeom>
-          <a:solidFill>
-            <a:srgbClr val="E8F4FA"/>
-          </a:solidFill>
-          <a:ln>
-            <a:noFill/>
-          </a:ln>
-        </p:spPr>
-        <p:style>
-          <a:lnRef idx="1">
-            <a:schemeClr val="accent1"/>
-          </a:lnRef>
-          <a:fillRef idx="3">
-            <a:schemeClr val="accent1"/>
-          </a:fillRef>
-          <a:effectRef idx="2">
-            <a:schemeClr val="accent1"/>
-          </a:effectRef>
-          <a:fontRef idx="minor">
-            <a:schemeClr val="lt1"/>
-          </a:fontRef>
-        </p:style>
-        <p:txBody>
-          <a:bodyPr rtlCol="0" anchor="ctr"/>
-          <a:lstStyle/>
-          <a:p>
-            <a:pPr algn="ctr"/>
-          </a:p>
-        </p:txBody>
-      </p:sp>
-      <p:sp>
-        <p:nvSpPr>
-          <p:cNvPr id="11" name="Rounded Rectangle 10"/>
-          <p:cNvSpPr/>
-          <p:nvPr/>
-        </p:nvSpPr>
-        <p:spPr>
-          <a:xfrm>
-            <a:off x="594360" y="3108960"/>
-            <a:ext cx="438912" cy="438912"/>
-          </a:xfrm>
-          <a:prstGeom prst="roundRect">
-            <a:avLst>
-              <a:gd name="adj" fmla="val 12000"/>
-            </a:avLst>
-          </a:prstGeom>
-          <a:solidFill>
-            <a:srgbClr val="095292"/>
-          </a:solidFill>
-          <a:ln>
-            <a:noFill/>
-          </a:ln>
-        </p:spPr>
-        <p:style>
-          <a:lnRef idx="1">
-            <a:schemeClr val="accent1"/>
-          </a:lnRef>
-          <a:fillRef idx="3">
-            <a:schemeClr val="accent1"/>
-          </a:fillRef>
-          <a:effectRef idx="2">
-            <a:schemeClr val="accent1"/>
-          </a:effectRef>
-          <a:fontRef idx="minor">
-            <a:schemeClr val="lt1"/>
-          </a:fontRef>
-        </p:style>
-        <p:txBody>
-          <a:bodyPr rtlCol="0" anchor="ctr"/>
-          <a:lstStyle/>
-          <a:p>
-            <a:pPr algn="ctr"/>
-          </a:p>
-        </p:txBody>
-      </p:sp>
-      <p:sp>
-        <p:nvSpPr>
-          <p:cNvPr id="12" name="TextBox 11"/>
-          <p:cNvSpPr txBox="1"/>
-          <p:nvPr/>
-        </p:nvSpPr>
-        <p:spPr>
-          <a:xfrm>
-            <a:off x="594360" y="3108960"/>
-            <a:ext cx="438912" cy="438912"/>
-          </a:xfrm>
-          <a:prstGeom prst="rect">
-            <a:avLst/>
-          </a:prstGeom>
-          <a:noFill/>
-        </p:spPr>
-        <p:txBody>
-          <a:bodyPr wrap="square" anchor="ctr"/>
-          <a:lstStyle/>
-          <a:p>
-            <a:pPr algn="ctr"/>
-            <a:r>
-              <a:rPr sz="1600" b="1" i="0">
-                <a:solidFill>
-                  <a:srgbClr val="FFFFFF"/>
-                </a:solidFill>
-                <a:latin typeface="Calibri"/>
-              </a:rPr>
-              <a:t>2</a:t>
-            </a:r>
-          </a:p>
-        </p:txBody>
-      </p:sp>
-      <p:sp>
-        <p:nvSpPr>
-          <p:cNvPr id="13" name="TextBox 12"/>
-          <p:cNvSpPr txBox="1"/>
-          <p:nvPr/>
-        </p:nvSpPr>
-        <p:spPr>
-          <a:xfrm>
-            <a:off x="1188720" y="2894076"/>
-            <a:ext cx="10271455" cy="886968"/>
-          </a:xfrm>
-          <a:prstGeom prst="rect">
-            <a:avLst/>
-          </a:prstGeom>
-          <a:noFill/>
-        </p:spPr>
-        <p:txBody>
-          <a:bodyPr wrap="square" anchor="ctr"/>
-          <a:lstStyle/>
-          <a:p>
-            <a:r>
-              <a:rPr sz="1500" b="1" i="0">
-                <a:solidFill>
-                  <a:srgbClr val="095292"/>
-                </a:solidFill>
-                <a:latin typeface="Calibri"/>
-              </a:rPr>
-              <a:t>¿Se queja de qué?</a:t>
+              <a:t>–   </a:t>
+            </a:r>
+            <a:r>
+              <a:rPr sz="2000" b="1" i="0">
+                <a:solidFill>
+                  <a:srgbClr val="333333"/>
+                </a:solidFill>
+                <a:latin typeface="Calibri"/>
+              </a:rPr>
+              <a:t>La queja:</a:t>
+            </a:r>
+            <a:r>
+              <a:rPr sz="2000" b="0" i="0">
+                <a:solidFill>
+                  <a:srgbClr val="333333"/>
+                </a:solidFill>
+                <a:latin typeface="Calibri"/>
+              </a:rPr>
+              <a:t> «La gente se queja de la biblioteca del barrio». Es un síntoma.</a:t>
             </a:r>
           </a:p>
           <a:p>
             <a:pPr>
-              <a:spcBef>
-                <a:spcPts val="200"/>
-              </a:spcBef>
+              <a:spcAft>
+                <a:spcPts val="800"/>
+              </a:spcAft>
             </a:pPr>
             <a:r>
-              <a:rPr sz="1300" b="0" i="0">
+              <a:rPr sz="2000" b="0" i="0">
                 <a:solidFill>
                   <a:srgbClr val="333333"/>
                 </a:solidFill>
                 <a:latin typeface="Calibri"/>
               </a:rPr>
-              <a:t>«No encuentran los libros». Sigue siendo vago.</a:t>
-            </a:r>
-          </a:p>
-        </p:txBody>
-      </p:sp>
-      <p:sp>
-        <p:nvSpPr>
-          <p:cNvPr id="14" name="Rounded Rectangle 13"/>
-          <p:cNvSpPr/>
-          <p:nvPr/>
-        </p:nvSpPr>
-        <p:spPr>
-          <a:xfrm>
-            <a:off x="457200" y="3945636"/>
-            <a:ext cx="11277295" cy="1051560"/>
-          </a:xfrm>
-          <a:prstGeom prst="roundRect">
-            <a:avLst>
-              <a:gd name="adj" fmla="val 12000"/>
-            </a:avLst>
-          </a:prstGeom>
-          <a:solidFill>
-            <a:srgbClr val="F2F2F2"/>
-          </a:solidFill>
-          <a:ln>
-            <a:noFill/>
-          </a:ln>
-        </p:spPr>
-        <p:style>
-          <a:lnRef idx="1">
-            <a:schemeClr val="accent1"/>
-          </a:lnRef>
-          <a:fillRef idx="3">
-            <a:schemeClr val="accent1"/>
-          </a:fillRef>
-          <a:effectRef idx="2">
-            <a:schemeClr val="accent1"/>
-          </a:effectRef>
-          <a:fontRef idx="minor">
-            <a:schemeClr val="lt1"/>
-          </a:fontRef>
-        </p:style>
-        <p:txBody>
-          <a:bodyPr rtlCol="0" anchor="ctr"/>
-          <a:lstStyle/>
-          <a:p>
-            <a:pPr algn="ctr"/>
-          </a:p>
-        </p:txBody>
-      </p:sp>
-      <p:sp>
-        <p:nvSpPr>
-          <p:cNvPr id="15" name="Rounded Rectangle 14"/>
-          <p:cNvSpPr/>
-          <p:nvPr/>
-        </p:nvSpPr>
-        <p:spPr>
-          <a:xfrm>
-            <a:off x="594360" y="4251960"/>
-            <a:ext cx="438912" cy="438912"/>
-          </a:xfrm>
-          <a:prstGeom prst="roundRect">
-            <a:avLst>
-              <a:gd name="adj" fmla="val 12000"/>
-            </a:avLst>
-          </a:prstGeom>
-          <a:solidFill>
-            <a:srgbClr val="095292"/>
-          </a:solidFill>
-          <a:ln>
-            <a:noFill/>
-          </a:ln>
-        </p:spPr>
-        <p:style>
-          <a:lnRef idx="1">
-            <a:schemeClr val="accent1"/>
-          </a:lnRef>
-          <a:fillRef idx="3">
-            <a:schemeClr val="accent1"/>
-          </a:fillRef>
-          <a:effectRef idx="2">
-            <a:schemeClr val="accent1"/>
-          </a:effectRef>
-          <a:fontRef idx="minor">
-            <a:schemeClr val="lt1"/>
-          </a:fontRef>
-        </p:style>
-        <p:txBody>
-          <a:bodyPr rtlCol="0" anchor="ctr"/>
-          <a:lstStyle/>
-          <a:p>
-            <a:pPr algn="ctr"/>
-          </a:p>
-        </p:txBody>
-      </p:sp>
-      <p:sp>
-        <p:nvSpPr>
-          <p:cNvPr id="16" name="TextBox 15"/>
-          <p:cNvSpPr txBox="1"/>
-          <p:nvPr/>
-        </p:nvSpPr>
-        <p:spPr>
-          <a:xfrm>
-            <a:off x="594360" y="4251960"/>
-            <a:ext cx="438912" cy="438912"/>
-          </a:xfrm>
-          <a:prstGeom prst="rect">
-            <a:avLst/>
-          </a:prstGeom>
-          <a:noFill/>
-        </p:spPr>
-        <p:txBody>
-          <a:bodyPr wrap="square" anchor="ctr"/>
-          <a:lstStyle/>
-          <a:p>
-            <a:pPr algn="ctr"/>
-            <a:r>
-              <a:rPr sz="1600" b="1" i="0">
-                <a:solidFill>
-                  <a:srgbClr val="FFFFFF"/>
-                </a:solidFill>
-                <a:latin typeface="Calibri"/>
-              </a:rPr>
-              <a:t>3</a:t>
-            </a:r>
-          </a:p>
-        </p:txBody>
-      </p:sp>
-      <p:sp>
-        <p:nvSpPr>
-          <p:cNvPr id="17" name="TextBox 16"/>
-          <p:cNvSpPr txBox="1"/>
-          <p:nvPr/>
-        </p:nvSpPr>
-        <p:spPr>
-          <a:xfrm>
-            <a:off x="1188720" y="4037076"/>
-            <a:ext cx="10271455" cy="886968"/>
-          </a:xfrm>
-          <a:prstGeom prst="rect">
-            <a:avLst/>
-          </a:prstGeom>
-          <a:noFill/>
-        </p:spPr>
-        <p:txBody>
-          <a:bodyPr wrap="square" anchor="ctr"/>
-          <a:lstStyle/>
-          <a:p>
-            <a:r>
-              <a:rPr sz="1500" b="1" i="0">
-                <a:solidFill>
-                  <a:srgbClr val="095292"/>
-                </a:solidFill>
-                <a:latin typeface="Calibri"/>
-              </a:rPr>
-              <a:t>¿A quién le pasa qué?</a:t>
+              <a:t>–   </a:t>
+            </a:r>
+            <a:r>
+              <a:rPr sz="2000" b="1" i="0">
+                <a:solidFill>
+                  <a:srgbClr val="333333"/>
+                </a:solidFill>
+                <a:latin typeface="Calibri"/>
+              </a:rPr>
+              <a:t>¿Se queja de qué?:</a:t>
+            </a:r>
+            <a:r>
+              <a:rPr sz="2000" b="0" i="0">
+                <a:solidFill>
+                  <a:srgbClr val="333333"/>
+                </a:solidFill>
+                <a:latin typeface="Calibri"/>
+              </a:rPr>
+              <a:t> «No encuentran los libros». Sigue siendo vago.</a:t>
             </a:r>
           </a:p>
           <a:p>
             <a:pPr>
-              <a:spcBef>
-                <a:spcPts val="200"/>
-              </a:spcBef>
+              <a:spcAft>
+                <a:spcPts val="800"/>
+              </a:spcAft>
             </a:pPr>
             <a:r>
-              <a:rPr sz="1300" b="0" i="0">
+              <a:rPr sz="2000" b="0" i="0">
                 <a:solidFill>
                   <a:srgbClr val="333333"/>
                 </a:solidFill>
                 <a:latin typeface="Calibri"/>
               </a:rPr>
-              <a:t>Los estudiantes de colegio pierden tiempo buscando un libro porque el catálogo es un cuaderno.</a:t>
-            </a:r>
-          </a:p>
-        </p:txBody>
-      </p:sp>
-      <p:sp>
-        <p:nvSpPr>
-          <p:cNvPr id="18" name="Rounded Rectangle 17"/>
-          <p:cNvSpPr/>
-          <p:nvPr/>
-        </p:nvSpPr>
-        <p:spPr>
-          <a:xfrm>
-            <a:off x="457200" y="5088636"/>
-            <a:ext cx="11277295" cy="1051560"/>
-          </a:xfrm>
-          <a:prstGeom prst="roundRect">
-            <a:avLst>
-              <a:gd name="adj" fmla="val 12000"/>
-            </a:avLst>
-          </a:prstGeom>
-          <a:solidFill>
-            <a:srgbClr val="E8F4FA"/>
-          </a:solidFill>
-          <a:ln>
-            <a:noFill/>
-          </a:ln>
-        </p:spPr>
-        <p:style>
-          <a:lnRef idx="1">
-            <a:schemeClr val="accent1"/>
-          </a:lnRef>
-          <a:fillRef idx="3">
-            <a:schemeClr val="accent1"/>
-          </a:fillRef>
-          <a:effectRef idx="2">
-            <a:schemeClr val="accent1"/>
-          </a:effectRef>
-          <a:fontRef idx="minor">
-            <a:schemeClr val="lt1"/>
-          </a:fontRef>
-        </p:style>
-        <p:txBody>
-          <a:bodyPr rtlCol="0" anchor="ctr"/>
-          <a:lstStyle/>
-          <a:p>
-            <a:pPr algn="ctr"/>
-          </a:p>
-        </p:txBody>
-      </p:sp>
-      <p:sp>
-        <p:nvSpPr>
-          <p:cNvPr id="19" name="Rounded Rectangle 18"/>
-          <p:cNvSpPr/>
-          <p:nvPr/>
-        </p:nvSpPr>
-        <p:spPr>
-          <a:xfrm>
-            <a:off x="594360" y="5394960"/>
-            <a:ext cx="438912" cy="438912"/>
-          </a:xfrm>
-          <a:prstGeom prst="roundRect">
-            <a:avLst>
-              <a:gd name="adj" fmla="val 12000"/>
-            </a:avLst>
-          </a:prstGeom>
-          <a:solidFill>
-            <a:srgbClr val="095292"/>
-          </a:solidFill>
-          <a:ln>
-            <a:noFill/>
-          </a:ln>
-        </p:spPr>
-        <p:style>
-          <a:lnRef idx="1">
-            <a:schemeClr val="accent1"/>
-          </a:lnRef>
-          <a:fillRef idx="3">
-            <a:schemeClr val="accent1"/>
-          </a:fillRef>
-          <a:effectRef idx="2">
-            <a:schemeClr val="accent1"/>
-          </a:effectRef>
-          <a:fontRef idx="minor">
-            <a:schemeClr val="lt1"/>
-          </a:fontRef>
-        </p:style>
-        <p:txBody>
-          <a:bodyPr rtlCol="0" anchor="ctr"/>
-          <a:lstStyle/>
-          <a:p>
-            <a:pPr algn="ctr"/>
+              <a:t>–   </a:t>
+            </a:r>
+            <a:r>
+              <a:rPr sz="2000" b="1" i="0">
+                <a:solidFill>
+                  <a:srgbClr val="333333"/>
+                </a:solidFill>
+                <a:latin typeface="Calibri"/>
+              </a:rPr>
+              <a:t>¿A quién le pasa qué?:</a:t>
+            </a:r>
+            <a:r>
+              <a:rPr sz="2000" b="0" i="0">
+                <a:solidFill>
+                  <a:srgbClr val="333333"/>
+                </a:solidFill>
+                <a:latin typeface="Calibri"/>
+              </a:rPr>
+              <a:t> Los estudiantes de colegio pierden tiempo buscando un libro porque el catálogo es un cuaderno.</a:t>
+            </a:r>
+          </a:p>
+          <a:p>
+            <a:pPr>
+              <a:spcAft>
+                <a:spcPts val="800"/>
+              </a:spcAft>
+            </a:pPr>
+            <a:r>
+              <a:rPr sz="2000" b="0" i="0">
+                <a:solidFill>
+                  <a:srgbClr val="333333"/>
+                </a:solidFill>
+                <a:latin typeface="Calibri"/>
+              </a:rPr>
+              <a:t>–   </a:t>
+            </a:r>
+            <a:r>
+              <a:rPr sz="2000" b="1" i="0">
+                <a:solidFill>
+                  <a:srgbClr val="333333"/>
+                </a:solidFill>
+                <a:latin typeface="Calibri"/>
+              </a:rPr>
+              <a:t>Con su consecuencia:</a:t>
+            </a:r>
+            <a:r>
+              <a:rPr sz="2000" b="0" i="0">
+                <a:solidFill>
+                  <a:srgbClr val="333333"/>
+                </a:solidFill>
+                <a:latin typeface="Calibri"/>
+              </a:rPr>
+              <a:t> Muchos se van sin el libro y no vuelven. </a:t>
+            </a:r>
+            <a:r>
+              <a:rPr sz="2000" b="1" i="0">
+                <a:solidFill>
+                  <a:srgbClr val="333333"/>
+                </a:solidFill>
+                <a:latin typeface="Calibri"/>
+              </a:rPr>
+              <a:t>Ese</a:t>
+            </a:r>
+            <a:r>
+              <a:rPr sz="2000" b="0" i="0">
+                <a:solidFill>
+                  <a:srgbClr val="333333"/>
+                </a:solidFill>
+                <a:latin typeface="Calibri"/>
+              </a:rPr>
+              <a:t> es el problema.</a:t>
+            </a:r>
           </a:p>
         </p:txBody>
       </p:sp>
       <p:sp>
         <p:nvSpPr>
           <p:cNvPr id="20" name="TextBox 19"/>
-          <p:cNvSpPr txBox="1"/>
-          <p:nvPr/>
-        </p:nvSpPr>
-        <p:spPr>
-          <a:xfrm>
-            <a:off x="594360" y="5394960"/>
-            <a:ext cx="438912" cy="438912"/>
-          </a:xfrm>
-          <a:prstGeom prst="rect">
-            <a:avLst/>
-          </a:prstGeom>
-          <a:noFill/>
-        </p:spPr>
-        <p:txBody>
-          <a:bodyPr wrap="square" anchor="ctr"/>
-          <a:lstStyle/>
-          <a:p>
-            <a:pPr algn="ctr"/>
-            <a:r>
-              <a:rPr sz="1600" b="1" i="0">
-                <a:solidFill>
-                  <a:srgbClr val="FFFFFF"/>
-                </a:solidFill>
-                <a:latin typeface="Calibri"/>
-              </a:rPr>
-              <a:t>4</a:t>
-            </a:r>
-          </a:p>
-        </p:txBody>
-      </p:sp>
-      <p:sp>
-        <p:nvSpPr>
-          <p:cNvPr id="21" name="TextBox 20"/>
-          <p:cNvSpPr txBox="1"/>
-          <p:nvPr/>
-        </p:nvSpPr>
-        <p:spPr>
-          <a:xfrm>
-            <a:off x="1188720" y="5180076"/>
-            <a:ext cx="10271455" cy="886968"/>
-          </a:xfrm>
-          <a:prstGeom prst="rect">
-            <a:avLst/>
-          </a:prstGeom>
-          <a:noFill/>
-        </p:spPr>
-        <p:txBody>
-          <a:bodyPr wrap="square" anchor="ctr"/>
-          <a:lstStyle/>
-          <a:p>
-            <a:r>
-              <a:rPr sz="1500" b="1" i="0">
-                <a:solidFill>
-                  <a:srgbClr val="095292"/>
-                </a:solidFill>
-                <a:latin typeface="Calibri"/>
-              </a:rPr>
-              <a:t>Con su consecuencia</a:t>
-            </a:r>
-          </a:p>
-          <a:p>
-            <a:pPr>
-              <a:spcBef>
-                <a:spcPts val="200"/>
-              </a:spcBef>
-            </a:pPr>
-            <a:r>
-              <a:rPr sz="1300" b="0" i="0">
-                <a:solidFill>
-                  <a:srgbClr val="333333"/>
-                </a:solidFill>
-                <a:latin typeface="Calibri"/>
-              </a:rPr>
-              <a:t>Muchos se van sin el libro y no vuelven. </a:t>
-            </a:r>
-            <a:r>
-              <a:rPr sz="1300" b="1" i="0">
-                <a:solidFill>
-                  <a:srgbClr val="333333"/>
-                </a:solidFill>
-                <a:latin typeface="Calibri"/>
-              </a:rPr>
-              <a:t>Ese</a:t>
-            </a:r>
-            <a:r>
-              <a:rPr sz="1300" b="0" i="0">
-                <a:solidFill>
-                  <a:srgbClr val="333333"/>
-                </a:solidFill>
-                <a:latin typeface="Calibri"/>
-              </a:rPr>
-              <a:t> es el problema.</a:t>
-            </a:r>
-          </a:p>
-        </p:txBody>
-      </p:sp>
-      <p:sp>
-        <p:nvSpPr>
-          <p:cNvPr id="22" name="TextBox 21"/>
           <p:cNvSpPr txBox="1"/>
           <p:nvPr/>
         </p:nvSpPr>
@@ -10004,6 +10011,195 @@
   <p:clrMapOvr>
     <a:masterClrMapping/>
   </p:clrMapOvr>
+  <p:timing>
+    <p:tnLst>
+      <p:par>
+        <p:cTn id="1" dur="indefinite" restart="never" nodeType="tmRoot">
+          <p:childTnLst>
+            <p:seq concurrent="1" nextAc="seek">
+              <p:cTn id="2" dur="indefinite" nodeType="mainSeq">
+                <p:childTnLst>
+                  <p:par>
+                    <p:cTn id="3" fill="hold">
+                      <p:stCondLst>
+                        <p:cond delay="indefinite"/>
+                      </p:stCondLst>
+                      <p:childTnLst>
+                        <p:par>
+                          <p:cTn id="4" fill="hold">
+                            <p:stCondLst>
+                              <p:cond delay="0"/>
+                            </p:stCondLst>
+                            <p:childTnLst>
+                              <p:par>
+                                <p:cTn id="5" presetID="10" presetClass="entr" presetSubtype="0" fill="hold" nodeType="clickEffect">
+                                  <p:stCondLst>
+                                    <p:cond delay="0"/>
+                                  </p:stCondLst>
+                                  <p:childTnLst>
+                                    <p:set>
+                                      <p:cBhvr>
+                                        <p:cTn id="6" dur="1" fill="hold">
+                                          <p:stCondLst>
+                                            <p:cond delay="0"/>
+                                          </p:stCondLst>
+                                        </p:cTn>
+                                        <p:tgtEl>
+                                          <p:spTgt spid="8"/>
+                                        </p:tgtEl>
+                                        <p:attrNameLst>
+                                          <p:attrName>style.visibility</p:attrName>
+                                        </p:attrNameLst>
+                                      </p:cBhvr>
+                                      <p:to>
+                                        <p:strVal val="visible"/>
+                                      </p:to>
+                                    </p:set>
+                                    <p:animEffect transition="in" filter="fade">
+                                      <p:cBhvr>
+                                        <p:cTn id="7" dur="450"/>
+                                        <p:tgtEl>
+                                          <p:spTgt spid="8"/>
+                                        </p:tgtEl>
+                                      </p:cBhvr>
+                                    </p:animEffect>
+                                  </p:childTnLst>
+                                </p:cTn>
+                              </p:par>
+                            </p:childTnLst>
+                          </p:cTn>
+                        </p:par>
+                      </p:childTnLst>
+                    </p:cTn>
+                  </p:par>
+                  <p:par>
+                    <p:cTn id="8" fill="hold">
+                      <p:stCondLst>
+                        <p:cond delay="indefinite"/>
+                      </p:stCondLst>
+                      <p:childTnLst>
+                        <p:par>
+                          <p:cTn id="9" fill="hold">
+                            <p:stCondLst>
+                              <p:cond delay="0"/>
+                            </p:stCondLst>
+                            <p:childTnLst>
+                              <p:par>
+                                <p:cTn id="10" presetID="10" presetClass="entr" presetSubtype="0" fill="hold" nodeType="clickEffect">
+                                  <p:stCondLst>
+                                    <p:cond delay="0"/>
+                                  </p:stCondLst>
+                                  <p:childTnLst>
+                                    <p:set>
+                                      <p:cBhvr>
+                                        <p:cTn id="11" dur="1" fill="hold">
+                                          <p:stCondLst>
+                                            <p:cond delay="0"/>
+                                          </p:stCondLst>
+                                        </p:cTn>
+                                        <p:tgtEl>
+                                          <p:spTgt spid="9"/>
+                                        </p:tgtEl>
+                                        <p:attrNameLst>
+                                          <p:attrName>style.visibility</p:attrName>
+                                        </p:attrNameLst>
+                                      </p:cBhvr>
+                                      <p:to>
+                                        <p:strVal val="visible"/>
+                                      </p:to>
+                                    </p:set>
+                                    <p:animEffect transition="in" filter="fade">
+                                      <p:cBhvr>
+                                        <p:cTn id="12" dur="450"/>
+                                        <p:tgtEl>
+                                          <p:spTgt spid="9"/>
+                                        </p:tgtEl>
+                                      </p:cBhvr>
+                                    </p:animEffect>
+                                  </p:childTnLst>
+                                </p:cTn>
+                              </p:par>
+                            </p:childTnLst>
+                          </p:cTn>
+                        </p:par>
+                      </p:childTnLst>
+                    </p:cTn>
+                  </p:par>
+                  <p:par>
+                    <p:cTn id="13" fill="hold">
+                      <p:stCondLst>
+                        <p:cond delay="indefinite"/>
+                      </p:stCondLst>
+                      <p:childTnLst>
+                        <p:par>
+                          <p:cTn id="14" fill="hold">
+                            <p:stCondLst>
+                              <p:cond delay="0"/>
+                            </p:stCondLst>
+                            <p:childTnLst>
+                              <p:par>
+                                <p:cTn id="15" presetID="10" presetClass="entr" presetSubtype="0" fill="hold" nodeType="clickEffect">
+                                  <p:stCondLst>
+                                    <p:cond delay="0"/>
+                                  </p:stCondLst>
+                                  <p:childTnLst>
+                                    <p:set>
+                                      <p:cBhvr>
+                                        <p:cTn id="16" dur="1" fill="hold">
+                                          <p:stCondLst>
+                                            <p:cond delay="0"/>
+                                          </p:stCondLst>
+                                        </p:cTn>
+                                        <p:tgtEl>
+                                          <p:spTgt spid="10"/>
+                                        </p:tgtEl>
+                                        <p:attrNameLst>
+                                          <p:attrName>style.visibility</p:attrName>
+                                        </p:attrNameLst>
+                                      </p:cBhvr>
+                                      <p:to>
+                                        <p:strVal val="visible"/>
+                                      </p:to>
+                                    </p:set>
+                                    <p:animEffect transition="in" filter="fade">
+                                      <p:cBhvr>
+                                        <p:cTn id="17" dur="450"/>
+                                        <p:tgtEl>
+                                          <p:spTgt spid="10"/>
+                                        </p:tgtEl>
+                                      </p:cBhvr>
+                                    </p:animEffect>
+                                  </p:childTnLst>
+                                </p:cTn>
+                              </p:par>
+                            </p:childTnLst>
+                          </p:cTn>
+                        </p:par>
+                      </p:childTnLst>
+                    </p:cTn>
+                  </p:par>
+                </p:childTnLst>
+              </p:cTn>
+              <p:prevCondLst>
+                <p:cond evt="onPrev" delay="0">
+                  <p:tgtEl>
+                    <p:sldTgt/>
+                  </p:tgtEl>
+                </p:cond>
+              </p:prevCondLst>
+              <p:nextCondLst>
+                <p:cond evt="onNext" delay="0">
+                  <p:tgtEl>
+                    <p:sldTgt/>
+                  </p:tgtEl>
+                </p:cond>
+              </p:nextCondLst>
+            </p:seq>
+          </p:childTnLst>
+        </p:cTn>
+      </p:par>
+    </p:tnLst>
+  </p:timing>
 </p:sld>
 </file>
 
@@ -10187,16 +10383,16 @@
         </p:nvSpPr>
         <p:spPr>
           <a:xfrm>
-            <a:off x="457200" y="1659636"/>
-            <a:ext cx="11277295" cy="1051560"/>
+            <a:off x="5934611" y="1399031"/>
+            <a:ext cx="5735574" cy="4617720"/>
           </a:xfrm>
           <a:prstGeom prst="roundRect">
             <a:avLst>
-              <a:gd name="adj" fmla="val 12000"/>
+              <a:gd name="adj" fmla="val 4000"/>
             </a:avLst>
           </a:prstGeom>
           <a:solidFill>
-            <a:srgbClr val="F2F2F2"/>
+            <a:srgbClr val="E8EEF4"/>
           </a:solidFill>
           <a:ln>
             <a:noFill/>
@@ -10224,61 +10420,147 @@
           </a:p>
         </p:txBody>
       </p:sp>
-      <p:sp>
-        <p:nvSpPr>
-          <p:cNvPr id="7" name="Rounded Rectangle 6"/>
-          <p:cNvSpPr/>
-          <p:nvPr/>
-        </p:nvSpPr>
-        <p:spPr>
-          <a:xfrm>
-            <a:off x="594360" y="1965960"/>
-            <a:ext cx="438912" cy="438912"/>
-          </a:xfrm>
-          <a:prstGeom prst="roundRect">
-            <a:avLst>
-              <a:gd name="adj" fmla="val 12000"/>
-            </a:avLst>
-          </a:prstGeom>
-          <a:solidFill>
-            <a:srgbClr val="095292"/>
-          </a:solidFill>
-          <a:ln>
-            <a:noFill/>
-          </a:ln>
-        </p:spPr>
-        <p:style>
-          <a:lnRef idx="1">
-            <a:schemeClr val="accent1"/>
-          </a:lnRef>
-          <a:fillRef idx="3">
-            <a:schemeClr val="accent1"/>
-          </a:fillRef>
-          <a:effectRef idx="2">
-            <a:schemeClr val="accent1"/>
-          </a:effectRef>
-          <a:fontRef idx="minor">
-            <a:schemeClr val="lt1"/>
-          </a:fontRef>
-        </p:style>
-        <p:txBody>
-          <a:bodyPr rtlCol="0" anchor="ctr"/>
+      <p:pic>
+        <p:nvPicPr>
+          <p:cNvPr id="7" name="Picture 6" descr="arbol-problema-paso1.png"/>
+          <p:cNvPicPr>
+            <a:picLocks noChangeAspect="1"/>
+          </p:cNvPicPr>
+          <p:nvPr/>
+        </p:nvPicPr>
+        <p:blipFill>
+          <a:blip r:embed="rId2"/>
+          <a:stretch>
+            <a:fillRect/>
+          </a:stretch>
+        </p:blipFill>
+        <p:spPr>
+          <a:xfrm>
+            <a:off x="6007763" y="1472184"/>
+            <a:ext cx="5589270" cy="4471416"/>
+          </a:xfrm>
+          <a:prstGeom prst="rect">
+            <a:avLst/>
+          </a:prstGeom>
+        </p:spPr>
+      </p:pic>
+      <p:pic>
+        <p:nvPicPr>
+          <p:cNvPr id="8" name="Picture 7" descr="arbol-problema-paso2.png"/>
+          <p:cNvPicPr>
+            <a:picLocks noChangeAspect="1"/>
+          </p:cNvPicPr>
+          <p:nvPr/>
+        </p:nvPicPr>
+        <p:blipFill>
+          <a:blip r:embed="rId3"/>
+          <a:stretch>
+            <a:fillRect/>
+          </a:stretch>
+        </p:blipFill>
+        <p:spPr>
+          <a:xfrm>
+            <a:off x="6007763" y="1472184"/>
+            <a:ext cx="5589270" cy="4471416"/>
+          </a:xfrm>
+          <a:prstGeom prst="rect">
+            <a:avLst/>
+          </a:prstGeom>
+        </p:spPr>
+      </p:pic>
+      <p:pic>
+        <p:nvPicPr>
+          <p:cNvPr id="9" name="Picture 8" descr="arbol-problema-paso3.png"/>
+          <p:cNvPicPr>
+            <a:picLocks noChangeAspect="1"/>
+          </p:cNvPicPr>
+          <p:nvPr/>
+        </p:nvPicPr>
+        <p:blipFill>
+          <a:blip r:embed="rId4"/>
+          <a:stretch>
+            <a:fillRect/>
+          </a:stretch>
+        </p:blipFill>
+        <p:spPr>
+          <a:xfrm>
+            <a:off x="6007763" y="1472184"/>
+            <a:ext cx="5589270" cy="4471416"/>
+          </a:xfrm>
+          <a:prstGeom prst="rect">
+            <a:avLst/>
+          </a:prstGeom>
+        </p:spPr>
+      </p:pic>
+      <p:pic>
+        <p:nvPicPr>
+          <p:cNvPr id="10" name="Picture 9" descr="arbol-problema-paso4.png"/>
+          <p:cNvPicPr>
+            <a:picLocks noChangeAspect="1"/>
+          </p:cNvPicPr>
+          <p:nvPr/>
+        </p:nvPicPr>
+        <p:blipFill>
+          <a:blip r:embed="rId5"/>
+          <a:stretch>
+            <a:fillRect/>
+          </a:stretch>
+        </p:blipFill>
+        <p:spPr>
+          <a:xfrm>
+            <a:off x="6007763" y="1472184"/>
+            <a:ext cx="5589270" cy="4471416"/>
+          </a:xfrm>
+          <a:prstGeom prst="rect">
+            <a:avLst/>
+          </a:prstGeom>
+        </p:spPr>
+      </p:pic>
+      <p:sp>
+        <p:nvSpPr>
+          <p:cNvPr id="18" name="TextBox 17"/>
+          <p:cNvSpPr txBox="1"/>
+          <p:nvPr/>
+        </p:nvSpPr>
+        <p:spPr>
+          <a:xfrm>
+            <a:off x="5870301" y="5961888"/>
+            <a:ext cx="5864193" cy="320040"/>
+          </a:xfrm>
+          <a:prstGeom prst="rect">
+            <a:avLst/>
+          </a:prstGeom>
+          <a:noFill/>
+        </p:spPr>
+        <p:txBody>
+          <a:bodyPr wrap="square">
+            <a:spAutoFit/>
+          </a:bodyPr>
           <a:lstStyle/>
           <a:p>
             <a:pPr algn="ctr"/>
-          </a:p>
-        </p:txBody>
-      </p:sp>
-      <p:sp>
-        <p:nvSpPr>
-          <p:cNvPr id="8" name="TextBox 7"/>
+            <a:r>
+              <a:rPr sz="1100" b="0" i="1">
+                <a:solidFill>
+                  <a:srgbClr val="666666"/>
+                </a:solidFill>
+                <a:latin typeface="Calibri"/>
+              </a:rPr>
+              <a:t>Clic para avanzar la animación</a:t>
+            </a:r>
+          </a:p>
+        </p:txBody>
+      </p:sp>
+      <p:sp>
+        <p:nvSpPr>
+          <p:cNvPr id="19" name="TextBox 18"/>
           <p:cNvSpPr txBox="1"/>
           <p:nvPr/>
         </p:nvSpPr>
         <p:spPr>
           <a:xfrm>
-            <a:off x="594360" y="1965960"/>
-            <a:ext cx="438912" cy="438912"/>
+            <a:off x="457200" y="1563624"/>
+            <a:ext cx="5093061" cy="4837176"/>
           </a:xfrm>
           <a:prstGeom prst="rect">
             <a:avLst/>
@@ -10286,595 +10568,160 @@
           <a:noFill/>
         </p:spPr>
         <p:txBody>
-          <a:bodyPr wrap="square" anchor="ctr"/>
-          <a:lstStyle/>
-          <a:p>
-            <a:pPr algn="ctr"/>
-            <a:r>
-              <a:rPr sz="1600" b="1" i="0">
-                <a:solidFill>
-                  <a:srgbClr val="FFFFFF"/>
-                </a:solidFill>
-                <a:latin typeface="Calibri"/>
-              </a:rPr>
-              <a:t>1</a:t>
-            </a:r>
-          </a:p>
-        </p:txBody>
-      </p:sp>
-      <p:sp>
-        <p:nvSpPr>
-          <p:cNvPr id="9" name="TextBox 8"/>
-          <p:cNvSpPr txBox="1"/>
-          <p:nvPr/>
-        </p:nvSpPr>
-        <p:spPr>
-          <a:xfrm>
-            <a:off x="1188720" y="1751076"/>
-            <a:ext cx="10271455" cy="886968"/>
-          </a:xfrm>
-          <a:prstGeom prst="rect">
-            <a:avLst/>
-          </a:prstGeom>
-          <a:noFill/>
-        </p:spPr>
-        <p:txBody>
-          <a:bodyPr wrap="square" anchor="ctr"/>
-          <a:lstStyle/>
-          <a:p>
-            <a:r>
-              <a:rPr sz="1500" b="1" i="0">
-                <a:solidFill>
-                  <a:srgbClr val="095292"/>
-                </a:solidFill>
-                <a:latin typeface="Calibri"/>
-              </a:rPr>
-              <a:t>CAUSAS DE FONDO (las raíces profundas)</a:t>
-            </a:r>
-          </a:p>
+          <a:bodyPr wrap="square">
+            <a:spAutoFit/>
+          </a:bodyPr>
+          <a:lstStyle/>
           <a:p>
             <a:pPr>
-              <a:spcBef>
-                <a:spcPts val="200"/>
-              </a:spcBef>
+              <a:spcAft>
+                <a:spcPts val="800"/>
+              </a:spcAft>
             </a:pPr>
             <a:r>
-              <a:rPr sz="1300" b="0" i="0">
+              <a:rPr sz="2000" b="0" i="0">
                 <a:solidFill>
                   <a:srgbClr val="333333"/>
                 </a:solidFill>
                 <a:latin typeface="Calibri"/>
               </a:rPr>
-              <a:t>El por qué de cada causa. </a:t>
-            </a:r>
-            <a:r>
-              <a:rPr sz="1300" b="1" i="0">
+              <a:t>–   </a:t>
+            </a:r>
+            <a:r>
+              <a:rPr sz="2000" b="1" i="0">
                 <a:solidFill>
                   <a:srgbClr val="333333"/>
                 </a:solidFill>
                 <a:latin typeface="Calibri"/>
               </a:rPr>
+              <a:t>CAUSAS DE FONDO (las raíces profundas):</a:t>
+            </a:r>
+            <a:r>
+              <a:rPr sz="2000" b="0" i="0">
+                <a:solidFill>
+                  <a:srgbClr val="333333"/>
+                </a:solidFill>
+                <a:latin typeface="Calibri"/>
+              </a:rPr>
+              <a:t> El por qué de cada causa. </a:t>
+            </a:r>
+            <a:r>
+              <a:rPr sz="2000" b="1" i="0">
+                <a:solidFill>
+                  <a:srgbClr val="333333"/>
+                </a:solidFill>
+                <a:latin typeface="Calibri"/>
+              </a:rPr>
               <a:t>Aquí aparece lo que sí se puede cambiar en un semestre</a:t>
             </a:r>
           </a:p>
-        </p:txBody>
-      </p:sp>
-      <p:sp>
-        <p:nvSpPr>
-          <p:cNvPr id="10" name="Rounded Rectangle 9"/>
-          <p:cNvSpPr/>
-          <p:nvPr/>
-        </p:nvSpPr>
-        <p:spPr>
-          <a:xfrm>
-            <a:off x="457200" y="2802636"/>
-            <a:ext cx="11277295" cy="1051560"/>
-          </a:xfrm>
-          <a:prstGeom prst="roundRect">
-            <a:avLst>
-              <a:gd name="adj" fmla="val 12000"/>
-            </a:avLst>
-          </a:prstGeom>
-          <a:solidFill>
-            <a:srgbClr val="E8F4FA"/>
-          </a:solidFill>
-          <a:ln>
-            <a:noFill/>
-          </a:ln>
-        </p:spPr>
-        <p:style>
-          <a:lnRef idx="1">
-            <a:schemeClr val="accent1"/>
-          </a:lnRef>
-          <a:fillRef idx="3">
-            <a:schemeClr val="accent1"/>
-          </a:fillRef>
-          <a:effectRef idx="2">
-            <a:schemeClr val="accent1"/>
-          </a:effectRef>
-          <a:fontRef idx="minor">
-            <a:schemeClr val="lt1"/>
-          </a:fontRef>
-        </p:style>
-        <p:txBody>
-          <a:bodyPr rtlCol="0" anchor="ctr"/>
-          <a:lstStyle/>
-          <a:p>
-            <a:pPr algn="ctr"/>
-          </a:p>
-        </p:txBody>
-      </p:sp>
-      <p:sp>
-        <p:nvSpPr>
-          <p:cNvPr id="11" name="Rounded Rectangle 10"/>
-          <p:cNvSpPr/>
-          <p:nvPr/>
-        </p:nvSpPr>
-        <p:spPr>
-          <a:xfrm>
-            <a:off x="594360" y="3108960"/>
-            <a:ext cx="438912" cy="438912"/>
-          </a:xfrm>
-          <a:prstGeom prst="roundRect">
-            <a:avLst>
-              <a:gd name="adj" fmla="val 12000"/>
-            </a:avLst>
-          </a:prstGeom>
-          <a:solidFill>
-            <a:srgbClr val="095292"/>
-          </a:solidFill>
-          <a:ln>
-            <a:noFill/>
-          </a:ln>
-        </p:spPr>
-        <p:style>
-          <a:lnRef idx="1">
-            <a:schemeClr val="accent1"/>
-          </a:lnRef>
-          <a:fillRef idx="3">
-            <a:schemeClr val="accent1"/>
-          </a:fillRef>
-          <a:effectRef idx="2">
-            <a:schemeClr val="accent1"/>
-          </a:effectRef>
-          <a:fontRef idx="minor">
-            <a:schemeClr val="lt1"/>
-          </a:fontRef>
-        </p:style>
-        <p:txBody>
-          <a:bodyPr rtlCol="0" anchor="ctr"/>
-          <a:lstStyle/>
-          <a:p>
-            <a:pPr algn="ctr"/>
-          </a:p>
-        </p:txBody>
-      </p:sp>
-      <p:sp>
-        <p:nvSpPr>
-          <p:cNvPr id="12" name="TextBox 11"/>
-          <p:cNvSpPr txBox="1"/>
-          <p:nvPr/>
-        </p:nvSpPr>
-        <p:spPr>
-          <a:xfrm>
-            <a:off x="594360" y="3108960"/>
-            <a:ext cx="438912" cy="438912"/>
-          </a:xfrm>
-          <a:prstGeom prst="rect">
-            <a:avLst/>
-          </a:prstGeom>
-          <a:noFill/>
-        </p:spPr>
-        <p:txBody>
-          <a:bodyPr wrap="square" anchor="ctr"/>
-          <a:lstStyle/>
-          <a:p>
-            <a:pPr algn="ctr"/>
-            <a:r>
-              <a:rPr sz="1600" b="1" i="0">
-                <a:solidFill>
-                  <a:srgbClr val="FFFFFF"/>
-                </a:solidFill>
-                <a:latin typeface="Calibri"/>
-              </a:rPr>
-              <a:t>2</a:t>
-            </a:r>
-          </a:p>
-        </p:txBody>
-      </p:sp>
-      <p:sp>
-        <p:nvSpPr>
-          <p:cNvPr id="13" name="TextBox 12"/>
-          <p:cNvSpPr txBox="1"/>
-          <p:nvPr/>
-        </p:nvSpPr>
-        <p:spPr>
-          <a:xfrm>
-            <a:off x="1188720" y="2894076"/>
-            <a:ext cx="10271455" cy="886968"/>
-          </a:xfrm>
-          <a:prstGeom prst="rect">
-            <a:avLst/>
-          </a:prstGeom>
-          <a:noFill/>
-        </p:spPr>
-        <p:txBody>
-          <a:bodyPr wrap="square" anchor="ctr"/>
-          <a:lstStyle/>
-          <a:p>
-            <a:r>
-              <a:rPr sz="1500" b="1" i="0">
-                <a:solidFill>
-                  <a:srgbClr val="095292"/>
-                </a:solidFill>
-                <a:latin typeface="Calibri"/>
-              </a:rPr>
-              <a:t>CAUSAS DIRECTAS (las raíces)</a:t>
-            </a:r>
-          </a:p>
           <a:p>
             <a:pPr>
-              <a:spcBef>
-                <a:spcPts val="200"/>
-              </a:spcBef>
+              <a:spcAft>
+                <a:spcPts val="800"/>
+              </a:spcAft>
             </a:pPr>
             <a:r>
-              <a:rPr sz="1300" b="0" i="0">
+              <a:rPr sz="2000" b="0" i="0">
                 <a:solidFill>
                   <a:srgbClr val="333333"/>
                 </a:solidFill>
                 <a:latin typeface="Calibri"/>
               </a:rPr>
-              <a:t>Por qué ocurre el problema. Dos o tres, no diez</a:t>
-            </a:r>
-          </a:p>
-        </p:txBody>
-      </p:sp>
-      <p:sp>
-        <p:nvSpPr>
-          <p:cNvPr id="14" name="Rounded Rectangle 13"/>
-          <p:cNvSpPr/>
-          <p:nvPr/>
-        </p:nvSpPr>
-        <p:spPr>
-          <a:xfrm>
-            <a:off x="457200" y="3945636"/>
-            <a:ext cx="11277295" cy="1051560"/>
-          </a:xfrm>
-          <a:prstGeom prst="roundRect">
-            <a:avLst>
-              <a:gd name="adj" fmla="val 12000"/>
-            </a:avLst>
-          </a:prstGeom>
-          <a:solidFill>
-            <a:srgbClr val="F2F2F2"/>
-          </a:solidFill>
-          <a:ln>
-            <a:noFill/>
-          </a:ln>
-        </p:spPr>
-        <p:style>
-          <a:lnRef idx="1">
-            <a:schemeClr val="accent1"/>
-          </a:lnRef>
-          <a:fillRef idx="3">
-            <a:schemeClr val="accent1"/>
-          </a:fillRef>
-          <a:effectRef idx="2">
-            <a:schemeClr val="accent1"/>
-          </a:effectRef>
-          <a:fontRef idx="minor">
-            <a:schemeClr val="lt1"/>
-          </a:fontRef>
-        </p:style>
-        <p:txBody>
-          <a:bodyPr rtlCol="0" anchor="ctr"/>
-          <a:lstStyle/>
-          <a:p>
-            <a:pPr algn="ctr"/>
-          </a:p>
-        </p:txBody>
-      </p:sp>
-      <p:sp>
-        <p:nvSpPr>
-          <p:cNvPr id="15" name="Rounded Rectangle 14"/>
-          <p:cNvSpPr/>
-          <p:nvPr/>
-        </p:nvSpPr>
-        <p:spPr>
-          <a:xfrm>
-            <a:off x="594360" y="4251960"/>
-            <a:ext cx="438912" cy="438912"/>
-          </a:xfrm>
-          <a:prstGeom prst="roundRect">
-            <a:avLst>
-              <a:gd name="adj" fmla="val 12000"/>
-            </a:avLst>
-          </a:prstGeom>
-          <a:solidFill>
-            <a:srgbClr val="095292"/>
-          </a:solidFill>
-          <a:ln>
-            <a:noFill/>
-          </a:ln>
-        </p:spPr>
-        <p:style>
-          <a:lnRef idx="1">
-            <a:schemeClr val="accent1"/>
-          </a:lnRef>
-          <a:fillRef idx="3">
-            <a:schemeClr val="accent1"/>
-          </a:fillRef>
-          <a:effectRef idx="2">
-            <a:schemeClr val="accent1"/>
-          </a:effectRef>
-          <a:fontRef idx="minor">
-            <a:schemeClr val="lt1"/>
-          </a:fontRef>
-        </p:style>
-        <p:txBody>
-          <a:bodyPr rtlCol="0" anchor="ctr"/>
-          <a:lstStyle/>
-          <a:p>
-            <a:pPr algn="ctr"/>
-          </a:p>
-        </p:txBody>
-      </p:sp>
-      <p:sp>
-        <p:nvSpPr>
-          <p:cNvPr id="16" name="TextBox 15"/>
-          <p:cNvSpPr txBox="1"/>
-          <p:nvPr/>
-        </p:nvSpPr>
-        <p:spPr>
-          <a:xfrm>
-            <a:off x="594360" y="4251960"/>
-            <a:ext cx="438912" cy="438912"/>
-          </a:xfrm>
-          <a:prstGeom prst="rect">
-            <a:avLst/>
-          </a:prstGeom>
-          <a:noFill/>
-        </p:spPr>
-        <p:txBody>
-          <a:bodyPr wrap="square" anchor="ctr"/>
-          <a:lstStyle/>
-          <a:p>
-            <a:pPr algn="ctr"/>
-            <a:r>
-              <a:rPr sz="1600" b="1" i="0">
-                <a:solidFill>
-                  <a:srgbClr val="FFFFFF"/>
-                </a:solidFill>
-                <a:latin typeface="Calibri"/>
-              </a:rPr>
-              <a:t>3</a:t>
-            </a:r>
-          </a:p>
-        </p:txBody>
-      </p:sp>
-      <p:sp>
-        <p:nvSpPr>
-          <p:cNvPr id="17" name="TextBox 16"/>
-          <p:cNvSpPr txBox="1"/>
-          <p:nvPr/>
-        </p:nvSpPr>
-        <p:spPr>
-          <a:xfrm>
-            <a:off x="1188720" y="4037076"/>
-            <a:ext cx="10271455" cy="886968"/>
-          </a:xfrm>
-          <a:prstGeom prst="rect">
-            <a:avLst/>
-          </a:prstGeom>
-          <a:noFill/>
-        </p:spPr>
-        <p:txBody>
-          <a:bodyPr wrap="square" anchor="ctr"/>
-          <a:lstStyle/>
-          <a:p>
-            <a:r>
-              <a:rPr sz="1500" b="1" i="0">
-                <a:solidFill>
-                  <a:srgbClr val="095292"/>
-                </a:solidFill>
-                <a:latin typeface="Calibri"/>
-              </a:rPr>
-              <a:t>PROBLEMA (el tronco)</a:t>
+              <a:t>–   </a:t>
+            </a:r>
+            <a:r>
+              <a:rPr sz="2000" b="1" i="0">
+                <a:solidFill>
+                  <a:srgbClr val="333333"/>
+                </a:solidFill>
+                <a:latin typeface="Calibri"/>
+              </a:rPr>
+              <a:t>CAUSAS DIRECTAS (las raíces):</a:t>
+            </a:r>
+            <a:r>
+              <a:rPr sz="2000" b="0" i="0">
+                <a:solidFill>
+                  <a:srgbClr val="333333"/>
+                </a:solidFill>
+                <a:latin typeface="Calibri"/>
+              </a:rPr>
+              <a:t> Por qué ocurre el problema. Dos o tres, no diez</a:t>
             </a:r>
           </a:p>
           <a:p>
             <a:pPr>
-              <a:spcBef>
-                <a:spcPts val="200"/>
-              </a:spcBef>
+              <a:spcAft>
+                <a:spcPts val="800"/>
+              </a:spcAft>
             </a:pPr>
             <a:r>
-              <a:rPr sz="1300" b="0" i="0">
+              <a:rPr sz="2000" b="0" i="0">
                 <a:solidFill>
                   <a:srgbClr val="333333"/>
                 </a:solidFill>
                 <a:latin typeface="Calibri"/>
               </a:rPr>
-              <a:t>Una sola frase: a quién le pasa qué, con qué consecuencia. Es lo que se ataca</a:t>
-            </a:r>
-          </a:p>
-        </p:txBody>
-      </p:sp>
-      <p:sp>
-        <p:nvSpPr>
-          <p:cNvPr id="18" name="Rounded Rectangle 17"/>
-          <p:cNvSpPr/>
-          <p:nvPr/>
-        </p:nvSpPr>
-        <p:spPr>
-          <a:xfrm>
-            <a:off x="457200" y="5088636"/>
-            <a:ext cx="11277295" cy="1051560"/>
-          </a:xfrm>
-          <a:prstGeom prst="roundRect">
-            <a:avLst>
-              <a:gd name="adj" fmla="val 12000"/>
-            </a:avLst>
-          </a:prstGeom>
-          <a:solidFill>
-            <a:srgbClr val="E8F4FA"/>
-          </a:solidFill>
-          <a:ln>
-            <a:noFill/>
-          </a:ln>
-        </p:spPr>
-        <p:style>
-          <a:lnRef idx="1">
-            <a:schemeClr val="accent1"/>
-          </a:lnRef>
-          <a:fillRef idx="3">
-            <a:schemeClr val="accent1"/>
-          </a:fillRef>
-          <a:effectRef idx="2">
-            <a:schemeClr val="accent1"/>
-          </a:effectRef>
-          <a:fontRef idx="minor">
-            <a:schemeClr val="lt1"/>
-          </a:fontRef>
-        </p:style>
-        <p:txBody>
-          <a:bodyPr rtlCol="0" anchor="ctr"/>
-          <a:lstStyle/>
-          <a:p>
-            <a:pPr algn="ctr"/>
-          </a:p>
-        </p:txBody>
-      </p:sp>
-      <p:sp>
-        <p:nvSpPr>
-          <p:cNvPr id="19" name="Rounded Rectangle 18"/>
-          <p:cNvSpPr/>
-          <p:nvPr/>
-        </p:nvSpPr>
-        <p:spPr>
-          <a:xfrm>
-            <a:off x="594360" y="5394960"/>
-            <a:ext cx="438912" cy="438912"/>
-          </a:xfrm>
-          <a:prstGeom prst="roundRect">
-            <a:avLst>
-              <a:gd name="adj" fmla="val 12000"/>
-            </a:avLst>
-          </a:prstGeom>
-          <a:solidFill>
-            <a:srgbClr val="095292"/>
-          </a:solidFill>
-          <a:ln>
-            <a:noFill/>
-          </a:ln>
-        </p:spPr>
-        <p:style>
-          <a:lnRef idx="1">
-            <a:schemeClr val="accent1"/>
-          </a:lnRef>
-          <a:fillRef idx="3">
-            <a:schemeClr val="accent1"/>
-          </a:fillRef>
-          <a:effectRef idx="2">
-            <a:schemeClr val="accent1"/>
-          </a:effectRef>
-          <a:fontRef idx="minor">
-            <a:schemeClr val="lt1"/>
-          </a:fontRef>
-        </p:style>
-        <p:txBody>
-          <a:bodyPr rtlCol="0" anchor="ctr"/>
-          <a:lstStyle/>
-          <a:p>
-            <a:pPr algn="ctr"/>
+              <a:t>–   </a:t>
+            </a:r>
+            <a:r>
+              <a:rPr sz="2000" b="1" i="0">
+                <a:solidFill>
+                  <a:srgbClr val="333333"/>
+                </a:solidFill>
+                <a:latin typeface="Calibri"/>
+              </a:rPr>
+              <a:t>PROBLEMA (el tronco):</a:t>
+            </a:r>
+            <a:r>
+              <a:rPr sz="2000" b="0" i="0">
+                <a:solidFill>
+                  <a:srgbClr val="333333"/>
+                </a:solidFill>
+                <a:latin typeface="Calibri"/>
+              </a:rPr>
+              <a:t> Una sola frase: a quién le pasa qué, con qué consecuencia. Es lo que se ataca</a:t>
+            </a:r>
+          </a:p>
+          <a:p>
+            <a:pPr>
+              <a:spcAft>
+                <a:spcPts val="800"/>
+              </a:spcAft>
+            </a:pPr>
+            <a:r>
+              <a:rPr sz="2000" b="0" i="0">
+                <a:solidFill>
+                  <a:srgbClr val="333333"/>
+                </a:solidFill>
+                <a:latin typeface="Calibri"/>
+              </a:rPr>
+              <a:t>–   </a:t>
+            </a:r>
+            <a:r>
+              <a:rPr sz="2000" b="1" i="0">
+                <a:solidFill>
+                  <a:srgbClr val="333333"/>
+                </a:solidFill>
+                <a:latin typeface="Calibri"/>
+              </a:rPr>
+              <a:t>EFECTOS (las ramas):</a:t>
+            </a:r>
+            <a:r>
+              <a:rPr sz="2000" b="0" i="0">
+                <a:solidFill>
+                  <a:srgbClr val="333333"/>
+                </a:solidFill>
+                <a:latin typeface="Calibri"/>
+              </a:rPr>
+              <a:t> Lo que se ve y lo que duele: quejas, demoras, pérdidas. Aquí viven los síntomas</a:t>
+            </a:r>
           </a:p>
         </p:txBody>
       </p:sp>
       <p:sp>
         <p:nvSpPr>
           <p:cNvPr id="20" name="TextBox 19"/>
-          <p:cNvSpPr txBox="1"/>
-          <p:nvPr/>
-        </p:nvSpPr>
-        <p:spPr>
-          <a:xfrm>
-            <a:off x="594360" y="5394960"/>
-            <a:ext cx="438912" cy="438912"/>
-          </a:xfrm>
-          <a:prstGeom prst="rect">
-            <a:avLst/>
-          </a:prstGeom>
-          <a:noFill/>
-        </p:spPr>
-        <p:txBody>
-          <a:bodyPr wrap="square" anchor="ctr"/>
-          <a:lstStyle/>
-          <a:p>
-            <a:pPr algn="ctr"/>
-            <a:r>
-              <a:rPr sz="1600" b="1" i="0">
-                <a:solidFill>
-                  <a:srgbClr val="FFFFFF"/>
-                </a:solidFill>
-                <a:latin typeface="Calibri"/>
-              </a:rPr>
-              <a:t>4</a:t>
-            </a:r>
-          </a:p>
-        </p:txBody>
-      </p:sp>
-      <p:sp>
-        <p:nvSpPr>
-          <p:cNvPr id="21" name="TextBox 20"/>
-          <p:cNvSpPr txBox="1"/>
-          <p:nvPr/>
-        </p:nvSpPr>
-        <p:spPr>
-          <a:xfrm>
-            <a:off x="1188720" y="5180076"/>
-            <a:ext cx="10271455" cy="886968"/>
-          </a:xfrm>
-          <a:prstGeom prst="rect">
-            <a:avLst/>
-          </a:prstGeom>
-          <a:noFill/>
-        </p:spPr>
-        <p:txBody>
-          <a:bodyPr wrap="square" anchor="ctr"/>
-          <a:lstStyle/>
-          <a:p>
-            <a:r>
-              <a:rPr sz="1500" b="1" i="0">
-                <a:solidFill>
-                  <a:srgbClr val="095292"/>
-                </a:solidFill>
-                <a:latin typeface="Calibri"/>
-              </a:rPr>
-              <a:t>EFECTOS (las ramas)</a:t>
-            </a:r>
-          </a:p>
-          <a:p>
-            <a:pPr>
-              <a:spcBef>
-                <a:spcPts val="200"/>
-              </a:spcBef>
-            </a:pPr>
-            <a:r>
-              <a:rPr sz="1300" b="0" i="0">
-                <a:solidFill>
-                  <a:srgbClr val="333333"/>
-                </a:solidFill>
-                <a:latin typeface="Calibri"/>
-              </a:rPr>
-              <a:t>Lo que se ve y lo que duele: quejas, demoras, pérdidas. Aquí viven los síntomas</a:t>
-            </a:r>
-          </a:p>
-        </p:txBody>
-      </p:sp>
-      <p:sp>
-        <p:nvSpPr>
-          <p:cNvPr id="22" name="TextBox 21"/>
           <p:cNvSpPr txBox="1"/>
           <p:nvPr/>
         </p:nvSpPr>
@@ -10912,6 +10759,195 @@
   <p:clrMapOvr>
     <a:masterClrMapping/>
   </p:clrMapOvr>
+  <p:timing>
+    <p:tnLst>
+      <p:par>
+        <p:cTn id="1" dur="indefinite" restart="never" nodeType="tmRoot">
+          <p:childTnLst>
+            <p:seq concurrent="1" nextAc="seek">
+              <p:cTn id="2" dur="indefinite" nodeType="mainSeq">
+                <p:childTnLst>
+                  <p:par>
+                    <p:cTn id="3" fill="hold">
+                      <p:stCondLst>
+                        <p:cond delay="indefinite"/>
+                      </p:stCondLst>
+                      <p:childTnLst>
+                        <p:par>
+                          <p:cTn id="4" fill="hold">
+                            <p:stCondLst>
+                              <p:cond delay="0"/>
+                            </p:stCondLst>
+                            <p:childTnLst>
+                              <p:par>
+                                <p:cTn id="5" presetID="10" presetClass="entr" presetSubtype="0" fill="hold" nodeType="clickEffect">
+                                  <p:stCondLst>
+                                    <p:cond delay="0"/>
+                                  </p:stCondLst>
+                                  <p:childTnLst>
+                                    <p:set>
+                                      <p:cBhvr>
+                                        <p:cTn id="6" dur="1" fill="hold">
+                                          <p:stCondLst>
+                                            <p:cond delay="0"/>
+                                          </p:stCondLst>
+                                        </p:cTn>
+                                        <p:tgtEl>
+                                          <p:spTgt spid="8"/>
+                                        </p:tgtEl>
+                                        <p:attrNameLst>
+                                          <p:attrName>style.visibility</p:attrName>
+                                        </p:attrNameLst>
+                                      </p:cBhvr>
+                                      <p:to>
+                                        <p:strVal val="visible"/>
+                                      </p:to>
+                                    </p:set>
+                                    <p:animEffect transition="in" filter="fade">
+                                      <p:cBhvr>
+                                        <p:cTn id="7" dur="450"/>
+                                        <p:tgtEl>
+                                          <p:spTgt spid="8"/>
+                                        </p:tgtEl>
+                                      </p:cBhvr>
+                                    </p:animEffect>
+                                  </p:childTnLst>
+                                </p:cTn>
+                              </p:par>
+                            </p:childTnLst>
+                          </p:cTn>
+                        </p:par>
+                      </p:childTnLst>
+                    </p:cTn>
+                  </p:par>
+                  <p:par>
+                    <p:cTn id="8" fill="hold">
+                      <p:stCondLst>
+                        <p:cond delay="indefinite"/>
+                      </p:stCondLst>
+                      <p:childTnLst>
+                        <p:par>
+                          <p:cTn id="9" fill="hold">
+                            <p:stCondLst>
+                              <p:cond delay="0"/>
+                            </p:stCondLst>
+                            <p:childTnLst>
+                              <p:par>
+                                <p:cTn id="10" presetID="10" presetClass="entr" presetSubtype="0" fill="hold" nodeType="clickEffect">
+                                  <p:stCondLst>
+                                    <p:cond delay="0"/>
+                                  </p:stCondLst>
+                                  <p:childTnLst>
+                                    <p:set>
+                                      <p:cBhvr>
+                                        <p:cTn id="11" dur="1" fill="hold">
+                                          <p:stCondLst>
+                                            <p:cond delay="0"/>
+                                          </p:stCondLst>
+                                        </p:cTn>
+                                        <p:tgtEl>
+                                          <p:spTgt spid="9"/>
+                                        </p:tgtEl>
+                                        <p:attrNameLst>
+                                          <p:attrName>style.visibility</p:attrName>
+                                        </p:attrNameLst>
+                                      </p:cBhvr>
+                                      <p:to>
+                                        <p:strVal val="visible"/>
+                                      </p:to>
+                                    </p:set>
+                                    <p:animEffect transition="in" filter="fade">
+                                      <p:cBhvr>
+                                        <p:cTn id="12" dur="450"/>
+                                        <p:tgtEl>
+                                          <p:spTgt spid="9"/>
+                                        </p:tgtEl>
+                                      </p:cBhvr>
+                                    </p:animEffect>
+                                  </p:childTnLst>
+                                </p:cTn>
+                              </p:par>
+                            </p:childTnLst>
+                          </p:cTn>
+                        </p:par>
+                      </p:childTnLst>
+                    </p:cTn>
+                  </p:par>
+                  <p:par>
+                    <p:cTn id="13" fill="hold">
+                      <p:stCondLst>
+                        <p:cond delay="indefinite"/>
+                      </p:stCondLst>
+                      <p:childTnLst>
+                        <p:par>
+                          <p:cTn id="14" fill="hold">
+                            <p:stCondLst>
+                              <p:cond delay="0"/>
+                            </p:stCondLst>
+                            <p:childTnLst>
+                              <p:par>
+                                <p:cTn id="15" presetID="10" presetClass="entr" presetSubtype="0" fill="hold" nodeType="clickEffect">
+                                  <p:stCondLst>
+                                    <p:cond delay="0"/>
+                                  </p:stCondLst>
+                                  <p:childTnLst>
+                                    <p:set>
+                                      <p:cBhvr>
+                                        <p:cTn id="16" dur="1" fill="hold">
+                                          <p:stCondLst>
+                                            <p:cond delay="0"/>
+                                          </p:stCondLst>
+                                        </p:cTn>
+                                        <p:tgtEl>
+                                          <p:spTgt spid="10"/>
+                                        </p:tgtEl>
+                                        <p:attrNameLst>
+                                          <p:attrName>style.visibility</p:attrName>
+                                        </p:attrNameLst>
+                                      </p:cBhvr>
+                                      <p:to>
+                                        <p:strVal val="visible"/>
+                                      </p:to>
+                                    </p:set>
+                                    <p:animEffect transition="in" filter="fade">
+                                      <p:cBhvr>
+                                        <p:cTn id="17" dur="450"/>
+                                        <p:tgtEl>
+                                          <p:spTgt spid="10"/>
+                                        </p:tgtEl>
+                                      </p:cBhvr>
+                                    </p:animEffect>
+                                  </p:childTnLst>
+                                </p:cTn>
+                              </p:par>
+                            </p:childTnLst>
+                          </p:cTn>
+                        </p:par>
+                      </p:childTnLst>
+                    </p:cTn>
+                  </p:par>
+                </p:childTnLst>
+              </p:cTn>
+              <p:prevCondLst>
+                <p:cond evt="onPrev" delay="0">
+                  <p:tgtEl>
+                    <p:sldTgt/>
+                  </p:tgtEl>
+                </p:cond>
+              </p:prevCondLst>
+              <p:nextCondLst>
+                <p:cond evt="onNext" delay="0">
+                  <p:tgtEl>
+                    <p:sldTgt/>
+                  </p:tgtEl>
+                </p:cond>
+              </p:nextCondLst>
+            </p:seq>
+          </p:childTnLst>
+        </p:cTn>
+      </p:par>
+    </p:tnLst>
+  </p:timing>
 </p:sld>
 </file>
 
@@ -11954,14 +11990,118 @@
       </p:sp>
       <p:sp>
         <p:nvSpPr>
-          <p:cNvPr id="5" name="TextBox 4"/>
+          <p:cNvPr id="5" name="Rounded Rectangle 4"/>
+          <p:cNvSpPr/>
+          <p:nvPr/>
+        </p:nvSpPr>
+        <p:spPr>
+          <a:xfrm>
+            <a:off x="5797149" y="1331356"/>
+            <a:ext cx="6010497" cy="4542758"/>
+          </a:xfrm>
+          <a:prstGeom prst="roundRect">
+            <a:avLst>
+              <a:gd name="adj" fmla="val 4000"/>
+            </a:avLst>
+          </a:prstGeom>
+          <a:solidFill>
+            <a:srgbClr val="E8EEF4"/>
+          </a:solidFill>
+          <a:ln>
+            <a:noFill/>
+          </a:ln>
+        </p:spPr>
+        <p:style>
+          <a:lnRef idx="1">
+            <a:schemeClr val="accent1"/>
+          </a:lnRef>
+          <a:fillRef idx="3">
+            <a:schemeClr val="accent1"/>
+          </a:fillRef>
+          <a:effectRef idx="2">
+            <a:schemeClr val="accent1"/>
+          </a:effectRef>
+          <a:fontRef idx="minor">
+            <a:schemeClr val="lt1"/>
+          </a:fontRef>
+        </p:style>
+        <p:txBody>
+          <a:bodyPr rtlCol="0" anchor="ctr"/>
+          <a:lstStyle/>
+          <a:p>
+            <a:pPr algn="ctr"/>
+          </a:p>
+        </p:txBody>
+      </p:sp>
+      <p:pic>
+        <p:nvPicPr>
+          <p:cNvPr id="6" name="Picture 5" descr="stopwatch-measurement.jpg"/>
+          <p:cNvPicPr>
+            <a:picLocks noChangeAspect="1"/>
+          </p:cNvPicPr>
+          <p:nvPr/>
+        </p:nvPicPr>
+        <p:blipFill>
+          <a:blip r:embed="rId2"/>
+          <a:stretch>
+            <a:fillRect/>
+          </a:stretch>
+        </p:blipFill>
+        <p:spPr>
+          <a:xfrm>
+            <a:off x="5870301" y="1404508"/>
+            <a:ext cx="5864193" cy="4396454"/>
+          </a:xfrm>
+          <a:prstGeom prst="rect">
+            <a:avLst/>
+          </a:prstGeom>
+        </p:spPr>
+      </p:pic>
+      <p:sp>
+        <p:nvSpPr>
+          <p:cNvPr id="7" name="TextBox 6"/>
           <p:cNvSpPr txBox="1"/>
           <p:nvPr/>
         </p:nvSpPr>
         <p:spPr>
           <a:xfrm>
-            <a:off x="457200" y="1170432"/>
-            <a:ext cx="11277295" cy="5230368"/>
+            <a:off x="5870301" y="5961888"/>
+            <a:ext cx="5864193" cy="320040"/>
+          </a:xfrm>
+          <a:prstGeom prst="rect">
+            <a:avLst/>
+          </a:prstGeom>
+          <a:noFill/>
+        </p:spPr>
+        <p:txBody>
+          <a:bodyPr wrap="square">
+            <a:spAutoFit/>
+          </a:bodyPr>
+          <a:lstStyle/>
+          <a:p>
+            <a:pPr algn="ctr"/>
+            <a:r>
+              <a:rPr sz="1100" b="0" i="1">
+                <a:solidFill>
+                  <a:srgbClr val="666666"/>
+                </a:solidFill>
+                <a:latin typeface="Calibri"/>
+              </a:rPr>
+              <a:t>Foto: William Warby · Pexels</a:t>
+            </a:r>
+          </a:p>
+        </p:txBody>
+      </p:sp>
+      <p:sp>
+        <p:nvSpPr>
+          <p:cNvPr id="8" name="TextBox 7"/>
+          <p:cNvSpPr txBox="1"/>
+          <p:nvPr/>
+        </p:nvSpPr>
+        <p:spPr>
+          <a:xfrm>
+            <a:off x="457200" y="1353312"/>
+            <a:ext cx="5093061" cy="5047488"/>
           </a:xfrm>
           <a:prstGeom prst="rect">
             <a:avLst/>
@@ -12022,7 +12162,7 @@
                 </a:solidFill>
                 <a:latin typeface="Calibri"/>
               </a:rPr>
-              <a:t>, antes de que ustedes toquen nada. «La secretaria dedica unas 2 horas diarias a confirmar citas por teléfono.» «De 40 libros prestados al mes, unos 12 vuelven tarde.»</a:t>
+              <a:t>, antes de que ustedes toquen nada.</a:t>
             </a:r>
           </a:p>
           <a:p>
@@ -12074,7 +12214,7 @@
                 </a:solidFill>
                 <a:latin typeface="Calibri"/>
               </a:rPr>
-              <a:t>. Un informe final que dice «mejoramos el proceso» no demuestra nada; uno que dice «pasó de 2 horas a 20 minutos» sí. En la Clase 16 se les va a pedir exactamente eso.</a:t>
+              <a:t>.</a:t>
             </a:r>
           </a:p>
           <a:p>
@@ -12108,25 +12248,7 @@
                 </a:solidFill>
                 <a:latin typeface="Calibri"/>
               </a:rPr>
-              <a:t> Preguntando, contando y midiendo con un cronómetro. Tres preguntas a la persona que hace el trabajo, un conteo de una semana, o el tiempo de un caso medido a mano. </a:t>
-            </a:r>
-            <a:r>
-              <a:rPr sz="2000" b="1" i="0">
-                <a:solidFill>
-                  <a:srgbClr val="333333"/>
-                </a:solidFill>
-                <a:latin typeface="Calibri"/>
-              </a:rPr>
-              <a:t>No hace falta una encuesta científica</a:t>
-            </a:r>
-            <a:r>
-              <a:rPr sz="2000" b="0" i="0">
-                <a:solidFill>
-                  <a:srgbClr val="333333"/>
-                </a:solidFill>
-                <a:latin typeface="Calibri"/>
-              </a:rPr>
-              <a:t>: hace falta un número honesto y decir cómo se obtuvo.</a:t>
+              <a:t> Preguntando, contando y midiendo con un cronómetro.</a:t>
             </a:r>
           </a:p>
           <a:p>
@@ -12178,48 +12300,14 @@
                 </a:solidFill>
                 <a:latin typeface="Calibri"/>
               </a:rPr>
-              <a:t>. Si es una estimación, se escribe «estimado». Una cifra inventada es peor que ninguna, porque el resto del proyecto se apoya en ella.</a:t>
-            </a:r>
-          </a:p>
-          <a:p>
-            <a:pPr>
-              <a:spcAft>
-                <a:spcPts val="800"/>
-              </a:spcAft>
-            </a:pPr>
-            <a:r>
-              <a:rPr sz="2000" b="0" i="0">
-                <a:solidFill>
-                  <a:srgbClr val="333333"/>
-                </a:solidFill>
-                <a:latin typeface="Calibri"/>
-              </a:rPr>
-              <a:t>–   </a:t>
-            </a:r>
-            <a:r>
-              <a:rPr sz="2000" b="1" i="0">
-                <a:solidFill>
-                  <a:srgbClr val="333333"/>
-                </a:solidFill>
-                <a:latin typeface="Calibri"/>
-              </a:rPr>
-              <a:t>Si el problema no tiene cifra posible</a:t>
-            </a:r>
-            <a:r>
-              <a:rPr sz="2000" b="0" i="0">
-                <a:solidFill>
-                  <a:srgbClr val="333333"/>
-                </a:solidFill>
-                <a:latin typeface="Calibri"/>
-              </a:rPr>
-              <a:t>, es señal de que está mal delimitado: casi siempre es demasiado grande. Bájenlo hasta que se pueda contar algo.</a:t>
-            </a:r>
-          </a:p>
-        </p:txBody>
-      </p:sp>
-      <p:sp>
-        <p:nvSpPr>
-          <p:cNvPr id="6" name="TextBox 5"/>
+              <a:t>.</a:t>
+            </a:r>
+          </a:p>
+        </p:txBody>
+      </p:sp>
+      <p:sp>
+        <p:nvSpPr>
+          <p:cNvPr id="9" name="TextBox 8"/>
           <p:cNvSpPr txBox="1"/>
           <p:nvPr/>
         </p:nvSpPr>

--- a/Introduccion a la Ingenieria/Clases/Clase 6 - Analisis de problemas tecnologicos del entorno/Presentacion.pptx
+++ b/Introduccion a la Ingenieria/Clases/Clase 6 - Analisis de problemas tecnologicos del entorno/Presentacion.pptx
@@ -8,9 +8,9 @@
     <p:sldId id="256" r:id="rId7"/>
     <p:sldId id="257" r:id="rId8"/>
     <p:sldId id="258" r:id="rId9"/>
-    <p:sldId id="259" r:id="rId11"/>
-    <p:sldId id="260" r:id="rId12"/>
-    <p:sldId id="261" r:id="rId13"/>
+    <p:sldId id="259" r:id="rId10"/>
+    <p:sldId id="260" r:id="rId11"/>
+    <p:sldId id="261" r:id="rId12"/>
     <p:sldId id="262" r:id="rId14"/>
     <p:sldId id="263" r:id="rId15"/>
     <p:sldId id="264" r:id="rId16"/>
@@ -514,137 +514,7 @@
           <a:lstStyle/>
           <a:p>
             <a:r>
-              <a:t>TEXTO COMPLETO DE LA LÁMINA (se proyecta resumido):</a:t>
-            </a:r>
-          </a:p>
-          <a:p/>
-          <a:p>
-            <a:r>
-              <a:t>Distinguir un problema de un síntoma y de una solución disfrazada de problema.</a:t>
-            </a:r>
-          </a:p>
-          <a:p/>
-          <a:p>
-            <a:r>
-              <a:t>Construir el árbol de causas de un problema del entorno.</a:t>
-            </a:r>
-          </a:p>
-          <a:p/>
-          <a:p>
-            <a:r>
-              <a:t>Escribir una línea base: una cifra que se pueda decir hoy sobre el problema.</a:t>
-            </a:r>
-          </a:p>
-          <a:p/>
-          <a:p>
-            <a:r>
-              <a:t>Verificar que el problema elegido cabe en un semestre con los cuatro criterios.</a:t>
-            </a:r>
-          </a:p>
-          <a:p/>
-          <a:p>
-            <a:r>
-              <a:t>Entregar la ficha del problema del proyecto del equipo.</a:t>
-            </a:r>
-          </a:p>
-        </p:txBody>
-      </p:sp>
-      <p:sp>
-        <p:nvSpPr>
-          <p:cNvPr id="4" name="Slide Number Placeholder 3"/>
-          <p:cNvSpPr>
-            <a:spLocks noGrp="1"/>
-          </p:cNvSpPr>
-          <p:nvPr>
-            <p:ph type="sldNum" idx="5" sz="quarter"/>
-          </p:nvPr>
-        </p:nvSpPr>
-        <p:spPr/>
-      </p:sp>
-    </p:spTree>
-  </p:cSld>
-  <p:clrMapOvr>
-    <a:masterClrMapping/>
-  </p:clrMapOvr>
-</p:notes>
-</file>
-
-<file path=ppt/notesSlides/notesSlide10.xml><?xml version="1.0" encoding="utf-8"?>
-<p:notes xmlns:a="http://schemas.openxmlformats.org/drawingml/2006/main" xmlns:p="http://schemas.openxmlformats.org/presentationml/2006/main" xmlns:r="http://schemas.openxmlformats.org/officeDocument/2006/relationships">
-  <p:cSld>
-    <p:spTree>
-      <p:nvGrpSpPr>
-        <p:cNvPr id="1" name=""/>
-        <p:cNvGrpSpPr/>
-        <p:nvPr/>
-      </p:nvGrpSpPr>
-      <p:grpSpPr>
-        <a:xfrm>
-          <a:off x="0" y="0"/>
-          <a:ext cx="0" cy="0"/>
-          <a:chOff x="0" y="0"/>
-          <a:chExt cx="0" cy="0"/>
-        </a:xfrm>
-      </p:grpSpPr>
-      <p:sp>
-        <p:nvSpPr>
-          <p:cNvPr id="2" name="Slide Image Placeholder 1"/>
-          <p:cNvSpPr>
-            <a:spLocks noGrp="1"/>
-          </p:cNvSpPr>
-          <p:nvPr>
-            <p:ph type="sldImg" idx="2"/>
-          </p:nvPr>
-        </p:nvSpPr>
-        <p:spPr/>
-      </p:sp>
-      <p:sp>
-        <p:nvSpPr>
-          <p:cNvPr id="3" name="Notes Placeholder 2"/>
-          <p:cNvSpPr>
-            <a:spLocks noGrp="1"/>
-          </p:cNvSpPr>
-          <p:nvPr>
-            <p:ph type="body" idx="3" sz="quarter"/>
-          </p:nvPr>
-        </p:nvSpPr>
-        <p:spPr/>
-        <p:txBody>
-          <a:bodyPr/>
-          <a:lstStyle/>
-          <a:p>
-            <a:r>
-              <a:t>LA LÍNEA BASE Y LOS CUATRO CRITERIOS DE VIABILIDAD</a:t>
-            </a:r>
-          </a:p>
-          <a:p/>
-          <a:p>
-            <a:r>
-              <a:t>La línea base es la exigencia que más resistencia genera y la que más valor tiene. Es una cifra sobre el problema como está hoy, antes de que el equipo toque nada, y su función es simple: sin ella no hay forma de saber si el proyecto sirvió. En la Clase 16 el informe final va a pedir comparar, y un equipo sin línea base solo puede escribir «mejoramos el proceso», que es una afirmación vacía.</a:t>
-            </a:r>
-          </a:p>
-          <a:p/>
-          <a:p>
-            <a:r>
-              <a:t>Hay que quitarles de encima la idea de que medir requiere presupuesto o estadística. La línea base de un proyecto de este curso se consigue de tres maneras: preguntando a la persona que hace el trabajo, contando durante una semana, o midiendo con un cronómetro un caso. «La secretaria dedica unas dos horas diarias a confirmar citas por teléfono, según lo que ella misma estima» es una línea base perfectamente aceptable, siempre que se diga que es una estimación y de quién viene. La regla de honestidad es la de la sesión 5, aplicada de nuevo: cifra con método y fecha, o no va.</a:t>
-            </a:r>
-          </a:p>
-          <a:p/>
-          <a:p>
-            <a:r>
-              <a:t>Y hay un diagnóstico gratis escondido en esta exigencia: si el problema no admite ninguna cifra, está mal delimitado, y casi siempre es porque es demasiado grande. «La deserción estudiantil» no se puede medir con lo que tiene un equipo de primer semestre; «cuántos de los 30 compañeros de mi grupo no saben en qué semestre pierden el beneficio de la beca» sí. Bajar el problema hasta que se pueda contar algo es la manera más rápida de volverlo abordable.</a:t>
-            </a:r>
-          </a:p>
-          <a:p/>
-          <a:p>
-            <a:r>
-              <a:t>Los cuatro criterios son un filtro y hay que aplicarlos en voz alta a cada problema propuesto, uno por uno. *Abordable* con navegador y herramientas gratuitas: nada que exija comprar equipos, contratar servicios de pago o conseguir permisos institucionales que no van a llegar en un semestre. *Medible*: existe la cifra. *Con acceso a los actores*: pueden hablar esta semana con alguien que vive el problema, sin trámites; este criterio es el que descarta más propuestas y hay que ser firme, porque un proyecto sobre una entidad a la que nadie puede preguntarle nada termina siendo un ejercicio de imaginación con aspecto de proyecto. *Con dueño del problema*: hay una persona o un grupo concreto al que le duele y que reconocería la mejora; si el afectado es «la sociedad», no hay a quién mostrarle el resultado en la Clase 15.</a:t>
-            </a:r>
-          </a:p>
-          <a:p/>
-          <a:p>
-            <a:r>
-              <a:t>Una advertencia sobre el ánimo del grupo: aplicar estos criterios va a matar algunas ideas ambiciosas y eso frustra. Vale la pena decirles por qué se hace: es mejor resolver algo pequeño de verdad que simular algo grande, y en un primer semestre el objetivo es que aprendan a formular y a demostrar, no que salven la ciudad. Un proyecto pequeño y verificable saca mejor nota que uno grandioso e imposible, y hay que decirlo hoy, antes de que se enamoren de la idea.</a:t>
+              <a:t>Fíjese que en ningún paso aparece «hacer una app». Si un equipo llega al problema con la solución ya puesta, devuélvalo al primer paso.</a:t>
             </a:r>
           </a:p>
         </p:txBody>
@@ -714,7 +584,7 @@
           <a:lstStyle/>
           <a:p>
             <a:r>
-              <a:t>Fíjese que en ningún paso aparece «hacer una app». Si un equipo llega al problema con la solución ya puesta, devuélvalo al primer paso.</a:t>
+              <a:t>Lo valioso está en las causas de fondo: buscar el fiado página por página es algo que sí se puede cambiar en un semestre. Comprar otra caja no.</a:t>
             </a:r>
           </a:p>
         </p:txBody>
@@ -784,7 +654,7 @@
           <a:lstStyle/>
           <a:p>
             <a:r>
-              <a:t>Lo valioso está en las causas de fondo: buscar el fiado página por página es algo que sí se puede cambiar en un semestre. Comprar otra caja no.</a:t>
+              <a:t>La regla de honestidad: toda cifra lleva cómo se obtuvo y cuándo. Un «14 min» suelto no vale; «14 min, 10 clientes, viernes en la noche» sí.</a:t>
             </a:r>
           </a:p>
         </p:txBody>
@@ -854,73 +724,7 @@
           <a:lstStyle/>
           <a:p>
             <a:r>
-              <a:t>TEXTO COMPLETO DE LA LÁMINA (se proyecta resumido):</a:t>
-            </a:r>
-          </a:p>
-          <a:p/>
-          <a:p>
-            <a:r>
-              <a:t>Qué es. Una cifra que describa el problema como está hoy, antes de que ustedes toquen nada. «La secretaria dedica unas 2 horas diarias a confirmar citas por teléfono.» «De 40 libros prestados al mes, unos 12 vuelven tarde.»</a:t>
-            </a:r>
-          </a:p>
-          <a:p/>
-          <a:p>
-            <a:r>
-              <a:t>Por qué es obligatoria. Sin línea base no se puede saber si el proyecto sirvió. Un informe final que dice «mejoramos el proceso» no demuestra nada; uno que dice «pasó de 2 horas a 20 minutos» sí. En la Clase 16 se les va a pedir exactamente eso.</a:t>
-            </a:r>
-          </a:p>
-          <a:p/>
-          <a:p>
-            <a:r>
-              <a:t>Cómo se consigue sin presupuesto. Preguntando, contando y midiendo con un cronómetro. Tres preguntas a la persona que hace el trabajo, un conteo de una semana, o el tiempo de un caso medido a mano. No hace falta una encuesta científica: hace falta un número honesto y decir cómo se obtuvo.</a:t>
-            </a:r>
-          </a:p>
-          <a:p/>
-          <a:p>
-            <a:r>
-              <a:t>La regla de honestidad. Toda cifra va con cómo se obtuvo y cuándo. Si es una estimación, se escribe «estimado». Una cifra inventada es peor que ninguna, porque el resto del proyecto se apoya en ella.</a:t>
-            </a:r>
-          </a:p>
-          <a:p/>
-          <a:p>
-            <a:r>
-              <a:t>Si el problema no tiene cifra posible, es señal de que está mal delimitado: casi siempre es demasiado grande. Bájenlo hasta que se pueda contar algo.</a:t>
-            </a:r>
-          </a:p>
-          <a:p/>
-          <a:p>
-            <a:r>
-              <a:t>LA LÍNEA BASE Y LOS CUATRO CRITERIOS DE VIABILIDAD</a:t>
-            </a:r>
-          </a:p>
-          <a:p/>
-          <a:p>
-            <a:r>
-              <a:t>La línea base es la exigencia que más resistencia genera y la que más valor tiene. Es una cifra sobre el problema como está hoy, antes de que el equipo toque nada, y su función es simple: sin ella no hay forma de saber si el proyecto sirvió. En la Clase 16 el informe final va a pedir comparar, y un equipo sin línea base solo puede escribir «mejoramos el proceso», que es una afirmación vacía.</a:t>
-            </a:r>
-          </a:p>
-          <a:p/>
-          <a:p>
-            <a:r>
-              <a:t>Hay que quitarles de encima la idea de que medir requiere presupuesto o estadística. La línea base de un proyecto de este curso se consigue de tres maneras: preguntando a la persona que hace el trabajo, contando durante una semana, o midiendo con un cronómetro un caso. «La secretaria dedica unas dos horas diarias a confirmar citas por teléfono, según lo que ella misma estima» es una línea base perfectamente aceptable, siempre que se diga que es una estimación y de quién viene. La regla de honestidad es la de la sesión 5, aplicada de nuevo: cifra con método y fecha, o no va.</a:t>
-            </a:r>
-          </a:p>
-          <a:p/>
-          <a:p>
-            <a:r>
-              <a:t>Y hay un diagnóstico gratis escondido en esta exigencia: si el problema no admite ninguna cifra, está mal delimitado, y casi siempre es porque es demasiado grande. «La deserción estudiantil» no se puede medir con lo que tiene un equipo de primer semestre; «cuántos de los 30 compañeros de mi grupo no saben en qué semestre pierden el beneficio de la beca» sí. Bajar el problema hasta que se pueda contar algo es la manera más rápida de volverlo abordable.</a:t>
-            </a:r>
-          </a:p>
-          <a:p/>
-          <a:p>
-            <a:r>
-              <a:t>Los cuatro criterios son un filtro y hay que aplicarlos en voz alta a cada problema propuesto, uno por uno. *Abordable* con navegador y herramientas gratuitas: nada que exija comprar equipos, contratar servicios de pago o conseguir permisos institucionales que no van a llegar en un semestre. *Medible*: existe la cifra. *Con acceso a los actores*: pueden hablar esta semana con alguien que vive el problema, sin trámites; este criterio es el que descarta más propuestas y hay que ser firme, porque un proyecto sobre una entidad a la que nadie puede preguntarle nada termina siendo un ejercicio de imaginación con aspecto de proyecto. *Con dueño del problema*: hay una persona o un grupo concreto al que le duele y que reconocería la mejora; si el afectado es «la sociedad», no hay a quién mostrarle el resultado en la Clase 15.</a:t>
-            </a:r>
-          </a:p>
-          <a:p/>
-          <a:p>
-            <a:r>
-              <a:t>Una advertencia sobre el ánimo del grupo: aplicar estos criterios va a matar algunas ideas ambiciosas y eso frustra. Vale la pena decirles por qué se hace: es mejor resolver algo pequeño de verdad que simular algo grande, y en un primer semestre el objetivo es que aprendan a formular y a demostrar, no que salven la ciudad. Un proyecto pequeño y verificable saca mejor nota que uno grandioso e imposible, y hay que decirlo hoy, antes de que se enamoren de la idea.</a:t>
+              <a:t>Si un equipo no puede ponerle una cifra a su problema, casi siempre es porque es demasiado grande. La salida es bajarlo hasta un lugar y un grupo de personas concretos.</a:t>
             </a:r>
           </a:p>
         </p:txBody>
@@ -990,7 +794,25 @@
           <a:lstStyle/>
           <a:p>
             <a:r>
-              <a:t>La regla de honestidad: toda cifra lleva cómo se obtuvo y cuándo. Un «14 min» suelto no vale; «14 min, 10 clientes, viernes en la noche» sí.</a:t>
+              <a:t>LA PREGUNTA DE ENTRADA: LA SOLUCIÓN DISFRAZADA DE PROBLEMA</a:t>
+            </a:r>
+          </a:p>
+          <a:p/>
+          <a:p>
+            <a:r>
+              <a:t>«En el barrio falta una app» es la frase que un profesor de primer semestre va a oír docenas de veces, y es el error más costoso del curso porque no se ve: parece un problema, tiene sujeto, tiene carencia, y sin embargo ya trae la solución adentro. Si el problema es «falta una app», entonces cualquier app resuelve el problema, y el proyecto se convierte en un ejercicio de construir algo sin saber para qué.</a:t>
+            </a:r>
+          </a:p>
+          <a:p/>
+          <a:p>
+            <a:r>
+              <a:t>La prueba que conviene enseñar es de una sola pregunta y sirve para toda la vida: ¿esto se podría resolver sin ninguna app? Si la respuesta es sí —y casi siempre lo es—, entonces el problema es otro y hay que buscarlo. Si el problema verdadero es que la gente no sabe si el libro que necesita está disponible, eso se puede resolver con una app, con una lista pegada en la puerta o con un número de WhatsApp. Que existan varias soluciones posibles es la señal de que el problema está bien escrito.</a:t>
+            </a:r>
+          </a:p>
+          <a:p/>
+          <a:p>
+            <a:r>
+              <a:t>Recoja las respuestas del muro en los diez minutos de apertura y no las corrija: en el minuto 12, con la primera diapositiva, van a ver ellos mismos que casi todo lo que escribieron era un síntoma o una solución.</a:t>
             </a:r>
           </a:p>
         </p:txBody>
@@ -1060,7 +882,31 @@
           <a:lstStyle/>
           <a:p>
             <a:r>
-              <a:t>Si un equipo no puede ponerle una cifra a su problema, casi siempre es porque es demasiado grande. La salida es bajarlo hasta un lugar y un grupo de personas concretos.</a:t>
+              <a:t>LAS TRES COSAS QUE SE CONFUNDEN Y CÓMO SE ESCRIBE UN PROBLEMA</a:t>
+            </a:r>
+          </a:p>
+          <a:p/>
+          <a:p>
+            <a:r>
+              <a:t>El síntoma es la señal visible: la queja, la demora, la pérdida. «La gente se queja del servicio» es un síntoma perfecto y un problema inservible, porque no dice de qué se queja ni qué no puede hacer. Los síntomas son útiles —son la pista que lleva al problema— pero atacar un síntoma produce soluciones cosméticas: si el síntoma es que la fila es larga, poner sillas mejora la fila y no toca el problema.</a:t>
+            </a:r>
+          </a:p>
+          <a:p/>
+          <a:p>
+            <a:r>
+              <a:t>La solución disfrazada es la más peligrosa porque se ve profesional. «Falta un sistema», «hay que digitalizar el proceso», «queremos hacerlo con IA». Las tres eligen la herramienta antes de saber qué se va a resolver, y cierran el análisis: una vez que el equipo decidió que va a hacer una app con IA, va a interpretar cualquier hallazgo como confirmación.</a:t>
+            </a:r>
+          </a:p>
+          <a:p/>
+          <a:p>
+            <a:r>
+              <a:t>El juicio es la tercera y la más común en primer semestre: «no hay tecnología en el negocio», «el proceso es muy anticuado». Son opiniones sobre un estado de cosas y no dicen a quién le cuesta qué. Un negocio sin tecnología puede estar funcionando perfectamente; la falta de tecnología no es un problema por sí misma, y esta es una idea que hay que decir en voz alta en un curso de ingeniería de sistemas, porque va contra el reflejo del gremio.</a:t>
+            </a:r>
+          </a:p>
+          <a:p/>
+          <a:p>
+            <a:r>
+              <a:t>La fórmula del enunciado, y conviene dictarla para que la copien: *a QUIÉN le pasa QUÉ, con qué CONSECUENCIA*, más una cifra. Ejemplo bien escrito: «los usuarios de la biblioteca del barrio no saben si un libro está disponible antes de ir, así que hacen viajes en vano; de cada diez visitas, unas cuatro terminan sin préstamo». Tiene sujeto (los usuarios), tiene el qué (no saben la disponibilidad), tiene la consecuencia (viajes en vano) y tiene una cifra. Y no menciona ninguna tecnología, que es lo que deja el espacio para diseñar.</a:t>
             </a:r>
           </a:p>
         </p:txBody>
@@ -1130,25 +976,37 @@
           <a:lstStyle/>
           <a:p>
             <a:r>
-              <a:t>LA PREGUNTA DE ENTRADA: LA SOLUCIÓN DISFRAZADA DE PROBLEMA</a:t>
+              <a:t>EL ÁRBOL DEL PROBLEMA: LA HERRAMIENTA QUE EVITA LAS SOLUCIONES COSMÉTICAS</a:t>
             </a:r>
           </a:p>
           <a:p/>
           <a:p>
             <a:r>
-              <a:t>«En el barrio falta una app» es la frase que un profesor de primer semestre va a oír docenas de veces, y es el error más costoso del curso porque no se ve: parece un problema, tiene sujeto, tiene carencia, y sin embargo ya trae la solución adentro. Si el problema es «falta una app», entonces cualquier app resuelve el problema, y el proyecto se convierte en un ejercicio de construir algo sin saber para qué.</a:t>
+              <a:t>El árbol de problemas es una técnica vieja y muy usada en formulación de proyectos, y para primer semestre tiene una virtud enorme: es un dibujo, así que se puede hacer en quince minutos y se puede discutir señalando con el dedo.</a:t>
             </a:r>
           </a:p>
           <a:p/>
           <a:p>
             <a:r>
-              <a:t>La prueba que conviene enseñar es de una sola pregunta y sirve para toda la vida: ¿esto se podría resolver sin ninguna app? Si la respuesta es sí —y casi siempre lo es—, entonces el problema es otro y hay que buscarlo. Si el problema verdadero es que la gente no sabe si el libro que necesita está disponible, eso se puede resolver con una app, con una lista pegada en la puerta o con un número de WhatsApp. Que existan varias soluciones posibles es la señal de que el problema está bien escrito.</a:t>
+              <a:t>Se dibuja con el problema en el tronco, una sola frase. Hacia arriba, las ramas son los efectos: lo que se ve, lo que la gente reporta, lo que duele. Hacia abajo, las raíces son las causas, y hay dos niveles: las causas directas (por qué ocurre el problema) y las causas de fondo (por qué ocurre cada causa). Se dibuja de arriba hacia abajo y se lee de abajo hacia arriba, porque así se ve la cadena completa: esta causa de fondo produce esta causa, que produce el problema, que produce estos efectos.</a:t>
             </a:r>
           </a:p>
           <a:p/>
           <a:p>
             <a:r>
-              <a:t>Recoja las respuestas del muro en los diez minutos de apertura y no las corrija: en el minuto 12, con la primera diapositiva, van a ver ellos mismos que casi todo lo que escribieron era un síntoma o una solución.</a:t>
+              <a:t>La regla que hay que repetir hasta el cansancio: el proyecto ataca una causa, no una rama. Si el equipo diseña para los efectos, produce algo que alivia la molestia y deja el problema intacto. Y la segunda regla, práctica: dos o tres causas directas, no diez. Un árbol con diez raíces no es un análisis, es una lista de todo lo que se les ocurrió, y con eso no se puede decidir.</a:t>
+            </a:r>
+          </a:p>
+          <a:p/>
+          <a:p>
+            <a:r>
+              <a:t>El momento de aprendizaje real ocurre en el segundo nivel de raíces, y conviene provocarlo en las salas: cuando el equipo baja de «no hay un registro actualizado» a «el registro se actualiza a mano al final del día y nadie tiene tiempo», ahí aparece por primera vez algo que un estudiante de primer semestre puede efectivamente cambiar en un semestre. Antes de ese nivel, todo se ve demasiado grande.</a:t>
+            </a:r>
+          </a:p>
+          <a:p/>
+          <a:p>
+            <a:r>
+              <a:t>Un detalle metodológico que ahorra discusiones: si una causa no se puede afectar con nada que el equipo pueda hacer —el presupuesto del municipio, la cultura ciudadana, la ley—, se dibuja igual, pero se marca. Se llama restricción y no es una derrota: es información. Un proyecto que sabe qué no puede cambiar es más serio que uno que promete cambiarlo todo.</a:t>
             </a:r>
           </a:p>
         </p:txBody>
@@ -1218,31 +1076,37 @@
           <a:lstStyle/>
           <a:p>
             <a:r>
-              <a:t>LAS TRES COSAS QUE SE CONFUNDEN Y CÓMO SE ESCRIBE UN PROBLEMA</a:t>
+              <a:t>LA LÍNEA BASE Y LOS CUATRO CRITERIOS DE VIABILIDAD</a:t>
             </a:r>
           </a:p>
           <a:p/>
           <a:p>
             <a:r>
-              <a:t>El síntoma es la señal visible: la queja, la demora, la pérdida. «La gente se queja del servicio» es un síntoma perfecto y un problema inservible, porque no dice de qué se queja ni qué no puede hacer. Los síntomas son útiles —son la pista que lleva al problema— pero atacar un síntoma produce soluciones cosméticas: si el síntoma es que la fila es larga, poner sillas mejora la fila y no toca el problema.</a:t>
+              <a:t>La línea base es la exigencia que más resistencia genera y la que más valor tiene. Es una cifra sobre el problema como está hoy, antes de que el equipo toque nada, y su función es simple: sin ella no hay forma de saber si el proyecto sirvió. En la Clase 16 el informe final va a pedir comparar, y un equipo sin línea base solo puede escribir «mejoramos el proceso», que es una afirmación vacía.</a:t>
             </a:r>
           </a:p>
           <a:p/>
           <a:p>
             <a:r>
-              <a:t>La solución disfrazada es la más peligrosa porque se ve profesional. «Falta un sistema», «hay que digitalizar el proceso», «queremos hacerlo con IA». Las tres eligen la herramienta antes de saber qué se va a resolver, y cierran el análisis: una vez que el equipo decidió que va a hacer una app con IA, va a interpretar cualquier hallazgo como confirmación.</a:t>
+              <a:t>Hay que quitarles de encima la idea de que medir requiere presupuesto o estadística. La línea base de un proyecto de este curso se consigue de tres maneras: preguntando a la persona que hace el trabajo, contando durante una semana, o midiendo con un cronómetro un caso. «La secretaria dedica unas dos horas diarias a confirmar citas por teléfono, según lo que ella misma estima» es una línea base perfectamente aceptable, siempre que se diga que es una estimación y de quién viene. La regla de honestidad es la de la sesión 5, aplicada de nuevo: cifra con método y fecha, o no va.</a:t>
             </a:r>
           </a:p>
           <a:p/>
           <a:p>
             <a:r>
-              <a:t>El juicio es la tercera y la más común en primer semestre: «no hay tecnología en el negocio», «el proceso es muy anticuado». Son opiniones sobre un estado de cosas y no dicen a quién le cuesta qué. Un negocio sin tecnología puede estar funcionando perfectamente; la falta de tecnología no es un problema por sí misma, y esta es una idea que hay que decir en voz alta en un curso de ingeniería de sistemas, porque va contra el reflejo del gremio.</a:t>
+              <a:t>Y hay un diagnóstico gratis escondido en esta exigencia: si el problema no admite ninguna cifra, está mal delimitado, y casi siempre es porque es demasiado grande. «La deserción estudiantil» no se puede medir con lo que tiene un equipo de primer semestre; «cuántos de los 30 compañeros de mi grupo no saben en qué semestre pierden el beneficio de la beca» sí. Bajar el problema hasta que se pueda contar algo es la manera más rápida de volverlo abordable.</a:t>
             </a:r>
           </a:p>
           <a:p/>
           <a:p>
             <a:r>
-              <a:t>La fórmula del enunciado, y conviene dictarla para que la copien: *a QUIÉN le pasa QUÉ, con qué CONSECUENCIA*, más una cifra. Ejemplo bien escrito: «los usuarios de la biblioteca del barrio no saben si un libro está disponible antes de ir, así que hacen viajes en vano; de cada diez visitas, unas cuatro terminan sin préstamo». Tiene sujeto (los usuarios), tiene el qué (no saben la disponibilidad), tiene la consecuencia (viajes en vano) y tiene una cifra. Y no menciona ninguna tecnología, que es lo que deja el espacio para diseñar.</a:t>
+              <a:t>Los cuatro criterios son un filtro y hay que aplicarlos en voz alta a cada problema propuesto, uno por uno. *Abordable* con navegador y herramientas gratuitas: nada que exija comprar equipos, contratar servicios de pago o conseguir permisos institucionales que no van a llegar en un semestre. *Medible*: existe la cifra. *Con acceso a los actores*: pueden hablar esta semana con alguien que vive el problema, sin trámites; este criterio es el que descarta más propuestas y hay que ser firme, porque un proyecto sobre una entidad a la que nadie puede preguntarle nada termina siendo un ejercicio de imaginación con aspecto de proyecto. *Con dueño del problema*: hay una persona o un grupo concreto al que le duele y que reconocería la mejora; si el afectado es «la sociedad», no hay a quién mostrarle el resultado en la Clase 15.</a:t>
+            </a:r>
+          </a:p>
+          <a:p/>
+          <a:p>
+            <a:r>
+              <a:t>Una advertencia sobre el ánimo del grupo: aplicar estos criterios va a matar algunas ideas ambiciosas y eso frustra. Vale la pena decirles por qué se hace: es mejor resolver algo pequeño de verdad que simular algo grande, y en un primer semestre el objetivo es que aprendan a formular y a demostrar, no que salven la ciudad. Un proyecto pequeño y verificable saca mejor nota que uno grandioso e imposible, y hay que decirlo hoy, antes de que se enamoren de la idea.</a:t>
             </a:r>
           </a:p>
         </p:txBody>
@@ -1312,37 +1176,37 @@
           <a:lstStyle/>
           <a:p>
             <a:r>
-              <a:t>EL ÁRBOL DEL PROBLEMA: LA HERRAMIENTA QUE EVITA LAS SOLUCIONES COSMÉTICAS</a:t>
+              <a:t>LA LÍNEA BASE Y LOS CUATRO CRITERIOS DE VIABILIDAD</a:t>
             </a:r>
           </a:p>
           <a:p/>
           <a:p>
             <a:r>
-              <a:t>El árbol de problemas es una técnica vieja y muy usada en formulación de proyectos, y para primer semestre tiene una virtud enorme: es un dibujo, así que se puede hacer en quince minutos y se puede discutir señalando con el dedo.</a:t>
+              <a:t>La línea base es la exigencia que más resistencia genera y la que más valor tiene. Es una cifra sobre el problema como está hoy, antes de que el equipo toque nada, y su función es simple: sin ella no hay forma de saber si el proyecto sirvió. En la Clase 16 el informe final va a pedir comparar, y un equipo sin línea base solo puede escribir «mejoramos el proceso», que es una afirmación vacía.</a:t>
             </a:r>
           </a:p>
           <a:p/>
           <a:p>
             <a:r>
-              <a:t>Se dibuja con el problema en el tronco, una sola frase. Hacia arriba, las ramas son los efectos: lo que se ve, lo que la gente reporta, lo que duele. Hacia abajo, las raíces son las causas, y hay dos niveles: las causas directas (por qué ocurre el problema) y las causas de fondo (por qué ocurre cada causa). Se dibuja de arriba hacia abajo y se lee de abajo hacia arriba, porque así se ve la cadena completa: esta causa de fondo produce esta causa, que produce el problema, que produce estos efectos.</a:t>
+              <a:t>Hay que quitarles de encima la idea de que medir requiere presupuesto o estadística. La línea base de un proyecto de este curso se consigue de tres maneras: preguntando a la persona que hace el trabajo, contando durante una semana, o midiendo con un cronómetro un caso. «La secretaria dedica unas dos horas diarias a confirmar citas por teléfono, según lo que ella misma estima» es una línea base perfectamente aceptable, siempre que se diga que es una estimación y de quién viene. La regla de honestidad es la de la sesión 5, aplicada de nuevo: cifra con método y fecha, o no va.</a:t>
             </a:r>
           </a:p>
           <a:p/>
           <a:p>
             <a:r>
-              <a:t>La regla que hay que repetir hasta el cansancio: el proyecto ataca una causa, no una rama. Si el equipo diseña para los efectos, produce algo que alivia la molestia y deja el problema intacto. Y la segunda regla, práctica: dos o tres causas directas, no diez. Un árbol con diez raíces no es un análisis, es una lista de todo lo que se les ocurrió, y con eso no se puede decidir.</a:t>
+              <a:t>Y hay un diagnóstico gratis escondido en esta exigencia: si el problema no admite ninguna cifra, está mal delimitado, y casi siempre es porque es demasiado grande. «La deserción estudiantil» no se puede medir con lo que tiene un equipo de primer semestre; «cuántos de los 30 compañeros de mi grupo no saben en qué semestre pierden el beneficio de la beca» sí. Bajar el problema hasta que se pueda contar algo es la manera más rápida de volverlo abordable.</a:t>
             </a:r>
           </a:p>
           <a:p/>
           <a:p>
             <a:r>
-              <a:t>El momento de aprendizaje real ocurre en el segundo nivel de raíces, y conviene provocarlo en las salas: cuando el equipo baja de «no hay un registro actualizado» a «el registro se actualiza a mano al final del día y nadie tiene tiempo», ahí aparece por primera vez algo que un estudiante de primer semestre puede efectivamente cambiar en un semestre. Antes de ese nivel, todo se ve demasiado grande.</a:t>
+              <a:t>Los cuatro criterios son un filtro y hay que aplicarlos en voz alta a cada problema propuesto, uno por uno. *Abordable* con navegador y herramientas gratuitas: nada que exija comprar equipos, contratar servicios de pago o conseguir permisos institucionales que no van a llegar en un semestre. *Medible*: existe la cifra. *Con acceso a los actores*: pueden hablar esta semana con alguien que vive el problema, sin trámites; este criterio es el que descarta más propuestas y hay que ser firme, porque un proyecto sobre una entidad a la que nadie puede preguntarle nada termina siendo un ejercicio de imaginación con aspecto de proyecto. *Con dueño del problema*: hay una persona o un grupo concreto al que le duele y que reconocería la mejora; si el afectado es «la sociedad», no hay a quién mostrarle el resultado en la Clase 15.</a:t>
             </a:r>
           </a:p>
           <a:p/>
           <a:p>
             <a:r>
-              <a:t>Un detalle metodológico que ahorra discusiones: si una causa no se puede afectar con nada que el equipo pueda hacer —el presupuesto del municipio, la cultura ciudadana, la ley—, se dibuja igual, pero se marca. Se llama restricción y no es una derrota: es información. Un proyecto que sabe qué no puede cambiar es más serio que uno que promete cambiarlo todo.</a:t>
+              <a:t>Una advertencia sobre el ánimo del grupo: aplicar estos criterios va a matar algunas ideas ambiciosas y eso frustra. Vale la pena decirles por qué se hace: es mejor resolver algo pequeño de verdad que simular algo grande, y en un primer semestre el objetivo es que aprendan a formular y a demostrar, no que salven la ciudad. Un proyecto pequeño y verificable saca mejor nota que uno grandioso e imposible, y hay que decirlo hoy, antes de que se enamoren de la idea.</a:t>
             </a:r>
           </a:p>
         </p:txBody>
@@ -4873,118 +4737,14 @@
       </p:sp>
       <p:sp>
         <p:nvSpPr>
-          <p:cNvPr id="5" name="Rounded Rectangle 4"/>
-          <p:cNvSpPr/>
-          <p:nvPr/>
-        </p:nvSpPr>
-        <p:spPr>
-          <a:xfrm>
-            <a:off x="5797149" y="1573813"/>
-            <a:ext cx="6010497" cy="4057845"/>
-          </a:xfrm>
-          <a:prstGeom prst="roundRect">
-            <a:avLst>
-              <a:gd name="adj" fmla="val 4000"/>
-            </a:avLst>
-          </a:prstGeom>
-          <a:solidFill>
-            <a:srgbClr val="E8EEF4"/>
-          </a:solidFill>
-          <a:ln>
-            <a:noFill/>
-          </a:ln>
-        </p:spPr>
-        <p:style>
-          <a:lnRef idx="1">
-            <a:schemeClr val="accent1"/>
-          </a:lnRef>
-          <a:fillRef idx="3">
-            <a:schemeClr val="accent1"/>
-          </a:fillRef>
-          <a:effectRef idx="2">
-            <a:schemeClr val="accent1"/>
-          </a:effectRef>
-          <a:fontRef idx="minor">
-            <a:schemeClr val="lt1"/>
-          </a:fontRef>
-        </p:style>
-        <p:txBody>
-          <a:bodyPr rtlCol="0" anchor="ctr"/>
-          <a:lstStyle/>
-          <a:p>
-            <a:pPr algn="ctr"/>
-          </a:p>
-        </p:txBody>
-      </p:sp>
-      <p:pic>
-        <p:nvPicPr>
-          <p:cNvPr id="6" name="Picture 5" descr="smartphone-stopwatch-timer-hand.jpg"/>
-          <p:cNvPicPr>
-            <a:picLocks noChangeAspect="1"/>
-          </p:cNvPicPr>
-          <p:nvPr/>
-        </p:nvPicPr>
-        <p:blipFill>
-          <a:blip r:embed="rId2"/>
-          <a:stretch>
-            <a:fillRect/>
-          </a:stretch>
-        </p:blipFill>
-        <p:spPr>
-          <a:xfrm>
-            <a:off x="5870301" y="1646965"/>
-            <a:ext cx="5864193" cy="3911541"/>
-          </a:xfrm>
-          <a:prstGeom prst="rect">
-            <a:avLst/>
-          </a:prstGeom>
-        </p:spPr>
-      </p:pic>
-      <p:sp>
-        <p:nvSpPr>
-          <p:cNvPr id="7" name="TextBox 6"/>
+          <p:cNvPr id="5" name="TextBox 4"/>
           <p:cNvSpPr txBox="1"/>
           <p:nvPr/>
         </p:nvSpPr>
         <p:spPr>
           <a:xfrm>
-            <a:off x="5870301" y="5961888"/>
-            <a:ext cx="5864193" cy="320040"/>
-          </a:xfrm>
-          <a:prstGeom prst="rect">
-            <a:avLst/>
-          </a:prstGeom>
-          <a:noFill/>
-        </p:spPr>
-        <p:txBody>
-          <a:bodyPr wrap="square">
-            <a:spAutoFit/>
-          </a:bodyPr>
-          <a:lstStyle/>
-          <a:p>
-            <a:pPr algn="ctr"/>
-            <a:r>
-              <a:rPr sz="1100" b="0" i="1">
-                <a:solidFill>
-                  <a:srgbClr val="666666"/>
-                </a:solidFill>
-                <a:latin typeface="Calibri"/>
-              </a:rPr>
-              <a:t>Foto: Castorly Stock · Pexels</a:t>
-            </a:r>
-          </a:p>
-        </p:txBody>
-      </p:sp>
-      <p:sp>
-        <p:nvSpPr>
-          <p:cNvPr id="8" name="TextBox 7"/>
-          <p:cNvSpPr txBox="1"/>
-          <p:nvPr/>
-        </p:nvSpPr>
-        <p:spPr>
-          <a:xfrm>
-            <a:off x="457200" y="1353312"/>
-            <a:ext cx="5093061" cy="5047488"/>
+            <a:off x="457200" y="1170432"/>
+            <a:ext cx="11277295" cy="5230368"/>
           </a:xfrm>
           <a:prstGeom prst="rect">
             <a:avLst/>
@@ -5132,11 +4892,61 @@
               <a:t>.</a:t>
             </a:r>
           </a:p>
-        </p:txBody>
-      </p:sp>
-      <p:sp>
-        <p:nvSpPr>
-          <p:cNvPr id="9" name="TextBox 8"/>
+          <a:p>
+            <a:pPr>
+              <a:spcAft>
+                <a:spcPts val="800"/>
+              </a:spcAft>
+            </a:pPr>
+            <a:r>
+              <a:rPr sz="2000" b="0" i="0">
+                <a:solidFill>
+                  <a:srgbClr val="333333"/>
+                </a:solidFill>
+                <a:latin typeface="Calibri"/>
+              </a:rPr>
+              <a:t>–   Al final del semestre se mide </a:t>
+            </a:r>
+            <a:r>
+              <a:rPr sz="2000" b="1" i="0">
+                <a:solidFill>
+                  <a:srgbClr val="333333"/>
+                </a:solidFill>
+                <a:latin typeface="Calibri"/>
+              </a:rPr>
+              <a:t>igual</a:t>
+            </a:r>
+            <a:r>
+              <a:rPr sz="2000" b="0" i="0">
+                <a:solidFill>
+                  <a:srgbClr val="333333"/>
+                </a:solidFill>
+                <a:latin typeface="Calibri"/>
+              </a:rPr>
+              <a:t> y se compara. Así se sabe si el proyecto sirvió.</a:t>
+            </a:r>
+          </a:p>
+          <a:p>
+            <a:pPr>
+              <a:spcAft>
+                <a:spcPts val="800"/>
+              </a:spcAft>
+            </a:pPr>
+            <a:r>
+              <a:rPr sz="2000" b="0" i="0">
+                <a:solidFill>
+                  <a:srgbClr val="333333"/>
+                </a:solidFill>
+                <a:latin typeface="Calibri"/>
+              </a:rPr>
+              <a:t>–   Sin esa cifra, «mejoramos la atención» no se puede comprobar.</a:t>
+            </a:r>
+          </a:p>
+        </p:txBody>
+      </p:sp>
+      <p:sp>
+        <p:nvSpPr>
+          <p:cNvPr id="6" name="TextBox 5"/>
           <p:cNvSpPr txBox="1"/>
           <p:nvPr/>
         </p:nvSpPr>
@@ -8011,118 +7821,14 @@
       </p:sp>
       <p:sp>
         <p:nvSpPr>
-          <p:cNvPr id="5" name="Rounded Rectangle 4"/>
-          <p:cNvSpPr/>
-          <p:nvPr/>
-        </p:nvSpPr>
-        <p:spPr>
-          <a:xfrm>
-            <a:off x="5797149" y="1573813"/>
-            <a:ext cx="6010497" cy="4057845"/>
-          </a:xfrm>
-          <a:prstGeom prst="roundRect">
-            <a:avLst>
-              <a:gd name="adj" fmla="val 4000"/>
-            </a:avLst>
-          </a:prstGeom>
-          <a:solidFill>
-            <a:srgbClr val="E8EEF4"/>
-          </a:solidFill>
-          <a:ln>
-            <a:noFill/>
-          </a:ln>
-        </p:spPr>
-        <p:style>
-          <a:lnRef idx="1">
-            <a:schemeClr val="accent1"/>
-          </a:lnRef>
-          <a:fillRef idx="3">
-            <a:schemeClr val="accent1"/>
-          </a:fillRef>
-          <a:effectRef idx="2">
-            <a:schemeClr val="accent1"/>
-          </a:effectRef>
-          <a:fontRef idx="minor">
-            <a:schemeClr val="lt1"/>
-          </a:fontRef>
-        </p:style>
-        <p:txBody>
-          <a:bodyPr rtlCol="0" anchor="ctr"/>
-          <a:lstStyle/>
-          <a:p>
-            <a:pPr algn="ctr"/>
-          </a:p>
-        </p:txBody>
-      </p:sp>
-      <p:pic>
-        <p:nvPicPr>
-          <p:cNvPr id="6" name="Picture 5" descr="students-learning-laptops-classroom.jpg"/>
-          <p:cNvPicPr>
-            <a:picLocks noChangeAspect="1"/>
-          </p:cNvPicPr>
-          <p:nvPr/>
-        </p:nvPicPr>
-        <p:blipFill>
-          <a:blip r:embed="rId2"/>
-          <a:stretch>
-            <a:fillRect/>
-          </a:stretch>
-        </p:blipFill>
-        <p:spPr>
-          <a:xfrm>
-            <a:off x="5870301" y="1646965"/>
-            <a:ext cx="5864193" cy="3911541"/>
-          </a:xfrm>
-          <a:prstGeom prst="rect">
-            <a:avLst/>
-          </a:prstGeom>
-        </p:spPr>
-      </p:pic>
-      <p:sp>
-        <p:nvSpPr>
-          <p:cNvPr id="7" name="TextBox 6"/>
+          <p:cNvPr id="5" name="TextBox 4"/>
           <p:cNvSpPr txBox="1"/>
           <p:nvPr/>
         </p:nvSpPr>
         <p:spPr>
           <a:xfrm>
-            <a:off x="5870301" y="5961888"/>
-            <a:ext cx="5864193" cy="320040"/>
-          </a:xfrm>
-          <a:prstGeom prst="rect">
-            <a:avLst/>
-          </a:prstGeom>
-          <a:noFill/>
-        </p:spPr>
-        <p:txBody>
-          <a:bodyPr wrap="square">
-            <a:spAutoFit/>
-          </a:bodyPr>
-          <a:lstStyle/>
-          <a:p>
-            <a:pPr algn="ctr"/>
-            <a:r>
-              <a:rPr sz="1100" b="0" i="1">
-                <a:solidFill>
-                  <a:srgbClr val="666666"/>
-                </a:solidFill>
-                <a:latin typeface="Calibri"/>
-              </a:rPr>
-              <a:t>Foto: Mikhail Nilov · Pexels</a:t>
-            </a:r>
-          </a:p>
-        </p:txBody>
-      </p:sp>
-      <p:sp>
-        <p:nvSpPr>
-          <p:cNvPr id="8" name="TextBox 7"/>
-          <p:cNvSpPr txBox="1"/>
-          <p:nvPr/>
-        </p:nvSpPr>
-        <p:spPr>
-          <a:xfrm>
-            <a:off x="457200" y="1353312"/>
-            <a:ext cx="5093061" cy="5047488"/>
+            <a:off x="457200" y="1170432"/>
+            <a:ext cx="11277295" cy="5230368"/>
           </a:xfrm>
           <a:prstGeom prst="rect">
             <a:avLst/>
@@ -8306,11 +8012,45 @@
               <a:t> con los cuatro criterios.</a:t>
             </a:r>
           </a:p>
-        </p:txBody>
-      </p:sp>
-      <p:sp>
-        <p:nvSpPr>
-          <p:cNvPr id="9" name="TextBox 8"/>
+          <a:p>
+            <a:pPr>
+              <a:spcAft>
+                <a:spcPts val="800"/>
+              </a:spcAft>
+            </a:pPr>
+            <a:r>
+              <a:rPr sz="2000" b="0" i="0">
+                <a:solidFill>
+                  <a:srgbClr val="333333"/>
+                </a:solidFill>
+                <a:latin typeface="Calibri"/>
+              </a:rPr>
+              <a:t>–   Entregar la </a:t>
+            </a:r>
+            <a:r>
+              <a:rPr sz="2000" b="1" i="0">
+                <a:solidFill>
+                  <a:srgbClr val="333333"/>
+                </a:solidFill>
+                <a:latin typeface="Calibri"/>
+              </a:rPr>
+              <a:t>ficha del problema</a:t>
+            </a:r>
+            <a:r>
+              <a:rPr sz="2000" b="0" i="0">
+                <a:solidFill>
+                  <a:srgbClr val="333333"/>
+                </a:solidFill>
+                <a:latin typeface="Calibri"/>
+              </a:rPr>
+              <a:t> del proyecto del equipo.</a:t>
+            </a:r>
+          </a:p>
+        </p:txBody>
+      </p:sp>
+      <p:sp>
+        <p:nvSpPr>
+          <p:cNvPr id="6" name="TextBox 5"/>
           <p:cNvSpPr txBox="1"/>
           <p:nvPr/>
         </p:nvSpPr>
@@ -11990,118 +11730,14 @@
       </p:sp>
       <p:sp>
         <p:nvSpPr>
-          <p:cNvPr id="5" name="Rounded Rectangle 4"/>
-          <p:cNvSpPr/>
-          <p:nvPr/>
-        </p:nvSpPr>
-        <p:spPr>
-          <a:xfrm>
-            <a:off x="5797149" y="1331356"/>
-            <a:ext cx="6010497" cy="4542758"/>
-          </a:xfrm>
-          <a:prstGeom prst="roundRect">
-            <a:avLst>
-              <a:gd name="adj" fmla="val 4000"/>
-            </a:avLst>
-          </a:prstGeom>
-          <a:solidFill>
-            <a:srgbClr val="E8EEF4"/>
-          </a:solidFill>
-          <a:ln>
-            <a:noFill/>
-          </a:ln>
-        </p:spPr>
-        <p:style>
-          <a:lnRef idx="1">
-            <a:schemeClr val="accent1"/>
-          </a:lnRef>
-          <a:fillRef idx="3">
-            <a:schemeClr val="accent1"/>
-          </a:fillRef>
-          <a:effectRef idx="2">
-            <a:schemeClr val="accent1"/>
-          </a:effectRef>
-          <a:fontRef idx="minor">
-            <a:schemeClr val="lt1"/>
-          </a:fontRef>
-        </p:style>
-        <p:txBody>
-          <a:bodyPr rtlCol="0" anchor="ctr"/>
-          <a:lstStyle/>
-          <a:p>
-            <a:pPr algn="ctr"/>
-          </a:p>
-        </p:txBody>
-      </p:sp>
-      <p:pic>
-        <p:nvPicPr>
-          <p:cNvPr id="6" name="Picture 5" descr="stopwatch-measurement.jpg"/>
-          <p:cNvPicPr>
-            <a:picLocks noChangeAspect="1"/>
-          </p:cNvPicPr>
-          <p:nvPr/>
-        </p:nvPicPr>
-        <p:blipFill>
-          <a:blip r:embed="rId2"/>
-          <a:stretch>
-            <a:fillRect/>
-          </a:stretch>
-        </p:blipFill>
-        <p:spPr>
-          <a:xfrm>
-            <a:off x="5870301" y="1404508"/>
-            <a:ext cx="5864193" cy="4396454"/>
-          </a:xfrm>
-          <a:prstGeom prst="rect">
-            <a:avLst/>
-          </a:prstGeom>
-        </p:spPr>
-      </p:pic>
-      <p:sp>
-        <p:nvSpPr>
-          <p:cNvPr id="7" name="TextBox 6"/>
+          <p:cNvPr id="5" name="TextBox 4"/>
           <p:cNvSpPr txBox="1"/>
           <p:nvPr/>
         </p:nvSpPr>
         <p:spPr>
           <a:xfrm>
-            <a:off x="5870301" y="5961888"/>
-            <a:ext cx="5864193" cy="320040"/>
-          </a:xfrm>
-          <a:prstGeom prst="rect">
-            <a:avLst/>
-          </a:prstGeom>
-          <a:noFill/>
-        </p:spPr>
-        <p:txBody>
-          <a:bodyPr wrap="square">
-            <a:spAutoFit/>
-          </a:bodyPr>
-          <a:lstStyle/>
-          <a:p>
-            <a:pPr algn="ctr"/>
-            <a:r>
-              <a:rPr sz="1100" b="0" i="1">
-                <a:solidFill>
-                  <a:srgbClr val="666666"/>
-                </a:solidFill>
-                <a:latin typeface="Calibri"/>
-              </a:rPr>
-              <a:t>Foto: William Warby · Pexels</a:t>
-            </a:r>
-          </a:p>
-        </p:txBody>
-      </p:sp>
-      <p:sp>
-        <p:nvSpPr>
-          <p:cNvPr id="8" name="TextBox 7"/>
-          <p:cNvSpPr txBox="1"/>
-          <p:nvPr/>
-        </p:nvSpPr>
-        <p:spPr>
-          <a:xfrm>
-            <a:off x="457200" y="1353312"/>
-            <a:ext cx="5093061" cy="5047488"/>
+            <a:off x="457200" y="1170432"/>
+            <a:ext cx="11277295" cy="5230368"/>
           </a:xfrm>
           <a:prstGeom prst="rect">
             <a:avLst/>
@@ -12162,7 +11798,7 @@
                 </a:solidFill>
                 <a:latin typeface="Calibri"/>
               </a:rPr>
-              <a:t>, antes de que ustedes toquen nada.</a:t>
+              <a:t>, antes de que ustedes toquen nada. «La secretaria dedica unas 2 horas diarias a confirmar citas por teléfono.» «De 40 libros prestados al mes, unos 12 vuelven tarde.»</a:t>
             </a:r>
           </a:p>
           <a:p>
@@ -12214,7 +11850,7 @@
                 </a:solidFill>
                 <a:latin typeface="Calibri"/>
               </a:rPr>
-              <a:t>.</a:t>
+              <a:t>. Un informe final que dice «mejoramos el proceso» no demuestra nada; uno que dice «pasó de 2 horas a 20 minutos» sí. En la Clase 16 se les va a pedir exactamente eso.</a:t>
             </a:r>
           </a:p>
           <a:p>
@@ -12248,7 +11884,25 @@
                 </a:solidFill>
                 <a:latin typeface="Calibri"/>
               </a:rPr>
-              <a:t> Preguntando, contando y midiendo con un cronómetro.</a:t>
+              <a:t> Preguntando, contando y midiendo con un cronómetro. Tres preguntas a la persona que hace el trabajo, un conteo de una semana, o el tiempo de un caso medido a mano. </a:t>
+            </a:r>
+            <a:r>
+              <a:rPr sz="2000" b="1" i="0">
+                <a:solidFill>
+                  <a:srgbClr val="333333"/>
+                </a:solidFill>
+                <a:latin typeface="Calibri"/>
+              </a:rPr>
+              <a:t>No hace falta una encuesta científica</a:t>
+            </a:r>
+            <a:r>
+              <a:rPr sz="2000" b="0" i="0">
+                <a:solidFill>
+                  <a:srgbClr val="333333"/>
+                </a:solidFill>
+                <a:latin typeface="Calibri"/>
+              </a:rPr>
+              <a:t>: hace falta un número honesto y decir cómo se obtuvo.</a:t>
             </a:r>
           </a:p>
           <a:p>
@@ -12300,14 +11954,48 @@
                 </a:solidFill>
                 <a:latin typeface="Calibri"/>
               </a:rPr>
-              <a:t>.</a:t>
-            </a:r>
-          </a:p>
-        </p:txBody>
-      </p:sp>
-      <p:sp>
-        <p:nvSpPr>
-          <p:cNvPr id="9" name="TextBox 8"/>
+              <a:t>. Si es una estimación, se escribe «estimado». Una cifra inventada es peor que ninguna, porque el resto del proyecto se apoya en ella.</a:t>
+            </a:r>
+          </a:p>
+          <a:p>
+            <a:pPr>
+              <a:spcAft>
+                <a:spcPts val="800"/>
+              </a:spcAft>
+            </a:pPr>
+            <a:r>
+              <a:rPr sz="2000" b="0" i="0">
+                <a:solidFill>
+                  <a:srgbClr val="333333"/>
+                </a:solidFill>
+                <a:latin typeface="Calibri"/>
+              </a:rPr>
+              <a:t>–   </a:t>
+            </a:r>
+            <a:r>
+              <a:rPr sz="2000" b="1" i="0">
+                <a:solidFill>
+                  <a:srgbClr val="333333"/>
+                </a:solidFill>
+                <a:latin typeface="Calibri"/>
+              </a:rPr>
+              <a:t>Si el problema no tiene cifra posible</a:t>
+            </a:r>
+            <a:r>
+              <a:rPr sz="2000" b="0" i="0">
+                <a:solidFill>
+                  <a:srgbClr val="333333"/>
+                </a:solidFill>
+                <a:latin typeface="Calibri"/>
+              </a:rPr>
+              <a:t>, es señal de que está mal delimitado: casi siempre es demasiado grande. Bájenlo hasta que se pueda contar algo.</a:t>
+            </a:r>
+          </a:p>
+        </p:txBody>
+      </p:sp>
+      <p:sp>
+        <p:nvSpPr>
+          <p:cNvPr id="6" name="TextBox 5"/>
           <p:cNvSpPr txBox="1"/>
           <p:nvPr/>
         </p:nvSpPr>

--- a/Introduccion a la Ingenieria/Clases/Clase 6 - Analisis de problemas tecnologicos del entorno/Presentacion.pptx
+++ b/Introduccion a la Ingenieria/Clases/Clase 6 - Analisis de problemas tecnologicos del entorno/Presentacion.pptx
@@ -654,7 +654,73 @@
           <a:lstStyle/>
           <a:p>
             <a:r>
-              <a:t>La regla de honestidad: toda cifra lleva cómo se obtuvo y cuándo. Un «14 min» suelto no vale; «14 min, 10 clientes, viernes en la noche» sí.</a:t>
+              <a:t>TEXTO COMPLETO DE LA LÁMINA (se proyecta resumido):</a:t>
+            </a:r>
+          </a:p>
+          <a:p/>
+          <a:p>
+            <a:r>
+              <a:t>Qué es. Una cifra que describa el problema como está hoy, antes de que ustedes toquen nada. «La secretaria dedica unas 2 horas diarias a confirmar citas por teléfono.» «De 40 libros prestados al mes, unos 12 vuelven tarde.»</a:t>
+            </a:r>
+          </a:p>
+          <a:p/>
+          <a:p>
+            <a:r>
+              <a:t>Por qué es obligatoria. Sin línea base no se puede saber si el proyecto sirvió. Un informe final que dice «mejoramos el proceso» no demuestra nada; uno que dice «pasó de 2 horas a 20 minutos» sí. En la Clase 16 se les va a pedir exactamente eso.</a:t>
+            </a:r>
+          </a:p>
+          <a:p/>
+          <a:p>
+            <a:r>
+              <a:t>Cómo se consigue sin presupuesto. Preguntando, contando y midiendo con un cronómetro. Tres preguntas a la persona que hace el trabajo, un conteo de una semana, o el tiempo de un caso medido a mano. No hace falta una encuesta científica: hace falta un número honesto y decir cómo se obtuvo.</a:t>
+            </a:r>
+          </a:p>
+          <a:p/>
+          <a:p>
+            <a:r>
+              <a:t>La regla de honestidad. Toda cifra va con cómo se obtuvo y cuándo. Si es una estimación, se escribe «estimado». Una cifra inventada es peor que ninguna, porque el resto del proyecto se apoya en ella.</a:t>
+            </a:r>
+          </a:p>
+          <a:p/>
+          <a:p>
+            <a:r>
+              <a:t>Si el problema no tiene cifra posible, es señal de que está mal delimitado: casi siempre es demasiado grande. Bájenlo hasta que se pueda contar algo.</a:t>
+            </a:r>
+          </a:p>
+          <a:p/>
+          <a:p>
+            <a:r>
+              <a:t>LA LÍNEA BASE Y LOS CUATRO CRITERIOS DE VIABILIDAD</a:t>
+            </a:r>
+          </a:p>
+          <a:p/>
+          <a:p>
+            <a:r>
+              <a:t>La línea base es la exigencia que más resistencia genera y la que más valor tiene. Es una cifra sobre el problema como está hoy, antes de que el equipo toque nada, y su función es simple: sin ella no hay forma de saber si el proyecto sirvió. En la Clase 16 el informe final va a pedir comparar, y un equipo sin línea base solo puede escribir «mejoramos el proceso», que es una afirmación vacía.</a:t>
+            </a:r>
+          </a:p>
+          <a:p/>
+          <a:p>
+            <a:r>
+              <a:t>Hay que quitarles de encima la idea de que medir requiere presupuesto o estadística. La línea base de un proyecto de este curso se consigue de tres maneras: preguntando a la persona que hace el trabajo, contando durante una semana, o midiendo con un cronómetro un caso. «La secretaria dedica unas dos horas diarias a confirmar citas por teléfono, según lo que ella misma estima» es una línea base perfectamente aceptable, siempre que se diga que es una estimación y de quién viene. La regla de honestidad es la de la sesión 5, aplicada de nuevo: cifra con método y fecha, o no va.</a:t>
+            </a:r>
+          </a:p>
+          <a:p/>
+          <a:p>
+            <a:r>
+              <a:t>Y hay un diagnóstico gratis escondido en esta exigencia: si el problema no admite ninguna cifra, está mal delimitado, y casi siempre es porque es demasiado grande. «La deserción estudiantil» no se puede medir con lo que tiene un equipo de primer semestre; «cuántos de los 30 compañeros de mi grupo no saben en qué semestre pierden el beneficio de la beca» sí. Bajar el problema hasta que se pueda contar algo es la manera más rápida de volverlo abordable.</a:t>
+            </a:r>
+          </a:p>
+          <a:p/>
+          <a:p>
+            <a:r>
+              <a:t>Los cuatro criterios son un filtro y hay que aplicarlos en voz alta a cada problema propuesto, uno por uno. *Abordable* con navegador y herramientas gratuitas: nada que exija comprar equipos, contratar servicios de pago o conseguir permisos institucionales que no van a llegar en un semestre. *Medible*: existe la cifra. *Con acceso a los actores*: pueden hablar esta semana con alguien que vive el problema, sin trámites; este criterio es el que descarta más propuestas y hay que ser firme, porque un proyecto sobre una entidad a la que nadie puede preguntarle nada termina siendo un ejercicio de imaginación con aspecto de proyecto. *Con dueño del problema*: hay una persona o un grupo concreto al que le duele y que reconocería la mejora; si el afectado es «la sociedad», no hay a quién mostrarle el resultado en la Clase 15.</a:t>
+            </a:r>
+          </a:p>
+          <a:p/>
+          <a:p>
+            <a:r>
+              <a:t>Una advertencia sobre el ánimo del grupo: aplicar estos criterios va a matar algunas ideas ambiciosas y eso frustra. Vale la pena decirles por qué se hace: es mejor resolver algo pequeño de verdad que simular algo grande, y en un primer semestre el objetivo es que aprendan a formular y a demostrar, no que salven la ciudad. Un proyecto pequeño y verificable saca mejor nota que uno grandioso e imposible, y hay que decirlo hoy, antes de que se enamoren de la idea.</a:t>
             </a:r>
           </a:p>
         </p:txBody>
@@ -724,7 +790,49 @@
           <a:lstStyle/>
           <a:p>
             <a:r>
-              <a:t>Si un equipo no puede ponerle una cifra a su problema, casi siempre es porque es demasiado grande. La salida es bajarlo hasta un lugar y un grupo de personas concretos.</a:t>
+              <a:t>TEXTO COMPLETO DE LA LÁMINA (se proyecta resumido):</a:t>
+            </a:r>
+          </a:p>
+          <a:p/>
+          <a:p>
+            <a:r>
+              <a:t>Ir a la tienda el viernes de 6 a 7 p. m., que es la hora pico.</a:t>
+            </a:r>
+          </a:p>
+          <a:p/>
+          <a:p>
+            <a:r>
+              <a:t>Contar 10 clientes y medir con el cronómetro del celular cuánto espera cada uno.</a:t>
+            </a:r>
+          </a:p>
+          <a:p/>
+          <a:p>
+            <a:r>
+              <a:t>Sumar y dividir: el promedio da 14 minutos.</a:t>
+            </a:r>
+          </a:p>
+          <a:p/>
+          <a:p>
+            <a:r>
+              <a:t>Escribirlo completo: «14 min de espera promedio · 10 clientes · viernes 6-7 p. m. · medido el 12/09».</a:t>
+            </a:r>
+          </a:p>
+          <a:p/>
+          <a:p>
+            <a:r>
+              <a:t>Al final del semestre se mide igual y se compara. Así se sabe si el proyecto sirvió.</a:t>
+            </a:r>
+          </a:p>
+          <a:p/>
+          <a:p>
+            <a:r>
+              <a:t>Sin esa cifra, «mejoramos la atención» no se puede comprobar.</a:t>
+            </a:r>
+          </a:p>
+          <a:p/>
+          <a:p>
+            <a:r>
+              <a:t>La regla de honestidad: toda cifra lleva cómo se obtuvo y cuándo. Un «14 min» suelto no vale; «14 min, 10 clientes, viernes en la noche» sí.</a:t>
             </a:r>
           </a:p>
         </p:txBody>
@@ -794,25 +902,7 @@
           <a:lstStyle/>
           <a:p>
             <a:r>
-              <a:t>LA PREGUNTA DE ENTRADA: LA SOLUCIÓN DISFRAZADA DE PROBLEMA</a:t>
-            </a:r>
-          </a:p>
-          <a:p/>
-          <a:p>
-            <a:r>
-              <a:t>«En el barrio falta una app» es la frase que un profesor de primer semestre va a oír docenas de veces, y es el error más costoso del curso porque no se ve: parece un problema, tiene sujeto, tiene carencia, y sin embargo ya trae la solución adentro. Si el problema es «falta una app», entonces cualquier app resuelve el problema, y el proyecto se convierte en un ejercicio de construir algo sin saber para qué.</a:t>
-            </a:r>
-          </a:p>
-          <a:p/>
-          <a:p>
-            <a:r>
-              <a:t>La prueba que conviene enseñar es de una sola pregunta y sirve para toda la vida: ¿esto se podría resolver sin ninguna app? Si la respuesta es sí —y casi siempre lo es—, entonces el problema es otro y hay que buscarlo. Si el problema verdadero es que la gente no sabe si el libro que necesita está disponible, eso se puede resolver con una app, con una lista pegada en la puerta o con un número de WhatsApp. Que existan varias soluciones posibles es la señal de que el problema está bien escrito.</a:t>
-            </a:r>
-          </a:p>
-          <a:p/>
-          <a:p>
-            <a:r>
-              <a:t>Recoja las respuestas del muro en los diez minutos de apertura y no las corrija: en el minuto 12, con la primera diapositiva, van a ver ellos mismos que casi todo lo que escribieron era un síntoma o una solución.</a:t>
+              <a:t>Si un equipo no puede ponerle una cifra a su problema, casi siempre es porque es demasiado grande. La salida es bajarlo hasta un lugar y un grupo de personas concretos.</a:t>
             </a:r>
           </a:p>
         </p:txBody>
@@ -882,31 +972,25 @@
           <a:lstStyle/>
           <a:p>
             <a:r>
-              <a:t>LAS TRES COSAS QUE SE CONFUNDEN Y CÓMO SE ESCRIBE UN PROBLEMA</a:t>
+              <a:t>LA PREGUNTA DE ENTRADA: LA SOLUCIÓN DISFRAZADA DE PROBLEMA</a:t>
             </a:r>
           </a:p>
           <a:p/>
           <a:p>
             <a:r>
-              <a:t>El síntoma es la señal visible: la queja, la demora, la pérdida. «La gente se queja del servicio» es un síntoma perfecto y un problema inservible, porque no dice de qué se queja ni qué no puede hacer. Los síntomas son útiles —son la pista que lleva al problema— pero atacar un síntoma produce soluciones cosméticas: si el síntoma es que la fila es larga, poner sillas mejora la fila y no toca el problema.</a:t>
+              <a:t>«En el barrio falta una app» es la frase que un profesor de primer semestre va a oír docenas de veces, y es el error más costoso del curso porque no se ve: parece un problema, tiene sujeto, tiene carencia, y sin embargo ya trae la solución adentro. Si el problema es «falta una app», entonces cualquier app resuelve el problema, y el proyecto se convierte en un ejercicio de construir algo sin saber para qué.</a:t>
             </a:r>
           </a:p>
           <a:p/>
           <a:p>
             <a:r>
-              <a:t>La solución disfrazada es la más peligrosa porque se ve profesional. «Falta un sistema», «hay que digitalizar el proceso», «queremos hacerlo con IA». Las tres eligen la herramienta antes de saber qué se va a resolver, y cierran el análisis: una vez que el equipo decidió que va a hacer una app con IA, va a interpretar cualquier hallazgo como confirmación.</a:t>
+              <a:t>La prueba que conviene enseñar es de una sola pregunta y sirve para toda la vida: ¿esto se podría resolver sin ninguna app? Si la respuesta es sí —y casi siempre lo es—, entonces el problema es otro y hay que buscarlo. Si el problema verdadero es que la gente no sabe si el libro que necesita está disponible, eso se puede resolver con una app, con una lista pegada en la puerta o con un número de WhatsApp. Que existan varias soluciones posibles es la señal de que el problema está bien escrito.</a:t>
             </a:r>
           </a:p>
           <a:p/>
           <a:p>
             <a:r>
-              <a:t>El juicio es la tercera y la más común en primer semestre: «no hay tecnología en el negocio», «el proceso es muy anticuado». Son opiniones sobre un estado de cosas y no dicen a quién le cuesta qué. Un negocio sin tecnología puede estar funcionando perfectamente; la falta de tecnología no es un problema por sí misma, y esta es una idea que hay que decir en voz alta en un curso de ingeniería de sistemas, porque va contra el reflejo del gremio.</a:t>
-            </a:r>
-          </a:p>
-          <a:p/>
-          <a:p>
-            <a:r>
-              <a:t>La fórmula del enunciado, y conviene dictarla para que la copien: *a QUIÉN le pasa QUÉ, con qué CONSECUENCIA*, más una cifra. Ejemplo bien escrito: «los usuarios de la biblioteca del barrio no saben si un libro está disponible antes de ir, así que hacen viajes en vano; de cada diez visitas, unas cuatro terminan sin préstamo». Tiene sujeto (los usuarios), tiene el qué (no saben la disponibilidad), tiene la consecuencia (viajes en vano) y tiene una cifra. Y no menciona ninguna tecnología, que es lo que deja el espacio para diseñar.</a:t>
+              <a:t>Recoja las respuestas del muro en los diez minutos de apertura y no las corrija: en el minuto 12, con la primera diapositiva, van a ver ellos mismos que casi todo lo que escribieron era un síntoma o una solución.</a:t>
             </a:r>
           </a:p>
         </p:txBody>
@@ -976,37 +1060,31 @@
           <a:lstStyle/>
           <a:p>
             <a:r>
-              <a:t>EL ÁRBOL DEL PROBLEMA: LA HERRAMIENTA QUE EVITA LAS SOLUCIONES COSMÉTICAS</a:t>
+              <a:t>LAS TRES COSAS QUE SE CONFUNDEN Y CÓMO SE ESCRIBE UN PROBLEMA</a:t>
             </a:r>
           </a:p>
           <a:p/>
           <a:p>
             <a:r>
-              <a:t>El árbol de problemas es una técnica vieja y muy usada en formulación de proyectos, y para primer semestre tiene una virtud enorme: es un dibujo, así que se puede hacer en quince minutos y se puede discutir señalando con el dedo.</a:t>
+              <a:t>El síntoma es la señal visible: la queja, la demora, la pérdida. «La gente se queja del servicio» es un síntoma perfecto y un problema inservible, porque no dice de qué se queja ni qué no puede hacer. Los síntomas son útiles —son la pista que lleva al problema— pero atacar un síntoma produce soluciones cosméticas: si el síntoma es que la fila es larga, poner sillas mejora la fila y no toca el problema.</a:t>
             </a:r>
           </a:p>
           <a:p/>
           <a:p>
             <a:r>
-              <a:t>Se dibuja con el problema en el tronco, una sola frase. Hacia arriba, las ramas son los efectos: lo que se ve, lo que la gente reporta, lo que duele. Hacia abajo, las raíces son las causas, y hay dos niveles: las causas directas (por qué ocurre el problema) y las causas de fondo (por qué ocurre cada causa). Se dibuja de arriba hacia abajo y se lee de abajo hacia arriba, porque así se ve la cadena completa: esta causa de fondo produce esta causa, que produce el problema, que produce estos efectos.</a:t>
+              <a:t>La solución disfrazada es la más peligrosa porque se ve profesional. «Falta un sistema», «hay que digitalizar el proceso», «queremos hacerlo con IA». Las tres eligen la herramienta antes de saber qué se va a resolver, y cierran el análisis: una vez que el equipo decidió que va a hacer una app con IA, va a interpretar cualquier hallazgo como confirmación.</a:t>
             </a:r>
           </a:p>
           <a:p/>
           <a:p>
             <a:r>
-              <a:t>La regla que hay que repetir hasta el cansancio: el proyecto ataca una causa, no una rama. Si el equipo diseña para los efectos, produce algo que alivia la molestia y deja el problema intacto. Y la segunda regla, práctica: dos o tres causas directas, no diez. Un árbol con diez raíces no es un análisis, es una lista de todo lo que se les ocurrió, y con eso no se puede decidir.</a:t>
+              <a:t>El juicio es la tercera y la más común en primer semestre: «no hay tecnología en el negocio», «el proceso es muy anticuado». Son opiniones sobre un estado de cosas y no dicen a quién le cuesta qué. Un negocio sin tecnología puede estar funcionando perfectamente; la falta de tecnología no es un problema por sí misma, y esta es una idea que hay que decir en voz alta en un curso de ingeniería de sistemas, porque va contra el reflejo del gremio.</a:t>
             </a:r>
           </a:p>
           <a:p/>
           <a:p>
             <a:r>
-              <a:t>El momento de aprendizaje real ocurre en el segundo nivel de raíces, y conviene provocarlo en las salas: cuando el equipo baja de «no hay un registro actualizado» a «el registro se actualiza a mano al final del día y nadie tiene tiempo», ahí aparece por primera vez algo que un estudiante de primer semestre puede efectivamente cambiar en un semestre. Antes de ese nivel, todo se ve demasiado grande.</a:t>
-            </a:r>
-          </a:p>
-          <a:p/>
-          <a:p>
-            <a:r>
-              <a:t>Un detalle metodológico que ahorra discusiones: si una causa no se puede afectar con nada que el equipo pueda hacer —el presupuesto del municipio, la cultura ciudadana, la ley—, se dibuja igual, pero se marca. Se llama restricción y no es una derrota: es información. Un proyecto que sabe qué no puede cambiar es más serio que uno que promete cambiarlo todo.</a:t>
+              <a:t>La fórmula del enunciado, y conviene dictarla para que la copien: *a QUIÉN le pasa QUÉ, con qué CONSECUENCIA*, más una cifra. Ejemplo bien escrito: «los usuarios de la biblioteca del barrio no saben si un libro está disponible antes de ir, así que hacen viajes en vano; de cada diez visitas, unas cuatro terminan sin préstamo». Tiene sujeto (los usuarios), tiene el qué (no saben la disponibilidad), tiene la consecuencia (viajes en vano) y tiene una cifra. Y no menciona ninguna tecnología, que es lo que deja el espacio para diseñar.</a:t>
             </a:r>
           </a:p>
         </p:txBody>
@@ -1076,37 +1154,37 @@
           <a:lstStyle/>
           <a:p>
             <a:r>
-              <a:t>LA LÍNEA BASE Y LOS CUATRO CRITERIOS DE VIABILIDAD</a:t>
+              <a:t>EL ÁRBOL DEL PROBLEMA: LA HERRAMIENTA QUE EVITA LAS SOLUCIONES COSMÉTICAS</a:t>
             </a:r>
           </a:p>
           <a:p/>
           <a:p>
             <a:r>
-              <a:t>La línea base es la exigencia que más resistencia genera y la que más valor tiene. Es una cifra sobre el problema como está hoy, antes de que el equipo toque nada, y su función es simple: sin ella no hay forma de saber si el proyecto sirvió. En la Clase 16 el informe final va a pedir comparar, y un equipo sin línea base solo puede escribir «mejoramos el proceso», que es una afirmación vacía.</a:t>
+              <a:t>El árbol de problemas es una técnica vieja y muy usada en formulación de proyectos, y para primer semestre tiene una virtud enorme: es un dibujo, así que se puede hacer en quince minutos y se puede discutir señalando con el dedo.</a:t>
             </a:r>
           </a:p>
           <a:p/>
           <a:p>
             <a:r>
-              <a:t>Hay que quitarles de encima la idea de que medir requiere presupuesto o estadística. La línea base de un proyecto de este curso se consigue de tres maneras: preguntando a la persona que hace el trabajo, contando durante una semana, o midiendo con un cronómetro un caso. «La secretaria dedica unas dos horas diarias a confirmar citas por teléfono, según lo que ella misma estima» es una línea base perfectamente aceptable, siempre que se diga que es una estimación y de quién viene. La regla de honestidad es la de la sesión 5, aplicada de nuevo: cifra con método y fecha, o no va.</a:t>
+              <a:t>Se dibuja con el problema en el tronco, una sola frase. Hacia arriba, las ramas son los efectos: lo que se ve, lo que la gente reporta, lo que duele. Hacia abajo, las raíces son las causas, y hay dos niveles: las causas directas (por qué ocurre el problema) y las causas de fondo (por qué ocurre cada causa). Se dibuja de arriba hacia abajo y se lee de abajo hacia arriba, porque así se ve la cadena completa: esta causa de fondo produce esta causa, que produce el problema, que produce estos efectos.</a:t>
             </a:r>
           </a:p>
           <a:p/>
           <a:p>
             <a:r>
-              <a:t>Y hay un diagnóstico gratis escondido en esta exigencia: si el problema no admite ninguna cifra, está mal delimitado, y casi siempre es porque es demasiado grande. «La deserción estudiantil» no se puede medir con lo que tiene un equipo de primer semestre; «cuántos de los 30 compañeros de mi grupo no saben en qué semestre pierden el beneficio de la beca» sí. Bajar el problema hasta que se pueda contar algo es la manera más rápida de volverlo abordable.</a:t>
+              <a:t>La regla que hay que repetir hasta el cansancio: el proyecto ataca una causa, no una rama. Si el equipo diseña para los efectos, produce algo que alivia la molestia y deja el problema intacto. Y la segunda regla, práctica: dos o tres causas directas, no diez. Un árbol con diez raíces no es un análisis, es una lista de todo lo que se les ocurrió, y con eso no se puede decidir.</a:t>
             </a:r>
           </a:p>
           <a:p/>
           <a:p>
             <a:r>
-              <a:t>Los cuatro criterios son un filtro y hay que aplicarlos en voz alta a cada problema propuesto, uno por uno. *Abordable* con navegador y herramientas gratuitas: nada que exija comprar equipos, contratar servicios de pago o conseguir permisos institucionales que no van a llegar en un semestre. *Medible*: existe la cifra. *Con acceso a los actores*: pueden hablar esta semana con alguien que vive el problema, sin trámites; este criterio es el que descarta más propuestas y hay que ser firme, porque un proyecto sobre una entidad a la que nadie puede preguntarle nada termina siendo un ejercicio de imaginación con aspecto de proyecto. *Con dueño del problema*: hay una persona o un grupo concreto al que le duele y que reconocería la mejora; si el afectado es «la sociedad», no hay a quién mostrarle el resultado en la Clase 15.</a:t>
+              <a:t>El momento de aprendizaje real ocurre en el segundo nivel de raíces, y conviene provocarlo en las salas: cuando el equipo baja de «no hay un registro actualizado» a «el registro se actualiza a mano al final del día y nadie tiene tiempo», ahí aparece por primera vez algo que un estudiante de primer semestre puede efectivamente cambiar en un semestre. Antes de ese nivel, todo se ve demasiado grande.</a:t>
             </a:r>
           </a:p>
           <a:p/>
           <a:p>
             <a:r>
-              <a:t>Una advertencia sobre el ánimo del grupo: aplicar estos criterios va a matar algunas ideas ambiciosas y eso frustra. Vale la pena decirles por qué se hace: es mejor resolver algo pequeño de verdad que simular algo grande, y en un primer semestre el objetivo es que aprendan a formular y a demostrar, no que salven la ciudad. Un proyecto pequeño y verificable saca mejor nota que uno grandioso e imposible, y hay que decirlo hoy, antes de que se enamoren de la idea.</a:t>
+              <a:t>Un detalle metodológico que ahorra discusiones: si una causa no se puede afectar con nada que el equipo pueda hacer —el presupuesto del municipio, la cultura ciudadana, la ley—, se dibuja igual, pero se marca. Se llama restricción y no es una derrota: es información. Un proyecto que sabe qué no puede cambiar es más serio que uno que promete cambiarlo todo.</a:t>
             </a:r>
           </a:p>
         </p:txBody>
@@ -4737,14 +4815,83 @@
       </p:sp>
       <p:sp>
         <p:nvSpPr>
-          <p:cNvPr id="5" name="TextBox 4"/>
+          <p:cNvPr id="5" name="Rounded Rectangle 4"/>
+          <p:cNvSpPr/>
+          <p:nvPr/>
+        </p:nvSpPr>
+        <p:spPr>
+          <a:xfrm>
+            <a:off x="5797149" y="1343926"/>
+            <a:ext cx="6010497" cy="4837658"/>
+          </a:xfrm>
+          <a:prstGeom prst="roundRect">
+            <a:avLst>
+              <a:gd name="adj" fmla="val 4000"/>
+            </a:avLst>
+          </a:prstGeom>
+          <a:solidFill>
+            <a:srgbClr val="E8EEF4"/>
+          </a:solidFill>
+          <a:ln>
+            <a:noFill/>
+          </a:ln>
+        </p:spPr>
+        <p:style>
+          <a:lnRef idx="1">
+            <a:schemeClr val="accent1"/>
+          </a:lnRef>
+          <a:fillRef idx="3">
+            <a:schemeClr val="accent1"/>
+          </a:fillRef>
+          <a:effectRef idx="2">
+            <a:schemeClr val="accent1"/>
+          </a:effectRef>
+          <a:fontRef idx="minor">
+            <a:schemeClr val="lt1"/>
+          </a:fontRef>
+        </p:style>
+        <p:txBody>
+          <a:bodyPr rtlCol="0" anchor="ctr"/>
+          <a:lstStyle/>
+          <a:p>
+            <a:pPr algn="ctr"/>
+          </a:p>
+        </p:txBody>
+      </p:sp>
+      <p:pic>
+        <p:nvPicPr>
+          <p:cNvPr id="6" name="Picture 5" descr="ilus-linea-celular-paso1.png"/>
+          <p:cNvPicPr>
+            <a:picLocks noChangeAspect="1"/>
+          </p:cNvPicPr>
+          <p:nvPr/>
+        </p:nvPicPr>
+        <p:blipFill>
+          <a:blip r:embed="rId2"/>
+          <a:stretch>
+            <a:fillRect/>
+          </a:stretch>
+        </p:blipFill>
+        <p:spPr>
+          <a:xfrm>
+            <a:off x="5870301" y="1417078"/>
+            <a:ext cx="5864193" cy="4691354"/>
+          </a:xfrm>
+          <a:prstGeom prst="rect">
+            <a:avLst/>
+          </a:prstGeom>
+        </p:spPr>
+      </p:pic>
+      <p:sp>
+        <p:nvSpPr>
+          <p:cNvPr id="7" name="TextBox 6"/>
           <p:cNvSpPr txBox="1"/>
           <p:nvPr/>
         </p:nvSpPr>
         <p:spPr>
           <a:xfrm>
-            <a:off x="457200" y="1170432"/>
-            <a:ext cx="11277295" cy="5230368"/>
+            <a:off x="457200" y="1353312"/>
+            <a:ext cx="5093061" cy="5047488"/>
           </a:xfrm>
           <a:prstGeom prst="rect">
             <a:avLst/>
@@ -4892,61 +5039,11 @@
               <a:t>.</a:t>
             </a:r>
           </a:p>
-          <a:p>
-            <a:pPr>
-              <a:spcAft>
-                <a:spcPts val="800"/>
-              </a:spcAft>
-            </a:pPr>
-            <a:r>
-              <a:rPr sz="2000" b="0" i="0">
-                <a:solidFill>
-                  <a:srgbClr val="333333"/>
-                </a:solidFill>
-                <a:latin typeface="Calibri"/>
-              </a:rPr>
-              <a:t>–   Al final del semestre se mide </a:t>
-            </a:r>
-            <a:r>
-              <a:rPr sz="2000" b="1" i="0">
-                <a:solidFill>
-                  <a:srgbClr val="333333"/>
-                </a:solidFill>
-                <a:latin typeface="Calibri"/>
-              </a:rPr>
-              <a:t>igual</a:t>
-            </a:r>
-            <a:r>
-              <a:rPr sz="2000" b="0" i="0">
-                <a:solidFill>
-                  <a:srgbClr val="333333"/>
-                </a:solidFill>
-                <a:latin typeface="Calibri"/>
-              </a:rPr>
-              <a:t> y se compara. Así se sabe si el proyecto sirvió.</a:t>
-            </a:r>
-          </a:p>
-          <a:p>
-            <a:pPr>
-              <a:spcAft>
-                <a:spcPts val="800"/>
-              </a:spcAft>
-            </a:pPr>
-            <a:r>
-              <a:rPr sz="2000" b="0" i="0">
-                <a:solidFill>
-                  <a:srgbClr val="333333"/>
-                </a:solidFill>
-                <a:latin typeface="Calibri"/>
-              </a:rPr>
-              <a:t>–   Sin esa cifra, «mejoramos la atención» no se puede comprobar.</a:t>
-            </a:r>
-          </a:p>
-        </p:txBody>
-      </p:sp>
-      <p:sp>
-        <p:nvSpPr>
-          <p:cNvPr id="6" name="TextBox 5"/>
+        </p:txBody>
+      </p:sp>
+      <p:sp>
+        <p:nvSpPr>
+          <p:cNvPr id="8" name="TextBox 7"/>
           <p:cNvSpPr txBox="1"/>
           <p:nvPr/>
         </p:nvSpPr>
@@ -10256,9 +10353,33 @@
           </a:prstGeom>
         </p:spPr>
       </p:pic>
-      <p:sp>
-        <p:nvSpPr>
-          <p:cNvPr id="18" name="TextBox 17"/>
+      <p:pic>
+        <p:nvPicPr>
+          <p:cNvPr id="11" name="Picture 10" descr="arbol-problema-paso5.png"/>
+          <p:cNvPicPr>
+            <a:picLocks noChangeAspect="1"/>
+          </p:cNvPicPr>
+          <p:nvPr/>
+        </p:nvPicPr>
+        <p:blipFill>
+          <a:blip r:embed="rId6"/>
+          <a:stretch>
+            <a:fillRect/>
+          </a:stretch>
+        </p:blipFill>
+        <p:spPr>
+          <a:xfrm>
+            <a:off x="6007763" y="1472184"/>
+            <a:ext cx="5589270" cy="4471416"/>
+          </a:xfrm>
+          <a:prstGeom prst="rect">
+            <a:avLst/>
+          </a:prstGeom>
+        </p:spPr>
+      </p:pic>
+      <p:sp>
+        <p:nvSpPr>
+          <p:cNvPr id="23" name="TextBox 22"/>
           <p:cNvSpPr txBox="1"/>
           <p:nvPr/>
         </p:nvSpPr>
@@ -10293,7 +10414,7 @@
       </p:sp>
       <p:sp>
         <p:nvSpPr>
-          <p:cNvPr id="19" name="TextBox 18"/>
+          <p:cNvPr id="24" name="TextBox 23"/>
           <p:cNvSpPr txBox="1"/>
           <p:nvPr/>
         </p:nvSpPr>
@@ -10461,7 +10582,7 @@
       </p:sp>
       <p:sp>
         <p:nvSpPr>
-          <p:cNvPr id="20" name="TextBox 19"/>
+          <p:cNvPr id="25" name="TextBox 24"/>
           <p:cNvSpPr txBox="1"/>
           <p:nvPr/>
         </p:nvSpPr>
@@ -10666,6 +10787,59 @@
                       </p:childTnLst>
                     </p:cTn>
                   </p:par>
+                  <p:par>
+                    <p:cTn id="18" fill="hold">
+                      <p:stCondLst>
+                        <p:cond delay="indefinite"/>
+                      </p:stCondLst>
+                      <p:childTnLst>
+                        <p:par>
+                          <p:cTn id="19" fill="hold">
+                            <p:stCondLst>
+                              <p:cond delay="0"/>
+                            </p:stCondLst>
+                            <p:childTnLst>
+                              <p:par>
+                                <p:cTn id="20" presetID="10" presetClass="entr" presetSubtype="0" fill="hold" nodeType="clickEffect">
+                                  <p:stCondLst>
+                                    <p:cond delay="0"/>
+                                  </p:stCondLst>
+                                  <p:childTnLst>
+                                    <p:set>
+                                      <p:cBhvr>
+                                        <p:cTn id="21" dur="1" fill="hold">
+                                          <p:stCondLst>
+                                            <p:cond delay="0"/>
+                                          </p:stCondLst>
+                                        </p:cTn>
+                                        <p:tgtEl>
+                                          <p:spTgt spid="11"/>
+                                        </p:tgtEl>
+                                        <p:attrNameLst>
+                                          <p:attrName>style.visibility</p:attrName>
+                                        </p:attrNameLst>
+                                      </p:cBhvr>
+                                      <p:to>
+                                        <p:strVal val="visible"/>
+                                      </p:to>
+                                    </p:set>
+                                    <p:animEffect transition="in" filter="fade">
+                                      <p:cBhvr>
+                                        <p:cTn id="22" dur="450"/>
+                                        <p:tgtEl>
+                                          <p:spTgt spid="11"/>
+                                        </p:tgtEl>
+                                      </p:cBhvr>
+                                    </p:animEffect>
+                                  </p:childTnLst>
+                                </p:cTn>
+                              </p:par>
+                            </p:childTnLst>
+                          </p:cTn>
+                        </p:par>
+                      </p:childTnLst>
+                    </p:cTn>
+                  </p:par>
                 </p:childTnLst>
               </p:cTn>
               <p:prevCondLst>
@@ -11730,14 +11904,83 @@
       </p:sp>
       <p:sp>
         <p:nvSpPr>
-          <p:cNvPr id="5" name="TextBox 4"/>
+          <p:cNvPr id="5" name="Rounded Rectangle 4"/>
+          <p:cNvSpPr/>
+          <p:nvPr/>
+        </p:nvSpPr>
+        <p:spPr>
+          <a:xfrm>
+            <a:off x="5797149" y="1343926"/>
+            <a:ext cx="6010497" cy="4837658"/>
+          </a:xfrm>
+          <a:prstGeom prst="roundRect">
+            <a:avLst>
+              <a:gd name="adj" fmla="val 4000"/>
+            </a:avLst>
+          </a:prstGeom>
+          <a:solidFill>
+            <a:srgbClr val="E8EEF4"/>
+          </a:solidFill>
+          <a:ln>
+            <a:noFill/>
+          </a:ln>
+        </p:spPr>
+        <p:style>
+          <a:lnRef idx="1">
+            <a:schemeClr val="accent1"/>
+          </a:lnRef>
+          <a:fillRef idx="3">
+            <a:schemeClr val="accent1"/>
+          </a:fillRef>
+          <a:effectRef idx="2">
+            <a:schemeClr val="accent1"/>
+          </a:effectRef>
+          <a:fontRef idx="minor">
+            <a:schemeClr val="lt1"/>
+          </a:fontRef>
+        </p:style>
+        <p:txBody>
+          <a:bodyPr rtlCol="0" anchor="ctr"/>
+          <a:lstStyle/>
+          <a:p>
+            <a:pPr algn="ctr"/>
+          </a:p>
+        </p:txBody>
+      </p:sp>
+      <p:pic>
+        <p:nvPicPr>
+          <p:cNvPr id="6" name="Picture 5" descr="ilus-linea-base-paso1.png"/>
+          <p:cNvPicPr>
+            <a:picLocks noChangeAspect="1"/>
+          </p:cNvPicPr>
+          <p:nvPr/>
+        </p:nvPicPr>
+        <p:blipFill>
+          <a:blip r:embed="rId2"/>
+          <a:stretch>
+            <a:fillRect/>
+          </a:stretch>
+        </p:blipFill>
+        <p:spPr>
+          <a:xfrm>
+            <a:off x="5870301" y="1417078"/>
+            <a:ext cx="5864193" cy="4691354"/>
+          </a:xfrm>
+          <a:prstGeom prst="rect">
+            <a:avLst/>
+          </a:prstGeom>
+        </p:spPr>
+      </p:pic>
+      <p:sp>
+        <p:nvSpPr>
+          <p:cNvPr id="7" name="TextBox 6"/>
           <p:cNvSpPr txBox="1"/>
           <p:nvPr/>
         </p:nvSpPr>
         <p:spPr>
           <a:xfrm>
-            <a:off x="457200" y="1170432"/>
-            <a:ext cx="11277295" cy="5230368"/>
+            <a:off x="457200" y="1353312"/>
+            <a:ext cx="5093061" cy="5047488"/>
           </a:xfrm>
           <a:prstGeom prst="rect">
             <a:avLst/>
@@ -11798,7 +12041,7 @@
                 </a:solidFill>
                 <a:latin typeface="Calibri"/>
               </a:rPr>
-              <a:t>, antes de que ustedes toquen nada. «La secretaria dedica unas 2 horas diarias a confirmar citas por teléfono.» «De 40 libros prestados al mes, unos 12 vuelven tarde.»</a:t>
+              <a:t>, antes de que ustedes toquen nada.</a:t>
             </a:r>
           </a:p>
           <a:p>
@@ -11850,7 +12093,7 @@
                 </a:solidFill>
                 <a:latin typeface="Calibri"/>
               </a:rPr>
-              <a:t>. Un informe final que dice «mejoramos el proceso» no demuestra nada; uno que dice «pasó de 2 horas a 20 minutos» sí. En la Clase 16 se les va a pedir exactamente eso.</a:t>
+              <a:t>.</a:t>
             </a:r>
           </a:p>
           <a:p>
@@ -11884,25 +12127,7 @@
                 </a:solidFill>
                 <a:latin typeface="Calibri"/>
               </a:rPr>
-              <a:t> Preguntando, contando y midiendo con un cronómetro. Tres preguntas a la persona que hace el trabajo, un conteo de una semana, o el tiempo de un caso medido a mano. </a:t>
-            </a:r>
-            <a:r>
-              <a:rPr sz="2000" b="1" i="0">
-                <a:solidFill>
-                  <a:srgbClr val="333333"/>
-                </a:solidFill>
-                <a:latin typeface="Calibri"/>
-              </a:rPr>
-              <a:t>No hace falta una encuesta científica</a:t>
-            </a:r>
-            <a:r>
-              <a:rPr sz="2000" b="0" i="0">
-                <a:solidFill>
-                  <a:srgbClr val="333333"/>
-                </a:solidFill>
-                <a:latin typeface="Calibri"/>
-              </a:rPr>
-              <a:t>: hace falta un número honesto y decir cómo se obtuvo.</a:t>
+              <a:t> Preguntando, contando y midiendo con un cronómetro.</a:t>
             </a:r>
           </a:p>
           <a:p>
@@ -11954,48 +12179,14 @@
                 </a:solidFill>
                 <a:latin typeface="Calibri"/>
               </a:rPr>
-              <a:t>. Si es una estimación, se escribe «estimado». Una cifra inventada es peor que ninguna, porque el resto del proyecto se apoya en ella.</a:t>
-            </a:r>
-          </a:p>
-          <a:p>
-            <a:pPr>
-              <a:spcAft>
-                <a:spcPts val="800"/>
-              </a:spcAft>
-            </a:pPr>
-            <a:r>
-              <a:rPr sz="2000" b="0" i="0">
-                <a:solidFill>
-                  <a:srgbClr val="333333"/>
-                </a:solidFill>
-                <a:latin typeface="Calibri"/>
-              </a:rPr>
-              <a:t>–   </a:t>
-            </a:r>
-            <a:r>
-              <a:rPr sz="2000" b="1" i="0">
-                <a:solidFill>
-                  <a:srgbClr val="333333"/>
-                </a:solidFill>
-                <a:latin typeface="Calibri"/>
-              </a:rPr>
-              <a:t>Si el problema no tiene cifra posible</a:t>
-            </a:r>
-            <a:r>
-              <a:rPr sz="2000" b="0" i="0">
-                <a:solidFill>
-                  <a:srgbClr val="333333"/>
-                </a:solidFill>
-                <a:latin typeface="Calibri"/>
-              </a:rPr>
-              <a:t>, es señal de que está mal delimitado: casi siempre es demasiado grande. Bájenlo hasta que se pueda contar algo.</a:t>
-            </a:r>
-          </a:p>
-        </p:txBody>
-      </p:sp>
-      <p:sp>
-        <p:nvSpPr>
-          <p:cNvPr id="6" name="TextBox 5"/>
+              <a:t>.</a:t>
+            </a:r>
+          </a:p>
+        </p:txBody>
+      </p:sp>
+      <p:sp>
+        <p:nvSpPr>
+          <p:cNvPr id="8" name="TextBox 7"/>
           <p:cNvSpPr txBox="1"/>
           <p:nvPr/>
         </p:nvSpPr>

--- a/Introduccion a la Ingenieria/Clases/Clase 6 - Analisis de problemas tecnologicos del entorno/Presentacion.pptx
+++ b/Introduccion a la Ingenieria/Clases/Clase 6 - Analisis de problemas tecnologicos del entorno/Presentacion.pptx
@@ -1066,7 +1066,7 @@
           <a:p/>
           <a:p>
             <a:r>
-              <a:t>El síntoma es la señal visible: la queja, la demora, la pérdida. «La gente se queja del servicio» es un síntoma perfecto y un problema inservible, porque no dice de qué se queja ni qué no puede hacer. Los síntomas son útiles —son la pista que lleva al problema— pero atacar un síntoma produce soluciones cosméticas: si el síntoma es que la fila es larga, poner sillas mejora la fila y no toca el problema.</a:t>
+              <a:t>El síntoma es la señal visible: la queja, la demora, la pérdida. «La gente se queja del servicio» es un síntoma perfecto y un problema inservible, porque no dice de qué se queja ni qué no puede hacer. Los síntomas son útiles —son la pista que lleva al problema— pero atacar un síntoma produce soluciones superficiales: si el síntoma es que la fila es larga, poner sillas mejora la fila y no toca el problema.</a:t>
             </a:r>
           </a:p>
           <a:p/>
@@ -1154,7 +1154,7 @@
           <a:lstStyle/>
           <a:p>
             <a:r>
-              <a:t>EL ÁRBOL DEL PROBLEMA: LA HERRAMIENTA QUE EVITA LAS SOLUCIONES COSMÉTICAS</a:t>
+              <a:t>EL ÁRBOL DEL PROBLEMA: LA HERRAMIENTA QUE EVITA LAS SOLUCIONES SUPERFICIALES</a:t>
             </a:r>
           </a:p>
           <a:p/>
@@ -10207,7 +10207,7 @@
                 </a:solidFill>
                 <a:latin typeface="Calibri"/>
               </a:rPr>
-              <a:t>Se dibuja de arriba hacia abajo y se lee de abajo hacia arriba, como está aquí. Regla: el proyecto ataca una CAUSA, no una rama — quien diseña para los efectos produce una solución cosmética</a:t>
+              <a:t>Se dibuja de arriba hacia abajo y se lee de abajo hacia arriba, como está aquí. Regla: el proyecto ataca una CAUSA, no una rama — quien diseña para los efectos produce una solución superficial</a:t>
             </a:r>
           </a:p>
         </p:txBody>
